--- a/slides/09 Plants vs. Zombies.pptx
+++ b/slides/09 Plants vs. Zombies.pptx
@@ -31,6 +31,7 @@
     <p:sldId id="280" r:id="rId30"/>
     <p:sldId id="292" r:id="rId42"/>
     <p:sldId id="293" r:id="rId52"/>
+    <p:sldId id="313" r:id="rId40"/>
     <p:sldId id="294" r:id="rId53"/>
     <p:sldId id="296" r:id="rId55"/>
   </p:sldIdLst>
@@ -829,6 +830,250 @@
 </p:notes>
 </file>
 
+<file path=ppt/notesSlides/notesSlide10.xml><?xml version="1.0" encoding="utf-8"?>
+<p:notes xmlns:a="http://schemas.openxmlformats.org/drawingml/2006/main" xmlns:p="http://schemas.openxmlformats.org/presentationml/2006/main" xmlns:r="http://schemas.openxmlformats.org/officeDocument/2006/relationships">
+  <p:cSld>
+    <p:spTree>
+      <p:nvGrpSpPr>
+        <p:cNvPr id="1" name=""/>
+        <p:cNvGrpSpPr/>
+        <p:nvPr/>
+      </p:nvGrpSpPr>
+      <p:grpSpPr>
+        <a:xfrm>
+          <a:off x="0" y="0"/>
+          <a:ext cx="0" cy="0"/>
+          <a:chOff x="0" y="0"/>
+          <a:chExt cx="0" cy="0"/>
+        </a:xfrm>
+      </p:grpSpPr>
+      <p:sp>
+        <p:nvSpPr>
+          <p:cNvPr id="2" name="Slide Image Placeholder 1"/>
+          <p:cNvSpPr>
+            <a:spLocks noGrp="1"/>
+          </p:cNvSpPr>
+          <p:nvPr>
+            <p:ph type="sldImg" idx="2"/>
+          </p:nvPr>
+        </p:nvSpPr>
+        <p:spPr/>
+      </p:sp>
+      <p:sp>
+        <p:nvSpPr>
+          <p:cNvPr id="3" name="Notes Placeholder 2"/>
+          <p:cNvSpPr>
+            <a:spLocks noGrp="1"/>
+          </p:cNvSpPr>
+          <p:nvPr>
+            <p:ph type="body" idx="1"/>
+          </p:nvPr>
+        </p:nvSpPr>
+        <p:spPr/>
+        <p:txBody>
+          <a:bodyPr/>
+          <a:lstStyle/>
+          <a:p>
+            <a:r>
+              <a:t>Talking points:</a:t>
+            </a:r>
+          </a:p>
+          <a:p>
+            <a:r>
+              <a:t>- Finding each other takes code</a:t>
+            </a:r>
+          </a:p>
+          <a:p>
+            <a:r>
+              <a:t>  - Get&lt;Eater&gt;() searches a list, and may return null</a:t>
+            </a:r>
+          </a:p>
+          <a:p>
+            <a:r>
+              <a:t>- Order matters</a:t>
+            </a:r>
+          </a:p>
+          <a:p>
+            <a:r>
+              <a:t>  - Components update and draw in the order they were added</a:t>
+            </a:r>
+          </a:p>
+          <a:p>
+            <a:r>
+              <a:t>- Where does a rule go?</a:t>
+            </a:r>
+          </a:p>
+          <a:p>
+            <a:r>
+              <a:t>  - A pea hits a zombie: the pea’s rule, or the zombie’s?</a:t>
+            </a:r>
+          </a:p>
+          <a:p>
+            <a:r>
+              <a:t>  - Geometry Wars moves such rules into systems</a:t>
+            </a:r>
+          </a:p>
+        </p:txBody>
+      </p:sp>
+    </p:spTree>
+  </p:cSld>
+  <p:clrMapOvr>
+    <a:masterClrMapping/>
+  </p:clrMapOvr>
+</p:notes>
+</file>
+
+<file path=ppt/notesSlides/notesSlide11.xml><?xml version="1.0" encoding="utf-8"?>
+<p:notes xmlns:a="http://schemas.openxmlformats.org/drawingml/2006/main" xmlns:p="http://schemas.openxmlformats.org/presentationml/2006/main" xmlns:r="http://schemas.openxmlformats.org/officeDocument/2006/relationships">
+  <p:cSld>
+    <p:spTree>
+      <p:nvGrpSpPr>
+        <p:cNvPr id="1" name=""/>
+        <p:cNvGrpSpPr/>
+        <p:nvPr/>
+      </p:nvGrpSpPr>
+      <p:grpSpPr>
+        <a:xfrm>
+          <a:off x="0" y="0"/>
+          <a:ext cx="0" cy="0"/>
+          <a:chOff x="0" y="0"/>
+          <a:chExt cx="0" cy="0"/>
+        </a:xfrm>
+      </p:grpSpPr>
+      <p:sp>
+        <p:nvSpPr>
+          <p:cNvPr id="2" name="Slide Image Placeholder 1"/>
+          <p:cNvSpPr>
+            <a:spLocks noGrp="1"/>
+          </p:cNvSpPr>
+          <p:nvPr>
+            <p:ph type="sldImg" idx="2"/>
+          </p:nvPr>
+        </p:nvSpPr>
+        <p:spPr/>
+      </p:sp>
+      <p:sp>
+        <p:nvSpPr>
+          <p:cNvPr id="3" name="Notes Placeholder 2"/>
+          <p:cNvSpPr>
+            <a:spLocks noGrp="1"/>
+          </p:cNvSpPr>
+          <p:nvPr>
+            <p:ph type="body" idx="1"/>
+          </p:nvPr>
+        </p:nvSpPr>
+        <p:spPr/>
+        <p:txBody>
+          <a:bodyPr/>
+          <a:lstStyle/>
+          <a:p>
+            <a:r>
+              <a:t>Talking points:</a:t>
+            </a:r>
+          </a:p>
+          <a:p>
+            <a:r>
+              <a:t>- Prototype (Angry Birds): copy a configured object</a:t>
+            </a:r>
+          </a:p>
+          <a:p>
+            <a:r>
+              <a:t>  - Shared data is copied into every clone</a:t>
+            </a:r>
+          </a:p>
+          <a:p>
+            <a:r>
+              <a:t>  - Good for “make more like this one”</a:t>
+            </a:r>
+          </a:p>
+          <a:p>
+            <a:r>
+              <a:t>- Type Object: a separate type class creates instances</a:t>
+            </a:r>
+          </a:p>
+          <a:p>
+            <a:r>
+              <a:t>  - Shared data is kept once, in the type</a:t>
+            </a:r>
+          </a:p>
+          <a:p>
+            <a:r>
+              <a:t>  - An instance can refer to its type</a:t>
+            </a:r>
+          </a:p>
+          <a:p>
+            <a:r>
+              <a:t>  - Good for kinds with their own data and rules</a:t>
+            </a:r>
+          </a:p>
+        </p:txBody>
+      </p:sp>
+    </p:spTree>
+  </p:cSld>
+  <p:clrMapOvr>
+    <a:masterClrMapping/>
+  </p:clrMapOvr>
+</p:notes>
+</file>
+
+<file path=ppt/notesSlides/notesSlide12.xml><?xml version="1.0" encoding="utf-8"?>
+<p:notes xmlns:a="http://schemas.openxmlformats.org/drawingml/2006/main" xmlns:p="http://schemas.openxmlformats.org/presentationml/2006/main" xmlns:r="http://schemas.openxmlformats.org/officeDocument/2006/relationships">
+  <p:cSld>
+    <p:spTree>
+      <p:nvGrpSpPr>
+        <p:cNvPr id="1" name=""/>
+        <p:cNvGrpSpPr/>
+        <p:nvPr/>
+      </p:nvGrpSpPr>
+      <p:grpSpPr>
+        <a:xfrm>
+          <a:off x="0" y="0"/>
+          <a:ext cx="0" cy="0"/>
+          <a:chOff x="0" y="0"/>
+          <a:chExt cx="0" cy="0"/>
+        </a:xfrm>
+      </p:grpSpPr>
+      <p:sp>
+        <p:nvSpPr>
+          <p:cNvPr id="2" name="Slide Image Placeholder 1"/>
+          <p:cNvSpPr>
+            <a:spLocks noGrp="1"/>
+          </p:cNvSpPr>
+          <p:nvPr>
+            <p:ph type="sldImg" idx="2"/>
+          </p:nvPr>
+        </p:nvSpPr>
+        <p:spPr/>
+      </p:sp>
+      <p:sp>
+        <p:nvSpPr>
+          <p:cNvPr id="3" name="Notes Placeholder 2"/>
+          <p:cNvSpPr>
+            <a:spLocks noGrp="1"/>
+          </p:cNvSpPr>
+          <p:nvPr>
+            <p:ph type="body" idx="1"/>
+          </p:nvPr>
+        </p:nvSpPr>
+        <p:spPr/>
+        <p:txBody>
+          <a:bodyPr/>
+          <a:lstStyle/>
+          <a:p>
+            <a:r>
+              <a:t>Ask, let them answer in pairs for a minute, then take a few answers. These are the site’s Check yourself questions.</a:t>
+            </a:r>
+          </a:p>
+        </p:txBody>
+      </p:sp>
+    </p:spTree>
+  </p:cSld>
+  <p:clrMapOvr>
+    <a:masterClrMapping/>
+  </p:clrMapOvr>
+</p:notes>
+</file>
+
 <file path=ppt/notesSlides/notesSlide2.xml><?xml version="1.0" encoding="utf-8"?>
 <p:notes xmlns:a="http://schemas.openxmlformats.org/drawingml/2006/main" xmlns:r="http://schemas.openxmlformats.org/officeDocument/2006/relationships" xmlns:mc="http://schemas.openxmlformats.org/markup-compatibility/2006" xmlns:mv="urn:schemas-microsoft-com:mac:vml" xmlns:p="http://schemas.openxmlformats.org/presentationml/2006/main" xmlns:c="http://schemas.openxmlformats.org/drawingml/2006/chart" xmlns:dgm="http://schemas.openxmlformats.org/drawingml/2006/diagram" xmlns:o="urn:schemas-microsoft-com:office:office" xmlns:v="urn:schemas-microsoft-com:vml" xmlns:pvml="urn:schemas-microsoft-com:office:powerpoint" xmlns:com="http://schemas.openxmlformats.org/drawingml/2006/compatibility" xmlns:p14="http://schemas.microsoft.com/office/powerpoint/2010/main" xmlns:p15="http://schemas.microsoft.com/office/powerpoint/2012/main" xmlns:ahyp="http://schemas.microsoft.com/office/drawing/2018/hyperlinkcolor" showMasterPhAnim="0" showMasterSp="0">
   <p:cSld>
@@ -1300,19 +1545,298 @@
           </a:bodyPr>
           <a:lstStyle/>
           <a:p>
-            <a:pPr indent="0" lvl="0" marL="0" rtl="0" algn="l">
-              <a:spcBef>
-                <a:spcPts val="0"/>
-              </a:spcBef>
-              <a:spcAft>
-                <a:spcPts val="0"/>
-              </a:spcAft>
-              <a:buNone/>
-            </a:pPr>
-            <a:r>
-              <a:t/>
-            </a:r>
-            <a:endParaRPr/>
+            <a:r>
+              <a:t>Talking points:</a:t>
+            </a:r>
+          </a:p>
+          <a:p>
+            <a:r>
+              <a:t>- All Source code for today’s game can be found here:</a:t>
+            </a:r>
+          </a:p>
+          <a:p>
+            <a:r>
+              <a:t>  - github.com/Metamate/gar-games (folder 09-plants-vs-zombies)</a:t>
+            </a:r>
+          </a:p>
+          <a:p>
+            <a:r>
+              <a:t>- The game is built up in steps: Pvz0 → Pvz4</a:t>
+            </a:r>
+          </a:p>
+          <a:p>
+            <a:r>
+              <a:t>  - Each step is a separate project that adds one concept</a:t>
+            </a:r>
+          </a:p>
+          <a:p>
+            <a:r>
+              <a:t>  - Compare neighbouring steps to see exactly what changed</a:t>
+            </a:r>
+          </a:p>
+          <a:p>
+            <a:r>
+              <a:t>- Pvz4 is the finished game, and the starting point for the exercises</a:t>
+            </a:r>
+          </a:p>
+        </p:txBody>
+      </p:sp>
+    </p:spTree>
+  </p:cSld>
+  <p:clrMapOvr>
+    <a:masterClrMapping/>
+  </p:clrMapOvr>
+</p:notes>
+</file>
+
+<file path=ppt/notesSlides/notesSlide7.xml><?xml version="1.0" encoding="utf-8"?>
+<p:notes xmlns:a="http://schemas.openxmlformats.org/drawingml/2006/main" xmlns:p="http://schemas.openxmlformats.org/presentationml/2006/main" xmlns:r="http://schemas.openxmlformats.org/officeDocument/2006/relationships">
+  <p:cSld>
+    <p:spTree>
+      <p:nvGrpSpPr>
+        <p:cNvPr id="1" name=""/>
+        <p:cNvGrpSpPr/>
+        <p:nvPr/>
+      </p:nvGrpSpPr>
+      <p:grpSpPr>
+        <a:xfrm>
+          <a:off x="0" y="0"/>
+          <a:ext cx="0" cy="0"/>
+          <a:chOff x="0" y="0"/>
+          <a:chExt cx="0" cy="0"/>
+        </a:xfrm>
+      </p:grpSpPr>
+      <p:sp>
+        <p:nvSpPr>
+          <p:cNvPr id="2" name="Slide Image Placeholder 1"/>
+          <p:cNvSpPr>
+            <a:spLocks noGrp="1"/>
+          </p:cNvSpPr>
+          <p:nvPr>
+            <p:ph type="sldImg" idx="2"/>
+          </p:nvPr>
+        </p:nvSpPr>
+        <p:spPr/>
+      </p:sp>
+      <p:sp>
+        <p:nvSpPr>
+          <p:cNvPr id="3" name="Notes Placeholder 2"/>
+          <p:cNvSpPr>
+            <a:spLocks noGrp="1"/>
+          </p:cNvSpPr>
+          <p:nvPr>
+            <p:ph type="body" idx="1"/>
+          </p:nvPr>
+        </p:nvSpPr>
+        <p:spPr/>
+        <p:txBody>
+          <a:bodyPr/>
+          <a:lstStyle/>
+          <a:p>
+            <a:r>
+              <a:t>Talking points:</a:t>
+            </a:r>
+          </a:p>
+          <a:p>
+            <a:r>
+              <a:t>- A grid: compute the cell, however many cells there are</a:t>
+            </a:r>
+          </a:p>
+          <a:p>
+            <a:r>
+              <a:t>- Separate objects (seed packets, sun): check each one</a:t>
+            </a:r>
+          </a:p>
+          <a:p>
+            <a:r>
+              <a:t>  - Inside its rectangle? Within its radius?</a:t>
+            </a:r>
+          </a:p>
+          <a:p>
+            <a:r>
+              <a:t>- When things overlap, the order of the checks decides</a:t>
+            </a:r>
+          </a:p>
+          <a:p>
+            <a:r>
+              <a:t>  - Sun first, then the seed packets, then the lawn</a:t>
+            </a:r>
+          </a:p>
+          <a:p>
+            <a:r>
+              <a:t>- Show what a click will do: highlight the cell, and a faint plant</a:t>
+            </a:r>
+          </a:p>
+        </p:txBody>
+      </p:sp>
+    </p:spTree>
+  </p:cSld>
+  <p:clrMapOvr>
+    <a:masterClrMapping/>
+  </p:clrMapOvr>
+</p:notes>
+</file>
+
+<file path=ppt/notesSlides/notesSlide8.xml><?xml version="1.0" encoding="utf-8"?>
+<p:notes xmlns:a="http://schemas.openxmlformats.org/drawingml/2006/main" xmlns:p="http://schemas.openxmlformats.org/presentationml/2006/main" xmlns:r="http://schemas.openxmlformats.org/officeDocument/2006/relationships">
+  <p:cSld>
+    <p:spTree>
+      <p:nvGrpSpPr>
+        <p:cNvPr id="1" name=""/>
+        <p:cNvGrpSpPr/>
+        <p:nvPr/>
+      </p:nvGrpSpPr>
+      <p:grpSpPr>
+        <a:xfrm>
+          <a:off x="0" y="0"/>
+          <a:ext cx="0" cy="0"/>
+          <a:chOff x="0" y="0"/>
+          <a:chExt cx="0" cy="0"/>
+        </a:xfrm>
+      </p:grpSpPr>
+      <p:sp>
+        <p:nvSpPr>
+          <p:cNvPr id="2" name="Slide Image Placeholder 1"/>
+          <p:cNvSpPr>
+            <a:spLocks noGrp="1"/>
+          </p:cNvSpPr>
+          <p:nvPr>
+            <p:ph type="sldImg" idx="2"/>
+          </p:nvPr>
+        </p:nvSpPr>
+        <p:spPr/>
+      </p:sp>
+      <p:sp>
+        <p:nvSpPr>
+          <p:cNvPr id="3" name="Notes Placeholder 2"/>
+          <p:cNvSpPr>
+            <a:spLocks noGrp="1"/>
+          </p:cNvSpPr>
+          <p:nvPr>
+            <p:ph type="body" idx="1"/>
+          </p:nvPr>
+        </p:nvSpPr>
+        <p:spPr/>
+        <p:txBody>
+          <a:bodyPr/>
+          <a:lstStyle/>
+          <a:p>
+            <a:r>
+              <a:t>Talking points:</a:t>
+            </a:r>
+          </a:p>
+          <a:p>
+            <a:r>
+              <a:t>- A class per kind of thing</a:t>
+            </a:r>
+          </a:p>
+          <a:p>
+            <a:r>
+              <a:t>  - Plant → Sunflower, Peashooter, WallNut</a:t>
+            </a:r>
+          </a:p>
+          <a:p>
+            <a:r>
+              <a:t>  - Zombie, Pea, Sun</a:t>
+            </a:r>
+          </a:p>
+          <a:p>
+            <a:r>
+              <a:t>- World: one list per class</a:t>
+            </a:r>
+          </a:p>
+          <a:p>
+            <a:r>
+              <a:t>- It works</a:t>
+            </a:r>
+          </a:p>
+        </p:txBody>
+      </p:sp>
+    </p:spTree>
+  </p:cSld>
+  <p:clrMapOvr>
+    <a:masterClrMapping/>
+  </p:clrMapOvr>
+</p:notes>
+</file>
+
+<file path=ppt/notesSlides/notesSlide9.xml><?xml version="1.0" encoding="utf-8"?>
+<p:notes xmlns:a="http://schemas.openxmlformats.org/drawingml/2006/main" xmlns:p="http://schemas.openxmlformats.org/presentationml/2006/main" xmlns:r="http://schemas.openxmlformats.org/officeDocument/2006/relationships">
+  <p:cSld>
+    <p:spTree>
+      <p:nvGrpSpPr>
+        <p:cNvPr id="1" name=""/>
+        <p:cNvGrpSpPr/>
+        <p:nvPr/>
+      </p:nvGrpSpPr>
+      <p:grpSpPr>
+        <a:xfrm>
+          <a:off x="0" y="0"/>
+          <a:ext cx="0" cy="0"/>
+          <a:chOff x="0" y="0"/>
+          <a:chExt cx="0" cy="0"/>
+        </a:xfrm>
+      </p:grpSpPr>
+      <p:sp>
+        <p:nvSpPr>
+          <p:cNvPr id="2" name="Slide Image Placeholder 1"/>
+          <p:cNvSpPr>
+            <a:spLocks noGrp="1"/>
+          </p:cNvSpPr>
+          <p:nvPr>
+            <p:ph type="sldImg" idx="2"/>
+          </p:nvPr>
+        </p:nvSpPr>
+        <p:spPr/>
+      </p:sp>
+      <p:sp>
+        <p:nvSpPr>
+          <p:cNvPr id="3" name="Notes Placeholder 2"/>
+          <p:cNvSpPr>
+            <a:spLocks noGrp="1"/>
+          </p:cNvSpPr>
+          <p:nvPr>
+            <p:ph type="body" idx="1"/>
+          </p:nvPr>
+        </p:nvSpPr>
+        <p:spPr/>
+        <p:txBody>
+          <a:bodyPr/>
+          <a:lstStyle/>
+          <a:p>
+            <a:r>
+              <a:t>Talking points:</a:t>
+            </a:r>
+          </a:p>
+          <a:p>
+            <a:r>
+              <a:t>- A Repeater: a Peashooter subclass that overrides… what?</a:t>
+            </a:r>
+          </a:p>
+          <a:p>
+            <a:r>
+              <a:t>- A Conehead: a Zombie subclass. A plant with armour: copy it</a:t>
+            </a:r>
+          </a:p>
+          <a:p>
+            <a:r>
+              <a:t>- A plant that shoots and makes sun: which parent?</a:t>
+            </a:r>
+          </a:p>
+          <a:p>
+            <a:r>
+              <a:t>  - C# allows one base class: copy the other ability</a:t>
+            </a:r>
+          </a:p>
+          <a:p>
+            <a:r>
+              <a:t>- Health is already copied: a zombie isn’t a plant</a:t>
+            </a:r>
+          </a:p>
+          <a:p>
+            <a:r>
+              <a:t>- Inheritance says what something is; here, what matters is what it can do</a:t>
+            </a:r>
           </a:p>
         </p:txBody>
       </p:sp>
@@ -7631,7 +8155,7 @@
         <p:spPr>
           <a:xfrm>
             <a:off x="311700" y="885950"/>
-            <a:ext cx="8520600" cy="4023300"/>
+            <a:ext cx="8520600" cy="521208"/>
           </a:xfrm>
           <a:prstGeom prst="rect">
             <a:avLst/>
@@ -7655,111 +8179,273 @@
             </a:pPr>
             <a:r>
               <a:rPr lang="en"/>
-              <a:t>Finding each other takes code</a:t>
+              <a:t>Components aren’t free.</a:t>
             </a:r>
             <a:endParaRPr/>
           </a:p>
-          <a:p>
-            <a:pPr indent="-317500" lvl="1" marL="914400" rtl="0" algn="l">
-              <a:spcBef>
-                <a:spcPts val="0"/>
-              </a:spcBef>
-              <a:spcAft>
-                <a:spcPts val="0"/>
-              </a:spcAft>
-              <a:buSzPts val="1400"/>
-              <a:buChar char="○"/>
-            </a:pPr>
-            <a:r>
-              <a:rPr lang="en"/>
-              <a:t>Get&lt;Eater&gt;() searches a list, and may return null</a:t>
-            </a:r>
-            <a:endParaRPr/>
-          </a:p>
-          <a:p>
-            <a:pPr indent="-330200" lvl="0" marL="457200" rtl="0" algn="l">
-              <a:spcBef>
-                <a:spcPts val="0"/>
-              </a:spcBef>
-              <a:spcAft>
-                <a:spcPts val="0"/>
-              </a:spcAft>
-              <a:buSzPts val="1600"/>
-              <a:buChar char="●"/>
-            </a:pPr>
-            <a:r>
-              <a:rPr lang="en"/>
+        </p:txBody>
+      </p:sp>
+      <p:sp>
+        <p:nvSpPr>
+          <p:cNvPr id="295" name="Rounded Rectangle 294"/>
+          <p:cNvSpPr/>
+          <p:nvPr/>
+        </p:nvSpPr>
+        <p:spPr>
+          <a:xfrm>
+            <a:off x="411480" y="1463040"/>
+            <a:ext cx="2651760" cy="1188720"/>
+          </a:xfrm>
+          <a:prstGeom prst="roundRect">
+            <a:avLst>
+              <a:gd name="adj" fmla="val 12000"/>
+            </a:avLst>
+          </a:prstGeom>
+          <a:solidFill>
+            <a:srgbClr val="2E3338"/>
+          </a:solidFill>
+          <a:ln>
+            <a:noFill/>
+          </a:ln>
+          <a:effectLst/>
+        </p:spPr>
+        <p:style>
+          <a:lnRef idx="1">
+            <a:schemeClr val="accent1"/>
+          </a:lnRef>
+          <a:fillRef idx="3">
+            <a:schemeClr val="accent1"/>
+          </a:fillRef>
+          <a:effectRef idx="2">
+            <a:schemeClr val="accent1"/>
+          </a:effectRef>
+          <a:fontRef idx="minor">
+            <a:schemeClr val="lt1"/>
+          </a:fontRef>
+        </p:style>
+        <p:txBody>
+          <a:bodyPr rtlCol="0" anchor="ctr" wrap="square" lIns="73152" rIns="73152"/>
+          <a:lstStyle/>
+          <a:p>
+            <a:pPr algn="ctr"/>
+            <a:r>
+              <a:rPr sz="1500" b="1">
+                <a:solidFill>
+                  <a:srgbClr val="DEE2E6"/>
+                </a:solidFill>
+              </a:rPr>
+              <a:t>Finding each other</a:t>
+            </a:r>
+          </a:p>
+          <a:p>
+            <a:pPr algn="ctr"/>
+            <a:r>
+              <a:rPr sz="1300" b="0">
+                <a:solidFill>
+                  <a:srgbClr val="9AA3AB"/>
+                </a:solidFill>
+              </a:rPr>
+              <a:t>Get&lt;Eater&gt;() searches a list,</a:t>
+            </a:r>
+          </a:p>
+          <a:p>
+            <a:pPr algn="ctr"/>
+            <a:r>
+              <a:rPr sz="1300" b="0">
+                <a:solidFill>
+                  <a:srgbClr val="9AA3AB"/>
+                </a:solidFill>
+              </a:rPr>
+              <a:t>and may return null</a:t>
+            </a:r>
+          </a:p>
+        </p:txBody>
+      </p:sp>
+      <p:sp>
+        <p:nvSpPr>
+          <p:cNvPr id="296" name="Rounded Rectangle 295"/>
+          <p:cNvSpPr/>
+          <p:nvPr/>
+        </p:nvSpPr>
+        <p:spPr>
+          <a:xfrm>
+            <a:off x="3246120" y="1463040"/>
+            <a:ext cx="2651760" cy="1188720"/>
+          </a:xfrm>
+          <a:prstGeom prst="roundRect">
+            <a:avLst>
+              <a:gd name="adj" fmla="val 12000"/>
+            </a:avLst>
+          </a:prstGeom>
+          <a:solidFill>
+            <a:srgbClr val="2E3338"/>
+          </a:solidFill>
+          <a:ln>
+            <a:noFill/>
+          </a:ln>
+          <a:effectLst/>
+        </p:spPr>
+        <p:style>
+          <a:lnRef idx="1">
+            <a:schemeClr val="accent1"/>
+          </a:lnRef>
+          <a:fillRef idx="3">
+            <a:schemeClr val="accent1"/>
+          </a:fillRef>
+          <a:effectRef idx="2">
+            <a:schemeClr val="accent1"/>
+          </a:effectRef>
+          <a:fontRef idx="minor">
+            <a:schemeClr val="lt1"/>
+          </a:fontRef>
+        </p:style>
+        <p:txBody>
+          <a:bodyPr rtlCol="0" anchor="ctr" wrap="square" lIns="73152" rIns="73152"/>
+          <a:lstStyle/>
+          <a:p>
+            <a:pPr algn="ctr"/>
+            <a:r>
+              <a:rPr sz="1500" b="1">
+                <a:solidFill>
+                  <a:srgbClr val="DEE2E6"/>
+                </a:solidFill>
+              </a:rPr>
               <a:t>Order matters</a:t>
             </a:r>
-            <a:endParaRPr/>
-          </a:p>
-          <a:p>
-            <a:pPr indent="-317500" lvl="1" marL="914400" rtl="0" algn="l">
-              <a:spcBef>
-                <a:spcPts val="0"/>
-              </a:spcBef>
-              <a:spcAft>
-                <a:spcPts val="0"/>
-              </a:spcAft>
-              <a:buSzPts val="1400"/>
-              <a:buChar char="○"/>
-            </a:pPr>
-            <a:r>
-              <a:rPr lang="en"/>
-              <a:t>Components update and draw in the order they were added</a:t>
-            </a:r>
-            <a:endParaRPr/>
-          </a:p>
-          <a:p>
-            <a:pPr indent="-330200" lvl="0" marL="457200" rtl="0" algn="l">
-              <a:spcBef>
-                <a:spcPts val="0"/>
-              </a:spcBef>
-              <a:spcAft>
-                <a:spcPts val="0"/>
-              </a:spcAft>
-              <a:buSzPts val="1600"/>
-              <a:buChar char="●"/>
-            </a:pPr>
-            <a:r>
-              <a:rPr lang="en"/>
+          </a:p>
+          <a:p>
+            <a:pPr algn="ctr"/>
+            <a:r>
+              <a:rPr sz="1300" b="0">
+                <a:solidFill>
+                  <a:srgbClr val="9AA3AB"/>
+                </a:solidFill>
+              </a:rPr>
+              <a:t>components update and draw</a:t>
+            </a:r>
+          </a:p>
+          <a:p>
+            <a:pPr algn="ctr"/>
+            <a:r>
+              <a:rPr sz="1300" b="0">
+                <a:solidFill>
+                  <a:srgbClr val="9AA3AB"/>
+                </a:solidFill>
+              </a:rPr>
+              <a:t>in the order they were added</a:t>
+            </a:r>
+          </a:p>
+        </p:txBody>
+      </p:sp>
+      <p:sp>
+        <p:nvSpPr>
+          <p:cNvPr id="297" name="Rounded Rectangle 296"/>
+          <p:cNvSpPr/>
+          <p:nvPr/>
+        </p:nvSpPr>
+        <p:spPr>
+          <a:xfrm>
+            <a:off x="6080760" y="1463040"/>
+            <a:ext cx="2651760" cy="1188720"/>
+          </a:xfrm>
+          <a:prstGeom prst="roundRect">
+            <a:avLst>
+              <a:gd name="adj" fmla="val 12000"/>
+            </a:avLst>
+          </a:prstGeom>
+          <a:solidFill>
+            <a:srgbClr val="2E3338"/>
+          </a:solidFill>
+          <a:ln w="25400">
+            <a:solidFill>
+              <a:srgbClr val="D45D35"/>
+            </a:solidFill>
+          </a:ln>
+          <a:effectLst/>
+        </p:spPr>
+        <p:style>
+          <a:lnRef idx="1">
+            <a:schemeClr val="accent1"/>
+          </a:lnRef>
+          <a:fillRef idx="3">
+            <a:schemeClr val="accent1"/>
+          </a:fillRef>
+          <a:effectRef idx="2">
+            <a:schemeClr val="accent1"/>
+          </a:effectRef>
+          <a:fontRef idx="minor">
+            <a:schemeClr val="lt1"/>
+          </a:fontRef>
+        </p:style>
+        <p:txBody>
+          <a:bodyPr rtlCol="0" anchor="ctr" wrap="square" lIns="73152" rIns="73152"/>
+          <a:lstStyle/>
+          <a:p>
+            <a:pPr algn="ctr"/>
+            <a:r>
+              <a:rPr sz="1500" b="1">
+                <a:solidFill>
+                  <a:srgbClr val="DEE2E6"/>
+                </a:solidFill>
+              </a:rPr>
               <a:t>Where does a rule go?</a:t>
             </a:r>
-            <a:endParaRPr/>
-          </a:p>
-          <a:p>
-            <a:pPr indent="-317500" lvl="1" marL="914400" rtl="0" algn="l">
-              <a:spcBef>
-                <a:spcPts val="0"/>
-              </a:spcBef>
-              <a:spcAft>
-                <a:spcPts val="0"/>
-              </a:spcAft>
-              <a:buSzPts val="1400"/>
-              <a:buChar char="○"/>
-            </a:pPr>
-            <a:r>
-              <a:rPr lang="en"/>
-              <a:t>A pea hits a zombie: the pea’s rule, or the zombie’s?</a:t>
-            </a:r>
-            <a:endParaRPr/>
-          </a:p>
-          <a:p>
-            <a:pPr indent="-317500" lvl="1" marL="914400" rtl="0" algn="l">
-              <a:spcBef>
-                <a:spcPts val="0"/>
-              </a:spcBef>
-              <a:spcAft>
-                <a:spcPts val="0"/>
-              </a:spcAft>
-              <a:buSzPts val="1400"/>
-              <a:buChar char="○"/>
-            </a:pPr>
-            <a:r>
-              <a:rPr lang="en"/>
-              <a:t>Geometry Wars moves such rules into systems</a:t>
-            </a:r>
-            <a:endParaRPr/>
+          </a:p>
+          <a:p>
+            <a:pPr algn="ctr"/>
+            <a:r>
+              <a:rPr sz="1300" b="0">
+                <a:solidFill>
+                  <a:srgbClr val="9AA3AB"/>
+                </a:solidFill>
+              </a:rPr>
+              <a:t>a pea hits a zombie:</a:t>
+            </a:r>
+          </a:p>
+          <a:p>
+            <a:pPr algn="ctr"/>
+            <a:r>
+              <a:rPr sz="1300" b="0">
+                <a:solidFill>
+                  <a:srgbClr val="9AA3AB"/>
+                </a:solidFill>
+              </a:rPr>
+              <a:t>the pea’s rule, or the zombie’s?</a:t>
+            </a:r>
+          </a:p>
+        </p:txBody>
+      </p:sp>
+      <p:sp>
+        <p:nvSpPr>
+          <p:cNvPr id="298" name="TextBox 297"/>
+          <p:cNvSpPr txBox="1"/>
+          <p:nvPr/>
+        </p:nvSpPr>
+        <p:spPr>
+          <a:xfrm>
+            <a:off x="411480" y="2926080"/>
+            <a:ext cx="8321040" cy="365760"/>
+          </a:xfrm>
+          <a:prstGeom prst="rect">
+            <a:avLst/>
+          </a:prstGeom>
+          <a:noFill/>
+        </p:spPr>
+        <p:txBody>
+          <a:bodyPr wrap="square">
+            <a:spAutoFit/>
+          </a:bodyPr>
+          <a:lstStyle/>
+          <a:p>
+            <a:pPr algn="ctr"/>
+            <a:r>
+              <a:rPr sz="1400" b="0" i="0">
+                <a:solidFill>
+                  <a:srgbClr val="9AA3AB"/>
+                </a:solidFill>
+              </a:rPr>
+              <a:t>Geometry Wars moves rules like that into systems.</a:t>
+            </a:r>
           </a:p>
         </p:txBody>
       </p:sp>
@@ -9521,7 +10207,7 @@
         <p:spPr>
           <a:xfrm>
             <a:off x="311700" y="885950"/>
-            <a:ext cx="8520600" cy="4023300"/>
+            <a:ext cx="8520600" cy="521208"/>
           </a:xfrm>
           <a:prstGeom prst="rect">
             <a:avLst/>
@@ -9545,111 +10231,219 @@
             </a:pPr>
             <a:r>
               <a:rPr lang="en"/>
-              <a:t>Prototype (Angry Birds): copy a configured object</a:t>
+              <a:t>Two ways to make many things of one kind.</a:t>
             </a:r>
             <a:endParaRPr/>
           </a:p>
-          <a:p>
-            <a:pPr indent="-317500" lvl="1" marL="914400" rtl="0" algn="l">
-              <a:spcBef>
-                <a:spcPts val="0"/>
-              </a:spcBef>
-              <a:spcAft>
-                <a:spcPts val="0"/>
-              </a:spcAft>
-              <a:buSzPts val="1400"/>
-              <a:buChar char="○"/>
-            </a:pPr>
-            <a:r>
-              <a:rPr lang="en"/>
-              <a:t>Shared data is copied into every clone</a:t>
-            </a:r>
-            <a:endParaRPr/>
-          </a:p>
-          <a:p>
-            <a:pPr indent="-317500" lvl="1" marL="914400" rtl="0" algn="l">
-              <a:spcBef>
-                <a:spcPts val="0"/>
-              </a:spcBef>
-              <a:spcAft>
-                <a:spcPts val="0"/>
-              </a:spcAft>
-              <a:buSzPts val="1400"/>
-              <a:buChar char="○"/>
-            </a:pPr>
-            <a:r>
-              <a:rPr lang="en"/>
-              <a:t>Good for “make more like this one”</a:t>
-            </a:r>
-            <a:endParaRPr/>
-          </a:p>
-          <a:p>
-            <a:pPr indent="-330200" lvl="0" marL="457200" rtl="0" algn="l">
-              <a:spcBef>
-                <a:spcPts val="0"/>
-              </a:spcBef>
-              <a:spcAft>
-                <a:spcPts val="0"/>
-              </a:spcAft>
-              <a:buSzPts val="1600"/>
-              <a:buChar char="●"/>
-            </a:pPr>
-            <a:r>
-              <a:rPr lang="en"/>
-              <a:t>Type Object: a separate type class creates instances</a:t>
-            </a:r>
-            <a:endParaRPr/>
-          </a:p>
-          <a:p>
-            <a:pPr indent="-317500" lvl="1" marL="914400" rtl="0" algn="l">
-              <a:spcBef>
-                <a:spcPts val="0"/>
-              </a:spcBef>
-              <a:spcAft>
-                <a:spcPts val="0"/>
-              </a:spcAft>
-              <a:buSzPts val="1400"/>
-              <a:buChar char="○"/>
-            </a:pPr>
-            <a:r>
-              <a:rPr lang="en"/>
-              <a:t>Shared data is kept once, in the type</a:t>
-            </a:r>
-            <a:endParaRPr/>
-          </a:p>
-          <a:p>
-            <a:pPr indent="-317500" lvl="1" marL="914400" rtl="0" algn="l">
-              <a:spcBef>
-                <a:spcPts val="0"/>
-              </a:spcBef>
-              <a:spcAft>
-                <a:spcPts val="0"/>
-              </a:spcAft>
-              <a:buSzPts val="1400"/>
-              <a:buChar char="○"/>
-            </a:pPr>
-            <a:r>
-              <a:rPr lang="en"/>
-              <a:t>An instance can refer to its type</a:t>
-            </a:r>
-            <a:endParaRPr/>
-          </a:p>
-          <a:p>
-            <a:pPr indent="-317500" lvl="1" marL="914400" rtl="0" algn="l">
-              <a:spcBef>
-                <a:spcPts val="0"/>
-              </a:spcBef>
-              <a:spcAft>
-                <a:spcPts val="0"/>
-              </a:spcAft>
-              <a:buSzPts val="1400"/>
-              <a:buChar char="○"/>
-            </a:pPr>
-            <a:r>
-              <a:rPr lang="en"/>
-              <a:t>Good for kinds with their own data and rules</a:t>
-            </a:r>
-            <a:endParaRPr/>
+        </p:txBody>
+      </p:sp>
+      <p:sp>
+        <p:nvSpPr>
+          <p:cNvPr id="295" name="Rounded Rectangle 294"/>
+          <p:cNvSpPr/>
+          <p:nvPr/>
+        </p:nvSpPr>
+        <p:spPr>
+          <a:xfrm>
+            <a:off x="548640" y="1417320"/>
+            <a:ext cx="3749039" cy="1463040"/>
+          </a:xfrm>
+          <a:prstGeom prst="roundRect">
+            <a:avLst>
+              <a:gd name="adj" fmla="val 12000"/>
+            </a:avLst>
+          </a:prstGeom>
+          <a:solidFill>
+            <a:srgbClr val="2E3338"/>
+          </a:solidFill>
+          <a:ln>
+            <a:noFill/>
+          </a:ln>
+          <a:effectLst/>
+        </p:spPr>
+        <p:style>
+          <a:lnRef idx="1">
+            <a:schemeClr val="accent1"/>
+          </a:lnRef>
+          <a:fillRef idx="3">
+            <a:schemeClr val="accent1"/>
+          </a:fillRef>
+          <a:effectRef idx="2">
+            <a:schemeClr val="accent1"/>
+          </a:effectRef>
+          <a:fontRef idx="minor">
+            <a:schemeClr val="lt1"/>
+          </a:fontRef>
+        </p:style>
+        <p:txBody>
+          <a:bodyPr rtlCol="0" anchor="ctr" wrap="square" lIns="73152" rIns="73152"/>
+          <a:lstStyle/>
+          <a:p>
+            <a:pPr algn="ctr"/>
+            <a:r>
+              <a:rPr sz="1500" b="1">
+                <a:solidFill>
+                  <a:srgbClr val="DEE2E6"/>
+                </a:solidFill>
+              </a:rPr>
+              <a:t>Prototype (Angry Birds)</a:t>
+            </a:r>
+          </a:p>
+          <a:p>
+            <a:pPr algn="ctr"/>
+            <a:r>
+              <a:rPr sz="1300" b="0">
+                <a:solidFill>
+                  <a:srgbClr val="9AA3AB"/>
+                </a:solidFill>
+              </a:rPr>
+              <a:t>copy a configured object;</a:t>
+            </a:r>
+          </a:p>
+          <a:p>
+            <a:pPr algn="ctr"/>
+            <a:r>
+              <a:rPr sz="1300" b="0">
+                <a:solidFill>
+                  <a:srgbClr val="9AA3AB"/>
+                </a:solidFill>
+              </a:rPr>
+              <a:t>shared data is copied into each clone</a:t>
+            </a:r>
+          </a:p>
+          <a:p>
+            <a:pPr algn="ctr"/>
+            <a:r>
+              <a:rPr sz="1300" b="0">
+                <a:solidFill>
+                  <a:srgbClr val="9AA3AB"/>
+                </a:solidFill>
+              </a:rPr>
+              <a:t>“more like this one”</a:t>
+            </a:r>
+          </a:p>
+        </p:txBody>
+      </p:sp>
+      <p:sp>
+        <p:nvSpPr>
+          <p:cNvPr id="296" name="Rounded Rectangle 295"/>
+          <p:cNvSpPr/>
+          <p:nvPr/>
+        </p:nvSpPr>
+        <p:spPr>
+          <a:xfrm>
+            <a:off x="4846320" y="1417320"/>
+            <a:ext cx="3749039" cy="1463040"/>
+          </a:xfrm>
+          <a:prstGeom prst="roundRect">
+            <a:avLst>
+              <a:gd name="adj" fmla="val 12000"/>
+            </a:avLst>
+          </a:prstGeom>
+          <a:solidFill>
+            <a:srgbClr val="2E3338"/>
+          </a:solidFill>
+          <a:ln w="25400">
+            <a:solidFill>
+              <a:srgbClr val="D45D35"/>
+            </a:solidFill>
+          </a:ln>
+          <a:effectLst/>
+        </p:spPr>
+        <p:style>
+          <a:lnRef idx="1">
+            <a:schemeClr val="accent1"/>
+          </a:lnRef>
+          <a:fillRef idx="3">
+            <a:schemeClr val="accent1"/>
+          </a:fillRef>
+          <a:effectRef idx="2">
+            <a:schemeClr val="accent1"/>
+          </a:effectRef>
+          <a:fontRef idx="minor">
+            <a:schemeClr val="lt1"/>
+          </a:fontRef>
+        </p:style>
+        <p:txBody>
+          <a:bodyPr rtlCol="0" anchor="ctr" wrap="square" lIns="73152" rIns="73152"/>
+          <a:lstStyle/>
+          <a:p>
+            <a:pPr algn="ctr"/>
+            <a:r>
+              <a:rPr sz="1500" b="1">
+                <a:solidFill>
+                  <a:srgbClr val="DEE2E6"/>
+                </a:solidFill>
+              </a:rPr>
+              <a:t>Type Object (here)</a:t>
+            </a:r>
+          </a:p>
+          <a:p>
+            <a:pPr algn="ctr"/>
+            <a:r>
+              <a:rPr sz="1300" b="0">
+                <a:solidFill>
+                  <a:srgbClr val="9AA3AB"/>
+                </a:solidFill>
+              </a:rPr>
+              <a:t>a type class creates instances;</a:t>
+            </a:r>
+          </a:p>
+          <a:p>
+            <a:pPr algn="ctr"/>
+            <a:r>
+              <a:rPr sz="1300" b="0">
+                <a:solidFill>
+                  <a:srgbClr val="9AA3AB"/>
+                </a:solidFill>
+              </a:rPr>
+              <a:t>shared data is kept once, in the type</a:t>
+            </a:r>
+          </a:p>
+          <a:p>
+            <a:pPr algn="ctr"/>
+            <a:r>
+              <a:rPr sz="1300" b="0">
+                <a:solidFill>
+                  <a:srgbClr val="9AA3AB"/>
+                </a:solidFill>
+              </a:rPr>
+              <a:t>kinds with their own data and rules</a:t>
+            </a:r>
+          </a:p>
+        </p:txBody>
+      </p:sp>
+      <p:sp>
+        <p:nvSpPr>
+          <p:cNvPr id="297" name="TextBox 296"/>
+          <p:cNvSpPr txBox="1"/>
+          <p:nvPr/>
+        </p:nvSpPr>
+        <p:spPr>
+          <a:xfrm>
+            <a:off x="457200" y="3154680"/>
+            <a:ext cx="8229600" cy="731520"/>
+          </a:xfrm>
+          <a:prstGeom prst="rect">
+            <a:avLst/>
+          </a:prstGeom>
+          <a:noFill/>
+        </p:spPr>
+        <p:txBody>
+          <a:bodyPr wrap="square">
+            <a:spAutoFit/>
+          </a:bodyPr>
+          <a:lstStyle/>
+          <a:p>
+            <a:pPr algn="ctr"/>
+            <a:r>
+              <a:rPr sz="1600" b="1" i="0">
+                <a:solidFill>
+                  <a:srgbClr val="DEE2E6"/>
+                </a:solidFill>
+              </a:rPr>
+              <a:t>A plant’s cost: in each plant, or in its type?</a:t>
+            </a:r>
           </a:p>
         </p:txBody>
       </p:sp>
@@ -12890,6 +13684,179 @@
 </p:sld>
 </file>
 
+<file path=ppt/slides/slide26.xml><?xml version="1.0" encoding="utf-8"?>
+<p:sld xmlns:a="http://schemas.openxmlformats.org/drawingml/2006/main" xmlns:p="http://schemas.openxmlformats.org/presentationml/2006/main" xmlns:r="http://schemas.openxmlformats.org/officeDocument/2006/relationships">
+  <p:cSld>
+    <p:spTree>
+      <p:nvGrpSpPr>
+        <p:cNvPr id="1" name=""/>
+        <p:cNvGrpSpPr/>
+        <p:nvPr/>
+      </p:nvGrpSpPr>
+      <p:grpSpPr/>
+      <p:sp>
+        <p:nvSpPr>
+          <p:cNvPr id="2" name="Title 1"/>
+          <p:cNvSpPr>
+            <a:spLocks noGrp="1"/>
+          </p:cNvSpPr>
+          <p:nvPr>
+            <p:ph type="title"/>
+          </p:nvPr>
+        </p:nvSpPr>
+        <p:spPr/>
+        <p:txBody>
+          <a:bodyPr/>
+          <a:lstStyle/>
+          <a:p>
+            <a:pPr indent="0" lvl="0" marL="0" rtl="0" algn="l">
+              <a:spcBef>
+                <a:spcPts val="0"/>
+              </a:spcBef>
+              <a:spcAft>
+                <a:spcPts val="0"/>
+              </a:spcAft>
+              <a:buNone/>
+            </a:pPr>
+            <a:r>
+              <a:rPr lang="en"/>
+              <a:t>Check Yourself</a:t>
+            </a:r>
+            <a:endParaRPr/>
+          </a:p>
+        </p:txBody>
+      </p:sp>
+      <p:sp>
+        <p:nvSpPr>
+          <p:cNvPr id="3" name="Text Placeholder 2"/>
+          <p:cNvSpPr>
+            <a:spLocks noGrp="1"/>
+          </p:cNvSpPr>
+          <p:nvPr>
+            <p:ph type="body" idx="1"/>
+          </p:nvPr>
+        </p:nvSpPr>
+        <p:spPr>
+          <a:xfrm>
+            <a:off x="311700" y="885950"/>
+            <a:ext cx="8520600" cy="1719072"/>
+          </a:xfrm>
+        </p:spPr>
+        <p:txBody>
+          <a:bodyPr/>
+          <a:lstStyle/>
+          <a:p>
+            <a:pPr indent="-330200" lvl="0" marL="457200" rtl="0" algn="l">
+              <a:spcBef>
+                <a:spcPts val="0"/>
+              </a:spcBef>
+              <a:spcAft>
+                <a:spcPts val="0"/>
+              </a:spcAft>
+              <a:buSzPts val="1600"/>
+              <a:buChar char="●"/>
+            </a:pPr>
+            <a:r>
+              <a:rPr lang="en"/>
+              <a:t>Why does inheritance break down for Plants vs. Zombies?</a:t>
+            </a:r>
+            <a:endParaRPr/>
+          </a:p>
+          <a:p>
+            <a:pPr indent="-330200" lvl="0" marL="457200" rtl="0" algn="l">
+              <a:spcBef>
+                <a:spcPts val="0"/>
+              </a:spcBef>
+              <a:spcAft>
+                <a:spcPts val="0"/>
+              </a:spcAft>
+              <a:buSzPts val="1600"/>
+              <a:buChar char="●"/>
+            </a:pPr>
+            <a:r>
+              <a:rPr lang="en"/>
+              <a:t>How do components in one entity work together without knowing each other’s classes?</a:t>
+            </a:r>
+            <a:endParaRPr/>
+          </a:p>
+          <a:p>
+            <a:pPr indent="-330200" lvl="0" marL="457200" rtl="0" algn="l">
+              <a:spcBef>
+                <a:spcPts val="0"/>
+              </a:spcBef>
+              <a:spcAft>
+                <a:spcPts val="0"/>
+              </a:spcAft>
+              <a:buSzPts val="1600"/>
+              <a:buChar char="●"/>
+            </a:pPr>
+            <a:r>
+              <a:rPr lang="en"/>
+              <a:t>What goes in a type object, and what goes in an instance?</a:t>
+            </a:r>
+            <a:endParaRPr/>
+          </a:p>
+          <a:p>
+            <a:pPr indent="-330200" lvl="0" marL="457200" rtl="0" algn="l">
+              <a:spcBef>
+                <a:spcPts val="0"/>
+              </a:spcBef>
+              <a:spcAft>
+                <a:spcPts val="0"/>
+              </a:spcAft>
+              <a:buSzPts val="1600"/>
+              <a:buChar char="●"/>
+            </a:pPr>
+            <a:r>
+              <a:rPr lang="en"/>
+              <a:t>How is picking on a grid different from picking a list of objects?</a:t>
+            </a:r>
+            <a:endParaRPr/>
+          </a:p>
+        </p:txBody>
+      </p:sp>
+      <p:sp>
+        <p:nvSpPr>
+          <p:cNvPr id="4" name="TextBox 3"/>
+          <p:cNvSpPr txBox="1"/>
+          <p:nvPr/>
+        </p:nvSpPr>
+        <p:spPr>
+          <a:xfrm>
+            <a:off x="457200" y="3182112"/>
+            <a:ext cx="8229600" cy="457200"/>
+          </a:xfrm>
+          <a:prstGeom prst="rect">
+            <a:avLst/>
+          </a:prstGeom>
+          <a:noFill/>
+        </p:spPr>
+        <p:txBody>
+          <a:bodyPr wrap="square">
+            <a:spAutoFit/>
+          </a:bodyPr>
+          <a:lstStyle/>
+          <a:p>
+            <a:pPr algn="ctr"/>
+            <a:r>
+              <a:rPr sz="1400" b="0" i="0">
+                <a:solidFill>
+                  <a:srgbClr val="9AA3AB"/>
+                </a:solidFill>
+              </a:rPr>
+              <a:t>The answers, and more questions, are on the course site.</a:t>
+            </a:r>
+          </a:p>
+        </p:txBody>
+      </p:sp>
+    </p:spTree>
+  </p:cSld>
+  <p:clrMapOvr>
+    <a:masterClrMapping/>
+  </p:clrMapOvr>
+</p:sld>
+</file>
+
 <file path=ppt/slides/slide3.xml><?xml version="1.0" encoding="utf-8"?>
 <p:sld xmlns:a="http://schemas.openxmlformats.org/drawingml/2006/main" xmlns:r="http://schemas.openxmlformats.org/officeDocument/2006/relationships" xmlns:mc="http://schemas.openxmlformats.org/markup-compatibility/2006" xmlns:mv="urn:schemas-microsoft-com:mac:vml" xmlns:p="http://schemas.openxmlformats.org/presentationml/2006/main" xmlns:c="http://schemas.openxmlformats.org/drawingml/2006/chart" xmlns:dgm="http://schemas.openxmlformats.org/drawingml/2006/diagram" xmlns:o="urn:schemas-microsoft-com:office:office" xmlns:v="urn:schemas-microsoft-com:vml" xmlns:pvml="urn:schemas-microsoft-com:office:powerpoint" xmlns:com="http://schemas.openxmlformats.org/drawingml/2006/compatibility" xmlns:p14="http://schemas.microsoft.com/office/powerpoint/2010/main" xmlns:p15="http://schemas.microsoft.com/office/powerpoint/2012/main" xmlns:ahyp="http://schemas.microsoft.com/office/drawing/2018/hyperlinkcolor">
   <p:cSld>
@@ -13424,7 +14391,7 @@
         <p:spPr>
           <a:xfrm>
             <a:off x="311700" y="885950"/>
-            <a:ext cx="8520600" cy="4023300"/>
+            <a:ext cx="8520600" cy="1289304"/>
           </a:xfrm>
           <a:prstGeom prst="rect">
             <a:avLst/>
@@ -13448,29 +14415,7 @@
             </a:pPr>
             <a:r>
               <a:rPr lang="en"/>
-              <a:t>All Source code for today’s game can be found here:</a:t>
-            </a:r>
-            <a:endParaRPr/>
-          </a:p>
-          <a:p>
-            <a:pPr indent="-317500" lvl="1" marL="914400" rtl="0" algn="l">
-              <a:spcBef>
-                <a:spcPts val="0"/>
-              </a:spcBef>
-              <a:spcAft>
-                <a:spcPts val="0"/>
-              </a:spcAft>
-              <a:buSzPts val="1400"/>
-              <a:buChar char="○"/>
-            </a:pPr>
-            <a:r>
-              <a:rPr lang="en" u="sng">
-                <a:solidFill>
-                  <a:schemeClr val="hlink"/>
-                </a:solidFill>
-                <a:hlinkClick r:id="rId3"/>
-              </a:rPr>
-              <a:t>github.com/Metamate/gar-games (folder 09-plants-vs-zombies)</a:t>
+              <a:t>github.com/Metamate/gar-games, folder 09-plants-vs-zombies</a:t>
             </a:r>
             <a:endParaRPr/>
           </a:p>
@@ -13487,41 +14432,7 @@
             </a:pPr>
             <a:r>
               <a:rPr lang="en"/>
-              <a:t>The game is built up in steps: Pvz0 → Pvz4</a:t>
-            </a:r>
-            <a:endParaRPr/>
-          </a:p>
-          <a:p>
-            <a:pPr indent="-317500" lvl="1" marL="914400" rtl="0" algn="l">
-              <a:spcBef>
-                <a:spcPts val="0"/>
-              </a:spcBef>
-              <a:spcAft>
-                <a:spcPts val="0"/>
-              </a:spcAft>
-              <a:buSzPts val="1400"/>
-              <a:buChar char="○"/>
-            </a:pPr>
-            <a:r>
-              <a:rPr lang="en"/>
-              <a:t>Each step is a separate project that adds one concept</a:t>
-            </a:r>
-            <a:endParaRPr/>
-          </a:p>
-          <a:p>
-            <a:pPr indent="-317500" lvl="1" marL="914400" rtl="0" algn="l">
-              <a:spcBef>
-                <a:spcPts val="0"/>
-              </a:spcBef>
-              <a:spcAft>
-                <a:spcPts val="0"/>
-              </a:spcAft>
-              <a:buSzPts val="1400"/>
-              <a:buChar char="○"/>
-            </a:pPr>
-            <a:r>
-              <a:rPr lang="en"/>
-              <a:t>Compare neighbouring steps to see exactly what changed</a:t>
+              <a:t>Its README: the steps (Pvz0 to Pvz4), a map of the code, how to run it</a:t>
             </a:r>
             <a:endParaRPr/>
           </a:p>
@@ -13538,7 +14449,7 @@
             </a:pPr>
             <a:r>
               <a:rPr lang="en"/>
-              <a:t>Pvz4 is the finished game, and the starting point for the exercises</a:t>
+              <a:t>The course site: today’s concepts in full, the exercises, and questions to check yourself</a:t>
             </a:r>
             <a:endParaRPr/>
           </a:p>
@@ -14417,7 +15328,7 @@
         <p:spPr>
           <a:xfrm>
             <a:off x="311700" y="885950"/>
-            <a:ext cx="8520600" cy="4023300"/>
+            <a:ext cx="8520600" cy="521208"/>
           </a:xfrm>
           <a:prstGeom prst="rect">
             <a:avLst/>
@@ -14441,94 +15352,465 @@
             </a:pPr>
             <a:r>
               <a:rPr lang="en"/>
-              <a:t>A grid: compute the cell, however many cells there are</a:t>
+              <a:t>A grid: compute the cell. Separate objects: check each one.</a:t>
             </a:r>
             <a:endParaRPr/>
           </a:p>
-          <a:p>
-            <a:pPr indent="-330200" lvl="0" marL="457200" rtl="0" algn="l">
-              <a:spcBef>
-                <a:spcPts val="0"/>
-              </a:spcBef>
-              <a:spcAft>
-                <a:spcPts val="0"/>
-              </a:spcAft>
-              <a:buSzPts val="1600"/>
-              <a:buChar char="●"/>
-            </a:pPr>
-            <a:r>
-              <a:rPr lang="en"/>
-              <a:t>Separate objects (seed packets, sun): check each one</a:t>
-            </a:r>
-            <a:endParaRPr/>
-          </a:p>
-          <a:p>
-            <a:pPr indent="-317500" lvl="1" marL="914400" rtl="0" algn="l">
-              <a:spcBef>
-                <a:spcPts val="0"/>
-              </a:spcBef>
-              <a:spcAft>
-                <a:spcPts val="0"/>
-              </a:spcAft>
-              <a:buSzPts val="1400"/>
-              <a:buChar char="○"/>
-            </a:pPr>
-            <a:r>
-              <a:rPr lang="en"/>
-              <a:t>Inside its rectangle? Within its radius?</a:t>
-            </a:r>
-            <a:endParaRPr/>
-          </a:p>
-          <a:p>
-            <a:pPr indent="-330200" lvl="0" marL="457200" rtl="0" algn="l">
-              <a:spcBef>
-                <a:spcPts val="0"/>
-              </a:spcBef>
-              <a:spcAft>
-                <a:spcPts val="0"/>
-              </a:spcAft>
-              <a:buSzPts val="1600"/>
-              <a:buChar char="●"/>
-            </a:pPr>
-            <a:r>
-              <a:rPr lang="en"/>
-              <a:t>When things overlap, the order of the checks decides</a:t>
-            </a:r>
-            <a:endParaRPr/>
-          </a:p>
-          <a:p>
-            <a:pPr indent="-317500" lvl="1" marL="914400" rtl="0" algn="l">
-              <a:spcBef>
-                <a:spcPts val="0"/>
-              </a:spcBef>
-              <a:spcAft>
-                <a:spcPts val="0"/>
-              </a:spcAft>
-              <a:buSzPts val="1400"/>
-              <a:buChar char="○"/>
-            </a:pPr>
-            <a:r>
-              <a:rPr lang="en"/>
-              <a:t>Sun first, then the seed packets, then the lawn</a:t>
-            </a:r>
-            <a:endParaRPr/>
-          </a:p>
-          <a:p>
-            <a:pPr indent="-330200" lvl="0" marL="457200" rtl="0" algn="l">
-              <a:spcBef>
-                <a:spcPts val="0"/>
-              </a:spcBef>
-              <a:spcAft>
-                <a:spcPts val="0"/>
-              </a:spcAft>
-              <a:buSzPts val="1600"/>
-              <a:buChar char="●"/>
-            </a:pPr>
-            <a:r>
-              <a:rPr lang="en"/>
-              <a:t>Show what a click will do: highlight the cell, and a faint plant</a:t>
-            </a:r>
-            <a:endParaRPr/>
+        </p:txBody>
+      </p:sp>
+      <p:sp>
+        <p:nvSpPr>
+          <p:cNvPr id="295" name="Rounded Rectangle 294"/>
+          <p:cNvSpPr/>
+          <p:nvPr/>
+        </p:nvSpPr>
+        <p:spPr>
+          <a:xfrm>
+            <a:off x="548640" y="1417320"/>
+            <a:ext cx="3749039" cy="914400"/>
+          </a:xfrm>
+          <a:prstGeom prst="roundRect">
+            <a:avLst>
+              <a:gd name="adj" fmla="val 12000"/>
+            </a:avLst>
+          </a:prstGeom>
+          <a:solidFill>
+            <a:srgbClr val="2E3338"/>
+          </a:solidFill>
+          <a:ln>
+            <a:noFill/>
+          </a:ln>
+          <a:effectLst/>
+        </p:spPr>
+        <p:style>
+          <a:lnRef idx="1">
+            <a:schemeClr val="accent1"/>
+          </a:lnRef>
+          <a:fillRef idx="3">
+            <a:schemeClr val="accent1"/>
+          </a:fillRef>
+          <a:effectRef idx="2">
+            <a:schemeClr val="accent1"/>
+          </a:effectRef>
+          <a:fontRef idx="minor">
+            <a:schemeClr val="lt1"/>
+          </a:fontRef>
+        </p:style>
+        <p:txBody>
+          <a:bodyPr rtlCol="0" anchor="ctr" wrap="square" lIns="73152" rIns="73152"/>
+          <a:lstStyle/>
+          <a:p>
+            <a:pPr algn="ctr"/>
+            <a:r>
+              <a:rPr sz="1500" b="1">
+                <a:solidFill>
+                  <a:srgbClr val="DEE2E6"/>
+                </a:solidFill>
+              </a:rPr>
+              <a:t>The lawn: a grid</a:t>
+            </a:r>
+          </a:p>
+          <a:p>
+            <a:pPr algn="ctr"/>
+            <a:r>
+              <a:rPr sz="1300" b="0">
+                <a:solidFill>
+                  <a:srgbClr val="9AA3AB"/>
+                </a:solidFill>
+              </a:rPr>
+              <a:t>one division finds the cell,</a:t>
+            </a:r>
+          </a:p>
+          <a:p>
+            <a:pPr algn="ctr"/>
+            <a:r>
+              <a:rPr sz="1300" b="0">
+                <a:solidFill>
+                  <a:srgbClr val="9AA3AB"/>
+                </a:solidFill>
+              </a:rPr>
+              <a:t>however many cells</a:t>
+            </a:r>
+          </a:p>
+        </p:txBody>
+      </p:sp>
+      <p:sp>
+        <p:nvSpPr>
+          <p:cNvPr id="296" name="Rounded Rectangle 295"/>
+          <p:cNvSpPr/>
+          <p:nvPr/>
+        </p:nvSpPr>
+        <p:spPr>
+          <a:xfrm>
+            <a:off x="4846320" y="1417320"/>
+            <a:ext cx="3749039" cy="914400"/>
+          </a:xfrm>
+          <a:prstGeom prst="roundRect">
+            <a:avLst>
+              <a:gd name="adj" fmla="val 12000"/>
+            </a:avLst>
+          </a:prstGeom>
+          <a:solidFill>
+            <a:srgbClr val="2E3338"/>
+          </a:solidFill>
+          <a:ln>
+            <a:noFill/>
+          </a:ln>
+          <a:effectLst/>
+        </p:spPr>
+        <p:style>
+          <a:lnRef idx="1">
+            <a:schemeClr val="accent1"/>
+          </a:lnRef>
+          <a:fillRef idx="3">
+            <a:schemeClr val="accent1"/>
+          </a:fillRef>
+          <a:effectRef idx="2">
+            <a:schemeClr val="accent1"/>
+          </a:effectRef>
+          <a:fontRef idx="minor">
+            <a:schemeClr val="lt1"/>
+          </a:fontRef>
+        </p:style>
+        <p:txBody>
+          <a:bodyPr rtlCol="0" anchor="ctr" wrap="square" lIns="73152" rIns="73152"/>
+          <a:lstStyle/>
+          <a:p>
+            <a:pPr algn="ctr"/>
+            <a:r>
+              <a:rPr sz="1500" b="1">
+                <a:solidFill>
+                  <a:srgbClr val="DEE2E6"/>
+                </a:solidFill>
+              </a:rPr>
+              <a:t>Suns, seed packets: objects</a:t>
+            </a:r>
+          </a:p>
+          <a:p>
+            <a:pPr algn="ctr"/>
+            <a:r>
+              <a:rPr sz="1300" b="0">
+                <a:solidFill>
+                  <a:srgbClr val="9AA3AB"/>
+                </a:solidFill>
+              </a:rPr>
+              <a:t>inside its rectangle?</a:t>
+            </a:r>
+          </a:p>
+          <a:p>
+            <a:pPr algn="ctr"/>
+            <a:r>
+              <a:rPr sz="1300" b="0">
+                <a:solidFill>
+                  <a:srgbClr val="9AA3AB"/>
+                </a:solidFill>
+              </a:rPr>
+              <a:t>within its radius?</a:t>
+            </a:r>
+          </a:p>
+        </p:txBody>
+      </p:sp>
+      <p:sp>
+        <p:nvSpPr>
+          <p:cNvPr id="297" name="TextBox 296"/>
+          <p:cNvSpPr txBox="1"/>
+          <p:nvPr/>
+        </p:nvSpPr>
+        <p:spPr>
+          <a:xfrm>
+            <a:off x="548640" y="2606040"/>
+            <a:ext cx="8046720" cy="320040"/>
+          </a:xfrm>
+          <a:prstGeom prst="rect">
+            <a:avLst/>
+          </a:prstGeom>
+          <a:noFill/>
+        </p:spPr>
+        <p:txBody>
+          <a:bodyPr wrap="square">
+            <a:spAutoFit/>
+          </a:bodyPr>
+          <a:lstStyle/>
+          <a:p>
+            <a:pPr algn="ctr"/>
+            <a:r>
+              <a:rPr sz="1400" b="0" i="0">
+                <a:solidFill>
+                  <a:srgbClr val="9AA3AB"/>
+                </a:solidFill>
+              </a:rPr>
+              <a:t>When they overlap, the order of the checks decides:</a:t>
+            </a:r>
+          </a:p>
+        </p:txBody>
+      </p:sp>
+      <p:sp>
+        <p:nvSpPr>
+          <p:cNvPr id="298" name="Rounded Rectangle 297"/>
+          <p:cNvSpPr/>
+          <p:nvPr/>
+        </p:nvSpPr>
+        <p:spPr>
+          <a:xfrm>
+            <a:off x="1463040" y="2971800"/>
+            <a:ext cx="1828800" cy="502920"/>
+          </a:xfrm>
+          <a:prstGeom prst="roundRect">
+            <a:avLst>
+              <a:gd name="adj" fmla="val 12000"/>
+            </a:avLst>
+          </a:prstGeom>
+          <a:solidFill>
+            <a:srgbClr val="2E3338"/>
+          </a:solidFill>
+          <a:ln w="25400">
+            <a:solidFill>
+              <a:srgbClr val="D45D35"/>
+            </a:solidFill>
+          </a:ln>
+          <a:effectLst/>
+        </p:spPr>
+        <p:style>
+          <a:lnRef idx="1">
+            <a:schemeClr val="accent1"/>
+          </a:lnRef>
+          <a:fillRef idx="3">
+            <a:schemeClr val="accent1"/>
+          </a:fillRef>
+          <a:effectRef idx="2">
+            <a:schemeClr val="accent1"/>
+          </a:effectRef>
+          <a:fontRef idx="minor">
+            <a:schemeClr val="lt1"/>
+          </a:fontRef>
+        </p:style>
+        <p:txBody>
+          <a:bodyPr rtlCol="0" anchor="ctr" wrap="square" lIns="73152" rIns="73152"/>
+          <a:lstStyle/>
+          <a:p>
+            <a:pPr algn="ctr"/>
+            <a:r>
+              <a:rPr sz="1500" b="1">
+                <a:solidFill>
+                  <a:srgbClr val="DEE2E6"/>
+                </a:solidFill>
+              </a:rPr>
+              <a:t>Sun</a:t>
+            </a:r>
+          </a:p>
+        </p:txBody>
+      </p:sp>
+      <p:cxnSp>
+        <p:nvCxnSpPr>
+          <p:cNvPr id="299" name="Connector 298"/>
+          <p:cNvCxnSpPr/>
+          <p:nvPr/>
+        </p:nvCxnSpPr>
+        <p:spPr>
+          <a:xfrm>
+            <a:off x="3310128" y="3223260"/>
+            <a:ext cx="237744" cy="0"/>
+          </a:xfrm>
+          <a:prstGeom prst="line">
+            <a:avLst/>
+          </a:prstGeom>
+          <a:ln w="25400">
+            <a:solidFill>
+              <a:srgbClr val="9AA3AB"/>
+            </a:solidFill>
+            <a:tailEnd type="triangle"/>
+          </a:ln>
+        </p:spPr>
+        <p:style>
+          <a:lnRef idx="2">
+            <a:schemeClr val="accent1"/>
+          </a:lnRef>
+          <a:fillRef idx="0">
+            <a:schemeClr val="accent1"/>
+          </a:fillRef>
+          <a:effectRef idx="1">
+            <a:schemeClr val="accent1"/>
+          </a:effectRef>
+          <a:fontRef idx="minor">
+            <a:schemeClr val="tx1"/>
+          </a:fontRef>
+        </p:style>
+      </p:cxnSp>
+      <p:sp>
+        <p:nvSpPr>
+          <p:cNvPr id="300" name="Rounded Rectangle 299"/>
+          <p:cNvSpPr/>
+          <p:nvPr/>
+        </p:nvSpPr>
+        <p:spPr>
+          <a:xfrm>
+            <a:off x="3566160" y="2971800"/>
+            <a:ext cx="1828800" cy="502920"/>
+          </a:xfrm>
+          <a:prstGeom prst="roundRect">
+            <a:avLst>
+              <a:gd name="adj" fmla="val 12000"/>
+            </a:avLst>
+          </a:prstGeom>
+          <a:solidFill>
+            <a:srgbClr val="2E3338"/>
+          </a:solidFill>
+          <a:ln>
+            <a:noFill/>
+          </a:ln>
+          <a:effectLst/>
+        </p:spPr>
+        <p:style>
+          <a:lnRef idx="1">
+            <a:schemeClr val="accent1"/>
+          </a:lnRef>
+          <a:fillRef idx="3">
+            <a:schemeClr val="accent1"/>
+          </a:fillRef>
+          <a:effectRef idx="2">
+            <a:schemeClr val="accent1"/>
+          </a:effectRef>
+          <a:fontRef idx="minor">
+            <a:schemeClr val="lt1"/>
+          </a:fontRef>
+        </p:style>
+        <p:txBody>
+          <a:bodyPr rtlCol="0" anchor="ctr" wrap="square" lIns="73152" rIns="73152"/>
+          <a:lstStyle/>
+          <a:p>
+            <a:pPr algn="ctr"/>
+            <a:r>
+              <a:rPr sz="1500" b="1">
+                <a:solidFill>
+                  <a:srgbClr val="DEE2E6"/>
+                </a:solidFill>
+              </a:rPr>
+              <a:t>Seed packets</a:t>
+            </a:r>
+          </a:p>
+        </p:txBody>
+      </p:sp>
+      <p:cxnSp>
+        <p:nvCxnSpPr>
+          <p:cNvPr id="301" name="Connector 300"/>
+          <p:cNvCxnSpPr/>
+          <p:nvPr/>
+        </p:nvCxnSpPr>
+        <p:spPr>
+          <a:xfrm>
+            <a:off x="5413248" y="3223260"/>
+            <a:ext cx="237744" cy="0"/>
+          </a:xfrm>
+          <a:prstGeom prst="line">
+            <a:avLst/>
+          </a:prstGeom>
+          <a:ln w="25400">
+            <a:solidFill>
+              <a:srgbClr val="9AA3AB"/>
+            </a:solidFill>
+            <a:tailEnd type="triangle"/>
+          </a:ln>
+        </p:spPr>
+        <p:style>
+          <a:lnRef idx="2">
+            <a:schemeClr val="accent1"/>
+          </a:lnRef>
+          <a:fillRef idx="0">
+            <a:schemeClr val="accent1"/>
+          </a:fillRef>
+          <a:effectRef idx="1">
+            <a:schemeClr val="accent1"/>
+          </a:effectRef>
+          <a:fontRef idx="minor">
+            <a:schemeClr val="tx1"/>
+          </a:fontRef>
+        </p:style>
+      </p:cxnSp>
+      <p:sp>
+        <p:nvSpPr>
+          <p:cNvPr id="302" name="Rounded Rectangle 301"/>
+          <p:cNvSpPr/>
+          <p:nvPr/>
+        </p:nvSpPr>
+        <p:spPr>
+          <a:xfrm>
+            <a:off x="5669279" y="2971800"/>
+            <a:ext cx="1828800" cy="502920"/>
+          </a:xfrm>
+          <a:prstGeom prst="roundRect">
+            <a:avLst>
+              <a:gd name="adj" fmla="val 12000"/>
+            </a:avLst>
+          </a:prstGeom>
+          <a:solidFill>
+            <a:srgbClr val="2E3338"/>
+          </a:solidFill>
+          <a:ln>
+            <a:noFill/>
+          </a:ln>
+          <a:effectLst/>
+        </p:spPr>
+        <p:style>
+          <a:lnRef idx="1">
+            <a:schemeClr val="accent1"/>
+          </a:lnRef>
+          <a:fillRef idx="3">
+            <a:schemeClr val="accent1"/>
+          </a:fillRef>
+          <a:effectRef idx="2">
+            <a:schemeClr val="accent1"/>
+          </a:effectRef>
+          <a:fontRef idx="minor">
+            <a:schemeClr val="lt1"/>
+          </a:fontRef>
+        </p:style>
+        <p:txBody>
+          <a:bodyPr rtlCol="0" anchor="ctr" wrap="square" lIns="73152" rIns="73152"/>
+          <a:lstStyle/>
+          <a:p>
+            <a:pPr algn="ctr"/>
+            <a:r>
+              <a:rPr sz="1500" b="1">
+                <a:solidFill>
+                  <a:srgbClr val="DEE2E6"/>
+                </a:solidFill>
+              </a:rPr>
+              <a:t>The lawn</a:t>
+            </a:r>
+          </a:p>
+        </p:txBody>
+      </p:sp>
+      <p:sp>
+        <p:nvSpPr>
+          <p:cNvPr id="303" name="TextBox 302"/>
+          <p:cNvSpPr txBox="1"/>
+          <p:nvPr/>
+        </p:nvSpPr>
+        <p:spPr>
+          <a:xfrm>
+            <a:off x="548640" y="3703320"/>
+            <a:ext cx="8046720" cy="365760"/>
+          </a:xfrm>
+          <a:prstGeom prst="rect">
+            <a:avLst/>
+          </a:prstGeom>
+          <a:noFill/>
+        </p:spPr>
+        <p:txBody>
+          <a:bodyPr wrap="square">
+            <a:spAutoFit/>
+          </a:bodyPr>
+          <a:lstStyle/>
+          <a:p>
+            <a:pPr algn="ctr"/>
+            <a:r>
+              <a:rPr sz="1300" b="0" i="0">
+                <a:solidFill>
+                  <a:srgbClr val="9AA3AB"/>
+                </a:solidFill>
+              </a:rPr>
+              <a:t>And show what a click will do: highlight the cell, with a faint plant.</a:t>
+            </a:r>
           </a:p>
         </p:txBody>
       </p:sp>
@@ -14736,7 +16018,7 @@
         <p:spPr>
           <a:xfrm>
             <a:off x="311700" y="885950"/>
-            <a:ext cx="8520600" cy="4023300"/>
+            <a:ext cx="8520600" cy="521208"/>
           </a:xfrm>
           <a:prstGeom prst="rect">
             <a:avLst/>
@@ -14760,77 +16042,529 @@
             </a:pPr>
             <a:r>
               <a:rPr lang="en"/>
-              <a:t>A class per kind of thing</a:t>
+              <a:t>A class per kind of thing. It works.</a:t>
             </a:r>
             <a:endParaRPr/>
           </a:p>
-          <a:p>
-            <a:pPr indent="-317500" lvl="1" marL="914400" rtl="0" algn="l">
-              <a:spcBef>
-                <a:spcPts val="0"/>
-              </a:spcBef>
-              <a:spcAft>
-                <a:spcPts val="0"/>
-              </a:spcAft>
-              <a:buSzPts val="1400"/>
-              <a:buChar char="○"/>
-            </a:pPr>
-            <a:r>
-              <a:rPr lang="en"/>
-              <a:t>Plant → Sunflower, Peashooter, WallNut</a:t>
-            </a:r>
-            <a:endParaRPr/>
-          </a:p>
-          <a:p>
-            <a:pPr indent="-317500" lvl="1" marL="914400" rtl="0" algn="l">
-              <a:spcBef>
-                <a:spcPts val="0"/>
-              </a:spcBef>
-              <a:spcAft>
-                <a:spcPts val="0"/>
-              </a:spcAft>
-              <a:buSzPts val="1400"/>
-              <a:buChar char="○"/>
-            </a:pPr>
-            <a:r>
-              <a:rPr lang="en"/>
-              <a:t>Zombie, Pea, Sun</a:t>
-            </a:r>
-            <a:endParaRPr/>
-          </a:p>
-          <a:p>
-            <a:pPr indent="-330200" lvl="0" marL="457200" rtl="0" algn="l">
-              <a:spcBef>
-                <a:spcPts val="0"/>
-              </a:spcBef>
-              <a:spcAft>
-                <a:spcPts val="0"/>
-              </a:spcAft>
-              <a:buSzPts val="1600"/>
-              <a:buChar char="●"/>
-            </a:pPr>
-            <a:r>
-              <a:rPr lang="en"/>
-              <a:t>World: one list per class</a:t>
-            </a:r>
-            <a:endParaRPr/>
-          </a:p>
-          <a:p>
-            <a:pPr indent="-330200" lvl="0" marL="457200" rtl="0" algn="l">
-              <a:spcBef>
-                <a:spcPts val="0"/>
-              </a:spcBef>
-              <a:spcAft>
-                <a:spcPts val="0"/>
-              </a:spcAft>
-              <a:buSzPts val="1600"/>
-              <a:buChar char="●"/>
-            </a:pPr>
-            <a:r>
-              <a:rPr lang="en"/>
-              <a:t>It works</a:t>
-            </a:r>
-            <a:endParaRPr/>
+        </p:txBody>
+      </p:sp>
+      <p:sp>
+        <p:nvSpPr>
+          <p:cNvPr id="295" name="Rounded Rectangle 294"/>
+          <p:cNvSpPr/>
+          <p:nvPr/>
+        </p:nvSpPr>
+        <p:spPr>
+          <a:xfrm>
+            <a:off x="1463040" y="1371600"/>
+            <a:ext cx="2011680" cy="502920"/>
+          </a:xfrm>
+          <a:prstGeom prst="roundRect">
+            <a:avLst>
+              <a:gd name="adj" fmla="val 12000"/>
+            </a:avLst>
+          </a:prstGeom>
+          <a:solidFill>
+            <a:srgbClr val="2E3338"/>
+          </a:solidFill>
+          <a:ln>
+            <a:noFill/>
+          </a:ln>
+          <a:effectLst/>
+        </p:spPr>
+        <p:style>
+          <a:lnRef idx="1">
+            <a:schemeClr val="accent1"/>
+          </a:lnRef>
+          <a:fillRef idx="3">
+            <a:schemeClr val="accent1"/>
+          </a:fillRef>
+          <a:effectRef idx="2">
+            <a:schemeClr val="accent1"/>
+          </a:effectRef>
+          <a:fontRef idx="minor">
+            <a:schemeClr val="lt1"/>
+          </a:fontRef>
+        </p:style>
+        <p:txBody>
+          <a:bodyPr rtlCol="0" anchor="ctr" wrap="square" lIns="73152" rIns="73152"/>
+          <a:lstStyle/>
+          <a:p>
+            <a:pPr algn="ctr"/>
+            <a:r>
+              <a:rPr sz="1500" b="1">
+                <a:solidFill>
+                  <a:srgbClr val="DEE2E6"/>
+                </a:solidFill>
+              </a:rPr>
+              <a:t>Plant</a:t>
+            </a:r>
+          </a:p>
+        </p:txBody>
+      </p:sp>
+      <p:sp>
+        <p:nvSpPr>
+          <p:cNvPr id="296" name="Rounded Rectangle 295"/>
+          <p:cNvSpPr/>
+          <p:nvPr/>
+        </p:nvSpPr>
+        <p:spPr>
+          <a:xfrm>
+            <a:off x="365760" y="2286000"/>
+            <a:ext cx="1325880" cy="502920"/>
+          </a:xfrm>
+          <a:prstGeom prst="roundRect">
+            <a:avLst>
+              <a:gd name="adj" fmla="val 12000"/>
+            </a:avLst>
+          </a:prstGeom>
+          <a:solidFill>
+            <a:srgbClr val="2E3338"/>
+          </a:solidFill>
+          <a:ln>
+            <a:noFill/>
+          </a:ln>
+          <a:effectLst/>
+        </p:spPr>
+        <p:style>
+          <a:lnRef idx="1">
+            <a:schemeClr val="accent1"/>
+          </a:lnRef>
+          <a:fillRef idx="3">
+            <a:schemeClr val="accent1"/>
+          </a:fillRef>
+          <a:effectRef idx="2">
+            <a:schemeClr val="accent1"/>
+          </a:effectRef>
+          <a:fontRef idx="minor">
+            <a:schemeClr val="lt1"/>
+          </a:fontRef>
+        </p:style>
+        <p:txBody>
+          <a:bodyPr rtlCol="0" anchor="ctr" wrap="square" lIns="73152" rIns="73152"/>
+          <a:lstStyle/>
+          <a:p>
+            <a:pPr algn="ctr"/>
+            <a:r>
+              <a:rPr sz="1300" b="1">
+                <a:solidFill>
+                  <a:srgbClr val="DEE2E6"/>
+                </a:solidFill>
+              </a:rPr>
+              <a:t>Sunflower</a:t>
+            </a:r>
+          </a:p>
+        </p:txBody>
+      </p:sp>
+      <p:cxnSp>
+        <p:nvCxnSpPr>
+          <p:cNvPr id="297" name="Connector 296"/>
+          <p:cNvCxnSpPr/>
+          <p:nvPr/>
+        </p:nvCxnSpPr>
+        <p:spPr>
+          <a:xfrm flipV="1">
+            <a:off x="1024128" y="1892807"/>
+            <a:ext cx="1444752" cy="374905"/>
+          </a:xfrm>
+          <a:prstGeom prst="line">
+            <a:avLst/>
+          </a:prstGeom>
+          <a:ln w="25400">
+            <a:solidFill>
+              <a:srgbClr val="9AA3AB"/>
+            </a:solidFill>
+            <a:tailEnd type="triangle"/>
+          </a:ln>
+        </p:spPr>
+        <p:style>
+          <a:lnRef idx="2">
+            <a:schemeClr val="accent1"/>
+          </a:lnRef>
+          <a:fillRef idx="0">
+            <a:schemeClr val="accent1"/>
+          </a:fillRef>
+          <a:effectRef idx="1">
+            <a:schemeClr val="accent1"/>
+          </a:effectRef>
+          <a:fontRef idx="minor">
+            <a:schemeClr val="tx1"/>
+          </a:fontRef>
+        </p:style>
+      </p:cxnSp>
+      <p:sp>
+        <p:nvSpPr>
+          <p:cNvPr id="298" name="Rounded Rectangle 297"/>
+          <p:cNvSpPr/>
+          <p:nvPr/>
+        </p:nvSpPr>
+        <p:spPr>
+          <a:xfrm>
+            <a:off x="1828800" y="2286000"/>
+            <a:ext cx="1325880" cy="502920"/>
+          </a:xfrm>
+          <a:prstGeom prst="roundRect">
+            <a:avLst>
+              <a:gd name="adj" fmla="val 12000"/>
+            </a:avLst>
+          </a:prstGeom>
+          <a:solidFill>
+            <a:srgbClr val="2E3338"/>
+          </a:solidFill>
+          <a:ln>
+            <a:noFill/>
+          </a:ln>
+          <a:effectLst/>
+        </p:spPr>
+        <p:style>
+          <a:lnRef idx="1">
+            <a:schemeClr val="accent1"/>
+          </a:lnRef>
+          <a:fillRef idx="3">
+            <a:schemeClr val="accent1"/>
+          </a:fillRef>
+          <a:effectRef idx="2">
+            <a:schemeClr val="accent1"/>
+          </a:effectRef>
+          <a:fontRef idx="minor">
+            <a:schemeClr val="lt1"/>
+          </a:fontRef>
+        </p:style>
+        <p:txBody>
+          <a:bodyPr rtlCol="0" anchor="ctr" wrap="square" lIns="73152" rIns="73152"/>
+          <a:lstStyle/>
+          <a:p>
+            <a:pPr algn="ctr"/>
+            <a:r>
+              <a:rPr sz="1300" b="1">
+                <a:solidFill>
+                  <a:srgbClr val="DEE2E6"/>
+                </a:solidFill>
+              </a:rPr>
+              <a:t>Peashooter</a:t>
+            </a:r>
+          </a:p>
+        </p:txBody>
+      </p:sp>
+      <p:cxnSp>
+        <p:nvCxnSpPr>
+          <p:cNvPr id="299" name="Connector 298"/>
+          <p:cNvCxnSpPr/>
+          <p:nvPr/>
+        </p:nvCxnSpPr>
+        <p:spPr>
+          <a:xfrm flipH="1" flipV="1">
+            <a:off x="2468880" y="1892807"/>
+            <a:ext cx="18288" cy="374905"/>
+          </a:xfrm>
+          <a:prstGeom prst="line">
+            <a:avLst/>
+          </a:prstGeom>
+          <a:ln w="25400">
+            <a:solidFill>
+              <a:srgbClr val="9AA3AB"/>
+            </a:solidFill>
+            <a:tailEnd type="triangle"/>
+          </a:ln>
+        </p:spPr>
+        <p:style>
+          <a:lnRef idx="2">
+            <a:schemeClr val="accent1"/>
+          </a:lnRef>
+          <a:fillRef idx="0">
+            <a:schemeClr val="accent1"/>
+          </a:fillRef>
+          <a:effectRef idx="1">
+            <a:schemeClr val="accent1"/>
+          </a:effectRef>
+          <a:fontRef idx="minor">
+            <a:schemeClr val="tx1"/>
+          </a:fontRef>
+        </p:style>
+      </p:cxnSp>
+      <p:sp>
+        <p:nvSpPr>
+          <p:cNvPr id="300" name="Rounded Rectangle 299"/>
+          <p:cNvSpPr/>
+          <p:nvPr/>
+        </p:nvSpPr>
+        <p:spPr>
+          <a:xfrm>
+            <a:off x="3291840" y="2286000"/>
+            <a:ext cx="1325880" cy="502920"/>
+          </a:xfrm>
+          <a:prstGeom prst="roundRect">
+            <a:avLst>
+              <a:gd name="adj" fmla="val 12000"/>
+            </a:avLst>
+          </a:prstGeom>
+          <a:solidFill>
+            <a:srgbClr val="2E3338"/>
+          </a:solidFill>
+          <a:ln>
+            <a:noFill/>
+          </a:ln>
+          <a:effectLst/>
+        </p:spPr>
+        <p:style>
+          <a:lnRef idx="1">
+            <a:schemeClr val="accent1"/>
+          </a:lnRef>
+          <a:fillRef idx="3">
+            <a:schemeClr val="accent1"/>
+          </a:fillRef>
+          <a:effectRef idx="2">
+            <a:schemeClr val="accent1"/>
+          </a:effectRef>
+          <a:fontRef idx="minor">
+            <a:schemeClr val="lt1"/>
+          </a:fontRef>
+        </p:style>
+        <p:txBody>
+          <a:bodyPr rtlCol="0" anchor="ctr" wrap="square" lIns="73152" rIns="73152"/>
+          <a:lstStyle/>
+          <a:p>
+            <a:pPr algn="ctr"/>
+            <a:r>
+              <a:rPr sz="1300" b="1">
+                <a:solidFill>
+                  <a:srgbClr val="DEE2E6"/>
+                </a:solidFill>
+              </a:rPr>
+              <a:t>WallNut</a:t>
+            </a:r>
+          </a:p>
+        </p:txBody>
+      </p:sp>
+      <p:cxnSp>
+        <p:nvCxnSpPr>
+          <p:cNvPr id="301" name="Connector 300"/>
+          <p:cNvCxnSpPr/>
+          <p:nvPr/>
+        </p:nvCxnSpPr>
+        <p:spPr>
+          <a:xfrm flipH="1" flipV="1">
+            <a:off x="2468880" y="1892807"/>
+            <a:ext cx="1481328" cy="374905"/>
+          </a:xfrm>
+          <a:prstGeom prst="line">
+            <a:avLst/>
+          </a:prstGeom>
+          <a:ln w="25400">
+            <a:solidFill>
+              <a:srgbClr val="9AA3AB"/>
+            </a:solidFill>
+            <a:tailEnd type="triangle"/>
+          </a:ln>
+        </p:spPr>
+        <p:style>
+          <a:lnRef idx="2">
+            <a:schemeClr val="accent1"/>
+          </a:lnRef>
+          <a:fillRef idx="0">
+            <a:schemeClr val="accent1"/>
+          </a:fillRef>
+          <a:effectRef idx="1">
+            <a:schemeClr val="accent1"/>
+          </a:effectRef>
+          <a:fontRef idx="minor">
+            <a:schemeClr val="tx1"/>
+          </a:fontRef>
+        </p:style>
+      </p:cxnSp>
+      <p:sp>
+        <p:nvSpPr>
+          <p:cNvPr id="302" name="Rounded Rectangle 301"/>
+          <p:cNvSpPr/>
+          <p:nvPr/>
+        </p:nvSpPr>
+        <p:spPr>
+          <a:xfrm>
+            <a:off x="4846320" y="1371600"/>
+            <a:ext cx="1371600" cy="502920"/>
+          </a:xfrm>
+          <a:prstGeom prst="roundRect">
+            <a:avLst>
+              <a:gd name="adj" fmla="val 12000"/>
+            </a:avLst>
+          </a:prstGeom>
+          <a:solidFill>
+            <a:srgbClr val="2E3338"/>
+          </a:solidFill>
+          <a:ln>
+            <a:noFill/>
+          </a:ln>
+          <a:effectLst/>
+        </p:spPr>
+        <p:style>
+          <a:lnRef idx="1">
+            <a:schemeClr val="accent1"/>
+          </a:lnRef>
+          <a:fillRef idx="3">
+            <a:schemeClr val="accent1"/>
+          </a:fillRef>
+          <a:effectRef idx="2">
+            <a:schemeClr val="accent1"/>
+          </a:effectRef>
+          <a:fontRef idx="minor">
+            <a:schemeClr val="lt1"/>
+          </a:fontRef>
+        </p:style>
+        <p:txBody>
+          <a:bodyPr rtlCol="0" anchor="ctr" wrap="square" lIns="73152" rIns="73152"/>
+          <a:lstStyle/>
+          <a:p>
+            <a:pPr algn="ctr"/>
+            <a:r>
+              <a:rPr sz="1500" b="1">
+                <a:solidFill>
+                  <a:srgbClr val="DEE2E6"/>
+                </a:solidFill>
+              </a:rPr>
+              <a:t>Zombie</a:t>
+            </a:r>
+          </a:p>
+        </p:txBody>
+      </p:sp>
+      <p:sp>
+        <p:nvSpPr>
+          <p:cNvPr id="303" name="Rounded Rectangle 302"/>
+          <p:cNvSpPr/>
+          <p:nvPr/>
+        </p:nvSpPr>
+        <p:spPr>
+          <a:xfrm>
+            <a:off x="6355080" y="1371600"/>
+            <a:ext cx="1097280" cy="502920"/>
+          </a:xfrm>
+          <a:prstGeom prst="roundRect">
+            <a:avLst>
+              <a:gd name="adj" fmla="val 12000"/>
+            </a:avLst>
+          </a:prstGeom>
+          <a:solidFill>
+            <a:srgbClr val="2E3338"/>
+          </a:solidFill>
+          <a:ln>
+            <a:noFill/>
+          </a:ln>
+          <a:effectLst/>
+        </p:spPr>
+        <p:style>
+          <a:lnRef idx="1">
+            <a:schemeClr val="accent1"/>
+          </a:lnRef>
+          <a:fillRef idx="3">
+            <a:schemeClr val="accent1"/>
+          </a:fillRef>
+          <a:effectRef idx="2">
+            <a:schemeClr val="accent1"/>
+          </a:effectRef>
+          <a:fontRef idx="minor">
+            <a:schemeClr val="lt1"/>
+          </a:fontRef>
+        </p:style>
+        <p:txBody>
+          <a:bodyPr rtlCol="0" anchor="ctr" wrap="square" lIns="73152" rIns="73152"/>
+          <a:lstStyle/>
+          <a:p>
+            <a:pPr algn="ctr"/>
+            <a:r>
+              <a:rPr sz="1500" b="1">
+                <a:solidFill>
+                  <a:srgbClr val="DEE2E6"/>
+                </a:solidFill>
+              </a:rPr>
+              <a:t>Pea</a:t>
+            </a:r>
+          </a:p>
+        </p:txBody>
+      </p:sp>
+      <p:sp>
+        <p:nvSpPr>
+          <p:cNvPr id="304" name="Rounded Rectangle 303"/>
+          <p:cNvSpPr/>
+          <p:nvPr/>
+        </p:nvSpPr>
+        <p:spPr>
+          <a:xfrm>
+            <a:off x="7589520" y="1371600"/>
+            <a:ext cx="1097280" cy="502920"/>
+          </a:xfrm>
+          <a:prstGeom prst="roundRect">
+            <a:avLst>
+              <a:gd name="adj" fmla="val 12000"/>
+            </a:avLst>
+          </a:prstGeom>
+          <a:solidFill>
+            <a:srgbClr val="2E3338"/>
+          </a:solidFill>
+          <a:ln>
+            <a:noFill/>
+          </a:ln>
+          <a:effectLst/>
+        </p:spPr>
+        <p:style>
+          <a:lnRef idx="1">
+            <a:schemeClr val="accent1"/>
+          </a:lnRef>
+          <a:fillRef idx="3">
+            <a:schemeClr val="accent1"/>
+          </a:fillRef>
+          <a:effectRef idx="2">
+            <a:schemeClr val="accent1"/>
+          </a:effectRef>
+          <a:fontRef idx="minor">
+            <a:schemeClr val="lt1"/>
+          </a:fontRef>
+        </p:style>
+        <p:txBody>
+          <a:bodyPr rtlCol="0" anchor="ctr" wrap="square" lIns="73152" rIns="73152"/>
+          <a:lstStyle/>
+          <a:p>
+            <a:pPr algn="ctr"/>
+            <a:r>
+              <a:rPr sz="1500" b="1">
+                <a:solidFill>
+                  <a:srgbClr val="DEE2E6"/>
+                </a:solidFill>
+              </a:rPr>
+              <a:t>Sun</a:t>
+            </a:r>
+          </a:p>
+        </p:txBody>
+      </p:sp>
+      <p:sp>
+        <p:nvSpPr>
+          <p:cNvPr id="305" name="TextBox 304"/>
+          <p:cNvSpPr txBox="1"/>
+          <p:nvPr/>
+        </p:nvSpPr>
+        <p:spPr>
+          <a:xfrm>
+            <a:off x="365760" y="3108960"/>
+            <a:ext cx="8412480" cy="365760"/>
+          </a:xfrm>
+          <a:prstGeom prst="rect">
+            <a:avLst/>
+          </a:prstGeom>
+          <a:noFill/>
+        </p:spPr>
+        <p:txBody>
+          <a:bodyPr wrap="square">
+            <a:spAutoFit/>
+          </a:bodyPr>
+          <a:lstStyle/>
+          <a:p>
+            <a:pPr algn="ctr"/>
+            <a:r>
+              <a:rPr sz="1400" b="0" i="0">
+                <a:solidFill>
+                  <a:srgbClr val="9AA3AB"/>
+                </a:solidFill>
+              </a:rPr>
+              <a:t>The World keeps one list per class.</a:t>
+            </a:r>
           </a:p>
         </p:txBody>
       </p:sp>
@@ -14911,7 +16645,7 @@
         <p:spPr>
           <a:xfrm>
             <a:off x="311700" y="885950"/>
-            <a:ext cx="8520600" cy="4023300"/>
+            <a:ext cx="8520600" cy="521208"/>
           </a:xfrm>
           <a:prstGeom prst="rect">
             <a:avLst/>
@@ -14935,94 +16669,349 @@
             </a:pPr>
             <a:r>
               <a:rPr lang="en"/>
-              <a:t>A Repeater: a Peashooter subclass that overrides… what?</a:t>
+              <a:t>Four new things. Where does each one go?</a:t>
             </a:r>
             <a:endParaRPr/>
           </a:p>
-          <a:p>
-            <a:pPr indent="-330200" lvl="0" marL="457200" rtl="0" algn="l">
-              <a:spcBef>
-                <a:spcPts val="0"/>
-              </a:spcBef>
-              <a:spcAft>
-                <a:spcPts val="0"/>
-              </a:spcAft>
-              <a:buSzPts val="1600"/>
-              <a:buChar char="●"/>
-            </a:pPr>
-            <a:r>
-              <a:rPr lang="en"/>
-              <a:t>A Conehead: a Zombie subclass. A plant with armour: copy it</a:t>
-            </a:r>
-            <a:endParaRPr/>
-          </a:p>
-          <a:p>
-            <a:pPr indent="-330200" lvl="0" marL="457200" rtl="0" algn="l">
-              <a:spcBef>
-                <a:spcPts val="0"/>
-              </a:spcBef>
-              <a:spcAft>
-                <a:spcPts val="0"/>
-              </a:spcAft>
-              <a:buSzPts val="1600"/>
-              <a:buChar char="●"/>
-            </a:pPr>
-            <a:r>
-              <a:rPr lang="en"/>
-              <a:t>A plant that shoots and makes sun: which parent?</a:t>
-            </a:r>
-            <a:endParaRPr/>
-          </a:p>
-          <a:p>
-            <a:pPr indent="-317500" lvl="1" marL="914400" rtl="0" algn="l">
-              <a:spcBef>
-                <a:spcPts val="0"/>
-              </a:spcBef>
-              <a:spcAft>
-                <a:spcPts val="0"/>
-              </a:spcAft>
-              <a:buSzPts val="1400"/>
-              <a:buChar char="○"/>
-            </a:pPr>
-            <a:r>
-              <a:rPr lang="en"/>
-              <a:t>C# allows one base class: copy the other ability</a:t>
-            </a:r>
-            <a:endParaRPr/>
-          </a:p>
-          <a:p>
-            <a:pPr indent="-330200" lvl="0" marL="457200" rtl="0" algn="l">
-              <a:spcBef>
-                <a:spcPts val="0"/>
-              </a:spcBef>
-              <a:spcAft>
-                <a:spcPts val="0"/>
-              </a:spcAft>
-              <a:buSzPts val="1600"/>
-              <a:buChar char="●"/>
-            </a:pPr>
-            <a:r>
-              <a:rPr lang="en"/>
-              <a:t>Health is already copied: a zombie isn’t a plant</a:t>
-            </a:r>
-            <a:endParaRPr/>
-          </a:p>
-          <a:p>
-            <a:pPr indent="-330200" lvl="0" marL="457200" rtl="0" algn="l">
-              <a:spcBef>
-                <a:spcPts val="0"/>
-              </a:spcBef>
-              <a:spcAft>
-                <a:spcPts val="0"/>
-              </a:spcAft>
-              <a:buSzPts val="1600"/>
-              <a:buChar char="●"/>
-            </a:pPr>
-            <a:r>
-              <a:rPr lang="en"/>
-              <a:t>Inheritance says what something is; here, what matters is what it can do</a:t>
-            </a:r>
-            <a:endParaRPr/>
+        </p:txBody>
+      </p:sp>
+      <p:sp>
+        <p:nvSpPr>
+          <p:cNvPr id="295" name="Rounded Rectangle 294"/>
+          <p:cNvSpPr/>
+          <p:nvPr/>
+        </p:nvSpPr>
+        <p:spPr>
+          <a:xfrm>
+            <a:off x="411480" y="1417320"/>
+            <a:ext cx="1965960" cy="1188720"/>
+          </a:xfrm>
+          <a:prstGeom prst="roundRect">
+            <a:avLst>
+              <a:gd name="adj" fmla="val 12000"/>
+            </a:avLst>
+          </a:prstGeom>
+          <a:solidFill>
+            <a:srgbClr val="2E3338"/>
+          </a:solidFill>
+          <a:ln>
+            <a:noFill/>
+          </a:ln>
+          <a:effectLst/>
+        </p:spPr>
+        <p:style>
+          <a:lnRef idx="1">
+            <a:schemeClr val="accent1"/>
+          </a:lnRef>
+          <a:fillRef idx="3">
+            <a:schemeClr val="accent1"/>
+          </a:fillRef>
+          <a:effectRef idx="2">
+            <a:schemeClr val="accent1"/>
+          </a:effectRef>
+          <a:fontRef idx="minor">
+            <a:schemeClr val="lt1"/>
+          </a:fontRef>
+        </p:style>
+        <p:txBody>
+          <a:bodyPr rtlCol="0" anchor="ctr" wrap="square" lIns="73152" rIns="73152"/>
+          <a:lstStyle/>
+          <a:p>
+            <a:pPr algn="ctr"/>
+            <a:r>
+              <a:rPr sz="1500" b="1">
+                <a:solidFill>
+                  <a:srgbClr val="DEE2E6"/>
+                </a:solidFill>
+              </a:rPr>
+              <a:t>Repeater</a:t>
+            </a:r>
+          </a:p>
+          <a:p>
+            <a:pPr algn="ctr"/>
+            <a:r>
+              <a:rPr sz="1300" b="0">
+                <a:solidFill>
+                  <a:srgbClr val="9AA3AB"/>
+                </a:solidFill>
+              </a:rPr>
+              <a:t>a Peashooter subclass</a:t>
+            </a:r>
+          </a:p>
+          <a:p>
+            <a:pPr algn="ctr"/>
+            <a:r>
+              <a:rPr sz="1300" b="0">
+                <a:solidFill>
+                  <a:srgbClr val="9AA3AB"/>
+                </a:solidFill>
+              </a:rPr>
+              <a:t>that overrides... what?</a:t>
+            </a:r>
+          </a:p>
+        </p:txBody>
+      </p:sp>
+      <p:sp>
+        <p:nvSpPr>
+          <p:cNvPr id="296" name="Rounded Rectangle 295"/>
+          <p:cNvSpPr/>
+          <p:nvPr/>
+        </p:nvSpPr>
+        <p:spPr>
+          <a:xfrm>
+            <a:off x="2514600" y="1417320"/>
+            <a:ext cx="1965960" cy="1188720"/>
+          </a:xfrm>
+          <a:prstGeom prst="roundRect">
+            <a:avLst>
+              <a:gd name="adj" fmla="val 12000"/>
+            </a:avLst>
+          </a:prstGeom>
+          <a:solidFill>
+            <a:srgbClr val="2E3338"/>
+          </a:solidFill>
+          <a:ln>
+            <a:noFill/>
+          </a:ln>
+          <a:effectLst/>
+        </p:spPr>
+        <p:style>
+          <a:lnRef idx="1">
+            <a:schemeClr val="accent1"/>
+          </a:lnRef>
+          <a:fillRef idx="3">
+            <a:schemeClr val="accent1"/>
+          </a:fillRef>
+          <a:effectRef idx="2">
+            <a:schemeClr val="accent1"/>
+          </a:effectRef>
+          <a:fontRef idx="minor">
+            <a:schemeClr val="lt1"/>
+          </a:fontRef>
+        </p:style>
+        <p:txBody>
+          <a:bodyPr rtlCol="0" anchor="ctr" wrap="square" lIns="73152" rIns="73152"/>
+          <a:lstStyle/>
+          <a:p>
+            <a:pPr algn="ctr"/>
+            <a:r>
+              <a:rPr sz="1500" b="1">
+                <a:solidFill>
+                  <a:srgbClr val="DEE2E6"/>
+                </a:solidFill>
+              </a:rPr>
+              <a:t>Conehead</a:t>
+            </a:r>
+          </a:p>
+          <a:p>
+            <a:pPr algn="ctr"/>
+            <a:r>
+              <a:rPr sz="1300" b="0">
+                <a:solidFill>
+                  <a:srgbClr val="9AA3AB"/>
+                </a:solidFill>
+              </a:rPr>
+              <a:t>a Zombie subclass;</a:t>
+            </a:r>
+          </a:p>
+          <a:p>
+            <a:pPr algn="ctr"/>
+            <a:r>
+              <a:rPr sz="1300" b="0">
+                <a:solidFill>
+                  <a:srgbClr val="9AA3AB"/>
+                </a:solidFill>
+              </a:rPr>
+              <a:t>armour for a plant: copy it</a:t>
+            </a:r>
+          </a:p>
+        </p:txBody>
+      </p:sp>
+      <p:sp>
+        <p:nvSpPr>
+          <p:cNvPr id="297" name="Rounded Rectangle 296"/>
+          <p:cNvSpPr/>
+          <p:nvPr/>
+        </p:nvSpPr>
+        <p:spPr>
+          <a:xfrm>
+            <a:off x="4617720" y="1417320"/>
+            <a:ext cx="1965960" cy="1188720"/>
+          </a:xfrm>
+          <a:prstGeom prst="roundRect">
+            <a:avLst>
+              <a:gd name="adj" fmla="val 12000"/>
+            </a:avLst>
+          </a:prstGeom>
+          <a:solidFill>
+            <a:srgbClr val="2E3338"/>
+          </a:solidFill>
+          <a:ln w="25400">
+            <a:solidFill>
+              <a:srgbClr val="D45D35"/>
+            </a:solidFill>
+          </a:ln>
+          <a:effectLst/>
+        </p:spPr>
+        <p:style>
+          <a:lnRef idx="1">
+            <a:schemeClr val="accent1"/>
+          </a:lnRef>
+          <a:fillRef idx="3">
+            <a:schemeClr val="accent1"/>
+          </a:fillRef>
+          <a:effectRef idx="2">
+            <a:schemeClr val="accent1"/>
+          </a:effectRef>
+          <a:fontRef idx="minor">
+            <a:schemeClr val="lt1"/>
+          </a:fontRef>
+        </p:style>
+        <p:txBody>
+          <a:bodyPr rtlCol="0" anchor="ctr" wrap="square" lIns="73152" rIns="73152"/>
+          <a:lstStyle/>
+          <a:p>
+            <a:pPr algn="ctr"/>
+            <a:r>
+              <a:rPr sz="1500" b="1">
+                <a:solidFill>
+                  <a:srgbClr val="DEE2E6"/>
+                </a:solidFill>
+              </a:rPr>
+              <a:t>Shoots and makes sun</a:t>
+            </a:r>
+          </a:p>
+          <a:p>
+            <a:pPr algn="ctr"/>
+            <a:r>
+              <a:rPr sz="1300" b="0">
+                <a:solidFill>
+                  <a:srgbClr val="9AA3AB"/>
+                </a:solidFill>
+              </a:rPr>
+              <a:t>which parent?</a:t>
+            </a:r>
+          </a:p>
+          <a:p>
+            <a:pPr algn="ctr"/>
+            <a:r>
+              <a:rPr sz="1300" b="0">
+                <a:solidFill>
+                  <a:srgbClr val="9AA3AB"/>
+                </a:solidFill>
+              </a:rPr>
+              <a:t>C# allows only one</a:t>
+            </a:r>
+          </a:p>
+        </p:txBody>
+      </p:sp>
+      <p:sp>
+        <p:nvSpPr>
+          <p:cNvPr id="298" name="Rounded Rectangle 297"/>
+          <p:cNvSpPr/>
+          <p:nvPr/>
+        </p:nvSpPr>
+        <p:spPr>
+          <a:xfrm>
+            <a:off x="6720840" y="1417320"/>
+            <a:ext cx="1965960" cy="1188720"/>
+          </a:xfrm>
+          <a:prstGeom prst="roundRect">
+            <a:avLst>
+              <a:gd name="adj" fmla="val 12000"/>
+            </a:avLst>
+          </a:prstGeom>
+          <a:solidFill>
+            <a:srgbClr val="2E3338"/>
+          </a:solidFill>
+          <a:ln>
+            <a:noFill/>
+          </a:ln>
+          <a:effectLst/>
+        </p:spPr>
+        <p:style>
+          <a:lnRef idx="1">
+            <a:schemeClr val="accent1"/>
+          </a:lnRef>
+          <a:fillRef idx="3">
+            <a:schemeClr val="accent1"/>
+          </a:fillRef>
+          <a:effectRef idx="2">
+            <a:schemeClr val="accent1"/>
+          </a:effectRef>
+          <a:fontRef idx="minor">
+            <a:schemeClr val="lt1"/>
+          </a:fontRef>
+        </p:style>
+        <p:txBody>
+          <a:bodyPr rtlCol="0" anchor="ctr" wrap="square" lIns="73152" rIns="73152"/>
+          <a:lstStyle/>
+          <a:p>
+            <a:pPr algn="ctr"/>
+            <a:r>
+              <a:rPr sz="1500" b="1">
+                <a:solidFill>
+                  <a:srgbClr val="DEE2E6"/>
+                </a:solidFill>
+              </a:rPr>
+              <a:t>Health</a:t>
+            </a:r>
+          </a:p>
+          <a:p>
+            <a:pPr algn="ctr"/>
+            <a:r>
+              <a:rPr sz="1300" b="0">
+                <a:solidFill>
+                  <a:srgbClr val="9AA3AB"/>
+                </a:solidFill>
+              </a:rPr>
+              <a:t>already copied:</a:t>
+            </a:r>
+          </a:p>
+          <a:p>
+            <a:pPr algn="ctr"/>
+            <a:r>
+              <a:rPr sz="1300" b="0">
+                <a:solidFill>
+                  <a:srgbClr val="9AA3AB"/>
+                </a:solidFill>
+              </a:rPr>
+              <a:t>a zombie isn’t a plant</a:t>
+            </a:r>
+          </a:p>
+        </p:txBody>
+      </p:sp>
+      <p:sp>
+        <p:nvSpPr>
+          <p:cNvPr id="299" name="TextBox 298"/>
+          <p:cNvSpPr txBox="1"/>
+          <p:nvPr/>
+        </p:nvSpPr>
+        <p:spPr>
+          <a:xfrm>
+            <a:off x="457200" y="2926080"/>
+            <a:ext cx="8229600" cy="731520"/>
+          </a:xfrm>
+          <a:prstGeom prst="rect">
+            <a:avLst/>
+          </a:prstGeom>
+          <a:noFill/>
+        </p:spPr>
+        <p:txBody>
+          <a:bodyPr wrap="square">
+            <a:spAutoFit/>
+          </a:bodyPr>
+          <a:lstStyle/>
+          <a:p>
+            <a:pPr algn="ctr"/>
+            <a:r>
+              <a:rPr sz="1600" b="1" i="0">
+                <a:solidFill>
+                  <a:srgbClr val="DEE2E6"/>
+                </a:solidFill>
+              </a:rPr>
+              <a:t>Inheritance says what something is. Here, what matters is what it can do.</a:t>
+            </a:r>
           </a:p>
         </p:txBody>
       </p:sp>

--- a/slides/09 Plants vs. Zombies.pptx
+++ b/slides/09 Plants vs. Zombies.pptx
@@ -806,19 +806,14 @@
           </a:bodyPr>
           <a:lstStyle/>
           <a:p>
-            <a:pPr indent="0" lvl="0" marL="0" rtl="0" algn="l">
-              <a:spcBef>
-                <a:spcPts val="0"/>
-              </a:spcBef>
-              <a:spcAft>
-                <a:spcPts val="0"/>
-              </a:spcAft>
-              <a:buNone/>
-            </a:pPr>
-            <a:r>
-              <a:t/>
-            </a:r>
-            <a:endParaRPr/>
+            <a:r>
+              <a:t>Welcome. Today we build Plants vs. Zombies. The main topic: the Component pattern.</a:t>
+            </a:r>
+          </a:p>
+          <a:p>
+            <a:r>
+              <a:t>Start by playing the finished game, Pvz4, before any code.</a:t>
+            </a:r>
           </a:p>
         </p:txBody>
       </p:sp>
@@ -875,42 +870,12 @@
           <a:lstStyle/>
           <a:p>
             <a:r>
-              <a:t>Talking points:</a:t>
-            </a:r>
-          </a:p>
-          <a:p>
-            <a:r>
-              <a:t>- Finding each other takes code</a:t>
-            </a:r>
-          </a:p>
-          <a:p>
-            <a:r>
-              <a:t>  - Get&lt;Eater&gt;() searches a list, and may return null</a:t>
-            </a:r>
-          </a:p>
-          <a:p>
-            <a:r>
-              <a:t>- Order matters</a:t>
-            </a:r>
-          </a:p>
-          <a:p>
-            <a:r>
-              <a:t>  - Components update and draw in the order they were added</a:t>
-            </a:r>
-          </a:p>
-          <a:p>
-            <a:r>
-              <a:t>- Where does a rule go?</a:t>
-            </a:r>
-          </a:p>
-          <a:p>
-            <a:r>
-              <a:t>  - A pea hits a zombie: the pea’s rule, or the zombie’s?</a:t>
-            </a:r>
-          </a:p>
-          <a:p>
-            <a:r>
-              <a:t>  - Geometry Wars moves such rules into systems</a:t>
+              <a:t>Three costs: finding each other takes code (and may return null), the order they run in matters, and some rules have no obvious owner.</a:t>
+            </a:r>
+          </a:p>
+          <a:p>
+            <a:r>
+              <a:t>Ask the third question: a pea hits a zombie; whose rule is it? Geometry Wars answers with systems.</a:t>
             </a:r>
           </a:p>
         </p:txBody>
@@ -968,42 +933,12 @@
           <a:lstStyle/>
           <a:p>
             <a:r>
-              <a:t>Talking points:</a:t>
-            </a:r>
-          </a:p>
-          <a:p>
-            <a:r>
-              <a:t>- Prototype (Angry Birds): copy a configured object</a:t>
-            </a:r>
-          </a:p>
-          <a:p>
-            <a:r>
-              <a:t>  - Shared data is copied into every clone</a:t>
-            </a:r>
-          </a:p>
-          <a:p>
-            <a:r>
-              <a:t>  - Good for “make more like this one”</a:t>
-            </a:r>
-          </a:p>
-          <a:p>
-            <a:r>
-              <a:t>- Type Object: a separate type class creates instances</a:t>
-            </a:r>
-          </a:p>
-          <a:p>
-            <a:r>
-              <a:t>  - Shared data is kept once, in the type</a:t>
-            </a:r>
-          </a:p>
-          <a:p>
-            <a:r>
-              <a:t>  - An instance can refer to its type</a:t>
-            </a:r>
-          </a:p>
-          <a:p>
-            <a:r>
-              <a:t>  - Good for kinds with their own data and rules</a:t>
+              <a:t>Angry Birds copied a configured object; here a type creates instances and keeps shared data once.</a:t>
+            </a:r>
+          </a:p>
+          <a:p>
+            <a:r>
+              <a:t>Ask the question: a plant’s cost, in each plant or in its type? The type.</a:t>
             </a:r>
           </a:p>
         </p:txBody>
@@ -1061,7 +996,502 @@
           <a:lstStyle/>
           <a:p>
             <a:r>
-              <a:t>Ask, let them answer in pairs for a minute, then take a few answers. These are the site’s Check yourself questions.</a:t>
+              <a:t>Ask one question at a time. Pairs discuss for a minute, then take two or three answers.</a:t>
+            </a:r>
+          </a:p>
+          <a:p>
+            <a:r>
+              <a:t>Expected answers (from the course site):</a:t>
+            </a:r>
+          </a:p>
+          <a:p/>
+          <a:p>
+            <a:r>
+              <a:t>Q: Why does inheritance break down for Plants vs. Zombies?</a:t>
+            </a:r>
+          </a:p>
+          <a:p>
+            <a:r>
+              <a:t>A: The abilities (shooting, making sun, armour, walking, eating) combine freely, but a class has one base class. Combinations mean choosing one parent and copying the other ability, and abilities shared by plants and zombies (health) get copied too.</a:t>
+            </a:r>
+          </a:p>
+          <a:p/>
+          <a:p>
+            <a:r>
+              <a:t>Q: How do components in the same entity work together without knowing each other's classes in advance?</a:t>
+            </a:r>
+          </a:p>
+          <a:p>
+            <a:r>
+              <a:t>A: They ask their owner for a sibling (Owner.Get&lt;Eater&gt;()), and handle it being missing. For other entities, they ask the world.</a:t>
+            </a:r>
+          </a:p>
+          <a:p/>
+          <a:p>
+            <a:r>
+              <a:t>Q: What goes in a type object, and what goes in an instance?</a:t>
+            </a:r>
+          </a:p>
+          <a:p>
+            <a:r>
+              <a:t>A: The type holds what all things of that kind share (cost, recharge time, sprite, starting health, and how to build one). The instance holds what's its own: its position, its current health, its timers.</a:t>
+            </a:r>
+          </a:p>
+          <a:p/>
+          <a:p>
+            <a:r>
+              <a:t>Q: How is picking on a grid different from picking a list of objects?</a:t>
+            </a:r>
+          </a:p>
+          <a:p>
+            <a:r>
+              <a:t>A: On a grid, the cell is computed from the position with a division, however many cells there are. For separate objects, each one is checked, and the order of the checks decides which of two overlapping objects gets the click.</a:t>
+            </a:r>
+          </a:p>
+        </p:txBody>
+      </p:sp>
+    </p:spTree>
+  </p:cSld>
+  <p:clrMapOvr>
+    <a:masterClrMapping/>
+  </p:clrMapOvr>
+</p:notes>
+</file>
+
+<file path=ppt/notesSlides/notesSlide13.xml><?xml version="1.0" encoding="utf-8"?>
+<p:notes xmlns:a="http://schemas.openxmlformats.org/drawingml/2006/main" xmlns:p="http://schemas.openxmlformats.org/presentationml/2006/main" xmlns:r="http://schemas.openxmlformats.org/officeDocument/2006/relationships">
+  <p:cSld>
+    <p:spTree>
+      <p:nvGrpSpPr>
+        <p:cNvPr id="1" name=""/>
+        <p:cNvGrpSpPr/>
+        <p:nvPr/>
+      </p:nvGrpSpPr>
+      <p:grpSpPr>
+        <a:xfrm>
+          <a:off x="0" y="0"/>
+          <a:ext cx="0" cy="0"/>
+          <a:chOff x="0" y="0"/>
+          <a:chExt cx="0" cy="0"/>
+        </a:xfrm>
+      </p:grpSpPr>
+      <p:sp>
+        <p:nvSpPr>
+          <p:cNvPr id="2" name="Slide Image Placeholder 1"/>
+          <p:cNvSpPr>
+            <a:spLocks noGrp="1"/>
+          </p:cNvSpPr>
+          <p:nvPr>
+            <p:ph type="sldImg" idx="2"/>
+          </p:nvPr>
+        </p:nvSpPr>
+        <p:spPr/>
+      </p:sp>
+      <p:sp>
+        <p:nvSpPr>
+          <p:cNvPr id="3" name="Notes Placeholder 2"/>
+          <p:cNvSpPr>
+            <a:spLocks noGrp="1"/>
+          </p:cNvSpPr>
+          <p:nvPr>
+            <p:ph type="body" idx="1"/>
+          </p:nvPr>
+        </p:nvSpPr>
+        <p:spPr/>
+        <p:txBody>
+          <a:bodyPr/>
+          <a:lstStyle/>
+          <a:p>
+            <a:r>
+              <a:t>What did the player click on? Two conversions: from the window to the game (the scale matrix, inverted), and from a point to a cell (a division).</a:t>
+            </a:r>
+          </a:p>
+        </p:txBody>
+      </p:sp>
+    </p:spTree>
+  </p:cSld>
+  <p:clrMapOvr>
+    <a:masterClrMapping/>
+  </p:clrMapOvr>
+</p:notes>
+</file>
+
+<file path=ppt/notesSlides/notesSlide14.xml><?xml version="1.0" encoding="utf-8"?>
+<p:notes xmlns:a="http://schemas.openxmlformats.org/drawingml/2006/main" xmlns:p="http://schemas.openxmlformats.org/presentationml/2006/main" xmlns:r="http://schemas.openxmlformats.org/officeDocument/2006/relationships">
+  <p:cSld>
+    <p:spTree>
+      <p:nvGrpSpPr>
+        <p:cNvPr id="1" name=""/>
+        <p:cNvGrpSpPr/>
+        <p:nvPr/>
+      </p:nvGrpSpPr>
+      <p:grpSpPr>
+        <a:xfrm>
+          <a:off x="0" y="0"/>
+          <a:ext cx="0" cy="0"/>
+          <a:chOff x="0" y="0"/>
+          <a:chExt cx="0" cy="0"/>
+        </a:xfrm>
+      </p:grpSpPr>
+      <p:sp>
+        <p:nvSpPr>
+          <p:cNvPr id="2" name="Slide Image Placeholder 1"/>
+          <p:cNvSpPr>
+            <a:spLocks noGrp="1"/>
+          </p:cNvSpPr>
+          <p:nvPr>
+            <p:ph type="sldImg" idx="2"/>
+          </p:nvPr>
+        </p:nvSpPr>
+        <p:spPr/>
+      </p:sp>
+      <p:sp>
+        <p:nvSpPr>
+          <p:cNvPr id="3" name="Notes Placeholder 2"/>
+          <p:cNvSpPr>
+            <a:spLocks noGrp="1"/>
+          </p:cNvSpPr>
+          <p:nvPr>
+            <p:ph type="body" idx="1"/>
+          </p:nvPr>
+        </p:nvSpPr>
+        <p:spPr/>
+        <p:txBody>
+          <a:bodyPr/>
+          <a:lstStyle/>
+          <a:p>
+            <a:r>
+              <a:t>Demo: run Pvz0.</a:t>
+            </a:r>
+          </a:p>
+          <a:p>
+            <a:r>
+              <a:t>- choose a packet, hover the lawn: the highlighted cell and the faint plant</a:t>
+            </a:r>
+          </a:p>
+          <a:p>
+            <a:r>
+              <a:t>- click to plant</a:t>
+            </a:r>
+          </a:p>
+        </p:txBody>
+      </p:sp>
+    </p:spTree>
+  </p:cSld>
+  <p:clrMapOvr>
+    <a:masterClrMapping/>
+  </p:clrMapOvr>
+</p:notes>
+</file>
+
+<file path=ppt/notesSlides/notesSlide15.xml><?xml version="1.0" encoding="utf-8"?>
+<p:notes xmlns:a="http://schemas.openxmlformats.org/drawingml/2006/main" xmlns:p="http://schemas.openxmlformats.org/presentationml/2006/main" xmlns:r="http://schemas.openxmlformats.org/officeDocument/2006/relationships">
+  <p:cSld>
+    <p:spTree>
+      <p:nvGrpSpPr>
+        <p:cNvPr id="1" name=""/>
+        <p:cNvGrpSpPr/>
+        <p:nvPr/>
+      </p:nvGrpSpPr>
+      <p:grpSpPr>
+        <a:xfrm>
+          <a:off x="0" y="0"/>
+          <a:ext cx="0" cy="0"/>
+          <a:chOff x="0" y="0"/>
+          <a:chExt cx="0" cy="0"/>
+        </a:xfrm>
+      </p:grpSpPr>
+      <p:sp>
+        <p:nvSpPr>
+          <p:cNvPr id="2" name="Slide Image Placeholder 1"/>
+          <p:cNvSpPr>
+            <a:spLocks noGrp="1"/>
+          </p:cNvSpPr>
+          <p:nvPr>
+            <p:ph type="sldImg" idx="2"/>
+          </p:nvPr>
+        </p:nvSpPr>
+        <p:spPr/>
+      </p:sp>
+      <p:sp>
+        <p:nvSpPr>
+          <p:cNvPr id="3" name="Notes Placeholder 2"/>
+          <p:cNvSpPr>
+            <a:spLocks noGrp="1"/>
+          </p:cNvSpPr>
+          <p:nvPr>
+            <p:ph type="body" idx="1"/>
+          </p:nvPr>
+        </p:nvSpPr>
+        <p:spPr/>
+        <p:txBody>
+          <a:bodyPr/>
+          <a:lstStyle/>
+          <a:p>
+            <a:r>
+              <a:t>Demo: run Pvz1.</a:t>
+            </a:r>
+          </a:p>
+          <a:p>
+            <a:r>
+              <a:t>- the Plant and Zombie hierarchies</a:t>
+            </a:r>
+          </a:p>
+          <a:p>
+            <a:r>
+              <a:t>- the copied health code</a:t>
+            </a:r>
+          </a:p>
+        </p:txBody>
+      </p:sp>
+    </p:spTree>
+  </p:cSld>
+  <p:clrMapOvr>
+    <a:masterClrMapping/>
+  </p:clrMapOvr>
+</p:notes>
+</file>
+
+<file path=ppt/notesSlides/notesSlide16.xml><?xml version="1.0" encoding="utf-8"?>
+<p:notes xmlns:a="http://schemas.openxmlformats.org/drawingml/2006/main" xmlns:p="http://schemas.openxmlformats.org/presentationml/2006/main" xmlns:r="http://schemas.openxmlformats.org/officeDocument/2006/relationships">
+  <p:cSld>
+    <p:spTree>
+      <p:nvGrpSpPr>
+        <p:cNvPr id="1" name=""/>
+        <p:cNvGrpSpPr/>
+        <p:nvPr/>
+      </p:nvGrpSpPr>
+      <p:grpSpPr>
+        <a:xfrm>
+          <a:off x="0" y="0"/>
+          <a:ext cx="0" cy="0"/>
+          <a:chOff x="0" y="0"/>
+          <a:chExt cx="0" cy="0"/>
+        </a:xfrm>
+      </p:grpSpPr>
+      <p:sp>
+        <p:nvSpPr>
+          <p:cNvPr id="2" name="Slide Image Placeholder 1"/>
+          <p:cNvSpPr>
+            <a:spLocks noGrp="1"/>
+          </p:cNvSpPr>
+          <p:nvPr>
+            <p:ph type="sldImg" idx="2"/>
+          </p:nvPr>
+        </p:nvSpPr>
+        <p:spPr/>
+      </p:sp>
+      <p:sp>
+        <p:nvSpPr>
+          <p:cNvPr id="3" name="Notes Placeholder 2"/>
+          <p:cNvSpPr>
+            <a:spLocks noGrp="1"/>
+          </p:cNvSpPr>
+          <p:nvPr>
+            <p:ph type="body" idx="1"/>
+          </p:nvPr>
+        </p:nvSpPr>
+        <p:spPr/>
+        <p:txBody>
+          <a:bodyPr/>
+          <a:lstStyle/>
+          <a:p>
+            <a:r>
+              <a:t>An entity: a position, a row and a list of components. A component: one ability. The entity updates its components.</a:t>
+            </a:r>
+          </a:p>
+        </p:txBody>
+      </p:sp>
+    </p:spTree>
+  </p:cSld>
+  <p:clrMapOvr>
+    <a:masterClrMapping/>
+  </p:clrMapOvr>
+</p:notes>
+</file>
+
+<file path=ppt/notesSlides/notesSlide17.xml><?xml version="1.0" encoding="utf-8"?>
+<p:notes xmlns:a="http://schemas.openxmlformats.org/drawingml/2006/main" xmlns:p="http://schemas.openxmlformats.org/presentationml/2006/main" xmlns:r="http://schemas.openxmlformats.org/officeDocument/2006/relationships">
+  <p:cSld>
+    <p:spTree>
+      <p:nvGrpSpPr>
+        <p:cNvPr id="1" name=""/>
+        <p:cNvGrpSpPr/>
+        <p:nvPr/>
+      </p:nvGrpSpPr>
+      <p:grpSpPr>
+        <a:xfrm>
+          <a:off x="0" y="0"/>
+          <a:ext cx="0" cy="0"/>
+          <a:chOff x="0" y="0"/>
+          <a:chExt cx="0" cy="0"/>
+        </a:xfrm>
+      </p:grpSpPr>
+      <p:sp>
+        <p:nvSpPr>
+          <p:cNvPr id="2" name="Slide Image Placeholder 1"/>
+          <p:cNvSpPr>
+            <a:spLocks noGrp="1"/>
+          </p:cNvSpPr>
+          <p:nvPr>
+            <p:ph type="sldImg" idx="2"/>
+          </p:nvPr>
+        </p:nvSpPr>
+        <p:spPr/>
+      </p:sp>
+      <p:sp>
+        <p:nvSpPr>
+          <p:cNvPr id="3" name="Notes Placeholder 2"/>
+          <p:cNvSpPr>
+            <a:spLocks noGrp="1"/>
+          </p:cNvSpPr>
+          <p:nvPr>
+            <p:ph type="body" idx="1"/>
+          </p:nvPr>
+        </p:nvSpPr>
+        <p:spPr/>
+        <p:txBody>
+          <a:bodyPr/>
+          <a:lstStyle/>
+          <a:p>
+            <a:r>
+              <a:t>No classes for plants or zombies: each kind is a list of components. A Repeater and a Conehead are recipes, not classes. Health is written once.</a:t>
+            </a:r>
+          </a:p>
+        </p:txBody>
+      </p:sp>
+    </p:spTree>
+  </p:cSld>
+  <p:clrMapOvr>
+    <a:masterClrMapping/>
+  </p:clrMapOvr>
+</p:notes>
+</file>
+
+<file path=ppt/notesSlides/notesSlide18.xml><?xml version="1.0" encoding="utf-8"?>
+<p:notes xmlns:a="http://schemas.openxmlformats.org/drawingml/2006/main" xmlns:p="http://schemas.openxmlformats.org/presentationml/2006/main" xmlns:r="http://schemas.openxmlformats.org/officeDocument/2006/relationships">
+  <p:cSld>
+    <p:spTree>
+      <p:nvGrpSpPr>
+        <p:cNvPr id="1" name=""/>
+        <p:cNvGrpSpPr/>
+        <p:nvPr/>
+      </p:nvGrpSpPr>
+      <p:grpSpPr>
+        <a:xfrm>
+          <a:off x="0" y="0"/>
+          <a:ext cx="0" cy="0"/>
+          <a:chOff x="0" y="0"/>
+          <a:chExt cx="0" cy="0"/>
+        </a:xfrm>
+      </p:grpSpPr>
+      <p:sp>
+        <p:nvSpPr>
+          <p:cNvPr id="2" name="Slide Image Placeholder 1"/>
+          <p:cNvSpPr>
+            <a:spLocks noGrp="1"/>
+          </p:cNvSpPr>
+          <p:nvPr>
+            <p:ph type="sldImg" idx="2"/>
+          </p:nvPr>
+        </p:nvSpPr>
+        <p:spPr/>
+      </p:sp>
+      <p:sp>
+        <p:nvSpPr>
+          <p:cNvPr id="3" name="Notes Placeholder 2"/>
+          <p:cNvSpPr>
+            <a:spLocks noGrp="1"/>
+          </p:cNvSpPr>
+          <p:nvPr>
+            <p:ph type="body" idx="1"/>
+          </p:nvPr>
+        </p:nvSpPr>
+        <p:spPr/>
+        <p:txBody>
+          <a:bodyPr/>
+          <a:lstStyle/>
+          <a:p>
+            <a:r>
+              <a:t>Through the owner (the walker checks the eater) or through the world (a shooter asks for a zombie ahead in its row).</a:t>
+            </a:r>
+          </a:p>
+          <a:p>
+            <a:r>
+              <a:t>Depend on components, not on kinds of entity.</a:t>
+            </a:r>
+          </a:p>
+        </p:txBody>
+      </p:sp>
+    </p:spTree>
+  </p:cSld>
+  <p:clrMapOvr>
+    <a:masterClrMapping/>
+  </p:clrMapOvr>
+</p:notes>
+</file>
+
+<file path=ppt/notesSlides/notesSlide19.xml><?xml version="1.0" encoding="utf-8"?>
+<p:notes xmlns:a="http://schemas.openxmlformats.org/drawingml/2006/main" xmlns:p="http://schemas.openxmlformats.org/presentationml/2006/main" xmlns:r="http://schemas.openxmlformats.org/officeDocument/2006/relationships">
+  <p:cSld>
+    <p:spTree>
+      <p:nvGrpSpPr>
+        <p:cNvPr id="1" name=""/>
+        <p:cNvGrpSpPr/>
+        <p:nvPr/>
+      </p:nvGrpSpPr>
+      <p:grpSpPr>
+        <a:xfrm>
+          <a:off x="0" y="0"/>
+          <a:ext cx="0" cy="0"/>
+          <a:chOff x="0" y="0"/>
+          <a:chExt cx="0" cy="0"/>
+        </a:xfrm>
+      </p:grpSpPr>
+      <p:sp>
+        <p:nvSpPr>
+          <p:cNvPr id="2" name="Slide Image Placeholder 1"/>
+          <p:cNvSpPr>
+            <a:spLocks noGrp="1"/>
+          </p:cNvSpPr>
+          <p:nvPr>
+            <p:ph type="sldImg" idx="2"/>
+          </p:nvPr>
+        </p:nvSpPr>
+        <p:spPr/>
+      </p:sp>
+      <p:sp>
+        <p:nvSpPr>
+          <p:cNvPr id="3" name="Notes Placeholder 2"/>
+          <p:cNvSpPr>
+            <a:spLocks noGrp="1"/>
+          </p:cNvSpPr>
+          <p:nvPr>
+            <p:ph type="body" idx="1"/>
+          </p:nvPr>
+        </p:nvSpPr>
+        <p:spPr/>
+        <p:txBody>
+          <a:bodyPr/>
+          <a:lstStyle/>
+          <a:p>
+            <a:r>
+              <a:t>Demo: open Pvz1 and Pvz2 side by side (a diff tool, or two editor panes), then run Pvz2.</a:t>
+            </a:r>
+          </a:p>
+          <a:p>
+            <a:r>
+              <a:t>- Components/</a:t>
+            </a:r>
+          </a:p>
+          <a:p>
+            <a:r>
+              <a:t>- Recipes.cs</a:t>
+            </a:r>
+          </a:p>
+          <a:p>
+            <a:r>
+              <a:t>- the World now loops over entities, not per class</a:t>
             </a:r>
           </a:p>
         </p:txBody>
@@ -1149,19 +1579,319 @@
           </a:bodyPr>
           <a:lstStyle/>
           <a:p>
-            <a:pPr indent="0" lvl="0" marL="0" rtl="0" algn="l">
-              <a:spcBef>
-                <a:spcPts val="0"/>
-              </a:spcBef>
-              <a:spcAft>
-                <a:spcPts val="0"/>
-              </a:spcAft>
-              <a:buNone/>
-            </a:pPr>
-            <a:r>
-              <a:t/>
-            </a:r>
-            <a:endParaRPr/>
+            <a:r>
+              <a:t>Run Pvz4 and play it for a minute.</a:t>
+            </a:r>
+          </a:p>
+          <a:p>
+            <a:r>
+              <a:t>Ask: what would you need to build this? Collect answers on the board, and come back to them at the end.</a:t>
+            </a:r>
+          </a:p>
+        </p:txBody>
+      </p:sp>
+    </p:spTree>
+  </p:cSld>
+  <p:clrMapOvr>
+    <a:masterClrMapping/>
+  </p:clrMapOvr>
+</p:notes>
+</file>
+
+<file path=ppt/notesSlides/notesSlide20.xml><?xml version="1.0" encoding="utf-8"?>
+<p:notes xmlns:a="http://schemas.openxmlformats.org/drawingml/2006/main" xmlns:p="http://schemas.openxmlformats.org/presentationml/2006/main" xmlns:r="http://schemas.openxmlformats.org/officeDocument/2006/relationships">
+  <p:cSld>
+    <p:spTree>
+      <p:nvGrpSpPr>
+        <p:cNvPr id="1" name=""/>
+        <p:cNvGrpSpPr/>
+        <p:nvPr/>
+      </p:nvGrpSpPr>
+      <p:grpSpPr>
+        <a:xfrm>
+          <a:off x="0" y="0"/>
+          <a:ext cx="0" cy="0"/>
+          <a:chOff x="0" y="0"/>
+          <a:chExt cx="0" cy="0"/>
+        </a:xfrm>
+      </p:grpSpPr>
+      <p:sp>
+        <p:nvSpPr>
+          <p:cNvPr id="2" name="Slide Image Placeholder 1"/>
+          <p:cNvSpPr>
+            <a:spLocks noGrp="1"/>
+          </p:cNvSpPr>
+          <p:nvPr>
+            <p:ph type="sldImg" idx="2"/>
+          </p:nvPr>
+        </p:nvSpPr>
+        <p:spPr/>
+      </p:sp>
+      <p:sp>
+        <p:nvSpPr>
+          <p:cNvPr id="3" name="Notes Placeholder 2"/>
+          <p:cNvSpPr>
+            <a:spLocks noGrp="1"/>
+          </p:cNvSpPr>
+          <p:nvPr>
+            <p:ph type="body" idx="1"/>
+          </p:nvPr>
+        </p:nvSpPr>
+        <p:spPr/>
+        <p:txBody>
+          <a:bodyPr/>
+          <a:lstStyle/>
+          <a:p>
+            <a:r>
+              <a:t>A peashooter’s cost isn’t in any one peashooter: it belongs to the kind. One PlantType per kind, loaded from plants.json.</a:t>
+            </a:r>
+          </a:p>
+        </p:txBody>
+      </p:sp>
+    </p:spTree>
+  </p:cSld>
+  <p:clrMapOvr>
+    <a:masterClrMapping/>
+  </p:clrMapOvr>
+</p:notes>
+</file>
+
+<file path=ppt/notesSlides/notesSlide21.xml><?xml version="1.0" encoding="utf-8"?>
+<p:notes xmlns:a="http://schemas.openxmlformats.org/drawingml/2006/main" xmlns:p="http://schemas.openxmlformats.org/presentationml/2006/main" xmlns:r="http://schemas.openxmlformats.org/officeDocument/2006/relationships">
+  <p:cSld>
+    <p:spTree>
+      <p:nvGrpSpPr>
+        <p:cNvPr id="1" name=""/>
+        <p:cNvGrpSpPr/>
+        <p:nvPr/>
+      </p:nvGrpSpPr>
+      <p:grpSpPr>
+        <a:xfrm>
+          <a:off x="0" y="0"/>
+          <a:ext cx="0" cy="0"/>
+          <a:chOff x="0" y="0"/>
+          <a:chExt cx="0" cy="0"/>
+        </a:xfrm>
+      </p:grpSpPr>
+      <p:sp>
+        <p:nvSpPr>
+          <p:cNvPr id="2" name="Slide Image Placeholder 1"/>
+          <p:cNvSpPr>
+            <a:spLocks noGrp="1"/>
+          </p:cNvSpPr>
+          <p:nvPr>
+            <p:ph type="sldImg" idx="2"/>
+          </p:nvPr>
+        </p:nvSpPr>
+        <p:spPr/>
+      </p:sp>
+      <p:sp>
+        <p:nvSpPr>
+          <p:cNvPr id="3" name="Notes Placeholder 2"/>
+          <p:cNvSpPr>
+            <a:spLocks noGrp="1"/>
+          </p:cNvSpPr>
+          <p:nvPr>
+            <p:ph type="body" idx="1"/>
+          </p:nvPr>
+        </p:nvSpPr>
+        <p:spPr/>
+        <p:txBody>
+          <a:bodyPr/>
+          <a:lstStyle/>
+          <a:p>
+            <a:r>
+              <a:t>The type builds an entity with a component for each kind of data it has. New kinds from old components need only data.</a:t>
+            </a:r>
+          </a:p>
+        </p:txBody>
+      </p:sp>
+    </p:spTree>
+  </p:cSld>
+  <p:clrMapOvr>
+    <a:masterClrMapping/>
+  </p:clrMapOvr>
+</p:notes>
+</file>
+
+<file path=ppt/notesSlides/notesSlide22.xml><?xml version="1.0" encoding="utf-8"?>
+<p:notes xmlns:a="http://schemas.openxmlformats.org/drawingml/2006/main" xmlns:p="http://schemas.openxmlformats.org/presentationml/2006/main" xmlns:r="http://schemas.openxmlformats.org/officeDocument/2006/relationships">
+  <p:cSld>
+    <p:spTree>
+      <p:nvGrpSpPr>
+        <p:cNvPr id="1" name=""/>
+        <p:cNvGrpSpPr/>
+        <p:nvPr/>
+      </p:nvGrpSpPr>
+      <p:grpSpPr>
+        <a:xfrm>
+          <a:off x="0" y="0"/>
+          <a:ext cx="0" cy="0"/>
+          <a:chOff x="0" y="0"/>
+          <a:chExt cx="0" cy="0"/>
+        </a:xfrm>
+      </p:grpSpPr>
+      <p:sp>
+        <p:nvSpPr>
+          <p:cNvPr id="2" name="Slide Image Placeholder 1"/>
+          <p:cNvSpPr>
+            <a:spLocks noGrp="1"/>
+          </p:cNvSpPr>
+          <p:nvPr>
+            <p:ph type="sldImg" idx="2"/>
+          </p:nvPr>
+        </p:nvSpPr>
+        <p:spPr/>
+      </p:sp>
+      <p:sp>
+        <p:nvSpPr>
+          <p:cNvPr id="3" name="Notes Placeholder 2"/>
+          <p:cNvSpPr>
+            <a:spLocks noGrp="1"/>
+          </p:cNvSpPr>
+          <p:nvPr>
+            <p:ph type="body" idx="1"/>
+          </p:nvPr>
+        </p:nvSpPr>
+        <p:spPr/>
+        <p:txBody>
+          <a:bodyPr/>
+          <a:lstStyle/>
+          <a:p>
+            <a:r>
+              <a:t>Demo: open Pvz2 and Pvz3 side by side (a diff tool, or two editor panes), then run Pvz3.</a:t>
+            </a:r>
+          </a:p>
+          <a:p>
+            <a:r>
+              <a:t>- plants.json and zombies.json</a:t>
+            </a:r>
+          </a:p>
+          <a:p>
+            <a:r>
+              <a:t>- Types.cs</a:t>
+            </a:r>
+          </a:p>
+          <a:p>
+            <a:r>
+              <a:t>- change a cost in the JSON and run again</a:t>
+            </a:r>
+          </a:p>
+        </p:txBody>
+      </p:sp>
+    </p:spTree>
+  </p:cSld>
+  <p:clrMapOvr>
+    <a:masterClrMapping/>
+  </p:clrMapOvr>
+</p:notes>
+</file>
+
+<file path=ppt/notesSlides/notesSlide23.xml><?xml version="1.0" encoding="utf-8"?>
+<p:notes xmlns:a="http://schemas.openxmlformats.org/drawingml/2006/main" xmlns:p="http://schemas.openxmlformats.org/presentationml/2006/main" xmlns:r="http://schemas.openxmlformats.org/officeDocument/2006/relationships">
+  <p:cSld>
+    <p:spTree>
+      <p:nvGrpSpPr>
+        <p:cNvPr id="1" name=""/>
+        <p:cNvGrpSpPr/>
+        <p:nvPr/>
+      </p:nvGrpSpPr>
+      <p:grpSpPr>
+        <a:xfrm>
+          <a:off x="0" y="0"/>
+          <a:ext cx="0" cy="0"/>
+          <a:chOff x="0" y="0"/>
+          <a:chExt cx="0" cy="0"/>
+        </a:xfrm>
+      </p:grpSpPr>
+      <p:sp>
+        <p:nvSpPr>
+          <p:cNvPr id="2" name="Slide Image Placeholder 1"/>
+          <p:cNvSpPr>
+            <a:spLocks noGrp="1"/>
+          </p:cNvSpPr>
+          <p:nvPr>
+            <p:ph type="sldImg" idx="2"/>
+          </p:nvPr>
+        </p:nvSpPr>
+        <p:spPr/>
+      </p:sp>
+      <p:sp>
+        <p:nvSpPr>
+          <p:cNvPr id="3" name="Notes Placeholder 2"/>
+          <p:cNvSpPr>
+            <a:spLocks noGrp="1"/>
+          </p:cNvSpPr>
+          <p:nvPr>
+            <p:ph type="body" idx="1"/>
+          </p:nvPr>
+        </p:nvSpPr>
+        <p:spPr/>
+        <p:txBody>
+          <a:bodyPr/>
+          <a:lstStyle/>
+          <a:p>
+            <a:r>
+              <a:t>A level from JSON, packets that recharge, sun from the sky (a sun with one more component, Faller), winning and losing.</a:t>
+            </a:r>
+          </a:p>
+        </p:txBody>
+      </p:sp>
+    </p:spTree>
+  </p:cSld>
+  <p:clrMapOvr>
+    <a:masterClrMapping/>
+  </p:clrMapOvr>
+</p:notes>
+</file>
+
+<file path=ppt/notesSlides/notesSlide24.xml><?xml version="1.0" encoding="utf-8"?>
+<p:notes xmlns:a="http://schemas.openxmlformats.org/drawingml/2006/main" xmlns:p="http://schemas.openxmlformats.org/presentationml/2006/main" xmlns:r="http://schemas.openxmlformats.org/officeDocument/2006/relationships">
+  <p:cSld>
+    <p:spTree>
+      <p:nvGrpSpPr>
+        <p:cNvPr id="1" name=""/>
+        <p:cNvGrpSpPr/>
+        <p:nvPr/>
+      </p:nvGrpSpPr>
+      <p:grpSpPr>
+        <a:xfrm>
+          <a:off x="0" y="0"/>
+          <a:ext cx="0" cy="0"/>
+          <a:chOff x="0" y="0"/>
+          <a:chExt cx="0" cy="0"/>
+        </a:xfrm>
+      </p:grpSpPr>
+      <p:sp>
+        <p:nvSpPr>
+          <p:cNvPr id="2" name="Slide Image Placeholder 1"/>
+          <p:cNvSpPr>
+            <a:spLocks noGrp="1"/>
+          </p:cNvSpPr>
+          <p:nvPr>
+            <p:ph type="sldImg" idx="2"/>
+          </p:nvPr>
+        </p:nvSpPr>
+        <p:spPr/>
+      </p:sp>
+      <p:sp>
+        <p:nvSpPr>
+          <p:cNvPr id="3" name="Notes Placeholder 2"/>
+          <p:cNvSpPr>
+            <a:spLocks noGrp="1"/>
+          </p:cNvSpPr>
+          <p:nvPr>
+            <p:ph type="body" idx="1"/>
+          </p:nvPr>
+        </p:nvSpPr>
+        <p:spPr/>
+        <p:txBody>
+          <a:bodyPr/>
+          <a:lstStyle/>
+          <a:p>
+            <a:r>
+              <a:t>A registry of components by name. Ask what you lose: the compiler checking the data’s shape.</a:t>
+            </a:r>
           </a:p>
         </p:txBody>
       </p:sp>
@@ -1248,19 +1978,72 @@
           </a:bodyPr>
           <a:lstStyle/>
           <a:p>
-            <a:pPr indent="0" lvl="0" marL="0" rtl="0" algn="l">
-              <a:spcBef>
-                <a:spcPts val="0"/>
-              </a:spcBef>
-              <a:spcAft>
-                <a:spcPts val="0"/>
-              </a:spcAft>
-              <a:buNone/>
-            </a:pPr>
-            <a:r>
-              <a:t/>
-            </a:r>
-            <a:endParaRPr/>
+            <a:r>
+              <a:t>Demo: play a minute of Pvz4: collect sun, plant a sunflower and a peashooter, watch a conehead lose its cone.</a:t>
+            </a:r>
+          </a:p>
+        </p:txBody>
+      </p:sp>
+    </p:spTree>
+  </p:cSld>
+  <p:clrMapOvr>
+    <a:masterClrMapping/>
+  </p:clrMapOvr>
+</p:notes>
+</file>
+
+<file path=ppt/notesSlides/notesSlide26.xml><?xml version="1.0" encoding="utf-8"?>
+<p:notes xmlns:a="http://schemas.openxmlformats.org/drawingml/2006/main" xmlns:p="http://schemas.openxmlformats.org/presentationml/2006/main" xmlns:r="http://schemas.openxmlformats.org/officeDocument/2006/relationships">
+  <p:cSld>
+    <p:spTree>
+      <p:nvGrpSpPr>
+        <p:cNvPr id="1" name=""/>
+        <p:cNvGrpSpPr/>
+        <p:nvPr/>
+      </p:nvGrpSpPr>
+      <p:grpSpPr>
+        <a:xfrm>
+          <a:off x="0" y="0"/>
+          <a:ext cx="0" cy="0"/>
+          <a:chOff x="0" y="0"/>
+          <a:chExt cx="0" cy="0"/>
+        </a:xfrm>
+      </p:grpSpPr>
+      <p:sp>
+        <p:nvSpPr>
+          <p:cNvPr id="2" name="Slide Image Placeholder 1"/>
+          <p:cNvSpPr>
+            <a:spLocks noGrp="1"/>
+          </p:cNvSpPr>
+          <p:nvPr>
+            <p:ph type="sldImg" idx="2"/>
+          </p:nvPr>
+        </p:nvSpPr>
+        <p:spPr/>
+      </p:sp>
+      <p:sp>
+        <p:nvSpPr>
+          <p:cNvPr id="3" name="Notes Placeholder 2"/>
+          <p:cNvSpPr>
+            <a:spLocks noGrp="1"/>
+          </p:cNvSpPr>
+          <p:nvPr>
+            <p:ph type="body" idx="1"/>
+          </p:nvPr>
+        </p:nvSpPr>
+        <p:spPr/>
+        <p:txBody>
+          <a:bodyPr/>
+          <a:lstStyle/>
+          <a:p>
+            <a:r>
+              <a:t>Give the project groups five minutes with these questions.</a:t>
+            </a:r>
+          </a:p>
+          <a:p>
+            <a:r>
+              <a:t>Ask two groups to share one answer each. Push for concrete classes and files, not intentions.</a:t>
+            </a:r>
           </a:p>
         </p:txBody>
       </p:sp>
@@ -1347,19 +2130,9 @@
           </a:bodyPr>
           <a:lstStyle/>
           <a:p>
-            <a:pPr indent="0" lvl="0" marL="0" rtl="0" algn="l">
-              <a:spcBef>
-                <a:spcPts val="0"/>
-              </a:spcBef>
-              <a:spcAft>
-                <a:spcPts val="0"/>
-              </a:spcAft>
-              <a:buNone/>
-            </a:pPr>
-            <a:r>
-              <a:t/>
-            </a:r>
-            <a:endParaRPr/>
+            <a:r>
+              <a:t>The main topic: the Component pattern. First picking with the mouse, then where inheritance breaks, then components, then Type Object.</a:t>
+            </a:r>
           </a:p>
         </p:txBody>
       </p:sp>
@@ -1446,19 +2219,9 @@
           </a:bodyPr>
           <a:lstStyle/>
           <a:p>
-            <a:pPr indent="0" lvl="0" marL="0" rtl="0" algn="l">
-              <a:spcBef>
-                <a:spcPts val="0"/>
-              </a:spcBef>
-              <a:spcAft>
-                <a:spcPts val="0"/>
-              </a:spcAft>
-              <a:buNone/>
-            </a:pPr>
-            <a:r>
-              <a:t/>
-            </a:r>
-            <a:endParaRPr/>
+            <a:r>
+              <a:t>Start from Pvz4. Ask after the first: did the Tall-nut or the Flag Zombie need any code? Only data.</a:t>
+            </a:r>
           </a:p>
         </p:txBody>
       </p:sp>
@@ -1546,37 +2309,70 @@
           <a:lstStyle/>
           <a:p>
             <a:r>
-              <a:t>Talking points:</a:t>
-            </a:r>
-          </a:p>
-          <a:p>
-            <a:r>
-              <a:t>- All Source code for today’s game can be found here:</a:t>
-            </a:r>
-          </a:p>
-          <a:p>
-            <a:r>
-              <a:t>  - github.com/Metamate/gar-games (folder 09-plants-vs-zombies)</a:t>
-            </a:r>
-          </a:p>
-          <a:p>
-            <a:r>
-              <a:t>- The game is built up in steps: Pvz0 → Pvz4</a:t>
-            </a:r>
-          </a:p>
-          <a:p>
-            <a:r>
-              <a:t>  - Each step is a separate project that adds one concept</a:t>
-            </a:r>
-          </a:p>
-          <a:p>
-            <a:r>
-              <a:t>  - Compare neighbouring steps to see exactly what changed</a:t>
-            </a:r>
-          </a:p>
-          <a:p>
-            <a:r>
-              <a:t>- Pvz4 is the finished game, and the starting point for the exercises</a:t>
+              <a:t>Open gar-games/09-plants-vs-zombies live. Show the README: the step table, the code map, how to run a step.</a:t>
+            </a:r>
+          </a:p>
+          <a:p>
+            <a:r>
+              <a:t>Say: the site explains the ideas, the README helps you find them in the code, the slides are for today.</a:t>
+            </a:r>
+          </a:p>
+        </p:txBody>
+      </p:sp>
+    </p:spTree>
+  </p:cSld>
+  <p:clrMapOvr>
+    <a:masterClrMapping/>
+  </p:clrMapOvr>
+</p:notes>
+</file>
+
+<file path=ppt/notesSlides/notesSlide6.xml><?xml version="1.0" encoding="utf-8"?>
+<p:notes xmlns:a="http://schemas.openxmlformats.org/drawingml/2006/main" xmlns:p="http://schemas.openxmlformats.org/presentationml/2006/main" xmlns:r="http://schemas.openxmlformats.org/officeDocument/2006/relationships">
+  <p:cSld>
+    <p:spTree>
+      <p:nvGrpSpPr>
+        <p:cNvPr id="1" name=""/>
+        <p:cNvGrpSpPr/>
+        <p:nvPr/>
+      </p:nvGrpSpPr>
+      <p:grpSpPr>
+        <a:xfrm>
+          <a:off x="0" y="0"/>
+          <a:ext cx="0" cy="0"/>
+          <a:chOff x="0" y="0"/>
+          <a:chExt cx="0" cy="0"/>
+        </a:xfrm>
+      </p:grpSpPr>
+      <p:sp>
+        <p:nvSpPr>
+          <p:cNvPr id="2" name="Slide Image Placeholder 1"/>
+          <p:cNvSpPr>
+            <a:spLocks noGrp="1"/>
+          </p:cNvSpPr>
+          <p:nvPr>
+            <p:ph type="sldImg" idx="2"/>
+          </p:nvPr>
+        </p:nvSpPr>
+        <p:spPr/>
+      </p:sp>
+      <p:sp>
+        <p:nvSpPr>
+          <p:cNvPr id="3" name="Notes Placeholder 2"/>
+          <p:cNvSpPr>
+            <a:spLocks noGrp="1"/>
+          </p:cNvSpPr>
+          <p:nvPr>
+            <p:ph type="body" idx="1"/>
+          </p:nvPr>
+        </p:nvSpPr>
+        <p:spPr/>
+        <p:txBody>
+          <a:bodyPr/>
+          <a:lstStyle/>
+          <a:p>
+            <a:r>
+              <a:t>Milestone today: the self-review. Next by session 11: a release build on itch.io and a README.</a:t>
             </a:r>
           </a:p>
         </p:txBody>
@@ -1634,37 +2430,12 @@
           <a:lstStyle/>
           <a:p>
             <a:r>
-              <a:t>Talking points:</a:t>
-            </a:r>
-          </a:p>
-          <a:p>
-            <a:r>
-              <a:t>- A grid: compute the cell, however many cells there are</a:t>
-            </a:r>
-          </a:p>
-          <a:p>
-            <a:r>
-              <a:t>- Separate objects (seed packets, sun): check each one</a:t>
-            </a:r>
-          </a:p>
-          <a:p>
-            <a:r>
-              <a:t>  - Inside its rectangle? Within its radius?</a:t>
-            </a:r>
-          </a:p>
-          <a:p>
-            <a:r>
-              <a:t>- When things overlap, the order of the checks decides</a:t>
-            </a:r>
-          </a:p>
-          <a:p>
-            <a:r>
-              <a:t>  - Sun first, then the seed packets, then the lawn</a:t>
-            </a:r>
-          </a:p>
-          <a:p>
-            <a:r>
-              <a:t>- Show what a click will do: highlight the cell, and a faint plant</a:t>
+              <a:t>A grid: one division finds the cell. Suns and packets are separate objects: check each.</a:t>
+            </a:r>
+          </a:p>
+          <a:p>
+            <a:r>
+              <a:t>When they overlap, the order decides: sun first, then packets, then the lawn. And show what a click will do before it happens.</a:t>
             </a:r>
           </a:p>
         </p:txBody>
@@ -1722,32 +2493,7 @@
           <a:lstStyle/>
           <a:p>
             <a:r>
-              <a:t>Talking points:</a:t>
-            </a:r>
-          </a:p>
-          <a:p>
-            <a:r>
-              <a:t>- A class per kind of thing</a:t>
-            </a:r>
-          </a:p>
-          <a:p>
-            <a:r>
-              <a:t>  - Plant → Sunflower, Peashooter, WallNut</a:t>
-            </a:r>
-          </a:p>
-          <a:p>
-            <a:r>
-              <a:t>  - Zombie, Pea, Sun</a:t>
-            </a:r>
-          </a:p>
-          <a:p>
-            <a:r>
-              <a:t>- World: one list per class</a:t>
-            </a:r>
-          </a:p>
-          <a:p>
-            <a:r>
-              <a:t>- It works</a:t>
+              <a:t>A class per kind of thing, and one list per class in the World. It works for now.</a:t>
             </a:r>
           </a:p>
         </p:txBody>
@@ -1805,37 +2551,12 @@
           <a:lstStyle/>
           <a:p>
             <a:r>
-              <a:t>Talking points:</a:t>
-            </a:r>
-          </a:p>
-          <a:p>
-            <a:r>
-              <a:t>- A Repeater: a Peashooter subclass that overrides… what?</a:t>
-            </a:r>
-          </a:p>
-          <a:p>
-            <a:r>
-              <a:t>- A Conehead: a Zombie subclass. A plant with armour: copy it</a:t>
-            </a:r>
-          </a:p>
-          <a:p>
-            <a:r>
-              <a:t>- A plant that shoots and makes sun: which parent?</a:t>
-            </a:r>
-          </a:p>
-          <a:p>
-            <a:r>
-              <a:t>  - C# allows one base class: copy the other ability</a:t>
-            </a:r>
-          </a:p>
-          <a:p>
-            <a:r>
-              <a:t>- Health is already copied: a zombie isn’t a plant</a:t>
-            </a:r>
-          </a:p>
-          <a:p>
-            <a:r>
-              <a:t>- Inheritance says what something is; here, what matters is what it can do</a:t>
+              <a:t>Go through the four boxes and let the class try to place each one. The third has no answer: C# has one base class.</a:t>
+            </a:r>
+          </a:p>
+          <a:p>
+            <a:r>
+              <a:t>Inheritance says what something is; here what matters is what it can do.</a:t>
             </a:r>
           </a:p>
         </p:txBody>
@@ -12679,6 +13400,179 @@
 </file>
 
 <file path=ppt/slides/slide24.xml><?xml version="1.0" encoding="utf-8"?>
+<p:sld xmlns:a="http://schemas.openxmlformats.org/drawingml/2006/main" xmlns:p="http://schemas.openxmlformats.org/presentationml/2006/main" xmlns:r="http://schemas.openxmlformats.org/officeDocument/2006/relationships">
+  <p:cSld>
+    <p:spTree>
+      <p:nvGrpSpPr>
+        <p:cNvPr id="1" name=""/>
+        <p:cNvGrpSpPr/>
+        <p:nvPr/>
+      </p:nvGrpSpPr>
+      <p:grpSpPr/>
+      <p:sp>
+        <p:nvSpPr>
+          <p:cNvPr id="2" name="Title 1"/>
+          <p:cNvSpPr>
+            <a:spLocks noGrp="1"/>
+          </p:cNvSpPr>
+          <p:nvPr>
+            <p:ph type="title"/>
+          </p:nvPr>
+        </p:nvSpPr>
+        <p:spPr/>
+        <p:txBody>
+          <a:bodyPr/>
+          <a:lstStyle/>
+          <a:p>
+            <a:pPr indent="0" lvl="0" marL="0" rtl="0" algn="l">
+              <a:spcBef>
+                <a:spcPts val="0"/>
+              </a:spcBef>
+              <a:spcAft>
+                <a:spcPts val="0"/>
+              </a:spcAft>
+              <a:buNone/>
+            </a:pPr>
+            <a:r>
+              <a:rPr lang="en"/>
+              <a:t>Check Yourself</a:t>
+            </a:r>
+            <a:endParaRPr/>
+          </a:p>
+        </p:txBody>
+      </p:sp>
+      <p:sp>
+        <p:nvSpPr>
+          <p:cNvPr id="3" name="Text Placeholder 2"/>
+          <p:cNvSpPr>
+            <a:spLocks noGrp="1"/>
+          </p:cNvSpPr>
+          <p:nvPr>
+            <p:ph type="body" idx="1"/>
+          </p:nvPr>
+        </p:nvSpPr>
+        <p:spPr>
+          <a:xfrm>
+            <a:off x="311700" y="885950"/>
+            <a:ext cx="8520600" cy="1719072"/>
+          </a:xfrm>
+        </p:spPr>
+        <p:txBody>
+          <a:bodyPr/>
+          <a:lstStyle/>
+          <a:p>
+            <a:pPr indent="-330200" lvl="0" marL="457200" rtl="0" algn="l">
+              <a:spcBef>
+                <a:spcPts val="0"/>
+              </a:spcBef>
+              <a:spcAft>
+                <a:spcPts val="0"/>
+              </a:spcAft>
+              <a:buSzPts val="1600"/>
+              <a:buChar char="●"/>
+            </a:pPr>
+            <a:r>
+              <a:rPr lang="en"/>
+              <a:t>Why does inheritance break down for Plants vs. Zombies?</a:t>
+            </a:r>
+            <a:endParaRPr/>
+          </a:p>
+          <a:p>
+            <a:pPr indent="-330200" lvl="0" marL="457200" rtl="0" algn="l">
+              <a:spcBef>
+                <a:spcPts val="0"/>
+              </a:spcBef>
+              <a:spcAft>
+                <a:spcPts val="0"/>
+              </a:spcAft>
+              <a:buSzPts val="1600"/>
+              <a:buChar char="●"/>
+            </a:pPr>
+            <a:r>
+              <a:rPr lang="en"/>
+              <a:t>How do components in one entity work together without knowing each other’s classes?</a:t>
+            </a:r>
+            <a:endParaRPr/>
+          </a:p>
+          <a:p>
+            <a:pPr indent="-330200" lvl="0" marL="457200" rtl="0" algn="l">
+              <a:spcBef>
+                <a:spcPts val="0"/>
+              </a:spcBef>
+              <a:spcAft>
+                <a:spcPts val="0"/>
+              </a:spcAft>
+              <a:buSzPts val="1600"/>
+              <a:buChar char="●"/>
+            </a:pPr>
+            <a:r>
+              <a:rPr lang="en"/>
+              <a:t>What goes in a type object, and what goes in an instance?</a:t>
+            </a:r>
+            <a:endParaRPr/>
+          </a:p>
+          <a:p>
+            <a:pPr indent="-330200" lvl="0" marL="457200" rtl="0" algn="l">
+              <a:spcBef>
+                <a:spcPts val="0"/>
+              </a:spcBef>
+              <a:spcAft>
+                <a:spcPts val="0"/>
+              </a:spcAft>
+              <a:buSzPts val="1600"/>
+              <a:buChar char="●"/>
+            </a:pPr>
+            <a:r>
+              <a:rPr lang="en"/>
+              <a:t>How is picking on a grid different from picking a list of objects?</a:t>
+            </a:r>
+            <a:endParaRPr/>
+          </a:p>
+        </p:txBody>
+      </p:sp>
+      <p:sp>
+        <p:nvSpPr>
+          <p:cNvPr id="4" name="TextBox 3"/>
+          <p:cNvSpPr txBox="1"/>
+          <p:nvPr/>
+        </p:nvSpPr>
+        <p:spPr>
+          <a:xfrm>
+            <a:off x="457200" y="3182112"/>
+            <a:ext cx="8229600" cy="457200"/>
+          </a:xfrm>
+          <a:prstGeom prst="rect">
+            <a:avLst/>
+          </a:prstGeom>
+          <a:noFill/>
+        </p:spPr>
+        <p:txBody>
+          <a:bodyPr wrap="square">
+            <a:spAutoFit/>
+          </a:bodyPr>
+          <a:lstStyle/>
+          <a:p>
+            <a:pPr algn="ctr"/>
+            <a:r>
+              <a:rPr sz="1400" b="0" i="0">
+                <a:solidFill>
+                  <a:srgbClr val="9AA3AB"/>
+                </a:solidFill>
+              </a:rPr>
+              <a:t>The answers, and more questions, are on the course site.</a:t>
+            </a:r>
+          </a:p>
+        </p:txBody>
+      </p:sp>
+    </p:spTree>
+  </p:cSld>
+  <p:clrMapOvr>
+    <a:masterClrMapping/>
+  </p:clrMapOvr>
+</p:sld>
+</file>
+
+<file path=ppt/slides/slide25.xml><?xml version="1.0" encoding="utf-8"?>
 <p:sld xmlns:a="http://schemas.openxmlformats.org/drawingml/2006/main" xmlns:r="http://schemas.openxmlformats.org/officeDocument/2006/relationships" xmlns:mc="http://schemas.openxmlformats.org/markup-compatibility/2006" xmlns:mv="urn:schemas-microsoft-com:mac:vml" xmlns:p="http://schemas.openxmlformats.org/presentationml/2006/main" xmlns:c="http://schemas.openxmlformats.org/drawingml/2006/chart" xmlns:dgm="http://schemas.openxmlformats.org/drawingml/2006/diagram" xmlns:o="urn:schemas-microsoft-com:office:office" xmlns:v="urn:schemas-microsoft-com:vml" xmlns:pvml="urn:schemas-microsoft-com:office:powerpoint" xmlns:com="http://schemas.openxmlformats.org/drawingml/2006/compatibility" xmlns:p14="http://schemas.microsoft.com/office/powerpoint/2010/main" xmlns:p15="http://schemas.microsoft.com/office/powerpoint/2012/main" xmlns:ahyp="http://schemas.microsoft.com/office/drawing/2018/hyperlinkcolor">
   <p:cSld>
     <p:spTree>
@@ -13510,7 +14404,7 @@
 </p:sld>
 </file>
 
-<file path=ppt/slides/slide25.xml><?xml version="1.0" encoding="utf-8"?>
+<file path=ppt/slides/slide26.xml><?xml version="1.0" encoding="utf-8"?>
 <p:sld xmlns:a="http://schemas.openxmlformats.org/drawingml/2006/main" xmlns:r="http://schemas.openxmlformats.org/officeDocument/2006/relationships" xmlns:mc="http://schemas.openxmlformats.org/markup-compatibility/2006" xmlns:mv="urn:schemas-microsoft-com:mac:vml" xmlns:p="http://schemas.openxmlformats.org/presentationml/2006/main" xmlns:c="http://schemas.openxmlformats.org/drawingml/2006/chart" xmlns:dgm="http://schemas.openxmlformats.org/drawingml/2006/diagram" xmlns:o="urn:schemas-microsoft-com:office:office" xmlns:v="urn:schemas-microsoft-com:vml" xmlns:pvml="urn:schemas-microsoft-com:office:powerpoint" xmlns:com="http://schemas.openxmlformats.org/drawingml/2006/compatibility" xmlns:p14="http://schemas.microsoft.com/office/powerpoint/2010/main" xmlns:p15="http://schemas.microsoft.com/office/powerpoint/2012/main" xmlns:ahyp="http://schemas.microsoft.com/office/drawing/2018/hyperlinkcolor">
   <p:cSld>
     <p:spTree>
@@ -13673,179 +14567,6 @@
               <a:t>A release build on itch.io, and a README started</a:t>
             </a:r>
             <a:endParaRPr/>
-          </a:p>
-        </p:txBody>
-      </p:sp>
-    </p:spTree>
-  </p:cSld>
-  <p:clrMapOvr>
-    <a:masterClrMapping/>
-  </p:clrMapOvr>
-</p:sld>
-</file>
-
-<file path=ppt/slides/slide26.xml><?xml version="1.0" encoding="utf-8"?>
-<p:sld xmlns:a="http://schemas.openxmlformats.org/drawingml/2006/main" xmlns:p="http://schemas.openxmlformats.org/presentationml/2006/main" xmlns:r="http://schemas.openxmlformats.org/officeDocument/2006/relationships">
-  <p:cSld>
-    <p:spTree>
-      <p:nvGrpSpPr>
-        <p:cNvPr id="1" name=""/>
-        <p:cNvGrpSpPr/>
-        <p:nvPr/>
-      </p:nvGrpSpPr>
-      <p:grpSpPr/>
-      <p:sp>
-        <p:nvSpPr>
-          <p:cNvPr id="2" name="Title 1"/>
-          <p:cNvSpPr>
-            <a:spLocks noGrp="1"/>
-          </p:cNvSpPr>
-          <p:nvPr>
-            <p:ph type="title"/>
-          </p:nvPr>
-        </p:nvSpPr>
-        <p:spPr/>
-        <p:txBody>
-          <a:bodyPr/>
-          <a:lstStyle/>
-          <a:p>
-            <a:pPr indent="0" lvl="0" marL="0" rtl="0" algn="l">
-              <a:spcBef>
-                <a:spcPts val="0"/>
-              </a:spcBef>
-              <a:spcAft>
-                <a:spcPts val="0"/>
-              </a:spcAft>
-              <a:buNone/>
-            </a:pPr>
-            <a:r>
-              <a:rPr lang="en"/>
-              <a:t>Check Yourself</a:t>
-            </a:r>
-            <a:endParaRPr/>
-          </a:p>
-        </p:txBody>
-      </p:sp>
-      <p:sp>
-        <p:nvSpPr>
-          <p:cNvPr id="3" name="Text Placeholder 2"/>
-          <p:cNvSpPr>
-            <a:spLocks noGrp="1"/>
-          </p:cNvSpPr>
-          <p:nvPr>
-            <p:ph type="body" idx="1"/>
-          </p:nvPr>
-        </p:nvSpPr>
-        <p:spPr>
-          <a:xfrm>
-            <a:off x="311700" y="885950"/>
-            <a:ext cx="8520600" cy="1719072"/>
-          </a:xfrm>
-        </p:spPr>
-        <p:txBody>
-          <a:bodyPr/>
-          <a:lstStyle/>
-          <a:p>
-            <a:pPr indent="-330200" lvl="0" marL="457200" rtl="0" algn="l">
-              <a:spcBef>
-                <a:spcPts val="0"/>
-              </a:spcBef>
-              <a:spcAft>
-                <a:spcPts val="0"/>
-              </a:spcAft>
-              <a:buSzPts val="1600"/>
-              <a:buChar char="●"/>
-            </a:pPr>
-            <a:r>
-              <a:rPr lang="en"/>
-              <a:t>Why does inheritance break down for Plants vs. Zombies?</a:t>
-            </a:r>
-            <a:endParaRPr/>
-          </a:p>
-          <a:p>
-            <a:pPr indent="-330200" lvl="0" marL="457200" rtl="0" algn="l">
-              <a:spcBef>
-                <a:spcPts val="0"/>
-              </a:spcBef>
-              <a:spcAft>
-                <a:spcPts val="0"/>
-              </a:spcAft>
-              <a:buSzPts val="1600"/>
-              <a:buChar char="●"/>
-            </a:pPr>
-            <a:r>
-              <a:rPr lang="en"/>
-              <a:t>How do components in one entity work together without knowing each other’s classes?</a:t>
-            </a:r>
-            <a:endParaRPr/>
-          </a:p>
-          <a:p>
-            <a:pPr indent="-330200" lvl="0" marL="457200" rtl="0" algn="l">
-              <a:spcBef>
-                <a:spcPts val="0"/>
-              </a:spcBef>
-              <a:spcAft>
-                <a:spcPts val="0"/>
-              </a:spcAft>
-              <a:buSzPts val="1600"/>
-              <a:buChar char="●"/>
-            </a:pPr>
-            <a:r>
-              <a:rPr lang="en"/>
-              <a:t>What goes in a type object, and what goes in an instance?</a:t>
-            </a:r>
-            <a:endParaRPr/>
-          </a:p>
-          <a:p>
-            <a:pPr indent="-330200" lvl="0" marL="457200" rtl="0" algn="l">
-              <a:spcBef>
-                <a:spcPts val="0"/>
-              </a:spcBef>
-              <a:spcAft>
-                <a:spcPts val="0"/>
-              </a:spcAft>
-              <a:buSzPts val="1600"/>
-              <a:buChar char="●"/>
-            </a:pPr>
-            <a:r>
-              <a:rPr lang="en"/>
-              <a:t>How is picking on a grid different from picking a list of objects?</a:t>
-            </a:r>
-            <a:endParaRPr/>
-          </a:p>
-        </p:txBody>
-      </p:sp>
-      <p:sp>
-        <p:nvSpPr>
-          <p:cNvPr id="4" name="TextBox 3"/>
-          <p:cNvSpPr txBox="1"/>
-          <p:nvPr/>
-        </p:nvSpPr>
-        <p:spPr>
-          <a:xfrm>
-            <a:off x="457200" y="3182112"/>
-            <a:ext cx="8229600" cy="457200"/>
-          </a:xfrm>
-          <a:prstGeom prst="rect">
-            <a:avLst/>
-          </a:prstGeom>
-          <a:noFill/>
-        </p:spPr>
-        <p:txBody>
-          <a:bodyPr wrap="square">
-            <a:spAutoFit/>
-          </a:bodyPr>
-          <a:lstStyle/>
-          <a:p>
-            <a:pPr algn="ctr"/>
-            <a:r>
-              <a:rPr sz="1400" b="0" i="0">
-                <a:solidFill>
-                  <a:srgbClr val="9AA3AB"/>
-                </a:solidFill>
-              </a:rPr>
-              <a:t>The answers, and more questions, are on the course site.</a:t>
-            </a:r>
           </a:p>
         </p:txBody>
       </p:sp>

--- a/slides/09 Plants vs. Zombies.pptx
+++ b/slides/09 Plants vs. Zombies.pptx
@@ -2042,7 +2042,7 @@
           </a:p>
           <a:p>
             <a:r>
-              <a:t>Ask two groups to share one answer each. Push for concrete classes and files, not intentions.</a:t>
+              <a:t>Ask two groups to share one answer each, and push them to name actual classes and files.</a:t>
             </a:r>
           </a:p>
         </p:txBody>
@@ -15153,7 +15153,7 @@
             </a:pPr>
             <a:r>
               <a:rPr lang="en"/>
-              <a:t>Its README: the steps (Pvz0 to Pvz4), a map of the code, how to run it</a:t>
+              <a:t>Its README: the steps (Pvz0 to Pvz4), where things are in the code, how to run it</a:t>
             </a:r>
             <a:endParaRPr/>
           </a:p>
@@ -17731,7 +17731,7 @@
                   <a:srgbClr val="DEE2E6"/>
                 </a:solidFill>
               </a:rPr>
-              <a:t>Inheritance says what something is. Here, what matters is what it can do.</a:t>
+              <a:t>Inheritance describes what something is. In this game, what it can do matters more.</a:t>
             </a:r>
           </a:p>
         </p:txBody>

--- a/slides/09 Plants vs. Zombies.pptx
+++ b/slides/09 Plants vs. Zombies.pptx
@@ -9,6 +9,7 @@
   </p:notesMasterIdLst>
   <p:sldIdLst>
     <p:sldId id="256" r:id="rId6"/>
+    <p:sldId id="314" r:id="rId41"/>
     <p:sldId id="257" r:id="rId7"/>
     <p:sldId id="258" r:id="rId8"/>
     <p:sldId id="259" r:id="rId9"/>
@@ -2043,6 +2044,69 @@
           <a:p>
             <a:r>
               <a:t>Ask two groups to share one answer each, and push them to name actual classes and files.</a:t>
+            </a:r>
+          </a:p>
+        </p:txBody>
+      </p:sp>
+    </p:spTree>
+  </p:cSld>
+  <p:clrMapOvr>
+    <a:masterClrMapping/>
+  </p:clrMapOvr>
+</p:notes>
+</file>
+
+<file path=ppt/notesSlides/notesSlide27.xml><?xml version="1.0" encoding="utf-8"?>
+<p:notes xmlns:a="http://schemas.openxmlformats.org/drawingml/2006/main" xmlns:p="http://schemas.openxmlformats.org/presentationml/2006/main" xmlns:r="http://schemas.openxmlformats.org/officeDocument/2006/relationships">
+  <p:cSld>
+    <p:spTree>
+      <p:nvGrpSpPr>
+        <p:cNvPr id="1" name=""/>
+        <p:cNvGrpSpPr/>
+        <p:nvPr/>
+      </p:nvGrpSpPr>
+      <p:grpSpPr>
+        <a:xfrm>
+          <a:off x="0" y="0"/>
+          <a:ext cx="0" cy="0"/>
+          <a:chOff x="0" y="0"/>
+          <a:chExt cx="0" cy="0"/>
+        </a:xfrm>
+      </p:grpSpPr>
+      <p:sp>
+        <p:nvSpPr>
+          <p:cNvPr id="2" name="Slide Image Placeholder 1"/>
+          <p:cNvSpPr>
+            <a:spLocks noGrp="1"/>
+          </p:cNvSpPr>
+          <p:nvPr>
+            <p:ph type="sldImg" idx="2"/>
+          </p:nvPr>
+        </p:nvSpPr>
+        <p:spPr/>
+      </p:sp>
+      <p:sp>
+        <p:nvSpPr>
+          <p:cNvPr id="3" name="Notes Placeholder 2"/>
+          <p:cNvSpPr>
+            <a:spLocks noGrp="1"/>
+          </p:cNvSpPr>
+          <p:nvPr>
+            <p:ph type="body" idx="1"/>
+          </p:nvPr>
+        </p:nvSpPr>
+        <p:spPr/>
+        <p:txBody>
+          <a:bodyPr/>
+          <a:lstStyle/>
+          <a:p>
+            <a:r>
+              <a:t>The original: Plants vs. Zombies. Ask who has played it, and what they remember of how it plays.</a:t>
+            </a:r>
+          </a:p>
+          <a:p>
+            <a:r>
+              <a:t>Today we build the parts that matter for the architecture, not the whole game.</a:t>
             </a:r>
           </a:p>
         </p:txBody>
@@ -6242,6 +6306,453 @@
       <p:grpSpPr/>
       <p:sp>
         <p:nvSpPr>
+          <p:cNvPr id="293" name="Google Shape;293;p45"/>
+          <p:cNvSpPr txBox="1"/>
+          <p:nvPr>
+            <p:ph type="title"/>
+          </p:nvPr>
+        </p:nvSpPr>
+        <p:spPr>
+          <a:xfrm>
+            <a:off x="311700" y="195615"/>
+            <a:ext cx="8520600" cy="572700"/>
+          </a:xfrm>
+          <a:prstGeom prst="rect">
+            <a:avLst/>
+          </a:prstGeom>
+        </p:spPr>
+        <p:txBody>
+          <a:bodyPr anchorCtr="0" anchor="t" bIns="91425" lIns="91425" spcFirstLastPara="1" rIns="91425" wrap="square" tIns="91425">
+            <a:normAutofit fontScale="90000"/>
+          </a:bodyPr>
+          <a:lstStyle/>
+          <a:p>
+            <a:pPr indent="0" lvl="0" marL="0" rtl="0" algn="l">
+              <a:spcBef>
+                <a:spcPts val="0"/>
+              </a:spcBef>
+              <a:spcAft>
+                <a:spcPts val="0"/>
+              </a:spcAft>
+              <a:buNone/>
+            </a:pPr>
+            <a:r>
+              <a:rPr lang="en">
+                <a:solidFill>
+                  <a:schemeClr val="accent5"/>
+                </a:solidFill>
+              </a:rPr>
+              <a:t>Where Inheritance Breaks</a:t>
+            </a:r>
+            <a:endParaRPr>
+              <a:solidFill>
+                <a:schemeClr val="accent5"/>
+              </a:solidFill>
+            </a:endParaRPr>
+          </a:p>
+        </p:txBody>
+      </p:sp>
+      <p:sp>
+        <p:nvSpPr>
+          <p:cNvPr id="294" name="Google Shape;294;p45"/>
+          <p:cNvSpPr txBox="1"/>
+          <p:nvPr>
+            <p:ph idx="1" type="body"/>
+          </p:nvPr>
+        </p:nvSpPr>
+        <p:spPr>
+          <a:xfrm>
+            <a:off x="311700" y="885950"/>
+            <a:ext cx="8520600" cy="521208"/>
+          </a:xfrm>
+          <a:prstGeom prst="rect">
+            <a:avLst/>
+          </a:prstGeom>
+        </p:spPr>
+        <p:txBody>
+          <a:bodyPr anchorCtr="0" anchor="t" bIns="91425" lIns="91425" spcFirstLastPara="1" rIns="91425" wrap="square" tIns="91425">
+            <a:normAutofit/>
+          </a:bodyPr>
+          <a:lstStyle/>
+          <a:p>
+            <a:pPr indent="-330200" lvl="0" marL="457200" rtl="0" algn="l">
+              <a:spcBef>
+                <a:spcPts val="0"/>
+              </a:spcBef>
+              <a:spcAft>
+                <a:spcPts val="0"/>
+              </a:spcAft>
+              <a:buSzPts val="1600"/>
+              <a:buChar char="●"/>
+            </a:pPr>
+            <a:r>
+              <a:rPr lang="en"/>
+              <a:t>Four new things. Where does each one go?</a:t>
+            </a:r>
+            <a:endParaRPr/>
+          </a:p>
+        </p:txBody>
+      </p:sp>
+      <p:sp>
+        <p:nvSpPr>
+          <p:cNvPr id="295" name="Rounded Rectangle 294"/>
+          <p:cNvSpPr/>
+          <p:nvPr/>
+        </p:nvSpPr>
+        <p:spPr>
+          <a:xfrm>
+            <a:off x="411480" y="1417320"/>
+            <a:ext cx="1965960" cy="1188720"/>
+          </a:xfrm>
+          <a:prstGeom prst="roundRect">
+            <a:avLst>
+              <a:gd name="adj" fmla="val 12000"/>
+            </a:avLst>
+          </a:prstGeom>
+          <a:solidFill>
+            <a:srgbClr val="2E3338"/>
+          </a:solidFill>
+          <a:ln>
+            <a:noFill/>
+          </a:ln>
+          <a:effectLst/>
+        </p:spPr>
+        <p:style>
+          <a:lnRef idx="1">
+            <a:schemeClr val="accent1"/>
+          </a:lnRef>
+          <a:fillRef idx="3">
+            <a:schemeClr val="accent1"/>
+          </a:fillRef>
+          <a:effectRef idx="2">
+            <a:schemeClr val="accent1"/>
+          </a:effectRef>
+          <a:fontRef idx="minor">
+            <a:schemeClr val="lt1"/>
+          </a:fontRef>
+        </p:style>
+        <p:txBody>
+          <a:bodyPr rtlCol="0" anchor="ctr" wrap="square" lIns="73152" rIns="73152"/>
+          <a:lstStyle/>
+          <a:p>
+            <a:pPr algn="ctr"/>
+            <a:r>
+              <a:rPr sz="1500" b="1">
+                <a:solidFill>
+                  <a:srgbClr val="DEE2E6"/>
+                </a:solidFill>
+              </a:rPr>
+              <a:t>Repeater</a:t>
+            </a:r>
+          </a:p>
+          <a:p>
+            <a:pPr algn="ctr"/>
+            <a:r>
+              <a:rPr sz="1300" b="0">
+                <a:solidFill>
+                  <a:srgbClr val="9AA3AB"/>
+                </a:solidFill>
+              </a:rPr>
+              <a:t>a Peashooter subclass</a:t>
+            </a:r>
+          </a:p>
+          <a:p>
+            <a:pPr algn="ctr"/>
+            <a:r>
+              <a:rPr sz="1300" b="0">
+                <a:solidFill>
+                  <a:srgbClr val="9AA3AB"/>
+                </a:solidFill>
+              </a:rPr>
+              <a:t>that overrides... what?</a:t>
+            </a:r>
+          </a:p>
+        </p:txBody>
+      </p:sp>
+      <p:sp>
+        <p:nvSpPr>
+          <p:cNvPr id="296" name="Rounded Rectangle 295"/>
+          <p:cNvSpPr/>
+          <p:nvPr/>
+        </p:nvSpPr>
+        <p:spPr>
+          <a:xfrm>
+            <a:off x="2514600" y="1417320"/>
+            <a:ext cx="1965960" cy="1188720"/>
+          </a:xfrm>
+          <a:prstGeom prst="roundRect">
+            <a:avLst>
+              <a:gd name="adj" fmla="val 12000"/>
+            </a:avLst>
+          </a:prstGeom>
+          <a:solidFill>
+            <a:srgbClr val="2E3338"/>
+          </a:solidFill>
+          <a:ln>
+            <a:noFill/>
+          </a:ln>
+          <a:effectLst/>
+        </p:spPr>
+        <p:style>
+          <a:lnRef idx="1">
+            <a:schemeClr val="accent1"/>
+          </a:lnRef>
+          <a:fillRef idx="3">
+            <a:schemeClr val="accent1"/>
+          </a:fillRef>
+          <a:effectRef idx="2">
+            <a:schemeClr val="accent1"/>
+          </a:effectRef>
+          <a:fontRef idx="minor">
+            <a:schemeClr val="lt1"/>
+          </a:fontRef>
+        </p:style>
+        <p:txBody>
+          <a:bodyPr rtlCol="0" anchor="ctr" wrap="square" lIns="73152" rIns="73152"/>
+          <a:lstStyle/>
+          <a:p>
+            <a:pPr algn="ctr"/>
+            <a:r>
+              <a:rPr sz="1500" b="1">
+                <a:solidFill>
+                  <a:srgbClr val="DEE2E6"/>
+                </a:solidFill>
+              </a:rPr>
+              <a:t>Conehead</a:t>
+            </a:r>
+          </a:p>
+          <a:p>
+            <a:pPr algn="ctr"/>
+            <a:r>
+              <a:rPr sz="1300" b="0">
+                <a:solidFill>
+                  <a:srgbClr val="9AA3AB"/>
+                </a:solidFill>
+              </a:rPr>
+              <a:t>a Zombie subclass;</a:t>
+            </a:r>
+          </a:p>
+          <a:p>
+            <a:pPr algn="ctr"/>
+            <a:r>
+              <a:rPr sz="1300" b="0">
+                <a:solidFill>
+                  <a:srgbClr val="9AA3AB"/>
+                </a:solidFill>
+              </a:rPr>
+              <a:t>armour for a plant: copy it</a:t>
+            </a:r>
+          </a:p>
+        </p:txBody>
+      </p:sp>
+      <p:sp>
+        <p:nvSpPr>
+          <p:cNvPr id="297" name="Rounded Rectangle 296"/>
+          <p:cNvSpPr/>
+          <p:nvPr/>
+        </p:nvSpPr>
+        <p:spPr>
+          <a:xfrm>
+            <a:off x="4617720" y="1417320"/>
+            <a:ext cx="1965960" cy="1188720"/>
+          </a:xfrm>
+          <a:prstGeom prst="roundRect">
+            <a:avLst>
+              <a:gd name="adj" fmla="val 12000"/>
+            </a:avLst>
+          </a:prstGeom>
+          <a:solidFill>
+            <a:srgbClr val="2E3338"/>
+          </a:solidFill>
+          <a:ln w="25400">
+            <a:solidFill>
+              <a:srgbClr val="D45D35"/>
+            </a:solidFill>
+          </a:ln>
+          <a:effectLst/>
+        </p:spPr>
+        <p:style>
+          <a:lnRef idx="1">
+            <a:schemeClr val="accent1"/>
+          </a:lnRef>
+          <a:fillRef idx="3">
+            <a:schemeClr val="accent1"/>
+          </a:fillRef>
+          <a:effectRef idx="2">
+            <a:schemeClr val="accent1"/>
+          </a:effectRef>
+          <a:fontRef idx="minor">
+            <a:schemeClr val="lt1"/>
+          </a:fontRef>
+        </p:style>
+        <p:txBody>
+          <a:bodyPr rtlCol="0" anchor="ctr" wrap="square" lIns="73152" rIns="73152"/>
+          <a:lstStyle/>
+          <a:p>
+            <a:pPr algn="ctr"/>
+            <a:r>
+              <a:rPr sz="1500" b="1">
+                <a:solidFill>
+                  <a:srgbClr val="DEE2E6"/>
+                </a:solidFill>
+              </a:rPr>
+              <a:t>Shoots and makes sun</a:t>
+            </a:r>
+          </a:p>
+          <a:p>
+            <a:pPr algn="ctr"/>
+            <a:r>
+              <a:rPr sz="1300" b="0">
+                <a:solidFill>
+                  <a:srgbClr val="9AA3AB"/>
+                </a:solidFill>
+              </a:rPr>
+              <a:t>which parent?</a:t>
+            </a:r>
+          </a:p>
+          <a:p>
+            <a:pPr algn="ctr"/>
+            <a:r>
+              <a:rPr sz="1300" b="0">
+                <a:solidFill>
+                  <a:srgbClr val="9AA3AB"/>
+                </a:solidFill>
+              </a:rPr>
+              <a:t>C# allows only one</a:t>
+            </a:r>
+          </a:p>
+        </p:txBody>
+      </p:sp>
+      <p:sp>
+        <p:nvSpPr>
+          <p:cNvPr id="298" name="Rounded Rectangle 297"/>
+          <p:cNvSpPr/>
+          <p:nvPr/>
+        </p:nvSpPr>
+        <p:spPr>
+          <a:xfrm>
+            <a:off x="6720840" y="1417320"/>
+            <a:ext cx="1965960" cy="1188720"/>
+          </a:xfrm>
+          <a:prstGeom prst="roundRect">
+            <a:avLst>
+              <a:gd name="adj" fmla="val 12000"/>
+            </a:avLst>
+          </a:prstGeom>
+          <a:solidFill>
+            <a:srgbClr val="2E3338"/>
+          </a:solidFill>
+          <a:ln>
+            <a:noFill/>
+          </a:ln>
+          <a:effectLst/>
+        </p:spPr>
+        <p:style>
+          <a:lnRef idx="1">
+            <a:schemeClr val="accent1"/>
+          </a:lnRef>
+          <a:fillRef idx="3">
+            <a:schemeClr val="accent1"/>
+          </a:fillRef>
+          <a:effectRef idx="2">
+            <a:schemeClr val="accent1"/>
+          </a:effectRef>
+          <a:fontRef idx="minor">
+            <a:schemeClr val="lt1"/>
+          </a:fontRef>
+        </p:style>
+        <p:txBody>
+          <a:bodyPr rtlCol="0" anchor="ctr" wrap="square" lIns="73152" rIns="73152"/>
+          <a:lstStyle/>
+          <a:p>
+            <a:pPr algn="ctr"/>
+            <a:r>
+              <a:rPr sz="1500" b="1">
+                <a:solidFill>
+                  <a:srgbClr val="DEE2E6"/>
+                </a:solidFill>
+              </a:rPr>
+              <a:t>Health</a:t>
+            </a:r>
+          </a:p>
+          <a:p>
+            <a:pPr algn="ctr"/>
+            <a:r>
+              <a:rPr sz="1300" b="0">
+                <a:solidFill>
+                  <a:srgbClr val="9AA3AB"/>
+                </a:solidFill>
+              </a:rPr>
+              <a:t>already copied:</a:t>
+            </a:r>
+          </a:p>
+          <a:p>
+            <a:pPr algn="ctr"/>
+            <a:r>
+              <a:rPr sz="1300" b="0">
+                <a:solidFill>
+                  <a:srgbClr val="9AA3AB"/>
+                </a:solidFill>
+              </a:rPr>
+              <a:t>a zombie isn’t a plant</a:t>
+            </a:r>
+          </a:p>
+        </p:txBody>
+      </p:sp>
+      <p:sp>
+        <p:nvSpPr>
+          <p:cNvPr id="299" name="TextBox 298"/>
+          <p:cNvSpPr txBox="1"/>
+          <p:nvPr/>
+        </p:nvSpPr>
+        <p:spPr>
+          <a:xfrm>
+            <a:off x="457200" y="2926080"/>
+            <a:ext cx="8229600" cy="731520"/>
+          </a:xfrm>
+          <a:prstGeom prst="rect">
+            <a:avLst/>
+          </a:prstGeom>
+          <a:noFill/>
+        </p:spPr>
+        <p:txBody>
+          <a:bodyPr wrap="square">
+            <a:spAutoFit/>
+          </a:bodyPr>
+          <a:lstStyle/>
+          <a:p>
+            <a:pPr algn="ctr"/>
+            <a:r>
+              <a:rPr sz="1600" b="1" i="0">
+                <a:solidFill>
+                  <a:srgbClr val="DEE2E6"/>
+                </a:solidFill>
+              </a:rPr>
+              <a:t>Inheritance describes what something is. In this game, what it can do matters more.</a:t>
+            </a:r>
+          </a:p>
+        </p:txBody>
+      </p:sp>
+    </p:spTree>
+  </p:cSld>
+  <p:clrMapOvr>
+    <a:masterClrMapping/>
+  </p:clrMapOvr>
+</p:sld>
+</file>
+
+<file path=ppt/slides/slide11.xml><?xml version="1.0" encoding="utf-8"?>
+<p:sld xmlns:a="http://schemas.openxmlformats.org/drawingml/2006/main" xmlns:p="http://schemas.openxmlformats.org/presentationml/2006/main" xmlns:r="http://schemas.openxmlformats.org/officeDocument/2006/relationships">
+  <p:cSld>
+    <p:spTree>
+      <p:nvGrpSpPr>
+        <p:cNvPr id="1" name=""/>
+        <p:cNvGrpSpPr/>
+        <p:nvPr/>
+      </p:nvGrpSpPr>
+      <p:grpSpPr/>
+      <p:sp>
+        <p:nvSpPr>
           <p:cNvPr id="128" name="Google Shape;128;p21"/>
           <p:cNvSpPr txBox="1"/>
           <p:nvPr>
@@ -6346,854 +6857,6 @@
               <a:t>Pvz1: plants and zombies as a class hierarchy</a:t>
             </a:r>
             <a:endParaRPr sz="1800"/>
-          </a:p>
-        </p:txBody>
-      </p:sp>
-    </p:spTree>
-  </p:cSld>
-  <p:clrMapOvr>
-    <a:masterClrMapping/>
-  </p:clrMapOvr>
-</p:sld>
-</file>
-
-<file path=ppt/slides/slide11.xml><?xml version="1.0" encoding="utf-8"?>
-<p:sld xmlns:a="http://schemas.openxmlformats.org/drawingml/2006/main" xmlns:p="http://schemas.openxmlformats.org/presentationml/2006/main" xmlns:r="http://schemas.openxmlformats.org/officeDocument/2006/relationships">
-  <p:cSld>
-    <p:spTree>
-      <p:nvGrpSpPr>
-        <p:cNvPr id="1" name=""/>
-        <p:cNvGrpSpPr/>
-        <p:nvPr/>
-      </p:nvGrpSpPr>
-      <p:grpSpPr/>
-      <p:sp>
-        <p:nvSpPr>
-          <p:cNvPr id="140" name="Google Shape;140;p23"/>
-          <p:cNvSpPr txBox="1"/>
-          <p:nvPr>
-            <p:ph type="title"/>
-          </p:nvPr>
-        </p:nvSpPr>
-        <p:spPr>
-          <a:xfrm>
-            <a:off x="311700" y="195615"/>
-            <a:ext cx="8520600" cy="572700"/>
-          </a:xfrm>
-          <a:prstGeom prst="rect">
-            <a:avLst/>
-          </a:prstGeom>
-        </p:spPr>
-        <p:txBody>
-          <a:bodyPr anchorCtr="0" anchor="t" bIns="91425" lIns="91425" spcFirstLastPara="1" rIns="91425" wrap="square" tIns="91425">
-            <a:normAutofit fontScale="90000"/>
-          </a:bodyPr>
-          <a:lstStyle/>
-          <a:p>
-            <a:pPr indent="0" lvl="0" marL="0" rtl="0" algn="l">
-              <a:spcBef>
-                <a:spcPts val="0"/>
-              </a:spcBef>
-              <a:spcAft>
-                <a:spcPts val="0"/>
-              </a:spcAft>
-              <a:buNone/>
-            </a:pPr>
-            <a:r>
-              <a:rPr lang="en"/>
-              <a:t>The Component Pattern</a:t>
-            </a:r>
-            <a:endParaRPr/>
-          </a:p>
-        </p:txBody>
-      </p:sp>
-      <p:sp>
-        <p:nvSpPr>
-          <p:cNvPr id="293" name="Google Shape;293;p45"/>
-          <p:cNvSpPr txBox="1"/>
-          <p:nvPr>
-            <p:ph type="title"/>
-          </p:nvPr>
-        </p:nvSpPr>
-        <p:spPr>
-          <a:xfrm>
-            <a:off x="311700" y="1152475"/>
-            <a:ext cx="3700000" cy="3500000"/>
-          </a:xfrm>
-          <a:prstGeom prst="rect">
-            <a:avLst/>
-          </a:prstGeom>
-        </p:spPr>
-        <p:txBody>
-          <a:bodyPr anchorCtr="0" anchor="t" bIns="91425" lIns="91425" spcFirstLastPara="1" rIns="91425" wrap="square" tIns="91425">
-            <a:normAutofit fontScale="90000"/>
-          </a:bodyPr>
-          <a:lstStyle/>
-          <a:p>
-            <a:pPr indent="-330200" lvl="0" marL="457200" rtl="0" algn="l">
-              <a:buClr>
-                <a:srgbClr val="DEE2E6"/>
-              </a:buClr>
-              <a:spcBef>
-                <a:spcPts val="0"/>
-              </a:spcBef>
-              <a:spcAft>
-                <a:spcPts val="0"/>
-              </a:spcAft>
-              <a:buSzPts val="1600"/>
-              <a:buChar char="●"/>
-            </a:pPr>
-            <a:r>
-              <a:rPr lang="en" sz="1600">
-                <a:solidFill>
-                  <a:srgbClr val="DEE2E6"/>
-                </a:solidFill>
-              </a:rPr>
-              <a:t>One entity, many domains (drawing, health, shooting), not coupled</a:t>
-            </a:r>
-            <a:endParaRPr/>
-          </a:p>
-          <a:p>
-            <a:pPr indent="-330200" lvl="0" marL="457200" rtl="0" algn="l">
-              <a:buClr>
-                <a:srgbClr val="DEE2E6"/>
-              </a:buClr>
-              <a:spcBef>
-                <a:spcPts val="0"/>
-              </a:spcBef>
-              <a:spcAft>
-                <a:spcPts val="0"/>
-              </a:spcAft>
-              <a:buSzPts val="1600"/>
-              <a:buChar char="●"/>
-            </a:pPr>
-            <a:r>
-              <a:rPr lang="en" sz="1600">
-                <a:solidFill>
-                  <a:srgbClr val="DEE2E6"/>
-                </a:solidFill>
-              </a:rPr>
-              <a:t>An entity: a position, a row, and a list of components</a:t>
-            </a:r>
-            <a:endParaRPr/>
-          </a:p>
-          <a:p>
-            <a:pPr indent="-330200" lvl="0" marL="457200" rtl="0" algn="l">
-              <a:buClr>
-                <a:srgbClr val="DEE2E6"/>
-              </a:buClr>
-              <a:spcBef>
-                <a:spcPts val="0"/>
-              </a:spcBef>
-              <a:spcAft>
-                <a:spcPts val="0"/>
-              </a:spcAft>
-              <a:buSzPts val="1600"/>
-              <a:buChar char="●"/>
-            </a:pPr>
-            <a:r>
-              <a:rPr lang="en" sz="1600">
-                <a:solidFill>
-                  <a:srgbClr val="DEE2E6"/>
-                </a:solidFill>
-              </a:rPr>
-              <a:t>A component: one ability</a:t>
-            </a:r>
-            <a:endParaRPr/>
-          </a:p>
-          <a:p>
-            <a:pPr indent="-317500" lvl="1" marL="914400" rtl="0" algn="l">
-              <a:buClr>
-                <a:srgbClr val="6C757D"/>
-              </a:buClr>
-              <a:spcBef>
-                <a:spcPts val="0"/>
-              </a:spcBef>
-              <a:spcAft>
-                <a:spcPts val="0"/>
-              </a:spcAft>
-              <a:buSzPts val="1400"/>
-              <a:buChar char="○"/>
-            </a:pPr>
-            <a:r>
-              <a:rPr lang="en" sz="1400">
-                <a:solidFill>
-                  <a:srgbClr val="6C757D"/>
-                </a:solidFill>
-              </a:rPr>
-              <a:t>Health, Shooter, SunProducer, Walker, Eater, Armour, SpriteRenderer</a:t>
-            </a:r>
-            <a:endParaRPr/>
-          </a:p>
-        </p:txBody>
-      </p:sp>
-      <p:sp>
-        <p:nvSpPr>
-          <p:cNvPr id="141" name="Google Shape;141;p23"/>
-          <p:cNvSpPr txBox="1"/>
-          <p:nvPr>
-            <p:ph idx="2" type="body"/>
-          </p:nvPr>
-        </p:nvSpPr>
-        <p:spPr>
-          <a:xfrm>
-            <a:off x="4150000" y="1152475"/>
-            <a:ext cx="4750000" cy="3600000"/>
-          </a:xfrm>
-          <a:prstGeom prst="rect">
-            <a:avLst/>
-          </a:prstGeom>
-        </p:spPr>
-        <p:txBody>
-          <a:bodyPr anchorCtr="0" anchor="t" bIns="91425" lIns="91425" spcFirstLastPara="1" rIns="91425" wrap="square" tIns="91425">
-            <a:noAutofit/>
-          </a:bodyPr>
-          <a:lstStyle/>
-          <a:p>
-            <a:pPr indent="0" lvl="0" marL="0" rtl="0" algn="l">
-              <a:lnSpc>
-                <a:spcPct val="115000"/>
-              </a:lnSpc>
-              <a:spcBef>
-                <a:spcPts val="0"/>
-              </a:spcBef>
-              <a:spcAft>
-                <a:spcPts val="0"/>
-              </a:spcAft>
-              <a:buNone/>
-            </a:pPr>
-            <a:r>
-              <a:rPr lang="en" sz="1000">
-                <a:highlight>
-                  <a:schemeClr val="dk2"/>
-                </a:highlight>
-                <a:latin typeface="Consolas"/>
-                <a:ea typeface="Consolas"/>
-                <a:cs typeface="Consolas"/>
-                <a:sym typeface="Consolas"/>
-              </a:rPr>
-              <a:t>public class Entity(World world)</a:t>
-            </a:r>
-            <a:endParaRPr sz="1000">
-              <a:solidFill>
-                <a:srgbClr val="CCCCCC"/>
-              </a:solidFill>
-              <a:highlight>
-                <a:schemeClr val="dk2"/>
-              </a:highlight>
-              <a:latin typeface="Consolas"/>
-              <a:ea typeface="Consolas"/>
-              <a:cs typeface="Consolas"/>
-              <a:sym typeface="Consolas"/>
-            </a:endParaRPr>
-          </a:p>
-          <a:p>
-            <a:pPr indent="0" lvl="0" marL="0" rtl="0" algn="l">
-              <a:lnSpc>
-                <a:spcPct val="115000"/>
-              </a:lnSpc>
-              <a:spcBef>
-                <a:spcPts val="0"/>
-              </a:spcBef>
-              <a:spcAft>
-                <a:spcPts val="0"/>
-              </a:spcAft>
-              <a:buNone/>
-            </a:pPr>
-            <a:r>
-              <a:rPr lang="en" sz="1000">
-                <a:highlight>
-                  <a:schemeClr val="dk2"/>
-                </a:highlight>
-                <a:latin typeface="Consolas"/>
-                <a:ea typeface="Consolas"/>
-                <a:cs typeface="Consolas"/>
-                <a:sym typeface="Consolas"/>
-              </a:rPr>
-              <a:t>{</a:t>
-            </a:r>
-            <a:endParaRPr sz="1000">
-              <a:solidFill>
-                <a:srgbClr val="CCCCCC"/>
-              </a:solidFill>
-              <a:highlight>
-                <a:schemeClr val="dk2"/>
-              </a:highlight>
-              <a:latin typeface="Consolas"/>
-              <a:ea typeface="Consolas"/>
-              <a:cs typeface="Consolas"/>
-              <a:sym typeface="Consolas"/>
-            </a:endParaRPr>
-          </a:p>
-          <a:p>
-            <a:pPr indent="0" lvl="0" marL="0" rtl="0" algn="l">
-              <a:lnSpc>
-                <a:spcPct val="115000"/>
-              </a:lnSpc>
-              <a:spcBef>
-                <a:spcPts val="0"/>
-              </a:spcBef>
-              <a:spcAft>
-                <a:spcPts val="0"/>
-              </a:spcAft>
-              <a:buNone/>
-            </a:pPr>
-            <a:r>
-              <a:rPr lang="en" sz="1000">
-                <a:highlight>
-                  <a:schemeClr val="dk2"/>
-                </a:highlight>
-                <a:latin typeface="Consolas"/>
-                <a:ea typeface="Consolas"/>
-                <a:cs typeface="Consolas"/>
-                <a:sym typeface="Consolas"/>
-              </a:rPr>
-              <a:t>    List&lt;Component&gt; _components = [];</a:t>
-            </a:r>
-            <a:endParaRPr sz="1000">
-              <a:solidFill>
-                <a:srgbClr val="CCCCCC"/>
-              </a:solidFill>
-              <a:highlight>
-                <a:schemeClr val="dk2"/>
-              </a:highlight>
-              <a:latin typeface="Consolas"/>
-              <a:ea typeface="Consolas"/>
-              <a:cs typeface="Consolas"/>
-              <a:sym typeface="Consolas"/>
-            </a:endParaRPr>
-          </a:p>
-          <a:p>
-            <a:pPr indent="0" lvl="0" marL="0" rtl="0" algn="l">
-              <a:lnSpc>
-                <a:spcPct val="115000"/>
-              </a:lnSpc>
-              <a:spcBef>
-                <a:spcPts val="0"/>
-              </a:spcBef>
-              <a:spcAft>
-                <a:spcPts val="0"/>
-              </a:spcAft>
-              <a:buNone/>
-            </a:pPr>
-            <a:r>
-              <a:rPr lang="en" sz="1000">
-                <a:highlight>
-                  <a:schemeClr val="dk2"/>
-                </a:highlight>
-                <a:latin typeface="Consolas"/>
-                <a:ea typeface="Consolas"/>
-                <a:cs typeface="Consolas"/>
-                <a:sym typeface="Consolas"/>
-              </a:rPr>
-              <a:t/>
-            </a:r>
-            <a:endParaRPr sz="1000">
-              <a:solidFill>
-                <a:srgbClr val="CCCCCC"/>
-              </a:solidFill>
-              <a:highlight>
-                <a:schemeClr val="dk2"/>
-              </a:highlight>
-              <a:latin typeface="Consolas"/>
-              <a:ea typeface="Consolas"/>
-              <a:cs typeface="Consolas"/>
-              <a:sym typeface="Consolas"/>
-            </a:endParaRPr>
-          </a:p>
-          <a:p>
-            <a:pPr indent="0" lvl="0" marL="0" rtl="0" algn="l">
-              <a:lnSpc>
-                <a:spcPct val="115000"/>
-              </a:lnSpc>
-              <a:spcBef>
-                <a:spcPts val="0"/>
-              </a:spcBef>
-              <a:spcAft>
-                <a:spcPts val="0"/>
-              </a:spcAft>
-              <a:buNone/>
-            </a:pPr>
-            <a:r>
-              <a:rPr lang="en" sz="1000">
-                <a:highlight>
-                  <a:schemeClr val="dk2"/>
-                </a:highlight>
-                <a:latin typeface="Consolas"/>
-                <a:ea typeface="Consolas"/>
-                <a:cs typeface="Consolas"/>
-                <a:sym typeface="Consolas"/>
-              </a:rPr>
-              <a:t>    public Vector2 Position { get; set; }</a:t>
-            </a:r>
-            <a:endParaRPr sz="1000">
-              <a:solidFill>
-                <a:srgbClr val="CCCCCC"/>
-              </a:solidFill>
-              <a:highlight>
-                <a:schemeClr val="dk2"/>
-              </a:highlight>
-              <a:latin typeface="Consolas"/>
-              <a:ea typeface="Consolas"/>
-              <a:cs typeface="Consolas"/>
-              <a:sym typeface="Consolas"/>
-            </a:endParaRPr>
-          </a:p>
-          <a:p>
-            <a:pPr indent="0" lvl="0" marL="0" rtl="0" algn="l">
-              <a:lnSpc>
-                <a:spcPct val="115000"/>
-              </a:lnSpc>
-              <a:spcBef>
-                <a:spcPts val="0"/>
-              </a:spcBef>
-              <a:spcAft>
-                <a:spcPts val="0"/>
-              </a:spcAft>
-              <a:buNone/>
-            </a:pPr>
-            <a:r>
-              <a:rPr lang="en" sz="1000">
-                <a:highlight>
-                  <a:schemeClr val="dk2"/>
-                </a:highlight>
-                <a:latin typeface="Consolas"/>
-                <a:ea typeface="Consolas"/>
-                <a:cs typeface="Consolas"/>
-                <a:sym typeface="Consolas"/>
-              </a:rPr>
-              <a:t>    public int Row { get; set; }</a:t>
-            </a:r>
-            <a:endParaRPr sz="1000">
-              <a:solidFill>
-                <a:srgbClr val="CCCCCC"/>
-              </a:solidFill>
-              <a:highlight>
-                <a:schemeClr val="dk2"/>
-              </a:highlight>
-              <a:latin typeface="Consolas"/>
-              <a:ea typeface="Consolas"/>
-              <a:cs typeface="Consolas"/>
-              <a:sym typeface="Consolas"/>
-            </a:endParaRPr>
-          </a:p>
-          <a:p>
-            <a:pPr indent="0" lvl="0" marL="0" rtl="0" algn="l">
-              <a:lnSpc>
-                <a:spcPct val="115000"/>
-              </a:lnSpc>
-              <a:spcBef>
-                <a:spcPts val="0"/>
-              </a:spcBef>
-              <a:spcAft>
-                <a:spcPts val="0"/>
-              </a:spcAft>
-              <a:buNone/>
-            </a:pPr>
-            <a:r>
-              <a:rPr lang="en" sz="1000">
-                <a:highlight>
-                  <a:schemeClr val="dk2"/>
-                </a:highlight>
-                <a:latin typeface="Consolas"/>
-                <a:ea typeface="Consolas"/>
-                <a:cs typeface="Consolas"/>
-                <a:sym typeface="Consolas"/>
-              </a:rPr>
-              <a:t/>
-            </a:r>
-            <a:endParaRPr sz="1000">
-              <a:solidFill>
-                <a:srgbClr val="CCCCCC"/>
-              </a:solidFill>
-              <a:highlight>
-                <a:schemeClr val="dk2"/>
-              </a:highlight>
-              <a:latin typeface="Consolas"/>
-              <a:ea typeface="Consolas"/>
-              <a:cs typeface="Consolas"/>
-              <a:sym typeface="Consolas"/>
-            </a:endParaRPr>
-          </a:p>
-          <a:p>
-            <a:pPr indent="0" lvl="0" marL="0" rtl="0" algn="l">
-              <a:lnSpc>
-                <a:spcPct val="115000"/>
-              </a:lnSpc>
-              <a:spcBef>
-                <a:spcPts val="0"/>
-              </a:spcBef>
-              <a:spcAft>
-                <a:spcPts val="0"/>
-              </a:spcAft>
-              <a:buNone/>
-            </a:pPr>
-            <a:r>
-              <a:rPr lang="en" sz="1000">
-                <a:highlight>
-                  <a:schemeClr val="dk2"/>
-                </a:highlight>
-                <a:latin typeface="Consolas"/>
-                <a:ea typeface="Consolas"/>
-                <a:cs typeface="Consolas"/>
-                <a:sym typeface="Consolas"/>
-              </a:rPr>
-              <a:t>    public Entity With(Component c) { ... }</a:t>
-            </a:r>
-            <a:endParaRPr sz="1000">
-              <a:solidFill>
-                <a:srgbClr val="CCCCCC"/>
-              </a:solidFill>
-              <a:highlight>
-                <a:schemeClr val="dk2"/>
-              </a:highlight>
-              <a:latin typeface="Consolas"/>
-              <a:ea typeface="Consolas"/>
-              <a:cs typeface="Consolas"/>
-              <a:sym typeface="Consolas"/>
-            </a:endParaRPr>
-          </a:p>
-          <a:p>
-            <a:pPr indent="0" lvl="0" marL="0" rtl="0" algn="l">
-              <a:lnSpc>
-                <a:spcPct val="115000"/>
-              </a:lnSpc>
-              <a:spcBef>
-                <a:spcPts val="0"/>
-              </a:spcBef>
-              <a:spcAft>
-                <a:spcPts val="0"/>
-              </a:spcAft>
-              <a:buNone/>
-            </a:pPr>
-            <a:r>
-              <a:rPr lang="en" sz="1000">
-                <a:highlight>
-                  <a:schemeClr val="dk2"/>
-                </a:highlight>
-                <a:latin typeface="Consolas"/>
-                <a:ea typeface="Consolas"/>
-                <a:cs typeface="Consolas"/>
-                <a:sym typeface="Consolas"/>
-              </a:rPr>
-              <a:t>    public T Get&lt;T&gt;() where T : Component</a:t>
-            </a:r>
-            <a:endParaRPr sz="1000">
-              <a:solidFill>
-                <a:srgbClr val="CCCCCC"/>
-              </a:solidFill>
-              <a:highlight>
-                <a:schemeClr val="dk2"/>
-              </a:highlight>
-              <a:latin typeface="Consolas"/>
-              <a:ea typeface="Consolas"/>
-              <a:cs typeface="Consolas"/>
-              <a:sym typeface="Consolas"/>
-            </a:endParaRPr>
-          </a:p>
-          <a:p>
-            <a:pPr indent="0" lvl="0" marL="0" rtl="0" algn="l">
-              <a:lnSpc>
-                <a:spcPct val="115000"/>
-              </a:lnSpc>
-              <a:spcBef>
-                <a:spcPts val="0"/>
-              </a:spcBef>
-              <a:spcAft>
-                <a:spcPts val="0"/>
-              </a:spcAft>
-              <a:buNone/>
-            </a:pPr>
-            <a:r>
-              <a:rPr lang="en" sz="1000">
-                <a:highlight>
-                  <a:schemeClr val="dk2"/>
-                </a:highlight>
-                <a:latin typeface="Consolas"/>
-                <a:ea typeface="Consolas"/>
-                <a:cs typeface="Consolas"/>
-                <a:sym typeface="Consolas"/>
-              </a:rPr>
-              <a:t>        { ... }</a:t>
-            </a:r>
-            <a:endParaRPr sz="1000">
-              <a:solidFill>
-                <a:srgbClr val="CCCCCC"/>
-              </a:solidFill>
-              <a:highlight>
-                <a:schemeClr val="dk2"/>
-              </a:highlight>
-              <a:latin typeface="Consolas"/>
-              <a:ea typeface="Consolas"/>
-              <a:cs typeface="Consolas"/>
-              <a:sym typeface="Consolas"/>
-            </a:endParaRPr>
-          </a:p>
-          <a:p>
-            <a:pPr indent="0" lvl="0" marL="0" rtl="0" algn="l">
-              <a:lnSpc>
-                <a:spcPct val="115000"/>
-              </a:lnSpc>
-              <a:spcBef>
-                <a:spcPts val="0"/>
-              </a:spcBef>
-              <a:spcAft>
-                <a:spcPts val="0"/>
-              </a:spcAft>
-              <a:buNone/>
-            </a:pPr>
-            <a:r>
-              <a:rPr lang="en" sz="1000">
-                <a:highlight>
-                  <a:schemeClr val="dk2"/>
-                </a:highlight>
-                <a:latin typeface="Consolas"/>
-                <a:ea typeface="Consolas"/>
-                <a:cs typeface="Consolas"/>
-                <a:sym typeface="Consolas"/>
-              </a:rPr>
-              <a:t/>
-            </a:r>
-            <a:endParaRPr sz="1000">
-              <a:solidFill>
-                <a:srgbClr val="CCCCCC"/>
-              </a:solidFill>
-              <a:highlight>
-                <a:schemeClr val="dk2"/>
-              </a:highlight>
-              <a:latin typeface="Consolas"/>
-              <a:ea typeface="Consolas"/>
-              <a:cs typeface="Consolas"/>
-              <a:sym typeface="Consolas"/>
-            </a:endParaRPr>
-          </a:p>
-          <a:p>
-            <a:pPr indent="0" lvl="0" marL="0" rtl="0" algn="l">
-              <a:lnSpc>
-                <a:spcPct val="115000"/>
-              </a:lnSpc>
-              <a:spcBef>
-                <a:spcPts val="0"/>
-              </a:spcBef>
-              <a:spcAft>
-                <a:spcPts val="0"/>
-              </a:spcAft>
-              <a:buNone/>
-            </a:pPr>
-            <a:r>
-              <a:rPr lang="en" sz="1000">
-                <a:highlight>
-                  <a:schemeClr val="dk2"/>
-                </a:highlight>
-                <a:latin typeface="Consolas"/>
-                <a:ea typeface="Consolas"/>
-                <a:cs typeface="Consolas"/>
-                <a:sym typeface="Consolas"/>
-              </a:rPr>
-              <a:t>    public void Update(float dt)</a:t>
-            </a:r>
-            <a:endParaRPr sz="1000">
-              <a:solidFill>
-                <a:srgbClr val="CCCCCC"/>
-              </a:solidFill>
-              <a:highlight>
-                <a:schemeClr val="dk2"/>
-              </a:highlight>
-              <a:latin typeface="Consolas"/>
-              <a:ea typeface="Consolas"/>
-              <a:cs typeface="Consolas"/>
-              <a:sym typeface="Consolas"/>
-            </a:endParaRPr>
-          </a:p>
-          <a:p>
-            <a:pPr indent="0" lvl="0" marL="0" rtl="0" algn="l">
-              <a:lnSpc>
-                <a:spcPct val="115000"/>
-              </a:lnSpc>
-              <a:spcBef>
-                <a:spcPts val="0"/>
-              </a:spcBef>
-              <a:spcAft>
-                <a:spcPts val="0"/>
-              </a:spcAft>
-              <a:buNone/>
-            </a:pPr>
-            <a:r>
-              <a:rPr lang="en" sz="1000">
-                <a:highlight>
-                  <a:schemeClr val="dk2"/>
-                </a:highlight>
-                <a:latin typeface="Consolas"/>
-                <a:ea typeface="Consolas"/>
-                <a:cs typeface="Consolas"/>
-                <a:sym typeface="Consolas"/>
-              </a:rPr>
-              <a:t>    {</a:t>
-            </a:r>
-            <a:endParaRPr sz="1000">
-              <a:solidFill>
-                <a:srgbClr val="CCCCCC"/>
-              </a:solidFill>
-              <a:highlight>
-                <a:schemeClr val="dk2"/>
-              </a:highlight>
-              <a:latin typeface="Consolas"/>
-              <a:ea typeface="Consolas"/>
-              <a:cs typeface="Consolas"/>
-              <a:sym typeface="Consolas"/>
-            </a:endParaRPr>
-          </a:p>
-          <a:p>
-            <a:pPr indent="0" lvl="0" marL="0" rtl="0" algn="l">
-              <a:lnSpc>
-                <a:spcPct val="115000"/>
-              </a:lnSpc>
-              <a:spcBef>
-                <a:spcPts val="0"/>
-              </a:spcBef>
-              <a:spcAft>
-                <a:spcPts val="0"/>
-              </a:spcAft>
-              <a:buNone/>
-            </a:pPr>
-            <a:r>
-              <a:rPr lang="en" sz="1000">
-                <a:highlight>
-                  <a:schemeClr val="dk2"/>
-                </a:highlight>
-                <a:latin typeface="Consolas"/>
-                <a:ea typeface="Consolas"/>
-                <a:cs typeface="Consolas"/>
-                <a:sym typeface="Consolas"/>
-              </a:rPr>
-              <a:t>        foreach (Component c in _components)</a:t>
-            </a:r>
-            <a:endParaRPr sz="1000">
-              <a:solidFill>
-                <a:srgbClr val="CCCCCC"/>
-              </a:solidFill>
-              <a:highlight>
-                <a:schemeClr val="dk2"/>
-              </a:highlight>
-              <a:latin typeface="Consolas"/>
-              <a:ea typeface="Consolas"/>
-              <a:cs typeface="Consolas"/>
-              <a:sym typeface="Consolas"/>
-            </a:endParaRPr>
-          </a:p>
-          <a:p>
-            <a:pPr indent="0" lvl="0" marL="0" rtl="0" algn="l">
-              <a:lnSpc>
-                <a:spcPct val="115000"/>
-              </a:lnSpc>
-              <a:spcBef>
-                <a:spcPts val="0"/>
-              </a:spcBef>
-              <a:spcAft>
-                <a:spcPts val="0"/>
-              </a:spcAft>
-              <a:buNone/>
-            </a:pPr>
-            <a:r>
-              <a:rPr lang="en" sz="1000">
-                <a:highlight>
-                  <a:schemeClr val="dk2"/>
-                </a:highlight>
-                <a:latin typeface="Consolas"/>
-                <a:ea typeface="Consolas"/>
-                <a:cs typeface="Consolas"/>
-                <a:sym typeface="Consolas"/>
-              </a:rPr>
-              <a:t>            c.Update(dt);</a:t>
-            </a:r>
-            <a:endParaRPr sz="1000">
-              <a:solidFill>
-                <a:srgbClr val="CCCCCC"/>
-              </a:solidFill>
-              <a:highlight>
-                <a:schemeClr val="dk2"/>
-              </a:highlight>
-              <a:latin typeface="Consolas"/>
-              <a:ea typeface="Consolas"/>
-              <a:cs typeface="Consolas"/>
-              <a:sym typeface="Consolas"/>
-            </a:endParaRPr>
-          </a:p>
-          <a:p>
-            <a:pPr indent="0" lvl="0" marL="0" rtl="0" algn="l">
-              <a:lnSpc>
-                <a:spcPct val="115000"/>
-              </a:lnSpc>
-              <a:spcBef>
-                <a:spcPts val="0"/>
-              </a:spcBef>
-              <a:spcAft>
-                <a:spcPts val="0"/>
-              </a:spcAft>
-              <a:buNone/>
-            </a:pPr>
-            <a:r>
-              <a:rPr lang="en" sz="1000">
-                <a:highlight>
-                  <a:schemeClr val="dk2"/>
-                </a:highlight>
-                <a:latin typeface="Consolas"/>
-                <a:ea typeface="Consolas"/>
-                <a:cs typeface="Consolas"/>
-                <a:sym typeface="Consolas"/>
-              </a:rPr>
-              <a:t>    }</a:t>
-            </a:r>
-            <a:endParaRPr sz="1000">
-              <a:solidFill>
-                <a:srgbClr val="CCCCCC"/>
-              </a:solidFill>
-              <a:highlight>
-                <a:schemeClr val="dk2"/>
-              </a:highlight>
-              <a:latin typeface="Consolas"/>
-              <a:ea typeface="Consolas"/>
-              <a:cs typeface="Consolas"/>
-              <a:sym typeface="Consolas"/>
-            </a:endParaRPr>
-          </a:p>
-          <a:p>
-            <a:pPr indent="0" lvl="0" marL="0" rtl="0" algn="l">
-              <a:lnSpc>
-                <a:spcPct val="115000"/>
-              </a:lnSpc>
-              <a:spcBef>
-                <a:spcPts val="0"/>
-              </a:spcBef>
-              <a:spcAft>
-                <a:spcPts val="0"/>
-              </a:spcAft>
-              <a:buNone/>
-            </a:pPr>
-            <a:r>
-              <a:rPr lang="en" sz="1000">
-                <a:highlight>
-                  <a:schemeClr val="dk2"/>
-                </a:highlight>
-                <a:latin typeface="Consolas"/>
-                <a:ea typeface="Consolas"/>
-                <a:cs typeface="Consolas"/>
-                <a:sym typeface="Consolas"/>
-              </a:rPr>
-              <a:t>}</a:t>
-            </a:r>
-            <a:endParaRPr sz="1000">
-              <a:solidFill>
-                <a:srgbClr val="CCCCCC"/>
-              </a:solidFill>
-              <a:highlight>
-                <a:schemeClr val="dk2"/>
-              </a:highlight>
-              <a:latin typeface="Consolas"/>
-              <a:ea typeface="Consolas"/>
-              <a:cs typeface="Consolas"/>
-              <a:sym typeface="Consolas"/>
-            </a:endParaRPr>
           </a:p>
         </p:txBody>
       </p:sp>
@@ -7249,7 +6912,7 @@
             </a:pPr>
             <a:r>
               <a:rPr lang="en"/>
-              <a:t>Recipes</a:t>
+              <a:t>The Component Pattern</a:t>
             </a:r>
             <a:endParaRPr/>
           </a:p>
@@ -7297,7 +6960,7 @@
                   <a:srgbClr val="DEE2E6"/>
                 </a:solidFill>
               </a:rPr>
-              <a:t>No classes for plants or zombies</a:t>
+              <a:t>One entity, many domains (drawing, health, shooting), not coupled</a:t>
             </a:r>
             <a:endParaRPr/>
           </a:p>
@@ -7321,7 +6984,7 @@
                   <a:srgbClr val="DEE2E6"/>
                 </a:solidFill>
               </a:rPr>
-              <a:t>Each kind of thing is a list of components</a:t>
+              <a:t>An entity: a position, a row, and a list of components</a:t>
             </a:r>
             <a:endParaRPr/>
           </a:p>
@@ -7345,14 +7008,14 @@
                   <a:srgbClr val="DEE2E6"/>
                 </a:solidFill>
               </a:rPr>
-              <a:t>Repeater, Conehead: no new classes</a:t>
+              <a:t>A component: one ability</a:t>
             </a:r>
             <a:endParaRPr/>
           </a:p>
           <a:p>
-            <a:pPr indent="-330200" lvl="0" marL="457200" rtl="0" algn="l">
+            <a:pPr indent="-317500" lvl="1" marL="914400" rtl="0" algn="l">
               <a:buClr>
-                <a:srgbClr val="DEE2E6"/>
+                <a:srgbClr val="6C757D"/>
               </a:buClr>
               <a:spcBef>
                 <a:spcPts val="0"/>
@@ -7360,40 +7023,16 @@
               <a:spcAft>
                 <a:spcPts val="0"/>
               </a:spcAft>
-              <a:buSzPts val="1600"/>
-              <a:buChar char="●"/>
-            </a:pPr>
-            <a:r>
-              <a:rPr lang="en" sz="1600">
+              <a:buSzPts val="1400"/>
+              <a:buChar char="○"/>
+            </a:pPr>
+            <a:r>
+              <a:rPr lang="en" sz="1400">
                 <a:solidFill>
-                  <a:srgbClr val="DEE2E6"/>
+                  <a:srgbClr val="6C757D"/>
                 </a:solidFill>
               </a:rPr>
-              <a:t>Shoots and makes sun: two .With calls</a:t>
-            </a:r>
-            <a:endParaRPr/>
-          </a:p>
-          <a:p>
-            <a:pPr indent="-330200" lvl="0" marL="457200" rtl="0" algn="l">
-              <a:buClr>
-                <a:srgbClr val="DEE2E6"/>
-              </a:buClr>
-              <a:spcBef>
-                <a:spcPts val="0"/>
-              </a:spcBef>
-              <a:spcAft>
-                <a:spcPts val="0"/>
-              </a:spcAft>
-              <a:buSzPts val="1600"/>
-              <a:buChar char="●"/>
-            </a:pPr>
-            <a:r>
-              <a:rPr lang="en" sz="1600">
-                <a:solidFill>
-                  <a:srgbClr val="DEE2E6"/>
-                </a:solidFill>
-              </a:rPr>
-              <a:t>Health: written once, for plants and zombies</a:t>
+              <a:t>Health, Shooter, SunProducer, Walker, Eater, Armour, SpriteRenderer</a:t>
             </a:r>
             <a:endParaRPr/>
           </a:p>
@@ -7444,7 +7083,7 @@
                 <a:cs typeface="Consolas"/>
                 <a:sym typeface="Consolas"/>
               </a:rPr>
-              <a:t>Entity Sunflower(World world) =&gt;</a:t>
+              <a:t>public class Entity(World world)</a:t>
             </a:r>
             <a:endParaRPr sz="1000">
               <a:solidFill>
@@ -7482,7 +7121,7 @@
                 <a:cs typeface="Consolas"/>
                 <a:sym typeface="Consolas"/>
               </a:rPr>
-              <a:t>    Plant(world, "sunflower", 6)</a:t>
+              <a:t>{</a:t>
             </a:r>
             <a:endParaRPr sz="1000">
               <a:solidFill>
@@ -7520,7 +7159,7 @@
                 <a:cs typeface="Consolas"/>
                 <a:sym typeface="Consolas"/>
               </a:rPr>
-              <a:t>        .With(new SunProducer(12, 25));</a:t>
+              <a:t>    List&lt;Component&gt; _components = [];</a:t>
             </a:r>
             <a:endParaRPr sz="1000">
               <a:solidFill>
@@ -7558,7 +7197,7 @@
                 <a:cs typeface="Consolas"/>
                 <a:sym typeface="Consolas"/>
               </a:rPr>
-              <a:t>Entity Repeater(World world) =&gt;</a:t>
+              <a:t/>
             </a:r>
             <a:endParaRPr sz="1000">
               <a:solidFill>
@@ -7596,7 +7235,7 @@
                 <a:cs typeface="Consolas"/>
                 <a:sym typeface="Consolas"/>
               </a:rPr>
-              <a:t>    Plant(world, "repeater", 6)</a:t>
+              <a:t>    public Vector2 Position { get; set; }</a:t>
             </a:r>
             <a:endParaRPr sz="1000">
               <a:solidFill>
@@ -7634,7 +7273,7 @@
                 <a:cs typeface="Consolas"/>
                 <a:sym typeface="Consolas"/>
               </a:rPr>
-              <a:t>        .With(new Shooter(1.4f, 2, 1));</a:t>
+              <a:t>    public int Row { get; set; }</a:t>
             </a:r>
             <a:endParaRPr sz="1000">
               <a:solidFill>
@@ -7710,7 +7349,7 @@
                 <a:cs typeface="Consolas"/>
                 <a:sym typeface="Consolas"/>
               </a:rPr>
-              <a:t>Entity Zombie(World world) =&gt;</a:t>
+              <a:t>    public Entity With(Component c) { ... }</a:t>
             </a:r>
             <a:endParaRPr sz="1000">
               <a:solidFill>
@@ -7748,7 +7387,7 @@
                 <a:cs typeface="Consolas"/>
                 <a:sym typeface="Consolas"/>
               </a:rPr>
-              <a:t>    new Entity(world)</a:t>
+              <a:t>    public T Get&lt;T&gt;() where T : Component</a:t>
             </a:r>
             <a:endParaRPr sz="1000">
               <a:solidFill>
@@ -7786,7 +7425,7 @@
                 <a:cs typeface="Consolas"/>
                 <a:sym typeface="Consolas"/>
               </a:rPr>
-              <a:t>        .With(new SpriteRenderer(zombie))</a:t>
+              <a:t>        { ... }</a:t>
             </a:r>
             <a:endParaRPr sz="1000">
               <a:solidFill>
@@ -7824,7 +7463,7 @@
                 <a:cs typeface="Consolas"/>
                 <a:sym typeface="Consolas"/>
               </a:rPr>
-              <a:t>        .With(new Health(10))</a:t>
+              <a:t/>
             </a:r>
             <a:endParaRPr sz="1000">
               <a:solidFill>
@@ -7862,7 +7501,7 @@
                 <a:cs typeface="Consolas"/>
                 <a:sym typeface="Consolas"/>
               </a:rPr>
-              <a:t>        .With(new Walker(16))</a:t>
+              <a:t>    public void Update(float dt)</a:t>
             </a:r>
             <a:endParaRPr sz="1000">
               <a:solidFill>
@@ -7900,7 +7539,7 @@
                 <a:cs typeface="Consolas"/>
                 <a:sym typeface="Consolas"/>
               </a:rPr>
-              <a:t>        .With(new Eater(1));</a:t>
+              <a:t>    {</a:t>
             </a:r>
             <a:endParaRPr sz="1000">
               <a:solidFill>
@@ -7938,7 +7577,7 @@
                 <a:cs typeface="Consolas"/>
                 <a:sym typeface="Consolas"/>
               </a:rPr>
-              <a:t>Entity Conehead(World world) =&gt;</a:t>
+              <a:t>        foreach (Component c in _components)</a:t>
             </a:r>
             <a:endParaRPr sz="1000">
               <a:solidFill>
@@ -7976,7 +7615,83 @@
                 <a:cs typeface="Consolas"/>
                 <a:sym typeface="Consolas"/>
               </a:rPr>
-              <a:t>    Zombie(world).With(new Armour(18, cone));</a:t>
+              <a:t>            c.Update(dt);</a:t>
+            </a:r>
+            <a:endParaRPr sz="1000">
+              <a:solidFill>
+                <a:srgbClr val="CCCCCC"/>
+              </a:solidFill>
+              <a:highlight>
+                <a:schemeClr val="dk2"/>
+              </a:highlight>
+              <a:latin typeface="Consolas"/>
+              <a:ea typeface="Consolas"/>
+              <a:cs typeface="Consolas"/>
+              <a:sym typeface="Consolas"/>
+            </a:endParaRPr>
+          </a:p>
+          <a:p>
+            <a:pPr indent="0" lvl="0" marL="0" rtl="0" algn="l">
+              <a:lnSpc>
+                <a:spcPct val="115000"/>
+              </a:lnSpc>
+              <a:spcBef>
+                <a:spcPts val="0"/>
+              </a:spcBef>
+              <a:spcAft>
+                <a:spcPts val="0"/>
+              </a:spcAft>
+              <a:buNone/>
+            </a:pPr>
+            <a:r>
+              <a:rPr lang="en" sz="1000">
+                <a:highlight>
+                  <a:schemeClr val="dk2"/>
+                </a:highlight>
+                <a:latin typeface="Consolas"/>
+                <a:ea typeface="Consolas"/>
+                <a:cs typeface="Consolas"/>
+                <a:sym typeface="Consolas"/>
+              </a:rPr>
+              <a:t>    }</a:t>
+            </a:r>
+            <a:endParaRPr sz="1000">
+              <a:solidFill>
+                <a:srgbClr val="CCCCCC"/>
+              </a:solidFill>
+              <a:highlight>
+                <a:schemeClr val="dk2"/>
+              </a:highlight>
+              <a:latin typeface="Consolas"/>
+              <a:ea typeface="Consolas"/>
+              <a:cs typeface="Consolas"/>
+              <a:sym typeface="Consolas"/>
+            </a:endParaRPr>
+          </a:p>
+          <a:p>
+            <a:pPr indent="0" lvl="0" marL="0" rtl="0" algn="l">
+              <a:lnSpc>
+                <a:spcPct val="115000"/>
+              </a:lnSpc>
+              <a:spcBef>
+                <a:spcPts val="0"/>
+              </a:spcBef>
+              <a:spcAft>
+                <a:spcPts val="0"/>
+              </a:spcAft>
+              <a:buNone/>
+            </a:pPr>
+            <a:r>
+              <a:rPr lang="en" sz="1000">
+                <a:highlight>
+                  <a:schemeClr val="dk2"/>
+                </a:highlight>
+                <a:latin typeface="Consolas"/>
+                <a:ea typeface="Consolas"/>
+                <a:cs typeface="Consolas"/>
+                <a:sym typeface="Consolas"/>
+              </a:rPr>
+              <a:t>}</a:t>
             </a:r>
             <a:endParaRPr sz="1000">
               <a:solidFill>
@@ -8045,7 +7760,7 @@
             </a:pPr>
             <a:r>
               <a:rPr lang="en"/>
-              <a:t>Components Working Together</a:t>
+              <a:t>Recipes</a:t>
             </a:r>
             <a:endParaRPr/>
           </a:p>
@@ -8093,55 +7808,7 @@
                   <a:srgbClr val="DEE2E6"/>
                 </a:solidFill>
               </a:rPr>
-              <a:t>Through the owner</a:t>
-            </a:r>
-            <a:endParaRPr/>
-          </a:p>
-          <a:p>
-            <a:pPr indent="-317500" lvl="1" marL="914400" rtl="0" algn="l">
-              <a:buClr>
-                <a:srgbClr val="6C757D"/>
-              </a:buClr>
-              <a:spcBef>
-                <a:spcPts val="0"/>
-              </a:spcBef>
-              <a:spcAft>
-                <a:spcPts val="0"/>
-              </a:spcAft>
-              <a:buSzPts val="1400"/>
-              <a:buChar char="○"/>
-            </a:pPr>
-            <a:r>
-              <a:rPr lang="en" sz="1400">
-                <a:solidFill>
-                  <a:srgbClr val="6C757D"/>
-                </a:solidFill>
-              </a:rPr>
-              <a:t>Walker stops while the Eater eats</a:t>
-            </a:r>
-            <a:endParaRPr/>
-          </a:p>
-          <a:p>
-            <a:pPr indent="-317500" lvl="1" marL="914400" rtl="0" algn="l">
-              <a:buClr>
-                <a:srgbClr val="6C757D"/>
-              </a:buClr>
-              <a:spcBef>
-                <a:spcPts val="0"/>
-              </a:spcBef>
-              <a:spcAft>
-                <a:spcPts val="0"/>
-              </a:spcAft>
-              <a:buSzPts val="1400"/>
-              <a:buChar char="○"/>
-            </a:pPr>
-            <a:r>
-              <a:rPr lang="en" sz="1400">
-                <a:solidFill>
-                  <a:srgbClr val="6C757D"/>
-                </a:solidFill>
-              </a:rPr>
-              <a:t>Health lets the Armour go first</a:t>
+              <a:t>No classes for plants or zombies</a:t>
             </a:r>
             <a:endParaRPr/>
           </a:p>
@@ -8165,31 +7832,7 @@
                   <a:srgbClr val="DEE2E6"/>
                 </a:solidFill>
               </a:rPr>
-              <a:t>Through the world</a:t>
-            </a:r>
-            <a:endParaRPr/>
-          </a:p>
-          <a:p>
-            <a:pPr indent="-317500" lvl="1" marL="914400" rtl="0" algn="l">
-              <a:buClr>
-                <a:srgbClr val="6C757D"/>
-              </a:buClr>
-              <a:spcBef>
-                <a:spcPts val="0"/>
-              </a:spcBef>
-              <a:spcAft>
-                <a:spcPts val="0"/>
-              </a:spcAft>
-              <a:buSzPts val="1400"/>
-              <a:buChar char="○"/>
-            </a:pPr>
-            <a:r>
-              <a:rPr lang="en" sz="1400">
-                <a:solidFill>
-                  <a:srgbClr val="6C757D"/>
-                </a:solidFill>
-              </a:rPr>
-              <a:t>Shooter: a zombie ahead in my row?</a:t>
+              <a:t>Each kind of thing is a list of components</a:t>
             </a:r>
             <a:endParaRPr/>
           </a:p>
@@ -8213,7 +7856,7 @@
                   <a:srgbClr val="DEE2E6"/>
                 </a:solidFill>
               </a:rPr>
-              <a:t>Depend on components, not on kinds of entity</a:t>
+              <a:t>Repeater, Conehead: no new classes</a:t>
             </a:r>
             <a:endParaRPr/>
           </a:p>
@@ -8237,7 +7880,31 @@
                   <a:srgbClr val="DEE2E6"/>
                 </a:solidFill>
               </a:rPr>
-              <a:t>The world: one loop for everything</a:t>
+              <a:t>Shoots and makes sun: two .With calls</a:t>
+            </a:r>
+            <a:endParaRPr/>
+          </a:p>
+          <a:p>
+            <a:pPr indent="-330200" lvl="0" marL="457200" rtl="0" algn="l">
+              <a:buClr>
+                <a:srgbClr val="DEE2E6"/>
+              </a:buClr>
+              <a:spcBef>
+                <a:spcPts val="0"/>
+              </a:spcBef>
+              <a:spcAft>
+                <a:spcPts val="0"/>
+              </a:spcAft>
+              <a:buSzPts val="1600"/>
+              <a:buChar char="●"/>
+            </a:pPr>
+            <a:r>
+              <a:rPr lang="en" sz="1600">
+                <a:solidFill>
+                  <a:srgbClr val="DEE2E6"/>
+                </a:solidFill>
+              </a:rPr>
+              <a:t>Health: written once, for plants and zombies</a:t>
             </a:r>
             <a:endParaRPr/>
           </a:p>
@@ -8288,7 +7955,7 @@
                 <a:cs typeface="Consolas"/>
                 <a:sym typeface="Consolas"/>
               </a:rPr>
-              <a:t>// Walker.cs</a:t>
+              <a:t>Entity Sunflower(World world) =&gt;</a:t>
             </a:r>
             <a:endParaRPr sz="1000">
               <a:solidFill>
@@ -8326,7 +7993,7 @@
                 <a:cs typeface="Consolas"/>
                 <a:sym typeface="Consolas"/>
               </a:rPr>
-              <a:t>public override void Update(float dt)</a:t>
+              <a:t>    Plant(world, "sunflower", 6)</a:t>
             </a:r>
             <a:endParaRPr sz="1000">
               <a:solidFill>
@@ -8364,7 +8031,7 @@
                 <a:cs typeface="Consolas"/>
                 <a:sym typeface="Consolas"/>
               </a:rPr>
-              <a:t>{</a:t>
+              <a:t>        .With(new SunProducer(12, 25));</a:t>
             </a:r>
             <a:endParaRPr sz="1000">
               <a:solidFill>
@@ -8402,7 +8069,7 @@
                 <a:cs typeface="Consolas"/>
                 <a:sym typeface="Consolas"/>
               </a:rPr>
-              <a:t>    if (Owner.Get&lt;Eater&gt;()?.IsEating == true)</a:t>
+              <a:t>Entity Repeater(World world) =&gt;</a:t>
             </a:r>
             <a:endParaRPr sz="1000">
               <a:solidFill>
@@ -8440,7 +8107,7 @@
                 <a:cs typeface="Consolas"/>
                 <a:sym typeface="Consolas"/>
               </a:rPr>
-              <a:t>        return;</a:t>
+              <a:t>    Plant(world, "repeater", 6)</a:t>
             </a:r>
             <a:endParaRPr sz="1000">
               <a:solidFill>
@@ -8478,7 +8145,7 @@
                 <a:cs typeface="Consolas"/>
                 <a:sym typeface="Consolas"/>
               </a:rPr>
-              <a:t>    Owner.Position -=</a:t>
+              <a:t>        .With(new Shooter(1.4f, 2, 1));</a:t>
             </a:r>
             <a:endParaRPr sz="1000">
               <a:solidFill>
@@ -8516,7 +8183,7 @@
                 <a:cs typeface="Consolas"/>
                 <a:sym typeface="Consolas"/>
               </a:rPr>
-              <a:t>        new Vector2(speed * dt, 0);</a:t>
+              <a:t/>
             </a:r>
             <a:endParaRPr sz="1000">
               <a:solidFill>
@@ -8554,7 +8221,7 @@
                 <a:cs typeface="Consolas"/>
                 <a:sym typeface="Consolas"/>
               </a:rPr>
-              <a:t>}</a:t>
+              <a:t>Entity Zombie(World world) =&gt;</a:t>
             </a:r>
             <a:endParaRPr sz="1000">
               <a:solidFill>
@@ -8592,7 +8259,7 @@
                 <a:cs typeface="Consolas"/>
                 <a:sym typeface="Consolas"/>
               </a:rPr>
-              <a:t/>
+              <a:t>    new Entity(world)</a:t>
             </a:r>
             <a:endParaRPr sz="1000">
               <a:solidFill>
@@ -8630,7 +8297,7 @@
                 <a:cs typeface="Consolas"/>
                 <a:sym typeface="Consolas"/>
               </a:rPr>
-              <a:t>// Shooter.cs</a:t>
+              <a:t>        .With(new SpriteRenderer(zombie))</a:t>
             </a:r>
             <a:endParaRPr sz="1000">
               <a:solidFill>
@@ -8668,7 +8335,7 @@
                 <a:cs typeface="Consolas"/>
                 <a:sym typeface="Consolas"/>
               </a:rPr>
-              <a:t>if (_cooldown &lt;= 0 &amp;&amp;</a:t>
+              <a:t>        .With(new Health(10))</a:t>
             </a:r>
             <a:endParaRPr sz="1000">
               <a:solidFill>
@@ -8706,7 +8373,7 @@
                 <a:cs typeface="Consolas"/>
                 <a:sym typeface="Consolas"/>
               </a:rPr>
-              <a:t>    World.FirstZombieAhead(Owner.Row,</a:t>
+              <a:t>        .With(new Walker(16))</a:t>
             </a:r>
             <a:endParaRPr sz="1000">
               <a:solidFill>
@@ -8744,7 +8411,7 @@
                 <a:cs typeface="Consolas"/>
                 <a:sym typeface="Consolas"/>
               </a:rPr>
-              <a:t>        Owner.Position.X) != null)</a:t>
+              <a:t>        .With(new Eater(1));</a:t>
             </a:r>
             <a:endParaRPr sz="1000">
               <a:solidFill>
@@ -8782,7 +8449,7 @@
                 <a:cs typeface="Consolas"/>
                 <a:sym typeface="Consolas"/>
               </a:rPr>
-              <a:t>    Fire();</a:t>
+              <a:t>Entity Conehead(World world) =&gt;</a:t>
             </a:r>
             <a:endParaRPr sz="1000">
               <a:solidFill>
@@ -8797,6 +8464,44 @@
               <a:sym typeface="Consolas"/>
             </a:endParaRPr>
           </a:p>
+          <a:p>
+            <a:pPr indent="0" lvl="0" marL="0" rtl="0" algn="l">
+              <a:lnSpc>
+                <a:spcPct val="115000"/>
+              </a:lnSpc>
+              <a:spcBef>
+                <a:spcPts val="0"/>
+              </a:spcBef>
+              <a:spcAft>
+                <a:spcPts val="0"/>
+              </a:spcAft>
+              <a:buNone/>
+            </a:pPr>
+            <a:r>
+              <a:rPr lang="en" sz="1000">
+                <a:highlight>
+                  <a:schemeClr val="dk2"/>
+                </a:highlight>
+                <a:latin typeface="Consolas"/>
+                <a:ea typeface="Consolas"/>
+                <a:cs typeface="Consolas"/>
+                <a:sym typeface="Consolas"/>
+              </a:rPr>
+              <a:t>    Zombie(world).With(new Armour(18, cone));</a:t>
+            </a:r>
+            <a:endParaRPr sz="1000">
+              <a:solidFill>
+                <a:srgbClr val="CCCCCC"/>
+              </a:solidFill>
+              <a:highlight>
+                <a:schemeClr val="dk2"/>
+              </a:highlight>
+              <a:latin typeface="Consolas"/>
+              <a:ea typeface="Consolas"/>
+              <a:cs typeface="Consolas"/>
+              <a:sym typeface="Consolas"/>
+            </a:endParaRPr>
+          </a:p>
         </p:txBody>
       </p:sp>
     </p:spTree>
@@ -8808,6 +8513,812 @@
 </file>
 
 <file path=ppt/slides/slide14.xml><?xml version="1.0" encoding="utf-8"?>
+<p:sld xmlns:a="http://schemas.openxmlformats.org/drawingml/2006/main" xmlns:p="http://schemas.openxmlformats.org/presentationml/2006/main" xmlns:r="http://schemas.openxmlformats.org/officeDocument/2006/relationships">
+  <p:cSld>
+    <p:spTree>
+      <p:nvGrpSpPr>
+        <p:cNvPr id="1" name=""/>
+        <p:cNvGrpSpPr/>
+        <p:nvPr/>
+      </p:nvGrpSpPr>
+      <p:grpSpPr/>
+      <p:sp>
+        <p:nvSpPr>
+          <p:cNvPr id="140" name="Google Shape;140;p23"/>
+          <p:cNvSpPr txBox="1"/>
+          <p:nvPr>
+            <p:ph type="title"/>
+          </p:nvPr>
+        </p:nvSpPr>
+        <p:spPr>
+          <a:xfrm>
+            <a:off x="311700" y="195615"/>
+            <a:ext cx="8520600" cy="572700"/>
+          </a:xfrm>
+          <a:prstGeom prst="rect">
+            <a:avLst/>
+          </a:prstGeom>
+        </p:spPr>
+        <p:txBody>
+          <a:bodyPr anchorCtr="0" anchor="t" bIns="91425" lIns="91425" spcFirstLastPara="1" rIns="91425" wrap="square" tIns="91425">
+            <a:normAutofit fontScale="90000"/>
+          </a:bodyPr>
+          <a:lstStyle/>
+          <a:p>
+            <a:pPr indent="0" lvl="0" marL="0" rtl="0" algn="l">
+              <a:spcBef>
+                <a:spcPts val="0"/>
+              </a:spcBef>
+              <a:spcAft>
+                <a:spcPts val="0"/>
+              </a:spcAft>
+              <a:buNone/>
+            </a:pPr>
+            <a:r>
+              <a:rPr lang="en"/>
+              <a:t>Components Working Together</a:t>
+            </a:r>
+            <a:endParaRPr/>
+          </a:p>
+        </p:txBody>
+      </p:sp>
+      <p:sp>
+        <p:nvSpPr>
+          <p:cNvPr id="293" name="Google Shape;293;p45"/>
+          <p:cNvSpPr txBox="1"/>
+          <p:nvPr>
+            <p:ph type="title"/>
+          </p:nvPr>
+        </p:nvSpPr>
+        <p:spPr>
+          <a:xfrm>
+            <a:off x="311700" y="1152475"/>
+            <a:ext cx="3700000" cy="3500000"/>
+          </a:xfrm>
+          <a:prstGeom prst="rect">
+            <a:avLst/>
+          </a:prstGeom>
+        </p:spPr>
+        <p:txBody>
+          <a:bodyPr anchorCtr="0" anchor="t" bIns="91425" lIns="91425" spcFirstLastPara="1" rIns="91425" wrap="square" tIns="91425">
+            <a:normAutofit fontScale="90000"/>
+          </a:bodyPr>
+          <a:lstStyle/>
+          <a:p>
+            <a:pPr indent="-330200" lvl="0" marL="457200" rtl="0" algn="l">
+              <a:buClr>
+                <a:srgbClr val="DEE2E6"/>
+              </a:buClr>
+              <a:spcBef>
+                <a:spcPts val="0"/>
+              </a:spcBef>
+              <a:spcAft>
+                <a:spcPts val="0"/>
+              </a:spcAft>
+              <a:buSzPts val="1600"/>
+              <a:buChar char="●"/>
+            </a:pPr>
+            <a:r>
+              <a:rPr lang="en" sz="1600">
+                <a:solidFill>
+                  <a:srgbClr val="DEE2E6"/>
+                </a:solidFill>
+              </a:rPr>
+              <a:t>Through the owner</a:t>
+            </a:r>
+            <a:endParaRPr/>
+          </a:p>
+          <a:p>
+            <a:pPr indent="-317500" lvl="1" marL="914400" rtl="0" algn="l">
+              <a:buClr>
+                <a:srgbClr val="6C757D"/>
+              </a:buClr>
+              <a:spcBef>
+                <a:spcPts val="0"/>
+              </a:spcBef>
+              <a:spcAft>
+                <a:spcPts val="0"/>
+              </a:spcAft>
+              <a:buSzPts val="1400"/>
+              <a:buChar char="○"/>
+            </a:pPr>
+            <a:r>
+              <a:rPr lang="en" sz="1400">
+                <a:solidFill>
+                  <a:srgbClr val="6C757D"/>
+                </a:solidFill>
+              </a:rPr>
+              <a:t>Walker stops while the Eater eats</a:t>
+            </a:r>
+            <a:endParaRPr/>
+          </a:p>
+          <a:p>
+            <a:pPr indent="-317500" lvl="1" marL="914400" rtl="0" algn="l">
+              <a:buClr>
+                <a:srgbClr val="6C757D"/>
+              </a:buClr>
+              <a:spcBef>
+                <a:spcPts val="0"/>
+              </a:spcBef>
+              <a:spcAft>
+                <a:spcPts val="0"/>
+              </a:spcAft>
+              <a:buSzPts val="1400"/>
+              <a:buChar char="○"/>
+            </a:pPr>
+            <a:r>
+              <a:rPr lang="en" sz="1400">
+                <a:solidFill>
+                  <a:srgbClr val="6C757D"/>
+                </a:solidFill>
+              </a:rPr>
+              <a:t>Health lets the Armour go first</a:t>
+            </a:r>
+            <a:endParaRPr/>
+          </a:p>
+          <a:p>
+            <a:pPr indent="-330200" lvl="0" marL="457200" rtl="0" algn="l">
+              <a:buClr>
+                <a:srgbClr val="DEE2E6"/>
+              </a:buClr>
+              <a:spcBef>
+                <a:spcPts val="0"/>
+              </a:spcBef>
+              <a:spcAft>
+                <a:spcPts val="0"/>
+              </a:spcAft>
+              <a:buSzPts val="1600"/>
+              <a:buChar char="●"/>
+            </a:pPr>
+            <a:r>
+              <a:rPr lang="en" sz="1600">
+                <a:solidFill>
+                  <a:srgbClr val="DEE2E6"/>
+                </a:solidFill>
+              </a:rPr>
+              <a:t>Through the world</a:t>
+            </a:r>
+            <a:endParaRPr/>
+          </a:p>
+          <a:p>
+            <a:pPr indent="-317500" lvl="1" marL="914400" rtl="0" algn="l">
+              <a:buClr>
+                <a:srgbClr val="6C757D"/>
+              </a:buClr>
+              <a:spcBef>
+                <a:spcPts val="0"/>
+              </a:spcBef>
+              <a:spcAft>
+                <a:spcPts val="0"/>
+              </a:spcAft>
+              <a:buSzPts val="1400"/>
+              <a:buChar char="○"/>
+            </a:pPr>
+            <a:r>
+              <a:rPr lang="en" sz="1400">
+                <a:solidFill>
+                  <a:srgbClr val="6C757D"/>
+                </a:solidFill>
+              </a:rPr>
+              <a:t>Shooter: a zombie ahead in my row?</a:t>
+            </a:r>
+            <a:endParaRPr/>
+          </a:p>
+          <a:p>
+            <a:pPr indent="-330200" lvl="0" marL="457200" rtl="0" algn="l">
+              <a:buClr>
+                <a:srgbClr val="DEE2E6"/>
+              </a:buClr>
+              <a:spcBef>
+                <a:spcPts val="0"/>
+              </a:spcBef>
+              <a:spcAft>
+                <a:spcPts val="0"/>
+              </a:spcAft>
+              <a:buSzPts val="1600"/>
+              <a:buChar char="●"/>
+            </a:pPr>
+            <a:r>
+              <a:rPr lang="en" sz="1600">
+                <a:solidFill>
+                  <a:srgbClr val="DEE2E6"/>
+                </a:solidFill>
+              </a:rPr>
+              <a:t>Depend on components, not on kinds of entity</a:t>
+            </a:r>
+            <a:endParaRPr/>
+          </a:p>
+          <a:p>
+            <a:pPr indent="-330200" lvl="0" marL="457200" rtl="0" algn="l">
+              <a:buClr>
+                <a:srgbClr val="DEE2E6"/>
+              </a:buClr>
+              <a:spcBef>
+                <a:spcPts val="0"/>
+              </a:spcBef>
+              <a:spcAft>
+                <a:spcPts val="0"/>
+              </a:spcAft>
+              <a:buSzPts val="1600"/>
+              <a:buChar char="●"/>
+            </a:pPr>
+            <a:r>
+              <a:rPr lang="en" sz="1600">
+                <a:solidFill>
+                  <a:srgbClr val="DEE2E6"/>
+                </a:solidFill>
+              </a:rPr>
+              <a:t>The world: one loop for everything</a:t>
+            </a:r>
+            <a:endParaRPr/>
+          </a:p>
+        </p:txBody>
+      </p:sp>
+      <p:sp>
+        <p:nvSpPr>
+          <p:cNvPr id="141" name="Google Shape;141;p23"/>
+          <p:cNvSpPr txBox="1"/>
+          <p:nvPr>
+            <p:ph idx="2" type="body"/>
+          </p:nvPr>
+        </p:nvSpPr>
+        <p:spPr>
+          <a:xfrm>
+            <a:off x="4150000" y="1152475"/>
+            <a:ext cx="4750000" cy="3600000"/>
+          </a:xfrm>
+          <a:prstGeom prst="rect">
+            <a:avLst/>
+          </a:prstGeom>
+        </p:spPr>
+        <p:txBody>
+          <a:bodyPr anchorCtr="0" anchor="t" bIns="91425" lIns="91425" spcFirstLastPara="1" rIns="91425" wrap="square" tIns="91425">
+            <a:noAutofit/>
+          </a:bodyPr>
+          <a:lstStyle/>
+          <a:p>
+            <a:pPr indent="0" lvl="0" marL="0" rtl="0" algn="l">
+              <a:lnSpc>
+                <a:spcPct val="115000"/>
+              </a:lnSpc>
+              <a:spcBef>
+                <a:spcPts val="0"/>
+              </a:spcBef>
+              <a:spcAft>
+                <a:spcPts val="0"/>
+              </a:spcAft>
+              <a:buNone/>
+            </a:pPr>
+            <a:r>
+              <a:rPr lang="en" sz="1000">
+                <a:highlight>
+                  <a:schemeClr val="dk2"/>
+                </a:highlight>
+                <a:latin typeface="Consolas"/>
+                <a:ea typeface="Consolas"/>
+                <a:cs typeface="Consolas"/>
+                <a:sym typeface="Consolas"/>
+              </a:rPr>
+              <a:t>// Walker.cs</a:t>
+            </a:r>
+            <a:endParaRPr sz="1000">
+              <a:solidFill>
+                <a:srgbClr val="CCCCCC"/>
+              </a:solidFill>
+              <a:highlight>
+                <a:schemeClr val="dk2"/>
+              </a:highlight>
+              <a:latin typeface="Consolas"/>
+              <a:ea typeface="Consolas"/>
+              <a:cs typeface="Consolas"/>
+              <a:sym typeface="Consolas"/>
+            </a:endParaRPr>
+          </a:p>
+          <a:p>
+            <a:pPr indent="0" lvl="0" marL="0" rtl="0" algn="l">
+              <a:lnSpc>
+                <a:spcPct val="115000"/>
+              </a:lnSpc>
+              <a:spcBef>
+                <a:spcPts val="0"/>
+              </a:spcBef>
+              <a:spcAft>
+                <a:spcPts val="0"/>
+              </a:spcAft>
+              <a:buNone/>
+            </a:pPr>
+            <a:r>
+              <a:rPr lang="en" sz="1000">
+                <a:highlight>
+                  <a:schemeClr val="dk2"/>
+                </a:highlight>
+                <a:latin typeface="Consolas"/>
+                <a:ea typeface="Consolas"/>
+                <a:cs typeface="Consolas"/>
+                <a:sym typeface="Consolas"/>
+              </a:rPr>
+              <a:t>public override void Update(float dt)</a:t>
+            </a:r>
+            <a:endParaRPr sz="1000">
+              <a:solidFill>
+                <a:srgbClr val="CCCCCC"/>
+              </a:solidFill>
+              <a:highlight>
+                <a:schemeClr val="dk2"/>
+              </a:highlight>
+              <a:latin typeface="Consolas"/>
+              <a:ea typeface="Consolas"/>
+              <a:cs typeface="Consolas"/>
+              <a:sym typeface="Consolas"/>
+            </a:endParaRPr>
+          </a:p>
+          <a:p>
+            <a:pPr indent="0" lvl="0" marL="0" rtl="0" algn="l">
+              <a:lnSpc>
+                <a:spcPct val="115000"/>
+              </a:lnSpc>
+              <a:spcBef>
+                <a:spcPts val="0"/>
+              </a:spcBef>
+              <a:spcAft>
+                <a:spcPts val="0"/>
+              </a:spcAft>
+              <a:buNone/>
+            </a:pPr>
+            <a:r>
+              <a:rPr lang="en" sz="1000">
+                <a:highlight>
+                  <a:schemeClr val="dk2"/>
+                </a:highlight>
+                <a:latin typeface="Consolas"/>
+                <a:ea typeface="Consolas"/>
+                <a:cs typeface="Consolas"/>
+                <a:sym typeface="Consolas"/>
+              </a:rPr>
+              <a:t>{</a:t>
+            </a:r>
+            <a:endParaRPr sz="1000">
+              <a:solidFill>
+                <a:srgbClr val="CCCCCC"/>
+              </a:solidFill>
+              <a:highlight>
+                <a:schemeClr val="dk2"/>
+              </a:highlight>
+              <a:latin typeface="Consolas"/>
+              <a:ea typeface="Consolas"/>
+              <a:cs typeface="Consolas"/>
+              <a:sym typeface="Consolas"/>
+            </a:endParaRPr>
+          </a:p>
+          <a:p>
+            <a:pPr indent="0" lvl="0" marL="0" rtl="0" algn="l">
+              <a:lnSpc>
+                <a:spcPct val="115000"/>
+              </a:lnSpc>
+              <a:spcBef>
+                <a:spcPts val="0"/>
+              </a:spcBef>
+              <a:spcAft>
+                <a:spcPts val="0"/>
+              </a:spcAft>
+              <a:buNone/>
+            </a:pPr>
+            <a:r>
+              <a:rPr lang="en" sz="1000">
+                <a:highlight>
+                  <a:schemeClr val="dk2"/>
+                </a:highlight>
+                <a:latin typeface="Consolas"/>
+                <a:ea typeface="Consolas"/>
+                <a:cs typeface="Consolas"/>
+                <a:sym typeface="Consolas"/>
+              </a:rPr>
+              <a:t>    if (Owner.Get&lt;Eater&gt;()?.IsEating == true)</a:t>
+            </a:r>
+            <a:endParaRPr sz="1000">
+              <a:solidFill>
+                <a:srgbClr val="CCCCCC"/>
+              </a:solidFill>
+              <a:highlight>
+                <a:schemeClr val="dk2"/>
+              </a:highlight>
+              <a:latin typeface="Consolas"/>
+              <a:ea typeface="Consolas"/>
+              <a:cs typeface="Consolas"/>
+              <a:sym typeface="Consolas"/>
+            </a:endParaRPr>
+          </a:p>
+          <a:p>
+            <a:pPr indent="0" lvl="0" marL="0" rtl="0" algn="l">
+              <a:lnSpc>
+                <a:spcPct val="115000"/>
+              </a:lnSpc>
+              <a:spcBef>
+                <a:spcPts val="0"/>
+              </a:spcBef>
+              <a:spcAft>
+                <a:spcPts val="0"/>
+              </a:spcAft>
+              <a:buNone/>
+            </a:pPr>
+            <a:r>
+              <a:rPr lang="en" sz="1000">
+                <a:highlight>
+                  <a:schemeClr val="dk2"/>
+                </a:highlight>
+                <a:latin typeface="Consolas"/>
+                <a:ea typeface="Consolas"/>
+                <a:cs typeface="Consolas"/>
+                <a:sym typeface="Consolas"/>
+              </a:rPr>
+              <a:t>        return;</a:t>
+            </a:r>
+            <a:endParaRPr sz="1000">
+              <a:solidFill>
+                <a:srgbClr val="CCCCCC"/>
+              </a:solidFill>
+              <a:highlight>
+                <a:schemeClr val="dk2"/>
+              </a:highlight>
+              <a:latin typeface="Consolas"/>
+              <a:ea typeface="Consolas"/>
+              <a:cs typeface="Consolas"/>
+              <a:sym typeface="Consolas"/>
+            </a:endParaRPr>
+          </a:p>
+          <a:p>
+            <a:pPr indent="0" lvl="0" marL="0" rtl="0" algn="l">
+              <a:lnSpc>
+                <a:spcPct val="115000"/>
+              </a:lnSpc>
+              <a:spcBef>
+                <a:spcPts val="0"/>
+              </a:spcBef>
+              <a:spcAft>
+                <a:spcPts val="0"/>
+              </a:spcAft>
+              <a:buNone/>
+            </a:pPr>
+            <a:r>
+              <a:rPr lang="en" sz="1000">
+                <a:highlight>
+                  <a:schemeClr val="dk2"/>
+                </a:highlight>
+                <a:latin typeface="Consolas"/>
+                <a:ea typeface="Consolas"/>
+                <a:cs typeface="Consolas"/>
+                <a:sym typeface="Consolas"/>
+              </a:rPr>
+              <a:t>    Owner.Position -=</a:t>
+            </a:r>
+            <a:endParaRPr sz="1000">
+              <a:solidFill>
+                <a:srgbClr val="CCCCCC"/>
+              </a:solidFill>
+              <a:highlight>
+                <a:schemeClr val="dk2"/>
+              </a:highlight>
+              <a:latin typeface="Consolas"/>
+              <a:ea typeface="Consolas"/>
+              <a:cs typeface="Consolas"/>
+              <a:sym typeface="Consolas"/>
+            </a:endParaRPr>
+          </a:p>
+          <a:p>
+            <a:pPr indent="0" lvl="0" marL="0" rtl="0" algn="l">
+              <a:lnSpc>
+                <a:spcPct val="115000"/>
+              </a:lnSpc>
+              <a:spcBef>
+                <a:spcPts val="0"/>
+              </a:spcBef>
+              <a:spcAft>
+                <a:spcPts val="0"/>
+              </a:spcAft>
+              <a:buNone/>
+            </a:pPr>
+            <a:r>
+              <a:rPr lang="en" sz="1000">
+                <a:highlight>
+                  <a:schemeClr val="dk2"/>
+                </a:highlight>
+                <a:latin typeface="Consolas"/>
+                <a:ea typeface="Consolas"/>
+                <a:cs typeface="Consolas"/>
+                <a:sym typeface="Consolas"/>
+              </a:rPr>
+              <a:t>        new Vector2(speed * dt, 0);</a:t>
+            </a:r>
+            <a:endParaRPr sz="1000">
+              <a:solidFill>
+                <a:srgbClr val="CCCCCC"/>
+              </a:solidFill>
+              <a:highlight>
+                <a:schemeClr val="dk2"/>
+              </a:highlight>
+              <a:latin typeface="Consolas"/>
+              <a:ea typeface="Consolas"/>
+              <a:cs typeface="Consolas"/>
+              <a:sym typeface="Consolas"/>
+            </a:endParaRPr>
+          </a:p>
+          <a:p>
+            <a:pPr indent="0" lvl="0" marL="0" rtl="0" algn="l">
+              <a:lnSpc>
+                <a:spcPct val="115000"/>
+              </a:lnSpc>
+              <a:spcBef>
+                <a:spcPts val="0"/>
+              </a:spcBef>
+              <a:spcAft>
+                <a:spcPts val="0"/>
+              </a:spcAft>
+              <a:buNone/>
+            </a:pPr>
+            <a:r>
+              <a:rPr lang="en" sz="1000">
+                <a:highlight>
+                  <a:schemeClr val="dk2"/>
+                </a:highlight>
+                <a:latin typeface="Consolas"/>
+                <a:ea typeface="Consolas"/>
+                <a:cs typeface="Consolas"/>
+                <a:sym typeface="Consolas"/>
+              </a:rPr>
+              <a:t>}</a:t>
+            </a:r>
+            <a:endParaRPr sz="1000">
+              <a:solidFill>
+                <a:srgbClr val="CCCCCC"/>
+              </a:solidFill>
+              <a:highlight>
+                <a:schemeClr val="dk2"/>
+              </a:highlight>
+              <a:latin typeface="Consolas"/>
+              <a:ea typeface="Consolas"/>
+              <a:cs typeface="Consolas"/>
+              <a:sym typeface="Consolas"/>
+            </a:endParaRPr>
+          </a:p>
+          <a:p>
+            <a:pPr indent="0" lvl="0" marL="0" rtl="0" algn="l">
+              <a:lnSpc>
+                <a:spcPct val="115000"/>
+              </a:lnSpc>
+              <a:spcBef>
+                <a:spcPts val="0"/>
+              </a:spcBef>
+              <a:spcAft>
+                <a:spcPts val="0"/>
+              </a:spcAft>
+              <a:buNone/>
+            </a:pPr>
+            <a:r>
+              <a:rPr lang="en" sz="1000">
+                <a:highlight>
+                  <a:schemeClr val="dk2"/>
+                </a:highlight>
+                <a:latin typeface="Consolas"/>
+                <a:ea typeface="Consolas"/>
+                <a:cs typeface="Consolas"/>
+                <a:sym typeface="Consolas"/>
+              </a:rPr>
+              <a:t/>
+            </a:r>
+            <a:endParaRPr sz="1000">
+              <a:solidFill>
+                <a:srgbClr val="CCCCCC"/>
+              </a:solidFill>
+              <a:highlight>
+                <a:schemeClr val="dk2"/>
+              </a:highlight>
+              <a:latin typeface="Consolas"/>
+              <a:ea typeface="Consolas"/>
+              <a:cs typeface="Consolas"/>
+              <a:sym typeface="Consolas"/>
+            </a:endParaRPr>
+          </a:p>
+          <a:p>
+            <a:pPr indent="0" lvl="0" marL="0" rtl="0" algn="l">
+              <a:lnSpc>
+                <a:spcPct val="115000"/>
+              </a:lnSpc>
+              <a:spcBef>
+                <a:spcPts val="0"/>
+              </a:spcBef>
+              <a:spcAft>
+                <a:spcPts val="0"/>
+              </a:spcAft>
+              <a:buNone/>
+            </a:pPr>
+            <a:r>
+              <a:rPr lang="en" sz="1000">
+                <a:highlight>
+                  <a:schemeClr val="dk2"/>
+                </a:highlight>
+                <a:latin typeface="Consolas"/>
+                <a:ea typeface="Consolas"/>
+                <a:cs typeface="Consolas"/>
+                <a:sym typeface="Consolas"/>
+              </a:rPr>
+              <a:t>// Shooter.cs</a:t>
+            </a:r>
+            <a:endParaRPr sz="1000">
+              <a:solidFill>
+                <a:srgbClr val="CCCCCC"/>
+              </a:solidFill>
+              <a:highlight>
+                <a:schemeClr val="dk2"/>
+              </a:highlight>
+              <a:latin typeface="Consolas"/>
+              <a:ea typeface="Consolas"/>
+              <a:cs typeface="Consolas"/>
+              <a:sym typeface="Consolas"/>
+            </a:endParaRPr>
+          </a:p>
+          <a:p>
+            <a:pPr indent="0" lvl="0" marL="0" rtl="0" algn="l">
+              <a:lnSpc>
+                <a:spcPct val="115000"/>
+              </a:lnSpc>
+              <a:spcBef>
+                <a:spcPts val="0"/>
+              </a:spcBef>
+              <a:spcAft>
+                <a:spcPts val="0"/>
+              </a:spcAft>
+              <a:buNone/>
+            </a:pPr>
+            <a:r>
+              <a:rPr lang="en" sz="1000">
+                <a:highlight>
+                  <a:schemeClr val="dk2"/>
+                </a:highlight>
+                <a:latin typeface="Consolas"/>
+                <a:ea typeface="Consolas"/>
+                <a:cs typeface="Consolas"/>
+                <a:sym typeface="Consolas"/>
+              </a:rPr>
+              <a:t>if (_cooldown &lt;= 0 &amp;&amp;</a:t>
+            </a:r>
+            <a:endParaRPr sz="1000">
+              <a:solidFill>
+                <a:srgbClr val="CCCCCC"/>
+              </a:solidFill>
+              <a:highlight>
+                <a:schemeClr val="dk2"/>
+              </a:highlight>
+              <a:latin typeface="Consolas"/>
+              <a:ea typeface="Consolas"/>
+              <a:cs typeface="Consolas"/>
+              <a:sym typeface="Consolas"/>
+            </a:endParaRPr>
+          </a:p>
+          <a:p>
+            <a:pPr indent="0" lvl="0" marL="0" rtl="0" algn="l">
+              <a:lnSpc>
+                <a:spcPct val="115000"/>
+              </a:lnSpc>
+              <a:spcBef>
+                <a:spcPts val="0"/>
+              </a:spcBef>
+              <a:spcAft>
+                <a:spcPts val="0"/>
+              </a:spcAft>
+              <a:buNone/>
+            </a:pPr>
+            <a:r>
+              <a:rPr lang="en" sz="1000">
+                <a:highlight>
+                  <a:schemeClr val="dk2"/>
+                </a:highlight>
+                <a:latin typeface="Consolas"/>
+                <a:ea typeface="Consolas"/>
+                <a:cs typeface="Consolas"/>
+                <a:sym typeface="Consolas"/>
+              </a:rPr>
+              <a:t>    World.FirstZombieAhead(Owner.Row,</a:t>
+            </a:r>
+            <a:endParaRPr sz="1000">
+              <a:solidFill>
+                <a:srgbClr val="CCCCCC"/>
+              </a:solidFill>
+              <a:highlight>
+                <a:schemeClr val="dk2"/>
+              </a:highlight>
+              <a:latin typeface="Consolas"/>
+              <a:ea typeface="Consolas"/>
+              <a:cs typeface="Consolas"/>
+              <a:sym typeface="Consolas"/>
+            </a:endParaRPr>
+          </a:p>
+          <a:p>
+            <a:pPr indent="0" lvl="0" marL="0" rtl="0" algn="l">
+              <a:lnSpc>
+                <a:spcPct val="115000"/>
+              </a:lnSpc>
+              <a:spcBef>
+                <a:spcPts val="0"/>
+              </a:spcBef>
+              <a:spcAft>
+                <a:spcPts val="0"/>
+              </a:spcAft>
+              <a:buNone/>
+            </a:pPr>
+            <a:r>
+              <a:rPr lang="en" sz="1000">
+                <a:highlight>
+                  <a:schemeClr val="dk2"/>
+                </a:highlight>
+                <a:latin typeface="Consolas"/>
+                <a:ea typeface="Consolas"/>
+                <a:cs typeface="Consolas"/>
+                <a:sym typeface="Consolas"/>
+              </a:rPr>
+              <a:t>        Owner.Position.X) != null)</a:t>
+            </a:r>
+            <a:endParaRPr sz="1000">
+              <a:solidFill>
+                <a:srgbClr val="CCCCCC"/>
+              </a:solidFill>
+              <a:highlight>
+                <a:schemeClr val="dk2"/>
+              </a:highlight>
+              <a:latin typeface="Consolas"/>
+              <a:ea typeface="Consolas"/>
+              <a:cs typeface="Consolas"/>
+              <a:sym typeface="Consolas"/>
+            </a:endParaRPr>
+          </a:p>
+          <a:p>
+            <a:pPr indent="0" lvl="0" marL="0" rtl="0" algn="l">
+              <a:lnSpc>
+                <a:spcPct val="115000"/>
+              </a:lnSpc>
+              <a:spcBef>
+                <a:spcPts val="0"/>
+              </a:spcBef>
+              <a:spcAft>
+                <a:spcPts val="0"/>
+              </a:spcAft>
+              <a:buNone/>
+            </a:pPr>
+            <a:r>
+              <a:rPr lang="en" sz="1000">
+                <a:highlight>
+                  <a:schemeClr val="dk2"/>
+                </a:highlight>
+                <a:latin typeface="Consolas"/>
+                <a:ea typeface="Consolas"/>
+                <a:cs typeface="Consolas"/>
+                <a:sym typeface="Consolas"/>
+              </a:rPr>
+              <a:t>    Fire();</a:t>
+            </a:r>
+            <a:endParaRPr sz="1000">
+              <a:solidFill>
+                <a:srgbClr val="CCCCCC"/>
+              </a:solidFill>
+              <a:highlight>
+                <a:schemeClr val="dk2"/>
+              </a:highlight>
+              <a:latin typeface="Consolas"/>
+              <a:ea typeface="Consolas"/>
+              <a:cs typeface="Consolas"/>
+              <a:sym typeface="Consolas"/>
+            </a:endParaRPr>
+          </a:p>
+        </p:txBody>
+      </p:sp>
+    </p:spTree>
+  </p:cSld>
+  <p:clrMapOvr>
+    <a:masterClrMapping/>
+  </p:clrMapOvr>
+</p:sld>
+</file>
+
+<file path=ppt/slides/slide15.xml><?xml version="1.0" encoding="utf-8"?>
 <p:sld xmlns:a="http://schemas.openxmlformats.org/drawingml/2006/main" xmlns:p="http://schemas.openxmlformats.org/presentationml/2006/main" xmlns:r="http://schemas.openxmlformats.org/officeDocument/2006/relationships">
   <p:cSld>
     <p:spTree>
@@ -9178,7 +9689,7 @@
 </p:sld>
 </file>
 
-<file path=ppt/slides/slide15.xml><?xml version="1.0" encoding="utf-8"?>
+<file path=ppt/slides/slide16.xml><?xml version="1.0" encoding="utf-8"?>
 <p:sld xmlns:a="http://schemas.openxmlformats.org/drawingml/2006/main" xmlns:p="http://schemas.openxmlformats.org/presentationml/2006/main" xmlns:r="http://schemas.openxmlformats.org/officeDocument/2006/relationships">
   <p:cSld>
     <p:spTree>
@@ -9294,764 +9805,6 @@
               <a:t>Pvz1 → Pvz2: from a class hierarchy to components</a:t>
             </a:r>
             <a:endParaRPr sz="1800"/>
-          </a:p>
-        </p:txBody>
-      </p:sp>
-    </p:spTree>
-  </p:cSld>
-  <p:clrMapOvr>
-    <a:masterClrMapping/>
-  </p:clrMapOvr>
-</p:sld>
-</file>
-
-<file path=ppt/slides/slide16.xml><?xml version="1.0" encoding="utf-8"?>
-<p:sld xmlns:a="http://schemas.openxmlformats.org/drawingml/2006/main" xmlns:p="http://schemas.openxmlformats.org/presentationml/2006/main" xmlns:r="http://schemas.openxmlformats.org/officeDocument/2006/relationships">
-  <p:cSld>
-    <p:spTree>
-      <p:nvGrpSpPr>
-        <p:cNvPr id="1" name=""/>
-        <p:cNvGrpSpPr/>
-        <p:nvPr/>
-      </p:nvGrpSpPr>
-      <p:grpSpPr/>
-      <p:sp>
-        <p:nvSpPr>
-          <p:cNvPr id="140" name="Google Shape;140;p23"/>
-          <p:cNvSpPr txBox="1"/>
-          <p:nvPr>
-            <p:ph type="title"/>
-          </p:nvPr>
-        </p:nvSpPr>
-        <p:spPr>
-          <a:xfrm>
-            <a:off x="311700" y="195615"/>
-            <a:ext cx="8520600" cy="572700"/>
-          </a:xfrm>
-          <a:prstGeom prst="rect">
-            <a:avLst/>
-          </a:prstGeom>
-        </p:spPr>
-        <p:txBody>
-          <a:bodyPr anchorCtr="0" anchor="t" bIns="91425" lIns="91425" spcFirstLastPara="1" rIns="91425" wrap="square" tIns="91425">
-            <a:normAutofit fontScale="90000"/>
-          </a:bodyPr>
-          <a:lstStyle/>
-          <a:p>
-            <a:pPr indent="0" lvl="0" marL="0" rtl="0" algn="l">
-              <a:spcBef>
-                <a:spcPts val="0"/>
-              </a:spcBef>
-              <a:spcAft>
-                <a:spcPts val="0"/>
-              </a:spcAft>
-              <a:buNone/>
-            </a:pPr>
-            <a:r>
-              <a:rPr lang="en"/>
-              <a:t>Type Object</a:t>
-            </a:r>
-            <a:endParaRPr/>
-          </a:p>
-        </p:txBody>
-      </p:sp>
-      <p:sp>
-        <p:nvSpPr>
-          <p:cNvPr id="293" name="Google Shape;293;p45"/>
-          <p:cNvSpPr txBox="1"/>
-          <p:nvPr>
-            <p:ph type="title"/>
-          </p:nvPr>
-        </p:nvSpPr>
-        <p:spPr>
-          <a:xfrm>
-            <a:off x="311700" y="1152475"/>
-            <a:ext cx="3700000" cy="3500000"/>
-          </a:xfrm>
-          <a:prstGeom prst="rect">
-            <a:avLst/>
-          </a:prstGeom>
-        </p:spPr>
-        <p:txBody>
-          <a:bodyPr anchorCtr="0" anchor="t" bIns="91425" lIns="91425" spcFirstLastPara="1" rIns="91425" wrap="square" tIns="91425">
-            <a:normAutofit fontScale="90000"/>
-          </a:bodyPr>
-          <a:lstStyle/>
-          <a:p>
-            <a:pPr indent="-330200" lvl="0" marL="457200" rtl="0" algn="l">
-              <a:buClr>
-                <a:srgbClr val="DEE2E6"/>
-              </a:buClr>
-              <a:spcBef>
-                <a:spcPts val="0"/>
-              </a:spcBef>
-              <a:spcAft>
-                <a:spcPts val="0"/>
-              </a:spcAft>
-              <a:buSzPts val="1600"/>
-              <a:buChar char="●"/>
-            </a:pPr>
-            <a:r>
-              <a:rPr lang="en" sz="1600">
-                <a:solidFill>
-                  <a:srgbClr val="DEE2E6"/>
-                </a:solidFill>
-              </a:rPr>
-              <a:t>A peashooter’s cost: not in any one peashooter</a:t>
-            </a:r>
-            <a:endParaRPr/>
-          </a:p>
-          <a:p>
-            <a:pPr indent="-330200" lvl="0" marL="457200" rtl="0" algn="l">
-              <a:buClr>
-                <a:srgbClr val="DEE2E6"/>
-              </a:buClr>
-              <a:spcBef>
-                <a:spcPts val="0"/>
-              </a:spcBef>
-              <a:spcAft>
-                <a:spcPts val="0"/>
-              </a:spcAft>
-              <a:buSzPts val="1600"/>
-              <a:buChar char="●"/>
-            </a:pPr>
-            <a:r>
-              <a:rPr lang="en" sz="1600">
-                <a:solidFill>
-                  <a:srgbClr val="DEE2E6"/>
-                </a:solidFill>
-              </a:rPr>
-              <a:t>One PlantType per kind of plant</a:t>
-            </a:r>
-            <a:endParaRPr/>
-          </a:p>
-          <a:p>
-            <a:pPr indent="-317500" lvl="1" marL="914400" rtl="0" algn="l">
-              <a:buClr>
-                <a:srgbClr val="6C757D"/>
-              </a:buClr>
-              <a:spcBef>
-                <a:spcPts val="0"/>
-              </a:spcBef>
-              <a:spcAft>
-                <a:spcPts val="0"/>
-              </a:spcAft>
-              <a:buSzPts val="1400"/>
-              <a:buChar char="○"/>
-            </a:pPr>
-            <a:r>
-              <a:rPr lang="en" sz="1400">
-                <a:solidFill>
-                  <a:srgbClr val="6C757D"/>
-                </a:solidFill>
-              </a:rPr>
-              <a:t>Loaded from plants.json</a:t>
-            </a:r>
-            <a:endParaRPr/>
-          </a:p>
-          <a:p>
-            <a:pPr indent="-330200" lvl="0" marL="457200" rtl="0" algn="l">
-              <a:buClr>
-                <a:srgbClr val="DEE2E6"/>
-              </a:buClr>
-              <a:spcBef>
-                <a:spcPts val="0"/>
-              </a:spcBef>
-              <a:spcAft>
-                <a:spcPts val="0"/>
-              </a:spcAft>
-              <a:buSzPts val="1600"/>
-              <a:buChar char="●"/>
-            </a:pPr>
-            <a:r>
-              <a:rPr lang="en" sz="1600">
-                <a:solidFill>
-                  <a:srgbClr val="DEE2E6"/>
-                </a:solidFill>
-              </a:rPr>
-              <a:t>Types hold what all instances share</a:t>
-            </a:r>
-            <a:endParaRPr/>
-          </a:p>
-          <a:p>
-            <a:pPr indent="-330200" lvl="0" marL="457200" rtl="0" algn="l">
-              <a:buClr>
-                <a:srgbClr val="DEE2E6"/>
-              </a:buClr>
-              <a:spcBef>
-                <a:spcPts val="0"/>
-              </a:spcBef>
-              <a:spcAft>
-                <a:spcPts val="0"/>
-              </a:spcAft>
-              <a:buSzPts val="1600"/>
-              <a:buChar char="●"/>
-            </a:pPr>
-            <a:r>
-              <a:rPr lang="en" sz="1600">
-                <a:solidFill>
-                  <a:srgbClr val="DEE2E6"/>
-                </a:solidFill>
-              </a:rPr>
-              <a:t>Instances hold their own state</a:t>
-            </a:r>
-            <a:endParaRPr/>
-          </a:p>
-        </p:txBody>
-      </p:sp>
-      <p:sp>
-        <p:nvSpPr>
-          <p:cNvPr id="141" name="Google Shape;141;p23"/>
-          <p:cNvSpPr txBox="1"/>
-          <p:nvPr>
-            <p:ph idx="2" type="body"/>
-          </p:nvPr>
-        </p:nvSpPr>
-        <p:spPr>
-          <a:xfrm>
-            <a:off x="4150000" y="1152475"/>
-            <a:ext cx="4750000" cy="3600000"/>
-          </a:xfrm>
-          <a:prstGeom prst="rect">
-            <a:avLst/>
-          </a:prstGeom>
-        </p:spPr>
-        <p:txBody>
-          <a:bodyPr anchorCtr="0" anchor="t" bIns="91425" lIns="91425" spcFirstLastPara="1" rIns="91425" wrap="square" tIns="91425">
-            <a:noAutofit/>
-          </a:bodyPr>
-          <a:lstStyle/>
-          <a:p>
-            <a:pPr indent="0" lvl="0" marL="0" rtl="0" algn="l">
-              <a:lnSpc>
-                <a:spcPct val="115000"/>
-              </a:lnSpc>
-              <a:spcBef>
-                <a:spcPts val="0"/>
-              </a:spcBef>
-              <a:spcAft>
-                <a:spcPts val="0"/>
-              </a:spcAft>
-              <a:buNone/>
-            </a:pPr>
-            <a:r>
-              <a:rPr lang="en" sz="1000">
-                <a:highlight>
-                  <a:schemeClr val="dk2"/>
-                </a:highlight>
-                <a:latin typeface="Consolas"/>
-                <a:ea typeface="Consolas"/>
-                <a:cs typeface="Consolas"/>
-                <a:sym typeface="Consolas"/>
-              </a:rPr>
-              <a:t>// plants.json</a:t>
-            </a:r>
-            <a:endParaRPr sz="1000">
-              <a:solidFill>
-                <a:srgbClr val="CCCCCC"/>
-              </a:solidFill>
-              <a:highlight>
-                <a:schemeClr val="dk2"/>
-              </a:highlight>
-              <a:latin typeface="Consolas"/>
-              <a:ea typeface="Consolas"/>
-              <a:cs typeface="Consolas"/>
-              <a:sym typeface="Consolas"/>
-            </a:endParaRPr>
-          </a:p>
-          <a:p>
-            <a:pPr indent="0" lvl="0" marL="0" rtl="0" algn="l">
-              <a:lnSpc>
-                <a:spcPct val="115000"/>
-              </a:lnSpc>
-              <a:spcBef>
-                <a:spcPts val="0"/>
-              </a:spcBef>
-              <a:spcAft>
-                <a:spcPts val="0"/>
-              </a:spcAft>
-              <a:buNone/>
-            </a:pPr>
-            <a:r>
-              <a:rPr lang="en" sz="1000">
-                <a:highlight>
-                  <a:schemeClr val="dk2"/>
-                </a:highlight>
-                <a:latin typeface="Consolas"/>
-                <a:ea typeface="Consolas"/>
-                <a:cs typeface="Consolas"/>
-                <a:sym typeface="Consolas"/>
-              </a:rPr>
-              <a:t>{ "name": "Sunflower",</a:t>
-            </a:r>
-            <a:endParaRPr sz="1000">
-              <a:solidFill>
-                <a:srgbClr val="CCCCCC"/>
-              </a:solidFill>
-              <a:highlight>
-                <a:schemeClr val="dk2"/>
-              </a:highlight>
-              <a:latin typeface="Consolas"/>
-              <a:ea typeface="Consolas"/>
-              <a:cs typeface="Consolas"/>
-              <a:sym typeface="Consolas"/>
-            </a:endParaRPr>
-          </a:p>
-          <a:p>
-            <a:pPr indent="0" lvl="0" marL="0" rtl="0" algn="l">
-              <a:lnSpc>
-                <a:spcPct val="115000"/>
-              </a:lnSpc>
-              <a:spcBef>
-                <a:spcPts val="0"/>
-              </a:spcBef>
-              <a:spcAft>
-                <a:spcPts val="0"/>
-              </a:spcAft>
-              <a:buNone/>
-            </a:pPr>
-            <a:r>
-              <a:rPr lang="en" sz="1000">
-                <a:highlight>
-                  <a:schemeClr val="dk2"/>
-                </a:highlight>
-                <a:latin typeface="Consolas"/>
-                <a:ea typeface="Consolas"/>
-                <a:cs typeface="Consolas"/>
-                <a:sym typeface="Consolas"/>
-              </a:rPr>
-              <a:t>  "sprite": "sunflower",</a:t>
-            </a:r>
-            <a:endParaRPr sz="1000">
-              <a:solidFill>
-                <a:srgbClr val="CCCCCC"/>
-              </a:solidFill>
-              <a:highlight>
-                <a:schemeClr val="dk2"/>
-              </a:highlight>
-              <a:latin typeface="Consolas"/>
-              <a:ea typeface="Consolas"/>
-              <a:cs typeface="Consolas"/>
-              <a:sym typeface="Consolas"/>
-            </a:endParaRPr>
-          </a:p>
-          <a:p>
-            <a:pPr indent="0" lvl="0" marL="0" rtl="0" algn="l">
-              <a:lnSpc>
-                <a:spcPct val="115000"/>
-              </a:lnSpc>
-              <a:spcBef>
-                <a:spcPts val="0"/>
-              </a:spcBef>
-              <a:spcAft>
-                <a:spcPts val="0"/>
-              </a:spcAft>
-              <a:buNone/>
-            </a:pPr>
-            <a:r>
-              <a:rPr lang="en" sz="1000">
-                <a:highlight>
-                  <a:schemeClr val="dk2"/>
-                </a:highlight>
-                <a:latin typeface="Consolas"/>
-                <a:ea typeface="Consolas"/>
-                <a:cs typeface="Consolas"/>
-                <a:sym typeface="Consolas"/>
-              </a:rPr>
-              <a:t>  "cost": 50, "recharge": 7.5,</a:t>
-            </a:r>
-            <a:endParaRPr sz="1000">
-              <a:solidFill>
-                <a:srgbClr val="CCCCCC"/>
-              </a:solidFill>
-              <a:highlight>
-                <a:schemeClr val="dk2"/>
-              </a:highlight>
-              <a:latin typeface="Consolas"/>
-              <a:ea typeface="Consolas"/>
-              <a:cs typeface="Consolas"/>
-              <a:sym typeface="Consolas"/>
-            </a:endParaRPr>
-          </a:p>
-          <a:p>
-            <a:pPr indent="0" lvl="0" marL="0" rtl="0" algn="l">
-              <a:lnSpc>
-                <a:spcPct val="115000"/>
-              </a:lnSpc>
-              <a:spcBef>
-                <a:spcPts val="0"/>
-              </a:spcBef>
-              <a:spcAft>
-                <a:spcPts val="0"/>
-              </a:spcAft>
-              <a:buNone/>
-            </a:pPr>
-            <a:r>
-              <a:rPr lang="en" sz="1000">
-                <a:highlight>
-                  <a:schemeClr val="dk2"/>
-                </a:highlight>
-                <a:latin typeface="Consolas"/>
-                <a:ea typeface="Consolas"/>
-                <a:cs typeface="Consolas"/>
-                <a:sym typeface="Consolas"/>
-              </a:rPr>
-              <a:t>  "health": 6,</a:t>
-            </a:r>
-            <a:endParaRPr sz="1000">
-              <a:solidFill>
-                <a:srgbClr val="CCCCCC"/>
-              </a:solidFill>
-              <a:highlight>
-                <a:schemeClr val="dk2"/>
-              </a:highlight>
-              <a:latin typeface="Consolas"/>
-              <a:ea typeface="Consolas"/>
-              <a:cs typeface="Consolas"/>
-              <a:sym typeface="Consolas"/>
-            </a:endParaRPr>
-          </a:p>
-          <a:p>
-            <a:pPr indent="0" lvl="0" marL="0" rtl="0" algn="l">
-              <a:lnSpc>
-                <a:spcPct val="115000"/>
-              </a:lnSpc>
-              <a:spcBef>
-                <a:spcPts val="0"/>
-              </a:spcBef>
-              <a:spcAft>
-                <a:spcPts val="0"/>
-              </a:spcAft>
-              <a:buNone/>
-            </a:pPr>
-            <a:r>
-              <a:rPr lang="en" sz="1000">
-                <a:highlight>
-                  <a:schemeClr val="dk2"/>
-                </a:highlight>
-                <a:latin typeface="Consolas"/>
-                <a:ea typeface="Consolas"/>
-                <a:cs typeface="Consolas"/>
-                <a:sym typeface="Consolas"/>
-              </a:rPr>
-              <a:t>  "sunProducer": {</a:t>
-            </a:r>
-            <a:endParaRPr sz="1000">
-              <a:solidFill>
-                <a:srgbClr val="CCCCCC"/>
-              </a:solidFill>
-              <a:highlight>
-                <a:schemeClr val="dk2"/>
-              </a:highlight>
-              <a:latin typeface="Consolas"/>
-              <a:ea typeface="Consolas"/>
-              <a:cs typeface="Consolas"/>
-              <a:sym typeface="Consolas"/>
-            </a:endParaRPr>
-          </a:p>
-          <a:p>
-            <a:pPr indent="0" lvl="0" marL="0" rtl="0" algn="l">
-              <a:lnSpc>
-                <a:spcPct val="115000"/>
-              </a:lnSpc>
-              <a:spcBef>
-                <a:spcPts val="0"/>
-              </a:spcBef>
-              <a:spcAft>
-                <a:spcPts val="0"/>
-              </a:spcAft>
-              <a:buNone/>
-            </a:pPr>
-            <a:r>
-              <a:rPr lang="en" sz="1000">
-                <a:highlight>
-                  <a:schemeClr val="dk2"/>
-                </a:highlight>
-                <a:latin typeface="Consolas"/>
-                <a:ea typeface="Consolas"/>
-                <a:cs typeface="Consolas"/>
-                <a:sym typeface="Consolas"/>
-              </a:rPr>
-              <a:t>    "interval": 12, "amount": 25 } },</a:t>
-            </a:r>
-            <a:endParaRPr sz="1000">
-              <a:solidFill>
-                <a:srgbClr val="CCCCCC"/>
-              </a:solidFill>
-              <a:highlight>
-                <a:schemeClr val="dk2"/>
-              </a:highlight>
-              <a:latin typeface="Consolas"/>
-              <a:ea typeface="Consolas"/>
-              <a:cs typeface="Consolas"/>
-              <a:sym typeface="Consolas"/>
-            </a:endParaRPr>
-          </a:p>
-          <a:p>
-            <a:pPr indent="0" lvl="0" marL="0" rtl="0" algn="l">
-              <a:lnSpc>
-                <a:spcPct val="115000"/>
-              </a:lnSpc>
-              <a:spcBef>
-                <a:spcPts val="0"/>
-              </a:spcBef>
-              <a:spcAft>
-                <a:spcPts val="0"/>
-              </a:spcAft>
-              <a:buNone/>
-            </a:pPr>
-            <a:r>
-              <a:rPr lang="en" sz="1000">
-                <a:highlight>
-                  <a:schemeClr val="dk2"/>
-                </a:highlight>
-                <a:latin typeface="Consolas"/>
-                <a:ea typeface="Consolas"/>
-                <a:cs typeface="Consolas"/>
-                <a:sym typeface="Consolas"/>
-              </a:rPr>
-              <a:t>{ "name": "Repeater",</a:t>
-            </a:r>
-            <a:endParaRPr sz="1000">
-              <a:solidFill>
-                <a:srgbClr val="CCCCCC"/>
-              </a:solidFill>
-              <a:highlight>
-                <a:schemeClr val="dk2"/>
-              </a:highlight>
-              <a:latin typeface="Consolas"/>
-              <a:ea typeface="Consolas"/>
-              <a:cs typeface="Consolas"/>
-              <a:sym typeface="Consolas"/>
-            </a:endParaRPr>
-          </a:p>
-          <a:p>
-            <a:pPr indent="0" lvl="0" marL="0" rtl="0" algn="l">
-              <a:lnSpc>
-                <a:spcPct val="115000"/>
-              </a:lnSpc>
-              <a:spcBef>
-                <a:spcPts val="0"/>
-              </a:spcBef>
-              <a:spcAft>
-                <a:spcPts val="0"/>
-              </a:spcAft>
-              <a:buNone/>
-            </a:pPr>
-            <a:r>
-              <a:rPr lang="en" sz="1000">
-                <a:highlight>
-                  <a:schemeClr val="dk2"/>
-                </a:highlight>
-                <a:latin typeface="Consolas"/>
-                <a:ea typeface="Consolas"/>
-                <a:cs typeface="Consolas"/>
-                <a:sym typeface="Consolas"/>
-              </a:rPr>
-              <a:t>  "sprite": "repeater",</a:t>
-            </a:r>
-            <a:endParaRPr sz="1000">
-              <a:solidFill>
-                <a:srgbClr val="CCCCCC"/>
-              </a:solidFill>
-              <a:highlight>
-                <a:schemeClr val="dk2"/>
-              </a:highlight>
-              <a:latin typeface="Consolas"/>
-              <a:ea typeface="Consolas"/>
-              <a:cs typeface="Consolas"/>
-              <a:sym typeface="Consolas"/>
-            </a:endParaRPr>
-          </a:p>
-          <a:p>
-            <a:pPr indent="0" lvl="0" marL="0" rtl="0" algn="l">
-              <a:lnSpc>
-                <a:spcPct val="115000"/>
-              </a:lnSpc>
-              <a:spcBef>
-                <a:spcPts val="0"/>
-              </a:spcBef>
-              <a:spcAft>
-                <a:spcPts val="0"/>
-              </a:spcAft>
-              <a:buNone/>
-            </a:pPr>
-            <a:r>
-              <a:rPr lang="en" sz="1000">
-                <a:highlight>
-                  <a:schemeClr val="dk2"/>
-                </a:highlight>
-                <a:latin typeface="Consolas"/>
-                <a:ea typeface="Consolas"/>
-                <a:cs typeface="Consolas"/>
-                <a:sym typeface="Consolas"/>
-              </a:rPr>
-              <a:t>  "cost": 200, "recharge": 7.5,</a:t>
-            </a:r>
-            <a:endParaRPr sz="1000">
-              <a:solidFill>
-                <a:srgbClr val="CCCCCC"/>
-              </a:solidFill>
-              <a:highlight>
-                <a:schemeClr val="dk2"/>
-              </a:highlight>
-              <a:latin typeface="Consolas"/>
-              <a:ea typeface="Consolas"/>
-              <a:cs typeface="Consolas"/>
-              <a:sym typeface="Consolas"/>
-            </a:endParaRPr>
-          </a:p>
-          <a:p>
-            <a:pPr indent="0" lvl="0" marL="0" rtl="0" algn="l">
-              <a:lnSpc>
-                <a:spcPct val="115000"/>
-              </a:lnSpc>
-              <a:spcBef>
-                <a:spcPts val="0"/>
-              </a:spcBef>
-              <a:spcAft>
-                <a:spcPts val="0"/>
-              </a:spcAft>
-              <a:buNone/>
-            </a:pPr>
-            <a:r>
-              <a:rPr lang="en" sz="1000">
-                <a:highlight>
-                  <a:schemeClr val="dk2"/>
-                </a:highlight>
-                <a:latin typeface="Consolas"/>
-                <a:ea typeface="Consolas"/>
-                <a:cs typeface="Consolas"/>
-                <a:sym typeface="Consolas"/>
-              </a:rPr>
-              <a:t>  "health": 6,</a:t>
-            </a:r>
-            <a:endParaRPr sz="1000">
-              <a:solidFill>
-                <a:srgbClr val="CCCCCC"/>
-              </a:solidFill>
-              <a:highlight>
-                <a:schemeClr val="dk2"/>
-              </a:highlight>
-              <a:latin typeface="Consolas"/>
-              <a:ea typeface="Consolas"/>
-              <a:cs typeface="Consolas"/>
-              <a:sym typeface="Consolas"/>
-            </a:endParaRPr>
-          </a:p>
-          <a:p>
-            <a:pPr indent="0" lvl="0" marL="0" rtl="0" algn="l">
-              <a:lnSpc>
-                <a:spcPct val="115000"/>
-              </a:lnSpc>
-              <a:spcBef>
-                <a:spcPts val="0"/>
-              </a:spcBef>
-              <a:spcAft>
-                <a:spcPts val="0"/>
-              </a:spcAft>
-              <a:buNone/>
-            </a:pPr>
-            <a:r>
-              <a:rPr lang="en" sz="1000">
-                <a:highlight>
-                  <a:schemeClr val="dk2"/>
-                </a:highlight>
-                <a:latin typeface="Consolas"/>
-                <a:ea typeface="Consolas"/>
-                <a:cs typeface="Consolas"/>
-                <a:sym typeface="Consolas"/>
-              </a:rPr>
-              <a:t>  "shooter": {</a:t>
-            </a:r>
-            <a:endParaRPr sz="1000">
-              <a:solidFill>
-                <a:srgbClr val="CCCCCC"/>
-              </a:solidFill>
-              <a:highlight>
-                <a:schemeClr val="dk2"/>
-              </a:highlight>
-              <a:latin typeface="Consolas"/>
-              <a:ea typeface="Consolas"/>
-              <a:cs typeface="Consolas"/>
-              <a:sym typeface="Consolas"/>
-            </a:endParaRPr>
-          </a:p>
-          <a:p>
-            <a:pPr indent="0" lvl="0" marL="0" rtl="0" algn="l">
-              <a:lnSpc>
-                <a:spcPct val="115000"/>
-              </a:lnSpc>
-              <a:spcBef>
-                <a:spcPts val="0"/>
-              </a:spcBef>
-              <a:spcAft>
-                <a:spcPts val="0"/>
-              </a:spcAft>
-              <a:buNone/>
-            </a:pPr>
-            <a:r>
-              <a:rPr lang="en" sz="1000">
-                <a:highlight>
-                  <a:schemeClr val="dk2"/>
-                </a:highlight>
-                <a:latin typeface="Consolas"/>
-                <a:ea typeface="Consolas"/>
-                <a:cs typeface="Consolas"/>
-                <a:sym typeface="Consolas"/>
-              </a:rPr>
-              <a:t>    "interval": 1.4, "shots": 2,</a:t>
-            </a:r>
-            <a:endParaRPr sz="1000">
-              <a:solidFill>
-                <a:srgbClr val="CCCCCC"/>
-              </a:solidFill>
-              <a:highlight>
-                <a:schemeClr val="dk2"/>
-              </a:highlight>
-              <a:latin typeface="Consolas"/>
-              <a:ea typeface="Consolas"/>
-              <a:cs typeface="Consolas"/>
-              <a:sym typeface="Consolas"/>
-            </a:endParaRPr>
-          </a:p>
-          <a:p>
-            <a:pPr indent="0" lvl="0" marL="0" rtl="0" algn="l">
-              <a:lnSpc>
-                <a:spcPct val="115000"/>
-              </a:lnSpc>
-              <a:spcBef>
-                <a:spcPts val="0"/>
-              </a:spcBef>
-              <a:spcAft>
-                <a:spcPts val="0"/>
-              </a:spcAft>
-              <a:buNone/>
-            </a:pPr>
-            <a:r>
-              <a:rPr lang="en" sz="1000">
-                <a:highlight>
-                  <a:schemeClr val="dk2"/>
-                </a:highlight>
-                <a:latin typeface="Consolas"/>
-                <a:ea typeface="Consolas"/>
-                <a:cs typeface="Consolas"/>
-                <a:sym typeface="Consolas"/>
-              </a:rPr>
-              <a:t>    "damage": 1 } }</a:t>
-            </a:r>
-            <a:endParaRPr sz="1000">
-              <a:solidFill>
-                <a:srgbClr val="CCCCCC"/>
-              </a:solidFill>
-              <a:highlight>
-                <a:schemeClr val="dk2"/>
-              </a:highlight>
-              <a:latin typeface="Consolas"/>
-              <a:ea typeface="Consolas"/>
-              <a:cs typeface="Consolas"/>
-              <a:sym typeface="Consolas"/>
-            </a:endParaRPr>
           </a:p>
         </p:txBody>
       </p:sp>
@@ -10107,7 +9860,7 @@
             </a:pPr>
             <a:r>
               <a:rPr lang="en"/>
-              <a:t>The Type Creates Instances</a:t>
+              <a:t>Type Object</a:t>
             </a:r>
             <a:endParaRPr/>
           </a:p>
@@ -10155,7 +9908,7 @@
                   <a:srgbClr val="DEE2E6"/>
                 </a:solidFill>
               </a:rPr>
-              <a:t>A component for each kind of data</a:t>
+              <a:t>A peashooter’s cost: not in any one peashooter</a:t>
             </a:r>
             <a:endParaRPr/>
           </a:p>
@@ -10179,7 +9932,7 @@
                   <a:srgbClr val="DEE2E6"/>
                 </a:solidFill>
               </a:rPr>
-              <a:t>New kinds from old components: data only</a:t>
+              <a:t>One PlantType per kind of plant</a:t>
             </a:r>
             <a:endParaRPr/>
           </a:p>
@@ -10203,7 +9956,7 @@
                   <a:srgbClr val="6C757D"/>
                 </a:solidFill>
               </a:rPr>
-              <a:t>A Buckethead: a zombie type with armour</a:t>
+              <a:t>Loaded from plants.json</a:t>
             </a:r>
             <a:endParaRPr/>
           </a:p>
@@ -10227,14 +9980,14 @@
                   <a:srgbClr val="DEE2E6"/>
                 </a:solidFill>
               </a:rPr>
-              <a:t>A new ability: one component, and data</a:t>
+              <a:t>Types hold what all instances share</a:t>
             </a:r>
             <a:endParaRPr/>
           </a:p>
           <a:p>
-            <a:pPr indent="-317500" lvl="1" marL="914400" rtl="0" algn="l">
+            <a:pPr indent="-330200" lvl="0" marL="457200" rtl="0" algn="l">
               <a:buClr>
-                <a:srgbClr val="6C757D"/>
+                <a:srgbClr val="DEE2E6"/>
               </a:buClr>
               <a:spcBef>
                 <a:spcPts val="0"/>
@@ -10242,16 +9995,16 @@
               <a:spcAft>
                 <a:spcPts val="0"/>
               </a:spcAft>
-              <a:buSzPts val="1400"/>
-              <a:buChar char="○"/>
-            </a:pPr>
-            <a:r>
-              <a:rPr lang="en" sz="1400">
+              <a:buSzPts val="1600"/>
+              <a:buChar char="●"/>
+            </a:pPr>
+            <a:r>
+              <a:rPr lang="en" sz="1600">
                 <a:solidFill>
-                  <a:srgbClr val="6C757D"/>
+                  <a:srgbClr val="DEE2E6"/>
                 </a:solidFill>
               </a:rPr>
-              <a:t>The Cherry Bomb: Explode</a:t>
+              <a:t>Instances hold their own state</a:t>
             </a:r>
             <a:endParaRPr/>
           </a:p>
@@ -10302,7 +10055,7 @@
                 <a:cs typeface="Consolas"/>
                 <a:sym typeface="Consolas"/>
               </a:rPr>
-              <a:t>public Entity Create(World world)</a:t>
+              <a:t>// plants.json</a:t>
             </a:r>
             <a:endParaRPr sz="1000">
               <a:solidFill>
@@ -10340,7 +10093,7 @@
                 <a:cs typeface="Consolas"/>
                 <a:sym typeface="Consolas"/>
               </a:rPr>
-              <a:t>{</a:t>
+              <a:t>{ "name": "Sunflower",</a:t>
             </a:r>
             <a:endParaRPr sz="1000">
               <a:solidFill>
@@ -10378,7 +10131,7 @@
                 <a:cs typeface="Consolas"/>
                 <a:sym typeface="Consolas"/>
               </a:rPr>
-              <a:t>    var plant = new Entity(world)</a:t>
+              <a:t>  "sprite": "sunflower",</a:t>
             </a:r>
             <a:endParaRPr sz="1000">
               <a:solidFill>
@@ -10416,7 +10169,7 @@
                 <a:cs typeface="Consolas"/>
                 <a:sym typeface="Consolas"/>
               </a:rPr>
-              <a:t>        .With(new SpriteRenderer(</a:t>
+              <a:t>  "cost": 50, "recharge": 7.5,</a:t>
             </a:r>
             <a:endParaRPr sz="1000">
               <a:solidFill>
@@ -10454,7 +10207,7 @@
                 <a:cs typeface="Consolas"/>
                 <a:sym typeface="Consolas"/>
               </a:rPr>
-              <a:t>            world.Atlas.GetRegion(Sprite)))</a:t>
+              <a:t>  "health": 6,</a:t>
             </a:r>
             <a:endParaRPr sz="1000">
               <a:solidFill>
@@ -10492,7 +10245,7 @@
                 <a:cs typeface="Consolas"/>
                 <a:sym typeface="Consolas"/>
               </a:rPr>
-              <a:t>        .With(new Health(Health));</a:t>
+              <a:t>  "sunProducer": {</a:t>
             </a:r>
             <a:endParaRPr sz="1000">
               <a:solidFill>
@@ -10530,7 +10283,7 @@
                 <a:cs typeface="Consolas"/>
                 <a:sym typeface="Consolas"/>
               </a:rPr>
-              <a:t/>
+              <a:t>    "interval": 12, "amount": 25 } },</a:t>
             </a:r>
             <a:endParaRPr sz="1000">
               <a:solidFill>
@@ -10568,7 +10321,7 @@
                 <a:cs typeface="Consolas"/>
                 <a:sym typeface="Consolas"/>
               </a:rPr>
-              <a:t>    if (Shooter != null)</a:t>
+              <a:t>{ "name": "Repeater",</a:t>
             </a:r>
             <a:endParaRPr sz="1000">
               <a:solidFill>
@@ -10606,7 +10359,7 @@
                 <a:cs typeface="Consolas"/>
                 <a:sym typeface="Consolas"/>
               </a:rPr>
-              <a:t>        plant.Add(new Shooter(Shooter.Interval,</a:t>
+              <a:t>  "sprite": "repeater",</a:t>
             </a:r>
             <a:endParaRPr sz="1000">
               <a:solidFill>
@@ -10644,7 +10397,7 @@
                 <a:cs typeface="Consolas"/>
                 <a:sym typeface="Consolas"/>
               </a:rPr>
-              <a:t>            Shooter.Shots, Shooter.Damage));</a:t>
+              <a:t>  "cost": 200, "recharge": 7.5,</a:t>
             </a:r>
             <a:endParaRPr sz="1000">
               <a:solidFill>
@@ -10682,7 +10435,7 @@
                 <a:cs typeface="Consolas"/>
                 <a:sym typeface="Consolas"/>
               </a:rPr>
-              <a:t>    if (SunProducer != null)</a:t>
+              <a:t>  "health": 6,</a:t>
             </a:r>
             <a:endParaRPr sz="1000">
               <a:solidFill>
@@ -10720,7 +10473,7 @@
                 <a:cs typeface="Consolas"/>
                 <a:sym typeface="Consolas"/>
               </a:rPr>
-              <a:t>        plant.Add(new SunProducer(</a:t>
+              <a:t>  "shooter": {</a:t>
             </a:r>
             <a:endParaRPr sz="1000">
               <a:solidFill>
@@ -10758,7 +10511,7 @@
                 <a:cs typeface="Consolas"/>
                 <a:sym typeface="Consolas"/>
               </a:rPr>
-              <a:t>            SunProducer.Interval, SunProducer.Amount));</a:t>
+              <a:t>    "interval": 1.4, "shots": 2,</a:t>
             </a:r>
             <a:endParaRPr sz="1000">
               <a:solidFill>
@@ -10796,7 +10549,7 @@
                 <a:cs typeface="Consolas"/>
                 <a:sym typeface="Consolas"/>
               </a:rPr>
-              <a:t>    return plant;</a:t>
+              <a:t>    "damage": 1 } }</a:t>
             </a:r>
             <a:endParaRPr sz="1000">
               <a:solidFill>
@@ -10811,6 +10564,232 @@
               <a:sym typeface="Consolas"/>
             </a:endParaRPr>
           </a:p>
+        </p:txBody>
+      </p:sp>
+    </p:spTree>
+  </p:cSld>
+  <p:clrMapOvr>
+    <a:masterClrMapping/>
+  </p:clrMapOvr>
+</p:sld>
+</file>
+
+<file path=ppt/slides/slide18.xml><?xml version="1.0" encoding="utf-8"?>
+<p:sld xmlns:a="http://schemas.openxmlformats.org/drawingml/2006/main" xmlns:p="http://schemas.openxmlformats.org/presentationml/2006/main" xmlns:r="http://schemas.openxmlformats.org/officeDocument/2006/relationships">
+  <p:cSld>
+    <p:spTree>
+      <p:nvGrpSpPr>
+        <p:cNvPr id="1" name=""/>
+        <p:cNvGrpSpPr/>
+        <p:nvPr/>
+      </p:nvGrpSpPr>
+      <p:grpSpPr/>
+      <p:sp>
+        <p:nvSpPr>
+          <p:cNvPr id="140" name="Google Shape;140;p23"/>
+          <p:cNvSpPr txBox="1"/>
+          <p:nvPr>
+            <p:ph type="title"/>
+          </p:nvPr>
+        </p:nvSpPr>
+        <p:spPr>
+          <a:xfrm>
+            <a:off x="311700" y="195615"/>
+            <a:ext cx="8520600" cy="572700"/>
+          </a:xfrm>
+          <a:prstGeom prst="rect">
+            <a:avLst/>
+          </a:prstGeom>
+        </p:spPr>
+        <p:txBody>
+          <a:bodyPr anchorCtr="0" anchor="t" bIns="91425" lIns="91425" spcFirstLastPara="1" rIns="91425" wrap="square" tIns="91425">
+            <a:normAutofit fontScale="90000"/>
+          </a:bodyPr>
+          <a:lstStyle/>
+          <a:p>
+            <a:pPr indent="0" lvl="0" marL="0" rtl="0" algn="l">
+              <a:spcBef>
+                <a:spcPts val="0"/>
+              </a:spcBef>
+              <a:spcAft>
+                <a:spcPts val="0"/>
+              </a:spcAft>
+              <a:buNone/>
+            </a:pPr>
+            <a:r>
+              <a:rPr lang="en"/>
+              <a:t>The Type Creates Instances</a:t>
+            </a:r>
+            <a:endParaRPr/>
+          </a:p>
+        </p:txBody>
+      </p:sp>
+      <p:sp>
+        <p:nvSpPr>
+          <p:cNvPr id="293" name="Google Shape;293;p45"/>
+          <p:cNvSpPr txBox="1"/>
+          <p:nvPr>
+            <p:ph type="title"/>
+          </p:nvPr>
+        </p:nvSpPr>
+        <p:spPr>
+          <a:xfrm>
+            <a:off x="311700" y="1152475"/>
+            <a:ext cx="3700000" cy="3500000"/>
+          </a:xfrm>
+          <a:prstGeom prst="rect">
+            <a:avLst/>
+          </a:prstGeom>
+        </p:spPr>
+        <p:txBody>
+          <a:bodyPr anchorCtr="0" anchor="t" bIns="91425" lIns="91425" spcFirstLastPara="1" rIns="91425" wrap="square" tIns="91425">
+            <a:normAutofit fontScale="90000"/>
+          </a:bodyPr>
+          <a:lstStyle/>
+          <a:p>
+            <a:pPr indent="-330200" lvl="0" marL="457200" rtl="0" algn="l">
+              <a:buClr>
+                <a:srgbClr val="DEE2E6"/>
+              </a:buClr>
+              <a:spcBef>
+                <a:spcPts val="0"/>
+              </a:spcBef>
+              <a:spcAft>
+                <a:spcPts val="0"/>
+              </a:spcAft>
+              <a:buSzPts val="1600"/>
+              <a:buChar char="●"/>
+            </a:pPr>
+            <a:r>
+              <a:rPr lang="en" sz="1600">
+                <a:solidFill>
+                  <a:srgbClr val="DEE2E6"/>
+                </a:solidFill>
+              </a:rPr>
+              <a:t>A component for each kind of data</a:t>
+            </a:r>
+            <a:endParaRPr/>
+          </a:p>
+          <a:p>
+            <a:pPr indent="-330200" lvl="0" marL="457200" rtl="0" algn="l">
+              <a:buClr>
+                <a:srgbClr val="DEE2E6"/>
+              </a:buClr>
+              <a:spcBef>
+                <a:spcPts val="0"/>
+              </a:spcBef>
+              <a:spcAft>
+                <a:spcPts val="0"/>
+              </a:spcAft>
+              <a:buSzPts val="1600"/>
+              <a:buChar char="●"/>
+            </a:pPr>
+            <a:r>
+              <a:rPr lang="en" sz="1600">
+                <a:solidFill>
+                  <a:srgbClr val="DEE2E6"/>
+                </a:solidFill>
+              </a:rPr>
+              <a:t>New kinds from old components: data only</a:t>
+            </a:r>
+            <a:endParaRPr/>
+          </a:p>
+          <a:p>
+            <a:pPr indent="-317500" lvl="1" marL="914400" rtl="0" algn="l">
+              <a:buClr>
+                <a:srgbClr val="6C757D"/>
+              </a:buClr>
+              <a:spcBef>
+                <a:spcPts val="0"/>
+              </a:spcBef>
+              <a:spcAft>
+                <a:spcPts val="0"/>
+              </a:spcAft>
+              <a:buSzPts val="1400"/>
+              <a:buChar char="○"/>
+            </a:pPr>
+            <a:r>
+              <a:rPr lang="en" sz="1400">
+                <a:solidFill>
+                  <a:srgbClr val="6C757D"/>
+                </a:solidFill>
+              </a:rPr>
+              <a:t>A Buckethead: a zombie type with armour</a:t>
+            </a:r>
+            <a:endParaRPr/>
+          </a:p>
+          <a:p>
+            <a:pPr indent="-330200" lvl="0" marL="457200" rtl="0" algn="l">
+              <a:buClr>
+                <a:srgbClr val="DEE2E6"/>
+              </a:buClr>
+              <a:spcBef>
+                <a:spcPts val="0"/>
+              </a:spcBef>
+              <a:spcAft>
+                <a:spcPts val="0"/>
+              </a:spcAft>
+              <a:buSzPts val="1600"/>
+              <a:buChar char="●"/>
+            </a:pPr>
+            <a:r>
+              <a:rPr lang="en" sz="1600">
+                <a:solidFill>
+                  <a:srgbClr val="DEE2E6"/>
+                </a:solidFill>
+              </a:rPr>
+              <a:t>A new ability: one component, and data</a:t>
+            </a:r>
+            <a:endParaRPr/>
+          </a:p>
+          <a:p>
+            <a:pPr indent="-317500" lvl="1" marL="914400" rtl="0" algn="l">
+              <a:buClr>
+                <a:srgbClr val="6C757D"/>
+              </a:buClr>
+              <a:spcBef>
+                <a:spcPts val="0"/>
+              </a:spcBef>
+              <a:spcAft>
+                <a:spcPts val="0"/>
+              </a:spcAft>
+              <a:buSzPts val="1400"/>
+              <a:buChar char="○"/>
+            </a:pPr>
+            <a:r>
+              <a:rPr lang="en" sz="1400">
+                <a:solidFill>
+                  <a:srgbClr val="6C757D"/>
+                </a:solidFill>
+              </a:rPr>
+              <a:t>The Cherry Bomb: Explode</a:t>
+            </a:r>
+            <a:endParaRPr/>
+          </a:p>
+        </p:txBody>
+      </p:sp>
+      <p:sp>
+        <p:nvSpPr>
+          <p:cNvPr id="141" name="Google Shape;141;p23"/>
+          <p:cNvSpPr txBox="1"/>
+          <p:nvPr>
+            <p:ph idx="2" type="body"/>
+          </p:nvPr>
+        </p:nvSpPr>
+        <p:spPr>
+          <a:xfrm>
+            <a:off x="4150000" y="1152475"/>
+            <a:ext cx="4750000" cy="3600000"/>
+          </a:xfrm>
+          <a:prstGeom prst="rect">
+            <a:avLst/>
+          </a:prstGeom>
+        </p:spPr>
+        <p:txBody>
+          <a:bodyPr anchorCtr="0" anchor="t" bIns="91425" lIns="91425" spcFirstLastPara="1" rIns="91425" wrap="square" tIns="91425">
+            <a:noAutofit/>
+          </a:bodyPr>
+          <a:lstStyle/>
           <a:p>
             <a:pPr indent="0" lvl="0" marL="0" rtl="0" algn="l">
               <a:lnSpc>
@@ -10834,7 +10813,7 @@
                 <a:cs typeface="Consolas"/>
                 <a:sym typeface="Consolas"/>
               </a:rPr>
-              <a:t>}</a:t>
+              <a:t>public Entity Create(World world)</a:t>
             </a:r>
             <a:endParaRPr sz="1000">
               <a:solidFill>
@@ -10849,6 +10828,538 @@
               <a:sym typeface="Consolas"/>
             </a:endParaRPr>
           </a:p>
+          <a:p>
+            <a:pPr indent="0" lvl="0" marL="0" rtl="0" algn="l">
+              <a:lnSpc>
+                <a:spcPct val="115000"/>
+              </a:lnSpc>
+              <a:spcBef>
+                <a:spcPts val="0"/>
+              </a:spcBef>
+              <a:spcAft>
+                <a:spcPts val="0"/>
+              </a:spcAft>
+              <a:buNone/>
+            </a:pPr>
+            <a:r>
+              <a:rPr lang="en" sz="1000">
+                <a:highlight>
+                  <a:schemeClr val="dk2"/>
+                </a:highlight>
+                <a:latin typeface="Consolas"/>
+                <a:ea typeface="Consolas"/>
+                <a:cs typeface="Consolas"/>
+                <a:sym typeface="Consolas"/>
+              </a:rPr>
+              <a:t>{</a:t>
+            </a:r>
+            <a:endParaRPr sz="1000">
+              <a:solidFill>
+                <a:srgbClr val="CCCCCC"/>
+              </a:solidFill>
+              <a:highlight>
+                <a:schemeClr val="dk2"/>
+              </a:highlight>
+              <a:latin typeface="Consolas"/>
+              <a:ea typeface="Consolas"/>
+              <a:cs typeface="Consolas"/>
+              <a:sym typeface="Consolas"/>
+            </a:endParaRPr>
+          </a:p>
+          <a:p>
+            <a:pPr indent="0" lvl="0" marL="0" rtl="0" algn="l">
+              <a:lnSpc>
+                <a:spcPct val="115000"/>
+              </a:lnSpc>
+              <a:spcBef>
+                <a:spcPts val="0"/>
+              </a:spcBef>
+              <a:spcAft>
+                <a:spcPts val="0"/>
+              </a:spcAft>
+              <a:buNone/>
+            </a:pPr>
+            <a:r>
+              <a:rPr lang="en" sz="1000">
+                <a:highlight>
+                  <a:schemeClr val="dk2"/>
+                </a:highlight>
+                <a:latin typeface="Consolas"/>
+                <a:ea typeface="Consolas"/>
+                <a:cs typeface="Consolas"/>
+                <a:sym typeface="Consolas"/>
+              </a:rPr>
+              <a:t>    var plant = new Entity(world)</a:t>
+            </a:r>
+            <a:endParaRPr sz="1000">
+              <a:solidFill>
+                <a:srgbClr val="CCCCCC"/>
+              </a:solidFill>
+              <a:highlight>
+                <a:schemeClr val="dk2"/>
+              </a:highlight>
+              <a:latin typeface="Consolas"/>
+              <a:ea typeface="Consolas"/>
+              <a:cs typeface="Consolas"/>
+              <a:sym typeface="Consolas"/>
+            </a:endParaRPr>
+          </a:p>
+          <a:p>
+            <a:pPr indent="0" lvl="0" marL="0" rtl="0" algn="l">
+              <a:lnSpc>
+                <a:spcPct val="115000"/>
+              </a:lnSpc>
+              <a:spcBef>
+                <a:spcPts val="0"/>
+              </a:spcBef>
+              <a:spcAft>
+                <a:spcPts val="0"/>
+              </a:spcAft>
+              <a:buNone/>
+            </a:pPr>
+            <a:r>
+              <a:rPr lang="en" sz="1000">
+                <a:highlight>
+                  <a:schemeClr val="dk2"/>
+                </a:highlight>
+                <a:latin typeface="Consolas"/>
+                <a:ea typeface="Consolas"/>
+                <a:cs typeface="Consolas"/>
+                <a:sym typeface="Consolas"/>
+              </a:rPr>
+              <a:t>        .With(new SpriteRenderer(</a:t>
+            </a:r>
+            <a:endParaRPr sz="1000">
+              <a:solidFill>
+                <a:srgbClr val="CCCCCC"/>
+              </a:solidFill>
+              <a:highlight>
+                <a:schemeClr val="dk2"/>
+              </a:highlight>
+              <a:latin typeface="Consolas"/>
+              <a:ea typeface="Consolas"/>
+              <a:cs typeface="Consolas"/>
+              <a:sym typeface="Consolas"/>
+            </a:endParaRPr>
+          </a:p>
+          <a:p>
+            <a:pPr indent="0" lvl="0" marL="0" rtl="0" algn="l">
+              <a:lnSpc>
+                <a:spcPct val="115000"/>
+              </a:lnSpc>
+              <a:spcBef>
+                <a:spcPts val="0"/>
+              </a:spcBef>
+              <a:spcAft>
+                <a:spcPts val="0"/>
+              </a:spcAft>
+              <a:buNone/>
+            </a:pPr>
+            <a:r>
+              <a:rPr lang="en" sz="1000">
+                <a:highlight>
+                  <a:schemeClr val="dk2"/>
+                </a:highlight>
+                <a:latin typeface="Consolas"/>
+                <a:ea typeface="Consolas"/>
+                <a:cs typeface="Consolas"/>
+                <a:sym typeface="Consolas"/>
+              </a:rPr>
+              <a:t>            world.Atlas.GetRegion(Sprite)))</a:t>
+            </a:r>
+            <a:endParaRPr sz="1000">
+              <a:solidFill>
+                <a:srgbClr val="CCCCCC"/>
+              </a:solidFill>
+              <a:highlight>
+                <a:schemeClr val="dk2"/>
+              </a:highlight>
+              <a:latin typeface="Consolas"/>
+              <a:ea typeface="Consolas"/>
+              <a:cs typeface="Consolas"/>
+              <a:sym typeface="Consolas"/>
+            </a:endParaRPr>
+          </a:p>
+          <a:p>
+            <a:pPr indent="0" lvl="0" marL="0" rtl="0" algn="l">
+              <a:lnSpc>
+                <a:spcPct val="115000"/>
+              </a:lnSpc>
+              <a:spcBef>
+                <a:spcPts val="0"/>
+              </a:spcBef>
+              <a:spcAft>
+                <a:spcPts val="0"/>
+              </a:spcAft>
+              <a:buNone/>
+            </a:pPr>
+            <a:r>
+              <a:rPr lang="en" sz="1000">
+                <a:highlight>
+                  <a:schemeClr val="dk2"/>
+                </a:highlight>
+                <a:latin typeface="Consolas"/>
+                <a:ea typeface="Consolas"/>
+                <a:cs typeface="Consolas"/>
+                <a:sym typeface="Consolas"/>
+              </a:rPr>
+              <a:t>        .With(new Health(Health));</a:t>
+            </a:r>
+            <a:endParaRPr sz="1000">
+              <a:solidFill>
+                <a:srgbClr val="CCCCCC"/>
+              </a:solidFill>
+              <a:highlight>
+                <a:schemeClr val="dk2"/>
+              </a:highlight>
+              <a:latin typeface="Consolas"/>
+              <a:ea typeface="Consolas"/>
+              <a:cs typeface="Consolas"/>
+              <a:sym typeface="Consolas"/>
+            </a:endParaRPr>
+          </a:p>
+          <a:p>
+            <a:pPr indent="0" lvl="0" marL="0" rtl="0" algn="l">
+              <a:lnSpc>
+                <a:spcPct val="115000"/>
+              </a:lnSpc>
+              <a:spcBef>
+                <a:spcPts val="0"/>
+              </a:spcBef>
+              <a:spcAft>
+                <a:spcPts val="0"/>
+              </a:spcAft>
+              <a:buNone/>
+            </a:pPr>
+            <a:r>
+              <a:rPr lang="en" sz="1000">
+                <a:highlight>
+                  <a:schemeClr val="dk2"/>
+                </a:highlight>
+                <a:latin typeface="Consolas"/>
+                <a:ea typeface="Consolas"/>
+                <a:cs typeface="Consolas"/>
+                <a:sym typeface="Consolas"/>
+              </a:rPr>
+              <a:t/>
+            </a:r>
+            <a:endParaRPr sz="1000">
+              <a:solidFill>
+                <a:srgbClr val="CCCCCC"/>
+              </a:solidFill>
+              <a:highlight>
+                <a:schemeClr val="dk2"/>
+              </a:highlight>
+              <a:latin typeface="Consolas"/>
+              <a:ea typeface="Consolas"/>
+              <a:cs typeface="Consolas"/>
+              <a:sym typeface="Consolas"/>
+            </a:endParaRPr>
+          </a:p>
+          <a:p>
+            <a:pPr indent="0" lvl="0" marL="0" rtl="0" algn="l">
+              <a:lnSpc>
+                <a:spcPct val="115000"/>
+              </a:lnSpc>
+              <a:spcBef>
+                <a:spcPts val="0"/>
+              </a:spcBef>
+              <a:spcAft>
+                <a:spcPts val="0"/>
+              </a:spcAft>
+              <a:buNone/>
+            </a:pPr>
+            <a:r>
+              <a:rPr lang="en" sz="1000">
+                <a:highlight>
+                  <a:schemeClr val="dk2"/>
+                </a:highlight>
+                <a:latin typeface="Consolas"/>
+                <a:ea typeface="Consolas"/>
+                <a:cs typeface="Consolas"/>
+                <a:sym typeface="Consolas"/>
+              </a:rPr>
+              <a:t>    if (Shooter != null)</a:t>
+            </a:r>
+            <a:endParaRPr sz="1000">
+              <a:solidFill>
+                <a:srgbClr val="CCCCCC"/>
+              </a:solidFill>
+              <a:highlight>
+                <a:schemeClr val="dk2"/>
+              </a:highlight>
+              <a:latin typeface="Consolas"/>
+              <a:ea typeface="Consolas"/>
+              <a:cs typeface="Consolas"/>
+              <a:sym typeface="Consolas"/>
+            </a:endParaRPr>
+          </a:p>
+          <a:p>
+            <a:pPr indent="0" lvl="0" marL="0" rtl="0" algn="l">
+              <a:lnSpc>
+                <a:spcPct val="115000"/>
+              </a:lnSpc>
+              <a:spcBef>
+                <a:spcPts val="0"/>
+              </a:spcBef>
+              <a:spcAft>
+                <a:spcPts val="0"/>
+              </a:spcAft>
+              <a:buNone/>
+            </a:pPr>
+            <a:r>
+              <a:rPr lang="en" sz="1000">
+                <a:highlight>
+                  <a:schemeClr val="dk2"/>
+                </a:highlight>
+                <a:latin typeface="Consolas"/>
+                <a:ea typeface="Consolas"/>
+                <a:cs typeface="Consolas"/>
+                <a:sym typeface="Consolas"/>
+              </a:rPr>
+              <a:t>        plant.Add(new Shooter(Shooter.Interval,</a:t>
+            </a:r>
+            <a:endParaRPr sz="1000">
+              <a:solidFill>
+                <a:srgbClr val="CCCCCC"/>
+              </a:solidFill>
+              <a:highlight>
+                <a:schemeClr val="dk2"/>
+              </a:highlight>
+              <a:latin typeface="Consolas"/>
+              <a:ea typeface="Consolas"/>
+              <a:cs typeface="Consolas"/>
+              <a:sym typeface="Consolas"/>
+            </a:endParaRPr>
+          </a:p>
+          <a:p>
+            <a:pPr indent="0" lvl="0" marL="0" rtl="0" algn="l">
+              <a:lnSpc>
+                <a:spcPct val="115000"/>
+              </a:lnSpc>
+              <a:spcBef>
+                <a:spcPts val="0"/>
+              </a:spcBef>
+              <a:spcAft>
+                <a:spcPts val="0"/>
+              </a:spcAft>
+              <a:buNone/>
+            </a:pPr>
+            <a:r>
+              <a:rPr lang="en" sz="1000">
+                <a:highlight>
+                  <a:schemeClr val="dk2"/>
+                </a:highlight>
+                <a:latin typeface="Consolas"/>
+                <a:ea typeface="Consolas"/>
+                <a:cs typeface="Consolas"/>
+                <a:sym typeface="Consolas"/>
+              </a:rPr>
+              <a:t>            Shooter.Shots, Shooter.Damage));</a:t>
+            </a:r>
+            <a:endParaRPr sz="1000">
+              <a:solidFill>
+                <a:srgbClr val="CCCCCC"/>
+              </a:solidFill>
+              <a:highlight>
+                <a:schemeClr val="dk2"/>
+              </a:highlight>
+              <a:latin typeface="Consolas"/>
+              <a:ea typeface="Consolas"/>
+              <a:cs typeface="Consolas"/>
+              <a:sym typeface="Consolas"/>
+            </a:endParaRPr>
+          </a:p>
+          <a:p>
+            <a:pPr indent="0" lvl="0" marL="0" rtl="0" algn="l">
+              <a:lnSpc>
+                <a:spcPct val="115000"/>
+              </a:lnSpc>
+              <a:spcBef>
+                <a:spcPts val="0"/>
+              </a:spcBef>
+              <a:spcAft>
+                <a:spcPts val="0"/>
+              </a:spcAft>
+              <a:buNone/>
+            </a:pPr>
+            <a:r>
+              <a:rPr lang="en" sz="1000">
+                <a:highlight>
+                  <a:schemeClr val="dk2"/>
+                </a:highlight>
+                <a:latin typeface="Consolas"/>
+                <a:ea typeface="Consolas"/>
+                <a:cs typeface="Consolas"/>
+                <a:sym typeface="Consolas"/>
+              </a:rPr>
+              <a:t>    if (SunProducer != null)</a:t>
+            </a:r>
+            <a:endParaRPr sz="1000">
+              <a:solidFill>
+                <a:srgbClr val="CCCCCC"/>
+              </a:solidFill>
+              <a:highlight>
+                <a:schemeClr val="dk2"/>
+              </a:highlight>
+              <a:latin typeface="Consolas"/>
+              <a:ea typeface="Consolas"/>
+              <a:cs typeface="Consolas"/>
+              <a:sym typeface="Consolas"/>
+            </a:endParaRPr>
+          </a:p>
+          <a:p>
+            <a:pPr indent="0" lvl="0" marL="0" rtl="0" algn="l">
+              <a:lnSpc>
+                <a:spcPct val="115000"/>
+              </a:lnSpc>
+              <a:spcBef>
+                <a:spcPts val="0"/>
+              </a:spcBef>
+              <a:spcAft>
+                <a:spcPts val="0"/>
+              </a:spcAft>
+              <a:buNone/>
+            </a:pPr>
+            <a:r>
+              <a:rPr lang="en" sz="1000">
+                <a:highlight>
+                  <a:schemeClr val="dk2"/>
+                </a:highlight>
+                <a:latin typeface="Consolas"/>
+                <a:ea typeface="Consolas"/>
+                <a:cs typeface="Consolas"/>
+                <a:sym typeface="Consolas"/>
+              </a:rPr>
+              <a:t>        plant.Add(new SunProducer(</a:t>
+            </a:r>
+            <a:endParaRPr sz="1000">
+              <a:solidFill>
+                <a:srgbClr val="CCCCCC"/>
+              </a:solidFill>
+              <a:highlight>
+                <a:schemeClr val="dk2"/>
+              </a:highlight>
+              <a:latin typeface="Consolas"/>
+              <a:ea typeface="Consolas"/>
+              <a:cs typeface="Consolas"/>
+              <a:sym typeface="Consolas"/>
+            </a:endParaRPr>
+          </a:p>
+          <a:p>
+            <a:pPr indent="0" lvl="0" marL="0" rtl="0" algn="l">
+              <a:lnSpc>
+                <a:spcPct val="115000"/>
+              </a:lnSpc>
+              <a:spcBef>
+                <a:spcPts val="0"/>
+              </a:spcBef>
+              <a:spcAft>
+                <a:spcPts val="0"/>
+              </a:spcAft>
+              <a:buNone/>
+            </a:pPr>
+            <a:r>
+              <a:rPr lang="en" sz="1000">
+                <a:highlight>
+                  <a:schemeClr val="dk2"/>
+                </a:highlight>
+                <a:latin typeface="Consolas"/>
+                <a:ea typeface="Consolas"/>
+                <a:cs typeface="Consolas"/>
+                <a:sym typeface="Consolas"/>
+              </a:rPr>
+              <a:t>            SunProducer.Interval, SunProducer.Amount));</a:t>
+            </a:r>
+            <a:endParaRPr sz="1000">
+              <a:solidFill>
+                <a:srgbClr val="CCCCCC"/>
+              </a:solidFill>
+              <a:highlight>
+                <a:schemeClr val="dk2"/>
+              </a:highlight>
+              <a:latin typeface="Consolas"/>
+              <a:ea typeface="Consolas"/>
+              <a:cs typeface="Consolas"/>
+              <a:sym typeface="Consolas"/>
+            </a:endParaRPr>
+          </a:p>
+          <a:p>
+            <a:pPr indent="0" lvl="0" marL="0" rtl="0" algn="l">
+              <a:lnSpc>
+                <a:spcPct val="115000"/>
+              </a:lnSpc>
+              <a:spcBef>
+                <a:spcPts val="0"/>
+              </a:spcBef>
+              <a:spcAft>
+                <a:spcPts val="0"/>
+              </a:spcAft>
+              <a:buNone/>
+            </a:pPr>
+            <a:r>
+              <a:rPr lang="en" sz="1000">
+                <a:highlight>
+                  <a:schemeClr val="dk2"/>
+                </a:highlight>
+                <a:latin typeface="Consolas"/>
+                <a:ea typeface="Consolas"/>
+                <a:cs typeface="Consolas"/>
+                <a:sym typeface="Consolas"/>
+              </a:rPr>
+              <a:t>    return plant;</a:t>
+            </a:r>
+            <a:endParaRPr sz="1000">
+              <a:solidFill>
+                <a:srgbClr val="CCCCCC"/>
+              </a:solidFill>
+              <a:highlight>
+                <a:schemeClr val="dk2"/>
+              </a:highlight>
+              <a:latin typeface="Consolas"/>
+              <a:ea typeface="Consolas"/>
+              <a:cs typeface="Consolas"/>
+              <a:sym typeface="Consolas"/>
+            </a:endParaRPr>
+          </a:p>
+          <a:p>
+            <a:pPr indent="0" lvl="0" marL="0" rtl="0" algn="l">
+              <a:lnSpc>
+                <a:spcPct val="115000"/>
+              </a:lnSpc>
+              <a:spcBef>
+                <a:spcPts val="0"/>
+              </a:spcBef>
+              <a:spcAft>
+                <a:spcPts val="0"/>
+              </a:spcAft>
+              <a:buNone/>
+            </a:pPr>
+            <a:r>
+              <a:rPr lang="en" sz="1000">
+                <a:highlight>
+                  <a:schemeClr val="dk2"/>
+                </a:highlight>
+                <a:latin typeface="Consolas"/>
+                <a:ea typeface="Consolas"/>
+                <a:cs typeface="Consolas"/>
+                <a:sym typeface="Consolas"/>
+              </a:rPr>
+              <a:t>}</a:t>
+            </a:r>
+            <a:endParaRPr sz="1000">
+              <a:solidFill>
+                <a:srgbClr val="CCCCCC"/>
+              </a:solidFill>
+              <a:highlight>
+                <a:schemeClr val="dk2"/>
+              </a:highlight>
+              <a:latin typeface="Consolas"/>
+              <a:ea typeface="Consolas"/>
+              <a:cs typeface="Consolas"/>
+              <a:sym typeface="Consolas"/>
+            </a:endParaRPr>
+          </a:p>
         </p:txBody>
       </p:sp>
     </p:spTree>
@@ -10859,7 +11370,7 @@
 </p:sld>
 </file>
 
-<file path=ppt/slides/slide18.xml><?xml version="1.0" encoding="utf-8"?>
+<file path=ppt/slides/slide19.xml><?xml version="1.0" encoding="utf-8"?>
 <p:sld xmlns:a="http://schemas.openxmlformats.org/drawingml/2006/main" xmlns:p="http://schemas.openxmlformats.org/presentationml/2006/main" xmlns:r="http://schemas.openxmlformats.org/officeDocument/2006/relationships">
   <p:cSld>
     <p:spTree>
@@ -11176,7 +11687,120 @@
 </p:sld>
 </file>
 
-<file path=ppt/slides/slide19.xml><?xml version="1.0" encoding="utf-8"?>
+<file path=ppt/slides/slide2.xml><?xml version="1.0" encoding="utf-8"?>
+<p:sld xmlns:a="http://schemas.openxmlformats.org/drawingml/2006/main" xmlns:p="http://schemas.openxmlformats.org/presentationml/2006/main" xmlns:r="http://schemas.openxmlformats.org/officeDocument/2006/relationships">
+  <p:cSld>
+    <p:spTree>
+      <p:nvGrpSpPr>
+        <p:cNvPr id="1" name=""/>
+        <p:cNvGrpSpPr/>
+        <p:nvPr/>
+      </p:nvGrpSpPr>
+      <p:grpSpPr/>
+      <p:sp>
+        <p:nvSpPr>
+          <p:cNvPr id="2" name="Title 1"/>
+          <p:cNvSpPr>
+            <a:spLocks noGrp="1"/>
+          </p:cNvSpPr>
+          <p:nvPr>
+            <p:ph type="title"/>
+          </p:nvPr>
+        </p:nvSpPr>
+        <p:spPr>
+          <a:xfrm>
+            <a:off x="311700" y="195615"/>
+            <a:ext cx="8520600" cy="572700"/>
+          </a:xfrm>
+        </p:spPr>
+        <p:txBody>
+          <a:bodyPr/>
+          <a:lstStyle/>
+          <a:p>
+            <a:pPr indent="0" lvl="0" marL="0" rtl="0" algn="l">
+              <a:spcBef>
+                <a:spcPts val="0"/>
+              </a:spcBef>
+              <a:spcAft>
+                <a:spcPts val="0"/>
+              </a:spcAft>
+              <a:buNone/>
+            </a:pPr>
+            <a:r>
+              <a:rPr lang="en"/>
+              <a:t>Plants vs. Zombies</a:t>
+            </a:r>
+            <a:endParaRPr/>
+          </a:p>
+        </p:txBody>
+      </p:sp>
+      <p:pic>
+        <p:nvPicPr>
+          <p:cNvPr id="3" name="Picture 2" descr="plants-vs-zombies.png"/>
+          <p:cNvPicPr>
+            <a:picLocks noChangeAspect="1"/>
+          </p:cNvPicPr>
+          <p:nvPr/>
+        </p:nvPicPr>
+        <p:blipFill>
+          <a:blip r:embed="rId2"/>
+          <a:stretch>
+            <a:fillRect/>
+          </a:stretch>
+        </p:blipFill>
+        <p:spPr>
+          <a:xfrm>
+            <a:off x="2117912" y="960120"/>
+            <a:ext cx="4908176" cy="3657600"/>
+          </a:xfrm>
+          <a:prstGeom prst="rect">
+            <a:avLst/>
+          </a:prstGeom>
+        </p:spPr>
+      </p:pic>
+      <p:sp>
+        <p:nvSpPr>
+          <p:cNvPr id="4" name="TextBox 3"/>
+          <p:cNvSpPr txBox="1"/>
+          <p:nvPr/>
+        </p:nvSpPr>
+        <p:spPr>
+          <a:xfrm>
+            <a:off x="457200" y="4736592"/>
+            <a:ext cx="8229600" cy="274320"/>
+          </a:xfrm>
+          <a:prstGeom prst="rect">
+            <a:avLst/>
+          </a:prstGeom>
+          <a:noFill/>
+        </p:spPr>
+        <p:txBody>
+          <a:bodyPr wrap="square">
+            <a:spAutoFit/>
+          </a:bodyPr>
+          <a:lstStyle/>
+          <a:p>
+            <a:pPr algn="ctr"/>
+            <a:r>
+              <a:rPr sz="900" b="0" i="0">
+                <a:solidFill>
+                  <a:srgbClr val="9AA3AB"/>
+                </a:solidFill>
+              </a:rPr>
+              <a:t>Plants vs. Zombies (PopCap Games, 2009). Screenshot © PopCap Games.</a:t>
+            </a:r>
+          </a:p>
+        </p:txBody>
+      </p:sp>
+    </p:spTree>
+  </p:cSld>
+  <p:clrMapOvr>
+    <a:masterClrMapping/>
+  </p:clrMapOvr>
+</p:sld>
+</file>
+
+<file path=ppt/slides/slide20.xml><?xml version="1.0" encoding="utf-8"?>
 <p:sld xmlns:a="http://schemas.openxmlformats.org/drawingml/2006/main" xmlns:p="http://schemas.openxmlformats.org/presentationml/2006/main" xmlns:r="http://schemas.openxmlformats.org/officeDocument/2006/relationships">
   <p:cSld>
     <p:spTree>
@@ -11303,96 +11927,7 @@
 </p:sld>
 </file>
 
-<file path=ppt/slides/slide2.xml><?xml version="1.0" encoding="utf-8"?>
-<p:sld xmlns:a="http://schemas.openxmlformats.org/drawingml/2006/main" xmlns:r="http://schemas.openxmlformats.org/officeDocument/2006/relationships" xmlns:mc="http://schemas.openxmlformats.org/markup-compatibility/2006" xmlns:mv="urn:schemas-microsoft-com:mac:vml" xmlns:p="http://schemas.openxmlformats.org/presentationml/2006/main" xmlns:c="http://schemas.openxmlformats.org/drawingml/2006/chart" xmlns:dgm="http://schemas.openxmlformats.org/drawingml/2006/diagram" xmlns:o="urn:schemas-microsoft-com:office:office" xmlns:v="urn:schemas-microsoft-com:vml" xmlns:pvml="urn:schemas-microsoft-com:office:powerpoint" xmlns:com="http://schemas.openxmlformats.org/drawingml/2006/compatibility" xmlns:p14="http://schemas.microsoft.com/office/powerpoint/2010/main" xmlns:p15="http://schemas.microsoft.com/office/powerpoint/2012/main" xmlns:ahyp="http://schemas.microsoft.com/office/drawing/2018/hyperlinkcolor">
-  <p:cSld>
-    <p:spTree>
-      <p:nvGrpSpPr>
-        <p:cNvPr id="44" name="Shape 44"/>
-        <p:cNvGrpSpPr/>
-        <p:nvPr/>
-      </p:nvGrpSpPr>
-      <p:grpSpPr>
-        <a:xfrm>
-          <a:off x="0" y="0"/>
-          <a:ext cx="0" cy="0"/>
-          <a:chOff x="0" y="0"/>
-          <a:chExt cx="0" cy="0"/>
-        </a:xfrm>
-      </p:grpSpPr>
-      <p:sp>
-        <p:nvSpPr>
-          <p:cNvPr id="45" name="Google Shape;45;p10"/>
-          <p:cNvSpPr txBox="1"/>
-          <p:nvPr>
-            <p:ph type="title"/>
-          </p:nvPr>
-        </p:nvSpPr>
-        <p:spPr>
-          <a:xfrm>
-            <a:off x="311700" y="195615"/>
-            <a:ext cx="8520600" cy="572700"/>
-          </a:xfrm>
-          <a:prstGeom prst="rect">
-            <a:avLst/>
-          </a:prstGeom>
-        </p:spPr>
-        <p:txBody>
-          <a:bodyPr anchorCtr="0" anchor="t" bIns="91425" lIns="91425" spcFirstLastPara="1" rIns="91425" wrap="square" tIns="91425">
-            <a:normAutofit fontScale="90000"/>
-          </a:bodyPr>
-          <a:lstStyle/>
-          <a:p>
-            <a:pPr indent="0" lvl="0" marL="0" rtl="0" algn="l">
-              <a:spcBef>
-                <a:spcPts val="0"/>
-              </a:spcBef>
-              <a:spcAft>
-                <a:spcPts val="0"/>
-              </a:spcAft>
-              <a:buNone/>
-            </a:pPr>
-            <a:r>
-              <a:rPr lang="en"/>
-              <a:t>Today’s Goal</a:t>
-            </a:r>
-            <a:endParaRPr/>
-          </a:p>
-        </p:txBody>
-      </p:sp>
-      <p:pic>
-        <p:nvPicPr>
-          <p:cNvPr id="46" name="Picture 46" descr="pvz-play2.png"/>
-          <p:cNvPicPr>
-            <a:picLocks noChangeAspect="1"/>
-          </p:cNvPicPr>
-          <p:nvPr/>
-        </p:nvPicPr>
-        <p:blipFill>
-          <a:blip r:embed="rId4"/>
-          <a:stretch>
-            <a:fillRect/>
-          </a:stretch>
-        </p:blipFill>
-        <p:spPr>
-          <a:xfrm>
-            <a:off x="1677201" y="1531275"/>
-            <a:ext cx="5789598" cy="3256648"/>
-          </a:xfrm>
-          <a:prstGeom prst="rect">
-            <a:avLst/>
-          </a:prstGeom>
-        </p:spPr>
-      </p:pic>
-    </p:spTree>
-  </p:cSld>
-  <p:clrMapOvr>
-    <a:masterClrMapping/>
-  </p:clrMapOvr>
-</p:sld>
-</file>
-
-<file path=ppt/slides/slide20.xml><?xml version="1.0" encoding="utf-8"?>
+<file path=ppt/slides/slide21.xml><?xml version="1.0" encoding="utf-8"?>
 <p:sld xmlns:a="http://schemas.openxmlformats.org/drawingml/2006/main" xmlns:p="http://schemas.openxmlformats.org/presentationml/2006/main" xmlns:r="http://schemas.openxmlformats.org/officeDocument/2006/relationships">
   <p:cSld>
     <p:spTree>
@@ -11567,7 +12102,7 @@
 </p:sld>
 </file>
 
-<file path=ppt/slides/slide21.xml><?xml version="1.0" encoding="utf-8"?>
+<file path=ppt/slides/slide22.xml><?xml version="1.0" encoding="utf-8"?>
 <p:sld xmlns:a="http://schemas.openxmlformats.org/drawingml/2006/main" xmlns:r="http://schemas.openxmlformats.org/officeDocument/2006/relationships" xmlns:mc="http://schemas.openxmlformats.org/markup-compatibility/2006" xmlns:mv="urn:schemas-microsoft-com:mac:vml" xmlns:p="http://schemas.openxmlformats.org/presentationml/2006/main" xmlns:c="http://schemas.openxmlformats.org/drawingml/2006/chart" xmlns:dgm="http://schemas.openxmlformats.org/drawingml/2006/diagram" xmlns:o="urn:schemas-microsoft-com:office:office" xmlns:v="urn:schemas-microsoft-com:vml" xmlns:pvml="urn:schemas-microsoft-com:office:powerpoint" xmlns:com="http://schemas.openxmlformats.org/drawingml/2006/compatibility" xmlns:p14="http://schemas.microsoft.com/office/powerpoint/2010/main" xmlns:p15="http://schemas.microsoft.com/office/powerpoint/2012/main" xmlns:ahyp="http://schemas.microsoft.com/office/drawing/2018/hyperlinkcolor">
   <p:cSld>
     <p:spTree>
@@ -11698,872 +12233,6 @@
   <p:clrMapOvr>
     <a:masterClrMapping/>
   </p:clrMapOvr>
-</p:sld>
-</file>
-
-<file path=ppt/slides/slide22.xml><?xml version="1.0" encoding="utf-8"?>
-<p:sld xmlns:a="http://schemas.openxmlformats.org/drawingml/2006/main" xmlns:r="http://schemas.openxmlformats.org/officeDocument/2006/relationships" xmlns:mc="http://schemas.openxmlformats.org/markup-compatibility/2006" xmlns:mv="urn:schemas-microsoft-com:mac:vml" xmlns:p="http://schemas.openxmlformats.org/presentationml/2006/main" xmlns:c="http://schemas.openxmlformats.org/drawingml/2006/chart" xmlns:dgm="http://schemas.openxmlformats.org/drawingml/2006/diagram" xmlns:o="urn:schemas-microsoft-com:office:office" xmlns:v="urn:schemas-microsoft-com:vml" xmlns:pvml="urn:schemas-microsoft-com:office:powerpoint" xmlns:com="http://schemas.openxmlformats.org/drawingml/2006/compatibility" xmlns:p14="http://schemas.microsoft.com/office/powerpoint/2010/main" xmlns:p15="http://schemas.microsoft.com/office/powerpoint/2012/main" xmlns:ahyp="http://schemas.microsoft.com/office/drawing/2018/hyperlinkcolor">
-  <p:cSld>
-    <p:spTree>
-      <p:nvGrpSpPr>
-        <p:cNvPr id="292" name="Shape 292"/>
-        <p:cNvGrpSpPr/>
-        <p:nvPr/>
-      </p:nvGrpSpPr>
-      <p:grpSpPr>
-        <a:xfrm>
-          <a:off x="0" y="0"/>
-          <a:ext cx="0" cy="0"/>
-          <a:chOff x="0" y="0"/>
-          <a:chExt cx="0" cy="0"/>
-        </a:xfrm>
-      </p:grpSpPr>
-      <p:sp>
-        <p:nvSpPr>
-          <p:cNvPr id="293" name="Google Shape;293;p45"/>
-          <p:cNvSpPr txBox="1"/>
-          <p:nvPr>
-            <p:ph type="title"/>
-          </p:nvPr>
-        </p:nvSpPr>
-        <p:spPr>
-          <a:xfrm>
-            <a:off x="311700" y="195615"/>
-            <a:ext cx="8520600" cy="572700"/>
-          </a:xfrm>
-          <a:prstGeom prst="rect">
-            <a:avLst/>
-          </a:prstGeom>
-        </p:spPr>
-        <p:txBody>
-          <a:bodyPr anchorCtr="0" anchor="t" bIns="91425" lIns="91425" spcFirstLastPara="1" rIns="91425" wrap="square" tIns="91425">
-            <a:normAutofit fontScale="90000"/>
-          </a:bodyPr>
-          <a:lstStyle/>
-          <a:p>
-            <a:pPr indent="0" lvl="0" marL="0" rtl="0" algn="l">
-              <a:spcBef>
-                <a:spcPts val="0"/>
-              </a:spcBef>
-              <a:spcAft>
-                <a:spcPts val="0"/>
-              </a:spcAft>
-              <a:buNone/>
-            </a:pPr>
-            <a:r>
-              <a:rPr lang="en">
-                <a:solidFill>
-                  <a:schemeClr val="accent5"/>
-                </a:solidFill>
-              </a:rPr>
-              <a:t>Exercises</a:t>
-            </a:r>
-            <a:endParaRPr>
-              <a:solidFill>
-                <a:schemeClr val="accent5"/>
-              </a:solidFill>
-            </a:endParaRPr>
-          </a:p>
-        </p:txBody>
-      </p:sp>
-      <p:sp>
-        <p:nvSpPr>
-          <p:cNvPr id="294" name="Google Shape;294;p45"/>
-          <p:cNvSpPr txBox="1"/>
-          <p:nvPr>
-            <p:ph idx="1" type="body"/>
-          </p:nvPr>
-        </p:nvSpPr>
-        <p:spPr>
-          <a:xfrm>
-            <a:off x="311700" y="885950"/>
-            <a:ext cx="8520600" cy="4023300"/>
-          </a:xfrm>
-          <a:prstGeom prst="rect">
-            <a:avLst/>
-          </a:prstGeom>
-        </p:spPr>
-        <p:txBody>
-          <a:bodyPr anchorCtr="0" anchor="t" bIns="91425" lIns="91425" spcFirstLastPara="1" rIns="91425" wrap="square" tIns="91425">
-            <a:normAutofit/>
-          </a:bodyPr>
-          <a:lstStyle/>
-          <a:p>
-            <a:pPr indent="-330200" lvl="0" marL="457200" rtl="0" algn="l">
-              <a:spcBef>
-                <a:spcPts val="0"/>
-              </a:spcBef>
-              <a:spcAft>
-                <a:spcPts val="0"/>
-              </a:spcAft>
-              <a:buSzPts val="1600"/>
-              <a:buChar char="●"/>
-            </a:pPr>
-            <a:r>
-              <a:rPr lang="en"/>
-              <a:t>Start from Pvz4, the finished game</a:t>
-            </a:r>
-            <a:endParaRPr/>
-          </a:p>
-          <a:p>
-            <a:pPr indent="-330200" lvl="0" marL="457200" rtl="0" algn="l">
-              <a:spcBef>
-                <a:spcPts val="0"/>
-              </a:spcBef>
-              <a:spcAft>
-                <a:spcPts val="0"/>
-              </a:spcAft>
-              <a:buSzPts val="1600"/>
-              <a:buChar char="●"/>
-            </a:pPr>
-            <a:r>
-              <a:rPr lang="en"/>
-              <a:t>New types: a Tall-nut and a Flag Zombie. Any code?</a:t>
-            </a:r>
-            <a:endParaRPr/>
-          </a:p>
-          <a:p>
-            <a:pPr indent="-330200" lvl="0" marL="457200" rtl="0" algn="l">
-              <a:spcBef>
-                <a:spcPts val="0"/>
-              </a:spcBef>
-              <a:spcAft>
-                <a:spcPts val="0"/>
-              </a:spcAft>
-              <a:buSzPts val="1600"/>
-              <a:buChar char="●"/>
-            </a:pPr>
-            <a:r>
-              <a:rPr lang="en"/>
-              <a:t>Snow Pea: peas that slow zombies down</a:t>
-            </a:r>
-            <a:endParaRPr/>
-          </a:p>
-          <a:p>
-            <a:pPr indent="-317500" lvl="1" marL="914400" rtl="0" algn="l">
-              <a:spcBef>
-                <a:spcPts val="0"/>
-              </a:spcBef>
-              <a:spcAft>
-                <a:spcPts val="0"/>
-              </a:spcAft>
-              <a:buSzPts val="1400"/>
-              <a:buChar char="○"/>
-            </a:pPr>
-            <a:r>
-              <a:rPr lang="en"/>
-              <a:t>Which component, where, and how does the data say so?</a:t>
-            </a:r>
-            <a:endParaRPr/>
-          </a:p>
-          <a:p>
-            <a:pPr indent="-330200" lvl="0" marL="457200" rtl="0" algn="l">
-              <a:spcBef>
-                <a:spcPts val="0"/>
-              </a:spcBef>
-              <a:spcAft>
-                <a:spcPts val="0"/>
-              </a:spcAft>
-              <a:buSzPts val="1600"/>
-              <a:buChar char="●"/>
-            </a:pPr>
-            <a:r>
-              <a:rPr lang="en"/>
-              <a:t>Pumpkin: armour for plants. Can you reuse Armour?</a:t>
-            </a:r>
-            <a:endParaRPr/>
-          </a:p>
-          <a:p>
-            <a:pPr indent="-330200" lvl="0" marL="457200" rtl="0" algn="l">
-              <a:spcBef>
-                <a:spcPts val="0"/>
-              </a:spcBef>
-              <a:spcAft>
-                <a:spcPts val="0"/>
-              </a:spcAft>
-              <a:buSzPts val="1600"/>
-              <a:buChar char="●"/>
-            </a:pPr>
-            <a:r>
-              <a:rPr lang="en"/>
-              <a:t>A shovel that removes the plant you click</a:t>
-            </a:r>
-            <a:endParaRPr/>
-          </a:p>
-        </p:txBody>
-      </p:sp>
-    </p:spTree>
-  </p:cSld>
-  <p:clrMapOvr>
-    <a:masterClrMapping/>
-  </p:clrMapOvr>
-  <p:timing>
-    <p:tnLst>
-      <p:par>
-        <p:cTn dur="indefinite" nodeType="tmRoot" restart="never">
-          <p:childTnLst>
-            <p:seq concurrent="1" nextAc="seek">
-              <p:cTn dur="indefinite" id="2" nodeType="mainSeq">
-                <p:childTnLst>
-                  <p:par>
-                    <p:cTn fill="hold">
-                      <p:stCondLst>
-                        <p:cond delay="indefinite"/>
-                      </p:stCondLst>
-                      <p:childTnLst>
-                        <p:par>
-                          <p:cTn fill="hold">
-                            <p:stCondLst>
-                              <p:cond delay="0"/>
-                            </p:stCondLst>
-                            <p:childTnLst>
-                              <p:par>
-                                <p:cTn fill="hold" nodeType="clickEffect" presetClass="entr" presetID="1" presetSubtype="0">
-                                  <p:stCondLst>
-                                    <p:cond delay="0"/>
-                                  </p:stCondLst>
-                                  <p:childTnLst>
-                                    <p:set>
-                                      <p:cBhvr>
-                                        <p:cTn dur="1" fill="hold">
-                                          <p:stCondLst>
-                                            <p:cond delay="0"/>
-                                          </p:stCondLst>
-                                        </p:cTn>
-                                        <p:tgtEl>
-                                          <p:spTgt spid="294">
-                                            <p:txEl>
-                                              <p:pRg end="0" st="0"/>
-                                            </p:txEl>
-                                          </p:spTgt>
-                                        </p:tgtEl>
-                                        <p:attrNameLst>
-                                          <p:attrName>style.visibility</p:attrName>
-                                        </p:attrNameLst>
-                                      </p:cBhvr>
-                                      <p:to>
-                                        <p:strVal val="visible"/>
-                                      </p:to>
-                                    </p:set>
-                                  </p:childTnLst>
-                                </p:cTn>
-                              </p:par>
-                            </p:childTnLst>
-                          </p:cTn>
-                        </p:par>
-                      </p:childTnLst>
-                    </p:cTn>
-                  </p:par>
-                  <p:par>
-                    <p:cTn fill="hold">
-                      <p:stCondLst>
-                        <p:cond delay="indefinite"/>
-                      </p:stCondLst>
-                      <p:childTnLst>
-                        <p:par>
-                          <p:cTn fill="hold">
-                            <p:stCondLst>
-                              <p:cond delay="0"/>
-                            </p:stCondLst>
-                            <p:childTnLst>
-                              <p:par>
-                                <p:cTn fill="hold" nodeType="clickEffect" presetClass="entr" presetID="1" presetSubtype="0">
-                                  <p:stCondLst>
-                                    <p:cond delay="0"/>
-                                  </p:stCondLst>
-                                  <p:childTnLst>
-                                    <p:set>
-                                      <p:cBhvr>
-                                        <p:cTn dur="1" fill="hold">
-                                          <p:stCondLst>
-                                            <p:cond delay="0"/>
-                                          </p:stCondLst>
-                                        </p:cTn>
-                                        <p:tgtEl>
-                                          <p:spTgt spid="294">
-                                            <p:txEl>
-                                              <p:pRg end="1" st="1"/>
-                                            </p:txEl>
-                                          </p:spTgt>
-                                        </p:tgtEl>
-                                        <p:attrNameLst>
-                                          <p:attrName>style.visibility</p:attrName>
-                                        </p:attrNameLst>
-                                      </p:cBhvr>
-                                      <p:to>
-                                        <p:strVal val="visible"/>
-                                      </p:to>
-                                    </p:set>
-                                  </p:childTnLst>
-                                </p:cTn>
-                              </p:par>
-                            </p:childTnLst>
-                          </p:cTn>
-                        </p:par>
-                      </p:childTnLst>
-                    </p:cTn>
-                  </p:par>
-                  <p:par>
-                    <p:cTn fill="hold">
-                      <p:stCondLst>
-                        <p:cond delay="indefinite"/>
-                      </p:stCondLst>
-                      <p:childTnLst>
-                        <p:par>
-                          <p:cTn fill="hold">
-                            <p:stCondLst>
-                              <p:cond delay="0"/>
-                            </p:stCondLst>
-                            <p:childTnLst>
-                              <p:par>
-                                <p:cTn fill="hold" nodeType="clickEffect" presetClass="entr" presetID="1" presetSubtype="0">
-                                  <p:stCondLst>
-                                    <p:cond delay="0"/>
-                                  </p:stCondLst>
-                                  <p:childTnLst>
-                                    <p:set>
-                                      <p:cBhvr>
-                                        <p:cTn dur="1" fill="hold">
-                                          <p:stCondLst>
-                                            <p:cond delay="0"/>
-                                          </p:stCondLst>
-                                        </p:cTn>
-                                        <p:tgtEl>
-                                          <p:spTgt spid="294">
-                                            <p:txEl>
-                                              <p:pRg end="2" st="2"/>
-                                            </p:txEl>
-                                          </p:spTgt>
-                                        </p:tgtEl>
-                                        <p:attrNameLst>
-                                          <p:attrName>style.visibility</p:attrName>
-                                        </p:attrNameLst>
-                                      </p:cBhvr>
-                                      <p:to>
-                                        <p:strVal val="visible"/>
-                                      </p:to>
-                                    </p:set>
-                                  </p:childTnLst>
-                                </p:cTn>
-                              </p:par>
-                            </p:childTnLst>
-                          </p:cTn>
-                        </p:par>
-                      </p:childTnLst>
-                    </p:cTn>
-                  </p:par>
-                  <p:par>
-                    <p:cTn fill="hold">
-                      <p:stCondLst>
-                        <p:cond delay="indefinite"/>
-                      </p:stCondLst>
-                      <p:childTnLst>
-                        <p:par>
-                          <p:cTn fill="hold">
-                            <p:stCondLst>
-                              <p:cond delay="0"/>
-                            </p:stCondLst>
-                            <p:childTnLst>
-                              <p:par>
-                                <p:cTn fill="hold" nodeType="clickEffect" presetClass="entr" presetID="1" presetSubtype="0">
-                                  <p:stCondLst>
-                                    <p:cond delay="0"/>
-                                  </p:stCondLst>
-                                  <p:childTnLst>
-                                    <p:set>
-                                      <p:cBhvr>
-                                        <p:cTn dur="1" fill="hold">
-                                          <p:stCondLst>
-                                            <p:cond delay="0"/>
-                                          </p:stCondLst>
-                                        </p:cTn>
-                                        <p:tgtEl>
-                                          <p:spTgt spid="294">
-                                            <p:txEl>
-                                              <p:pRg end="3" st="3"/>
-                                            </p:txEl>
-                                          </p:spTgt>
-                                        </p:tgtEl>
-                                        <p:attrNameLst>
-                                          <p:attrName>style.visibility</p:attrName>
-                                        </p:attrNameLst>
-                                      </p:cBhvr>
-                                      <p:to>
-                                        <p:strVal val="visible"/>
-                                      </p:to>
-                                    </p:set>
-                                  </p:childTnLst>
-                                </p:cTn>
-                              </p:par>
-                            </p:childTnLst>
-                          </p:cTn>
-                        </p:par>
-                      </p:childTnLst>
-                    </p:cTn>
-                  </p:par>
-                  <p:par>
-                    <p:cTn fill="hold">
-                      <p:stCondLst>
-                        <p:cond delay="indefinite"/>
-                      </p:stCondLst>
-                      <p:childTnLst>
-                        <p:par>
-                          <p:cTn fill="hold">
-                            <p:stCondLst>
-                              <p:cond delay="0"/>
-                            </p:stCondLst>
-                            <p:childTnLst>
-                              <p:par>
-                                <p:cTn fill="hold" nodeType="clickEffect" presetClass="entr" presetID="1" presetSubtype="0">
-                                  <p:stCondLst>
-                                    <p:cond delay="0"/>
-                                  </p:stCondLst>
-                                  <p:childTnLst>
-                                    <p:set>
-                                      <p:cBhvr>
-                                        <p:cTn dur="1" fill="hold">
-                                          <p:stCondLst>
-                                            <p:cond delay="0"/>
-                                          </p:stCondLst>
-                                        </p:cTn>
-                                        <p:tgtEl>
-                                          <p:spTgt spid="294">
-                                            <p:txEl>
-                                              <p:pRg end="4" st="4"/>
-                                            </p:txEl>
-                                          </p:spTgt>
-                                        </p:tgtEl>
-                                        <p:attrNameLst>
-                                          <p:attrName>style.visibility</p:attrName>
-                                        </p:attrNameLst>
-                                      </p:cBhvr>
-                                      <p:to>
-                                        <p:strVal val="visible"/>
-                                      </p:to>
-                                    </p:set>
-                                  </p:childTnLst>
-                                </p:cTn>
-                              </p:par>
-                            </p:childTnLst>
-                          </p:cTn>
-                        </p:par>
-                      </p:childTnLst>
-                    </p:cTn>
-                  </p:par>
-                  <p:par>
-                    <p:cTn fill="hold">
-                      <p:stCondLst>
-                        <p:cond delay="indefinite"/>
-                      </p:stCondLst>
-                      <p:childTnLst>
-                        <p:par>
-                          <p:cTn fill="hold">
-                            <p:stCondLst>
-                              <p:cond delay="0"/>
-                            </p:stCondLst>
-                            <p:childTnLst>
-                              <p:par>
-                                <p:cTn fill="hold" nodeType="clickEffect" presetClass="entr" presetID="1" presetSubtype="0">
-                                  <p:stCondLst>
-                                    <p:cond delay="0"/>
-                                  </p:stCondLst>
-                                  <p:childTnLst>
-                                    <p:set>
-                                      <p:cBhvr>
-                                        <p:cTn dur="1" fill="hold">
-                                          <p:stCondLst>
-                                            <p:cond delay="0"/>
-                                          </p:stCondLst>
-                                        </p:cTn>
-                                        <p:tgtEl>
-                                          <p:spTgt spid="294">
-                                            <p:txEl>
-                                              <p:pRg end="5" st="5"/>
-                                            </p:txEl>
-                                          </p:spTgt>
-                                        </p:tgtEl>
-                                        <p:attrNameLst>
-                                          <p:attrName>style.visibility</p:attrName>
-                                        </p:attrNameLst>
-                                      </p:cBhvr>
-                                      <p:to>
-                                        <p:strVal val="visible"/>
-                                      </p:to>
-                                    </p:set>
-                                  </p:childTnLst>
-                                </p:cTn>
-                              </p:par>
-                            </p:childTnLst>
-                          </p:cTn>
-                        </p:par>
-                      </p:childTnLst>
-                    </p:cTn>
-                  </p:par>
-                  <p:par>
-                    <p:cTn fill="hold">
-                      <p:stCondLst>
-                        <p:cond delay="indefinite"/>
-                      </p:stCondLst>
-                      <p:childTnLst>
-                        <p:par>
-                          <p:cTn fill="hold">
-                            <p:stCondLst>
-                              <p:cond delay="0"/>
-                            </p:stCondLst>
-                            <p:childTnLst>
-                              <p:par>
-                                <p:cTn fill="hold" nodeType="clickEffect" presetClass="entr" presetID="1" presetSubtype="0">
-                                  <p:stCondLst>
-                                    <p:cond delay="0"/>
-                                  </p:stCondLst>
-                                  <p:childTnLst>
-                                    <p:set>
-                                      <p:cBhvr>
-                                        <p:cTn dur="1" fill="hold">
-                                          <p:stCondLst>
-                                            <p:cond delay="0"/>
-                                          </p:stCondLst>
-                                        </p:cTn>
-                                        <p:tgtEl>
-                                          <p:spTgt spid="294">
-                                            <p:txEl>
-                                              <p:pRg end="6" st="6"/>
-                                            </p:txEl>
-                                          </p:spTgt>
-                                        </p:tgtEl>
-                                        <p:attrNameLst>
-                                          <p:attrName>style.visibility</p:attrName>
-                                        </p:attrNameLst>
-                                      </p:cBhvr>
-                                      <p:to>
-                                        <p:strVal val="visible"/>
-                                      </p:to>
-                                    </p:set>
-                                  </p:childTnLst>
-                                </p:cTn>
-                              </p:par>
-                            </p:childTnLst>
-                          </p:cTn>
-                        </p:par>
-                      </p:childTnLst>
-                    </p:cTn>
-                  </p:par>
-                  <p:par>
-                    <p:cTn fill="hold">
-                      <p:stCondLst>
-                        <p:cond delay="indefinite"/>
-                      </p:stCondLst>
-                      <p:childTnLst>
-                        <p:par>
-                          <p:cTn fill="hold">
-                            <p:stCondLst>
-                              <p:cond delay="0"/>
-                            </p:stCondLst>
-                            <p:childTnLst>
-                              <p:par>
-                                <p:cTn fill="hold" nodeType="clickEffect" presetClass="entr" presetID="1" presetSubtype="0">
-                                  <p:stCondLst>
-                                    <p:cond delay="0"/>
-                                  </p:stCondLst>
-                                  <p:childTnLst>
-                                    <p:set>
-                                      <p:cBhvr>
-                                        <p:cTn dur="1" fill="hold">
-                                          <p:stCondLst>
-                                            <p:cond delay="0"/>
-                                          </p:stCondLst>
-                                        </p:cTn>
-                                        <p:tgtEl>
-                                          <p:spTgt spid="294">
-                                            <p:txEl>
-                                              <p:pRg end="7" st="7"/>
-                                            </p:txEl>
-                                          </p:spTgt>
-                                        </p:tgtEl>
-                                        <p:attrNameLst>
-                                          <p:attrName>style.visibility</p:attrName>
-                                        </p:attrNameLst>
-                                      </p:cBhvr>
-                                      <p:to>
-                                        <p:strVal val="visible"/>
-                                      </p:to>
-                                    </p:set>
-                                  </p:childTnLst>
-                                </p:cTn>
-                              </p:par>
-                            </p:childTnLst>
-                          </p:cTn>
-                        </p:par>
-                      </p:childTnLst>
-                    </p:cTn>
-                  </p:par>
-                  <p:par>
-                    <p:cTn fill="hold">
-                      <p:stCondLst>
-                        <p:cond delay="indefinite"/>
-                      </p:stCondLst>
-                      <p:childTnLst>
-                        <p:par>
-                          <p:cTn fill="hold">
-                            <p:stCondLst>
-                              <p:cond delay="0"/>
-                            </p:stCondLst>
-                            <p:childTnLst>
-                              <p:par>
-                                <p:cTn fill="hold" nodeType="clickEffect" presetClass="entr" presetID="1" presetSubtype="0">
-                                  <p:stCondLst>
-                                    <p:cond delay="0"/>
-                                  </p:stCondLst>
-                                  <p:childTnLst>
-                                    <p:set>
-                                      <p:cBhvr>
-                                        <p:cTn dur="1" fill="hold">
-                                          <p:stCondLst>
-                                            <p:cond delay="0"/>
-                                          </p:stCondLst>
-                                        </p:cTn>
-                                        <p:tgtEl>
-                                          <p:spTgt spid="294">
-                                            <p:txEl>
-                                              <p:pRg end="8" st="8"/>
-                                            </p:txEl>
-                                          </p:spTgt>
-                                        </p:tgtEl>
-                                        <p:attrNameLst>
-                                          <p:attrName>style.visibility</p:attrName>
-                                        </p:attrNameLst>
-                                      </p:cBhvr>
-                                      <p:to>
-                                        <p:strVal val="visible"/>
-                                      </p:to>
-                                    </p:set>
-                                  </p:childTnLst>
-                                </p:cTn>
-                              </p:par>
-                            </p:childTnLst>
-                          </p:cTn>
-                        </p:par>
-                      </p:childTnLst>
-                    </p:cTn>
-                  </p:par>
-                  <p:par>
-                    <p:cTn fill="hold">
-                      <p:stCondLst>
-                        <p:cond delay="indefinite"/>
-                      </p:stCondLst>
-                      <p:childTnLst>
-                        <p:par>
-                          <p:cTn fill="hold">
-                            <p:stCondLst>
-                              <p:cond delay="0"/>
-                            </p:stCondLst>
-                            <p:childTnLst>
-                              <p:par>
-                                <p:cTn fill="hold" nodeType="clickEffect" presetClass="entr" presetID="1" presetSubtype="0">
-                                  <p:stCondLst>
-                                    <p:cond delay="0"/>
-                                  </p:stCondLst>
-                                  <p:childTnLst>
-                                    <p:set>
-                                      <p:cBhvr>
-                                        <p:cTn dur="1" fill="hold">
-                                          <p:stCondLst>
-                                            <p:cond delay="0"/>
-                                          </p:stCondLst>
-                                        </p:cTn>
-                                        <p:tgtEl>
-                                          <p:spTgt spid="294">
-                                            <p:txEl>
-                                              <p:pRg end="9" st="9"/>
-                                            </p:txEl>
-                                          </p:spTgt>
-                                        </p:tgtEl>
-                                        <p:attrNameLst>
-                                          <p:attrName>style.visibility</p:attrName>
-                                        </p:attrNameLst>
-                                      </p:cBhvr>
-                                      <p:to>
-                                        <p:strVal val="visible"/>
-                                      </p:to>
-                                    </p:set>
-                                  </p:childTnLst>
-                                </p:cTn>
-                              </p:par>
-                            </p:childTnLst>
-                          </p:cTn>
-                        </p:par>
-                      </p:childTnLst>
-                    </p:cTn>
-                  </p:par>
-                  <p:par>
-                    <p:cTn fill="hold">
-                      <p:stCondLst>
-                        <p:cond delay="indefinite"/>
-                      </p:stCondLst>
-                      <p:childTnLst>
-                        <p:par>
-                          <p:cTn fill="hold">
-                            <p:stCondLst>
-                              <p:cond delay="0"/>
-                            </p:stCondLst>
-                            <p:childTnLst>
-                              <p:par>
-                                <p:cTn fill="hold" nodeType="clickEffect" presetClass="entr" presetID="1" presetSubtype="0">
-                                  <p:stCondLst>
-                                    <p:cond delay="0"/>
-                                  </p:stCondLst>
-                                  <p:childTnLst>
-                                    <p:set>
-                                      <p:cBhvr>
-                                        <p:cTn dur="1" fill="hold">
-                                          <p:stCondLst>
-                                            <p:cond delay="0"/>
-                                          </p:stCondLst>
-                                        </p:cTn>
-                                        <p:tgtEl>
-                                          <p:spTgt spid="294">
-                                            <p:txEl>
-                                              <p:pRg end="10" st="10"/>
-                                            </p:txEl>
-                                          </p:spTgt>
-                                        </p:tgtEl>
-                                        <p:attrNameLst>
-                                          <p:attrName>style.visibility</p:attrName>
-                                        </p:attrNameLst>
-                                      </p:cBhvr>
-                                      <p:to>
-                                        <p:strVal val="visible"/>
-                                      </p:to>
-                                    </p:set>
-                                  </p:childTnLst>
-                                </p:cTn>
-                              </p:par>
-                            </p:childTnLst>
-                          </p:cTn>
-                        </p:par>
-                      </p:childTnLst>
-                    </p:cTn>
-                  </p:par>
-                  <p:par>
-                    <p:cTn fill="hold">
-                      <p:stCondLst>
-                        <p:cond delay="indefinite"/>
-                      </p:stCondLst>
-                      <p:childTnLst>
-                        <p:par>
-                          <p:cTn fill="hold">
-                            <p:stCondLst>
-                              <p:cond delay="0"/>
-                            </p:stCondLst>
-                            <p:childTnLst>
-                              <p:par>
-                                <p:cTn fill="hold" nodeType="clickEffect" presetClass="entr" presetID="1" presetSubtype="0">
-                                  <p:stCondLst>
-                                    <p:cond delay="0"/>
-                                  </p:stCondLst>
-                                  <p:childTnLst>
-                                    <p:set>
-                                      <p:cBhvr>
-                                        <p:cTn dur="1" fill="hold">
-                                          <p:stCondLst>
-                                            <p:cond delay="0"/>
-                                          </p:stCondLst>
-                                        </p:cTn>
-                                        <p:tgtEl>
-                                          <p:spTgt spid="294">
-                                            <p:txEl>
-                                              <p:pRg end="11" st="11"/>
-                                            </p:txEl>
-                                          </p:spTgt>
-                                        </p:tgtEl>
-                                        <p:attrNameLst>
-                                          <p:attrName>style.visibility</p:attrName>
-                                        </p:attrNameLst>
-                                      </p:cBhvr>
-                                      <p:to>
-                                        <p:strVal val="visible"/>
-                                      </p:to>
-                                    </p:set>
-                                  </p:childTnLst>
-                                </p:cTn>
-                              </p:par>
-                            </p:childTnLst>
-                          </p:cTn>
-                        </p:par>
-                      </p:childTnLst>
-                    </p:cTn>
-                  </p:par>
-                  <p:par>
-                    <p:cTn fill="hold">
-                      <p:stCondLst>
-                        <p:cond delay="indefinite"/>
-                      </p:stCondLst>
-                      <p:childTnLst>
-                        <p:par>
-                          <p:cTn fill="hold">
-                            <p:stCondLst>
-                              <p:cond delay="0"/>
-                            </p:stCondLst>
-                            <p:childTnLst>
-                              <p:par>
-                                <p:cTn fill="hold" nodeType="clickEffect" presetClass="entr" presetID="1" presetSubtype="0">
-                                  <p:stCondLst>
-                                    <p:cond delay="0"/>
-                                  </p:stCondLst>
-                                  <p:childTnLst>
-                                    <p:set>
-                                      <p:cBhvr>
-                                        <p:cTn dur="1" fill="hold">
-                                          <p:stCondLst>
-                                            <p:cond delay="0"/>
-                                          </p:stCondLst>
-                                        </p:cTn>
-                                        <p:tgtEl>
-                                          <p:spTgt spid="294">
-                                            <p:txEl>
-                                              <p:pRg end="12" st="12"/>
-                                            </p:txEl>
-                                          </p:spTgt>
-                                        </p:tgtEl>
-                                        <p:attrNameLst>
-                                          <p:attrName>style.visibility</p:attrName>
-                                        </p:attrNameLst>
-                                      </p:cBhvr>
-                                      <p:to>
-                                        <p:strVal val="visible"/>
-                                      </p:to>
-                                    </p:set>
-                                  </p:childTnLst>
-                                </p:cTn>
-                              </p:par>
-                            </p:childTnLst>
-                          </p:cTn>
-                        </p:par>
-                      </p:childTnLst>
-                    </p:cTn>
-                  </p:par>
-                </p:childTnLst>
-              </p:cTn>
-              <p:prevCondLst>
-                <p:cond evt="onPrev">
-                  <p:tgtEl>
-                    <p:sldTgt/>
-                  </p:tgtEl>
-                </p:cond>
-              </p:prevCondLst>
-              <p:nextCondLst>
-                <p:cond evt="onNext">
-                  <p:tgtEl>
-                    <p:sldTgt/>
-                  </p:tgtEl>
-                </p:cond>
-              </p:nextCondLst>
-            </p:seq>
-          </p:childTnLst>
-        </p:cTn>
-      </p:par>
-    </p:tnLst>
-  </p:timing>
 </p:sld>
 </file>
 
@@ -12622,7 +12291,7 @@
                   <a:schemeClr val="accent5"/>
                 </a:solidFill>
               </a:rPr>
-              <a:t>Exercise: Refactor (Stretch)</a:t>
+              <a:t>Exercises</a:t>
             </a:r>
             <a:endParaRPr>
               <a:solidFill>
@@ -12667,7 +12336,7 @@
             </a:pPr>
             <a:r>
               <a:rPr lang="en"/>
-              <a:t>PlantType.Create has an if for every component</a:t>
+              <a:t>Start from Pvz4, the finished game</a:t>
             </a:r>
             <a:endParaRPr/>
           </a:p>
@@ -12684,7 +12353,7 @@
             </a:pPr>
             <a:r>
               <a:rPr lang="en"/>
-              <a:t>List components by name in the JSON, with a registry</a:t>
+              <a:t>New types: a Tall-nut and a Flag Zombie. Any code?</a:t>
             </a:r>
             <a:endParaRPr/>
           </a:p>
@@ -12701,7 +12370,7 @@
             </a:pPr>
             <a:r>
               <a:rPr lang="en"/>
-              <a:t>What do you gain, and what do you lose?</a:t>
+              <a:t>Snow Pea: peas that slow zombies down</a:t>
             </a:r>
             <a:endParaRPr/>
           </a:p>
@@ -12718,7 +12387,41 @@
             </a:pPr>
             <a:r>
               <a:rPr lang="en"/>
-              <a:t>E.g. the compiler checking the data’s shape</a:t>
+              <a:t>Which component, where, and how does the data say so?</a:t>
+            </a:r>
+            <a:endParaRPr/>
+          </a:p>
+          <a:p>
+            <a:pPr indent="-330200" lvl="0" marL="457200" rtl="0" algn="l">
+              <a:spcBef>
+                <a:spcPts val="0"/>
+              </a:spcBef>
+              <a:spcAft>
+                <a:spcPts val="0"/>
+              </a:spcAft>
+              <a:buSzPts val="1600"/>
+              <a:buChar char="●"/>
+            </a:pPr>
+            <a:r>
+              <a:rPr lang="en"/>
+              <a:t>Pumpkin: armour for plants. Can you reuse Armour?</a:t>
+            </a:r>
+            <a:endParaRPr/>
+          </a:p>
+          <a:p>
+            <a:pPr indent="-330200" lvl="0" marL="457200" rtl="0" algn="l">
+              <a:spcBef>
+                <a:spcPts val="0"/>
+              </a:spcBef>
+              <a:spcAft>
+                <a:spcPts val="0"/>
+              </a:spcAft>
+              <a:buSzPts val="1600"/>
+              <a:buChar char="●"/>
+            </a:pPr>
+            <a:r>
+              <a:rPr lang="en"/>
+              <a:t>A shovel that removes the plant you click</a:t>
             </a:r>
             <a:endParaRPr/>
           </a:p>
@@ -13400,179 +13103,6 @@
 </file>
 
 <file path=ppt/slides/slide24.xml><?xml version="1.0" encoding="utf-8"?>
-<p:sld xmlns:a="http://schemas.openxmlformats.org/drawingml/2006/main" xmlns:p="http://schemas.openxmlformats.org/presentationml/2006/main" xmlns:r="http://schemas.openxmlformats.org/officeDocument/2006/relationships">
-  <p:cSld>
-    <p:spTree>
-      <p:nvGrpSpPr>
-        <p:cNvPr id="1" name=""/>
-        <p:cNvGrpSpPr/>
-        <p:nvPr/>
-      </p:nvGrpSpPr>
-      <p:grpSpPr/>
-      <p:sp>
-        <p:nvSpPr>
-          <p:cNvPr id="2" name="Title 1"/>
-          <p:cNvSpPr>
-            <a:spLocks noGrp="1"/>
-          </p:cNvSpPr>
-          <p:nvPr>
-            <p:ph type="title"/>
-          </p:nvPr>
-        </p:nvSpPr>
-        <p:spPr/>
-        <p:txBody>
-          <a:bodyPr/>
-          <a:lstStyle/>
-          <a:p>
-            <a:pPr indent="0" lvl="0" marL="0" rtl="0" algn="l">
-              <a:spcBef>
-                <a:spcPts val="0"/>
-              </a:spcBef>
-              <a:spcAft>
-                <a:spcPts val="0"/>
-              </a:spcAft>
-              <a:buNone/>
-            </a:pPr>
-            <a:r>
-              <a:rPr lang="en"/>
-              <a:t>Check Yourself</a:t>
-            </a:r>
-            <a:endParaRPr/>
-          </a:p>
-        </p:txBody>
-      </p:sp>
-      <p:sp>
-        <p:nvSpPr>
-          <p:cNvPr id="3" name="Text Placeholder 2"/>
-          <p:cNvSpPr>
-            <a:spLocks noGrp="1"/>
-          </p:cNvSpPr>
-          <p:nvPr>
-            <p:ph type="body" idx="1"/>
-          </p:nvPr>
-        </p:nvSpPr>
-        <p:spPr>
-          <a:xfrm>
-            <a:off x="311700" y="885950"/>
-            <a:ext cx="8520600" cy="1719072"/>
-          </a:xfrm>
-        </p:spPr>
-        <p:txBody>
-          <a:bodyPr/>
-          <a:lstStyle/>
-          <a:p>
-            <a:pPr indent="-330200" lvl="0" marL="457200" rtl="0" algn="l">
-              <a:spcBef>
-                <a:spcPts val="0"/>
-              </a:spcBef>
-              <a:spcAft>
-                <a:spcPts val="0"/>
-              </a:spcAft>
-              <a:buSzPts val="1600"/>
-              <a:buChar char="●"/>
-            </a:pPr>
-            <a:r>
-              <a:rPr lang="en"/>
-              <a:t>Why does inheritance break down for Plants vs. Zombies?</a:t>
-            </a:r>
-            <a:endParaRPr/>
-          </a:p>
-          <a:p>
-            <a:pPr indent="-330200" lvl="0" marL="457200" rtl="0" algn="l">
-              <a:spcBef>
-                <a:spcPts val="0"/>
-              </a:spcBef>
-              <a:spcAft>
-                <a:spcPts val="0"/>
-              </a:spcAft>
-              <a:buSzPts val="1600"/>
-              <a:buChar char="●"/>
-            </a:pPr>
-            <a:r>
-              <a:rPr lang="en"/>
-              <a:t>How do components in one entity work together without knowing each other’s classes?</a:t>
-            </a:r>
-            <a:endParaRPr/>
-          </a:p>
-          <a:p>
-            <a:pPr indent="-330200" lvl="0" marL="457200" rtl="0" algn="l">
-              <a:spcBef>
-                <a:spcPts val="0"/>
-              </a:spcBef>
-              <a:spcAft>
-                <a:spcPts val="0"/>
-              </a:spcAft>
-              <a:buSzPts val="1600"/>
-              <a:buChar char="●"/>
-            </a:pPr>
-            <a:r>
-              <a:rPr lang="en"/>
-              <a:t>What goes in a type object, and what goes in an instance?</a:t>
-            </a:r>
-            <a:endParaRPr/>
-          </a:p>
-          <a:p>
-            <a:pPr indent="-330200" lvl="0" marL="457200" rtl="0" algn="l">
-              <a:spcBef>
-                <a:spcPts val="0"/>
-              </a:spcBef>
-              <a:spcAft>
-                <a:spcPts val="0"/>
-              </a:spcAft>
-              <a:buSzPts val="1600"/>
-              <a:buChar char="●"/>
-            </a:pPr>
-            <a:r>
-              <a:rPr lang="en"/>
-              <a:t>How is picking on a grid different from picking a list of objects?</a:t>
-            </a:r>
-            <a:endParaRPr/>
-          </a:p>
-        </p:txBody>
-      </p:sp>
-      <p:sp>
-        <p:nvSpPr>
-          <p:cNvPr id="4" name="TextBox 3"/>
-          <p:cNvSpPr txBox="1"/>
-          <p:nvPr/>
-        </p:nvSpPr>
-        <p:spPr>
-          <a:xfrm>
-            <a:off x="457200" y="3182112"/>
-            <a:ext cx="8229600" cy="457200"/>
-          </a:xfrm>
-          <a:prstGeom prst="rect">
-            <a:avLst/>
-          </a:prstGeom>
-          <a:noFill/>
-        </p:spPr>
-        <p:txBody>
-          <a:bodyPr wrap="square">
-            <a:spAutoFit/>
-          </a:bodyPr>
-          <a:lstStyle/>
-          <a:p>
-            <a:pPr algn="ctr"/>
-            <a:r>
-              <a:rPr sz="1400" b="0" i="0">
-                <a:solidFill>
-                  <a:srgbClr val="9AA3AB"/>
-                </a:solidFill>
-              </a:rPr>
-              <a:t>The answers, and more questions, are on the course site.</a:t>
-            </a:r>
-          </a:p>
-        </p:txBody>
-      </p:sp>
-    </p:spTree>
-  </p:cSld>
-  <p:clrMapOvr>
-    <a:masterClrMapping/>
-  </p:clrMapOvr>
-</p:sld>
-</file>
-
-<file path=ppt/slides/slide25.xml><?xml version="1.0" encoding="utf-8"?>
 <p:sld xmlns:a="http://schemas.openxmlformats.org/drawingml/2006/main" xmlns:r="http://schemas.openxmlformats.org/officeDocument/2006/relationships" xmlns:mc="http://schemas.openxmlformats.org/markup-compatibility/2006" xmlns:mv="urn:schemas-microsoft-com:mac:vml" xmlns:p="http://schemas.openxmlformats.org/presentationml/2006/main" xmlns:c="http://schemas.openxmlformats.org/drawingml/2006/chart" xmlns:dgm="http://schemas.openxmlformats.org/drawingml/2006/diagram" xmlns:o="urn:schemas-microsoft-com:office:office" xmlns:v="urn:schemas-microsoft-com:vml" xmlns:pvml="urn:schemas-microsoft-com:office:powerpoint" xmlns:com="http://schemas.openxmlformats.org/drawingml/2006/compatibility" xmlns:p14="http://schemas.microsoft.com/office/powerpoint/2010/main" xmlns:p15="http://schemas.microsoft.com/office/powerpoint/2012/main" xmlns:ahyp="http://schemas.microsoft.com/office/drawing/2018/hyperlinkcolor">
   <p:cSld>
     <p:spTree>
@@ -13627,7 +13157,7 @@
                   <a:schemeClr val="accent5"/>
                 </a:solidFill>
               </a:rPr>
-              <a:t>Apply It to Your Project</a:t>
+              <a:t>Exercise: Refactor (Stretch)</a:t>
             </a:r>
             <a:endParaRPr>
               <a:solidFill>
@@ -13672,7 +13202,7 @@
             </a:pPr>
             <a:r>
               <a:rPr lang="en"/>
-              <a:t>Where do subclasses exist only to combine abilities?</a:t>
+              <a:t>PlantType.Create has an if for every component</a:t>
             </a:r>
             <a:endParaRPr/>
           </a:p>
@@ -13689,7 +13219,7 @@
             </a:pPr>
             <a:r>
               <a:rPr lang="en"/>
-              <a:t>Which abilities could become components?</a:t>
+              <a:t>List components by name in the JSON, with a registry</a:t>
             </a:r>
             <a:endParaRPr/>
           </a:p>
@@ -13706,24 +13236,24 @@
             </a:pPr>
             <a:r>
               <a:rPr lang="en"/>
-              <a:t>Which data belongs to a kind of thing? Could it be a data file?</a:t>
+              <a:t>What do you gain, and what do you lose?</a:t>
             </a:r>
             <a:endParaRPr/>
           </a:p>
           <a:p>
-            <a:pPr indent="-330200" lvl="0" marL="457200" rtl="0" algn="l">
-              <a:spcBef>
-                <a:spcPts val="0"/>
-              </a:spcBef>
-              <a:spcAft>
-                <a:spcPts val="0"/>
-              </a:spcAft>
-              <a:buSzPts val="1600"/>
-              <a:buChar char="●"/>
+            <a:pPr indent="-317500" lvl="1" marL="914400" rtl="0" algn="l">
+              <a:spcBef>
+                <a:spcPts val="0"/>
+              </a:spcBef>
+              <a:spcAft>
+                <a:spcPts val="0"/>
+              </a:spcAft>
+              <a:buSzPts val="1400"/>
+              <a:buChar char="○"/>
             </a:pPr>
             <a:r>
               <a:rPr lang="en"/>
-              <a:t>How does your game find out what was clicked?</a:t>
+              <a:t>E.g. the compiler checking the data’s shape</a:t>
             </a:r>
             <a:endParaRPr/>
           </a:p>
@@ -14404,7 +13934,1012 @@
 </p:sld>
 </file>
 
+<file path=ppt/slides/slide25.xml><?xml version="1.0" encoding="utf-8"?>
+<p:sld xmlns:a="http://schemas.openxmlformats.org/drawingml/2006/main" xmlns:p="http://schemas.openxmlformats.org/presentationml/2006/main" xmlns:r="http://schemas.openxmlformats.org/officeDocument/2006/relationships">
+  <p:cSld>
+    <p:spTree>
+      <p:nvGrpSpPr>
+        <p:cNvPr id="1" name=""/>
+        <p:cNvGrpSpPr/>
+        <p:nvPr/>
+      </p:nvGrpSpPr>
+      <p:grpSpPr/>
+      <p:sp>
+        <p:nvSpPr>
+          <p:cNvPr id="2" name="Title 1"/>
+          <p:cNvSpPr>
+            <a:spLocks noGrp="1"/>
+          </p:cNvSpPr>
+          <p:nvPr>
+            <p:ph type="title"/>
+          </p:nvPr>
+        </p:nvSpPr>
+        <p:spPr/>
+        <p:txBody>
+          <a:bodyPr/>
+          <a:lstStyle/>
+          <a:p>
+            <a:pPr indent="0" lvl="0" marL="0" rtl="0" algn="l">
+              <a:spcBef>
+                <a:spcPts val="0"/>
+              </a:spcBef>
+              <a:spcAft>
+                <a:spcPts val="0"/>
+              </a:spcAft>
+              <a:buNone/>
+            </a:pPr>
+            <a:r>
+              <a:rPr lang="en"/>
+              <a:t>Check Yourself</a:t>
+            </a:r>
+            <a:endParaRPr/>
+          </a:p>
+        </p:txBody>
+      </p:sp>
+      <p:sp>
+        <p:nvSpPr>
+          <p:cNvPr id="3" name="Text Placeholder 2"/>
+          <p:cNvSpPr>
+            <a:spLocks noGrp="1"/>
+          </p:cNvSpPr>
+          <p:nvPr>
+            <p:ph type="body" idx="1"/>
+          </p:nvPr>
+        </p:nvSpPr>
+        <p:spPr>
+          <a:xfrm>
+            <a:off x="311700" y="885950"/>
+            <a:ext cx="8520600" cy="1719072"/>
+          </a:xfrm>
+        </p:spPr>
+        <p:txBody>
+          <a:bodyPr/>
+          <a:lstStyle/>
+          <a:p>
+            <a:pPr indent="-330200" lvl="0" marL="457200" rtl="0" algn="l">
+              <a:spcBef>
+                <a:spcPts val="0"/>
+              </a:spcBef>
+              <a:spcAft>
+                <a:spcPts val="0"/>
+              </a:spcAft>
+              <a:buSzPts val="1600"/>
+              <a:buChar char="●"/>
+            </a:pPr>
+            <a:r>
+              <a:rPr lang="en"/>
+              <a:t>Why does inheritance break down for Plants vs. Zombies?</a:t>
+            </a:r>
+            <a:endParaRPr/>
+          </a:p>
+          <a:p>
+            <a:pPr indent="-330200" lvl="0" marL="457200" rtl="0" algn="l">
+              <a:spcBef>
+                <a:spcPts val="0"/>
+              </a:spcBef>
+              <a:spcAft>
+                <a:spcPts val="0"/>
+              </a:spcAft>
+              <a:buSzPts val="1600"/>
+              <a:buChar char="●"/>
+            </a:pPr>
+            <a:r>
+              <a:rPr lang="en"/>
+              <a:t>How do components in one entity work together without knowing each other’s classes?</a:t>
+            </a:r>
+            <a:endParaRPr/>
+          </a:p>
+          <a:p>
+            <a:pPr indent="-330200" lvl="0" marL="457200" rtl="0" algn="l">
+              <a:spcBef>
+                <a:spcPts val="0"/>
+              </a:spcBef>
+              <a:spcAft>
+                <a:spcPts val="0"/>
+              </a:spcAft>
+              <a:buSzPts val="1600"/>
+              <a:buChar char="●"/>
+            </a:pPr>
+            <a:r>
+              <a:rPr lang="en"/>
+              <a:t>What goes in a type object, and what goes in an instance?</a:t>
+            </a:r>
+            <a:endParaRPr/>
+          </a:p>
+          <a:p>
+            <a:pPr indent="-330200" lvl="0" marL="457200" rtl="0" algn="l">
+              <a:spcBef>
+                <a:spcPts val="0"/>
+              </a:spcBef>
+              <a:spcAft>
+                <a:spcPts val="0"/>
+              </a:spcAft>
+              <a:buSzPts val="1600"/>
+              <a:buChar char="●"/>
+            </a:pPr>
+            <a:r>
+              <a:rPr lang="en"/>
+              <a:t>How is picking on a grid different from picking a list of objects?</a:t>
+            </a:r>
+            <a:endParaRPr/>
+          </a:p>
+        </p:txBody>
+      </p:sp>
+      <p:sp>
+        <p:nvSpPr>
+          <p:cNvPr id="4" name="TextBox 3"/>
+          <p:cNvSpPr txBox="1"/>
+          <p:nvPr/>
+        </p:nvSpPr>
+        <p:spPr>
+          <a:xfrm>
+            <a:off x="457200" y="3182112"/>
+            <a:ext cx="8229600" cy="457200"/>
+          </a:xfrm>
+          <a:prstGeom prst="rect">
+            <a:avLst/>
+          </a:prstGeom>
+          <a:noFill/>
+        </p:spPr>
+        <p:txBody>
+          <a:bodyPr wrap="square">
+            <a:spAutoFit/>
+          </a:bodyPr>
+          <a:lstStyle/>
+          <a:p>
+            <a:pPr algn="ctr"/>
+            <a:r>
+              <a:rPr sz="1400" b="0" i="0">
+                <a:solidFill>
+                  <a:srgbClr val="9AA3AB"/>
+                </a:solidFill>
+              </a:rPr>
+              <a:t>The answers, and more questions, are on the course site.</a:t>
+            </a:r>
+          </a:p>
+        </p:txBody>
+      </p:sp>
+    </p:spTree>
+  </p:cSld>
+  <p:clrMapOvr>
+    <a:masterClrMapping/>
+  </p:clrMapOvr>
+</p:sld>
+</file>
+
 <file path=ppt/slides/slide26.xml><?xml version="1.0" encoding="utf-8"?>
+<p:sld xmlns:a="http://schemas.openxmlformats.org/drawingml/2006/main" xmlns:r="http://schemas.openxmlformats.org/officeDocument/2006/relationships" xmlns:mc="http://schemas.openxmlformats.org/markup-compatibility/2006" xmlns:mv="urn:schemas-microsoft-com:mac:vml" xmlns:p="http://schemas.openxmlformats.org/presentationml/2006/main" xmlns:c="http://schemas.openxmlformats.org/drawingml/2006/chart" xmlns:dgm="http://schemas.openxmlformats.org/drawingml/2006/diagram" xmlns:o="urn:schemas-microsoft-com:office:office" xmlns:v="urn:schemas-microsoft-com:vml" xmlns:pvml="urn:schemas-microsoft-com:office:powerpoint" xmlns:com="http://schemas.openxmlformats.org/drawingml/2006/compatibility" xmlns:p14="http://schemas.microsoft.com/office/powerpoint/2010/main" xmlns:p15="http://schemas.microsoft.com/office/powerpoint/2012/main" xmlns:ahyp="http://schemas.microsoft.com/office/drawing/2018/hyperlinkcolor">
+  <p:cSld>
+    <p:spTree>
+      <p:nvGrpSpPr>
+        <p:cNvPr id="292" name="Shape 292"/>
+        <p:cNvGrpSpPr/>
+        <p:nvPr/>
+      </p:nvGrpSpPr>
+      <p:grpSpPr>
+        <a:xfrm>
+          <a:off x="0" y="0"/>
+          <a:ext cx="0" cy="0"/>
+          <a:chOff x="0" y="0"/>
+          <a:chExt cx="0" cy="0"/>
+        </a:xfrm>
+      </p:grpSpPr>
+      <p:sp>
+        <p:nvSpPr>
+          <p:cNvPr id="293" name="Google Shape;293;p45"/>
+          <p:cNvSpPr txBox="1"/>
+          <p:nvPr>
+            <p:ph type="title"/>
+          </p:nvPr>
+        </p:nvSpPr>
+        <p:spPr>
+          <a:xfrm>
+            <a:off x="311700" y="195615"/>
+            <a:ext cx="8520600" cy="572700"/>
+          </a:xfrm>
+          <a:prstGeom prst="rect">
+            <a:avLst/>
+          </a:prstGeom>
+        </p:spPr>
+        <p:txBody>
+          <a:bodyPr anchorCtr="0" anchor="t" bIns="91425" lIns="91425" spcFirstLastPara="1" rIns="91425" wrap="square" tIns="91425">
+            <a:normAutofit fontScale="90000"/>
+          </a:bodyPr>
+          <a:lstStyle/>
+          <a:p>
+            <a:pPr indent="0" lvl="0" marL="0" rtl="0" algn="l">
+              <a:spcBef>
+                <a:spcPts val="0"/>
+              </a:spcBef>
+              <a:spcAft>
+                <a:spcPts val="0"/>
+              </a:spcAft>
+              <a:buNone/>
+            </a:pPr>
+            <a:r>
+              <a:rPr lang="en">
+                <a:solidFill>
+                  <a:schemeClr val="accent5"/>
+                </a:solidFill>
+              </a:rPr>
+              <a:t>Apply It to Your Project</a:t>
+            </a:r>
+            <a:endParaRPr>
+              <a:solidFill>
+                <a:schemeClr val="accent5"/>
+              </a:solidFill>
+            </a:endParaRPr>
+          </a:p>
+        </p:txBody>
+      </p:sp>
+      <p:sp>
+        <p:nvSpPr>
+          <p:cNvPr id="294" name="Google Shape;294;p45"/>
+          <p:cNvSpPr txBox="1"/>
+          <p:nvPr>
+            <p:ph idx="1" type="body"/>
+          </p:nvPr>
+        </p:nvSpPr>
+        <p:spPr>
+          <a:xfrm>
+            <a:off x="311700" y="885950"/>
+            <a:ext cx="8520600" cy="4023300"/>
+          </a:xfrm>
+          <a:prstGeom prst="rect">
+            <a:avLst/>
+          </a:prstGeom>
+        </p:spPr>
+        <p:txBody>
+          <a:bodyPr anchorCtr="0" anchor="t" bIns="91425" lIns="91425" spcFirstLastPara="1" rIns="91425" wrap="square" tIns="91425">
+            <a:normAutofit/>
+          </a:bodyPr>
+          <a:lstStyle/>
+          <a:p>
+            <a:pPr indent="-330200" lvl="0" marL="457200" rtl="0" algn="l">
+              <a:spcBef>
+                <a:spcPts val="0"/>
+              </a:spcBef>
+              <a:spcAft>
+                <a:spcPts val="0"/>
+              </a:spcAft>
+              <a:buSzPts val="1600"/>
+              <a:buChar char="●"/>
+            </a:pPr>
+            <a:r>
+              <a:rPr lang="en"/>
+              <a:t>Where do subclasses exist only to combine abilities?</a:t>
+            </a:r>
+            <a:endParaRPr/>
+          </a:p>
+          <a:p>
+            <a:pPr indent="-330200" lvl="0" marL="457200" rtl="0" algn="l">
+              <a:spcBef>
+                <a:spcPts val="0"/>
+              </a:spcBef>
+              <a:spcAft>
+                <a:spcPts val="0"/>
+              </a:spcAft>
+              <a:buSzPts val="1600"/>
+              <a:buChar char="●"/>
+            </a:pPr>
+            <a:r>
+              <a:rPr lang="en"/>
+              <a:t>Which abilities could become components?</a:t>
+            </a:r>
+            <a:endParaRPr/>
+          </a:p>
+          <a:p>
+            <a:pPr indent="-330200" lvl="0" marL="457200" rtl="0" algn="l">
+              <a:spcBef>
+                <a:spcPts val="0"/>
+              </a:spcBef>
+              <a:spcAft>
+                <a:spcPts val="0"/>
+              </a:spcAft>
+              <a:buSzPts val="1600"/>
+              <a:buChar char="●"/>
+            </a:pPr>
+            <a:r>
+              <a:rPr lang="en"/>
+              <a:t>Which data belongs to a kind of thing? Could it be a data file?</a:t>
+            </a:r>
+            <a:endParaRPr/>
+          </a:p>
+          <a:p>
+            <a:pPr indent="-330200" lvl="0" marL="457200" rtl="0" algn="l">
+              <a:spcBef>
+                <a:spcPts val="0"/>
+              </a:spcBef>
+              <a:spcAft>
+                <a:spcPts val="0"/>
+              </a:spcAft>
+              <a:buSzPts val="1600"/>
+              <a:buChar char="●"/>
+            </a:pPr>
+            <a:r>
+              <a:rPr lang="en"/>
+              <a:t>How does your game find out what was clicked?</a:t>
+            </a:r>
+            <a:endParaRPr/>
+          </a:p>
+        </p:txBody>
+      </p:sp>
+    </p:spTree>
+  </p:cSld>
+  <p:clrMapOvr>
+    <a:masterClrMapping/>
+  </p:clrMapOvr>
+  <p:timing>
+    <p:tnLst>
+      <p:par>
+        <p:cTn dur="indefinite" nodeType="tmRoot" restart="never">
+          <p:childTnLst>
+            <p:seq concurrent="1" nextAc="seek">
+              <p:cTn dur="indefinite" id="2" nodeType="mainSeq">
+                <p:childTnLst>
+                  <p:par>
+                    <p:cTn fill="hold">
+                      <p:stCondLst>
+                        <p:cond delay="indefinite"/>
+                      </p:stCondLst>
+                      <p:childTnLst>
+                        <p:par>
+                          <p:cTn fill="hold">
+                            <p:stCondLst>
+                              <p:cond delay="0"/>
+                            </p:stCondLst>
+                            <p:childTnLst>
+                              <p:par>
+                                <p:cTn fill="hold" nodeType="clickEffect" presetClass="entr" presetID="1" presetSubtype="0">
+                                  <p:stCondLst>
+                                    <p:cond delay="0"/>
+                                  </p:stCondLst>
+                                  <p:childTnLst>
+                                    <p:set>
+                                      <p:cBhvr>
+                                        <p:cTn dur="1" fill="hold">
+                                          <p:stCondLst>
+                                            <p:cond delay="0"/>
+                                          </p:stCondLst>
+                                        </p:cTn>
+                                        <p:tgtEl>
+                                          <p:spTgt spid="294">
+                                            <p:txEl>
+                                              <p:pRg end="0" st="0"/>
+                                            </p:txEl>
+                                          </p:spTgt>
+                                        </p:tgtEl>
+                                        <p:attrNameLst>
+                                          <p:attrName>style.visibility</p:attrName>
+                                        </p:attrNameLst>
+                                      </p:cBhvr>
+                                      <p:to>
+                                        <p:strVal val="visible"/>
+                                      </p:to>
+                                    </p:set>
+                                  </p:childTnLst>
+                                </p:cTn>
+                              </p:par>
+                            </p:childTnLst>
+                          </p:cTn>
+                        </p:par>
+                      </p:childTnLst>
+                    </p:cTn>
+                  </p:par>
+                  <p:par>
+                    <p:cTn fill="hold">
+                      <p:stCondLst>
+                        <p:cond delay="indefinite"/>
+                      </p:stCondLst>
+                      <p:childTnLst>
+                        <p:par>
+                          <p:cTn fill="hold">
+                            <p:stCondLst>
+                              <p:cond delay="0"/>
+                            </p:stCondLst>
+                            <p:childTnLst>
+                              <p:par>
+                                <p:cTn fill="hold" nodeType="clickEffect" presetClass="entr" presetID="1" presetSubtype="0">
+                                  <p:stCondLst>
+                                    <p:cond delay="0"/>
+                                  </p:stCondLst>
+                                  <p:childTnLst>
+                                    <p:set>
+                                      <p:cBhvr>
+                                        <p:cTn dur="1" fill="hold">
+                                          <p:stCondLst>
+                                            <p:cond delay="0"/>
+                                          </p:stCondLst>
+                                        </p:cTn>
+                                        <p:tgtEl>
+                                          <p:spTgt spid="294">
+                                            <p:txEl>
+                                              <p:pRg end="1" st="1"/>
+                                            </p:txEl>
+                                          </p:spTgt>
+                                        </p:tgtEl>
+                                        <p:attrNameLst>
+                                          <p:attrName>style.visibility</p:attrName>
+                                        </p:attrNameLst>
+                                      </p:cBhvr>
+                                      <p:to>
+                                        <p:strVal val="visible"/>
+                                      </p:to>
+                                    </p:set>
+                                  </p:childTnLst>
+                                </p:cTn>
+                              </p:par>
+                            </p:childTnLst>
+                          </p:cTn>
+                        </p:par>
+                      </p:childTnLst>
+                    </p:cTn>
+                  </p:par>
+                  <p:par>
+                    <p:cTn fill="hold">
+                      <p:stCondLst>
+                        <p:cond delay="indefinite"/>
+                      </p:stCondLst>
+                      <p:childTnLst>
+                        <p:par>
+                          <p:cTn fill="hold">
+                            <p:stCondLst>
+                              <p:cond delay="0"/>
+                            </p:stCondLst>
+                            <p:childTnLst>
+                              <p:par>
+                                <p:cTn fill="hold" nodeType="clickEffect" presetClass="entr" presetID="1" presetSubtype="0">
+                                  <p:stCondLst>
+                                    <p:cond delay="0"/>
+                                  </p:stCondLst>
+                                  <p:childTnLst>
+                                    <p:set>
+                                      <p:cBhvr>
+                                        <p:cTn dur="1" fill="hold">
+                                          <p:stCondLst>
+                                            <p:cond delay="0"/>
+                                          </p:stCondLst>
+                                        </p:cTn>
+                                        <p:tgtEl>
+                                          <p:spTgt spid="294">
+                                            <p:txEl>
+                                              <p:pRg end="2" st="2"/>
+                                            </p:txEl>
+                                          </p:spTgt>
+                                        </p:tgtEl>
+                                        <p:attrNameLst>
+                                          <p:attrName>style.visibility</p:attrName>
+                                        </p:attrNameLst>
+                                      </p:cBhvr>
+                                      <p:to>
+                                        <p:strVal val="visible"/>
+                                      </p:to>
+                                    </p:set>
+                                  </p:childTnLst>
+                                </p:cTn>
+                              </p:par>
+                            </p:childTnLst>
+                          </p:cTn>
+                        </p:par>
+                      </p:childTnLst>
+                    </p:cTn>
+                  </p:par>
+                  <p:par>
+                    <p:cTn fill="hold">
+                      <p:stCondLst>
+                        <p:cond delay="indefinite"/>
+                      </p:stCondLst>
+                      <p:childTnLst>
+                        <p:par>
+                          <p:cTn fill="hold">
+                            <p:stCondLst>
+                              <p:cond delay="0"/>
+                            </p:stCondLst>
+                            <p:childTnLst>
+                              <p:par>
+                                <p:cTn fill="hold" nodeType="clickEffect" presetClass="entr" presetID="1" presetSubtype="0">
+                                  <p:stCondLst>
+                                    <p:cond delay="0"/>
+                                  </p:stCondLst>
+                                  <p:childTnLst>
+                                    <p:set>
+                                      <p:cBhvr>
+                                        <p:cTn dur="1" fill="hold">
+                                          <p:stCondLst>
+                                            <p:cond delay="0"/>
+                                          </p:stCondLst>
+                                        </p:cTn>
+                                        <p:tgtEl>
+                                          <p:spTgt spid="294">
+                                            <p:txEl>
+                                              <p:pRg end="3" st="3"/>
+                                            </p:txEl>
+                                          </p:spTgt>
+                                        </p:tgtEl>
+                                        <p:attrNameLst>
+                                          <p:attrName>style.visibility</p:attrName>
+                                        </p:attrNameLst>
+                                      </p:cBhvr>
+                                      <p:to>
+                                        <p:strVal val="visible"/>
+                                      </p:to>
+                                    </p:set>
+                                  </p:childTnLst>
+                                </p:cTn>
+                              </p:par>
+                            </p:childTnLst>
+                          </p:cTn>
+                        </p:par>
+                      </p:childTnLst>
+                    </p:cTn>
+                  </p:par>
+                  <p:par>
+                    <p:cTn fill="hold">
+                      <p:stCondLst>
+                        <p:cond delay="indefinite"/>
+                      </p:stCondLst>
+                      <p:childTnLst>
+                        <p:par>
+                          <p:cTn fill="hold">
+                            <p:stCondLst>
+                              <p:cond delay="0"/>
+                            </p:stCondLst>
+                            <p:childTnLst>
+                              <p:par>
+                                <p:cTn fill="hold" nodeType="clickEffect" presetClass="entr" presetID="1" presetSubtype="0">
+                                  <p:stCondLst>
+                                    <p:cond delay="0"/>
+                                  </p:stCondLst>
+                                  <p:childTnLst>
+                                    <p:set>
+                                      <p:cBhvr>
+                                        <p:cTn dur="1" fill="hold">
+                                          <p:stCondLst>
+                                            <p:cond delay="0"/>
+                                          </p:stCondLst>
+                                        </p:cTn>
+                                        <p:tgtEl>
+                                          <p:spTgt spid="294">
+                                            <p:txEl>
+                                              <p:pRg end="4" st="4"/>
+                                            </p:txEl>
+                                          </p:spTgt>
+                                        </p:tgtEl>
+                                        <p:attrNameLst>
+                                          <p:attrName>style.visibility</p:attrName>
+                                        </p:attrNameLst>
+                                      </p:cBhvr>
+                                      <p:to>
+                                        <p:strVal val="visible"/>
+                                      </p:to>
+                                    </p:set>
+                                  </p:childTnLst>
+                                </p:cTn>
+                              </p:par>
+                            </p:childTnLst>
+                          </p:cTn>
+                        </p:par>
+                      </p:childTnLst>
+                    </p:cTn>
+                  </p:par>
+                  <p:par>
+                    <p:cTn fill="hold">
+                      <p:stCondLst>
+                        <p:cond delay="indefinite"/>
+                      </p:stCondLst>
+                      <p:childTnLst>
+                        <p:par>
+                          <p:cTn fill="hold">
+                            <p:stCondLst>
+                              <p:cond delay="0"/>
+                            </p:stCondLst>
+                            <p:childTnLst>
+                              <p:par>
+                                <p:cTn fill="hold" nodeType="clickEffect" presetClass="entr" presetID="1" presetSubtype="0">
+                                  <p:stCondLst>
+                                    <p:cond delay="0"/>
+                                  </p:stCondLst>
+                                  <p:childTnLst>
+                                    <p:set>
+                                      <p:cBhvr>
+                                        <p:cTn dur="1" fill="hold">
+                                          <p:stCondLst>
+                                            <p:cond delay="0"/>
+                                          </p:stCondLst>
+                                        </p:cTn>
+                                        <p:tgtEl>
+                                          <p:spTgt spid="294">
+                                            <p:txEl>
+                                              <p:pRg end="5" st="5"/>
+                                            </p:txEl>
+                                          </p:spTgt>
+                                        </p:tgtEl>
+                                        <p:attrNameLst>
+                                          <p:attrName>style.visibility</p:attrName>
+                                        </p:attrNameLst>
+                                      </p:cBhvr>
+                                      <p:to>
+                                        <p:strVal val="visible"/>
+                                      </p:to>
+                                    </p:set>
+                                  </p:childTnLst>
+                                </p:cTn>
+                              </p:par>
+                            </p:childTnLst>
+                          </p:cTn>
+                        </p:par>
+                      </p:childTnLst>
+                    </p:cTn>
+                  </p:par>
+                  <p:par>
+                    <p:cTn fill="hold">
+                      <p:stCondLst>
+                        <p:cond delay="indefinite"/>
+                      </p:stCondLst>
+                      <p:childTnLst>
+                        <p:par>
+                          <p:cTn fill="hold">
+                            <p:stCondLst>
+                              <p:cond delay="0"/>
+                            </p:stCondLst>
+                            <p:childTnLst>
+                              <p:par>
+                                <p:cTn fill="hold" nodeType="clickEffect" presetClass="entr" presetID="1" presetSubtype="0">
+                                  <p:stCondLst>
+                                    <p:cond delay="0"/>
+                                  </p:stCondLst>
+                                  <p:childTnLst>
+                                    <p:set>
+                                      <p:cBhvr>
+                                        <p:cTn dur="1" fill="hold">
+                                          <p:stCondLst>
+                                            <p:cond delay="0"/>
+                                          </p:stCondLst>
+                                        </p:cTn>
+                                        <p:tgtEl>
+                                          <p:spTgt spid="294">
+                                            <p:txEl>
+                                              <p:pRg end="6" st="6"/>
+                                            </p:txEl>
+                                          </p:spTgt>
+                                        </p:tgtEl>
+                                        <p:attrNameLst>
+                                          <p:attrName>style.visibility</p:attrName>
+                                        </p:attrNameLst>
+                                      </p:cBhvr>
+                                      <p:to>
+                                        <p:strVal val="visible"/>
+                                      </p:to>
+                                    </p:set>
+                                  </p:childTnLst>
+                                </p:cTn>
+                              </p:par>
+                            </p:childTnLst>
+                          </p:cTn>
+                        </p:par>
+                      </p:childTnLst>
+                    </p:cTn>
+                  </p:par>
+                  <p:par>
+                    <p:cTn fill="hold">
+                      <p:stCondLst>
+                        <p:cond delay="indefinite"/>
+                      </p:stCondLst>
+                      <p:childTnLst>
+                        <p:par>
+                          <p:cTn fill="hold">
+                            <p:stCondLst>
+                              <p:cond delay="0"/>
+                            </p:stCondLst>
+                            <p:childTnLst>
+                              <p:par>
+                                <p:cTn fill="hold" nodeType="clickEffect" presetClass="entr" presetID="1" presetSubtype="0">
+                                  <p:stCondLst>
+                                    <p:cond delay="0"/>
+                                  </p:stCondLst>
+                                  <p:childTnLst>
+                                    <p:set>
+                                      <p:cBhvr>
+                                        <p:cTn dur="1" fill="hold">
+                                          <p:stCondLst>
+                                            <p:cond delay="0"/>
+                                          </p:stCondLst>
+                                        </p:cTn>
+                                        <p:tgtEl>
+                                          <p:spTgt spid="294">
+                                            <p:txEl>
+                                              <p:pRg end="7" st="7"/>
+                                            </p:txEl>
+                                          </p:spTgt>
+                                        </p:tgtEl>
+                                        <p:attrNameLst>
+                                          <p:attrName>style.visibility</p:attrName>
+                                        </p:attrNameLst>
+                                      </p:cBhvr>
+                                      <p:to>
+                                        <p:strVal val="visible"/>
+                                      </p:to>
+                                    </p:set>
+                                  </p:childTnLst>
+                                </p:cTn>
+                              </p:par>
+                            </p:childTnLst>
+                          </p:cTn>
+                        </p:par>
+                      </p:childTnLst>
+                    </p:cTn>
+                  </p:par>
+                  <p:par>
+                    <p:cTn fill="hold">
+                      <p:stCondLst>
+                        <p:cond delay="indefinite"/>
+                      </p:stCondLst>
+                      <p:childTnLst>
+                        <p:par>
+                          <p:cTn fill="hold">
+                            <p:stCondLst>
+                              <p:cond delay="0"/>
+                            </p:stCondLst>
+                            <p:childTnLst>
+                              <p:par>
+                                <p:cTn fill="hold" nodeType="clickEffect" presetClass="entr" presetID="1" presetSubtype="0">
+                                  <p:stCondLst>
+                                    <p:cond delay="0"/>
+                                  </p:stCondLst>
+                                  <p:childTnLst>
+                                    <p:set>
+                                      <p:cBhvr>
+                                        <p:cTn dur="1" fill="hold">
+                                          <p:stCondLst>
+                                            <p:cond delay="0"/>
+                                          </p:stCondLst>
+                                        </p:cTn>
+                                        <p:tgtEl>
+                                          <p:spTgt spid="294">
+                                            <p:txEl>
+                                              <p:pRg end="8" st="8"/>
+                                            </p:txEl>
+                                          </p:spTgt>
+                                        </p:tgtEl>
+                                        <p:attrNameLst>
+                                          <p:attrName>style.visibility</p:attrName>
+                                        </p:attrNameLst>
+                                      </p:cBhvr>
+                                      <p:to>
+                                        <p:strVal val="visible"/>
+                                      </p:to>
+                                    </p:set>
+                                  </p:childTnLst>
+                                </p:cTn>
+                              </p:par>
+                            </p:childTnLst>
+                          </p:cTn>
+                        </p:par>
+                      </p:childTnLst>
+                    </p:cTn>
+                  </p:par>
+                  <p:par>
+                    <p:cTn fill="hold">
+                      <p:stCondLst>
+                        <p:cond delay="indefinite"/>
+                      </p:stCondLst>
+                      <p:childTnLst>
+                        <p:par>
+                          <p:cTn fill="hold">
+                            <p:stCondLst>
+                              <p:cond delay="0"/>
+                            </p:stCondLst>
+                            <p:childTnLst>
+                              <p:par>
+                                <p:cTn fill="hold" nodeType="clickEffect" presetClass="entr" presetID="1" presetSubtype="0">
+                                  <p:stCondLst>
+                                    <p:cond delay="0"/>
+                                  </p:stCondLst>
+                                  <p:childTnLst>
+                                    <p:set>
+                                      <p:cBhvr>
+                                        <p:cTn dur="1" fill="hold">
+                                          <p:stCondLst>
+                                            <p:cond delay="0"/>
+                                          </p:stCondLst>
+                                        </p:cTn>
+                                        <p:tgtEl>
+                                          <p:spTgt spid="294">
+                                            <p:txEl>
+                                              <p:pRg end="9" st="9"/>
+                                            </p:txEl>
+                                          </p:spTgt>
+                                        </p:tgtEl>
+                                        <p:attrNameLst>
+                                          <p:attrName>style.visibility</p:attrName>
+                                        </p:attrNameLst>
+                                      </p:cBhvr>
+                                      <p:to>
+                                        <p:strVal val="visible"/>
+                                      </p:to>
+                                    </p:set>
+                                  </p:childTnLst>
+                                </p:cTn>
+                              </p:par>
+                            </p:childTnLst>
+                          </p:cTn>
+                        </p:par>
+                      </p:childTnLst>
+                    </p:cTn>
+                  </p:par>
+                  <p:par>
+                    <p:cTn fill="hold">
+                      <p:stCondLst>
+                        <p:cond delay="indefinite"/>
+                      </p:stCondLst>
+                      <p:childTnLst>
+                        <p:par>
+                          <p:cTn fill="hold">
+                            <p:stCondLst>
+                              <p:cond delay="0"/>
+                            </p:stCondLst>
+                            <p:childTnLst>
+                              <p:par>
+                                <p:cTn fill="hold" nodeType="clickEffect" presetClass="entr" presetID="1" presetSubtype="0">
+                                  <p:stCondLst>
+                                    <p:cond delay="0"/>
+                                  </p:stCondLst>
+                                  <p:childTnLst>
+                                    <p:set>
+                                      <p:cBhvr>
+                                        <p:cTn dur="1" fill="hold">
+                                          <p:stCondLst>
+                                            <p:cond delay="0"/>
+                                          </p:stCondLst>
+                                        </p:cTn>
+                                        <p:tgtEl>
+                                          <p:spTgt spid="294">
+                                            <p:txEl>
+                                              <p:pRg end="10" st="10"/>
+                                            </p:txEl>
+                                          </p:spTgt>
+                                        </p:tgtEl>
+                                        <p:attrNameLst>
+                                          <p:attrName>style.visibility</p:attrName>
+                                        </p:attrNameLst>
+                                      </p:cBhvr>
+                                      <p:to>
+                                        <p:strVal val="visible"/>
+                                      </p:to>
+                                    </p:set>
+                                  </p:childTnLst>
+                                </p:cTn>
+                              </p:par>
+                            </p:childTnLst>
+                          </p:cTn>
+                        </p:par>
+                      </p:childTnLst>
+                    </p:cTn>
+                  </p:par>
+                  <p:par>
+                    <p:cTn fill="hold">
+                      <p:stCondLst>
+                        <p:cond delay="indefinite"/>
+                      </p:stCondLst>
+                      <p:childTnLst>
+                        <p:par>
+                          <p:cTn fill="hold">
+                            <p:stCondLst>
+                              <p:cond delay="0"/>
+                            </p:stCondLst>
+                            <p:childTnLst>
+                              <p:par>
+                                <p:cTn fill="hold" nodeType="clickEffect" presetClass="entr" presetID="1" presetSubtype="0">
+                                  <p:stCondLst>
+                                    <p:cond delay="0"/>
+                                  </p:stCondLst>
+                                  <p:childTnLst>
+                                    <p:set>
+                                      <p:cBhvr>
+                                        <p:cTn dur="1" fill="hold">
+                                          <p:stCondLst>
+                                            <p:cond delay="0"/>
+                                          </p:stCondLst>
+                                        </p:cTn>
+                                        <p:tgtEl>
+                                          <p:spTgt spid="294">
+                                            <p:txEl>
+                                              <p:pRg end="11" st="11"/>
+                                            </p:txEl>
+                                          </p:spTgt>
+                                        </p:tgtEl>
+                                        <p:attrNameLst>
+                                          <p:attrName>style.visibility</p:attrName>
+                                        </p:attrNameLst>
+                                      </p:cBhvr>
+                                      <p:to>
+                                        <p:strVal val="visible"/>
+                                      </p:to>
+                                    </p:set>
+                                  </p:childTnLst>
+                                </p:cTn>
+                              </p:par>
+                            </p:childTnLst>
+                          </p:cTn>
+                        </p:par>
+                      </p:childTnLst>
+                    </p:cTn>
+                  </p:par>
+                  <p:par>
+                    <p:cTn fill="hold">
+                      <p:stCondLst>
+                        <p:cond delay="indefinite"/>
+                      </p:stCondLst>
+                      <p:childTnLst>
+                        <p:par>
+                          <p:cTn fill="hold">
+                            <p:stCondLst>
+                              <p:cond delay="0"/>
+                            </p:stCondLst>
+                            <p:childTnLst>
+                              <p:par>
+                                <p:cTn fill="hold" nodeType="clickEffect" presetClass="entr" presetID="1" presetSubtype="0">
+                                  <p:stCondLst>
+                                    <p:cond delay="0"/>
+                                  </p:stCondLst>
+                                  <p:childTnLst>
+                                    <p:set>
+                                      <p:cBhvr>
+                                        <p:cTn dur="1" fill="hold">
+                                          <p:stCondLst>
+                                            <p:cond delay="0"/>
+                                          </p:stCondLst>
+                                        </p:cTn>
+                                        <p:tgtEl>
+                                          <p:spTgt spid="294">
+                                            <p:txEl>
+                                              <p:pRg end="12" st="12"/>
+                                            </p:txEl>
+                                          </p:spTgt>
+                                        </p:tgtEl>
+                                        <p:attrNameLst>
+                                          <p:attrName>style.visibility</p:attrName>
+                                        </p:attrNameLst>
+                                      </p:cBhvr>
+                                      <p:to>
+                                        <p:strVal val="visible"/>
+                                      </p:to>
+                                    </p:set>
+                                  </p:childTnLst>
+                                </p:cTn>
+                              </p:par>
+                            </p:childTnLst>
+                          </p:cTn>
+                        </p:par>
+                      </p:childTnLst>
+                    </p:cTn>
+                  </p:par>
+                </p:childTnLst>
+              </p:cTn>
+              <p:prevCondLst>
+                <p:cond evt="onPrev">
+                  <p:tgtEl>
+                    <p:sldTgt/>
+                  </p:tgtEl>
+                </p:cond>
+              </p:prevCondLst>
+              <p:nextCondLst>
+                <p:cond evt="onNext">
+                  <p:tgtEl>
+                    <p:sldTgt/>
+                  </p:tgtEl>
+                </p:cond>
+              </p:nextCondLst>
+            </p:seq>
+          </p:childTnLst>
+        </p:cTn>
+      </p:par>
+    </p:tnLst>
+  </p:timing>
+</p:sld>
+</file>
+
+<file path=ppt/slides/slide27.xml><?xml version="1.0" encoding="utf-8"?>
 <p:sld xmlns:a="http://schemas.openxmlformats.org/drawingml/2006/main" xmlns:r="http://schemas.openxmlformats.org/officeDocument/2006/relationships" xmlns:mc="http://schemas.openxmlformats.org/markup-compatibility/2006" xmlns:mv="urn:schemas-microsoft-com:mac:vml" xmlns:p="http://schemas.openxmlformats.org/presentationml/2006/main" xmlns:c="http://schemas.openxmlformats.org/drawingml/2006/chart" xmlns:dgm="http://schemas.openxmlformats.org/drawingml/2006/diagram" xmlns:o="urn:schemas-microsoft-com:office:office" xmlns:v="urn:schemas-microsoft-com:vml" xmlns:pvml="urn:schemas-microsoft-com:office:powerpoint" xmlns:com="http://schemas.openxmlformats.org/drawingml/2006/compatibility" xmlns:p14="http://schemas.microsoft.com/office/powerpoint/2010/main" xmlns:p15="http://schemas.microsoft.com/office/powerpoint/2012/main" xmlns:ahyp="http://schemas.microsoft.com/office/drawing/2018/hyperlinkcolor">
   <p:cSld>
     <p:spTree>
@@ -14579,6 +15114,95 @@
 </file>
 
 <file path=ppt/slides/slide3.xml><?xml version="1.0" encoding="utf-8"?>
+<p:sld xmlns:a="http://schemas.openxmlformats.org/drawingml/2006/main" xmlns:r="http://schemas.openxmlformats.org/officeDocument/2006/relationships" xmlns:mc="http://schemas.openxmlformats.org/markup-compatibility/2006" xmlns:mv="urn:schemas-microsoft-com:mac:vml" xmlns:p="http://schemas.openxmlformats.org/presentationml/2006/main" xmlns:c="http://schemas.openxmlformats.org/drawingml/2006/chart" xmlns:dgm="http://schemas.openxmlformats.org/drawingml/2006/diagram" xmlns:o="urn:schemas-microsoft-com:office:office" xmlns:v="urn:schemas-microsoft-com:vml" xmlns:pvml="urn:schemas-microsoft-com:office:powerpoint" xmlns:com="http://schemas.openxmlformats.org/drawingml/2006/compatibility" xmlns:p14="http://schemas.microsoft.com/office/powerpoint/2010/main" xmlns:p15="http://schemas.microsoft.com/office/powerpoint/2012/main" xmlns:ahyp="http://schemas.microsoft.com/office/drawing/2018/hyperlinkcolor">
+  <p:cSld>
+    <p:spTree>
+      <p:nvGrpSpPr>
+        <p:cNvPr id="44" name="Shape 44"/>
+        <p:cNvGrpSpPr/>
+        <p:nvPr/>
+      </p:nvGrpSpPr>
+      <p:grpSpPr>
+        <a:xfrm>
+          <a:off x="0" y="0"/>
+          <a:ext cx="0" cy="0"/>
+          <a:chOff x="0" y="0"/>
+          <a:chExt cx="0" cy="0"/>
+        </a:xfrm>
+      </p:grpSpPr>
+      <p:sp>
+        <p:nvSpPr>
+          <p:cNvPr id="45" name="Google Shape;45;p10"/>
+          <p:cNvSpPr txBox="1"/>
+          <p:nvPr>
+            <p:ph type="title"/>
+          </p:nvPr>
+        </p:nvSpPr>
+        <p:spPr>
+          <a:xfrm>
+            <a:off x="311700" y="195615"/>
+            <a:ext cx="8520600" cy="572700"/>
+          </a:xfrm>
+          <a:prstGeom prst="rect">
+            <a:avLst/>
+          </a:prstGeom>
+        </p:spPr>
+        <p:txBody>
+          <a:bodyPr anchorCtr="0" anchor="t" bIns="91425" lIns="91425" spcFirstLastPara="1" rIns="91425" wrap="square" tIns="91425">
+            <a:normAutofit fontScale="90000"/>
+          </a:bodyPr>
+          <a:lstStyle/>
+          <a:p>
+            <a:pPr indent="0" lvl="0" marL="0" rtl="0" algn="l">
+              <a:spcBef>
+                <a:spcPts val="0"/>
+              </a:spcBef>
+              <a:spcAft>
+                <a:spcPts val="0"/>
+              </a:spcAft>
+              <a:buNone/>
+            </a:pPr>
+            <a:r>
+              <a:rPr lang="en"/>
+              <a:t>Today’s Goal</a:t>
+            </a:r>
+            <a:endParaRPr/>
+          </a:p>
+        </p:txBody>
+      </p:sp>
+      <p:pic>
+        <p:nvPicPr>
+          <p:cNvPr id="46" name="Picture 46" descr="pvz-play2.png"/>
+          <p:cNvPicPr>
+            <a:picLocks noChangeAspect="1"/>
+          </p:cNvPicPr>
+          <p:nvPr/>
+        </p:nvPicPr>
+        <p:blipFill>
+          <a:blip r:embed="rId4"/>
+          <a:stretch>
+            <a:fillRect/>
+          </a:stretch>
+        </p:blipFill>
+        <p:spPr>
+          <a:xfrm>
+            <a:off x="1677201" y="1531275"/>
+            <a:ext cx="5789598" cy="3256648"/>
+          </a:xfrm>
+          <a:prstGeom prst="rect">
+            <a:avLst/>
+          </a:prstGeom>
+        </p:spPr>
+      </p:pic>
+    </p:spTree>
+  </p:cSld>
+  <p:clrMapOvr>
+    <a:masterClrMapping/>
+  </p:clrMapOvr>
+</p:sld>
+</file>
+
+<file path=ppt/slides/slide4.xml><?xml version="1.0" encoding="utf-8"?>
 <p:sld xmlns:a="http://schemas.openxmlformats.org/drawingml/2006/main" xmlns:r="http://schemas.openxmlformats.org/officeDocument/2006/relationships" xmlns:mc="http://schemas.openxmlformats.org/markup-compatibility/2006" xmlns:mv="urn:schemas-microsoft-com:mac:vml" xmlns:p="http://schemas.openxmlformats.org/presentationml/2006/main" xmlns:c="http://schemas.openxmlformats.org/drawingml/2006/chart" xmlns:dgm="http://schemas.openxmlformats.org/drawingml/2006/diagram" xmlns:o="urn:schemas-microsoft-com:office:office" xmlns:v="urn:schemas-microsoft-com:vml" xmlns:pvml="urn:schemas-microsoft-com:office:powerpoint" xmlns:com="http://schemas.openxmlformats.org/drawingml/2006/compatibility" xmlns:p14="http://schemas.microsoft.com/office/powerpoint/2010/main" xmlns:p15="http://schemas.microsoft.com/office/powerpoint/2012/main" xmlns:ahyp="http://schemas.microsoft.com/office/drawing/2018/hyperlinkcolor">
   <p:cSld>
     <p:spTree>
@@ -15044,7 +15668,7 @@
 </p:sld>
 </file>
 
-<file path=ppt/slides/slide4.xml><?xml version="1.0" encoding="utf-8"?>
+<file path=ppt/slides/slide5.xml><?xml version="1.0" encoding="utf-8"?>
 <p:sld xmlns:a="http://schemas.openxmlformats.org/drawingml/2006/main" xmlns:r="http://schemas.openxmlformats.org/officeDocument/2006/relationships" xmlns:mc="http://schemas.openxmlformats.org/markup-compatibility/2006" xmlns:mv="urn:schemas-microsoft-com:mac:vml" xmlns:p="http://schemas.openxmlformats.org/presentationml/2006/main" xmlns:c="http://schemas.openxmlformats.org/drawingml/2006/chart" xmlns:dgm="http://schemas.openxmlformats.org/drawingml/2006/diagram" xmlns:o="urn:schemas-microsoft-com:office:office" xmlns:v="urn:schemas-microsoft-com:vml" xmlns:pvml="urn:schemas-microsoft-com:office:powerpoint" xmlns:com="http://schemas.openxmlformats.org/drawingml/2006/compatibility" xmlns:p14="http://schemas.microsoft.com/office/powerpoint/2010/main" xmlns:p15="http://schemas.microsoft.com/office/powerpoint/2012/main" xmlns:ahyp="http://schemas.microsoft.com/office/drawing/2018/hyperlinkcolor">
   <p:cSld>
     <p:spTree>
@@ -15184,7 +15808,7 @@
 </p:sld>
 </file>
 
-<file path=ppt/slides/slide5.xml><?xml version="1.0" encoding="utf-8"?>
+<file path=ppt/slides/slide6.xml><?xml version="1.0" encoding="utf-8"?>
 <p:sld xmlns:a="http://schemas.openxmlformats.org/drawingml/2006/main" xmlns:p="http://schemas.openxmlformats.org/presentationml/2006/main" xmlns:r="http://schemas.openxmlformats.org/officeDocument/2006/relationships">
   <p:cSld>
     <p:spTree>
@@ -15980,7 +16604,7 @@
 </p:sld>
 </file>
 
-<file path=ppt/slides/slide6.xml><?xml version="1.0" encoding="utf-8"?>
+<file path=ppt/slides/slide7.xml><?xml version="1.0" encoding="utf-8"?>
 <p:sld xmlns:a="http://schemas.openxmlformats.org/drawingml/2006/main" xmlns:p="http://schemas.openxmlformats.org/presentationml/2006/main" xmlns:r="http://schemas.openxmlformats.org/officeDocument/2006/relationships">
   <p:cSld>
     <p:spTree>
@@ -16543,7 +17167,7 @@
 </p:sld>
 </file>
 
-<file path=ppt/slides/slide7.xml><?xml version="1.0" encoding="utf-8"?>
+<file path=ppt/slides/slide8.xml><?xml version="1.0" encoding="utf-8"?>
 <p:sld xmlns:a="http://schemas.openxmlformats.org/drawingml/2006/main" xmlns:p="http://schemas.openxmlformats.org/presentationml/2006/main" xmlns:r="http://schemas.openxmlformats.org/officeDocument/2006/relationships">
   <p:cSld>
     <p:spTree>
@@ -16670,7 +17294,7 @@
 </p:sld>
 </file>
 
-<file path=ppt/slides/slide8.xml><?xml version="1.0" encoding="utf-8"?>
+<file path=ppt/slides/slide9.xml><?xml version="1.0" encoding="utf-8"?>
 <p:sld xmlns:a="http://schemas.openxmlformats.org/drawingml/2006/main" xmlns:p="http://schemas.openxmlformats.org/presentationml/2006/main" xmlns:r="http://schemas.openxmlformats.org/officeDocument/2006/relationships">
   <p:cSld>
     <p:spTree>
@@ -17285,453 +17909,6 @@
                 </a:solidFill>
               </a:rPr>
               <a:t>The World keeps one list per class.</a:t>
-            </a:r>
-          </a:p>
-        </p:txBody>
-      </p:sp>
-    </p:spTree>
-  </p:cSld>
-  <p:clrMapOvr>
-    <a:masterClrMapping/>
-  </p:clrMapOvr>
-</p:sld>
-</file>
-
-<file path=ppt/slides/slide9.xml><?xml version="1.0" encoding="utf-8"?>
-<p:sld xmlns:a="http://schemas.openxmlformats.org/drawingml/2006/main" xmlns:p="http://schemas.openxmlformats.org/presentationml/2006/main" xmlns:r="http://schemas.openxmlformats.org/officeDocument/2006/relationships">
-  <p:cSld>
-    <p:spTree>
-      <p:nvGrpSpPr>
-        <p:cNvPr id="1" name=""/>
-        <p:cNvGrpSpPr/>
-        <p:nvPr/>
-      </p:nvGrpSpPr>
-      <p:grpSpPr/>
-      <p:sp>
-        <p:nvSpPr>
-          <p:cNvPr id="293" name="Google Shape;293;p45"/>
-          <p:cNvSpPr txBox="1"/>
-          <p:nvPr>
-            <p:ph type="title"/>
-          </p:nvPr>
-        </p:nvSpPr>
-        <p:spPr>
-          <a:xfrm>
-            <a:off x="311700" y="195615"/>
-            <a:ext cx="8520600" cy="572700"/>
-          </a:xfrm>
-          <a:prstGeom prst="rect">
-            <a:avLst/>
-          </a:prstGeom>
-        </p:spPr>
-        <p:txBody>
-          <a:bodyPr anchorCtr="0" anchor="t" bIns="91425" lIns="91425" spcFirstLastPara="1" rIns="91425" wrap="square" tIns="91425">
-            <a:normAutofit fontScale="90000"/>
-          </a:bodyPr>
-          <a:lstStyle/>
-          <a:p>
-            <a:pPr indent="0" lvl="0" marL="0" rtl="0" algn="l">
-              <a:spcBef>
-                <a:spcPts val="0"/>
-              </a:spcBef>
-              <a:spcAft>
-                <a:spcPts val="0"/>
-              </a:spcAft>
-              <a:buNone/>
-            </a:pPr>
-            <a:r>
-              <a:rPr lang="en">
-                <a:solidFill>
-                  <a:schemeClr val="accent5"/>
-                </a:solidFill>
-              </a:rPr>
-              <a:t>Where Inheritance Breaks</a:t>
-            </a:r>
-            <a:endParaRPr>
-              <a:solidFill>
-                <a:schemeClr val="accent5"/>
-              </a:solidFill>
-            </a:endParaRPr>
-          </a:p>
-        </p:txBody>
-      </p:sp>
-      <p:sp>
-        <p:nvSpPr>
-          <p:cNvPr id="294" name="Google Shape;294;p45"/>
-          <p:cNvSpPr txBox="1"/>
-          <p:nvPr>
-            <p:ph idx="1" type="body"/>
-          </p:nvPr>
-        </p:nvSpPr>
-        <p:spPr>
-          <a:xfrm>
-            <a:off x="311700" y="885950"/>
-            <a:ext cx="8520600" cy="521208"/>
-          </a:xfrm>
-          <a:prstGeom prst="rect">
-            <a:avLst/>
-          </a:prstGeom>
-        </p:spPr>
-        <p:txBody>
-          <a:bodyPr anchorCtr="0" anchor="t" bIns="91425" lIns="91425" spcFirstLastPara="1" rIns="91425" wrap="square" tIns="91425">
-            <a:normAutofit/>
-          </a:bodyPr>
-          <a:lstStyle/>
-          <a:p>
-            <a:pPr indent="-330200" lvl="0" marL="457200" rtl="0" algn="l">
-              <a:spcBef>
-                <a:spcPts val="0"/>
-              </a:spcBef>
-              <a:spcAft>
-                <a:spcPts val="0"/>
-              </a:spcAft>
-              <a:buSzPts val="1600"/>
-              <a:buChar char="●"/>
-            </a:pPr>
-            <a:r>
-              <a:rPr lang="en"/>
-              <a:t>Four new things. Where does each one go?</a:t>
-            </a:r>
-            <a:endParaRPr/>
-          </a:p>
-        </p:txBody>
-      </p:sp>
-      <p:sp>
-        <p:nvSpPr>
-          <p:cNvPr id="295" name="Rounded Rectangle 294"/>
-          <p:cNvSpPr/>
-          <p:nvPr/>
-        </p:nvSpPr>
-        <p:spPr>
-          <a:xfrm>
-            <a:off x="411480" y="1417320"/>
-            <a:ext cx="1965960" cy="1188720"/>
-          </a:xfrm>
-          <a:prstGeom prst="roundRect">
-            <a:avLst>
-              <a:gd name="adj" fmla="val 12000"/>
-            </a:avLst>
-          </a:prstGeom>
-          <a:solidFill>
-            <a:srgbClr val="2E3338"/>
-          </a:solidFill>
-          <a:ln>
-            <a:noFill/>
-          </a:ln>
-          <a:effectLst/>
-        </p:spPr>
-        <p:style>
-          <a:lnRef idx="1">
-            <a:schemeClr val="accent1"/>
-          </a:lnRef>
-          <a:fillRef idx="3">
-            <a:schemeClr val="accent1"/>
-          </a:fillRef>
-          <a:effectRef idx="2">
-            <a:schemeClr val="accent1"/>
-          </a:effectRef>
-          <a:fontRef idx="minor">
-            <a:schemeClr val="lt1"/>
-          </a:fontRef>
-        </p:style>
-        <p:txBody>
-          <a:bodyPr rtlCol="0" anchor="ctr" wrap="square" lIns="73152" rIns="73152"/>
-          <a:lstStyle/>
-          <a:p>
-            <a:pPr algn="ctr"/>
-            <a:r>
-              <a:rPr sz="1500" b="1">
-                <a:solidFill>
-                  <a:srgbClr val="DEE2E6"/>
-                </a:solidFill>
-              </a:rPr>
-              <a:t>Repeater</a:t>
-            </a:r>
-          </a:p>
-          <a:p>
-            <a:pPr algn="ctr"/>
-            <a:r>
-              <a:rPr sz="1300" b="0">
-                <a:solidFill>
-                  <a:srgbClr val="9AA3AB"/>
-                </a:solidFill>
-              </a:rPr>
-              <a:t>a Peashooter subclass</a:t>
-            </a:r>
-          </a:p>
-          <a:p>
-            <a:pPr algn="ctr"/>
-            <a:r>
-              <a:rPr sz="1300" b="0">
-                <a:solidFill>
-                  <a:srgbClr val="9AA3AB"/>
-                </a:solidFill>
-              </a:rPr>
-              <a:t>that overrides... what?</a:t>
-            </a:r>
-          </a:p>
-        </p:txBody>
-      </p:sp>
-      <p:sp>
-        <p:nvSpPr>
-          <p:cNvPr id="296" name="Rounded Rectangle 295"/>
-          <p:cNvSpPr/>
-          <p:nvPr/>
-        </p:nvSpPr>
-        <p:spPr>
-          <a:xfrm>
-            <a:off x="2514600" y="1417320"/>
-            <a:ext cx="1965960" cy="1188720"/>
-          </a:xfrm>
-          <a:prstGeom prst="roundRect">
-            <a:avLst>
-              <a:gd name="adj" fmla="val 12000"/>
-            </a:avLst>
-          </a:prstGeom>
-          <a:solidFill>
-            <a:srgbClr val="2E3338"/>
-          </a:solidFill>
-          <a:ln>
-            <a:noFill/>
-          </a:ln>
-          <a:effectLst/>
-        </p:spPr>
-        <p:style>
-          <a:lnRef idx="1">
-            <a:schemeClr val="accent1"/>
-          </a:lnRef>
-          <a:fillRef idx="3">
-            <a:schemeClr val="accent1"/>
-          </a:fillRef>
-          <a:effectRef idx="2">
-            <a:schemeClr val="accent1"/>
-          </a:effectRef>
-          <a:fontRef idx="minor">
-            <a:schemeClr val="lt1"/>
-          </a:fontRef>
-        </p:style>
-        <p:txBody>
-          <a:bodyPr rtlCol="0" anchor="ctr" wrap="square" lIns="73152" rIns="73152"/>
-          <a:lstStyle/>
-          <a:p>
-            <a:pPr algn="ctr"/>
-            <a:r>
-              <a:rPr sz="1500" b="1">
-                <a:solidFill>
-                  <a:srgbClr val="DEE2E6"/>
-                </a:solidFill>
-              </a:rPr>
-              <a:t>Conehead</a:t>
-            </a:r>
-          </a:p>
-          <a:p>
-            <a:pPr algn="ctr"/>
-            <a:r>
-              <a:rPr sz="1300" b="0">
-                <a:solidFill>
-                  <a:srgbClr val="9AA3AB"/>
-                </a:solidFill>
-              </a:rPr>
-              <a:t>a Zombie subclass;</a:t>
-            </a:r>
-          </a:p>
-          <a:p>
-            <a:pPr algn="ctr"/>
-            <a:r>
-              <a:rPr sz="1300" b="0">
-                <a:solidFill>
-                  <a:srgbClr val="9AA3AB"/>
-                </a:solidFill>
-              </a:rPr>
-              <a:t>armour for a plant: copy it</a:t>
-            </a:r>
-          </a:p>
-        </p:txBody>
-      </p:sp>
-      <p:sp>
-        <p:nvSpPr>
-          <p:cNvPr id="297" name="Rounded Rectangle 296"/>
-          <p:cNvSpPr/>
-          <p:nvPr/>
-        </p:nvSpPr>
-        <p:spPr>
-          <a:xfrm>
-            <a:off x="4617720" y="1417320"/>
-            <a:ext cx="1965960" cy="1188720"/>
-          </a:xfrm>
-          <a:prstGeom prst="roundRect">
-            <a:avLst>
-              <a:gd name="adj" fmla="val 12000"/>
-            </a:avLst>
-          </a:prstGeom>
-          <a:solidFill>
-            <a:srgbClr val="2E3338"/>
-          </a:solidFill>
-          <a:ln w="25400">
-            <a:solidFill>
-              <a:srgbClr val="D45D35"/>
-            </a:solidFill>
-          </a:ln>
-          <a:effectLst/>
-        </p:spPr>
-        <p:style>
-          <a:lnRef idx="1">
-            <a:schemeClr val="accent1"/>
-          </a:lnRef>
-          <a:fillRef idx="3">
-            <a:schemeClr val="accent1"/>
-          </a:fillRef>
-          <a:effectRef idx="2">
-            <a:schemeClr val="accent1"/>
-          </a:effectRef>
-          <a:fontRef idx="minor">
-            <a:schemeClr val="lt1"/>
-          </a:fontRef>
-        </p:style>
-        <p:txBody>
-          <a:bodyPr rtlCol="0" anchor="ctr" wrap="square" lIns="73152" rIns="73152"/>
-          <a:lstStyle/>
-          <a:p>
-            <a:pPr algn="ctr"/>
-            <a:r>
-              <a:rPr sz="1500" b="1">
-                <a:solidFill>
-                  <a:srgbClr val="DEE2E6"/>
-                </a:solidFill>
-              </a:rPr>
-              <a:t>Shoots and makes sun</a:t>
-            </a:r>
-          </a:p>
-          <a:p>
-            <a:pPr algn="ctr"/>
-            <a:r>
-              <a:rPr sz="1300" b="0">
-                <a:solidFill>
-                  <a:srgbClr val="9AA3AB"/>
-                </a:solidFill>
-              </a:rPr>
-              <a:t>which parent?</a:t>
-            </a:r>
-          </a:p>
-          <a:p>
-            <a:pPr algn="ctr"/>
-            <a:r>
-              <a:rPr sz="1300" b="0">
-                <a:solidFill>
-                  <a:srgbClr val="9AA3AB"/>
-                </a:solidFill>
-              </a:rPr>
-              <a:t>C# allows only one</a:t>
-            </a:r>
-          </a:p>
-        </p:txBody>
-      </p:sp>
-      <p:sp>
-        <p:nvSpPr>
-          <p:cNvPr id="298" name="Rounded Rectangle 297"/>
-          <p:cNvSpPr/>
-          <p:nvPr/>
-        </p:nvSpPr>
-        <p:spPr>
-          <a:xfrm>
-            <a:off x="6720840" y="1417320"/>
-            <a:ext cx="1965960" cy="1188720"/>
-          </a:xfrm>
-          <a:prstGeom prst="roundRect">
-            <a:avLst>
-              <a:gd name="adj" fmla="val 12000"/>
-            </a:avLst>
-          </a:prstGeom>
-          <a:solidFill>
-            <a:srgbClr val="2E3338"/>
-          </a:solidFill>
-          <a:ln>
-            <a:noFill/>
-          </a:ln>
-          <a:effectLst/>
-        </p:spPr>
-        <p:style>
-          <a:lnRef idx="1">
-            <a:schemeClr val="accent1"/>
-          </a:lnRef>
-          <a:fillRef idx="3">
-            <a:schemeClr val="accent1"/>
-          </a:fillRef>
-          <a:effectRef idx="2">
-            <a:schemeClr val="accent1"/>
-          </a:effectRef>
-          <a:fontRef idx="minor">
-            <a:schemeClr val="lt1"/>
-          </a:fontRef>
-        </p:style>
-        <p:txBody>
-          <a:bodyPr rtlCol="0" anchor="ctr" wrap="square" lIns="73152" rIns="73152"/>
-          <a:lstStyle/>
-          <a:p>
-            <a:pPr algn="ctr"/>
-            <a:r>
-              <a:rPr sz="1500" b="1">
-                <a:solidFill>
-                  <a:srgbClr val="DEE2E6"/>
-                </a:solidFill>
-              </a:rPr>
-              <a:t>Health</a:t>
-            </a:r>
-          </a:p>
-          <a:p>
-            <a:pPr algn="ctr"/>
-            <a:r>
-              <a:rPr sz="1300" b="0">
-                <a:solidFill>
-                  <a:srgbClr val="9AA3AB"/>
-                </a:solidFill>
-              </a:rPr>
-              <a:t>already copied:</a:t>
-            </a:r>
-          </a:p>
-          <a:p>
-            <a:pPr algn="ctr"/>
-            <a:r>
-              <a:rPr sz="1300" b="0">
-                <a:solidFill>
-                  <a:srgbClr val="9AA3AB"/>
-                </a:solidFill>
-              </a:rPr>
-              <a:t>a zombie isn’t a plant</a:t>
-            </a:r>
-          </a:p>
-        </p:txBody>
-      </p:sp>
-      <p:sp>
-        <p:nvSpPr>
-          <p:cNvPr id="299" name="TextBox 298"/>
-          <p:cNvSpPr txBox="1"/>
-          <p:nvPr/>
-        </p:nvSpPr>
-        <p:spPr>
-          <a:xfrm>
-            <a:off x="457200" y="2926080"/>
-            <a:ext cx="8229600" cy="731520"/>
-          </a:xfrm>
-          <a:prstGeom prst="rect">
-            <a:avLst/>
-          </a:prstGeom>
-          <a:noFill/>
-        </p:spPr>
-        <p:txBody>
-          <a:bodyPr wrap="square">
-            <a:spAutoFit/>
-          </a:bodyPr>
-          <a:lstStyle/>
-          <a:p>
-            <a:pPr algn="ctr"/>
-            <a:r>
-              <a:rPr sz="1600" b="1" i="0">
-                <a:solidFill>
-                  <a:srgbClr val="DEE2E6"/>
-                </a:solidFill>
-              </a:rPr>
-              <a:t>Inheritance describes what something is. In this game, what it can do matters more.</a:t>
             </a:r>
           </a:p>
         </p:txBody>

--- a/slides/09 Plants vs. Zombies.pptx
+++ b/slides/09 Plants vs. Zombies.pptx
@@ -16,18 +16,22 @@
     <p:sldId id="297" r:id="rId56"/>
     <p:sldId id="298" r:id="rId57"/>
     <p:sldId id="299" r:id="rId58"/>
+    <p:sldId id="318" r:id="rId36"/>
     <p:sldId id="300" r:id="rId59"/>
     <p:sldId id="301" r:id="rId60"/>
     <p:sldId id="302" r:id="rId61"/>
+    <p:sldId id="317" r:id="rId37"/>
     <p:sldId id="303" r:id="rId62"/>
     <p:sldId id="304" r:id="rId63"/>
     <p:sldId id="305" r:id="rId64"/>
     <p:sldId id="306" r:id="rId65"/>
     <p:sldId id="307" r:id="rId66"/>
+    <p:sldId id="316" r:id="rId38"/>
     <p:sldId id="308" r:id="rId67"/>
     <p:sldId id="309" r:id="rId68"/>
     <p:sldId id="310" r:id="rId69"/>
     <p:sldId id="311" r:id="rId70"/>
+    <p:sldId id="315" r:id="rId39"/>
     <p:sldId id="312" r:id="rId71"/>
     <p:sldId id="280" r:id="rId30"/>
     <p:sldId id="292" r:id="rId42"/>
@@ -2119,6 +2123,122 @@
 </p:notes>
 </file>
 
+<file path=ppt/notesSlides/notesSlide28.xml><?xml version="1.0" encoding="utf-8"?>
+<p:notes xmlns:a="http://schemas.openxmlformats.org/drawingml/2006/main" xmlns:p="http://schemas.openxmlformats.org/presentationml/2006/main" xmlns:r="http://schemas.openxmlformats.org/officeDocument/2006/relationships">
+  <p:cSld>
+    <p:spTree>
+      <p:nvGrpSpPr>
+        <p:cNvPr id="1" name=""/>
+        <p:cNvGrpSpPr/>
+        <p:nvPr/>
+      </p:nvGrpSpPr>
+      <p:grpSpPr>
+        <a:xfrm>
+          <a:off x="0" y="0"/>
+          <a:ext cx="0" cy="0"/>
+          <a:chOff x="0" y="0"/>
+          <a:chExt cx="0" cy="0"/>
+        </a:xfrm>
+      </p:grpSpPr>
+      <p:sp>
+        <p:nvSpPr>
+          <p:cNvPr id="2" name="Slide Image Placeholder 1"/>
+          <p:cNvSpPr>
+            <a:spLocks noGrp="1"/>
+          </p:cNvSpPr>
+          <p:nvPr>
+            <p:ph type="sldImg" idx="2"/>
+          </p:nvPr>
+        </p:nvSpPr>
+        <p:spPr/>
+      </p:sp>
+      <p:sp>
+        <p:nvSpPr>
+          <p:cNvPr id="3" name="Notes Placeholder 2"/>
+          <p:cNvSpPr>
+            <a:spLocks noGrp="1"/>
+          </p:cNvSpPr>
+          <p:nvPr>
+            <p:ph type="body" idx="1"/>
+          </p:nvPr>
+        </p:nvSpPr>
+        <p:spPr/>
+        <p:txBody>
+          <a:bodyPr/>
+          <a:lstStyle/>
+          <a:p>
+            <a:r>
+              <a:t>Pairs, about 5 minutes. Only data changes; the next run picks it up.</a:t>
+            </a:r>
+          </a:p>
+        </p:txBody>
+      </p:sp>
+    </p:spTree>
+  </p:cSld>
+  <p:clrMapOvr>
+    <a:masterClrMapping/>
+  </p:clrMapOvr>
+</p:notes>
+</file>
+
+<file path=ppt/notesSlides/notesSlide29.xml><?xml version="1.0" encoding="utf-8"?>
+<p:notes xmlns:a="http://schemas.openxmlformats.org/drawingml/2006/main" xmlns:p="http://schemas.openxmlformats.org/presentationml/2006/main" xmlns:r="http://schemas.openxmlformats.org/officeDocument/2006/relationships">
+  <p:cSld>
+    <p:spTree>
+      <p:nvGrpSpPr>
+        <p:cNvPr id="1" name=""/>
+        <p:cNvGrpSpPr/>
+        <p:nvPr/>
+      </p:nvGrpSpPr>
+      <p:grpSpPr>
+        <a:xfrm>
+          <a:off x="0" y="0"/>
+          <a:ext cx="0" cy="0"/>
+          <a:chOff x="0" y="0"/>
+          <a:chExt cx="0" cy="0"/>
+        </a:xfrm>
+      </p:grpSpPr>
+      <p:sp>
+        <p:nvSpPr>
+          <p:cNvPr id="2" name="Slide Image Placeholder 1"/>
+          <p:cNvSpPr>
+            <a:spLocks noGrp="1"/>
+          </p:cNvSpPr>
+          <p:nvPr>
+            <p:ph type="sldImg" idx="2"/>
+          </p:nvPr>
+        </p:nvSpPr>
+        <p:spPr/>
+      </p:sp>
+      <p:sp>
+        <p:nvSpPr>
+          <p:cNvPr id="3" name="Notes Placeholder 2"/>
+          <p:cNvSpPr>
+            <a:spLocks noGrp="1"/>
+          </p:cNvSpPr>
+          <p:nvPr>
+            <p:ph type="body" idx="1"/>
+          </p:nvPr>
+        </p:nvSpPr>
+        <p:spPr/>
+        <p:txBody>
+          <a:bodyPr/>
+          <a:lstStyle/>
+          <a:p>
+            <a:r>
+              <a:t>Pairs, about 7 minutes. One recipe: Plant(...).With(new Shooter(...)).With(new SunProducer(...)), and one AddPacket line. Compare with the Repeater by inheritance.</a:t>
+            </a:r>
+          </a:p>
+        </p:txBody>
+      </p:sp>
+    </p:spTree>
+  </p:cSld>
+  <p:clrMapOvr>
+    <a:masterClrMapping/>
+  </p:clrMapOvr>
+</p:notes>
+</file>
+
 <file path=ppt/notesSlides/notesSlide3.xml><?xml version="1.0" encoding="utf-8"?>
 <p:notes xmlns:a="http://schemas.openxmlformats.org/drawingml/2006/main" xmlns:r="http://schemas.openxmlformats.org/officeDocument/2006/relationships" xmlns:mc="http://schemas.openxmlformats.org/markup-compatibility/2006" xmlns:mv="urn:schemas-microsoft-com:mac:vml" xmlns:p="http://schemas.openxmlformats.org/presentationml/2006/main" xmlns:c="http://schemas.openxmlformats.org/drawingml/2006/chart" xmlns:dgm="http://schemas.openxmlformats.org/drawingml/2006/diagram" xmlns:o="urn:schemas-microsoft-com:office:office" xmlns:v="urn:schemas-microsoft-com:vml" xmlns:pvml="urn:schemas-microsoft-com:office:powerpoint" xmlns:com="http://schemas.openxmlformats.org/drawingml/2006/compatibility" xmlns:p14="http://schemas.microsoft.com/office/powerpoint/2010/main" xmlns:p15="http://schemas.microsoft.com/office/powerpoint/2012/main" xmlns:ahyp="http://schemas.microsoft.com/office/drawing/2018/hyperlinkcolor" showMasterPhAnim="0" showMasterSp="0">
   <p:cSld>
@@ -2196,6 +2316,122 @@
           <a:p>
             <a:r>
               <a:t>The main topic: the Component pattern. First picking with the mouse, then where inheritance breaks, then components, then Type Object.</a:t>
+            </a:r>
+          </a:p>
+        </p:txBody>
+      </p:sp>
+    </p:spTree>
+  </p:cSld>
+  <p:clrMapOvr>
+    <a:masterClrMapping/>
+  </p:clrMapOvr>
+</p:notes>
+</file>
+
+<file path=ppt/notesSlides/notesSlide30.xml><?xml version="1.0" encoding="utf-8"?>
+<p:notes xmlns:a="http://schemas.openxmlformats.org/drawingml/2006/main" xmlns:p="http://schemas.openxmlformats.org/presentationml/2006/main" xmlns:r="http://schemas.openxmlformats.org/officeDocument/2006/relationships">
+  <p:cSld>
+    <p:spTree>
+      <p:nvGrpSpPr>
+        <p:cNvPr id="1" name=""/>
+        <p:cNvGrpSpPr/>
+        <p:nvPr/>
+      </p:nvGrpSpPr>
+      <p:grpSpPr>
+        <a:xfrm>
+          <a:off x="0" y="0"/>
+          <a:ext cx="0" cy="0"/>
+          <a:chOff x="0" y="0"/>
+          <a:chExt cx="0" cy="0"/>
+        </a:xfrm>
+      </p:grpSpPr>
+      <p:sp>
+        <p:nvSpPr>
+          <p:cNvPr id="2" name="Slide Image Placeholder 1"/>
+          <p:cNvSpPr>
+            <a:spLocks noGrp="1"/>
+          </p:cNvSpPr>
+          <p:nvPr>
+            <p:ph type="sldImg" idx="2"/>
+          </p:nvPr>
+        </p:nvSpPr>
+        <p:spPr/>
+      </p:sp>
+      <p:sp>
+        <p:nvSpPr>
+          <p:cNvPr id="3" name="Notes Placeholder 2"/>
+          <p:cNvSpPr>
+            <a:spLocks noGrp="1"/>
+          </p:cNvSpPr>
+          <p:nvPr>
+            <p:ph type="body" idx="1"/>
+          </p:nvPr>
+        </p:nvSpPr>
+        <p:spPr/>
+        <p:txBody>
+          <a:bodyPr/>
+          <a:lstStyle/>
+          <a:p>
+            <a:r>
+              <a:t>Pairs, about 7 minutes. Peashooter.Update fires one pea, with its interval as a private constant. A subclass cannot change either without Peashooter opening up (a virtual method or a protected field).</a:t>
+            </a:r>
+          </a:p>
+        </p:txBody>
+      </p:sp>
+    </p:spTree>
+  </p:cSld>
+  <p:clrMapOvr>
+    <a:masterClrMapping/>
+  </p:clrMapOvr>
+</p:notes>
+</file>
+
+<file path=ppt/notesSlides/notesSlide31.xml><?xml version="1.0" encoding="utf-8"?>
+<p:notes xmlns:a="http://schemas.openxmlformats.org/drawingml/2006/main" xmlns:p="http://schemas.openxmlformats.org/presentationml/2006/main" xmlns:r="http://schemas.openxmlformats.org/officeDocument/2006/relationships">
+  <p:cSld>
+    <p:spTree>
+      <p:nvGrpSpPr>
+        <p:cNvPr id="1" name=""/>
+        <p:cNvGrpSpPr/>
+        <p:nvPr/>
+      </p:nvGrpSpPr>
+      <p:grpSpPr>
+        <a:xfrm>
+          <a:off x="0" y="0"/>
+          <a:ext cx="0" cy="0"/>
+          <a:chOff x="0" y="0"/>
+          <a:chExt cx="0" cy="0"/>
+        </a:xfrm>
+      </p:grpSpPr>
+      <p:sp>
+        <p:nvSpPr>
+          <p:cNvPr id="2" name="Slide Image Placeholder 1"/>
+          <p:cNvSpPr>
+            <a:spLocks noGrp="1"/>
+          </p:cNvSpPr>
+          <p:nvPr>
+            <p:ph type="sldImg" idx="2"/>
+          </p:nvPr>
+        </p:nvSpPr>
+        <p:spPr/>
+      </p:sp>
+      <p:sp>
+        <p:nvSpPr>
+          <p:cNvPr id="3" name="Notes Placeholder 2"/>
+          <p:cNvSpPr>
+            <a:spLocks noGrp="1"/>
+          </p:cNvSpPr>
+          <p:nvPr>
+            <p:ph type="body" idx="1"/>
+          </p:nvPr>
+        </p:nvSpPr>
+        <p:spPr/>
+        <p:txBody>
+          <a:bodyPr/>
+          <a:lstStyle/>
+          <a:p>
+            <a:r>
+              <a:t>Pairs, about 5 minutes. Window.Title = $"{cell}" in Update. Off the lawn, CellAt returns null: not every point is a cell.</a:t>
             </a:r>
           </a:p>
         </p:txBody>
@@ -6342,6 +6578,633 @@
                   <a:schemeClr val="accent5"/>
                 </a:solidFill>
               </a:rPr>
+              <a:t>Plants and Zombies With Inheritance</a:t>
+            </a:r>
+            <a:endParaRPr>
+              <a:solidFill>
+                <a:schemeClr val="accent5"/>
+              </a:solidFill>
+            </a:endParaRPr>
+          </a:p>
+        </p:txBody>
+      </p:sp>
+      <p:sp>
+        <p:nvSpPr>
+          <p:cNvPr id="294" name="Google Shape;294;p45"/>
+          <p:cNvSpPr txBox="1"/>
+          <p:nvPr>
+            <p:ph idx="1" type="body"/>
+          </p:nvPr>
+        </p:nvSpPr>
+        <p:spPr>
+          <a:xfrm>
+            <a:off x="311700" y="885950"/>
+            <a:ext cx="8520600" cy="521208"/>
+          </a:xfrm>
+          <a:prstGeom prst="rect">
+            <a:avLst/>
+          </a:prstGeom>
+        </p:spPr>
+        <p:txBody>
+          <a:bodyPr anchorCtr="0" anchor="t" bIns="91425" lIns="91425" spcFirstLastPara="1" rIns="91425" wrap="square" tIns="91425">
+            <a:normAutofit/>
+          </a:bodyPr>
+          <a:lstStyle/>
+          <a:p>
+            <a:pPr indent="-330200" lvl="0" marL="457200" rtl="0" algn="l">
+              <a:spcBef>
+                <a:spcPts val="0"/>
+              </a:spcBef>
+              <a:spcAft>
+                <a:spcPts val="0"/>
+              </a:spcAft>
+              <a:buSzPts val="1600"/>
+              <a:buChar char="●"/>
+            </a:pPr>
+            <a:r>
+              <a:rPr lang="en"/>
+              <a:t>A class per kind of thing. It works.</a:t>
+            </a:r>
+            <a:endParaRPr/>
+          </a:p>
+        </p:txBody>
+      </p:sp>
+      <p:sp>
+        <p:nvSpPr>
+          <p:cNvPr id="295" name="Rounded Rectangle 294"/>
+          <p:cNvSpPr/>
+          <p:nvPr/>
+        </p:nvSpPr>
+        <p:spPr>
+          <a:xfrm>
+            <a:off x="1463040" y="1371600"/>
+            <a:ext cx="2011680" cy="502920"/>
+          </a:xfrm>
+          <a:prstGeom prst="roundRect">
+            <a:avLst>
+              <a:gd name="adj" fmla="val 12000"/>
+            </a:avLst>
+          </a:prstGeom>
+          <a:solidFill>
+            <a:srgbClr val="2E3338"/>
+          </a:solidFill>
+          <a:ln>
+            <a:noFill/>
+          </a:ln>
+          <a:effectLst/>
+        </p:spPr>
+        <p:style>
+          <a:lnRef idx="1">
+            <a:schemeClr val="accent1"/>
+          </a:lnRef>
+          <a:fillRef idx="3">
+            <a:schemeClr val="accent1"/>
+          </a:fillRef>
+          <a:effectRef idx="2">
+            <a:schemeClr val="accent1"/>
+          </a:effectRef>
+          <a:fontRef idx="minor">
+            <a:schemeClr val="lt1"/>
+          </a:fontRef>
+        </p:style>
+        <p:txBody>
+          <a:bodyPr rtlCol="0" anchor="ctr" wrap="square" lIns="73152" rIns="73152"/>
+          <a:lstStyle/>
+          <a:p>
+            <a:pPr algn="ctr"/>
+            <a:r>
+              <a:rPr sz="1500" b="1">
+                <a:solidFill>
+                  <a:srgbClr val="DEE2E6"/>
+                </a:solidFill>
+              </a:rPr>
+              <a:t>Plant</a:t>
+            </a:r>
+          </a:p>
+        </p:txBody>
+      </p:sp>
+      <p:sp>
+        <p:nvSpPr>
+          <p:cNvPr id="296" name="Rounded Rectangle 295"/>
+          <p:cNvSpPr/>
+          <p:nvPr/>
+        </p:nvSpPr>
+        <p:spPr>
+          <a:xfrm>
+            <a:off x="365760" y="2286000"/>
+            <a:ext cx="1325880" cy="502920"/>
+          </a:xfrm>
+          <a:prstGeom prst="roundRect">
+            <a:avLst>
+              <a:gd name="adj" fmla="val 12000"/>
+            </a:avLst>
+          </a:prstGeom>
+          <a:solidFill>
+            <a:srgbClr val="2E3338"/>
+          </a:solidFill>
+          <a:ln>
+            <a:noFill/>
+          </a:ln>
+          <a:effectLst/>
+        </p:spPr>
+        <p:style>
+          <a:lnRef idx="1">
+            <a:schemeClr val="accent1"/>
+          </a:lnRef>
+          <a:fillRef idx="3">
+            <a:schemeClr val="accent1"/>
+          </a:fillRef>
+          <a:effectRef idx="2">
+            <a:schemeClr val="accent1"/>
+          </a:effectRef>
+          <a:fontRef idx="minor">
+            <a:schemeClr val="lt1"/>
+          </a:fontRef>
+        </p:style>
+        <p:txBody>
+          <a:bodyPr rtlCol="0" anchor="ctr" wrap="square" lIns="73152" rIns="73152"/>
+          <a:lstStyle/>
+          <a:p>
+            <a:pPr algn="ctr"/>
+            <a:r>
+              <a:rPr sz="1300" b="1">
+                <a:solidFill>
+                  <a:srgbClr val="DEE2E6"/>
+                </a:solidFill>
+              </a:rPr>
+              <a:t>Sunflower</a:t>
+            </a:r>
+          </a:p>
+        </p:txBody>
+      </p:sp>
+      <p:cxnSp>
+        <p:nvCxnSpPr>
+          <p:cNvPr id="297" name="Connector 296"/>
+          <p:cNvCxnSpPr/>
+          <p:nvPr/>
+        </p:nvCxnSpPr>
+        <p:spPr>
+          <a:xfrm flipV="1">
+            <a:off x="1024128" y="1892807"/>
+            <a:ext cx="1444752" cy="374905"/>
+          </a:xfrm>
+          <a:prstGeom prst="line">
+            <a:avLst/>
+          </a:prstGeom>
+          <a:ln w="25400">
+            <a:solidFill>
+              <a:srgbClr val="9AA3AB"/>
+            </a:solidFill>
+            <a:tailEnd type="triangle"/>
+          </a:ln>
+        </p:spPr>
+        <p:style>
+          <a:lnRef idx="2">
+            <a:schemeClr val="accent1"/>
+          </a:lnRef>
+          <a:fillRef idx="0">
+            <a:schemeClr val="accent1"/>
+          </a:fillRef>
+          <a:effectRef idx="1">
+            <a:schemeClr val="accent1"/>
+          </a:effectRef>
+          <a:fontRef idx="minor">
+            <a:schemeClr val="tx1"/>
+          </a:fontRef>
+        </p:style>
+      </p:cxnSp>
+      <p:sp>
+        <p:nvSpPr>
+          <p:cNvPr id="298" name="Rounded Rectangle 297"/>
+          <p:cNvSpPr/>
+          <p:nvPr/>
+        </p:nvSpPr>
+        <p:spPr>
+          <a:xfrm>
+            <a:off x="1828800" y="2286000"/>
+            <a:ext cx="1325880" cy="502920"/>
+          </a:xfrm>
+          <a:prstGeom prst="roundRect">
+            <a:avLst>
+              <a:gd name="adj" fmla="val 12000"/>
+            </a:avLst>
+          </a:prstGeom>
+          <a:solidFill>
+            <a:srgbClr val="2E3338"/>
+          </a:solidFill>
+          <a:ln>
+            <a:noFill/>
+          </a:ln>
+          <a:effectLst/>
+        </p:spPr>
+        <p:style>
+          <a:lnRef idx="1">
+            <a:schemeClr val="accent1"/>
+          </a:lnRef>
+          <a:fillRef idx="3">
+            <a:schemeClr val="accent1"/>
+          </a:fillRef>
+          <a:effectRef idx="2">
+            <a:schemeClr val="accent1"/>
+          </a:effectRef>
+          <a:fontRef idx="minor">
+            <a:schemeClr val="lt1"/>
+          </a:fontRef>
+        </p:style>
+        <p:txBody>
+          <a:bodyPr rtlCol="0" anchor="ctr" wrap="square" lIns="73152" rIns="73152"/>
+          <a:lstStyle/>
+          <a:p>
+            <a:pPr algn="ctr"/>
+            <a:r>
+              <a:rPr sz="1300" b="1">
+                <a:solidFill>
+                  <a:srgbClr val="DEE2E6"/>
+                </a:solidFill>
+              </a:rPr>
+              <a:t>Peashooter</a:t>
+            </a:r>
+          </a:p>
+        </p:txBody>
+      </p:sp>
+      <p:cxnSp>
+        <p:nvCxnSpPr>
+          <p:cNvPr id="299" name="Connector 298"/>
+          <p:cNvCxnSpPr/>
+          <p:nvPr/>
+        </p:nvCxnSpPr>
+        <p:spPr>
+          <a:xfrm flipH="1" flipV="1">
+            <a:off x="2468880" y="1892807"/>
+            <a:ext cx="18288" cy="374905"/>
+          </a:xfrm>
+          <a:prstGeom prst="line">
+            <a:avLst/>
+          </a:prstGeom>
+          <a:ln w="25400">
+            <a:solidFill>
+              <a:srgbClr val="9AA3AB"/>
+            </a:solidFill>
+            <a:tailEnd type="triangle"/>
+          </a:ln>
+        </p:spPr>
+        <p:style>
+          <a:lnRef idx="2">
+            <a:schemeClr val="accent1"/>
+          </a:lnRef>
+          <a:fillRef idx="0">
+            <a:schemeClr val="accent1"/>
+          </a:fillRef>
+          <a:effectRef idx="1">
+            <a:schemeClr val="accent1"/>
+          </a:effectRef>
+          <a:fontRef idx="minor">
+            <a:schemeClr val="tx1"/>
+          </a:fontRef>
+        </p:style>
+      </p:cxnSp>
+      <p:sp>
+        <p:nvSpPr>
+          <p:cNvPr id="300" name="Rounded Rectangle 299"/>
+          <p:cNvSpPr/>
+          <p:nvPr/>
+        </p:nvSpPr>
+        <p:spPr>
+          <a:xfrm>
+            <a:off x="3291840" y="2286000"/>
+            <a:ext cx="1325880" cy="502920"/>
+          </a:xfrm>
+          <a:prstGeom prst="roundRect">
+            <a:avLst>
+              <a:gd name="adj" fmla="val 12000"/>
+            </a:avLst>
+          </a:prstGeom>
+          <a:solidFill>
+            <a:srgbClr val="2E3338"/>
+          </a:solidFill>
+          <a:ln>
+            <a:noFill/>
+          </a:ln>
+          <a:effectLst/>
+        </p:spPr>
+        <p:style>
+          <a:lnRef idx="1">
+            <a:schemeClr val="accent1"/>
+          </a:lnRef>
+          <a:fillRef idx="3">
+            <a:schemeClr val="accent1"/>
+          </a:fillRef>
+          <a:effectRef idx="2">
+            <a:schemeClr val="accent1"/>
+          </a:effectRef>
+          <a:fontRef idx="minor">
+            <a:schemeClr val="lt1"/>
+          </a:fontRef>
+        </p:style>
+        <p:txBody>
+          <a:bodyPr rtlCol="0" anchor="ctr" wrap="square" lIns="73152" rIns="73152"/>
+          <a:lstStyle/>
+          <a:p>
+            <a:pPr algn="ctr"/>
+            <a:r>
+              <a:rPr sz="1300" b="1">
+                <a:solidFill>
+                  <a:srgbClr val="DEE2E6"/>
+                </a:solidFill>
+              </a:rPr>
+              <a:t>WallNut</a:t>
+            </a:r>
+          </a:p>
+        </p:txBody>
+      </p:sp>
+      <p:cxnSp>
+        <p:nvCxnSpPr>
+          <p:cNvPr id="301" name="Connector 300"/>
+          <p:cNvCxnSpPr/>
+          <p:nvPr/>
+        </p:nvCxnSpPr>
+        <p:spPr>
+          <a:xfrm flipH="1" flipV="1">
+            <a:off x="2468880" y="1892807"/>
+            <a:ext cx="1481328" cy="374905"/>
+          </a:xfrm>
+          <a:prstGeom prst="line">
+            <a:avLst/>
+          </a:prstGeom>
+          <a:ln w="25400">
+            <a:solidFill>
+              <a:srgbClr val="9AA3AB"/>
+            </a:solidFill>
+            <a:tailEnd type="triangle"/>
+          </a:ln>
+        </p:spPr>
+        <p:style>
+          <a:lnRef idx="2">
+            <a:schemeClr val="accent1"/>
+          </a:lnRef>
+          <a:fillRef idx="0">
+            <a:schemeClr val="accent1"/>
+          </a:fillRef>
+          <a:effectRef idx="1">
+            <a:schemeClr val="accent1"/>
+          </a:effectRef>
+          <a:fontRef idx="minor">
+            <a:schemeClr val="tx1"/>
+          </a:fontRef>
+        </p:style>
+      </p:cxnSp>
+      <p:sp>
+        <p:nvSpPr>
+          <p:cNvPr id="302" name="Rounded Rectangle 301"/>
+          <p:cNvSpPr/>
+          <p:nvPr/>
+        </p:nvSpPr>
+        <p:spPr>
+          <a:xfrm>
+            <a:off x="4846320" y="1371600"/>
+            <a:ext cx="1371600" cy="502920"/>
+          </a:xfrm>
+          <a:prstGeom prst="roundRect">
+            <a:avLst>
+              <a:gd name="adj" fmla="val 12000"/>
+            </a:avLst>
+          </a:prstGeom>
+          <a:solidFill>
+            <a:srgbClr val="2E3338"/>
+          </a:solidFill>
+          <a:ln>
+            <a:noFill/>
+          </a:ln>
+          <a:effectLst/>
+        </p:spPr>
+        <p:style>
+          <a:lnRef idx="1">
+            <a:schemeClr val="accent1"/>
+          </a:lnRef>
+          <a:fillRef idx="3">
+            <a:schemeClr val="accent1"/>
+          </a:fillRef>
+          <a:effectRef idx="2">
+            <a:schemeClr val="accent1"/>
+          </a:effectRef>
+          <a:fontRef idx="minor">
+            <a:schemeClr val="lt1"/>
+          </a:fontRef>
+        </p:style>
+        <p:txBody>
+          <a:bodyPr rtlCol="0" anchor="ctr" wrap="square" lIns="73152" rIns="73152"/>
+          <a:lstStyle/>
+          <a:p>
+            <a:pPr algn="ctr"/>
+            <a:r>
+              <a:rPr sz="1500" b="1">
+                <a:solidFill>
+                  <a:srgbClr val="DEE2E6"/>
+                </a:solidFill>
+              </a:rPr>
+              <a:t>Zombie</a:t>
+            </a:r>
+          </a:p>
+        </p:txBody>
+      </p:sp>
+      <p:sp>
+        <p:nvSpPr>
+          <p:cNvPr id="303" name="Rounded Rectangle 302"/>
+          <p:cNvSpPr/>
+          <p:nvPr/>
+        </p:nvSpPr>
+        <p:spPr>
+          <a:xfrm>
+            <a:off x="6355080" y="1371600"/>
+            <a:ext cx="1097280" cy="502920"/>
+          </a:xfrm>
+          <a:prstGeom prst="roundRect">
+            <a:avLst>
+              <a:gd name="adj" fmla="val 12000"/>
+            </a:avLst>
+          </a:prstGeom>
+          <a:solidFill>
+            <a:srgbClr val="2E3338"/>
+          </a:solidFill>
+          <a:ln>
+            <a:noFill/>
+          </a:ln>
+          <a:effectLst/>
+        </p:spPr>
+        <p:style>
+          <a:lnRef idx="1">
+            <a:schemeClr val="accent1"/>
+          </a:lnRef>
+          <a:fillRef idx="3">
+            <a:schemeClr val="accent1"/>
+          </a:fillRef>
+          <a:effectRef idx="2">
+            <a:schemeClr val="accent1"/>
+          </a:effectRef>
+          <a:fontRef idx="minor">
+            <a:schemeClr val="lt1"/>
+          </a:fontRef>
+        </p:style>
+        <p:txBody>
+          <a:bodyPr rtlCol="0" anchor="ctr" wrap="square" lIns="73152" rIns="73152"/>
+          <a:lstStyle/>
+          <a:p>
+            <a:pPr algn="ctr"/>
+            <a:r>
+              <a:rPr sz="1500" b="1">
+                <a:solidFill>
+                  <a:srgbClr val="DEE2E6"/>
+                </a:solidFill>
+              </a:rPr>
+              <a:t>Pea</a:t>
+            </a:r>
+          </a:p>
+        </p:txBody>
+      </p:sp>
+      <p:sp>
+        <p:nvSpPr>
+          <p:cNvPr id="304" name="Rounded Rectangle 303"/>
+          <p:cNvSpPr/>
+          <p:nvPr/>
+        </p:nvSpPr>
+        <p:spPr>
+          <a:xfrm>
+            <a:off x="7589520" y="1371600"/>
+            <a:ext cx="1097280" cy="502920"/>
+          </a:xfrm>
+          <a:prstGeom prst="roundRect">
+            <a:avLst>
+              <a:gd name="adj" fmla="val 12000"/>
+            </a:avLst>
+          </a:prstGeom>
+          <a:solidFill>
+            <a:srgbClr val="2E3338"/>
+          </a:solidFill>
+          <a:ln>
+            <a:noFill/>
+          </a:ln>
+          <a:effectLst/>
+        </p:spPr>
+        <p:style>
+          <a:lnRef idx="1">
+            <a:schemeClr val="accent1"/>
+          </a:lnRef>
+          <a:fillRef idx="3">
+            <a:schemeClr val="accent1"/>
+          </a:fillRef>
+          <a:effectRef idx="2">
+            <a:schemeClr val="accent1"/>
+          </a:effectRef>
+          <a:fontRef idx="minor">
+            <a:schemeClr val="lt1"/>
+          </a:fontRef>
+        </p:style>
+        <p:txBody>
+          <a:bodyPr rtlCol="0" anchor="ctr" wrap="square" lIns="73152" rIns="73152"/>
+          <a:lstStyle/>
+          <a:p>
+            <a:pPr algn="ctr"/>
+            <a:r>
+              <a:rPr sz="1500" b="1">
+                <a:solidFill>
+                  <a:srgbClr val="DEE2E6"/>
+                </a:solidFill>
+              </a:rPr>
+              <a:t>Sun</a:t>
+            </a:r>
+          </a:p>
+        </p:txBody>
+      </p:sp>
+      <p:sp>
+        <p:nvSpPr>
+          <p:cNvPr id="305" name="TextBox 304"/>
+          <p:cNvSpPr txBox="1"/>
+          <p:nvPr/>
+        </p:nvSpPr>
+        <p:spPr>
+          <a:xfrm>
+            <a:off x="365760" y="3108960"/>
+            <a:ext cx="8412480" cy="365760"/>
+          </a:xfrm>
+          <a:prstGeom prst="rect">
+            <a:avLst/>
+          </a:prstGeom>
+          <a:noFill/>
+        </p:spPr>
+        <p:txBody>
+          <a:bodyPr wrap="square">
+            <a:spAutoFit/>
+          </a:bodyPr>
+          <a:lstStyle/>
+          <a:p>
+            <a:pPr algn="ctr"/>
+            <a:r>
+              <a:rPr sz="1400" b="0" i="0">
+                <a:solidFill>
+                  <a:srgbClr val="9AA3AB"/>
+                </a:solidFill>
+              </a:rPr>
+              <a:t>The World keeps one list per class.</a:t>
+            </a:r>
+          </a:p>
+        </p:txBody>
+      </p:sp>
+    </p:spTree>
+  </p:cSld>
+  <p:clrMapOvr>
+    <a:masterClrMapping/>
+  </p:clrMapOvr>
+</p:sld>
+</file>
+
+<file path=ppt/slides/slide11.xml><?xml version="1.0" encoding="utf-8"?>
+<p:sld xmlns:a="http://schemas.openxmlformats.org/drawingml/2006/main" xmlns:p="http://schemas.openxmlformats.org/presentationml/2006/main" xmlns:r="http://schemas.openxmlformats.org/officeDocument/2006/relationships">
+  <p:cSld>
+    <p:spTree>
+      <p:nvGrpSpPr>
+        <p:cNvPr id="1" name=""/>
+        <p:cNvGrpSpPr/>
+        <p:nvPr/>
+      </p:nvGrpSpPr>
+      <p:grpSpPr/>
+      <p:sp>
+        <p:nvSpPr>
+          <p:cNvPr id="293" name="Google Shape;293;p45"/>
+          <p:cNvSpPr txBox="1"/>
+          <p:nvPr>
+            <p:ph type="title"/>
+          </p:nvPr>
+        </p:nvSpPr>
+        <p:spPr>
+          <a:xfrm>
+            <a:off x="311700" y="195615"/>
+            <a:ext cx="8520600" cy="572700"/>
+          </a:xfrm>
+          <a:prstGeom prst="rect">
+            <a:avLst/>
+          </a:prstGeom>
+        </p:spPr>
+        <p:txBody>
+          <a:bodyPr anchorCtr="0" anchor="t" bIns="91425" lIns="91425" spcFirstLastPara="1" rIns="91425" wrap="square" tIns="91425">
+            <a:normAutofit fontScale="90000"/>
+          </a:bodyPr>
+          <a:lstStyle/>
+          <a:p>
+            <a:pPr indent="0" lvl="0" marL="0" rtl="0" algn="l">
+              <a:spcBef>
+                <a:spcPts val="0"/>
+              </a:spcBef>
+              <a:spcAft>
+                <a:spcPts val="0"/>
+              </a:spcAft>
+              <a:buNone/>
+            </a:pPr>
+            <a:r>
+              <a:rPr lang="en">
+                <a:solidFill>
+                  <a:schemeClr val="accent5"/>
+                </a:solidFill>
+              </a:rPr>
               <a:t>Where Inheritance Breaks</a:t>
             </a:r>
             <a:endParaRPr>
@@ -6741,7 +7604,7 @@
 </p:sld>
 </file>
 
-<file path=ppt/slides/slide11.xml><?xml version="1.0" encoding="utf-8"?>
+<file path=ppt/slides/slide12.xml><?xml version="1.0" encoding="utf-8"?>
 <p:sld xmlns:a="http://schemas.openxmlformats.org/drawingml/2006/main" xmlns:p="http://schemas.openxmlformats.org/presentationml/2006/main" xmlns:r="http://schemas.openxmlformats.org/officeDocument/2006/relationships">
   <p:cSld>
     <p:spTree>
@@ -6868,854 +7731,6 @@
 </p:sld>
 </file>
 
-<file path=ppt/slides/slide12.xml><?xml version="1.0" encoding="utf-8"?>
-<p:sld xmlns:a="http://schemas.openxmlformats.org/drawingml/2006/main" xmlns:p="http://schemas.openxmlformats.org/presentationml/2006/main" xmlns:r="http://schemas.openxmlformats.org/officeDocument/2006/relationships">
-  <p:cSld>
-    <p:spTree>
-      <p:nvGrpSpPr>
-        <p:cNvPr id="1" name=""/>
-        <p:cNvGrpSpPr/>
-        <p:nvPr/>
-      </p:nvGrpSpPr>
-      <p:grpSpPr/>
-      <p:sp>
-        <p:nvSpPr>
-          <p:cNvPr id="140" name="Google Shape;140;p23"/>
-          <p:cNvSpPr txBox="1"/>
-          <p:nvPr>
-            <p:ph type="title"/>
-          </p:nvPr>
-        </p:nvSpPr>
-        <p:spPr>
-          <a:xfrm>
-            <a:off x="311700" y="195615"/>
-            <a:ext cx="8520600" cy="572700"/>
-          </a:xfrm>
-          <a:prstGeom prst="rect">
-            <a:avLst/>
-          </a:prstGeom>
-        </p:spPr>
-        <p:txBody>
-          <a:bodyPr anchorCtr="0" anchor="t" bIns="91425" lIns="91425" spcFirstLastPara="1" rIns="91425" wrap="square" tIns="91425">
-            <a:normAutofit fontScale="90000"/>
-          </a:bodyPr>
-          <a:lstStyle/>
-          <a:p>
-            <a:pPr indent="0" lvl="0" marL="0" rtl="0" algn="l">
-              <a:spcBef>
-                <a:spcPts val="0"/>
-              </a:spcBef>
-              <a:spcAft>
-                <a:spcPts val="0"/>
-              </a:spcAft>
-              <a:buNone/>
-            </a:pPr>
-            <a:r>
-              <a:rPr lang="en"/>
-              <a:t>The Component Pattern</a:t>
-            </a:r>
-            <a:endParaRPr/>
-          </a:p>
-        </p:txBody>
-      </p:sp>
-      <p:sp>
-        <p:nvSpPr>
-          <p:cNvPr id="293" name="Google Shape;293;p45"/>
-          <p:cNvSpPr txBox="1"/>
-          <p:nvPr>
-            <p:ph type="title"/>
-          </p:nvPr>
-        </p:nvSpPr>
-        <p:spPr>
-          <a:xfrm>
-            <a:off x="311700" y="1152475"/>
-            <a:ext cx="3700000" cy="3500000"/>
-          </a:xfrm>
-          <a:prstGeom prst="rect">
-            <a:avLst/>
-          </a:prstGeom>
-        </p:spPr>
-        <p:txBody>
-          <a:bodyPr anchorCtr="0" anchor="t" bIns="91425" lIns="91425" spcFirstLastPara="1" rIns="91425" wrap="square" tIns="91425">
-            <a:normAutofit fontScale="90000"/>
-          </a:bodyPr>
-          <a:lstStyle/>
-          <a:p>
-            <a:pPr indent="-330200" lvl="0" marL="457200" rtl="0" algn="l">
-              <a:buClr>
-                <a:srgbClr val="DEE2E6"/>
-              </a:buClr>
-              <a:spcBef>
-                <a:spcPts val="0"/>
-              </a:spcBef>
-              <a:spcAft>
-                <a:spcPts val="0"/>
-              </a:spcAft>
-              <a:buSzPts val="1600"/>
-              <a:buChar char="●"/>
-            </a:pPr>
-            <a:r>
-              <a:rPr lang="en" sz="1600">
-                <a:solidFill>
-                  <a:srgbClr val="DEE2E6"/>
-                </a:solidFill>
-              </a:rPr>
-              <a:t>One entity, many domains (drawing, health, shooting), not coupled</a:t>
-            </a:r>
-            <a:endParaRPr/>
-          </a:p>
-          <a:p>
-            <a:pPr indent="-330200" lvl="0" marL="457200" rtl="0" algn="l">
-              <a:buClr>
-                <a:srgbClr val="DEE2E6"/>
-              </a:buClr>
-              <a:spcBef>
-                <a:spcPts val="0"/>
-              </a:spcBef>
-              <a:spcAft>
-                <a:spcPts val="0"/>
-              </a:spcAft>
-              <a:buSzPts val="1600"/>
-              <a:buChar char="●"/>
-            </a:pPr>
-            <a:r>
-              <a:rPr lang="en" sz="1600">
-                <a:solidFill>
-                  <a:srgbClr val="DEE2E6"/>
-                </a:solidFill>
-              </a:rPr>
-              <a:t>An entity: a position, a row, and a list of components</a:t>
-            </a:r>
-            <a:endParaRPr/>
-          </a:p>
-          <a:p>
-            <a:pPr indent="-330200" lvl="0" marL="457200" rtl="0" algn="l">
-              <a:buClr>
-                <a:srgbClr val="DEE2E6"/>
-              </a:buClr>
-              <a:spcBef>
-                <a:spcPts val="0"/>
-              </a:spcBef>
-              <a:spcAft>
-                <a:spcPts val="0"/>
-              </a:spcAft>
-              <a:buSzPts val="1600"/>
-              <a:buChar char="●"/>
-            </a:pPr>
-            <a:r>
-              <a:rPr lang="en" sz="1600">
-                <a:solidFill>
-                  <a:srgbClr val="DEE2E6"/>
-                </a:solidFill>
-              </a:rPr>
-              <a:t>A component: one ability</a:t>
-            </a:r>
-            <a:endParaRPr/>
-          </a:p>
-          <a:p>
-            <a:pPr indent="-317500" lvl="1" marL="914400" rtl="0" algn="l">
-              <a:buClr>
-                <a:srgbClr val="6C757D"/>
-              </a:buClr>
-              <a:spcBef>
-                <a:spcPts val="0"/>
-              </a:spcBef>
-              <a:spcAft>
-                <a:spcPts val="0"/>
-              </a:spcAft>
-              <a:buSzPts val="1400"/>
-              <a:buChar char="○"/>
-            </a:pPr>
-            <a:r>
-              <a:rPr lang="en" sz="1400">
-                <a:solidFill>
-                  <a:srgbClr val="6C757D"/>
-                </a:solidFill>
-              </a:rPr>
-              <a:t>Health, Shooter, SunProducer, Walker, Eater, Armour, SpriteRenderer</a:t>
-            </a:r>
-            <a:endParaRPr/>
-          </a:p>
-        </p:txBody>
-      </p:sp>
-      <p:sp>
-        <p:nvSpPr>
-          <p:cNvPr id="141" name="Google Shape;141;p23"/>
-          <p:cNvSpPr txBox="1"/>
-          <p:nvPr>
-            <p:ph idx="2" type="body"/>
-          </p:nvPr>
-        </p:nvSpPr>
-        <p:spPr>
-          <a:xfrm>
-            <a:off x="4150000" y="1152475"/>
-            <a:ext cx="4750000" cy="3600000"/>
-          </a:xfrm>
-          <a:prstGeom prst="rect">
-            <a:avLst/>
-          </a:prstGeom>
-        </p:spPr>
-        <p:txBody>
-          <a:bodyPr anchorCtr="0" anchor="t" bIns="91425" lIns="91425" spcFirstLastPara="1" rIns="91425" wrap="square" tIns="91425">
-            <a:noAutofit/>
-          </a:bodyPr>
-          <a:lstStyle/>
-          <a:p>
-            <a:pPr indent="0" lvl="0" marL="0" rtl="0" algn="l">
-              <a:lnSpc>
-                <a:spcPct val="115000"/>
-              </a:lnSpc>
-              <a:spcBef>
-                <a:spcPts val="0"/>
-              </a:spcBef>
-              <a:spcAft>
-                <a:spcPts val="0"/>
-              </a:spcAft>
-              <a:buNone/>
-            </a:pPr>
-            <a:r>
-              <a:rPr lang="en" sz="1000">
-                <a:highlight>
-                  <a:schemeClr val="dk2"/>
-                </a:highlight>
-                <a:latin typeface="Consolas"/>
-                <a:ea typeface="Consolas"/>
-                <a:cs typeface="Consolas"/>
-                <a:sym typeface="Consolas"/>
-              </a:rPr>
-              <a:t>public class Entity(World world)</a:t>
-            </a:r>
-            <a:endParaRPr sz="1000">
-              <a:solidFill>
-                <a:srgbClr val="CCCCCC"/>
-              </a:solidFill>
-              <a:highlight>
-                <a:schemeClr val="dk2"/>
-              </a:highlight>
-              <a:latin typeface="Consolas"/>
-              <a:ea typeface="Consolas"/>
-              <a:cs typeface="Consolas"/>
-              <a:sym typeface="Consolas"/>
-            </a:endParaRPr>
-          </a:p>
-          <a:p>
-            <a:pPr indent="0" lvl="0" marL="0" rtl="0" algn="l">
-              <a:lnSpc>
-                <a:spcPct val="115000"/>
-              </a:lnSpc>
-              <a:spcBef>
-                <a:spcPts val="0"/>
-              </a:spcBef>
-              <a:spcAft>
-                <a:spcPts val="0"/>
-              </a:spcAft>
-              <a:buNone/>
-            </a:pPr>
-            <a:r>
-              <a:rPr lang="en" sz="1000">
-                <a:highlight>
-                  <a:schemeClr val="dk2"/>
-                </a:highlight>
-                <a:latin typeface="Consolas"/>
-                <a:ea typeface="Consolas"/>
-                <a:cs typeface="Consolas"/>
-                <a:sym typeface="Consolas"/>
-              </a:rPr>
-              <a:t>{</a:t>
-            </a:r>
-            <a:endParaRPr sz="1000">
-              <a:solidFill>
-                <a:srgbClr val="CCCCCC"/>
-              </a:solidFill>
-              <a:highlight>
-                <a:schemeClr val="dk2"/>
-              </a:highlight>
-              <a:latin typeface="Consolas"/>
-              <a:ea typeface="Consolas"/>
-              <a:cs typeface="Consolas"/>
-              <a:sym typeface="Consolas"/>
-            </a:endParaRPr>
-          </a:p>
-          <a:p>
-            <a:pPr indent="0" lvl="0" marL="0" rtl="0" algn="l">
-              <a:lnSpc>
-                <a:spcPct val="115000"/>
-              </a:lnSpc>
-              <a:spcBef>
-                <a:spcPts val="0"/>
-              </a:spcBef>
-              <a:spcAft>
-                <a:spcPts val="0"/>
-              </a:spcAft>
-              <a:buNone/>
-            </a:pPr>
-            <a:r>
-              <a:rPr lang="en" sz="1000">
-                <a:highlight>
-                  <a:schemeClr val="dk2"/>
-                </a:highlight>
-                <a:latin typeface="Consolas"/>
-                <a:ea typeface="Consolas"/>
-                <a:cs typeface="Consolas"/>
-                <a:sym typeface="Consolas"/>
-              </a:rPr>
-              <a:t>    List&lt;Component&gt; _components = [];</a:t>
-            </a:r>
-            <a:endParaRPr sz="1000">
-              <a:solidFill>
-                <a:srgbClr val="CCCCCC"/>
-              </a:solidFill>
-              <a:highlight>
-                <a:schemeClr val="dk2"/>
-              </a:highlight>
-              <a:latin typeface="Consolas"/>
-              <a:ea typeface="Consolas"/>
-              <a:cs typeface="Consolas"/>
-              <a:sym typeface="Consolas"/>
-            </a:endParaRPr>
-          </a:p>
-          <a:p>
-            <a:pPr indent="0" lvl="0" marL="0" rtl="0" algn="l">
-              <a:lnSpc>
-                <a:spcPct val="115000"/>
-              </a:lnSpc>
-              <a:spcBef>
-                <a:spcPts val="0"/>
-              </a:spcBef>
-              <a:spcAft>
-                <a:spcPts val="0"/>
-              </a:spcAft>
-              <a:buNone/>
-            </a:pPr>
-            <a:r>
-              <a:rPr lang="en" sz="1000">
-                <a:highlight>
-                  <a:schemeClr val="dk2"/>
-                </a:highlight>
-                <a:latin typeface="Consolas"/>
-                <a:ea typeface="Consolas"/>
-                <a:cs typeface="Consolas"/>
-                <a:sym typeface="Consolas"/>
-              </a:rPr>
-              <a:t/>
-            </a:r>
-            <a:endParaRPr sz="1000">
-              <a:solidFill>
-                <a:srgbClr val="CCCCCC"/>
-              </a:solidFill>
-              <a:highlight>
-                <a:schemeClr val="dk2"/>
-              </a:highlight>
-              <a:latin typeface="Consolas"/>
-              <a:ea typeface="Consolas"/>
-              <a:cs typeface="Consolas"/>
-              <a:sym typeface="Consolas"/>
-            </a:endParaRPr>
-          </a:p>
-          <a:p>
-            <a:pPr indent="0" lvl="0" marL="0" rtl="0" algn="l">
-              <a:lnSpc>
-                <a:spcPct val="115000"/>
-              </a:lnSpc>
-              <a:spcBef>
-                <a:spcPts val="0"/>
-              </a:spcBef>
-              <a:spcAft>
-                <a:spcPts val="0"/>
-              </a:spcAft>
-              <a:buNone/>
-            </a:pPr>
-            <a:r>
-              <a:rPr lang="en" sz="1000">
-                <a:highlight>
-                  <a:schemeClr val="dk2"/>
-                </a:highlight>
-                <a:latin typeface="Consolas"/>
-                <a:ea typeface="Consolas"/>
-                <a:cs typeface="Consolas"/>
-                <a:sym typeface="Consolas"/>
-              </a:rPr>
-              <a:t>    public Vector2 Position { get; set; }</a:t>
-            </a:r>
-            <a:endParaRPr sz="1000">
-              <a:solidFill>
-                <a:srgbClr val="CCCCCC"/>
-              </a:solidFill>
-              <a:highlight>
-                <a:schemeClr val="dk2"/>
-              </a:highlight>
-              <a:latin typeface="Consolas"/>
-              <a:ea typeface="Consolas"/>
-              <a:cs typeface="Consolas"/>
-              <a:sym typeface="Consolas"/>
-            </a:endParaRPr>
-          </a:p>
-          <a:p>
-            <a:pPr indent="0" lvl="0" marL="0" rtl="0" algn="l">
-              <a:lnSpc>
-                <a:spcPct val="115000"/>
-              </a:lnSpc>
-              <a:spcBef>
-                <a:spcPts val="0"/>
-              </a:spcBef>
-              <a:spcAft>
-                <a:spcPts val="0"/>
-              </a:spcAft>
-              <a:buNone/>
-            </a:pPr>
-            <a:r>
-              <a:rPr lang="en" sz="1000">
-                <a:highlight>
-                  <a:schemeClr val="dk2"/>
-                </a:highlight>
-                <a:latin typeface="Consolas"/>
-                <a:ea typeface="Consolas"/>
-                <a:cs typeface="Consolas"/>
-                <a:sym typeface="Consolas"/>
-              </a:rPr>
-              <a:t>    public int Row { get; set; }</a:t>
-            </a:r>
-            <a:endParaRPr sz="1000">
-              <a:solidFill>
-                <a:srgbClr val="CCCCCC"/>
-              </a:solidFill>
-              <a:highlight>
-                <a:schemeClr val="dk2"/>
-              </a:highlight>
-              <a:latin typeface="Consolas"/>
-              <a:ea typeface="Consolas"/>
-              <a:cs typeface="Consolas"/>
-              <a:sym typeface="Consolas"/>
-            </a:endParaRPr>
-          </a:p>
-          <a:p>
-            <a:pPr indent="0" lvl="0" marL="0" rtl="0" algn="l">
-              <a:lnSpc>
-                <a:spcPct val="115000"/>
-              </a:lnSpc>
-              <a:spcBef>
-                <a:spcPts val="0"/>
-              </a:spcBef>
-              <a:spcAft>
-                <a:spcPts val="0"/>
-              </a:spcAft>
-              <a:buNone/>
-            </a:pPr>
-            <a:r>
-              <a:rPr lang="en" sz="1000">
-                <a:highlight>
-                  <a:schemeClr val="dk2"/>
-                </a:highlight>
-                <a:latin typeface="Consolas"/>
-                <a:ea typeface="Consolas"/>
-                <a:cs typeface="Consolas"/>
-                <a:sym typeface="Consolas"/>
-              </a:rPr>
-              <a:t/>
-            </a:r>
-            <a:endParaRPr sz="1000">
-              <a:solidFill>
-                <a:srgbClr val="CCCCCC"/>
-              </a:solidFill>
-              <a:highlight>
-                <a:schemeClr val="dk2"/>
-              </a:highlight>
-              <a:latin typeface="Consolas"/>
-              <a:ea typeface="Consolas"/>
-              <a:cs typeface="Consolas"/>
-              <a:sym typeface="Consolas"/>
-            </a:endParaRPr>
-          </a:p>
-          <a:p>
-            <a:pPr indent="0" lvl="0" marL="0" rtl="0" algn="l">
-              <a:lnSpc>
-                <a:spcPct val="115000"/>
-              </a:lnSpc>
-              <a:spcBef>
-                <a:spcPts val="0"/>
-              </a:spcBef>
-              <a:spcAft>
-                <a:spcPts val="0"/>
-              </a:spcAft>
-              <a:buNone/>
-            </a:pPr>
-            <a:r>
-              <a:rPr lang="en" sz="1000">
-                <a:highlight>
-                  <a:schemeClr val="dk2"/>
-                </a:highlight>
-                <a:latin typeface="Consolas"/>
-                <a:ea typeface="Consolas"/>
-                <a:cs typeface="Consolas"/>
-                <a:sym typeface="Consolas"/>
-              </a:rPr>
-              <a:t>    public Entity With(Component c) { ... }</a:t>
-            </a:r>
-            <a:endParaRPr sz="1000">
-              <a:solidFill>
-                <a:srgbClr val="CCCCCC"/>
-              </a:solidFill>
-              <a:highlight>
-                <a:schemeClr val="dk2"/>
-              </a:highlight>
-              <a:latin typeface="Consolas"/>
-              <a:ea typeface="Consolas"/>
-              <a:cs typeface="Consolas"/>
-              <a:sym typeface="Consolas"/>
-            </a:endParaRPr>
-          </a:p>
-          <a:p>
-            <a:pPr indent="0" lvl="0" marL="0" rtl="0" algn="l">
-              <a:lnSpc>
-                <a:spcPct val="115000"/>
-              </a:lnSpc>
-              <a:spcBef>
-                <a:spcPts val="0"/>
-              </a:spcBef>
-              <a:spcAft>
-                <a:spcPts val="0"/>
-              </a:spcAft>
-              <a:buNone/>
-            </a:pPr>
-            <a:r>
-              <a:rPr lang="en" sz="1000">
-                <a:highlight>
-                  <a:schemeClr val="dk2"/>
-                </a:highlight>
-                <a:latin typeface="Consolas"/>
-                <a:ea typeface="Consolas"/>
-                <a:cs typeface="Consolas"/>
-                <a:sym typeface="Consolas"/>
-              </a:rPr>
-              <a:t>    public T Get&lt;T&gt;() where T : Component</a:t>
-            </a:r>
-            <a:endParaRPr sz="1000">
-              <a:solidFill>
-                <a:srgbClr val="CCCCCC"/>
-              </a:solidFill>
-              <a:highlight>
-                <a:schemeClr val="dk2"/>
-              </a:highlight>
-              <a:latin typeface="Consolas"/>
-              <a:ea typeface="Consolas"/>
-              <a:cs typeface="Consolas"/>
-              <a:sym typeface="Consolas"/>
-            </a:endParaRPr>
-          </a:p>
-          <a:p>
-            <a:pPr indent="0" lvl="0" marL="0" rtl="0" algn="l">
-              <a:lnSpc>
-                <a:spcPct val="115000"/>
-              </a:lnSpc>
-              <a:spcBef>
-                <a:spcPts val="0"/>
-              </a:spcBef>
-              <a:spcAft>
-                <a:spcPts val="0"/>
-              </a:spcAft>
-              <a:buNone/>
-            </a:pPr>
-            <a:r>
-              <a:rPr lang="en" sz="1000">
-                <a:highlight>
-                  <a:schemeClr val="dk2"/>
-                </a:highlight>
-                <a:latin typeface="Consolas"/>
-                <a:ea typeface="Consolas"/>
-                <a:cs typeface="Consolas"/>
-                <a:sym typeface="Consolas"/>
-              </a:rPr>
-              <a:t>        { ... }</a:t>
-            </a:r>
-            <a:endParaRPr sz="1000">
-              <a:solidFill>
-                <a:srgbClr val="CCCCCC"/>
-              </a:solidFill>
-              <a:highlight>
-                <a:schemeClr val="dk2"/>
-              </a:highlight>
-              <a:latin typeface="Consolas"/>
-              <a:ea typeface="Consolas"/>
-              <a:cs typeface="Consolas"/>
-              <a:sym typeface="Consolas"/>
-            </a:endParaRPr>
-          </a:p>
-          <a:p>
-            <a:pPr indent="0" lvl="0" marL="0" rtl="0" algn="l">
-              <a:lnSpc>
-                <a:spcPct val="115000"/>
-              </a:lnSpc>
-              <a:spcBef>
-                <a:spcPts val="0"/>
-              </a:spcBef>
-              <a:spcAft>
-                <a:spcPts val="0"/>
-              </a:spcAft>
-              <a:buNone/>
-            </a:pPr>
-            <a:r>
-              <a:rPr lang="en" sz="1000">
-                <a:highlight>
-                  <a:schemeClr val="dk2"/>
-                </a:highlight>
-                <a:latin typeface="Consolas"/>
-                <a:ea typeface="Consolas"/>
-                <a:cs typeface="Consolas"/>
-                <a:sym typeface="Consolas"/>
-              </a:rPr>
-              <a:t/>
-            </a:r>
-            <a:endParaRPr sz="1000">
-              <a:solidFill>
-                <a:srgbClr val="CCCCCC"/>
-              </a:solidFill>
-              <a:highlight>
-                <a:schemeClr val="dk2"/>
-              </a:highlight>
-              <a:latin typeface="Consolas"/>
-              <a:ea typeface="Consolas"/>
-              <a:cs typeface="Consolas"/>
-              <a:sym typeface="Consolas"/>
-            </a:endParaRPr>
-          </a:p>
-          <a:p>
-            <a:pPr indent="0" lvl="0" marL="0" rtl="0" algn="l">
-              <a:lnSpc>
-                <a:spcPct val="115000"/>
-              </a:lnSpc>
-              <a:spcBef>
-                <a:spcPts val="0"/>
-              </a:spcBef>
-              <a:spcAft>
-                <a:spcPts val="0"/>
-              </a:spcAft>
-              <a:buNone/>
-            </a:pPr>
-            <a:r>
-              <a:rPr lang="en" sz="1000">
-                <a:highlight>
-                  <a:schemeClr val="dk2"/>
-                </a:highlight>
-                <a:latin typeface="Consolas"/>
-                <a:ea typeface="Consolas"/>
-                <a:cs typeface="Consolas"/>
-                <a:sym typeface="Consolas"/>
-              </a:rPr>
-              <a:t>    public void Update(float dt)</a:t>
-            </a:r>
-            <a:endParaRPr sz="1000">
-              <a:solidFill>
-                <a:srgbClr val="CCCCCC"/>
-              </a:solidFill>
-              <a:highlight>
-                <a:schemeClr val="dk2"/>
-              </a:highlight>
-              <a:latin typeface="Consolas"/>
-              <a:ea typeface="Consolas"/>
-              <a:cs typeface="Consolas"/>
-              <a:sym typeface="Consolas"/>
-            </a:endParaRPr>
-          </a:p>
-          <a:p>
-            <a:pPr indent="0" lvl="0" marL="0" rtl="0" algn="l">
-              <a:lnSpc>
-                <a:spcPct val="115000"/>
-              </a:lnSpc>
-              <a:spcBef>
-                <a:spcPts val="0"/>
-              </a:spcBef>
-              <a:spcAft>
-                <a:spcPts val="0"/>
-              </a:spcAft>
-              <a:buNone/>
-            </a:pPr>
-            <a:r>
-              <a:rPr lang="en" sz="1000">
-                <a:highlight>
-                  <a:schemeClr val="dk2"/>
-                </a:highlight>
-                <a:latin typeface="Consolas"/>
-                <a:ea typeface="Consolas"/>
-                <a:cs typeface="Consolas"/>
-                <a:sym typeface="Consolas"/>
-              </a:rPr>
-              <a:t>    {</a:t>
-            </a:r>
-            <a:endParaRPr sz="1000">
-              <a:solidFill>
-                <a:srgbClr val="CCCCCC"/>
-              </a:solidFill>
-              <a:highlight>
-                <a:schemeClr val="dk2"/>
-              </a:highlight>
-              <a:latin typeface="Consolas"/>
-              <a:ea typeface="Consolas"/>
-              <a:cs typeface="Consolas"/>
-              <a:sym typeface="Consolas"/>
-            </a:endParaRPr>
-          </a:p>
-          <a:p>
-            <a:pPr indent="0" lvl="0" marL="0" rtl="0" algn="l">
-              <a:lnSpc>
-                <a:spcPct val="115000"/>
-              </a:lnSpc>
-              <a:spcBef>
-                <a:spcPts val="0"/>
-              </a:spcBef>
-              <a:spcAft>
-                <a:spcPts val="0"/>
-              </a:spcAft>
-              <a:buNone/>
-            </a:pPr>
-            <a:r>
-              <a:rPr lang="en" sz="1000">
-                <a:highlight>
-                  <a:schemeClr val="dk2"/>
-                </a:highlight>
-                <a:latin typeface="Consolas"/>
-                <a:ea typeface="Consolas"/>
-                <a:cs typeface="Consolas"/>
-                <a:sym typeface="Consolas"/>
-              </a:rPr>
-              <a:t>        foreach (Component c in _components)</a:t>
-            </a:r>
-            <a:endParaRPr sz="1000">
-              <a:solidFill>
-                <a:srgbClr val="CCCCCC"/>
-              </a:solidFill>
-              <a:highlight>
-                <a:schemeClr val="dk2"/>
-              </a:highlight>
-              <a:latin typeface="Consolas"/>
-              <a:ea typeface="Consolas"/>
-              <a:cs typeface="Consolas"/>
-              <a:sym typeface="Consolas"/>
-            </a:endParaRPr>
-          </a:p>
-          <a:p>
-            <a:pPr indent="0" lvl="0" marL="0" rtl="0" algn="l">
-              <a:lnSpc>
-                <a:spcPct val="115000"/>
-              </a:lnSpc>
-              <a:spcBef>
-                <a:spcPts val="0"/>
-              </a:spcBef>
-              <a:spcAft>
-                <a:spcPts val="0"/>
-              </a:spcAft>
-              <a:buNone/>
-            </a:pPr>
-            <a:r>
-              <a:rPr lang="en" sz="1000">
-                <a:highlight>
-                  <a:schemeClr val="dk2"/>
-                </a:highlight>
-                <a:latin typeface="Consolas"/>
-                <a:ea typeface="Consolas"/>
-                <a:cs typeface="Consolas"/>
-                <a:sym typeface="Consolas"/>
-              </a:rPr>
-              <a:t>            c.Update(dt);</a:t>
-            </a:r>
-            <a:endParaRPr sz="1000">
-              <a:solidFill>
-                <a:srgbClr val="CCCCCC"/>
-              </a:solidFill>
-              <a:highlight>
-                <a:schemeClr val="dk2"/>
-              </a:highlight>
-              <a:latin typeface="Consolas"/>
-              <a:ea typeface="Consolas"/>
-              <a:cs typeface="Consolas"/>
-              <a:sym typeface="Consolas"/>
-            </a:endParaRPr>
-          </a:p>
-          <a:p>
-            <a:pPr indent="0" lvl="0" marL="0" rtl="0" algn="l">
-              <a:lnSpc>
-                <a:spcPct val="115000"/>
-              </a:lnSpc>
-              <a:spcBef>
-                <a:spcPts val="0"/>
-              </a:spcBef>
-              <a:spcAft>
-                <a:spcPts val="0"/>
-              </a:spcAft>
-              <a:buNone/>
-            </a:pPr>
-            <a:r>
-              <a:rPr lang="en" sz="1000">
-                <a:highlight>
-                  <a:schemeClr val="dk2"/>
-                </a:highlight>
-                <a:latin typeface="Consolas"/>
-                <a:ea typeface="Consolas"/>
-                <a:cs typeface="Consolas"/>
-                <a:sym typeface="Consolas"/>
-              </a:rPr>
-              <a:t>    }</a:t>
-            </a:r>
-            <a:endParaRPr sz="1000">
-              <a:solidFill>
-                <a:srgbClr val="CCCCCC"/>
-              </a:solidFill>
-              <a:highlight>
-                <a:schemeClr val="dk2"/>
-              </a:highlight>
-              <a:latin typeface="Consolas"/>
-              <a:ea typeface="Consolas"/>
-              <a:cs typeface="Consolas"/>
-              <a:sym typeface="Consolas"/>
-            </a:endParaRPr>
-          </a:p>
-          <a:p>
-            <a:pPr indent="0" lvl="0" marL="0" rtl="0" algn="l">
-              <a:lnSpc>
-                <a:spcPct val="115000"/>
-              </a:lnSpc>
-              <a:spcBef>
-                <a:spcPts val="0"/>
-              </a:spcBef>
-              <a:spcAft>
-                <a:spcPts val="0"/>
-              </a:spcAft>
-              <a:buNone/>
-            </a:pPr>
-            <a:r>
-              <a:rPr lang="en" sz="1000">
-                <a:highlight>
-                  <a:schemeClr val="dk2"/>
-                </a:highlight>
-                <a:latin typeface="Consolas"/>
-                <a:ea typeface="Consolas"/>
-                <a:cs typeface="Consolas"/>
-                <a:sym typeface="Consolas"/>
-              </a:rPr>
-              <a:t>}</a:t>
-            </a:r>
-            <a:endParaRPr sz="1000">
-              <a:solidFill>
-                <a:srgbClr val="CCCCCC"/>
-              </a:solidFill>
-              <a:highlight>
-                <a:schemeClr val="dk2"/>
-              </a:highlight>
-              <a:latin typeface="Consolas"/>
-              <a:ea typeface="Consolas"/>
-              <a:cs typeface="Consolas"/>
-              <a:sym typeface="Consolas"/>
-            </a:endParaRPr>
-          </a:p>
-        </p:txBody>
-      </p:sp>
-    </p:spTree>
-  </p:cSld>
-  <p:clrMapOvr>
-    <a:masterClrMapping/>
-  </p:clrMapOvr>
-</p:sld>
-</file>
-
 <file path=ppt/slides/slide13.xml><?xml version="1.0" encoding="utf-8"?>
 <p:sld xmlns:a="http://schemas.openxmlformats.org/drawingml/2006/main" xmlns:p="http://schemas.openxmlformats.org/presentationml/2006/main" xmlns:r="http://schemas.openxmlformats.org/officeDocument/2006/relationships">
   <p:cSld>
@@ -7728,25 +7743,17 @@
       <p:grpSpPr/>
       <p:sp>
         <p:nvSpPr>
-          <p:cNvPr id="140" name="Google Shape;140;p23"/>
-          <p:cNvSpPr txBox="1"/>
+          <p:cNvPr id="2" name="Title 1"/>
+          <p:cNvSpPr>
+            <a:spLocks noGrp="1"/>
+          </p:cNvSpPr>
           <p:nvPr>
             <p:ph type="title"/>
           </p:nvPr>
         </p:nvSpPr>
-        <p:spPr>
-          <a:xfrm>
-            <a:off x="311700" y="195615"/>
-            <a:ext cx="8520600" cy="572700"/>
-          </a:xfrm>
-          <a:prstGeom prst="rect">
-            <a:avLst/>
-          </a:prstGeom>
-        </p:spPr>
+        <p:spPr/>
         <p:txBody>
-          <a:bodyPr anchorCtr="0" anchor="t" bIns="91425" lIns="91425" spcFirstLastPara="1" rIns="91425" wrap="square" tIns="91425">
-            <a:normAutofit fontScale="90000"/>
-          </a:bodyPr>
+          <a:bodyPr/>
           <a:lstStyle/>
           <a:p>
             <a:pPr indent="0" lvl="0" marL="0" rtl="0" algn="l">
@@ -7760,7 +7767,7 @@
             </a:pPr>
             <a:r>
               <a:rPr lang="en"/>
-              <a:t>Recipes</a:t>
+              <a:t>Try It: A Repeater, by Inheritance</a:t>
             </a:r>
             <a:endParaRPr/>
           </a:p>
@@ -7768,31 +7775,25 @@
       </p:sp>
       <p:sp>
         <p:nvSpPr>
-          <p:cNvPr id="293" name="Google Shape;293;p45"/>
-          <p:cNvSpPr txBox="1"/>
+          <p:cNvPr id="3" name="Text Placeholder 2"/>
+          <p:cNvSpPr>
+            <a:spLocks noGrp="1"/>
+          </p:cNvSpPr>
           <p:nvPr>
-            <p:ph type="title"/>
+            <p:ph type="body" idx="1"/>
           </p:nvPr>
         </p:nvSpPr>
         <p:spPr>
           <a:xfrm>
-            <a:off x="311700" y="1152475"/>
-            <a:ext cx="3700000" cy="3500000"/>
+            <a:off x="311700" y="885950"/>
+            <a:ext cx="8520600" cy="1289304"/>
           </a:xfrm>
-          <a:prstGeom prst="rect">
-            <a:avLst/>
-          </a:prstGeom>
         </p:spPr>
         <p:txBody>
-          <a:bodyPr anchorCtr="0" anchor="t" bIns="91425" lIns="91425" spcFirstLastPara="1" rIns="91425" wrap="square" tIns="91425">
-            <a:normAutofit fontScale="90000"/>
-          </a:bodyPr>
+          <a:bodyPr/>
           <a:lstStyle/>
           <a:p>
             <a:pPr indent="-330200" lvl="0" marL="457200" rtl="0" algn="l">
-              <a:buClr>
-                <a:srgbClr val="DEE2E6"/>
-              </a:buClr>
               <a:spcBef>
                 <a:spcPts val="0"/>
               </a:spcBef>
@@ -7803,20 +7804,13 @@
               <a:buChar char="●"/>
             </a:pPr>
             <a:r>
-              <a:rPr lang="en" sz="1600">
-                <a:solidFill>
-                  <a:srgbClr val="DEE2E6"/>
-                </a:solidFill>
-              </a:rPr>
-              <a:t>No classes for plants or zombies</a:t>
+              <a:rPr lang="en"/>
+              <a:t>In Pvz1:</a:t>
             </a:r>
             <a:endParaRPr/>
           </a:p>
           <a:p>
             <a:pPr indent="-330200" lvl="0" marL="457200" rtl="0" algn="l">
-              <a:buClr>
-                <a:srgbClr val="DEE2E6"/>
-              </a:buClr>
               <a:spcBef>
                 <a:spcPts val="0"/>
               </a:spcBef>
@@ -7827,20 +7821,13 @@
               <a:buChar char="●"/>
             </a:pPr>
             <a:r>
-              <a:rPr lang="en" sz="1600">
-                <a:solidFill>
-                  <a:srgbClr val="DEE2E6"/>
-                </a:solidFill>
-              </a:rPr>
-              <a:t>Each kind of thing is a list of components</a:t>
+              <a:rPr lang="en"/>
+              <a:t>Make a Repeater, a Peashooter that shoots two peas</a:t>
             </a:r>
             <a:endParaRPr/>
           </a:p>
           <a:p>
             <a:pPr indent="-330200" lvl="0" marL="457200" rtl="0" algn="l">
-              <a:buClr>
-                <a:srgbClr val="DEE2E6"/>
-              </a:buClr>
               <a:spcBef>
                 <a:spcPts val="0"/>
               </a:spcBef>
@@ -7851,656 +7838,10 @@
               <a:buChar char="●"/>
             </a:pPr>
             <a:r>
-              <a:rPr lang="en" sz="1600">
-                <a:solidFill>
-                  <a:srgbClr val="DEE2E6"/>
-                </a:solidFill>
-              </a:rPr>
-              <a:t>Repeater, Conehead: no new classes</a:t>
+              <a:rPr lang="en"/>
+              <a:t>How far do you get before Peashooter has to change?</a:t>
             </a:r>
             <a:endParaRPr/>
-          </a:p>
-          <a:p>
-            <a:pPr indent="-330200" lvl="0" marL="457200" rtl="0" algn="l">
-              <a:buClr>
-                <a:srgbClr val="DEE2E6"/>
-              </a:buClr>
-              <a:spcBef>
-                <a:spcPts val="0"/>
-              </a:spcBef>
-              <a:spcAft>
-                <a:spcPts val="0"/>
-              </a:spcAft>
-              <a:buSzPts val="1600"/>
-              <a:buChar char="●"/>
-            </a:pPr>
-            <a:r>
-              <a:rPr lang="en" sz="1600">
-                <a:solidFill>
-                  <a:srgbClr val="DEE2E6"/>
-                </a:solidFill>
-              </a:rPr>
-              <a:t>Shoots and makes sun: two .With calls</a:t>
-            </a:r>
-            <a:endParaRPr/>
-          </a:p>
-          <a:p>
-            <a:pPr indent="-330200" lvl="0" marL="457200" rtl="0" algn="l">
-              <a:buClr>
-                <a:srgbClr val="DEE2E6"/>
-              </a:buClr>
-              <a:spcBef>
-                <a:spcPts val="0"/>
-              </a:spcBef>
-              <a:spcAft>
-                <a:spcPts val="0"/>
-              </a:spcAft>
-              <a:buSzPts val="1600"/>
-              <a:buChar char="●"/>
-            </a:pPr>
-            <a:r>
-              <a:rPr lang="en" sz="1600">
-                <a:solidFill>
-                  <a:srgbClr val="DEE2E6"/>
-                </a:solidFill>
-              </a:rPr>
-              <a:t>Health: written once, for plants and zombies</a:t>
-            </a:r>
-            <a:endParaRPr/>
-          </a:p>
-        </p:txBody>
-      </p:sp>
-      <p:sp>
-        <p:nvSpPr>
-          <p:cNvPr id="141" name="Google Shape;141;p23"/>
-          <p:cNvSpPr txBox="1"/>
-          <p:nvPr>
-            <p:ph idx="2" type="body"/>
-          </p:nvPr>
-        </p:nvSpPr>
-        <p:spPr>
-          <a:xfrm>
-            <a:off x="4150000" y="1152475"/>
-            <a:ext cx="4750000" cy="3600000"/>
-          </a:xfrm>
-          <a:prstGeom prst="rect">
-            <a:avLst/>
-          </a:prstGeom>
-        </p:spPr>
-        <p:txBody>
-          <a:bodyPr anchorCtr="0" anchor="t" bIns="91425" lIns="91425" spcFirstLastPara="1" rIns="91425" wrap="square" tIns="91425">
-            <a:noAutofit/>
-          </a:bodyPr>
-          <a:lstStyle/>
-          <a:p>
-            <a:pPr indent="0" lvl="0" marL="0" rtl="0" algn="l">
-              <a:lnSpc>
-                <a:spcPct val="115000"/>
-              </a:lnSpc>
-              <a:spcBef>
-                <a:spcPts val="0"/>
-              </a:spcBef>
-              <a:spcAft>
-                <a:spcPts val="0"/>
-              </a:spcAft>
-              <a:buNone/>
-            </a:pPr>
-            <a:r>
-              <a:rPr lang="en" sz="1000">
-                <a:highlight>
-                  <a:schemeClr val="dk2"/>
-                </a:highlight>
-                <a:latin typeface="Consolas"/>
-                <a:ea typeface="Consolas"/>
-                <a:cs typeface="Consolas"/>
-                <a:sym typeface="Consolas"/>
-              </a:rPr>
-              <a:t>Entity Sunflower(World world) =&gt;</a:t>
-            </a:r>
-            <a:endParaRPr sz="1000">
-              <a:solidFill>
-                <a:srgbClr val="CCCCCC"/>
-              </a:solidFill>
-              <a:highlight>
-                <a:schemeClr val="dk2"/>
-              </a:highlight>
-              <a:latin typeface="Consolas"/>
-              <a:ea typeface="Consolas"/>
-              <a:cs typeface="Consolas"/>
-              <a:sym typeface="Consolas"/>
-            </a:endParaRPr>
-          </a:p>
-          <a:p>
-            <a:pPr indent="0" lvl="0" marL="0" rtl="0" algn="l">
-              <a:lnSpc>
-                <a:spcPct val="115000"/>
-              </a:lnSpc>
-              <a:spcBef>
-                <a:spcPts val="0"/>
-              </a:spcBef>
-              <a:spcAft>
-                <a:spcPts val="0"/>
-              </a:spcAft>
-              <a:buNone/>
-            </a:pPr>
-            <a:r>
-              <a:rPr lang="en" sz="1000">
-                <a:highlight>
-                  <a:schemeClr val="dk2"/>
-                </a:highlight>
-                <a:latin typeface="Consolas"/>
-                <a:ea typeface="Consolas"/>
-                <a:cs typeface="Consolas"/>
-                <a:sym typeface="Consolas"/>
-              </a:rPr>
-              <a:t>    Plant(world, "sunflower", 6)</a:t>
-            </a:r>
-            <a:endParaRPr sz="1000">
-              <a:solidFill>
-                <a:srgbClr val="CCCCCC"/>
-              </a:solidFill>
-              <a:highlight>
-                <a:schemeClr val="dk2"/>
-              </a:highlight>
-              <a:latin typeface="Consolas"/>
-              <a:ea typeface="Consolas"/>
-              <a:cs typeface="Consolas"/>
-              <a:sym typeface="Consolas"/>
-            </a:endParaRPr>
-          </a:p>
-          <a:p>
-            <a:pPr indent="0" lvl="0" marL="0" rtl="0" algn="l">
-              <a:lnSpc>
-                <a:spcPct val="115000"/>
-              </a:lnSpc>
-              <a:spcBef>
-                <a:spcPts val="0"/>
-              </a:spcBef>
-              <a:spcAft>
-                <a:spcPts val="0"/>
-              </a:spcAft>
-              <a:buNone/>
-            </a:pPr>
-            <a:r>
-              <a:rPr lang="en" sz="1000">
-                <a:highlight>
-                  <a:schemeClr val="dk2"/>
-                </a:highlight>
-                <a:latin typeface="Consolas"/>
-                <a:ea typeface="Consolas"/>
-                <a:cs typeface="Consolas"/>
-                <a:sym typeface="Consolas"/>
-              </a:rPr>
-              <a:t>        .With(new SunProducer(12, 25));</a:t>
-            </a:r>
-            <a:endParaRPr sz="1000">
-              <a:solidFill>
-                <a:srgbClr val="CCCCCC"/>
-              </a:solidFill>
-              <a:highlight>
-                <a:schemeClr val="dk2"/>
-              </a:highlight>
-              <a:latin typeface="Consolas"/>
-              <a:ea typeface="Consolas"/>
-              <a:cs typeface="Consolas"/>
-              <a:sym typeface="Consolas"/>
-            </a:endParaRPr>
-          </a:p>
-          <a:p>
-            <a:pPr indent="0" lvl="0" marL="0" rtl="0" algn="l">
-              <a:lnSpc>
-                <a:spcPct val="115000"/>
-              </a:lnSpc>
-              <a:spcBef>
-                <a:spcPts val="0"/>
-              </a:spcBef>
-              <a:spcAft>
-                <a:spcPts val="0"/>
-              </a:spcAft>
-              <a:buNone/>
-            </a:pPr>
-            <a:r>
-              <a:rPr lang="en" sz="1000">
-                <a:highlight>
-                  <a:schemeClr val="dk2"/>
-                </a:highlight>
-                <a:latin typeface="Consolas"/>
-                <a:ea typeface="Consolas"/>
-                <a:cs typeface="Consolas"/>
-                <a:sym typeface="Consolas"/>
-              </a:rPr>
-              <a:t>Entity Repeater(World world) =&gt;</a:t>
-            </a:r>
-            <a:endParaRPr sz="1000">
-              <a:solidFill>
-                <a:srgbClr val="CCCCCC"/>
-              </a:solidFill>
-              <a:highlight>
-                <a:schemeClr val="dk2"/>
-              </a:highlight>
-              <a:latin typeface="Consolas"/>
-              <a:ea typeface="Consolas"/>
-              <a:cs typeface="Consolas"/>
-              <a:sym typeface="Consolas"/>
-            </a:endParaRPr>
-          </a:p>
-          <a:p>
-            <a:pPr indent="0" lvl="0" marL="0" rtl="0" algn="l">
-              <a:lnSpc>
-                <a:spcPct val="115000"/>
-              </a:lnSpc>
-              <a:spcBef>
-                <a:spcPts val="0"/>
-              </a:spcBef>
-              <a:spcAft>
-                <a:spcPts val="0"/>
-              </a:spcAft>
-              <a:buNone/>
-            </a:pPr>
-            <a:r>
-              <a:rPr lang="en" sz="1000">
-                <a:highlight>
-                  <a:schemeClr val="dk2"/>
-                </a:highlight>
-                <a:latin typeface="Consolas"/>
-                <a:ea typeface="Consolas"/>
-                <a:cs typeface="Consolas"/>
-                <a:sym typeface="Consolas"/>
-              </a:rPr>
-              <a:t>    Plant(world, "repeater", 6)</a:t>
-            </a:r>
-            <a:endParaRPr sz="1000">
-              <a:solidFill>
-                <a:srgbClr val="CCCCCC"/>
-              </a:solidFill>
-              <a:highlight>
-                <a:schemeClr val="dk2"/>
-              </a:highlight>
-              <a:latin typeface="Consolas"/>
-              <a:ea typeface="Consolas"/>
-              <a:cs typeface="Consolas"/>
-              <a:sym typeface="Consolas"/>
-            </a:endParaRPr>
-          </a:p>
-          <a:p>
-            <a:pPr indent="0" lvl="0" marL="0" rtl="0" algn="l">
-              <a:lnSpc>
-                <a:spcPct val="115000"/>
-              </a:lnSpc>
-              <a:spcBef>
-                <a:spcPts val="0"/>
-              </a:spcBef>
-              <a:spcAft>
-                <a:spcPts val="0"/>
-              </a:spcAft>
-              <a:buNone/>
-            </a:pPr>
-            <a:r>
-              <a:rPr lang="en" sz="1000">
-                <a:highlight>
-                  <a:schemeClr val="dk2"/>
-                </a:highlight>
-                <a:latin typeface="Consolas"/>
-                <a:ea typeface="Consolas"/>
-                <a:cs typeface="Consolas"/>
-                <a:sym typeface="Consolas"/>
-              </a:rPr>
-              <a:t>        .With(new Shooter(1.4f, 2, 1));</a:t>
-            </a:r>
-            <a:endParaRPr sz="1000">
-              <a:solidFill>
-                <a:srgbClr val="CCCCCC"/>
-              </a:solidFill>
-              <a:highlight>
-                <a:schemeClr val="dk2"/>
-              </a:highlight>
-              <a:latin typeface="Consolas"/>
-              <a:ea typeface="Consolas"/>
-              <a:cs typeface="Consolas"/>
-              <a:sym typeface="Consolas"/>
-            </a:endParaRPr>
-          </a:p>
-          <a:p>
-            <a:pPr indent="0" lvl="0" marL="0" rtl="0" algn="l">
-              <a:lnSpc>
-                <a:spcPct val="115000"/>
-              </a:lnSpc>
-              <a:spcBef>
-                <a:spcPts val="0"/>
-              </a:spcBef>
-              <a:spcAft>
-                <a:spcPts val="0"/>
-              </a:spcAft>
-              <a:buNone/>
-            </a:pPr>
-            <a:r>
-              <a:rPr lang="en" sz="1000">
-                <a:highlight>
-                  <a:schemeClr val="dk2"/>
-                </a:highlight>
-                <a:latin typeface="Consolas"/>
-                <a:ea typeface="Consolas"/>
-                <a:cs typeface="Consolas"/>
-                <a:sym typeface="Consolas"/>
-              </a:rPr>
-              <a:t/>
-            </a:r>
-            <a:endParaRPr sz="1000">
-              <a:solidFill>
-                <a:srgbClr val="CCCCCC"/>
-              </a:solidFill>
-              <a:highlight>
-                <a:schemeClr val="dk2"/>
-              </a:highlight>
-              <a:latin typeface="Consolas"/>
-              <a:ea typeface="Consolas"/>
-              <a:cs typeface="Consolas"/>
-              <a:sym typeface="Consolas"/>
-            </a:endParaRPr>
-          </a:p>
-          <a:p>
-            <a:pPr indent="0" lvl="0" marL="0" rtl="0" algn="l">
-              <a:lnSpc>
-                <a:spcPct val="115000"/>
-              </a:lnSpc>
-              <a:spcBef>
-                <a:spcPts val="0"/>
-              </a:spcBef>
-              <a:spcAft>
-                <a:spcPts val="0"/>
-              </a:spcAft>
-              <a:buNone/>
-            </a:pPr>
-            <a:r>
-              <a:rPr lang="en" sz="1000">
-                <a:highlight>
-                  <a:schemeClr val="dk2"/>
-                </a:highlight>
-                <a:latin typeface="Consolas"/>
-                <a:ea typeface="Consolas"/>
-                <a:cs typeface="Consolas"/>
-                <a:sym typeface="Consolas"/>
-              </a:rPr>
-              <a:t>Entity Zombie(World world) =&gt;</a:t>
-            </a:r>
-            <a:endParaRPr sz="1000">
-              <a:solidFill>
-                <a:srgbClr val="CCCCCC"/>
-              </a:solidFill>
-              <a:highlight>
-                <a:schemeClr val="dk2"/>
-              </a:highlight>
-              <a:latin typeface="Consolas"/>
-              <a:ea typeface="Consolas"/>
-              <a:cs typeface="Consolas"/>
-              <a:sym typeface="Consolas"/>
-            </a:endParaRPr>
-          </a:p>
-          <a:p>
-            <a:pPr indent="0" lvl="0" marL="0" rtl="0" algn="l">
-              <a:lnSpc>
-                <a:spcPct val="115000"/>
-              </a:lnSpc>
-              <a:spcBef>
-                <a:spcPts val="0"/>
-              </a:spcBef>
-              <a:spcAft>
-                <a:spcPts val="0"/>
-              </a:spcAft>
-              <a:buNone/>
-            </a:pPr>
-            <a:r>
-              <a:rPr lang="en" sz="1000">
-                <a:highlight>
-                  <a:schemeClr val="dk2"/>
-                </a:highlight>
-                <a:latin typeface="Consolas"/>
-                <a:ea typeface="Consolas"/>
-                <a:cs typeface="Consolas"/>
-                <a:sym typeface="Consolas"/>
-              </a:rPr>
-              <a:t>    new Entity(world)</a:t>
-            </a:r>
-            <a:endParaRPr sz="1000">
-              <a:solidFill>
-                <a:srgbClr val="CCCCCC"/>
-              </a:solidFill>
-              <a:highlight>
-                <a:schemeClr val="dk2"/>
-              </a:highlight>
-              <a:latin typeface="Consolas"/>
-              <a:ea typeface="Consolas"/>
-              <a:cs typeface="Consolas"/>
-              <a:sym typeface="Consolas"/>
-            </a:endParaRPr>
-          </a:p>
-          <a:p>
-            <a:pPr indent="0" lvl="0" marL="0" rtl="0" algn="l">
-              <a:lnSpc>
-                <a:spcPct val="115000"/>
-              </a:lnSpc>
-              <a:spcBef>
-                <a:spcPts val="0"/>
-              </a:spcBef>
-              <a:spcAft>
-                <a:spcPts val="0"/>
-              </a:spcAft>
-              <a:buNone/>
-            </a:pPr>
-            <a:r>
-              <a:rPr lang="en" sz="1000">
-                <a:highlight>
-                  <a:schemeClr val="dk2"/>
-                </a:highlight>
-                <a:latin typeface="Consolas"/>
-                <a:ea typeface="Consolas"/>
-                <a:cs typeface="Consolas"/>
-                <a:sym typeface="Consolas"/>
-              </a:rPr>
-              <a:t>        .With(new SpriteRenderer(zombie))</a:t>
-            </a:r>
-            <a:endParaRPr sz="1000">
-              <a:solidFill>
-                <a:srgbClr val="CCCCCC"/>
-              </a:solidFill>
-              <a:highlight>
-                <a:schemeClr val="dk2"/>
-              </a:highlight>
-              <a:latin typeface="Consolas"/>
-              <a:ea typeface="Consolas"/>
-              <a:cs typeface="Consolas"/>
-              <a:sym typeface="Consolas"/>
-            </a:endParaRPr>
-          </a:p>
-          <a:p>
-            <a:pPr indent="0" lvl="0" marL="0" rtl="0" algn="l">
-              <a:lnSpc>
-                <a:spcPct val="115000"/>
-              </a:lnSpc>
-              <a:spcBef>
-                <a:spcPts val="0"/>
-              </a:spcBef>
-              <a:spcAft>
-                <a:spcPts val="0"/>
-              </a:spcAft>
-              <a:buNone/>
-            </a:pPr>
-            <a:r>
-              <a:rPr lang="en" sz="1000">
-                <a:highlight>
-                  <a:schemeClr val="dk2"/>
-                </a:highlight>
-                <a:latin typeface="Consolas"/>
-                <a:ea typeface="Consolas"/>
-                <a:cs typeface="Consolas"/>
-                <a:sym typeface="Consolas"/>
-              </a:rPr>
-              <a:t>        .With(new Health(10))</a:t>
-            </a:r>
-            <a:endParaRPr sz="1000">
-              <a:solidFill>
-                <a:srgbClr val="CCCCCC"/>
-              </a:solidFill>
-              <a:highlight>
-                <a:schemeClr val="dk2"/>
-              </a:highlight>
-              <a:latin typeface="Consolas"/>
-              <a:ea typeface="Consolas"/>
-              <a:cs typeface="Consolas"/>
-              <a:sym typeface="Consolas"/>
-            </a:endParaRPr>
-          </a:p>
-          <a:p>
-            <a:pPr indent="0" lvl="0" marL="0" rtl="0" algn="l">
-              <a:lnSpc>
-                <a:spcPct val="115000"/>
-              </a:lnSpc>
-              <a:spcBef>
-                <a:spcPts val="0"/>
-              </a:spcBef>
-              <a:spcAft>
-                <a:spcPts val="0"/>
-              </a:spcAft>
-              <a:buNone/>
-            </a:pPr>
-            <a:r>
-              <a:rPr lang="en" sz="1000">
-                <a:highlight>
-                  <a:schemeClr val="dk2"/>
-                </a:highlight>
-                <a:latin typeface="Consolas"/>
-                <a:ea typeface="Consolas"/>
-                <a:cs typeface="Consolas"/>
-                <a:sym typeface="Consolas"/>
-              </a:rPr>
-              <a:t>        .With(new Walker(16))</a:t>
-            </a:r>
-            <a:endParaRPr sz="1000">
-              <a:solidFill>
-                <a:srgbClr val="CCCCCC"/>
-              </a:solidFill>
-              <a:highlight>
-                <a:schemeClr val="dk2"/>
-              </a:highlight>
-              <a:latin typeface="Consolas"/>
-              <a:ea typeface="Consolas"/>
-              <a:cs typeface="Consolas"/>
-              <a:sym typeface="Consolas"/>
-            </a:endParaRPr>
-          </a:p>
-          <a:p>
-            <a:pPr indent="0" lvl="0" marL="0" rtl="0" algn="l">
-              <a:lnSpc>
-                <a:spcPct val="115000"/>
-              </a:lnSpc>
-              <a:spcBef>
-                <a:spcPts val="0"/>
-              </a:spcBef>
-              <a:spcAft>
-                <a:spcPts val="0"/>
-              </a:spcAft>
-              <a:buNone/>
-            </a:pPr>
-            <a:r>
-              <a:rPr lang="en" sz="1000">
-                <a:highlight>
-                  <a:schemeClr val="dk2"/>
-                </a:highlight>
-                <a:latin typeface="Consolas"/>
-                <a:ea typeface="Consolas"/>
-                <a:cs typeface="Consolas"/>
-                <a:sym typeface="Consolas"/>
-              </a:rPr>
-              <a:t>        .With(new Eater(1));</a:t>
-            </a:r>
-            <a:endParaRPr sz="1000">
-              <a:solidFill>
-                <a:srgbClr val="CCCCCC"/>
-              </a:solidFill>
-              <a:highlight>
-                <a:schemeClr val="dk2"/>
-              </a:highlight>
-              <a:latin typeface="Consolas"/>
-              <a:ea typeface="Consolas"/>
-              <a:cs typeface="Consolas"/>
-              <a:sym typeface="Consolas"/>
-            </a:endParaRPr>
-          </a:p>
-          <a:p>
-            <a:pPr indent="0" lvl="0" marL="0" rtl="0" algn="l">
-              <a:lnSpc>
-                <a:spcPct val="115000"/>
-              </a:lnSpc>
-              <a:spcBef>
-                <a:spcPts val="0"/>
-              </a:spcBef>
-              <a:spcAft>
-                <a:spcPts val="0"/>
-              </a:spcAft>
-              <a:buNone/>
-            </a:pPr>
-            <a:r>
-              <a:rPr lang="en" sz="1000">
-                <a:highlight>
-                  <a:schemeClr val="dk2"/>
-                </a:highlight>
-                <a:latin typeface="Consolas"/>
-                <a:ea typeface="Consolas"/>
-                <a:cs typeface="Consolas"/>
-                <a:sym typeface="Consolas"/>
-              </a:rPr>
-              <a:t>Entity Conehead(World world) =&gt;</a:t>
-            </a:r>
-            <a:endParaRPr sz="1000">
-              <a:solidFill>
-                <a:srgbClr val="CCCCCC"/>
-              </a:solidFill>
-              <a:highlight>
-                <a:schemeClr val="dk2"/>
-              </a:highlight>
-              <a:latin typeface="Consolas"/>
-              <a:ea typeface="Consolas"/>
-              <a:cs typeface="Consolas"/>
-              <a:sym typeface="Consolas"/>
-            </a:endParaRPr>
-          </a:p>
-          <a:p>
-            <a:pPr indent="0" lvl="0" marL="0" rtl="0" algn="l">
-              <a:lnSpc>
-                <a:spcPct val="115000"/>
-              </a:lnSpc>
-              <a:spcBef>
-                <a:spcPts val="0"/>
-              </a:spcBef>
-              <a:spcAft>
-                <a:spcPts val="0"/>
-              </a:spcAft>
-              <a:buNone/>
-            </a:pPr>
-            <a:r>
-              <a:rPr lang="en" sz="1000">
-                <a:highlight>
-                  <a:schemeClr val="dk2"/>
-                </a:highlight>
-                <a:latin typeface="Consolas"/>
-                <a:ea typeface="Consolas"/>
-                <a:cs typeface="Consolas"/>
-                <a:sym typeface="Consolas"/>
-              </a:rPr>
-              <a:t>    Zombie(world).With(new Armour(18, cone));</a:t>
-            </a:r>
-            <a:endParaRPr sz="1000">
-              <a:solidFill>
-                <a:srgbClr val="CCCCCC"/>
-              </a:solidFill>
-              <a:highlight>
-                <a:schemeClr val="dk2"/>
-              </a:highlight>
-              <a:latin typeface="Consolas"/>
-              <a:ea typeface="Consolas"/>
-              <a:cs typeface="Consolas"/>
-              <a:sym typeface="Consolas"/>
-            </a:endParaRPr>
           </a:p>
         </p:txBody>
       </p:sp>
@@ -8556,7 +7897,7 @@
             </a:pPr>
             <a:r>
               <a:rPr lang="en"/>
-              <a:t>Components Working Together</a:t>
+              <a:t>The Component Pattern</a:t>
             </a:r>
             <a:endParaRPr/>
           </a:p>
@@ -8604,7 +7945,55 @@
                   <a:srgbClr val="DEE2E6"/>
                 </a:solidFill>
               </a:rPr>
-              <a:t>Through the owner</a:t>
+              <a:t>One entity, many domains (drawing, health, shooting), not coupled</a:t>
+            </a:r>
+            <a:endParaRPr/>
+          </a:p>
+          <a:p>
+            <a:pPr indent="-330200" lvl="0" marL="457200" rtl="0" algn="l">
+              <a:buClr>
+                <a:srgbClr val="DEE2E6"/>
+              </a:buClr>
+              <a:spcBef>
+                <a:spcPts val="0"/>
+              </a:spcBef>
+              <a:spcAft>
+                <a:spcPts val="0"/>
+              </a:spcAft>
+              <a:buSzPts val="1600"/>
+              <a:buChar char="●"/>
+            </a:pPr>
+            <a:r>
+              <a:rPr lang="en" sz="1600">
+                <a:solidFill>
+                  <a:srgbClr val="DEE2E6"/>
+                </a:solidFill>
+              </a:rPr>
+              <a:t>An entity: a position, a row, and a list of components</a:t>
+            </a:r>
+            <a:endParaRPr/>
+          </a:p>
+          <a:p>
+            <a:pPr indent="-330200" lvl="0" marL="457200" rtl="0" algn="l">
+              <a:buClr>
+                <a:srgbClr val="DEE2E6"/>
+              </a:buClr>
+              <a:spcBef>
+                <a:spcPts val="0"/>
+              </a:spcBef>
+              <a:spcAft>
+                <a:spcPts val="0"/>
+              </a:spcAft>
+              <a:buSzPts val="1600"/>
+              <a:buChar char="●"/>
+            </a:pPr>
+            <a:r>
+              <a:rPr lang="en" sz="1600">
+                <a:solidFill>
+                  <a:srgbClr val="DEE2E6"/>
+                </a:solidFill>
+              </a:rPr>
+              <a:t>A component: one ability</a:t>
             </a:r>
             <a:endParaRPr/>
           </a:p>
@@ -8628,127 +8017,7 @@
                   <a:srgbClr val="6C757D"/>
                 </a:solidFill>
               </a:rPr>
-              <a:t>Walker stops while the Eater eats</a:t>
-            </a:r>
-            <a:endParaRPr/>
-          </a:p>
-          <a:p>
-            <a:pPr indent="-317500" lvl="1" marL="914400" rtl="0" algn="l">
-              <a:buClr>
-                <a:srgbClr val="6C757D"/>
-              </a:buClr>
-              <a:spcBef>
-                <a:spcPts val="0"/>
-              </a:spcBef>
-              <a:spcAft>
-                <a:spcPts val="0"/>
-              </a:spcAft>
-              <a:buSzPts val="1400"/>
-              <a:buChar char="○"/>
-            </a:pPr>
-            <a:r>
-              <a:rPr lang="en" sz="1400">
-                <a:solidFill>
-                  <a:srgbClr val="6C757D"/>
-                </a:solidFill>
-              </a:rPr>
-              <a:t>Health lets the Armour go first</a:t>
-            </a:r>
-            <a:endParaRPr/>
-          </a:p>
-          <a:p>
-            <a:pPr indent="-330200" lvl="0" marL="457200" rtl="0" algn="l">
-              <a:buClr>
-                <a:srgbClr val="DEE2E6"/>
-              </a:buClr>
-              <a:spcBef>
-                <a:spcPts val="0"/>
-              </a:spcBef>
-              <a:spcAft>
-                <a:spcPts val="0"/>
-              </a:spcAft>
-              <a:buSzPts val="1600"/>
-              <a:buChar char="●"/>
-            </a:pPr>
-            <a:r>
-              <a:rPr lang="en" sz="1600">
-                <a:solidFill>
-                  <a:srgbClr val="DEE2E6"/>
-                </a:solidFill>
-              </a:rPr>
-              <a:t>Through the world</a:t>
-            </a:r>
-            <a:endParaRPr/>
-          </a:p>
-          <a:p>
-            <a:pPr indent="-317500" lvl="1" marL="914400" rtl="0" algn="l">
-              <a:buClr>
-                <a:srgbClr val="6C757D"/>
-              </a:buClr>
-              <a:spcBef>
-                <a:spcPts val="0"/>
-              </a:spcBef>
-              <a:spcAft>
-                <a:spcPts val="0"/>
-              </a:spcAft>
-              <a:buSzPts val="1400"/>
-              <a:buChar char="○"/>
-            </a:pPr>
-            <a:r>
-              <a:rPr lang="en" sz="1400">
-                <a:solidFill>
-                  <a:srgbClr val="6C757D"/>
-                </a:solidFill>
-              </a:rPr>
-              <a:t>Shooter: a zombie ahead in my row?</a:t>
-            </a:r>
-            <a:endParaRPr/>
-          </a:p>
-          <a:p>
-            <a:pPr indent="-330200" lvl="0" marL="457200" rtl="0" algn="l">
-              <a:buClr>
-                <a:srgbClr val="DEE2E6"/>
-              </a:buClr>
-              <a:spcBef>
-                <a:spcPts val="0"/>
-              </a:spcBef>
-              <a:spcAft>
-                <a:spcPts val="0"/>
-              </a:spcAft>
-              <a:buSzPts val="1600"/>
-              <a:buChar char="●"/>
-            </a:pPr>
-            <a:r>
-              <a:rPr lang="en" sz="1600">
-                <a:solidFill>
-                  <a:srgbClr val="DEE2E6"/>
-                </a:solidFill>
-              </a:rPr>
-              <a:t>Depend on components, not on kinds of entity</a:t>
-            </a:r>
-            <a:endParaRPr/>
-          </a:p>
-          <a:p>
-            <a:pPr indent="-330200" lvl="0" marL="457200" rtl="0" algn="l">
-              <a:buClr>
-                <a:srgbClr val="DEE2E6"/>
-              </a:buClr>
-              <a:spcBef>
-                <a:spcPts val="0"/>
-              </a:spcBef>
-              <a:spcAft>
-                <a:spcPts val="0"/>
-              </a:spcAft>
-              <a:buSzPts val="1600"/>
-              <a:buChar char="●"/>
-            </a:pPr>
-            <a:r>
-              <a:rPr lang="en" sz="1600">
-                <a:solidFill>
-                  <a:srgbClr val="DEE2E6"/>
-                </a:solidFill>
-              </a:rPr>
-              <a:t>The world: one loop for everything</a:t>
+              <a:t>Health, Shooter, SunProducer, Walker, Eater, Armour, SpriteRenderer</a:t>
             </a:r>
             <a:endParaRPr/>
           </a:p>
@@ -8799,7 +8068,7 @@
                 <a:cs typeface="Consolas"/>
                 <a:sym typeface="Consolas"/>
               </a:rPr>
-              <a:t>// Walker.cs</a:t>
+              <a:t>public class Entity(World world)</a:t>
             </a:r>
             <a:endParaRPr sz="1000">
               <a:solidFill>
@@ -8837,7 +8106,7 @@
                 <a:cs typeface="Consolas"/>
                 <a:sym typeface="Consolas"/>
               </a:rPr>
-              <a:t>public override void Update(float dt)</a:t>
+              <a:t>{</a:t>
             </a:r>
             <a:endParaRPr sz="1000">
               <a:solidFill>
@@ -8875,7 +8144,7 @@
                 <a:cs typeface="Consolas"/>
                 <a:sym typeface="Consolas"/>
               </a:rPr>
-              <a:t>{</a:t>
+              <a:t>    List&lt;Component&gt; _components = [];</a:t>
             </a:r>
             <a:endParaRPr sz="1000">
               <a:solidFill>
@@ -8913,7 +8182,7 @@
                 <a:cs typeface="Consolas"/>
                 <a:sym typeface="Consolas"/>
               </a:rPr>
-              <a:t>    if (Owner.Get&lt;Eater&gt;()?.IsEating == true)</a:t>
+              <a:t/>
             </a:r>
             <a:endParaRPr sz="1000">
               <a:solidFill>
@@ -8951,7 +8220,7 @@
                 <a:cs typeface="Consolas"/>
                 <a:sym typeface="Consolas"/>
               </a:rPr>
-              <a:t>        return;</a:t>
+              <a:t>    public Vector2 Position { get; set; }</a:t>
             </a:r>
             <a:endParaRPr sz="1000">
               <a:solidFill>
@@ -8989,7 +8258,7 @@
                 <a:cs typeface="Consolas"/>
                 <a:sym typeface="Consolas"/>
               </a:rPr>
-              <a:t>    Owner.Position -=</a:t>
+              <a:t>    public int Row { get; set; }</a:t>
             </a:r>
             <a:endParaRPr sz="1000">
               <a:solidFill>
@@ -9027,7 +8296,7 @@
                 <a:cs typeface="Consolas"/>
                 <a:sym typeface="Consolas"/>
               </a:rPr>
-              <a:t>        new Vector2(speed * dt, 0);</a:t>
+              <a:t/>
             </a:r>
             <a:endParaRPr sz="1000">
               <a:solidFill>
@@ -9065,7 +8334,7 @@
                 <a:cs typeface="Consolas"/>
                 <a:sym typeface="Consolas"/>
               </a:rPr>
-              <a:t>}</a:t>
+              <a:t>    public Entity With(Component c) { ... }</a:t>
             </a:r>
             <a:endParaRPr sz="1000">
               <a:solidFill>
@@ -9103,7 +8372,7 @@
                 <a:cs typeface="Consolas"/>
                 <a:sym typeface="Consolas"/>
               </a:rPr>
-              <a:t/>
+              <a:t>    public T Get&lt;T&gt;() where T : Component</a:t>
             </a:r>
             <a:endParaRPr sz="1000">
               <a:solidFill>
@@ -9141,7 +8410,7 @@
                 <a:cs typeface="Consolas"/>
                 <a:sym typeface="Consolas"/>
               </a:rPr>
-              <a:t>// Shooter.cs</a:t>
+              <a:t>        { ... }</a:t>
             </a:r>
             <a:endParaRPr sz="1000">
               <a:solidFill>
@@ -9179,7 +8448,7 @@
                 <a:cs typeface="Consolas"/>
                 <a:sym typeface="Consolas"/>
               </a:rPr>
-              <a:t>if (_cooldown &lt;= 0 &amp;&amp;</a:t>
+              <a:t/>
             </a:r>
             <a:endParaRPr sz="1000">
               <a:solidFill>
@@ -9217,7 +8486,7 @@
                 <a:cs typeface="Consolas"/>
                 <a:sym typeface="Consolas"/>
               </a:rPr>
-              <a:t>    World.FirstZombieAhead(Owner.Row,</a:t>
+              <a:t>    public void Update(float dt)</a:t>
             </a:r>
             <a:endParaRPr sz="1000">
               <a:solidFill>
@@ -9255,7 +8524,7 @@
                 <a:cs typeface="Consolas"/>
                 <a:sym typeface="Consolas"/>
               </a:rPr>
-              <a:t>        Owner.Position.X) != null)</a:t>
+              <a:t>    {</a:t>
             </a:r>
             <a:endParaRPr sz="1000">
               <a:solidFill>
@@ -9293,7 +8562,7 @@
                 <a:cs typeface="Consolas"/>
                 <a:sym typeface="Consolas"/>
               </a:rPr>
-              <a:t>    Fire();</a:t>
+              <a:t>        foreach (Component c in _components)</a:t>
             </a:r>
             <a:endParaRPr sz="1000">
               <a:solidFill>
@@ -9308,6 +8577,120 @@
               <a:sym typeface="Consolas"/>
             </a:endParaRPr>
           </a:p>
+          <a:p>
+            <a:pPr indent="0" lvl="0" marL="0" rtl="0" algn="l">
+              <a:lnSpc>
+                <a:spcPct val="115000"/>
+              </a:lnSpc>
+              <a:spcBef>
+                <a:spcPts val="0"/>
+              </a:spcBef>
+              <a:spcAft>
+                <a:spcPts val="0"/>
+              </a:spcAft>
+              <a:buNone/>
+            </a:pPr>
+            <a:r>
+              <a:rPr lang="en" sz="1000">
+                <a:highlight>
+                  <a:schemeClr val="dk2"/>
+                </a:highlight>
+                <a:latin typeface="Consolas"/>
+                <a:ea typeface="Consolas"/>
+                <a:cs typeface="Consolas"/>
+                <a:sym typeface="Consolas"/>
+              </a:rPr>
+              <a:t>            c.Update(dt);</a:t>
+            </a:r>
+            <a:endParaRPr sz="1000">
+              <a:solidFill>
+                <a:srgbClr val="CCCCCC"/>
+              </a:solidFill>
+              <a:highlight>
+                <a:schemeClr val="dk2"/>
+              </a:highlight>
+              <a:latin typeface="Consolas"/>
+              <a:ea typeface="Consolas"/>
+              <a:cs typeface="Consolas"/>
+              <a:sym typeface="Consolas"/>
+            </a:endParaRPr>
+          </a:p>
+          <a:p>
+            <a:pPr indent="0" lvl="0" marL="0" rtl="0" algn="l">
+              <a:lnSpc>
+                <a:spcPct val="115000"/>
+              </a:lnSpc>
+              <a:spcBef>
+                <a:spcPts val="0"/>
+              </a:spcBef>
+              <a:spcAft>
+                <a:spcPts val="0"/>
+              </a:spcAft>
+              <a:buNone/>
+            </a:pPr>
+            <a:r>
+              <a:rPr lang="en" sz="1000">
+                <a:highlight>
+                  <a:schemeClr val="dk2"/>
+                </a:highlight>
+                <a:latin typeface="Consolas"/>
+                <a:ea typeface="Consolas"/>
+                <a:cs typeface="Consolas"/>
+                <a:sym typeface="Consolas"/>
+              </a:rPr>
+              <a:t>    }</a:t>
+            </a:r>
+            <a:endParaRPr sz="1000">
+              <a:solidFill>
+                <a:srgbClr val="CCCCCC"/>
+              </a:solidFill>
+              <a:highlight>
+                <a:schemeClr val="dk2"/>
+              </a:highlight>
+              <a:latin typeface="Consolas"/>
+              <a:ea typeface="Consolas"/>
+              <a:cs typeface="Consolas"/>
+              <a:sym typeface="Consolas"/>
+            </a:endParaRPr>
+          </a:p>
+          <a:p>
+            <a:pPr indent="0" lvl="0" marL="0" rtl="0" algn="l">
+              <a:lnSpc>
+                <a:spcPct val="115000"/>
+              </a:lnSpc>
+              <a:spcBef>
+                <a:spcPts val="0"/>
+              </a:spcBef>
+              <a:spcAft>
+                <a:spcPts val="0"/>
+              </a:spcAft>
+              <a:buNone/>
+            </a:pPr>
+            <a:r>
+              <a:rPr lang="en" sz="1000">
+                <a:highlight>
+                  <a:schemeClr val="dk2"/>
+                </a:highlight>
+                <a:latin typeface="Consolas"/>
+                <a:ea typeface="Consolas"/>
+                <a:cs typeface="Consolas"/>
+                <a:sym typeface="Consolas"/>
+              </a:rPr>
+              <a:t>}</a:t>
+            </a:r>
+            <a:endParaRPr sz="1000">
+              <a:solidFill>
+                <a:srgbClr val="CCCCCC"/>
+              </a:solidFill>
+              <a:highlight>
+                <a:schemeClr val="dk2"/>
+              </a:highlight>
+              <a:latin typeface="Consolas"/>
+              <a:ea typeface="Consolas"/>
+              <a:cs typeface="Consolas"/>
+              <a:sym typeface="Consolas"/>
+            </a:endParaRPr>
+          </a:p>
         </p:txBody>
       </p:sp>
     </p:spTree>
@@ -9319,6 +8702,1608 @@
 </file>
 
 <file path=ppt/slides/slide15.xml><?xml version="1.0" encoding="utf-8"?>
+<p:sld xmlns:a="http://schemas.openxmlformats.org/drawingml/2006/main" xmlns:p="http://schemas.openxmlformats.org/presentationml/2006/main" xmlns:r="http://schemas.openxmlformats.org/officeDocument/2006/relationships">
+  <p:cSld>
+    <p:spTree>
+      <p:nvGrpSpPr>
+        <p:cNvPr id="1" name=""/>
+        <p:cNvGrpSpPr/>
+        <p:nvPr/>
+      </p:nvGrpSpPr>
+      <p:grpSpPr/>
+      <p:sp>
+        <p:nvSpPr>
+          <p:cNvPr id="140" name="Google Shape;140;p23"/>
+          <p:cNvSpPr txBox="1"/>
+          <p:nvPr>
+            <p:ph type="title"/>
+          </p:nvPr>
+        </p:nvSpPr>
+        <p:spPr>
+          <a:xfrm>
+            <a:off x="311700" y="195615"/>
+            <a:ext cx="8520600" cy="572700"/>
+          </a:xfrm>
+          <a:prstGeom prst="rect">
+            <a:avLst/>
+          </a:prstGeom>
+        </p:spPr>
+        <p:txBody>
+          <a:bodyPr anchorCtr="0" anchor="t" bIns="91425" lIns="91425" spcFirstLastPara="1" rIns="91425" wrap="square" tIns="91425">
+            <a:normAutofit fontScale="90000"/>
+          </a:bodyPr>
+          <a:lstStyle/>
+          <a:p>
+            <a:pPr indent="0" lvl="0" marL="0" rtl="0" algn="l">
+              <a:spcBef>
+                <a:spcPts val="0"/>
+              </a:spcBef>
+              <a:spcAft>
+                <a:spcPts val="0"/>
+              </a:spcAft>
+              <a:buNone/>
+            </a:pPr>
+            <a:r>
+              <a:rPr lang="en"/>
+              <a:t>Recipes</a:t>
+            </a:r>
+            <a:endParaRPr/>
+          </a:p>
+        </p:txBody>
+      </p:sp>
+      <p:sp>
+        <p:nvSpPr>
+          <p:cNvPr id="293" name="Google Shape;293;p45"/>
+          <p:cNvSpPr txBox="1"/>
+          <p:nvPr>
+            <p:ph type="title"/>
+          </p:nvPr>
+        </p:nvSpPr>
+        <p:spPr>
+          <a:xfrm>
+            <a:off x="311700" y="1152475"/>
+            <a:ext cx="3700000" cy="3500000"/>
+          </a:xfrm>
+          <a:prstGeom prst="rect">
+            <a:avLst/>
+          </a:prstGeom>
+        </p:spPr>
+        <p:txBody>
+          <a:bodyPr anchorCtr="0" anchor="t" bIns="91425" lIns="91425" spcFirstLastPara="1" rIns="91425" wrap="square" tIns="91425">
+            <a:normAutofit fontScale="90000"/>
+          </a:bodyPr>
+          <a:lstStyle/>
+          <a:p>
+            <a:pPr indent="-330200" lvl="0" marL="457200" rtl="0" algn="l">
+              <a:buClr>
+                <a:srgbClr val="DEE2E6"/>
+              </a:buClr>
+              <a:spcBef>
+                <a:spcPts val="0"/>
+              </a:spcBef>
+              <a:spcAft>
+                <a:spcPts val="0"/>
+              </a:spcAft>
+              <a:buSzPts val="1600"/>
+              <a:buChar char="●"/>
+            </a:pPr>
+            <a:r>
+              <a:rPr lang="en" sz="1600">
+                <a:solidFill>
+                  <a:srgbClr val="DEE2E6"/>
+                </a:solidFill>
+              </a:rPr>
+              <a:t>No classes for plants or zombies</a:t>
+            </a:r>
+            <a:endParaRPr/>
+          </a:p>
+          <a:p>
+            <a:pPr indent="-330200" lvl="0" marL="457200" rtl="0" algn="l">
+              <a:buClr>
+                <a:srgbClr val="DEE2E6"/>
+              </a:buClr>
+              <a:spcBef>
+                <a:spcPts val="0"/>
+              </a:spcBef>
+              <a:spcAft>
+                <a:spcPts val="0"/>
+              </a:spcAft>
+              <a:buSzPts val="1600"/>
+              <a:buChar char="●"/>
+            </a:pPr>
+            <a:r>
+              <a:rPr lang="en" sz="1600">
+                <a:solidFill>
+                  <a:srgbClr val="DEE2E6"/>
+                </a:solidFill>
+              </a:rPr>
+              <a:t>Each kind of thing is a list of components</a:t>
+            </a:r>
+            <a:endParaRPr/>
+          </a:p>
+          <a:p>
+            <a:pPr indent="-330200" lvl="0" marL="457200" rtl="0" algn="l">
+              <a:buClr>
+                <a:srgbClr val="DEE2E6"/>
+              </a:buClr>
+              <a:spcBef>
+                <a:spcPts val="0"/>
+              </a:spcBef>
+              <a:spcAft>
+                <a:spcPts val="0"/>
+              </a:spcAft>
+              <a:buSzPts val="1600"/>
+              <a:buChar char="●"/>
+            </a:pPr>
+            <a:r>
+              <a:rPr lang="en" sz="1600">
+                <a:solidFill>
+                  <a:srgbClr val="DEE2E6"/>
+                </a:solidFill>
+              </a:rPr>
+              <a:t>Repeater, Conehead: no new classes</a:t>
+            </a:r>
+            <a:endParaRPr/>
+          </a:p>
+          <a:p>
+            <a:pPr indent="-330200" lvl="0" marL="457200" rtl="0" algn="l">
+              <a:buClr>
+                <a:srgbClr val="DEE2E6"/>
+              </a:buClr>
+              <a:spcBef>
+                <a:spcPts val="0"/>
+              </a:spcBef>
+              <a:spcAft>
+                <a:spcPts val="0"/>
+              </a:spcAft>
+              <a:buSzPts val="1600"/>
+              <a:buChar char="●"/>
+            </a:pPr>
+            <a:r>
+              <a:rPr lang="en" sz="1600">
+                <a:solidFill>
+                  <a:srgbClr val="DEE2E6"/>
+                </a:solidFill>
+              </a:rPr>
+              <a:t>Shoots and makes sun: two .With calls</a:t>
+            </a:r>
+            <a:endParaRPr/>
+          </a:p>
+          <a:p>
+            <a:pPr indent="-330200" lvl="0" marL="457200" rtl="0" algn="l">
+              <a:buClr>
+                <a:srgbClr val="DEE2E6"/>
+              </a:buClr>
+              <a:spcBef>
+                <a:spcPts val="0"/>
+              </a:spcBef>
+              <a:spcAft>
+                <a:spcPts val="0"/>
+              </a:spcAft>
+              <a:buSzPts val="1600"/>
+              <a:buChar char="●"/>
+            </a:pPr>
+            <a:r>
+              <a:rPr lang="en" sz="1600">
+                <a:solidFill>
+                  <a:srgbClr val="DEE2E6"/>
+                </a:solidFill>
+              </a:rPr>
+              <a:t>Health: written once, for plants and zombies</a:t>
+            </a:r>
+            <a:endParaRPr/>
+          </a:p>
+        </p:txBody>
+      </p:sp>
+      <p:sp>
+        <p:nvSpPr>
+          <p:cNvPr id="141" name="Google Shape;141;p23"/>
+          <p:cNvSpPr txBox="1"/>
+          <p:nvPr>
+            <p:ph idx="2" type="body"/>
+          </p:nvPr>
+        </p:nvSpPr>
+        <p:spPr>
+          <a:xfrm>
+            <a:off x="4150000" y="1152475"/>
+            <a:ext cx="4750000" cy="3600000"/>
+          </a:xfrm>
+          <a:prstGeom prst="rect">
+            <a:avLst/>
+          </a:prstGeom>
+        </p:spPr>
+        <p:txBody>
+          <a:bodyPr anchorCtr="0" anchor="t" bIns="91425" lIns="91425" spcFirstLastPara="1" rIns="91425" wrap="square" tIns="91425">
+            <a:noAutofit/>
+          </a:bodyPr>
+          <a:lstStyle/>
+          <a:p>
+            <a:pPr indent="0" lvl="0" marL="0" rtl="0" algn="l">
+              <a:lnSpc>
+                <a:spcPct val="115000"/>
+              </a:lnSpc>
+              <a:spcBef>
+                <a:spcPts val="0"/>
+              </a:spcBef>
+              <a:spcAft>
+                <a:spcPts val="0"/>
+              </a:spcAft>
+              <a:buNone/>
+            </a:pPr>
+            <a:r>
+              <a:rPr lang="en" sz="1000">
+                <a:highlight>
+                  <a:schemeClr val="dk2"/>
+                </a:highlight>
+                <a:latin typeface="Consolas"/>
+                <a:ea typeface="Consolas"/>
+                <a:cs typeface="Consolas"/>
+                <a:sym typeface="Consolas"/>
+              </a:rPr>
+              <a:t>Entity Sunflower(World world) =&gt;</a:t>
+            </a:r>
+            <a:endParaRPr sz="1000">
+              <a:solidFill>
+                <a:srgbClr val="CCCCCC"/>
+              </a:solidFill>
+              <a:highlight>
+                <a:schemeClr val="dk2"/>
+              </a:highlight>
+              <a:latin typeface="Consolas"/>
+              <a:ea typeface="Consolas"/>
+              <a:cs typeface="Consolas"/>
+              <a:sym typeface="Consolas"/>
+            </a:endParaRPr>
+          </a:p>
+          <a:p>
+            <a:pPr indent="0" lvl="0" marL="0" rtl="0" algn="l">
+              <a:lnSpc>
+                <a:spcPct val="115000"/>
+              </a:lnSpc>
+              <a:spcBef>
+                <a:spcPts val="0"/>
+              </a:spcBef>
+              <a:spcAft>
+                <a:spcPts val="0"/>
+              </a:spcAft>
+              <a:buNone/>
+            </a:pPr>
+            <a:r>
+              <a:rPr lang="en" sz="1000">
+                <a:highlight>
+                  <a:schemeClr val="dk2"/>
+                </a:highlight>
+                <a:latin typeface="Consolas"/>
+                <a:ea typeface="Consolas"/>
+                <a:cs typeface="Consolas"/>
+                <a:sym typeface="Consolas"/>
+              </a:rPr>
+              <a:t>    Plant(world, "sunflower", 6)</a:t>
+            </a:r>
+            <a:endParaRPr sz="1000">
+              <a:solidFill>
+                <a:srgbClr val="CCCCCC"/>
+              </a:solidFill>
+              <a:highlight>
+                <a:schemeClr val="dk2"/>
+              </a:highlight>
+              <a:latin typeface="Consolas"/>
+              <a:ea typeface="Consolas"/>
+              <a:cs typeface="Consolas"/>
+              <a:sym typeface="Consolas"/>
+            </a:endParaRPr>
+          </a:p>
+          <a:p>
+            <a:pPr indent="0" lvl="0" marL="0" rtl="0" algn="l">
+              <a:lnSpc>
+                <a:spcPct val="115000"/>
+              </a:lnSpc>
+              <a:spcBef>
+                <a:spcPts val="0"/>
+              </a:spcBef>
+              <a:spcAft>
+                <a:spcPts val="0"/>
+              </a:spcAft>
+              <a:buNone/>
+            </a:pPr>
+            <a:r>
+              <a:rPr lang="en" sz="1000">
+                <a:highlight>
+                  <a:schemeClr val="dk2"/>
+                </a:highlight>
+                <a:latin typeface="Consolas"/>
+                <a:ea typeface="Consolas"/>
+                <a:cs typeface="Consolas"/>
+                <a:sym typeface="Consolas"/>
+              </a:rPr>
+              <a:t>        .With(new SunProducer(12, 25));</a:t>
+            </a:r>
+            <a:endParaRPr sz="1000">
+              <a:solidFill>
+                <a:srgbClr val="CCCCCC"/>
+              </a:solidFill>
+              <a:highlight>
+                <a:schemeClr val="dk2"/>
+              </a:highlight>
+              <a:latin typeface="Consolas"/>
+              <a:ea typeface="Consolas"/>
+              <a:cs typeface="Consolas"/>
+              <a:sym typeface="Consolas"/>
+            </a:endParaRPr>
+          </a:p>
+          <a:p>
+            <a:pPr indent="0" lvl="0" marL="0" rtl="0" algn="l">
+              <a:lnSpc>
+                <a:spcPct val="115000"/>
+              </a:lnSpc>
+              <a:spcBef>
+                <a:spcPts val="0"/>
+              </a:spcBef>
+              <a:spcAft>
+                <a:spcPts val="0"/>
+              </a:spcAft>
+              <a:buNone/>
+            </a:pPr>
+            <a:r>
+              <a:rPr lang="en" sz="1000">
+                <a:highlight>
+                  <a:schemeClr val="dk2"/>
+                </a:highlight>
+                <a:latin typeface="Consolas"/>
+                <a:ea typeface="Consolas"/>
+                <a:cs typeface="Consolas"/>
+                <a:sym typeface="Consolas"/>
+              </a:rPr>
+              <a:t>Entity Repeater(World world) =&gt;</a:t>
+            </a:r>
+            <a:endParaRPr sz="1000">
+              <a:solidFill>
+                <a:srgbClr val="CCCCCC"/>
+              </a:solidFill>
+              <a:highlight>
+                <a:schemeClr val="dk2"/>
+              </a:highlight>
+              <a:latin typeface="Consolas"/>
+              <a:ea typeface="Consolas"/>
+              <a:cs typeface="Consolas"/>
+              <a:sym typeface="Consolas"/>
+            </a:endParaRPr>
+          </a:p>
+          <a:p>
+            <a:pPr indent="0" lvl="0" marL="0" rtl="0" algn="l">
+              <a:lnSpc>
+                <a:spcPct val="115000"/>
+              </a:lnSpc>
+              <a:spcBef>
+                <a:spcPts val="0"/>
+              </a:spcBef>
+              <a:spcAft>
+                <a:spcPts val="0"/>
+              </a:spcAft>
+              <a:buNone/>
+            </a:pPr>
+            <a:r>
+              <a:rPr lang="en" sz="1000">
+                <a:highlight>
+                  <a:schemeClr val="dk2"/>
+                </a:highlight>
+                <a:latin typeface="Consolas"/>
+                <a:ea typeface="Consolas"/>
+                <a:cs typeface="Consolas"/>
+                <a:sym typeface="Consolas"/>
+              </a:rPr>
+              <a:t>    Plant(world, "repeater", 6)</a:t>
+            </a:r>
+            <a:endParaRPr sz="1000">
+              <a:solidFill>
+                <a:srgbClr val="CCCCCC"/>
+              </a:solidFill>
+              <a:highlight>
+                <a:schemeClr val="dk2"/>
+              </a:highlight>
+              <a:latin typeface="Consolas"/>
+              <a:ea typeface="Consolas"/>
+              <a:cs typeface="Consolas"/>
+              <a:sym typeface="Consolas"/>
+            </a:endParaRPr>
+          </a:p>
+          <a:p>
+            <a:pPr indent="0" lvl="0" marL="0" rtl="0" algn="l">
+              <a:lnSpc>
+                <a:spcPct val="115000"/>
+              </a:lnSpc>
+              <a:spcBef>
+                <a:spcPts val="0"/>
+              </a:spcBef>
+              <a:spcAft>
+                <a:spcPts val="0"/>
+              </a:spcAft>
+              <a:buNone/>
+            </a:pPr>
+            <a:r>
+              <a:rPr lang="en" sz="1000">
+                <a:highlight>
+                  <a:schemeClr val="dk2"/>
+                </a:highlight>
+                <a:latin typeface="Consolas"/>
+                <a:ea typeface="Consolas"/>
+                <a:cs typeface="Consolas"/>
+                <a:sym typeface="Consolas"/>
+              </a:rPr>
+              <a:t>        .With(new Shooter(1.4f, 2, 1));</a:t>
+            </a:r>
+            <a:endParaRPr sz="1000">
+              <a:solidFill>
+                <a:srgbClr val="CCCCCC"/>
+              </a:solidFill>
+              <a:highlight>
+                <a:schemeClr val="dk2"/>
+              </a:highlight>
+              <a:latin typeface="Consolas"/>
+              <a:ea typeface="Consolas"/>
+              <a:cs typeface="Consolas"/>
+              <a:sym typeface="Consolas"/>
+            </a:endParaRPr>
+          </a:p>
+          <a:p>
+            <a:pPr indent="0" lvl="0" marL="0" rtl="0" algn="l">
+              <a:lnSpc>
+                <a:spcPct val="115000"/>
+              </a:lnSpc>
+              <a:spcBef>
+                <a:spcPts val="0"/>
+              </a:spcBef>
+              <a:spcAft>
+                <a:spcPts val="0"/>
+              </a:spcAft>
+              <a:buNone/>
+            </a:pPr>
+            <a:r>
+              <a:rPr lang="en" sz="1000">
+                <a:highlight>
+                  <a:schemeClr val="dk2"/>
+                </a:highlight>
+                <a:latin typeface="Consolas"/>
+                <a:ea typeface="Consolas"/>
+                <a:cs typeface="Consolas"/>
+                <a:sym typeface="Consolas"/>
+              </a:rPr>
+              <a:t/>
+            </a:r>
+            <a:endParaRPr sz="1000">
+              <a:solidFill>
+                <a:srgbClr val="CCCCCC"/>
+              </a:solidFill>
+              <a:highlight>
+                <a:schemeClr val="dk2"/>
+              </a:highlight>
+              <a:latin typeface="Consolas"/>
+              <a:ea typeface="Consolas"/>
+              <a:cs typeface="Consolas"/>
+              <a:sym typeface="Consolas"/>
+            </a:endParaRPr>
+          </a:p>
+          <a:p>
+            <a:pPr indent="0" lvl="0" marL="0" rtl="0" algn="l">
+              <a:lnSpc>
+                <a:spcPct val="115000"/>
+              </a:lnSpc>
+              <a:spcBef>
+                <a:spcPts val="0"/>
+              </a:spcBef>
+              <a:spcAft>
+                <a:spcPts val="0"/>
+              </a:spcAft>
+              <a:buNone/>
+            </a:pPr>
+            <a:r>
+              <a:rPr lang="en" sz="1000">
+                <a:highlight>
+                  <a:schemeClr val="dk2"/>
+                </a:highlight>
+                <a:latin typeface="Consolas"/>
+                <a:ea typeface="Consolas"/>
+                <a:cs typeface="Consolas"/>
+                <a:sym typeface="Consolas"/>
+              </a:rPr>
+              <a:t>Entity Zombie(World world) =&gt;</a:t>
+            </a:r>
+            <a:endParaRPr sz="1000">
+              <a:solidFill>
+                <a:srgbClr val="CCCCCC"/>
+              </a:solidFill>
+              <a:highlight>
+                <a:schemeClr val="dk2"/>
+              </a:highlight>
+              <a:latin typeface="Consolas"/>
+              <a:ea typeface="Consolas"/>
+              <a:cs typeface="Consolas"/>
+              <a:sym typeface="Consolas"/>
+            </a:endParaRPr>
+          </a:p>
+          <a:p>
+            <a:pPr indent="0" lvl="0" marL="0" rtl="0" algn="l">
+              <a:lnSpc>
+                <a:spcPct val="115000"/>
+              </a:lnSpc>
+              <a:spcBef>
+                <a:spcPts val="0"/>
+              </a:spcBef>
+              <a:spcAft>
+                <a:spcPts val="0"/>
+              </a:spcAft>
+              <a:buNone/>
+            </a:pPr>
+            <a:r>
+              <a:rPr lang="en" sz="1000">
+                <a:highlight>
+                  <a:schemeClr val="dk2"/>
+                </a:highlight>
+                <a:latin typeface="Consolas"/>
+                <a:ea typeface="Consolas"/>
+                <a:cs typeface="Consolas"/>
+                <a:sym typeface="Consolas"/>
+              </a:rPr>
+              <a:t>    new Entity(world)</a:t>
+            </a:r>
+            <a:endParaRPr sz="1000">
+              <a:solidFill>
+                <a:srgbClr val="CCCCCC"/>
+              </a:solidFill>
+              <a:highlight>
+                <a:schemeClr val="dk2"/>
+              </a:highlight>
+              <a:latin typeface="Consolas"/>
+              <a:ea typeface="Consolas"/>
+              <a:cs typeface="Consolas"/>
+              <a:sym typeface="Consolas"/>
+            </a:endParaRPr>
+          </a:p>
+          <a:p>
+            <a:pPr indent="0" lvl="0" marL="0" rtl="0" algn="l">
+              <a:lnSpc>
+                <a:spcPct val="115000"/>
+              </a:lnSpc>
+              <a:spcBef>
+                <a:spcPts val="0"/>
+              </a:spcBef>
+              <a:spcAft>
+                <a:spcPts val="0"/>
+              </a:spcAft>
+              <a:buNone/>
+            </a:pPr>
+            <a:r>
+              <a:rPr lang="en" sz="1000">
+                <a:highlight>
+                  <a:schemeClr val="dk2"/>
+                </a:highlight>
+                <a:latin typeface="Consolas"/>
+                <a:ea typeface="Consolas"/>
+                <a:cs typeface="Consolas"/>
+                <a:sym typeface="Consolas"/>
+              </a:rPr>
+              <a:t>        .With(new SpriteRenderer(zombie))</a:t>
+            </a:r>
+            <a:endParaRPr sz="1000">
+              <a:solidFill>
+                <a:srgbClr val="CCCCCC"/>
+              </a:solidFill>
+              <a:highlight>
+                <a:schemeClr val="dk2"/>
+              </a:highlight>
+              <a:latin typeface="Consolas"/>
+              <a:ea typeface="Consolas"/>
+              <a:cs typeface="Consolas"/>
+              <a:sym typeface="Consolas"/>
+            </a:endParaRPr>
+          </a:p>
+          <a:p>
+            <a:pPr indent="0" lvl="0" marL="0" rtl="0" algn="l">
+              <a:lnSpc>
+                <a:spcPct val="115000"/>
+              </a:lnSpc>
+              <a:spcBef>
+                <a:spcPts val="0"/>
+              </a:spcBef>
+              <a:spcAft>
+                <a:spcPts val="0"/>
+              </a:spcAft>
+              <a:buNone/>
+            </a:pPr>
+            <a:r>
+              <a:rPr lang="en" sz="1000">
+                <a:highlight>
+                  <a:schemeClr val="dk2"/>
+                </a:highlight>
+                <a:latin typeface="Consolas"/>
+                <a:ea typeface="Consolas"/>
+                <a:cs typeface="Consolas"/>
+                <a:sym typeface="Consolas"/>
+              </a:rPr>
+              <a:t>        .With(new Health(10))</a:t>
+            </a:r>
+            <a:endParaRPr sz="1000">
+              <a:solidFill>
+                <a:srgbClr val="CCCCCC"/>
+              </a:solidFill>
+              <a:highlight>
+                <a:schemeClr val="dk2"/>
+              </a:highlight>
+              <a:latin typeface="Consolas"/>
+              <a:ea typeface="Consolas"/>
+              <a:cs typeface="Consolas"/>
+              <a:sym typeface="Consolas"/>
+            </a:endParaRPr>
+          </a:p>
+          <a:p>
+            <a:pPr indent="0" lvl="0" marL="0" rtl="0" algn="l">
+              <a:lnSpc>
+                <a:spcPct val="115000"/>
+              </a:lnSpc>
+              <a:spcBef>
+                <a:spcPts val="0"/>
+              </a:spcBef>
+              <a:spcAft>
+                <a:spcPts val="0"/>
+              </a:spcAft>
+              <a:buNone/>
+            </a:pPr>
+            <a:r>
+              <a:rPr lang="en" sz="1000">
+                <a:highlight>
+                  <a:schemeClr val="dk2"/>
+                </a:highlight>
+                <a:latin typeface="Consolas"/>
+                <a:ea typeface="Consolas"/>
+                <a:cs typeface="Consolas"/>
+                <a:sym typeface="Consolas"/>
+              </a:rPr>
+              <a:t>        .With(new Walker(16))</a:t>
+            </a:r>
+            <a:endParaRPr sz="1000">
+              <a:solidFill>
+                <a:srgbClr val="CCCCCC"/>
+              </a:solidFill>
+              <a:highlight>
+                <a:schemeClr val="dk2"/>
+              </a:highlight>
+              <a:latin typeface="Consolas"/>
+              <a:ea typeface="Consolas"/>
+              <a:cs typeface="Consolas"/>
+              <a:sym typeface="Consolas"/>
+            </a:endParaRPr>
+          </a:p>
+          <a:p>
+            <a:pPr indent="0" lvl="0" marL="0" rtl="0" algn="l">
+              <a:lnSpc>
+                <a:spcPct val="115000"/>
+              </a:lnSpc>
+              <a:spcBef>
+                <a:spcPts val="0"/>
+              </a:spcBef>
+              <a:spcAft>
+                <a:spcPts val="0"/>
+              </a:spcAft>
+              <a:buNone/>
+            </a:pPr>
+            <a:r>
+              <a:rPr lang="en" sz="1000">
+                <a:highlight>
+                  <a:schemeClr val="dk2"/>
+                </a:highlight>
+                <a:latin typeface="Consolas"/>
+                <a:ea typeface="Consolas"/>
+                <a:cs typeface="Consolas"/>
+                <a:sym typeface="Consolas"/>
+              </a:rPr>
+              <a:t>        .With(new Eater(1));</a:t>
+            </a:r>
+            <a:endParaRPr sz="1000">
+              <a:solidFill>
+                <a:srgbClr val="CCCCCC"/>
+              </a:solidFill>
+              <a:highlight>
+                <a:schemeClr val="dk2"/>
+              </a:highlight>
+              <a:latin typeface="Consolas"/>
+              <a:ea typeface="Consolas"/>
+              <a:cs typeface="Consolas"/>
+              <a:sym typeface="Consolas"/>
+            </a:endParaRPr>
+          </a:p>
+          <a:p>
+            <a:pPr indent="0" lvl="0" marL="0" rtl="0" algn="l">
+              <a:lnSpc>
+                <a:spcPct val="115000"/>
+              </a:lnSpc>
+              <a:spcBef>
+                <a:spcPts val="0"/>
+              </a:spcBef>
+              <a:spcAft>
+                <a:spcPts val="0"/>
+              </a:spcAft>
+              <a:buNone/>
+            </a:pPr>
+            <a:r>
+              <a:rPr lang="en" sz="1000">
+                <a:highlight>
+                  <a:schemeClr val="dk2"/>
+                </a:highlight>
+                <a:latin typeface="Consolas"/>
+                <a:ea typeface="Consolas"/>
+                <a:cs typeface="Consolas"/>
+                <a:sym typeface="Consolas"/>
+              </a:rPr>
+              <a:t>Entity Conehead(World world) =&gt;</a:t>
+            </a:r>
+            <a:endParaRPr sz="1000">
+              <a:solidFill>
+                <a:srgbClr val="CCCCCC"/>
+              </a:solidFill>
+              <a:highlight>
+                <a:schemeClr val="dk2"/>
+              </a:highlight>
+              <a:latin typeface="Consolas"/>
+              <a:ea typeface="Consolas"/>
+              <a:cs typeface="Consolas"/>
+              <a:sym typeface="Consolas"/>
+            </a:endParaRPr>
+          </a:p>
+          <a:p>
+            <a:pPr indent="0" lvl="0" marL="0" rtl="0" algn="l">
+              <a:lnSpc>
+                <a:spcPct val="115000"/>
+              </a:lnSpc>
+              <a:spcBef>
+                <a:spcPts val="0"/>
+              </a:spcBef>
+              <a:spcAft>
+                <a:spcPts val="0"/>
+              </a:spcAft>
+              <a:buNone/>
+            </a:pPr>
+            <a:r>
+              <a:rPr lang="en" sz="1000">
+                <a:highlight>
+                  <a:schemeClr val="dk2"/>
+                </a:highlight>
+                <a:latin typeface="Consolas"/>
+                <a:ea typeface="Consolas"/>
+                <a:cs typeface="Consolas"/>
+                <a:sym typeface="Consolas"/>
+              </a:rPr>
+              <a:t>    Zombie(world).With(new Armour(18, cone));</a:t>
+            </a:r>
+            <a:endParaRPr sz="1000">
+              <a:solidFill>
+                <a:srgbClr val="CCCCCC"/>
+              </a:solidFill>
+              <a:highlight>
+                <a:schemeClr val="dk2"/>
+              </a:highlight>
+              <a:latin typeface="Consolas"/>
+              <a:ea typeface="Consolas"/>
+              <a:cs typeface="Consolas"/>
+              <a:sym typeface="Consolas"/>
+            </a:endParaRPr>
+          </a:p>
+        </p:txBody>
+      </p:sp>
+    </p:spTree>
+  </p:cSld>
+  <p:clrMapOvr>
+    <a:masterClrMapping/>
+  </p:clrMapOvr>
+</p:sld>
+</file>
+
+<file path=ppt/slides/slide16.xml><?xml version="1.0" encoding="utf-8"?>
+<p:sld xmlns:a="http://schemas.openxmlformats.org/drawingml/2006/main" xmlns:p="http://schemas.openxmlformats.org/presentationml/2006/main" xmlns:r="http://schemas.openxmlformats.org/officeDocument/2006/relationships">
+  <p:cSld>
+    <p:spTree>
+      <p:nvGrpSpPr>
+        <p:cNvPr id="1" name=""/>
+        <p:cNvGrpSpPr/>
+        <p:nvPr/>
+      </p:nvGrpSpPr>
+      <p:grpSpPr/>
+      <p:sp>
+        <p:nvSpPr>
+          <p:cNvPr id="140" name="Google Shape;140;p23"/>
+          <p:cNvSpPr txBox="1"/>
+          <p:nvPr>
+            <p:ph type="title"/>
+          </p:nvPr>
+        </p:nvSpPr>
+        <p:spPr>
+          <a:xfrm>
+            <a:off x="311700" y="195615"/>
+            <a:ext cx="8520600" cy="572700"/>
+          </a:xfrm>
+          <a:prstGeom prst="rect">
+            <a:avLst/>
+          </a:prstGeom>
+        </p:spPr>
+        <p:txBody>
+          <a:bodyPr anchorCtr="0" anchor="t" bIns="91425" lIns="91425" spcFirstLastPara="1" rIns="91425" wrap="square" tIns="91425">
+            <a:normAutofit fontScale="90000"/>
+          </a:bodyPr>
+          <a:lstStyle/>
+          <a:p>
+            <a:pPr indent="0" lvl="0" marL="0" rtl="0" algn="l">
+              <a:spcBef>
+                <a:spcPts val="0"/>
+              </a:spcBef>
+              <a:spcAft>
+                <a:spcPts val="0"/>
+              </a:spcAft>
+              <a:buNone/>
+            </a:pPr>
+            <a:r>
+              <a:rPr lang="en"/>
+              <a:t>Components Working Together</a:t>
+            </a:r>
+            <a:endParaRPr/>
+          </a:p>
+        </p:txBody>
+      </p:sp>
+      <p:sp>
+        <p:nvSpPr>
+          <p:cNvPr id="293" name="Google Shape;293;p45"/>
+          <p:cNvSpPr txBox="1"/>
+          <p:nvPr>
+            <p:ph type="title"/>
+          </p:nvPr>
+        </p:nvSpPr>
+        <p:spPr>
+          <a:xfrm>
+            <a:off x="311700" y="1152475"/>
+            <a:ext cx="3700000" cy="3500000"/>
+          </a:xfrm>
+          <a:prstGeom prst="rect">
+            <a:avLst/>
+          </a:prstGeom>
+        </p:spPr>
+        <p:txBody>
+          <a:bodyPr anchorCtr="0" anchor="t" bIns="91425" lIns="91425" spcFirstLastPara="1" rIns="91425" wrap="square" tIns="91425">
+            <a:normAutofit fontScale="90000"/>
+          </a:bodyPr>
+          <a:lstStyle/>
+          <a:p>
+            <a:pPr indent="-330200" lvl="0" marL="457200" rtl="0" algn="l">
+              <a:buClr>
+                <a:srgbClr val="DEE2E6"/>
+              </a:buClr>
+              <a:spcBef>
+                <a:spcPts val="0"/>
+              </a:spcBef>
+              <a:spcAft>
+                <a:spcPts val="0"/>
+              </a:spcAft>
+              <a:buSzPts val="1600"/>
+              <a:buChar char="●"/>
+            </a:pPr>
+            <a:r>
+              <a:rPr lang="en" sz="1600">
+                <a:solidFill>
+                  <a:srgbClr val="DEE2E6"/>
+                </a:solidFill>
+              </a:rPr>
+              <a:t>Through the owner</a:t>
+            </a:r>
+            <a:endParaRPr/>
+          </a:p>
+          <a:p>
+            <a:pPr indent="-317500" lvl="1" marL="914400" rtl="0" algn="l">
+              <a:buClr>
+                <a:srgbClr val="6C757D"/>
+              </a:buClr>
+              <a:spcBef>
+                <a:spcPts val="0"/>
+              </a:spcBef>
+              <a:spcAft>
+                <a:spcPts val="0"/>
+              </a:spcAft>
+              <a:buSzPts val="1400"/>
+              <a:buChar char="○"/>
+            </a:pPr>
+            <a:r>
+              <a:rPr lang="en" sz="1400">
+                <a:solidFill>
+                  <a:srgbClr val="6C757D"/>
+                </a:solidFill>
+              </a:rPr>
+              <a:t>Walker stops while the Eater eats</a:t>
+            </a:r>
+            <a:endParaRPr/>
+          </a:p>
+          <a:p>
+            <a:pPr indent="-317500" lvl="1" marL="914400" rtl="0" algn="l">
+              <a:buClr>
+                <a:srgbClr val="6C757D"/>
+              </a:buClr>
+              <a:spcBef>
+                <a:spcPts val="0"/>
+              </a:spcBef>
+              <a:spcAft>
+                <a:spcPts val="0"/>
+              </a:spcAft>
+              <a:buSzPts val="1400"/>
+              <a:buChar char="○"/>
+            </a:pPr>
+            <a:r>
+              <a:rPr lang="en" sz="1400">
+                <a:solidFill>
+                  <a:srgbClr val="6C757D"/>
+                </a:solidFill>
+              </a:rPr>
+              <a:t>Health lets the Armour go first</a:t>
+            </a:r>
+            <a:endParaRPr/>
+          </a:p>
+          <a:p>
+            <a:pPr indent="-330200" lvl="0" marL="457200" rtl="0" algn="l">
+              <a:buClr>
+                <a:srgbClr val="DEE2E6"/>
+              </a:buClr>
+              <a:spcBef>
+                <a:spcPts val="0"/>
+              </a:spcBef>
+              <a:spcAft>
+                <a:spcPts val="0"/>
+              </a:spcAft>
+              <a:buSzPts val="1600"/>
+              <a:buChar char="●"/>
+            </a:pPr>
+            <a:r>
+              <a:rPr lang="en" sz="1600">
+                <a:solidFill>
+                  <a:srgbClr val="DEE2E6"/>
+                </a:solidFill>
+              </a:rPr>
+              <a:t>Through the world</a:t>
+            </a:r>
+            <a:endParaRPr/>
+          </a:p>
+          <a:p>
+            <a:pPr indent="-317500" lvl="1" marL="914400" rtl="0" algn="l">
+              <a:buClr>
+                <a:srgbClr val="6C757D"/>
+              </a:buClr>
+              <a:spcBef>
+                <a:spcPts val="0"/>
+              </a:spcBef>
+              <a:spcAft>
+                <a:spcPts val="0"/>
+              </a:spcAft>
+              <a:buSzPts val="1400"/>
+              <a:buChar char="○"/>
+            </a:pPr>
+            <a:r>
+              <a:rPr lang="en" sz="1400">
+                <a:solidFill>
+                  <a:srgbClr val="6C757D"/>
+                </a:solidFill>
+              </a:rPr>
+              <a:t>Shooter: a zombie ahead in my row?</a:t>
+            </a:r>
+            <a:endParaRPr/>
+          </a:p>
+          <a:p>
+            <a:pPr indent="-330200" lvl="0" marL="457200" rtl="0" algn="l">
+              <a:buClr>
+                <a:srgbClr val="DEE2E6"/>
+              </a:buClr>
+              <a:spcBef>
+                <a:spcPts val="0"/>
+              </a:spcBef>
+              <a:spcAft>
+                <a:spcPts val="0"/>
+              </a:spcAft>
+              <a:buSzPts val="1600"/>
+              <a:buChar char="●"/>
+            </a:pPr>
+            <a:r>
+              <a:rPr lang="en" sz="1600">
+                <a:solidFill>
+                  <a:srgbClr val="DEE2E6"/>
+                </a:solidFill>
+              </a:rPr>
+              <a:t>Depend on components, not on kinds of entity</a:t>
+            </a:r>
+            <a:endParaRPr/>
+          </a:p>
+          <a:p>
+            <a:pPr indent="-330200" lvl="0" marL="457200" rtl="0" algn="l">
+              <a:buClr>
+                <a:srgbClr val="DEE2E6"/>
+              </a:buClr>
+              <a:spcBef>
+                <a:spcPts val="0"/>
+              </a:spcBef>
+              <a:spcAft>
+                <a:spcPts val="0"/>
+              </a:spcAft>
+              <a:buSzPts val="1600"/>
+              <a:buChar char="●"/>
+            </a:pPr>
+            <a:r>
+              <a:rPr lang="en" sz="1600">
+                <a:solidFill>
+                  <a:srgbClr val="DEE2E6"/>
+                </a:solidFill>
+              </a:rPr>
+              <a:t>The world: one loop for everything</a:t>
+            </a:r>
+            <a:endParaRPr/>
+          </a:p>
+        </p:txBody>
+      </p:sp>
+      <p:sp>
+        <p:nvSpPr>
+          <p:cNvPr id="141" name="Google Shape;141;p23"/>
+          <p:cNvSpPr txBox="1"/>
+          <p:nvPr>
+            <p:ph idx="2" type="body"/>
+          </p:nvPr>
+        </p:nvSpPr>
+        <p:spPr>
+          <a:xfrm>
+            <a:off x="4150000" y="1152475"/>
+            <a:ext cx="4750000" cy="3600000"/>
+          </a:xfrm>
+          <a:prstGeom prst="rect">
+            <a:avLst/>
+          </a:prstGeom>
+        </p:spPr>
+        <p:txBody>
+          <a:bodyPr anchorCtr="0" anchor="t" bIns="91425" lIns="91425" spcFirstLastPara="1" rIns="91425" wrap="square" tIns="91425">
+            <a:noAutofit/>
+          </a:bodyPr>
+          <a:lstStyle/>
+          <a:p>
+            <a:pPr indent="0" lvl="0" marL="0" rtl="0" algn="l">
+              <a:lnSpc>
+                <a:spcPct val="115000"/>
+              </a:lnSpc>
+              <a:spcBef>
+                <a:spcPts val="0"/>
+              </a:spcBef>
+              <a:spcAft>
+                <a:spcPts val="0"/>
+              </a:spcAft>
+              <a:buNone/>
+            </a:pPr>
+            <a:r>
+              <a:rPr lang="en" sz="1000">
+                <a:highlight>
+                  <a:schemeClr val="dk2"/>
+                </a:highlight>
+                <a:latin typeface="Consolas"/>
+                <a:ea typeface="Consolas"/>
+                <a:cs typeface="Consolas"/>
+                <a:sym typeface="Consolas"/>
+              </a:rPr>
+              <a:t>// Walker.cs</a:t>
+            </a:r>
+            <a:endParaRPr sz="1000">
+              <a:solidFill>
+                <a:srgbClr val="CCCCCC"/>
+              </a:solidFill>
+              <a:highlight>
+                <a:schemeClr val="dk2"/>
+              </a:highlight>
+              <a:latin typeface="Consolas"/>
+              <a:ea typeface="Consolas"/>
+              <a:cs typeface="Consolas"/>
+              <a:sym typeface="Consolas"/>
+            </a:endParaRPr>
+          </a:p>
+          <a:p>
+            <a:pPr indent="0" lvl="0" marL="0" rtl="0" algn="l">
+              <a:lnSpc>
+                <a:spcPct val="115000"/>
+              </a:lnSpc>
+              <a:spcBef>
+                <a:spcPts val="0"/>
+              </a:spcBef>
+              <a:spcAft>
+                <a:spcPts val="0"/>
+              </a:spcAft>
+              <a:buNone/>
+            </a:pPr>
+            <a:r>
+              <a:rPr lang="en" sz="1000">
+                <a:highlight>
+                  <a:schemeClr val="dk2"/>
+                </a:highlight>
+                <a:latin typeface="Consolas"/>
+                <a:ea typeface="Consolas"/>
+                <a:cs typeface="Consolas"/>
+                <a:sym typeface="Consolas"/>
+              </a:rPr>
+              <a:t>public override void Update(float dt)</a:t>
+            </a:r>
+            <a:endParaRPr sz="1000">
+              <a:solidFill>
+                <a:srgbClr val="CCCCCC"/>
+              </a:solidFill>
+              <a:highlight>
+                <a:schemeClr val="dk2"/>
+              </a:highlight>
+              <a:latin typeface="Consolas"/>
+              <a:ea typeface="Consolas"/>
+              <a:cs typeface="Consolas"/>
+              <a:sym typeface="Consolas"/>
+            </a:endParaRPr>
+          </a:p>
+          <a:p>
+            <a:pPr indent="0" lvl="0" marL="0" rtl="0" algn="l">
+              <a:lnSpc>
+                <a:spcPct val="115000"/>
+              </a:lnSpc>
+              <a:spcBef>
+                <a:spcPts val="0"/>
+              </a:spcBef>
+              <a:spcAft>
+                <a:spcPts val="0"/>
+              </a:spcAft>
+              <a:buNone/>
+            </a:pPr>
+            <a:r>
+              <a:rPr lang="en" sz="1000">
+                <a:highlight>
+                  <a:schemeClr val="dk2"/>
+                </a:highlight>
+                <a:latin typeface="Consolas"/>
+                <a:ea typeface="Consolas"/>
+                <a:cs typeface="Consolas"/>
+                <a:sym typeface="Consolas"/>
+              </a:rPr>
+              <a:t>{</a:t>
+            </a:r>
+            <a:endParaRPr sz="1000">
+              <a:solidFill>
+                <a:srgbClr val="CCCCCC"/>
+              </a:solidFill>
+              <a:highlight>
+                <a:schemeClr val="dk2"/>
+              </a:highlight>
+              <a:latin typeface="Consolas"/>
+              <a:ea typeface="Consolas"/>
+              <a:cs typeface="Consolas"/>
+              <a:sym typeface="Consolas"/>
+            </a:endParaRPr>
+          </a:p>
+          <a:p>
+            <a:pPr indent="0" lvl="0" marL="0" rtl="0" algn="l">
+              <a:lnSpc>
+                <a:spcPct val="115000"/>
+              </a:lnSpc>
+              <a:spcBef>
+                <a:spcPts val="0"/>
+              </a:spcBef>
+              <a:spcAft>
+                <a:spcPts val="0"/>
+              </a:spcAft>
+              <a:buNone/>
+            </a:pPr>
+            <a:r>
+              <a:rPr lang="en" sz="1000">
+                <a:highlight>
+                  <a:schemeClr val="dk2"/>
+                </a:highlight>
+                <a:latin typeface="Consolas"/>
+                <a:ea typeface="Consolas"/>
+                <a:cs typeface="Consolas"/>
+                <a:sym typeface="Consolas"/>
+              </a:rPr>
+              <a:t>    if (Owner.Get&lt;Eater&gt;()?.IsEating == true)</a:t>
+            </a:r>
+            <a:endParaRPr sz="1000">
+              <a:solidFill>
+                <a:srgbClr val="CCCCCC"/>
+              </a:solidFill>
+              <a:highlight>
+                <a:schemeClr val="dk2"/>
+              </a:highlight>
+              <a:latin typeface="Consolas"/>
+              <a:ea typeface="Consolas"/>
+              <a:cs typeface="Consolas"/>
+              <a:sym typeface="Consolas"/>
+            </a:endParaRPr>
+          </a:p>
+          <a:p>
+            <a:pPr indent="0" lvl="0" marL="0" rtl="0" algn="l">
+              <a:lnSpc>
+                <a:spcPct val="115000"/>
+              </a:lnSpc>
+              <a:spcBef>
+                <a:spcPts val="0"/>
+              </a:spcBef>
+              <a:spcAft>
+                <a:spcPts val="0"/>
+              </a:spcAft>
+              <a:buNone/>
+            </a:pPr>
+            <a:r>
+              <a:rPr lang="en" sz="1000">
+                <a:highlight>
+                  <a:schemeClr val="dk2"/>
+                </a:highlight>
+                <a:latin typeface="Consolas"/>
+                <a:ea typeface="Consolas"/>
+                <a:cs typeface="Consolas"/>
+                <a:sym typeface="Consolas"/>
+              </a:rPr>
+              <a:t>        return;</a:t>
+            </a:r>
+            <a:endParaRPr sz="1000">
+              <a:solidFill>
+                <a:srgbClr val="CCCCCC"/>
+              </a:solidFill>
+              <a:highlight>
+                <a:schemeClr val="dk2"/>
+              </a:highlight>
+              <a:latin typeface="Consolas"/>
+              <a:ea typeface="Consolas"/>
+              <a:cs typeface="Consolas"/>
+              <a:sym typeface="Consolas"/>
+            </a:endParaRPr>
+          </a:p>
+          <a:p>
+            <a:pPr indent="0" lvl="0" marL="0" rtl="0" algn="l">
+              <a:lnSpc>
+                <a:spcPct val="115000"/>
+              </a:lnSpc>
+              <a:spcBef>
+                <a:spcPts val="0"/>
+              </a:spcBef>
+              <a:spcAft>
+                <a:spcPts val="0"/>
+              </a:spcAft>
+              <a:buNone/>
+            </a:pPr>
+            <a:r>
+              <a:rPr lang="en" sz="1000">
+                <a:highlight>
+                  <a:schemeClr val="dk2"/>
+                </a:highlight>
+                <a:latin typeface="Consolas"/>
+                <a:ea typeface="Consolas"/>
+                <a:cs typeface="Consolas"/>
+                <a:sym typeface="Consolas"/>
+              </a:rPr>
+              <a:t>    Owner.Position -=</a:t>
+            </a:r>
+            <a:endParaRPr sz="1000">
+              <a:solidFill>
+                <a:srgbClr val="CCCCCC"/>
+              </a:solidFill>
+              <a:highlight>
+                <a:schemeClr val="dk2"/>
+              </a:highlight>
+              <a:latin typeface="Consolas"/>
+              <a:ea typeface="Consolas"/>
+              <a:cs typeface="Consolas"/>
+              <a:sym typeface="Consolas"/>
+            </a:endParaRPr>
+          </a:p>
+          <a:p>
+            <a:pPr indent="0" lvl="0" marL="0" rtl="0" algn="l">
+              <a:lnSpc>
+                <a:spcPct val="115000"/>
+              </a:lnSpc>
+              <a:spcBef>
+                <a:spcPts val="0"/>
+              </a:spcBef>
+              <a:spcAft>
+                <a:spcPts val="0"/>
+              </a:spcAft>
+              <a:buNone/>
+            </a:pPr>
+            <a:r>
+              <a:rPr lang="en" sz="1000">
+                <a:highlight>
+                  <a:schemeClr val="dk2"/>
+                </a:highlight>
+                <a:latin typeface="Consolas"/>
+                <a:ea typeface="Consolas"/>
+                <a:cs typeface="Consolas"/>
+                <a:sym typeface="Consolas"/>
+              </a:rPr>
+              <a:t>        new Vector2(speed * dt, 0);</a:t>
+            </a:r>
+            <a:endParaRPr sz="1000">
+              <a:solidFill>
+                <a:srgbClr val="CCCCCC"/>
+              </a:solidFill>
+              <a:highlight>
+                <a:schemeClr val="dk2"/>
+              </a:highlight>
+              <a:latin typeface="Consolas"/>
+              <a:ea typeface="Consolas"/>
+              <a:cs typeface="Consolas"/>
+              <a:sym typeface="Consolas"/>
+            </a:endParaRPr>
+          </a:p>
+          <a:p>
+            <a:pPr indent="0" lvl="0" marL="0" rtl="0" algn="l">
+              <a:lnSpc>
+                <a:spcPct val="115000"/>
+              </a:lnSpc>
+              <a:spcBef>
+                <a:spcPts val="0"/>
+              </a:spcBef>
+              <a:spcAft>
+                <a:spcPts val="0"/>
+              </a:spcAft>
+              <a:buNone/>
+            </a:pPr>
+            <a:r>
+              <a:rPr lang="en" sz="1000">
+                <a:highlight>
+                  <a:schemeClr val="dk2"/>
+                </a:highlight>
+                <a:latin typeface="Consolas"/>
+                <a:ea typeface="Consolas"/>
+                <a:cs typeface="Consolas"/>
+                <a:sym typeface="Consolas"/>
+              </a:rPr>
+              <a:t>}</a:t>
+            </a:r>
+            <a:endParaRPr sz="1000">
+              <a:solidFill>
+                <a:srgbClr val="CCCCCC"/>
+              </a:solidFill>
+              <a:highlight>
+                <a:schemeClr val="dk2"/>
+              </a:highlight>
+              <a:latin typeface="Consolas"/>
+              <a:ea typeface="Consolas"/>
+              <a:cs typeface="Consolas"/>
+              <a:sym typeface="Consolas"/>
+            </a:endParaRPr>
+          </a:p>
+          <a:p>
+            <a:pPr indent="0" lvl="0" marL="0" rtl="0" algn="l">
+              <a:lnSpc>
+                <a:spcPct val="115000"/>
+              </a:lnSpc>
+              <a:spcBef>
+                <a:spcPts val="0"/>
+              </a:spcBef>
+              <a:spcAft>
+                <a:spcPts val="0"/>
+              </a:spcAft>
+              <a:buNone/>
+            </a:pPr>
+            <a:r>
+              <a:rPr lang="en" sz="1000">
+                <a:highlight>
+                  <a:schemeClr val="dk2"/>
+                </a:highlight>
+                <a:latin typeface="Consolas"/>
+                <a:ea typeface="Consolas"/>
+                <a:cs typeface="Consolas"/>
+                <a:sym typeface="Consolas"/>
+              </a:rPr>
+              <a:t/>
+            </a:r>
+            <a:endParaRPr sz="1000">
+              <a:solidFill>
+                <a:srgbClr val="CCCCCC"/>
+              </a:solidFill>
+              <a:highlight>
+                <a:schemeClr val="dk2"/>
+              </a:highlight>
+              <a:latin typeface="Consolas"/>
+              <a:ea typeface="Consolas"/>
+              <a:cs typeface="Consolas"/>
+              <a:sym typeface="Consolas"/>
+            </a:endParaRPr>
+          </a:p>
+          <a:p>
+            <a:pPr indent="0" lvl="0" marL="0" rtl="0" algn="l">
+              <a:lnSpc>
+                <a:spcPct val="115000"/>
+              </a:lnSpc>
+              <a:spcBef>
+                <a:spcPts val="0"/>
+              </a:spcBef>
+              <a:spcAft>
+                <a:spcPts val="0"/>
+              </a:spcAft>
+              <a:buNone/>
+            </a:pPr>
+            <a:r>
+              <a:rPr lang="en" sz="1000">
+                <a:highlight>
+                  <a:schemeClr val="dk2"/>
+                </a:highlight>
+                <a:latin typeface="Consolas"/>
+                <a:ea typeface="Consolas"/>
+                <a:cs typeface="Consolas"/>
+                <a:sym typeface="Consolas"/>
+              </a:rPr>
+              <a:t>// Shooter.cs</a:t>
+            </a:r>
+            <a:endParaRPr sz="1000">
+              <a:solidFill>
+                <a:srgbClr val="CCCCCC"/>
+              </a:solidFill>
+              <a:highlight>
+                <a:schemeClr val="dk2"/>
+              </a:highlight>
+              <a:latin typeface="Consolas"/>
+              <a:ea typeface="Consolas"/>
+              <a:cs typeface="Consolas"/>
+              <a:sym typeface="Consolas"/>
+            </a:endParaRPr>
+          </a:p>
+          <a:p>
+            <a:pPr indent="0" lvl="0" marL="0" rtl="0" algn="l">
+              <a:lnSpc>
+                <a:spcPct val="115000"/>
+              </a:lnSpc>
+              <a:spcBef>
+                <a:spcPts val="0"/>
+              </a:spcBef>
+              <a:spcAft>
+                <a:spcPts val="0"/>
+              </a:spcAft>
+              <a:buNone/>
+            </a:pPr>
+            <a:r>
+              <a:rPr lang="en" sz="1000">
+                <a:highlight>
+                  <a:schemeClr val="dk2"/>
+                </a:highlight>
+                <a:latin typeface="Consolas"/>
+                <a:ea typeface="Consolas"/>
+                <a:cs typeface="Consolas"/>
+                <a:sym typeface="Consolas"/>
+              </a:rPr>
+              <a:t>if (_cooldown &lt;= 0 &amp;&amp;</a:t>
+            </a:r>
+            <a:endParaRPr sz="1000">
+              <a:solidFill>
+                <a:srgbClr val="CCCCCC"/>
+              </a:solidFill>
+              <a:highlight>
+                <a:schemeClr val="dk2"/>
+              </a:highlight>
+              <a:latin typeface="Consolas"/>
+              <a:ea typeface="Consolas"/>
+              <a:cs typeface="Consolas"/>
+              <a:sym typeface="Consolas"/>
+            </a:endParaRPr>
+          </a:p>
+          <a:p>
+            <a:pPr indent="0" lvl="0" marL="0" rtl="0" algn="l">
+              <a:lnSpc>
+                <a:spcPct val="115000"/>
+              </a:lnSpc>
+              <a:spcBef>
+                <a:spcPts val="0"/>
+              </a:spcBef>
+              <a:spcAft>
+                <a:spcPts val="0"/>
+              </a:spcAft>
+              <a:buNone/>
+            </a:pPr>
+            <a:r>
+              <a:rPr lang="en" sz="1000">
+                <a:highlight>
+                  <a:schemeClr val="dk2"/>
+                </a:highlight>
+                <a:latin typeface="Consolas"/>
+                <a:ea typeface="Consolas"/>
+                <a:cs typeface="Consolas"/>
+                <a:sym typeface="Consolas"/>
+              </a:rPr>
+              <a:t>    World.FirstZombieAhead(Owner.Row,</a:t>
+            </a:r>
+            <a:endParaRPr sz="1000">
+              <a:solidFill>
+                <a:srgbClr val="CCCCCC"/>
+              </a:solidFill>
+              <a:highlight>
+                <a:schemeClr val="dk2"/>
+              </a:highlight>
+              <a:latin typeface="Consolas"/>
+              <a:ea typeface="Consolas"/>
+              <a:cs typeface="Consolas"/>
+              <a:sym typeface="Consolas"/>
+            </a:endParaRPr>
+          </a:p>
+          <a:p>
+            <a:pPr indent="0" lvl="0" marL="0" rtl="0" algn="l">
+              <a:lnSpc>
+                <a:spcPct val="115000"/>
+              </a:lnSpc>
+              <a:spcBef>
+                <a:spcPts val="0"/>
+              </a:spcBef>
+              <a:spcAft>
+                <a:spcPts val="0"/>
+              </a:spcAft>
+              <a:buNone/>
+            </a:pPr>
+            <a:r>
+              <a:rPr lang="en" sz="1000">
+                <a:highlight>
+                  <a:schemeClr val="dk2"/>
+                </a:highlight>
+                <a:latin typeface="Consolas"/>
+                <a:ea typeface="Consolas"/>
+                <a:cs typeface="Consolas"/>
+                <a:sym typeface="Consolas"/>
+              </a:rPr>
+              <a:t>        Owner.Position.X) != null)</a:t>
+            </a:r>
+            <a:endParaRPr sz="1000">
+              <a:solidFill>
+                <a:srgbClr val="CCCCCC"/>
+              </a:solidFill>
+              <a:highlight>
+                <a:schemeClr val="dk2"/>
+              </a:highlight>
+              <a:latin typeface="Consolas"/>
+              <a:ea typeface="Consolas"/>
+              <a:cs typeface="Consolas"/>
+              <a:sym typeface="Consolas"/>
+            </a:endParaRPr>
+          </a:p>
+          <a:p>
+            <a:pPr indent="0" lvl="0" marL="0" rtl="0" algn="l">
+              <a:lnSpc>
+                <a:spcPct val="115000"/>
+              </a:lnSpc>
+              <a:spcBef>
+                <a:spcPts val="0"/>
+              </a:spcBef>
+              <a:spcAft>
+                <a:spcPts val="0"/>
+              </a:spcAft>
+              <a:buNone/>
+            </a:pPr>
+            <a:r>
+              <a:rPr lang="en" sz="1000">
+                <a:highlight>
+                  <a:schemeClr val="dk2"/>
+                </a:highlight>
+                <a:latin typeface="Consolas"/>
+                <a:ea typeface="Consolas"/>
+                <a:cs typeface="Consolas"/>
+                <a:sym typeface="Consolas"/>
+              </a:rPr>
+              <a:t>    Fire();</a:t>
+            </a:r>
+            <a:endParaRPr sz="1000">
+              <a:solidFill>
+                <a:srgbClr val="CCCCCC"/>
+              </a:solidFill>
+              <a:highlight>
+                <a:schemeClr val="dk2"/>
+              </a:highlight>
+              <a:latin typeface="Consolas"/>
+              <a:ea typeface="Consolas"/>
+              <a:cs typeface="Consolas"/>
+              <a:sym typeface="Consolas"/>
+            </a:endParaRPr>
+          </a:p>
+        </p:txBody>
+      </p:sp>
+    </p:spTree>
+  </p:cSld>
+  <p:clrMapOvr>
+    <a:masterClrMapping/>
+  </p:clrMapOvr>
+</p:sld>
+</file>
+
+<file path=ppt/slides/slide17.xml><?xml version="1.0" encoding="utf-8"?>
 <p:sld xmlns:a="http://schemas.openxmlformats.org/drawingml/2006/main" xmlns:p="http://schemas.openxmlformats.org/presentationml/2006/main" xmlns:r="http://schemas.openxmlformats.org/officeDocument/2006/relationships">
   <p:cSld>
     <p:spTree>
@@ -9689,7 +10674,7 @@
 </p:sld>
 </file>
 
-<file path=ppt/slides/slide16.xml><?xml version="1.0" encoding="utf-8"?>
+<file path=ppt/slides/slide18.xml><?xml version="1.0" encoding="utf-8"?>
 <p:sld xmlns:a="http://schemas.openxmlformats.org/drawingml/2006/main" xmlns:p="http://schemas.openxmlformats.org/presentationml/2006/main" xmlns:r="http://schemas.openxmlformats.org/officeDocument/2006/relationships">
   <p:cSld>
     <p:spTree>
@@ -9816,1560 +10801,6 @@
 </p:sld>
 </file>
 
-<file path=ppt/slides/slide17.xml><?xml version="1.0" encoding="utf-8"?>
-<p:sld xmlns:a="http://schemas.openxmlformats.org/drawingml/2006/main" xmlns:p="http://schemas.openxmlformats.org/presentationml/2006/main" xmlns:r="http://schemas.openxmlformats.org/officeDocument/2006/relationships">
-  <p:cSld>
-    <p:spTree>
-      <p:nvGrpSpPr>
-        <p:cNvPr id="1" name=""/>
-        <p:cNvGrpSpPr/>
-        <p:nvPr/>
-      </p:nvGrpSpPr>
-      <p:grpSpPr/>
-      <p:sp>
-        <p:nvSpPr>
-          <p:cNvPr id="140" name="Google Shape;140;p23"/>
-          <p:cNvSpPr txBox="1"/>
-          <p:nvPr>
-            <p:ph type="title"/>
-          </p:nvPr>
-        </p:nvSpPr>
-        <p:spPr>
-          <a:xfrm>
-            <a:off x="311700" y="195615"/>
-            <a:ext cx="8520600" cy="572700"/>
-          </a:xfrm>
-          <a:prstGeom prst="rect">
-            <a:avLst/>
-          </a:prstGeom>
-        </p:spPr>
-        <p:txBody>
-          <a:bodyPr anchorCtr="0" anchor="t" bIns="91425" lIns="91425" spcFirstLastPara="1" rIns="91425" wrap="square" tIns="91425">
-            <a:normAutofit fontScale="90000"/>
-          </a:bodyPr>
-          <a:lstStyle/>
-          <a:p>
-            <a:pPr indent="0" lvl="0" marL="0" rtl="0" algn="l">
-              <a:spcBef>
-                <a:spcPts val="0"/>
-              </a:spcBef>
-              <a:spcAft>
-                <a:spcPts val="0"/>
-              </a:spcAft>
-              <a:buNone/>
-            </a:pPr>
-            <a:r>
-              <a:rPr lang="en"/>
-              <a:t>Type Object</a:t>
-            </a:r>
-            <a:endParaRPr/>
-          </a:p>
-        </p:txBody>
-      </p:sp>
-      <p:sp>
-        <p:nvSpPr>
-          <p:cNvPr id="293" name="Google Shape;293;p45"/>
-          <p:cNvSpPr txBox="1"/>
-          <p:nvPr>
-            <p:ph type="title"/>
-          </p:nvPr>
-        </p:nvSpPr>
-        <p:spPr>
-          <a:xfrm>
-            <a:off x="311700" y="1152475"/>
-            <a:ext cx="3700000" cy="3500000"/>
-          </a:xfrm>
-          <a:prstGeom prst="rect">
-            <a:avLst/>
-          </a:prstGeom>
-        </p:spPr>
-        <p:txBody>
-          <a:bodyPr anchorCtr="0" anchor="t" bIns="91425" lIns="91425" spcFirstLastPara="1" rIns="91425" wrap="square" tIns="91425">
-            <a:normAutofit fontScale="90000"/>
-          </a:bodyPr>
-          <a:lstStyle/>
-          <a:p>
-            <a:pPr indent="-330200" lvl="0" marL="457200" rtl="0" algn="l">
-              <a:buClr>
-                <a:srgbClr val="DEE2E6"/>
-              </a:buClr>
-              <a:spcBef>
-                <a:spcPts val="0"/>
-              </a:spcBef>
-              <a:spcAft>
-                <a:spcPts val="0"/>
-              </a:spcAft>
-              <a:buSzPts val="1600"/>
-              <a:buChar char="●"/>
-            </a:pPr>
-            <a:r>
-              <a:rPr lang="en" sz="1600">
-                <a:solidFill>
-                  <a:srgbClr val="DEE2E6"/>
-                </a:solidFill>
-              </a:rPr>
-              <a:t>A peashooter’s cost: not in any one peashooter</a:t>
-            </a:r>
-            <a:endParaRPr/>
-          </a:p>
-          <a:p>
-            <a:pPr indent="-330200" lvl="0" marL="457200" rtl="0" algn="l">
-              <a:buClr>
-                <a:srgbClr val="DEE2E6"/>
-              </a:buClr>
-              <a:spcBef>
-                <a:spcPts val="0"/>
-              </a:spcBef>
-              <a:spcAft>
-                <a:spcPts val="0"/>
-              </a:spcAft>
-              <a:buSzPts val="1600"/>
-              <a:buChar char="●"/>
-            </a:pPr>
-            <a:r>
-              <a:rPr lang="en" sz="1600">
-                <a:solidFill>
-                  <a:srgbClr val="DEE2E6"/>
-                </a:solidFill>
-              </a:rPr>
-              <a:t>One PlantType per kind of plant</a:t>
-            </a:r>
-            <a:endParaRPr/>
-          </a:p>
-          <a:p>
-            <a:pPr indent="-317500" lvl="1" marL="914400" rtl="0" algn="l">
-              <a:buClr>
-                <a:srgbClr val="6C757D"/>
-              </a:buClr>
-              <a:spcBef>
-                <a:spcPts val="0"/>
-              </a:spcBef>
-              <a:spcAft>
-                <a:spcPts val="0"/>
-              </a:spcAft>
-              <a:buSzPts val="1400"/>
-              <a:buChar char="○"/>
-            </a:pPr>
-            <a:r>
-              <a:rPr lang="en" sz="1400">
-                <a:solidFill>
-                  <a:srgbClr val="6C757D"/>
-                </a:solidFill>
-              </a:rPr>
-              <a:t>Loaded from plants.json</a:t>
-            </a:r>
-            <a:endParaRPr/>
-          </a:p>
-          <a:p>
-            <a:pPr indent="-330200" lvl="0" marL="457200" rtl="0" algn="l">
-              <a:buClr>
-                <a:srgbClr val="DEE2E6"/>
-              </a:buClr>
-              <a:spcBef>
-                <a:spcPts val="0"/>
-              </a:spcBef>
-              <a:spcAft>
-                <a:spcPts val="0"/>
-              </a:spcAft>
-              <a:buSzPts val="1600"/>
-              <a:buChar char="●"/>
-            </a:pPr>
-            <a:r>
-              <a:rPr lang="en" sz="1600">
-                <a:solidFill>
-                  <a:srgbClr val="DEE2E6"/>
-                </a:solidFill>
-              </a:rPr>
-              <a:t>Types hold what all instances share</a:t>
-            </a:r>
-            <a:endParaRPr/>
-          </a:p>
-          <a:p>
-            <a:pPr indent="-330200" lvl="0" marL="457200" rtl="0" algn="l">
-              <a:buClr>
-                <a:srgbClr val="DEE2E6"/>
-              </a:buClr>
-              <a:spcBef>
-                <a:spcPts val="0"/>
-              </a:spcBef>
-              <a:spcAft>
-                <a:spcPts val="0"/>
-              </a:spcAft>
-              <a:buSzPts val="1600"/>
-              <a:buChar char="●"/>
-            </a:pPr>
-            <a:r>
-              <a:rPr lang="en" sz="1600">
-                <a:solidFill>
-                  <a:srgbClr val="DEE2E6"/>
-                </a:solidFill>
-              </a:rPr>
-              <a:t>Instances hold their own state</a:t>
-            </a:r>
-            <a:endParaRPr/>
-          </a:p>
-        </p:txBody>
-      </p:sp>
-      <p:sp>
-        <p:nvSpPr>
-          <p:cNvPr id="141" name="Google Shape;141;p23"/>
-          <p:cNvSpPr txBox="1"/>
-          <p:nvPr>
-            <p:ph idx="2" type="body"/>
-          </p:nvPr>
-        </p:nvSpPr>
-        <p:spPr>
-          <a:xfrm>
-            <a:off x="4150000" y="1152475"/>
-            <a:ext cx="4750000" cy="3600000"/>
-          </a:xfrm>
-          <a:prstGeom prst="rect">
-            <a:avLst/>
-          </a:prstGeom>
-        </p:spPr>
-        <p:txBody>
-          <a:bodyPr anchorCtr="0" anchor="t" bIns="91425" lIns="91425" spcFirstLastPara="1" rIns="91425" wrap="square" tIns="91425">
-            <a:noAutofit/>
-          </a:bodyPr>
-          <a:lstStyle/>
-          <a:p>
-            <a:pPr indent="0" lvl="0" marL="0" rtl="0" algn="l">
-              <a:lnSpc>
-                <a:spcPct val="115000"/>
-              </a:lnSpc>
-              <a:spcBef>
-                <a:spcPts val="0"/>
-              </a:spcBef>
-              <a:spcAft>
-                <a:spcPts val="0"/>
-              </a:spcAft>
-              <a:buNone/>
-            </a:pPr>
-            <a:r>
-              <a:rPr lang="en" sz="1000">
-                <a:highlight>
-                  <a:schemeClr val="dk2"/>
-                </a:highlight>
-                <a:latin typeface="Consolas"/>
-                <a:ea typeface="Consolas"/>
-                <a:cs typeface="Consolas"/>
-                <a:sym typeface="Consolas"/>
-              </a:rPr>
-              <a:t>// plants.json</a:t>
-            </a:r>
-            <a:endParaRPr sz="1000">
-              <a:solidFill>
-                <a:srgbClr val="CCCCCC"/>
-              </a:solidFill>
-              <a:highlight>
-                <a:schemeClr val="dk2"/>
-              </a:highlight>
-              <a:latin typeface="Consolas"/>
-              <a:ea typeface="Consolas"/>
-              <a:cs typeface="Consolas"/>
-              <a:sym typeface="Consolas"/>
-            </a:endParaRPr>
-          </a:p>
-          <a:p>
-            <a:pPr indent="0" lvl="0" marL="0" rtl="0" algn="l">
-              <a:lnSpc>
-                <a:spcPct val="115000"/>
-              </a:lnSpc>
-              <a:spcBef>
-                <a:spcPts val="0"/>
-              </a:spcBef>
-              <a:spcAft>
-                <a:spcPts val="0"/>
-              </a:spcAft>
-              <a:buNone/>
-            </a:pPr>
-            <a:r>
-              <a:rPr lang="en" sz="1000">
-                <a:highlight>
-                  <a:schemeClr val="dk2"/>
-                </a:highlight>
-                <a:latin typeface="Consolas"/>
-                <a:ea typeface="Consolas"/>
-                <a:cs typeface="Consolas"/>
-                <a:sym typeface="Consolas"/>
-              </a:rPr>
-              <a:t>{ "name": "Sunflower",</a:t>
-            </a:r>
-            <a:endParaRPr sz="1000">
-              <a:solidFill>
-                <a:srgbClr val="CCCCCC"/>
-              </a:solidFill>
-              <a:highlight>
-                <a:schemeClr val="dk2"/>
-              </a:highlight>
-              <a:latin typeface="Consolas"/>
-              <a:ea typeface="Consolas"/>
-              <a:cs typeface="Consolas"/>
-              <a:sym typeface="Consolas"/>
-            </a:endParaRPr>
-          </a:p>
-          <a:p>
-            <a:pPr indent="0" lvl="0" marL="0" rtl="0" algn="l">
-              <a:lnSpc>
-                <a:spcPct val="115000"/>
-              </a:lnSpc>
-              <a:spcBef>
-                <a:spcPts val="0"/>
-              </a:spcBef>
-              <a:spcAft>
-                <a:spcPts val="0"/>
-              </a:spcAft>
-              <a:buNone/>
-            </a:pPr>
-            <a:r>
-              <a:rPr lang="en" sz="1000">
-                <a:highlight>
-                  <a:schemeClr val="dk2"/>
-                </a:highlight>
-                <a:latin typeface="Consolas"/>
-                <a:ea typeface="Consolas"/>
-                <a:cs typeface="Consolas"/>
-                <a:sym typeface="Consolas"/>
-              </a:rPr>
-              <a:t>  "sprite": "sunflower",</a:t>
-            </a:r>
-            <a:endParaRPr sz="1000">
-              <a:solidFill>
-                <a:srgbClr val="CCCCCC"/>
-              </a:solidFill>
-              <a:highlight>
-                <a:schemeClr val="dk2"/>
-              </a:highlight>
-              <a:latin typeface="Consolas"/>
-              <a:ea typeface="Consolas"/>
-              <a:cs typeface="Consolas"/>
-              <a:sym typeface="Consolas"/>
-            </a:endParaRPr>
-          </a:p>
-          <a:p>
-            <a:pPr indent="0" lvl="0" marL="0" rtl="0" algn="l">
-              <a:lnSpc>
-                <a:spcPct val="115000"/>
-              </a:lnSpc>
-              <a:spcBef>
-                <a:spcPts val="0"/>
-              </a:spcBef>
-              <a:spcAft>
-                <a:spcPts val="0"/>
-              </a:spcAft>
-              <a:buNone/>
-            </a:pPr>
-            <a:r>
-              <a:rPr lang="en" sz="1000">
-                <a:highlight>
-                  <a:schemeClr val="dk2"/>
-                </a:highlight>
-                <a:latin typeface="Consolas"/>
-                <a:ea typeface="Consolas"/>
-                <a:cs typeface="Consolas"/>
-                <a:sym typeface="Consolas"/>
-              </a:rPr>
-              <a:t>  "cost": 50, "recharge": 7.5,</a:t>
-            </a:r>
-            <a:endParaRPr sz="1000">
-              <a:solidFill>
-                <a:srgbClr val="CCCCCC"/>
-              </a:solidFill>
-              <a:highlight>
-                <a:schemeClr val="dk2"/>
-              </a:highlight>
-              <a:latin typeface="Consolas"/>
-              <a:ea typeface="Consolas"/>
-              <a:cs typeface="Consolas"/>
-              <a:sym typeface="Consolas"/>
-            </a:endParaRPr>
-          </a:p>
-          <a:p>
-            <a:pPr indent="0" lvl="0" marL="0" rtl="0" algn="l">
-              <a:lnSpc>
-                <a:spcPct val="115000"/>
-              </a:lnSpc>
-              <a:spcBef>
-                <a:spcPts val="0"/>
-              </a:spcBef>
-              <a:spcAft>
-                <a:spcPts val="0"/>
-              </a:spcAft>
-              <a:buNone/>
-            </a:pPr>
-            <a:r>
-              <a:rPr lang="en" sz="1000">
-                <a:highlight>
-                  <a:schemeClr val="dk2"/>
-                </a:highlight>
-                <a:latin typeface="Consolas"/>
-                <a:ea typeface="Consolas"/>
-                <a:cs typeface="Consolas"/>
-                <a:sym typeface="Consolas"/>
-              </a:rPr>
-              <a:t>  "health": 6,</a:t>
-            </a:r>
-            <a:endParaRPr sz="1000">
-              <a:solidFill>
-                <a:srgbClr val="CCCCCC"/>
-              </a:solidFill>
-              <a:highlight>
-                <a:schemeClr val="dk2"/>
-              </a:highlight>
-              <a:latin typeface="Consolas"/>
-              <a:ea typeface="Consolas"/>
-              <a:cs typeface="Consolas"/>
-              <a:sym typeface="Consolas"/>
-            </a:endParaRPr>
-          </a:p>
-          <a:p>
-            <a:pPr indent="0" lvl="0" marL="0" rtl="0" algn="l">
-              <a:lnSpc>
-                <a:spcPct val="115000"/>
-              </a:lnSpc>
-              <a:spcBef>
-                <a:spcPts val="0"/>
-              </a:spcBef>
-              <a:spcAft>
-                <a:spcPts val="0"/>
-              </a:spcAft>
-              <a:buNone/>
-            </a:pPr>
-            <a:r>
-              <a:rPr lang="en" sz="1000">
-                <a:highlight>
-                  <a:schemeClr val="dk2"/>
-                </a:highlight>
-                <a:latin typeface="Consolas"/>
-                <a:ea typeface="Consolas"/>
-                <a:cs typeface="Consolas"/>
-                <a:sym typeface="Consolas"/>
-              </a:rPr>
-              <a:t>  "sunProducer": {</a:t>
-            </a:r>
-            <a:endParaRPr sz="1000">
-              <a:solidFill>
-                <a:srgbClr val="CCCCCC"/>
-              </a:solidFill>
-              <a:highlight>
-                <a:schemeClr val="dk2"/>
-              </a:highlight>
-              <a:latin typeface="Consolas"/>
-              <a:ea typeface="Consolas"/>
-              <a:cs typeface="Consolas"/>
-              <a:sym typeface="Consolas"/>
-            </a:endParaRPr>
-          </a:p>
-          <a:p>
-            <a:pPr indent="0" lvl="0" marL="0" rtl="0" algn="l">
-              <a:lnSpc>
-                <a:spcPct val="115000"/>
-              </a:lnSpc>
-              <a:spcBef>
-                <a:spcPts val="0"/>
-              </a:spcBef>
-              <a:spcAft>
-                <a:spcPts val="0"/>
-              </a:spcAft>
-              <a:buNone/>
-            </a:pPr>
-            <a:r>
-              <a:rPr lang="en" sz="1000">
-                <a:highlight>
-                  <a:schemeClr val="dk2"/>
-                </a:highlight>
-                <a:latin typeface="Consolas"/>
-                <a:ea typeface="Consolas"/>
-                <a:cs typeface="Consolas"/>
-                <a:sym typeface="Consolas"/>
-              </a:rPr>
-              <a:t>    "interval": 12, "amount": 25 } },</a:t>
-            </a:r>
-            <a:endParaRPr sz="1000">
-              <a:solidFill>
-                <a:srgbClr val="CCCCCC"/>
-              </a:solidFill>
-              <a:highlight>
-                <a:schemeClr val="dk2"/>
-              </a:highlight>
-              <a:latin typeface="Consolas"/>
-              <a:ea typeface="Consolas"/>
-              <a:cs typeface="Consolas"/>
-              <a:sym typeface="Consolas"/>
-            </a:endParaRPr>
-          </a:p>
-          <a:p>
-            <a:pPr indent="0" lvl="0" marL="0" rtl="0" algn="l">
-              <a:lnSpc>
-                <a:spcPct val="115000"/>
-              </a:lnSpc>
-              <a:spcBef>
-                <a:spcPts val="0"/>
-              </a:spcBef>
-              <a:spcAft>
-                <a:spcPts val="0"/>
-              </a:spcAft>
-              <a:buNone/>
-            </a:pPr>
-            <a:r>
-              <a:rPr lang="en" sz="1000">
-                <a:highlight>
-                  <a:schemeClr val="dk2"/>
-                </a:highlight>
-                <a:latin typeface="Consolas"/>
-                <a:ea typeface="Consolas"/>
-                <a:cs typeface="Consolas"/>
-                <a:sym typeface="Consolas"/>
-              </a:rPr>
-              <a:t>{ "name": "Repeater",</a:t>
-            </a:r>
-            <a:endParaRPr sz="1000">
-              <a:solidFill>
-                <a:srgbClr val="CCCCCC"/>
-              </a:solidFill>
-              <a:highlight>
-                <a:schemeClr val="dk2"/>
-              </a:highlight>
-              <a:latin typeface="Consolas"/>
-              <a:ea typeface="Consolas"/>
-              <a:cs typeface="Consolas"/>
-              <a:sym typeface="Consolas"/>
-            </a:endParaRPr>
-          </a:p>
-          <a:p>
-            <a:pPr indent="0" lvl="0" marL="0" rtl="0" algn="l">
-              <a:lnSpc>
-                <a:spcPct val="115000"/>
-              </a:lnSpc>
-              <a:spcBef>
-                <a:spcPts val="0"/>
-              </a:spcBef>
-              <a:spcAft>
-                <a:spcPts val="0"/>
-              </a:spcAft>
-              <a:buNone/>
-            </a:pPr>
-            <a:r>
-              <a:rPr lang="en" sz="1000">
-                <a:highlight>
-                  <a:schemeClr val="dk2"/>
-                </a:highlight>
-                <a:latin typeface="Consolas"/>
-                <a:ea typeface="Consolas"/>
-                <a:cs typeface="Consolas"/>
-                <a:sym typeface="Consolas"/>
-              </a:rPr>
-              <a:t>  "sprite": "repeater",</a:t>
-            </a:r>
-            <a:endParaRPr sz="1000">
-              <a:solidFill>
-                <a:srgbClr val="CCCCCC"/>
-              </a:solidFill>
-              <a:highlight>
-                <a:schemeClr val="dk2"/>
-              </a:highlight>
-              <a:latin typeface="Consolas"/>
-              <a:ea typeface="Consolas"/>
-              <a:cs typeface="Consolas"/>
-              <a:sym typeface="Consolas"/>
-            </a:endParaRPr>
-          </a:p>
-          <a:p>
-            <a:pPr indent="0" lvl="0" marL="0" rtl="0" algn="l">
-              <a:lnSpc>
-                <a:spcPct val="115000"/>
-              </a:lnSpc>
-              <a:spcBef>
-                <a:spcPts val="0"/>
-              </a:spcBef>
-              <a:spcAft>
-                <a:spcPts val="0"/>
-              </a:spcAft>
-              <a:buNone/>
-            </a:pPr>
-            <a:r>
-              <a:rPr lang="en" sz="1000">
-                <a:highlight>
-                  <a:schemeClr val="dk2"/>
-                </a:highlight>
-                <a:latin typeface="Consolas"/>
-                <a:ea typeface="Consolas"/>
-                <a:cs typeface="Consolas"/>
-                <a:sym typeface="Consolas"/>
-              </a:rPr>
-              <a:t>  "cost": 200, "recharge": 7.5,</a:t>
-            </a:r>
-            <a:endParaRPr sz="1000">
-              <a:solidFill>
-                <a:srgbClr val="CCCCCC"/>
-              </a:solidFill>
-              <a:highlight>
-                <a:schemeClr val="dk2"/>
-              </a:highlight>
-              <a:latin typeface="Consolas"/>
-              <a:ea typeface="Consolas"/>
-              <a:cs typeface="Consolas"/>
-              <a:sym typeface="Consolas"/>
-            </a:endParaRPr>
-          </a:p>
-          <a:p>
-            <a:pPr indent="0" lvl="0" marL="0" rtl="0" algn="l">
-              <a:lnSpc>
-                <a:spcPct val="115000"/>
-              </a:lnSpc>
-              <a:spcBef>
-                <a:spcPts val="0"/>
-              </a:spcBef>
-              <a:spcAft>
-                <a:spcPts val="0"/>
-              </a:spcAft>
-              <a:buNone/>
-            </a:pPr>
-            <a:r>
-              <a:rPr lang="en" sz="1000">
-                <a:highlight>
-                  <a:schemeClr val="dk2"/>
-                </a:highlight>
-                <a:latin typeface="Consolas"/>
-                <a:ea typeface="Consolas"/>
-                <a:cs typeface="Consolas"/>
-                <a:sym typeface="Consolas"/>
-              </a:rPr>
-              <a:t>  "health": 6,</a:t>
-            </a:r>
-            <a:endParaRPr sz="1000">
-              <a:solidFill>
-                <a:srgbClr val="CCCCCC"/>
-              </a:solidFill>
-              <a:highlight>
-                <a:schemeClr val="dk2"/>
-              </a:highlight>
-              <a:latin typeface="Consolas"/>
-              <a:ea typeface="Consolas"/>
-              <a:cs typeface="Consolas"/>
-              <a:sym typeface="Consolas"/>
-            </a:endParaRPr>
-          </a:p>
-          <a:p>
-            <a:pPr indent="0" lvl="0" marL="0" rtl="0" algn="l">
-              <a:lnSpc>
-                <a:spcPct val="115000"/>
-              </a:lnSpc>
-              <a:spcBef>
-                <a:spcPts val="0"/>
-              </a:spcBef>
-              <a:spcAft>
-                <a:spcPts val="0"/>
-              </a:spcAft>
-              <a:buNone/>
-            </a:pPr>
-            <a:r>
-              <a:rPr lang="en" sz="1000">
-                <a:highlight>
-                  <a:schemeClr val="dk2"/>
-                </a:highlight>
-                <a:latin typeface="Consolas"/>
-                <a:ea typeface="Consolas"/>
-                <a:cs typeface="Consolas"/>
-                <a:sym typeface="Consolas"/>
-              </a:rPr>
-              <a:t>  "shooter": {</a:t>
-            </a:r>
-            <a:endParaRPr sz="1000">
-              <a:solidFill>
-                <a:srgbClr val="CCCCCC"/>
-              </a:solidFill>
-              <a:highlight>
-                <a:schemeClr val="dk2"/>
-              </a:highlight>
-              <a:latin typeface="Consolas"/>
-              <a:ea typeface="Consolas"/>
-              <a:cs typeface="Consolas"/>
-              <a:sym typeface="Consolas"/>
-            </a:endParaRPr>
-          </a:p>
-          <a:p>
-            <a:pPr indent="0" lvl="0" marL="0" rtl="0" algn="l">
-              <a:lnSpc>
-                <a:spcPct val="115000"/>
-              </a:lnSpc>
-              <a:spcBef>
-                <a:spcPts val="0"/>
-              </a:spcBef>
-              <a:spcAft>
-                <a:spcPts val="0"/>
-              </a:spcAft>
-              <a:buNone/>
-            </a:pPr>
-            <a:r>
-              <a:rPr lang="en" sz="1000">
-                <a:highlight>
-                  <a:schemeClr val="dk2"/>
-                </a:highlight>
-                <a:latin typeface="Consolas"/>
-                <a:ea typeface="Consolas"/>
-                <a:cs typeface="Consolas"/>
-                <a:sym typeface="Consolas"/>
-              </a:rPr>
-              <a:t>    "interval": 1.4, "shots": 2,</a:t>
-            </a:r>
-            <a:endParaRPr sz="1000">
-              <a:solidFill>
-                <a:srgbClr val="CCCCCC"/>
-              </a:solidFill>
-              <a:highlight>
-                <a:schemeClr val="dk2"/>
-              </a:highlight>
-              <a:latin typeface="Consolas"/>
-              <a:ea typeface="Consolas"/>
-              <a:cs typeface="Consolas"/>
-              <a:sym typeface="Consolas"/>
-            </a:endParaRPr>
-          </a:p>
-          <a:p>
-            <a:pPr indent="0" lvl="0" marL="0" rtl="0" algn="l">
-              <a:lnSpc>
-                <a:spcPct val="115000"/>
-              </a:lnSpc>
-              <a:spcBef>
-                <a:spcPts val="0"/>
-              </a:spcBef>
-              <a:spcAft>
-                <a:spcPts val="0"/>
-              </a:spcAft>
-              <a:buNone/>
-            </a:pPr>
-            <a:r>
-              <a:rPr lang="en" sz="1000">
-                <a:highlight>
-                  <a:schemeClr val="dk2"/>
-                </a:highlight>
-                <a:latin typeface="Consolas"/>
-                <a:ea typeface="Consolas"/>
-                <a:cs typeface="Consolas"/>
-                <a:sym typeface="Consolas"/>
-              </a:rPr>
-              <a:t>    "damage": 1 } }</a:t>
-            </a:r>
-            <a:endParaRPr sz="1000">
-              <a:solidFill>
-                <a:srgbClr val="CCCCCC"/>
-              </a:solidFill>
-              <a:highlight>
-                <a:schemeClr val="dk2"/>
-              </a:highlight>
-              <a:latin typeface="Consolas"/>
-              <a:ea typeface="Consolas"/>
-              <a:cs typeface="Consolas"/>
-              <a:sym typeface="Consolas"/>
-            </a:endParaRPr>
-          </a:p>
-        </p:txBody>
-      </p:sp>
-    </p:spTree>
-  </p:cSld>
-  <p:clrMapOvr>
-    <a:masterClrMapping/>
-  </p:clrMapOvr>
-</p:sld>
-</file>
-
-<file path=ppt/slides/slide18.xml><?xml version="1.0" encoding="utf-8"?>
-<p:sld xmlns:a="http://schemas.openxmlformats.org/drawingml/2006/main" xmlns:p="http://schemas.openxmlformats.org/presentationml/2006/main" xmlns:r="http://schemas.openxmlformats.org/officeDocument/2006/relationships">
-  <p:cSld>
-    <p:spTree>
-      <p:nvGrpSpPr>
-        <p:cNvPr id="1" name=""/>
-        <p:cNvGrpSpPr/>
-        <p:nvPr/>
-      </p:nvGrpSpPr>
-      <p:grpSpPr/>
-      <p:sp>
-        <p:nvSpPr>
-          <p:cNvPr id="140" name="Google Shape;140;p23"/>
-          <p:cNvSpPr txBox="1"/>
-          <p:nvPr>
-            <p:ph type="title"/>
-          </p:nvPr>
-        </p:nvSpPr>
-        <p:spPr>
-          <a:xfrm>
-            <a:off x="311700" y="195615"/>
-            <a:ext cx="8520600" cy="572700"/>
-          </a:xfrm>
-          <a:prstGeom prst="rect">
-            <a:avLst/>
-          </a:prstGeom>
-        </p:spPr>
-        <p:txBody>
-          <a:bodyPr anchorCtr="0" anchor="t" bIns="91425" lIns="91425" spcFirstLastPara="1" rIns="91425" wrap="square" tIns="91425">
-            <a:normAutofit fontScale="90000"/>
-          </a:bodyPr>
-          <a:lstStyle/>
-          <a:p>
-            <a:pPr indent="0" lvl="0" marL="0" rtl="0" algn="l">
-              <a:spcBef>
-                <a:spcPts val="0"/>
-              </a:spcBef>
-              <a:spcAft>
-                <a:spcPts val="0"/>
-              </a:spcAft>
-              <a:buNone/>
-            </a:pPr>
-            <a:r>
-              <a:rPr lang="en"/>
-              <a:t>The Type Creates Instances</a:t>
-            </a:r>
-            <a:endParaRPr/>
-          </a:p>
-        </p:txBody>
-      </p:sp>
-      <p:sp>
-        <p:nvSpPr>
-          <p:cNvPr id="293" name="Google Shape;293;p45"/>
-          <p:cNvSpPr txBox="1"/>
-          <p:nvPr>
-            <p:ph type="title"/>
-          </p:nvPr>
-        </p:nvSpPr>
-        <p:spPr>
-          <a:xfrm>
-            <a:off x="311700" y="1152475"/>
-            <a:ext cx="3700000" cy="3500000"/>
-          </a:xfrm>
-          <a:prstGeom prst="rect">
-            <a:avLst/>
-          </a:prstGeom>
-        </p:spPr>
-        <p:txBody>
-          <a:bodyPr anchorCtr="0" anchor="t" bIns="91425" lIns="91425" spcFirstLastPara="1" rIns="91425" wrap="square" tIns="91425">
-            <a:normAutofit fontScale="90000"/>
-          </a:bodyPr>
-          <a:lstStyle/>
-          <a:p>
-            <a:pPr indent="-330200" lvl="0" marL="457200" rtl="0" algn="l">
-              <a:buClr>
-                <a:srgbClr val="DEE2E6"/>
-              </a:buClr>
-              <a:spcBef>
-                <a:spcPts val="0"/>
-              </a:spcBef>
-              <a:spcAft>
-                <a:spcPts val="0"/>
-              </a:spcAft>
-              <a:buSzPts val="1600"/>
-              <a:buChar char="●"/>
-            </a:pPr>
-            <a:r>
-              <a:rPr lang="en" sz="1600">
-                <a:solidFill>
-                  <a:srgbClr val="DEE2E6"/>
-                </a:solidFill>
-              </a:rPr>
-              <a:t>A component for each kind of data</a:t>
-            </a:r>
-            <a:endParaRPr/>
-          </a:p>
-          <a:p>
-            <a:pPr indent="-330200" lvl="0" marL="457200" rtl="0" algn="l">
-              <a:buClr>
-                <a:srgbClr val="DEE2E6"/>
-              </a:buClr>
-              <a:spcBef>
-                <a:spcPts val="0"/>
-              </a:spcBef>
-              <a:spcAft>
-                <a:spcPts val="0"/>
-              </a:spcAft>
-              <a:buSzPts val="1600"/>
-              <a:buChar char="●"/>
-            </a:pPr>
-            <a:r>
-              <a:rPr lang="en" sz="1600">
-                <a:solidFill>
-                  <a:srgbClr val="DEE2E6"/>
-                </a:solidFill>
-              </a:rPr>
-              <a:t>New kinds from old components: data only</a:t>
-            </a:r>
-            <a:endParaRPr/>
-          </a:p>
-          <a:p>
-            <a:pPr indent="-317500" lvl="1" marL="914400" rtl="0" algn="l">
-              <a:buClr>
-                <a:srgbClr val="6C757D"/>
-              </a:buClr>
-              <a:spcBef>
-                <a:spcPts val="0"/>
-              </a:spcBef>
-              <a:spcAft>
-                <a:spcPts val="0"/>
-              </a:spcAft>
-              <a:buSzPts val="1400"/>
-              <a:buChar char="○"/>
-            </a:pPr>
-            <a:r>
-              <a:rPr lang="en" sz="1400">
-                <a:solidFill>
-                  <a:srgbClr val="6C757D"/>
-                </a:solidFill>
-              </a:rPr>
-              <a:t>A Buckethead: a zombie type with armour</a:t>
-            </a:r>
-            <a:endParaRPr/>
-          </a:p>
-          <a:p>
-            <a:pPr indent="-330200" lvl="0" marL="457200" rtl="0" algn="l">
-              <a:buClr>
-                <a:srgbClr val="DEE2E6"/>
-              </a:buClr>
-              <a:spcBef>
-                <a:spcPts val="0"/>
-              </a:spcBef>
-              <a:spcAft>
-                <a:spcPts val="0"/>
-              </a:spcAft>
-              <a:buSzPts val="1600"/>
-              <a:buChar char="●"/>
-            </a:pPr>
-            <a:r>
-              <a:rPr lang="en" sz="1600">
-                <a:solidFill>
-                  <a:srgbClr val="DEE2E6"/>
-                </a:solidFill>
-              </a:rPr>
-              <a:t>A new ability: one component, and data</a:t>
-            </a:r>
-            <a:endParaRPr/>
-          </a:p>
-          <a:p>
-            <a:pPr indent="-317500" lvl="1" marL="914400" rtl="0" algn="l">
-              <a:buClr>
-                <a:srgbClr val="6C757D"/>
-              </a:buClr>
-              <a:spcBef>
-                <a:spcPts val="0"/>
-              </a:spcBef>
-              <a:spcAft>
-                <a:spcPts val="0"/>
-              </a:spcAft>
-              <a:buSzPts val="1400"/>
-              <a:buChar char="○"/>
-            </a:pPr>
-            <a:r>
-              <a:rPr lang="en" sz="1400">
-                <a:solidFill>
-                  <a:srgbClr val="6C757D"/>
-                </a:solidFill>
-              </a:rPr>
-              <a:t>The Cherry Bomb: Explode</a:t>
-            </a:r>
-            <a:endParaRPr/>
-          </a:p>
-        </p:txBody>
-      </p:sp>
-      <p:sp>
-        <p:nvSpPr>
-          <p:cNvPr id="141" name="Google Shape;141;p23"/>
-          <p:cNvSpPr txBox="1"/>
-          <p:nvPr>
-            <p:ph idx="2" type="body"/>
-          </p:nvPr>
-        </p:nvSpPr>
-        <p:spPr>
-          <a:xfrm>
-            <a:off x="4150000" y="1152475"/>
-            <a:ext cx="4750000" cy="3600000"/>
-          </a:xfrm>
-          <a:prstGeom prst="rect">
-            <a:avLst/>
-          </a:prstGeom>
-        </p:spPr>
-        <p:txBody>
-          <a:bodyPr anchorCtr="0" anchor="t" bIns="91425" lIns="91425" spcFirstLastPara="1" rIns="91425" wrap="square" tIns="91425">
-            <a:noAutofit/>
-          </a:bodyPr>
-          <a:lstStyle/>
-          <a:p>
-            <a:pPr indent="0" lvl="0" marL="0" rtl="0" algn="l">
-              <a:lnSpc>
-                <a:spcPct val="115000"/>
-              </a:lnSpc>
-              <a:spcBef>
-                <a:spcPts val="0"/>
-              </a:spcBef>
-              <a:spcAft>
-                <a:spcPts val="0"/>
-              </a:spcAft>
-              <a:buNone/>
-            </a:pPr>
-            <a:r>
-              <a:rPr lang="en" sz="1000">
-                <a:highlight>
-                  <a:schemeClr val="dk2"/>
-                </a:highlight>
-                <a:latin typeface="Consolas"/>
-                <a:ea typeface="Consolas"/>
-                <a:cs typeface="Consolas"/>
-                <a:sym typeface="Consolas"/>
-              </a:rPr>
-              <a:t>public Entity Create(World world)</a:t>
-            </a:r>
-            <a:endParaRPr sz="1000">
-              <a:solidFill>
-                <a:srgbClr val="CCCCCC"/>
-              </a:solidFill>
-              <a:highlight>
-                <a:schemeClr val="dk2"/>
-              </a:highlight>
-              <a:latin typeface="Consolas"/>
-              <a:ea typeface="Consolas"/>
-              <a:cs typeface="Consolas"/>
-              <a:sym typeface="Consolas"/>
-            </a:endParaRPr>
-          </a:p>
-          <a:p>
-            <a:pPr indent="0" lvl="0" marL="0" rtl="0" algn="l">
-              <a:lnSpc>
-                <a:spcPct val="115000"/>
-              </a:lnSpc>
-              <a:spcBef>
-                <a:spcPts val="0"/>
-              </a:spcBef>
-              <a:spcAft>
-                <a:spcPts val="0"/>
-              </a:spcAft>
-              <a:buNone/>
-            </a:pPr>
-            <a:r>
-              <a:rPr lang="en" sz="1000">
-                <a:highlight>
-                  <a:schemeClr val="dk2"/>
-                </a:highlight>
-                <a:latin typeface="Consolas"/>
-                <a:ea typeface="Consolas"/>
-                <a:cs typeface="Consolas"/>
-                <a:sym typeface="Consolas"/>
-              </a:rPr>
-              <a:t>{</a:t>
-            </a:r>
-            <a:endParaRPr sz="1000">
-              <a:solidFill>
-                <a:srgbClr val="CCCCCC"/>
-              </a:solidFill>
-              <a:highlight>
-                <a:schemeClr val="dk2"/>
-              </a:highlight>
-              <a:latin typeface="Consolas"/>
-              <a:ea typeface="Consolas"/>
-              <a:cs typeface="Consolas"/>
-              <a:sym typeface="Consolas"/>
-            </a:endParaRPr>
-          </a:p>
-          <a:p>
-            <a:pPr indent="0" lvl="0" marL="0" rtl="0" algn="l">
-              <a:lnSpc>
-                <a:spcPct val="115000"/>
-              </a:lnSpc>
-              <a:spcBef>
-                <a:spcPts val="0"/>
-              </a:spcBef>
-              <a:spcAft>
-                <a:spcPts val="0"/>
-              </a:spcAft>
-              <a:buNone/>
-            </a:pPr>
-            <a:r>
-              <a:rPr lang="en" sz="1000">
-                <a:highlight>
-                  <a:schemeClr val="dk2"/>
-                </a:highlight>
-                <a:latin typeface="Consolas"/>
-                <a:ea typeface="Consolas"/>
-                <a:cs typeface="Consolas"/>
-                <a:sym typeface="Consolas"/>
-              </a:rPr>
-              <a:t>    var plant = new Entity(world)</a:t>
-            </a:r>
-            <a:endParaRPr sz="1000">
-              <a:solidFill>
-                <a:srgbClr val="CCCCCC"/>
-              </a:solidFill>
-              <a:highlight>
-                <a:schemeClr val="dk2"/>
-              </a:highlight>
-              <a:latin typeface="Consolas"/>
-              <a:ea typeface="Consolas"/>
-              <a:cs typeface="Consolas"/>
-              <a:sym typeface="Consolas"/>
-            </a:endParaRPr>
-          </a:p>
-          <a:p>
-            <a:pPr indent="0" lvl="0" marL="0" rtl="0" algn="l">
-              <a:lnSpc>
-                <a:spcPct val="115000"/>
-              </a:lnSpc>
-              <a:spcBef>
-                <a:spcPts val="0"/>
-              </a:spcBef>
-              <a:spcAft>
-                <a:spcPts val="0"/>
-              </a:spcAft>
-              <a:buNone/>
-            </a:pPr>
-            <a:r>
-              <a:rPr lang="en" sz="1000">
-                <a:highlight>
-                  <a:schemeClr val="dk2"/>
-                </a:highlight>
-                <a:latin typeface="Consolas"/>
-                <a:ea typeface="Consolas"/>
-                <a:cs typeface="Consolas"/>
-                <a:sym typeface="Consolas"/>
-              </a:rPr>
-              <a:t>        .With(new SpriteRenderer(</a:t>
-            </a:r>
-            <a:endParaRPr sz="1000">
-              <a:solidFill>
-                <a:srgbClr val="CCCCCC"/>
-              </a:solidFill>
-              <a:highlight>
-                <a:schemeClr val="dk2"/>
-              </a:highlight>
-              <a:latin typeface="Consolas"/>
-              <a:ea typeface="Consolas"/>
-              <a:cs typeface="Consolas"/>
-              <a:sym typeface="Consolas"/>
-            </a:endParaRPr>
-          </a:p>
-          <a:p>
-            <a:pPr indent="0" lvl="0" marL="0" rtl="0" algn="l">
-              <a:lnSpc>
-                <a:spcPct val="115000"/>
-              </a:lnSpc>
-              <a:spcBef>
-                <a:spcPts val="0"/>
-              </a:spcBef>
-              <a:spcAft>
-                <a:spcPts val="0"/>
-              </a:spcAft>
-              <a:buNone/>
-            </a:pPr>
-            <a:r>
-              <a:rPr lang="en" sz="1000">
-                <a:highlight>
-                  <a:schemeClr val="dk2"/>
-                </a:highlight>
-                <a:latin typeface="Consolas"/>
-                <a:ea typeface="Consolas"/>
-                <a:cs typeface="Consolas"/>
-                <a:sym typeface="Consolas"/>
-              </a:rPr>
-              <a:t>            world.Atlas.GetRegion(Sprite)))</a:t>
-            </a:r>
-            <a:endParaRPr sz="1000">
-              <a:solidFill>
-                <a:srgbClr val="CCCCCC"/>
-              </a:solidFill>
-              <a:highlight>
-                <a:schemeClr val="dk2"/>
-              </a:highlight>
-              <a:latin typeface="Consolas"/>
-              <a:ea typeface="Consolas"/>
-              <a:cs typeface="Consolas"/>
-              <a:sym typeface="Consolas"/>
-            </a:endParaRPr>
-          </a:p>
-          <a:p>
-            <a:pPr indent="0" lvl="0" marL="0" rtl="0" algn="l">
-              <a:lnSpc>
-                <a:spcPct val="115000"/>
-              </a:lnSpc>
-              <a:spcBef>
-                <a:spcPts val="0"/>
-              </a:spcBef>
-              <a:spcAft>
-                <a:spcPts val="0"/>
-              </a:spcAft>
-              <a:buNone/>
-            </a:pPr>
-            <a:r>
-              <a:rPr lang="en" sz="1000">
-                <a:highlight>
-                  <a:schemeClr val="dk2"/>
-                </a:highlight>
-                <a:latin typeface="Consolas"/>
-                <a:ea typeface="Consolas"/>
-                <a:cs typeface="Consolas"/>
-                <a:sym typeface="Consolas"/>
-              </a:rPr>
-              <a:t>        .With(new Health(Health));</a:t>
-            </a:r>
-            <a:endParaRPr sz="1000">
-              <a:solidFill>
-                <a:srgbClr val="CCCCCC"/>
-              </a:solidFill>
-              <a:highlight>
-                <a:schemeClr val="dk2"/>
-              </a:highlight>
-              <a:latin typeface="Consolas"/>
-              <a:ea typeface="Consolas"/>
-              <a:cs typeface="Consolas"/>
-              <a:sym typeface="Consolas"/>
-            </a:endParaRPr>
-          </a:p>
-          <a:p>
-            <a:pPr indent="0" lvl="0" marL="0" rtl="0" algn="l">
-              <a:lnSpc>
-                <a:spcPct val="115000"/>
-              </a:lnSpc>
-              <a:spcBef>
-                <a:spcPts val="0"/>
-              </a:spcBef>
-              <a:spcAft>
-                <a:spcPts val="0"/>
-              </a:spcAft>
-              <a:buNone/>
-            </a:pPr>
-            <a:r>
-              <a:rPr lang="en" sz="1000">
-                <a:highlight>
-                  <a:schemeClr val="dk2"/>
-                </a:highlight>
-                <a:latin typeface="Consolas"/>
-                <a:ea typeface="Consolas"/>
-                <a:cs typeface="Consolas"/>
-                <a:sym typeface="Consolas"/>
-              </a:rPr>
-              <a:t/>
-            </a:r>
-            <a:endParaRPr sz="1000">
-              <a:solidFill>
-                <a:srgbClr val="CCCCCC"/>
-              </a:solidFill>
-              <a:highlight>
-                <a:schemeClr val="dk2"/>
-              </a:highlight>
-              <a:latin typeface="Consolas"/>
-              <a:ea typeface="Consolas"/>
-              <a:cs typeface="Consolas"/>
-              <a:sym typeface="Consolas"/>
-            </a:endParaRPr>
-          </a:p>
-          <a:p>
-            <a:pPr indent="0" lvl="0" marL="0" rtl="0" algn="l">
-              <a:lnSpc>
-                <a:spcPct val="115000"/>
-              </a:lnSpc>
-              <a:spcBef>
-                <a:spcPts val="0"/>
-              </a:spcBef>
-              <a:spcAft>
-                <a:spcPts val="0"/>
-              </a:spcAft>
-              <a:buNone/>
-            </a:pPr>
-            <a:r>
-              <a:rPr lang="en" sz="1000">
-                <a:highlight>
-                  <a:schemeClr val="dk2"/>
-                </a:highlight>
-                <a:latin typeface="Consolas"/>
-                <a:ea typeface="Consolas"/>
-                <a:cs typeface="Consolas"/>
-                <a:sym typeface="Consolas"/>
-              </a:rPr>
-              <a:t>    if (Shooter != null)</a:t>
-            </a:r>
-            <a:endParaRPr sz="1000">
-              <a:solidFill>
-                <a:srgbClr val="CCCCCC"/>
-              </a:solidFill>
-              <a:highlight>
-                <a:schemeClr val="dk2"/>
-              </a:highlight>
-              <a:latin typeface="Consolas"/>
-              <a:ea typeface="Consolas"/>
-              <a:cs typeface="Consolas"/>
-              <a:sym typeface="Consolas"/>
-            </a:endParaRPr>
-          </a:p>
-          <a:p>
-            <a:pPr indent="0" lvl="0" marL="0" rtl="0" algn="l">
-              <a:lnSpc>
-                <a:spcPct val="115000"/>
-              </a:lnSpc>
-              <a:spcBef>
-                <a:spcPts val="0"/>
-              </a:spcBef>
-              <a:spcAft>
-                <a:spcPts val="0"/>
-              </a:spcAft>
-              <a:buNone/>
-            </a:pPr>
-            <a:r>
-              <a:rPr lang="en" sz="1000">
-                <a:highlight>
-                  <a:schemeClr val="dk2"/>
-                </a:highlight>
-                <a:latin typeface="Consolas"/>
-                <a:ea typeface="Consolas"/>
-                <a:cs typeface="Consolas"/>
-                <a:sym typeface="Consolas"/>
-              </a:rPr>
-              <a:t>        plant.Add(new Shooter(Shooter.Interval,</a:t>
-            </a:r>
-            <a:endParaRPr sz="1000">
-              <a:solidFill>
-                <a:srgbClr val="CCCCCC"/>
-              </a:solidFill>
-              <a:highlight>
-                <a:schemeClr val="dk2"/>
-              </a:highlight>
-              <a:latin typeface="Consolas"/>
-              <a:ea typeface="Consolas"/>
-              <a:cs typeface="Consolas"/>
-              <a:sym typeface="Consolas"/>
-            </a:endParaRPr>
-          </a:p>
-          <a:p>
-            <a:pPr indent="0" lvl="0" marL="0" rtl="0" algn="l">
-              <a:lnSpc>
-                <a:spcPct val="115000"/>
-              </a:lnSpc>
-              <a:spcBef>
-                <a:spcPts val="0"/>
-              </a:spcBef>
-              <a:spcAft>
-                <a:spcPts val="0"/>
-              </a:spcAft>
-              <a:buNone/>
-            </a:pPr>
-            <a:r>
-              <a:rPr lang="en" sz="1000">
-                <a:highlight>
-                  <a:schemeClr val="dk2"/>
-                </a:highlight>
-                <a:latin typeface="Consolas"/>
-                <a:ea typeface="Consolas"/>
-                <a:cs typeface="Consolas"/>
-                <a:sym typeface="Consolas"/>
-              </a:rPr>
-              <a:t>            Shooter.Shots, Shooter.Damage));</a:t>
-            </a:r>
-            <a:endParaRPr sz="1000">
-              <a:solidFill>
-                <a:srgbClr val="CCCCCC"/>
-              </a:solidFill>
-              <a:highlight>
-                <a:schemeClr val="dk2"/>
-              </a:highlight>
-              <a:latin typeface="Consolas"/>
-              <a:ea typeface="Consolas"/>
-              <a:cs typeface="Consolas"/>
-              <a:sym typeface="Consolas"/>
-            </a:endParaRPr>
-          </a:p>
-          <a:p>
-            <a:pPr indent="0" lvl="0" marL="0" rtl="0" algn="l">
-              <a:lnSpc>
-                <a:spcPct val="115000"/>
-              </a:lnSpc>
-              <a:spcBef>
-                <a:spcPts val="0"/>
-              </a:spcBef>
-              <a:spcAft>
-                <a:spcPts val="0"/>
-              </a:spcAft>
-              <a:buNone/>
-            </a:pPr>
-            <a:r>
-              <a:rPr lang="en" sz="1000">
-                <a:highlight>
-                  <a:schemeClr val="dk2"/>
-                </a:highlight>
-                <a:latin typeface="Consolas"/>
-                <a:ea typeface="Consolas"/>
-                <a:cs typeface="Consolas"/>
-                <a:sym typeface="Consolas"/>
-              </a:rPr>
-              <a:t>    if (SunProducer != null)</a:t>
-            </a:r>
-            <a:endParaRPr sz="1000">
-              <a:solidFill>
-                <a:srgbClr val="CCCCCC"/>
-              </a:solidFill>
-              <a:highlight>
-                <a:schemeClr val="dk2"/>
-              </a:highlight>
-              <a:latin typeface="Consolas"/>
-              <a:ea typeface="Consolas"/>
-              <a:cs typeface="Consolas"/>
-              <a:sym typeface="Consolas"/>
-            </a:endParaRPr>
-          </a:p>
-          <a:p>
-            <a:pPr indent="0" lvl="0" marL="0" rtl="0" algn="l">
-              <a:lnSpc>
-                <a:spcPct val="115000"/>
-              </a:lnSpc>
-              <a:spcBef>
-                <a:spcPts val="0"/>
-              </a:spcBef>
-              <a:spcAft>
-                <a:spcPts val="0"/>
-              </a:spcAft>
-              <a:buNone/>
-            </a:pPr>
-            <a:r>
-              <a:rPr lang="en" sz="1000">
-                <a:highlight>
-                  <a:schemeClr val="dk2"/>
-                </a:highlight>
-                <a:latin typeface="Consolas"/>
-                <a:ea typeface="Consolas"/>
-                <a:cs typeface="Consolas"/>
-                <a:sym typeface="Consolas"/>
-              </a:rPr>
-              <a:t>        plant.Add(new SunProducer(</a:t>
-            </a:r>
-            <a:endParaRPr sz="1000">
-              <a:solidFill>
-                <a:srgbClr val="CCCCCC"/>
-              </a:solidFill>
-              <a:highlight>
-                <a:schemeClr val="dk2"/>
-              </a:highlight>
-              <a:latin typeface="Consolas"/>
-              <a:ea typeface="Consolas"/>
-              <a:cs typeface="Consolas"/>
-              <a:sym typeface="Consolas"/>
-            </a:endParaRPr>
-          </a:p>
-          <a:p>
-            <a:pPr indent="0" lvl="0" marL="0" rtl="0" algn="l">
-              <a:lnSpc>
-                <a:spcPct val="115000"/>
-              </a:lnSpc>
-              <a:spcBef>
-                <a:spcPts val="0"/>
-              </a:spcBef>
-              <a:spcAft>
-                <a:spcPts val="0"/>
-              </a:spcAft>
-              <a:buNone/>
-            </a:pPr>
-            <a:r>
-              <a:rPr lang="en" sz="1000">
-                <a:highlight>
-                  <a:schemeClr val="dk2"/>
-                </a:highlight>
-                <a:latin typeface="Consolas"/>
-                <a:ea typeface="Consolas"/>
-                <a:cs typeface="Consolas"/>
-                <a:sym typeface="Consolas"/>
-              </a:rPr>
-              <a:t>            SunProducer.Interval, SunProducer.Amount));</a:t>
-            </a:r>
-            <a:endParaRPr sz="1000">
-              <a:solidFill>
-                <a:srgbClr val="CCCCCC"/>
-              </a:solidFill>
-              <a:highlight>
-                <a:schemeClr val="dk2"/>
-              </a:highlight>
-              <a:latin typeface="Consolas"/>
-              <a:ea typeface="Consolas"/>
-              <a:cs typeface="Consolas"/>
-              <a:sym typeface="Consolas"/>
-            </a:endParaRPr>
-          </a:p>
-          <a:p>
-            <a:pPr indent="0" lvl="0" marL="0" rtl="0" algn="l">
-              <a:lnSpc>
-                <a:spcPct val="115000"/>
-              </a:lnSpc>
-              <a:spcBef>
-                <a:spcPts val="0"/>
-              </a:spcBef>
-              <a:spcAft>
-                <a:spcPts val="0"/>
-              </a:spcAft>
-              <a:buNone/>
-            </a:pPr>
-            <a:r>
-              <a:rPr lang="en" sz="1000">
-                <a:highlight>
-                  <a:schemeClr val="dk2"/>
-                </a:highlight>
-                <a:latin typeface="Consolas"/>
-                <a:ea typeface="Consolas"/>
-                <a:cs typeface="Consolas"/>
-                <a:sym typeface="Consolas"/>
-              </a:rPr>
-              <a:t>    return plant;</a:t>
-            </a:r>
-            <a:endParaRPr sz="1000">
-              <a:solidFill>
-                <a:srgbClr val="CCCCCC"/>
-              </a:solidFill>
-              <a:highlight>
-                <a:schemeClr val="dk2"/>
-              </a:highlight>
-              <a:latin typeface="Consolas"/>
-              <a:ea typeface="Consolas"/>
-              <a:cs typeface="Consolas"/>
-              <a:sym typeface="Consolas"/>
-            </a:endParaRPr>
-          </a:p>
-          <a:p>
-            <a:pPr indent="0" lvl="0" marL="0" rtl="0" algn="l">
-              <a:lnSpc>
-                <a:spcPct val="115000"/>
-              </a:lnSpc>
-              <a:spcBef>
-                <a:spcPts val="0"/>
-              </a:spcBef>
-              <a:spcAft>
-                <a:spcPts val="0"/>
-              </a:spcAft>
-              <a:buNone/>
-            </a:pPr>
-            <a:r>
-              <a:rPr lang="en" sz="1000">
-                <a:highlight>
-                  <a:schemeClr val="dk2"/>
-                </a:highlight>
-                <a:latin typeface="Consolas"/>
-                <a:ea typeface="Consolas"/>
-                <a:cs typeface="Consolas"/>
-                <a:sym typeface="Consolas"/>
-              </a:rPr>
-              <a:t>}</a:t>
-            </a:r>
-            <a:endParaRPr sz="1000">
-              <a:solidFill>
-                <a:srgbClr val="CCCCCC"/>
-              </a:solidFill>
-              <a:highlight>
-                <a:schemeClr val="dk2"/>
-              </a:highlight>
-              <a:latin typeface="Consolas"/>
-              <a:ea typeface="Consolas"/>
-              <a:cs typeface="Consolas"/>
-              <a:sym typeface="Consolas"/>
-            </a:endParaRPr>
-          </a:p>
-        </p:txBody>
-      </p:sp>
-    </p:spTree>
-  </p:cSld>
-  <p:clrMapOvr>
-    <a:masterClrMapping/>
-  </p:clrMapOvr>
-</p:sld>
-</file>
-
 <file path=ppt/slides/slide19.xml><?xml version="1.0" encoding="utf-8"?>
 <p:sld xmlns:a="http://schemas.openxmlformats.org/drawingml/2006/main" xmlns:p="http://schemas.openxmlformats.org/presentationml/2006/main" xmlns:r="http://schemas.openxmlformats.org/officeDocument/2006/relationships">
   <p:cSld>
@@ -11382,25 +10813,17 @@
       <p:grpSpPr/>
       <p:sp>
         <p:nvSpPr>
-          <p:cNvPr id="293" name="Google Shape;293;p45"/>
-          <p:cNvSpPr txBox="1"/>
+          <p:cNvPr id="2" name="Title 1"/>
+          <p:cNvSpPr>
+            <a:spLocks noGrp="1"/>
+          </p:cNvSpPr>
           <p:nvPr>
             <p:ph type="title"/>
           </p:nvPr>
         </p:nvSpPr>
-        <p:spPr>
-          <a:xfrm>
-            <a:off x="311700" y="195615"/>
-            <a:ext cx="8520600" cy="572700"/>
-          </a:xfrm>
-          <a:prstGeom prst="rect">
-            <a:avLst/>
-          </a:prstGeom>
-        </p:spPr>
+        <p:spPr/>
         <p:txBody>
-          <a:bodyPr anchorCtr="0" anchor="t" bIns="91425" lIns="91425" spcFirstLastPara="1" rIns="91425" wrap="square" tIns="91425">
-            <a:normAutofit fontScale="90000"/>
-          </a:bodyPr>
+          <a:bodyPr/>
           <a:lstStyle/>
           <a:p>
             <a:pPr indent="0" lvl="0" marL="0" rtl="0" algn="l">
@@ -11413,42 +10836,31 @@
               <a:buNone/>
             </a:pPr>
             <a:r>
-              <a:rPr lang="en">
-                <a:solidFill>
-                  <a:schemeClr val="accent5"/>
-                </a:solidFill>
-              </a:rPr>
-              <a:t>Prototype vs. Type Object</a:t>
-            </a:r>
-            <a:endParaRPr>
-              <a:solidFill>
-                <a:schemeClr val="accent5"/>
-              </a:solidFill>
-            </a:endParaRPr>
+              <a:rPr lang="en"/>
+              <a:t>Try It: A New Plant From Parts</a:t>
+            </a:r>
+            <a:endParaRPr/>
           </a:p>
         </p:txBody>
       </p:sp>
       <p:sp>
         <p:nvSpPr>
-          <p:cNvPr id="294" name="Google Shape;294;p45"/>
-          <p:cNvSpPr txBox="1"/>
+          <p:cNvPr id="3" name="Text Placeholder 2"/>
+          <p:cNvSpPr>
+            <a:spLocks noGrp="1"/>
+          </p:cNvSpPr>
           <p:nvPr>
-            <p:ph idx="1" type="body"/>
+            <p:ph type="body" idx="1"/>
           </p:nvPr>
         </p:nvSpPr>
         <p:spPr>
           <a:xfrm>
             <a:off x="311700" y="885950"/>
-            <a:ext cx="8520600" cy="521208"/>
+            <a:ext cx="8520600" cy="1673352"/>
           </a:xfrm>
-          <a:prstGeom prst="rect">
-            <a:avLst/>
-          </a:prstGeom>
         </p:spPr>
         <p:txBody>
-          <a:bodyPr anchorCtr="0" anchor="t" bIns="91425" lIns="91425" spcFirstLastPara="1" rIns="91425" wrap="square" tIns="91425">
-            <a:normAutofit/>
-          </a:bodyPr>
+          <a:bodyPr/>
           <a:lstStyle/>
           <a:p>
             <a:pPr indent="-330200" lvl="0" marL="457200" rtl="0" algn="l">
@@ -11463,219 +10875,60 @@
             </a:pPr>
             <a:r>
               <a:rPr lang="en"/>
-              <a:t>Two ways to make many things of one kind.</a:t>
+              <a:t>In Pvz2’s Recipes:</a:t>
             </a:r>
             <a:endParaRPr/>
           </a:p>
-        </p:txBody>
-      </p:sp>
-      <p:sp>
-        <p:nvSpPr>
-          <p:cNvPr id="295" name="Rounded Rectangle 294"/>
-          <p:cNvSpPr/>
-          <p:nvPr/>
-        </p:nvSpPr>
-        <p:spPr>
-          <a:xfrm>
-            <a:off x="548640" y="1417320"/>
-            <a:ext cx="3749039" cy="1463040"/>
-          </a:xfrm>
-          <a:prstGeom prst="roundRect">
-            <a:avLst>
-              <a:gd name="adj" fmla="val 12000"/>
-            </a:avLst>
-          </a:prstGeom>
-          <a:solidFill>
-            <a:srgbClr val="2E3338"/>
-          </a:solidFill>
-          <a:ln>
-            <a:noFill/>
-          </a:ln>
-          <a:effectLst/>
-        </p:spPr>
-        <p:style>
-          <a:lnRef idx="1">
-            <a:schemeClr val="accent1"/>
-          </a:lnRef>
-          <a:fillRef idx="3">
-            <a:schemeClr val="accent1"/>
-          </a:fillRef>
-          <a:effectRef idx="2">
-            <a:schemeClr val="accent1"/>
-          </a:effectRef>
-          <a:fontRef idx="minor">
-            <a:schemeClr val="lt1"/>
-          </a:fontRef>
-        </p:style>
-        <p:txBody>
-          <a:bodyPr rtlCol="0" anchor="ctr" wrap="square" lIns="73152" rIns="73152"/>
-          <a:lstStyle/>
-          <a:p>
-            <a:pPr algn="ctr"/>
-            <a:r>
-              <a:rPr sz="1500" b="1">
-                <a:solidFill>
-                  <a:srgbClr val="DEE2E6"/>
-                </a:solidFill>
-              </a:rPr>
-              <a:t>Prototype (Angry Birds)</a:t>
-            </a:r>
-          </a:p>
-          <a:p>
-            <a:pPr algn="ctr"/>
-            <a:r>
-              <a:rPr sz="1300" b="0">
-                <a:solidFill>
-                  <a:srgbClr val="9AA3AB"/>
-                </a:solidFill>
-              </a:rPr>
-              <a:t>copy a configured object;</a:t>
-            </a:r>
-          </a:p>
-          <a:p>
-            <a:pPr algn="ctr"/>
-            <a:r>
-              <a:rPr sz="1300" b="0">
-                <a:solidFill>
-                  <a:srgbClr val="9AA3AB"/>
-                </a:solidFill>
-              </a:rPr>
-              <a:t>shared data is copied into each clone</a:t>
-            </a:r>
-          </a:p>
-          <a:p>
-            <a:pPr algn="ctr"/>
-            <a:r>
-              <a:rPr sz="1300" b="0">
-                <a:solidFill>
-                  <a:srgbClr val="9AA3AB"/>
-                </a:solidFill>
-              </a:rPr>
-              <a:t>“more like this one”</a:t>
-            </a:r>
-          </a:p>
-        </p:txBody>
-      </p:sp>
-      <p:sp>
-        <p:nvSpPr>
-          <p:cNvPr id="296" name="Rounded Rectangle 295"/>
-          <p:cNvSpPr/>
-          <p:nvPr/>
-        </p:nvSpPr>
-        <p:spPr>
-          <a:xfrm>
-            <a:off x="4846320" y="1417320"/>
-            <a:ext cx="3749039" cy="1463040"/>
-          </a:xfrm>
-          <a:prstGeom prst="roundRect">
-            <a:avLst>
-              <a:gd name="adj" fmla="val 12000"/>
-            </a:avLst>
-          </a:prstGeom>
-          <a:solidFill>
-            <a:srgbClr val="2E3338"/>
-          </a:solidFill>
-          <a:ln w="25400">
-            <a:solidFill>
-              <a:srgbClr val="D45D35"/>
-            </a:solidFill>
-          </a:ln>
-          <a:effectLst/>
-        </p:spPr>
-        <p:style>
-          <a:lnRef idx="1">
-            <a:schemeClr val="accent1"/>
-          </a:lnRef>
-          <a:fillRef idx="3">
-            <a:schemeClr val="accent1"/>
-          </a:fillRef>
-          <a:effectRef idx="2">
-            <a:schemeClr val="accent1"/>
-          </a:effectRef>
-          <a:fontRef idx="minor">
-            <a:schemeClr val="lt1"/>
-          </a:fontRef>
-        </p:style>
-        <p:txBody>
-          <a:bodyPr rtlCol="0" anchor="ctr" wrap="square" lIns="73152" rIns="73152"/>
-          <a:lstStyle/>
-          <a:p>
-            <a:pPr algn="ctr"/>
-            <a:r>
-              <a:rPr sz="1500" b="1">
-                <a:solidFill>
-                  <a:srgbClr val="DEE2E6"/>
-                </a:solidFill>
-              </a:rPr>
-              <a:t>Type Object (here)</a:t>
-            </a:r>
-          </a:p>
-          <a:p>
-            <a:pPr algn="ctr"/>
-            <a:r>
-              <a:rPr sz="1300" b="0">
-                <a:solidFill>
-                  <a:srgbClr val="9AA3AB"/>
-                </a:solidFill>
-              </a:rPr>
-              <a:t>a type class creates instances;</a:t>
-            </a:r>
-          </a:p>
-          <a:p>
-            <a:pPr algn="ctr"/>
-            <a:r>
-              <a:rPr sz="1300" b="0">
-                <a:solidFill>
-                  <a:srgbClr val="9AA3AB"/>
-                </a:solidFill>
-              </a:rPr>
-              <a:t>shared data is kept once, in the type</a:t>
-            </a:r>
-          </a:p>
-          <a:p>
-            <a:pPr algn="ctr"/>
-            <a:r>
-              <a:rPr sz="1300" b="0">
-                <a:solidFill>
-                  <a:srgbClr val="9AA3AB"/>
-                </a:solidFill>
-              </a:rPr>
-              <a:t>kinds with their own data and rules</a:t>
-            </a:r>
-          </a:p>
-        </p:txBody>
-      </p:sp>
-      <p:sp>
-        <p:nvSpPr>
-          <p:cNvPr id="297" name="TextBox 296"/>
-          <p:cNvSpPr txBox="1"/>
-          <p:nvPr/>
-        </p:nvSpPr>
-        <p:spPr>
-          <a:xfrm>
-            <a:off x="457200" y="3154680"/>
-            <a:ext cx="8229600" cy="731520"/>
-          </a:xfrm>
-          <a:prstGeom prst="rect">
-            <a:avLst/>
-          </a:prstGeom>
-          <a:noFill/>
-        </p:spPr>
-        <p:txBody>
-          <a:bodyPr wrap="square">
-            <a:spAutoFit/>
-          </a:bodyPr>
-          <a:lstStyle/>
-          <a:p>
-            <a:pPr algn="ctr"/>
-            <a:r>
-              <a:rPr sz="1600" b="1" i="0">
-                <a:solidFill>
-                  <a:srgbClr val="DEE2E6"/>
-                </a:solidFill>
-              </a:rPr>
-              <a:t>A plant’s cost: in each plant, or in its type?</a:t>
-            </a:r>
+          <a:p>
+            <a:pPr indent="-330200" lvl="0" marL="457200" rtl="0" algn="l">
+              <a:spcBef>
+                <a:spcPts val="0"/>
+              </a:spcBef>
+              <a:spcAft>
+                <a:spcPts val="0"/>
+              </a:spcAft>
+              <a:buSzPts val="1600"/>
+              <a:buChar char="●"/>
+            </a:pPr>
+            <a:r>
+              <a:rPr lang="en"/>
+              <a:t>A plant that shoots and makes sun</a:t>
+            </a:r>
+            <a:endParaRPr/>
+          </a:p>
+          <a:p>
+            <a:pPr indent="-330200" lvl="0" marL="457200" rtl="0" algn="l">
+              <a:spcBef>
+                <a:spcPts val="0"/>
+              </a:spcBef>
+              <a:spcAft>
+                <a:spcPts val="0"/>
+              </a:spcAft>
+              <a:buSzPts val="1600"/>
+              <a:buChar char="●"/>
+            </a:pPr>
+            <a:r>
+              <a:rPr lang="en"/>
+              <a:t>Give it a packet in Game1 (sunflower sprite)</a:t>
+            </a:r>
+            <a:endParaRPr/>
+          </a:p>
+          <a:p>
+            <a:pPr indent="-330200" lvl="0" marL="457200" rtl="0" algn="l">
+              <a:spcBef>
+                <a:spcPts val="0"/>
+              </a:spcBef>
+              <a:spcAft>
+                <a:spcPts val="0"/>
+              </a:spcAft>
+              <a:buSzPts val="1600"/>
+              <a:buChar char="●"/>
+            </a:pPr>
+            <a:r>
+              <a:rPr lang="en"/>
+              <a:t>How much new code?</a:t>
+            </a:r>
+            <a:endParaRPr/>
           </a:p>
         </p:txBody>
       </p:sp>
@@ -11812,7 +11065,7 @@
       <p:grpSpPr/>
       <p:sp>
         <p:nvSpPr>
-          <p:cNvPr id="128" name="Google Shape;128;p21"/>
+          <p:cNvPr id="140" name="Google Shape;140;p23"/>
           <p:cNvSpPr txBox="1"/>
           <p:nvPr>
             <p:ph type="title"/>
@@ -11843,79 +11096,710 @@
               <a:buNone/>
             </a:pPr>
             <a:r>
-              <a:rPr lang="en">
-                <a:solidFill>
-                  <a:schemeClr val="accent5"/>
-                </a:solidFill>
-              </a:rPr>
-              <a:t>Type Object Implementation</a:t>
-            </a:r>
-            <a:endParaRPr>
-              <a:solidFill>
-                <a:schemeClr val="accent5"/>
-              </a:solidFill>
-            </a:endParaRPr>
+              <a:rPr lang="en"/>
+              <a:t>Type Object</a:t>
+            </a:r>
+            <a:endParaRPr/>
           </a:p>
         </p:txBody>
       </p:sp>
       <p:sp>
         <p:nvSpPr>
-          <p:cNvPr id="129" name="Google Shape;129;p21"/>
+          <p:cNvPr id="293" name="Google Shape;293;p45"/>
           <p:cNvSpPr txBox="1"/>
           <p:nvPr>
-            <p:ph idx="1" type="body"/>
+            <p:ph type="title"/>
           </p:nvPr>
         </p:nvSpPr>
         <p:spPr>
           <a:xfrm>
-            <a:off x="311700" y="885950"/>
-            <a:ext cx="8520600" cy="4023300"/>
+            <a:off x="311700" y="1152475"/>
+            <a:ext cx="3700000" cy="3500000"/>
           </a:xfrm>
           <a:prstGeom prst="rect">
             <a:avLst/>
           </a:prstGeom>
         </p:spPr>
         <p:txBody>
-          <a:bodyPr anchorCtr="0" anchor="ctr" bIns="91425" lIns="91425" spcFirstLastPara="1" rIns="91425" wrap="square" tIns="91425">
-            <a:normAutofit/>
+          <a:bodyPr anchorCtr="0" anchor="t" bIns="91425" lIns="91425" spcFirstLastPara="1" rIns="91425" wrap="square" tIns="91425">
+            <a:normAutofit fontScale="90000"/>
           </a:bodyPr>
           <a:lstStyle/>
           <a:p>
-            <a:pPr indent="0" lvl="0" marL="0" rtl="0" algn="ctr">
-              <a:spcBef>
-                <a:spcPts val="0"/>
-              </a:spcBef>
-              <a:spcAft>
-                <a:spcPts val="1200"/>
-              </a:spcAft>
-              <a:buNone/>
-            </a:pPr>
-            <a:r>
-              <a:rPr lang="en" sz="2900">
-                <a:latin typeface="VT323"/>
-                <a:ea typeface="VT323"/>
-                <a:cs typeface="VT323"/>
-                <a:sym typeface="VT323"/>
+            <a:pPr indent="-330200" lvl="0" marL="457200" rtl="0" algn="l">
+              <a:buClr>
+                <a:srgbClr val="DEE2E6"/>
+              </a:buClr>
+              <a:spcBef>
+                <a:spcPts val="0"/>
+              </a:spcBef>
+              <a:spcAft>
+                <a:spcPts val="0"/>
+              </a:spcAft>
+              <a:buSzPts val="1600"/>
+              <a:buChar char="●"/>
+            </a:pPr>
+            <a:r>
+              <a:rPr lang="en" sz="1600">
+                <a:solidFill>
+                  <a:srgbClr val="DEE2E6"/>
+                </a:solidFill>
               </a:rPr>
-              <a:t>DEMO!</a:t>
+              <a:t>A peashooter’s cost: not in any one peashooter</a:t>
             </a:r>
             <a:endParaRPr/>
           </a:p>
           <a:p>
-            <a:pPr indent="0" lvl="0" marL="0" rtl="0" algn="ctr">
-              <a:spcBef>
-                <a:spcPts val="0"/>
-              </a:spcBef>
-              <a:spcAft>
-                <a:spcPts val="0"/>
-              </a:spcAft>
-              <a:buNone/>
-            </a:pPr>
-            <a:r>
-              <a:rPr lang="en" sz="1800"/>
-              <a:t>Pvz3: plant and zombie types from JSON</a:t>
-            </a:r>
-            <a:endParaRPr sz="1800"/>
+            <a:pPr indent="-330200" lvl="0" marL="457200" rtl="0" algn="l">
+              <a:buClr>
+                <a:srgbClr val="DEE2E6"/>
+              </a:buClr>
+              <a:spcBef>
+                <a:spcPts val="0"/>
+              </a:spcBef>
+              <a:spcAft>
+                <a:spcPts val="0"/>
+              </a:spcAft>
+              <a:buSzPts val="1600"/>
+              <a:buChar char="●"/>
+            </a:pPr>
+            <a:r>
+              <a:rPr lang="en" sz="1600">
+                <a:solidFill>
+                  <a:srgbClr val="DEE2E6"/>
+                </a:solidFill>
+              </a:rPr>
+              <a:t>One PlantType per kind of plant</a:t>
+            </a:r>
+            <a:endParaRPr/>
+          </a:p>
+          <a:p>
+            <a:pPr indent="-317500" lvl="1" marL="914400" rtl="0" algn="l">
+              <a:buClr>
+                <a:srgbClr val="6C757D"/>
+              </a:buClr>
+              <a:spcBef>
+                <a:spcPts val="0"/>
+              </a:spcBef>
+              <a:spcAft>
+                <a:spcPts val="0"/>
+              </a:spcAft>
+              <a:buSzPts val="1400"/>
+              <a:buChar char="○"/>
+            </a:pPr>
+            <a:r>
+              <a:rPr lang="en" sz="1400">
+                <a:solidFill>
+                  <a:srgbClr val="6C757D"/>
+                </a:solidFill>
+              </a:rPr>
+              <a:t>Loaded from plants.json</a:t>
+            </a:r>
+            <a:endParaRPr/>
+          </a:p>
+          <a:p>
+            <a:pPr indent="-330200" lvl="0" marL="457200" rtl="0" algn="l">
+              <a:buClr>
+                <a:srgbClr val="DEE2E6"/>
+              </a:buClr>
+              <a:spcBef>
+                <a:spcPts val="0"/>
+              </a:spcBef>
+              <a:spcAft>
+                <a:spcPts val="0"/>
+              </a:spcAft>
+              <a:buSzPts val="1600"/>
+              <a:buChar char="●"/>
+            </a:pPr>
+            <a:r>
+              <a:rPr lang="en" sz="1600">
+                <a:solidFill>
+                  <a:srgbClr val="DEE2E6"/>
+                </a:solidFill>
+              </a:rPr>
+              <a:t>Types hold what all instances share</a:t>
+            </a:r>
+            <a:endParaRPr/>
+          </a:p>
+          <a:p>
+            <a:pPr indent="-330200" lvl="0" marL="457200" rtl="0" algn="l">
+              <a:buClr>
+                <a:srgbClr val="DEE2E6"/>
+              </a:buClr>
+              <a:spcBef>
+                <a:spcPts val="0"/>
+              </a:spcBef>
+              <a:spcAft>
+                <a:spcPts val="0"/>
+              </a:spcAft>
+              <a:buSzPts val="1600"/>
+              <a:buChar char="●"/>
+            </a:pPr>
+            <a:r>
+              <a:rPr lang="en" sz="1600">
+                <a:solidFill>
+                  <a:srgbClr val="DEE2E6"/>
+                </a:solidFill>
+              </a:rPr>
+              <a:t>Instances hold their own state</a:t>
+            </a:r>
+            <a:endParaRPr/>
+          </a:p>
+        </p:txBody>
+      </p:sp>
+      <p:sp>
+        <p:nvSpPr>
+          <p:cNvPr id="141" name="Google Shape;141;p23"/>
+          <p:cNvSpPr txBox="1"/>
+          <p:nvPr>
+            <p:ph idx="2" type="body"/>
+          </p:nvPr>
+        </p:nvSpPr>
+        <p:spPr>
+          <a:xfrm>
+            <a:off x="4150000" y="1152475"/>
+            <a:ext cx="4750000" cy="3600000"/>
+          </a:xfrm>
+          <a:prstGeom prst="rect">
+            <a:avLst/>
+          </a:prstGeom>
+        </p:spPr>
+        <p:txBody>
+          <a:bodyPr anchorCtr="0" anchor="t" bIns="91425" lIns="91425" spcFirstLastPara="1" rIns="91425" wrap="square" tIns="91425">
+            <a:noAutofit/>
+          </a:bodyPr>
+          <a:lstStyle/>
+          <a:p>
+            <a:pPr indent="0" lvl="0" marL="0" rtl="0" algn="l">
+              <a:lnSpc>
+                <a:spcPct val="115000"/>
+              </a:lnSpc>
+              <a:spcBef>
+                <a:spcPts val="0"/>
+              </a:spcBef>
+              <a:spcAft>
+                <a:spcPts val="0"/>
+              </a:spcAft>
+              <a:buNone/>
+            </a:pPr>
+            <a:r>
+              <a:rPr lang="en" sz="1000">
+                <a:highlight>
+                  <a:schemeClr val="dk2"/>
+                </a:highlight>
+                <a:latin typeface="Consolas"/>
+                <a:ea typeface="Consolas"/>
+                <a:cs typeface="Consolas"/>
+                <a:sym typeface="Consolas"/>
+              </a:rPr>
+              <a:t>// plants.json</a:t>
+            </a:r>
+            <a:endParaRPr sz="1000">
+              <a:solidFill>
+                <a:srgbClr val="CCCCCC"/>
+              </a:solidFill>
+              <a:highlight>
+                <a:schemeClr val="dk2"/>
+              </a:highlight>
+              <a:latin typeface="Consolas"/>
+              <a:ea typeface="Consolas"/>
+              <a:cs typeface="Consolas"/>
+              <a:sym typeface="Consolas"/>
+            </a:endParaRPr>
+          </a:p>
+          <a:p>
+            <a:pPr indent="0" lvl="0" marL="0" rtl="0" algn="l">
+              <a:lnSpc>
+                <a:spcPct val="115000"/>
+              </a:lnSpc>
+              <a:spcBef>
+                <a:spcPts val="0"/>
+              </a:spcBef>
+              <a:spcAft>
+                <a:spcPts val="0"/>
+              </a:spcAft>
+              <a:buNone/>
+            </a:pPr>
+            <a:r>
+              <a:rPr lang="en" sz="1000">
+                <a:highlight>
+                  <a:schemeClr val="dk2"/>
+                </a:highlight>
+                <a:latin typeface="Consolas"/>
+                <a:ea typeface="Consolas"/>
+                <a:cs typeface="Consolas"/>
+                <a:sym typeface="Consolas"/>
+              </a:rPr>
+              <a:t>{ "name": "Sunflower",</a:t>
+            </a:r>
+            <a:endParaRPr sz="1000">
+              <a:solidFill>
+                <a:srgbClr val="CCCCCC"/>
+              </a:solidFill>
+              <a:highlight>
+                <a:schemeClr val="dk2"/>
+              </a:highlight>
+              <a:latin typeface="Consolas"/>
+              <a:ea typeface="Consolas"/>
+              <a:cs typeface="Consolas"/>
+              <a:sym typeface="Consolas"/>
+            </a:endParaRPr>
+          </a:p>
+          <a:p>
+            <a:pPr indent="0" lvl="0" marL="0" rtl="0" algn="l">
+              <a:lnSpc>
+                <a:spcPct val="115000"/>
+              </a:lnSpc>
+              <a:spcBef>
+                <a:spcPts val="0"/>
+              </a:spcBef>
+              <a:spcAft>
+                <a:spcPts val="0"/>
+              </a:spcAft>
+              <a:buNone/>
+            </a:pPr>
+            <a:r>
+              <a:rPr lang="en" sz="1000">
+                <a:highlight>
+                  <a:schemeClr val="dk2"/>
+                </a:highlight>
+                <a:latin typeface="Consolas"/>
+                <a:ea typeface="Consolas"/>
+                <a:cs typeface="Consolas"/>
+                <a:sym typeface="Consolas"/>
+              </a:rPr>
+              <a:t>  "sprite": "sunflower",</a:t>
+            </a:r>
+            <a:endParaRPr sz="1000">
+              <a:solidFill>
+                <a:srgbClr val="CCCCCC"/>
+              </a:solidFill>
+              <a:highlight>
+                <a:schemeClr val="dk2"/>
+              </a:highlight>
+              <a:latin typeface="Consolas"/>
+              <a:ea typeface="Consolas"/>
+              <a:cs typeface="Consolas"/>
+              <a:sym typeface="Consolas"/>
+            </a:endParaRPr>
+          </a:p>
+          <a:p>
+            <a:pPr indent="0" lvl="0" marL="0" rtl="0" algn="l">
+              <a:lnSpc>
+                <a:spcPct val="115000"/>
+              </a:lnSpc>
+              <a:spcBef>
+                <a:spcPts val="0"/>
+              </a:spcBef>
+              <a:spcAft>
+                <a:spcPts val="0"/>
+              </a:spcAft>
+              <a:buNone/>
+            </a:pPr>
+            <a:r>
+              <a:rPr lang="en" sz="1000">
+                <a:highlight>
+                  <a:schemeClr val="dk2"/>
+                </a:highlight>
+                <a:latin typeface="Consolas"/>
+                <a:ea typeface="Consolas"/>
+                <a:cs typeface="Consolas"/>
+                <a:sym typeface="Consolas"/>
+              </a:rPr>
+              <a:t>  "cost": 50, "recharge": 7.5,</a:t>
+            </a:r>
+            <a:endParaRPr sz="1000">
+              <a:solidFill>
+                <a:srgbClr val="CCCCCC"/>
+              </a:solidFill>
+              <a:highlight>
+                <a:schemeClr val="dk2"/>
+              </a:highlight>
+              <a:latin typeface="Consolas"/>
+              <a:ea typeface="Consolas"/>
+              <a:cs typeface="Consolas"/>
+              <a:sym typeface="Consolas"/>
+            </a:endParaRPr>
+          </a:p>
+          <a:p>
+            <a:pPr indent="0" lvl="0" marL="0" rtl="0" algn="l">
+              <a:lnSpc>
+                <a:spcPct val="115000"/>
+              </a:lnSpc>
+              <a:spcBef>
+                <a:spcPts val="0"/>
+              </a:spcBef>
+              <a:spcAft>
+                <a:spcPts val="0"/>
+              </a:spcAft>
+              <a:buNone/>
+            </a:pPr>
+            <a:r>
+              <a:rPr lang="en" sz="1000">
+                <a:highlight>
+                  <a:schemeClr val="dk2"/>
+                </a:highlight>
+                <a:latin typeface="Consolas"/>
+                <a:ea typeface="Consolas"/>
+                <a:cs typeface="Consolas"/>
+                <a:sym typeface="Consolas"/>
+              </a:rPr>
+              <a:t>  "health": 6,</a:t>
+            </a:r>
+            <a:endParaRPr sz="1000">
+              <a:solidFill>
+                <a:srgbClr val="CCCCCC"/>
+              </a:solidFill>
+              <a:highlight>
+                <a:schemeClr val="dk2"/>
+              </a:highlight>
+              <a:latin typeface="Consolas"/>
+              <a:ea typeface="Consolas"/>
+              <a:cs typeface="Consolas"/>
+              <a:sym typeface="Consolas"/>
+            </a:endParaRPr>
+          </a:p>
+          <a:p>
+            <a:pPr indent="0" lvl="0" marL="0" rtl="0" algn="l">
+              <a:lnSpc>
+                <a:spcPct val="115000"/>
+              </a:lnSpc>
+              <a:spcBef>
+                <a:spcPts val="0"/>
+              </a:spcBef>
+              <a:spcAft>
+                <a:spcPts val="0"/>
+              </a:spcAft>
+              <a:buNone/>
+            </a:pPr>
+            <a:r>
+              <a:rPr lang="en" sz="1000">
+                <a:highlight>
+                  <a:schemeClr val="dk2"/>
+                </a:highlight>
+                <a:latin typeface="Consolas"/>
+                <a:ea typeface="Consolas"/>
+                <a:cs typeface="Consolas"/>
+                <a:sym typeface="Consolas"/>
+              </a:rPr>
+              <a:t>  "sunProducer": {</a:t>
+            </a:r>
+            <a:endParaRPr sz="1000">
+              <a:solidFill>
+                <a:srgbClr val="CCCCCC"/>
+              </a:solidFill>
+              <a:highlight>
+                <a:schemeClr val="dk2"/>
+              </a:highlight>
+              <a:latin typeface="Consolas"/>
+              <a:ea typeface="Consolas"/>
+              <a:cs typeface="Consolas"/>
+              <a:sym typeface="Consolas"/>
+            </a:endParaRPr>
+          </a:p>
+          <a:p>
+            <a:pPr indent="0" lvl="0" marL="0" rtl="0" algn="l">
+              <a:lnSpc>
+                <a:spcPct val="115000"/>
+              </a:lnSpc>
+              <a:spcBef>
+                <a:spcPts val="0"/>
+              </a:spcBef>
+              <a:spcAft>
+                <a:spcPts val="0"/>
+              </a:spcAft>
+              <a:buNone/>
+            </a:pPr>
+            <a:r>
+              <a:rPr lang="en" sz="1000">
+                <a:highlight>
+                  <a:schemeClr val="dk2"/>
+                </a:highlight>
+                <a:latin typeface="Consolas"/>
+                <a:ea typeface="Consolas"/>
+                <a:cs typeface="Consolas"/>
+                <a:sym typeface="Consolas"/>
+              </a:rPr>
+              <a:t>    "interval": 12, "amount": 25 } },</a:t>
+            </a:r>
+            <a:endParaRPr sz="1000">
+              <a:solidFill>
+                <a:srgbClr val="CCCCCC"/>
+              </a:solidFill>
+              <a:highlight>
+                <a:schemeClr val="dk2"/>
+              </a:highlight>
+              <a:latin typeface="Consolas"/>
+              <a:ea typeface="Consolas"/>
+              <a:cs typeface="Consolas"/>
+              <a:sym typeface="Consolas"/>
+            </a:endParaRPr>
+          </a:p>
+          <a:p>
+            <a:pPr indent="0" lvl="0" marL="0" rtl="0" algn="l">
+              <a:lnSpc>
+                <a:spcPct val="115000"/>
+              </a:lnSpc>
+              <a:spcBef>
+                <a:spcPts val="0"/>
+              </a:spcBef>
+              <a:spcAft>
+                <a:spcPts val="0"/>
+              </a:spcAft>
+              <a:buNone/>
+            </a:pPr>
+            <a:r>
+              <a:rPr lang="en" sz="1000">
+                <a:highlight>
+                  <a:schemeClr val="dk2"/>
+                </a:highlight>
+                <a:latin typeface="Consolas"/>
+                <a:ea typeface="Consolas"/>
+                <a:cs typeface="Consolas"/>
+                <a:sym typeface="Consolas"/>
+              </a:rPr>
+              <a:t>{ "name": "Repeater",</a:t>
+            </a:r>
+            <a:endParaRPr sz="1000">
+              <a:solidFill>
+                <a:srgbClr val="CCCCCC"/>
+              </a:solidFill>
+              <a:highlight>
+                <a:schemeClr val="dk2"/>
+              </a:highlight>
+              <a:latin typeface="Consolas"/>
+              <a:ea typeface="Consolas"/>
+              <a:cs typeface="Consolas"/>
+              <a:sym typeface="Consolas"/>
+            </a:endParaRPr>
+          </a:p>
+          <a:p>
+            <a:pPr indent="0" lvl="0" marL="0" rtl="0" algn="l">
+              <a:lnSpc>
+                <a:spcPct val="115000"/>
+              </a:lnSpc>
+              <a:spcBef>
+                <a:spcPts val="0"/>
+              </a:spcBef>
+              <a:spcAft>
+                <a:spcPts val="0"/>
+              </a:spcAft>
+              <a:buNone/>
+            </a:pPr>
+            <a:r>
+              <a:rPr lang="en" sz="1000">
+                <a:highlight>
+                  <a:schemeClr val="dk2"/>
+                </a:highlight>
+                <a:latin typeface="Consolas"/>
+                <a:ea typeface="Consolas"/>
+                <a:cs typeface="Consolas"/>
+                <a:sym typeface="Consolas"/>
+              </a:rPr>
+              <a:t>  "sprite": "repeater",</a:t>
+            </a:r>
+            <a:endParaRPr sz="1000">
+              <a:solidFill>
+                <a:srgbClr val="CCCCCC"/>
+              </a:solidFill>
+              <a:highlight>
+                <a:schemeClr val="dk2"/>
+              </a:highlight>
+              <a:latin typeface="Consolas"/>
+              <a:ea typeface="Consolas"/>
+              <a:cs typeface="Consolas"/>
+              <a:sym typeface="Consolas"/>
+            </a:endParaRPr>
+          </a:p>
+          <a:p>
+            <a:pPr indent="0" lvl="0" marL="0" rtl="0" algn="l">
+              <a:lnSpc>
+                <a:spcPct val="115000"/>
+              </a:lnSpc>
+              <a:spcBef>
+                <a:spcPts val="0"/>
+              </a:spcBef>
+              <a:spcAft>
+                <a:spcPts val="0"/>
+              </a:spcAft>
+              <a:buNone/>
+            </a:pPr>
+            <a:r>
+              <a:rPr lang="en" sz="1000">
+                <a:highlight>
+                  <a:schemeClr val="dk2"/>
+                </a:highlight>
+                <a:latin typeface="Consolas"/>
+                <a:ea typeface="Consolas"/>
+                <a:cs typeface="Consolas"/>
+                <a:sym typeface="Consolas"/>
+              </a:rPr>
+              <a:t>  "cost": 200, "recharge": 7.5,</a:t>
+            </a:r>
+            <a:endParaRPr sz="1000">
+              <a:solidFill>
+                <a:srgbClr val="CCCCCC"/>
+              </a:solidFill>
+              <a:highlight>
+                <a:schemeClr val="dk2"/>
+              </a:highlight>
+              <a:latin typeface="Consolas"/>
+              <a:ea typeface="Consolas"/>
+              <a:cs typeface="Consolas"/>
+              <a:sym typeface="Consolas"/>
+            </a:endParaRPr>
+          </a:p>
+          <a:p>
+            <a:pPr indent="0" lvl="0" marL="0" rtl="0" algn="l">
+              <a:lnSpc>
+                <a:spcPct val="115000"/>
+              </a:lnSpc>
+              <a:spcBef>
+                <a:spcPts val="0"/>
+              </a:spcBef>
+              <a:spcAft>
+                <a:spcPts val="0"/>
+              </a:spcAft>
+              <a:buNone/>
+            </a:pPr>
+            <a:r>
+              <a:rPr lang="en" sz="1000">
+                <a:highlight>
+                  <a:schemeClr val="dk2"/>
+                </a:highlight>
+                <a:latin typeface="Consolas"/>
+                <a:ea typeface="Consolas"/>
+                <a:cs typeface="Consolas"/>
+                <a:sym typeface="Consolas"/>
+              </a:rPr>
+              <a:t>  "health": 6,</a:t>
+            </a:r>
+            <a:endParaRPr sz="1000">
+              <a:solidFill>
+                <a:srgbClr val="CCCCCC"/>
+              </a:solidFill>
+              <a:highlight>
+                <a:schemeClr val="dk2"/>
+              </a:highlight>
+              <a:latin typeface="Consolas"/>
+              <a:ea typeface="Consolas"/>
+              <a:cs typeface="Consolas"/>
+              <a:sym typeface="Consolas"/>
+            </a:endParaRPr>
+          </a:p>
+          <a:p>
+            <a:pPr indent="0" lvl="0" marL="0" rtl="0" algn="l">
+              <a:lnSpc>
+                <a:spcPct val="115000"/>
+              </a:lnSpc>
+              <a:spcBef>
+                <a:spcPts val="0"/>
+              </a:spcBef>
+              <a:spcAft>
+                <a:spcPts val="0"/>
+              </a:spcAft>
+              <a:buNone/>
+            </a:pPr>
+            <a:r>
+              <a:rPr lang="en" sz="1000">
+                <a:highlight>
+                  <a:schemeClr val="dk2"/>
+                </a:highlight>
+                <a:latin typeface="Consolas"/>
+                <a:ea typeface="Consolas"/>
+                <a:cs typeface="Consolas"/>
+                <a:sym typeface="Consolas"/>
+              </a:rPr>
+              <a:t>  "shooter": {</a:t>
+            </a:r>
+            <a:endParaRPr sz="1000">
+              <a:solidFill>
+                <a:srgbClr val="CCCCCC"/>
+              </a:solidFill>
+              <a:highlight>
+                <a:schemeClr val="dk2"/>
+              </a:highlight>
+              <a:latin typeface="Consolas"/>
+              <a:ea typeface="Consolas"/>
+              <a:cs typeface="Consolas"/>
+              <a:sym typeface="Consolas"/>
+            </a:endParaRPr>
+          </a:p>
+          <a:p>
+            <a:pPr indent="0" lvl="0" marL="0" rtl="0" algn="l">
+              <a:lnSpc>
+                <a:spcPct val="115000"/>
+              </a:lnSpc>
+              <a:spcBef>
+                <a:spcPts val="0"/>
+              </a:spcBef>
+              <a:spcAft>
+                <a:spcPts val="0"/>
+              </a:spcAft>
+              <a:buNone/>
+            </a:pPr>
+            <a:r>
+              <a:rPr lang="en" sz="1000">
+                <a:highlight>
+                  <a:schemeClr val="dk2"/>
+                </a:highlight>
+                <a:latin typeface="Consolas"/>
+                <a:ea typeface="Consolas"/>
+                <a:cs typeface="Consolas"/>
+                <a:sym typeface="Consolas"/>
+              </a:rPr>
+              <a:t>    "interval": 1.4, "shots": 2,</a:t>
+            </a:r>
+            <a:endParaRPr sz="1000">
+              <a:solidFill>
+                <a:srgbClr val="CCCCCC"/>
+              </a:solidFill>
+              <a:highlight>
+                <a:schemeClr val="dk2"/>
+              </a:highlight>
+              <a:latin typeface="Consolas"/>
+              <a:ea typeface="Consolas"/>
+              <a:cs typeface="Consolas"/>
+              <a:sym typeface="Consolas"/>
+            </a:endParaRPr>
+          </a:p>
+          <a:p>
+            <a:pPr indent="0" lvl="0" marL="0" rtl="0" algn="l">
+              <a:lnSpc>
+                <a:spcPct val="115000"/>
+              </a:lnSpc>
+              <a:spcBef>
+                <a:spcPts val="0"/>
+              </a:spcBef>
+              <a:spcAft>
+                <a:spcPts val="0"/>
+              </a:spcAft>
+              <a:buNone/>
+            </a:pPr>
+            <a:r>
+              <a:rPr lang="en" sz="1000">
+                <a:highlight>
+                  <a:schemeClr val="dk2"/>
+                </a:highlight>
+                <a:latin typeface="Consolas"/>
+                <a:ea typeface="Consolas"/>
+                <a:cs typeface="Consolas"/>
+                <a:sym typeface="Consolas"/>
+              </a:rPr>
+              <a:t>    "damage": 1 } }</a:t>
+            </a:r>
+            <a:endParaRPr sz="1000">
+              <a:solidFill>
+                <a:srgbClr val="CCCCCC"/>
+              </a:solidFill>
+              <a:highlight>
+                <a:schemeClr val="dk2"/>
+              </a:highlight>
+              <a:latin typeface="Consolas"/>
+              <a:ea typeface="Consolas"/>
+              <a:cs typeface="Consolas"/>
+              <a:sym typeface="Consolas"/>
+            </a:endParaRPr>
           </a:p>
         </p:txBody>
       </p:sp>
@@ -11928,6 +11812,802 @@
 </file>
 
 <file path=ppt/slides/slide21.xml><?xml version="1.0" encoding="utf-8"?>
+<p:sld xmlns:a="http://schemas.openxmlformats.org/drawingml/2006/main" xmlns:p="http://schemas.openxmlformats.org/presentationml/2006/main" xmlns:r="http://schemas.openxmlformats.org/officeDocument/2006/relationships">
+  <p:cSld>
+    <p:spTree>
+      <p:nvGrpSpPr>
+        <p:cNvPr id="1" name=""/>
+        <p:cNvGrpSpPr/>
+        <p:nvPr/>
+      </p:nvGrpSpPr>
+      <p:grpSpPr/>
+      <p:sp>
+        <p:nvSpPr>
+          <p:cNvPr id="140" name="Google Shape;140;p23"/>
+          <p:cNvSpPr txBox="1"/>
+          <p:nvPr>
+            <p:ph type="title"/>
+          </p:nvPr>
+        </p:nvSpPr>
+        <p:spPr>
+          <a:xfrm>
+            <a:off x="311700" y="195615"/>
+            <a:ext cx="8520600" cy="572700"/>
+          </a:xfrm>
+          <a:prstGeom prst="rect">
+            <a:avLst/>
+          </a:prstGeom>
+        </p:spPr>
+        <p:txBody>
+          <a:bodyPr anchorCtr="0" anchor="t" bIns="91425" lIns="91425" spcFirstLastPara="1" rIns="91425" wrap="square" tIns="91425">
+            <a:normAutofit fontScale="90000"/>
+          </a:bodyPr>
+          <a:lstStyle/>
+          <a:p>
+            <a:pPr indent="0" lvl="0" marL="0" rtl="0" algn="l">
+              <a:spcBef>
+                <a:spcPts val="0"/>
+              </a:spcBef>
+              <a:spcAft>
+                <a:spcPts val="0"/>
+              </a:spcAft>
+              <a:buNone/>
+            </a:pPr>
+            <a:r>
+              <a:rPr lang="en"/>
+              <a:t>The Type Creates Instances</a:t>
+            </a:r>
+            <a:endParaRPr/>
+          </a:p>
+        </p:txBody>
+      </p:sp>
+      <p:sp>
+        <p:nvSpPr>
+          <p:cNvPr id="293" name="Google Shape;293;p45"/>
+          <p:cNvSpPr txBox="1"/>
+          <p:nvPr>
+            <p:ph type="title"/>
+          </p:nvPr>
+        </p:nvSpPr>
+        <p:spPr>
+          <a:xfrm>
+            <a:off x="311700" y="1152475"/>
+            <a:ext cx="3700000" cy="3500000"/>
+          </a:xfrm>
+          <a:prstGeom prst="rect">
+            <a:avLst/>
+          </a:prstGeom>
+        </p:spPr>
+        <p:txBody>
+          <a:bodyPr anchorCtr="0" anchor="t" bIns="91425" lIns="91425" spcFirstLastPara="1" rIns="91425" wrap="square" tIns="91425">
+            <a:normAutofit fontScale="90000"/>
+          </a:bodyPr>
+          <a:lstStyle/>
+          <a:p>
+            <a:pPr indent="-330200" lvl="0" marL="457200" rtl="0" algn="l">
+              <a:buClr>
+                <a:srgbClr val="DEE2E6"/>
+              </a:buClr>
+              <a:spcBef>
+                <a:spcPts val="0"/>
+              </a:spcBef>
+              <a:spcAft>
+                <a:spcPts val="0"/>
+              </a:spcAft>
+              <a:buSzPts val="1600"/>
+              <a:buChar char="●"/>
+            </a:pPr>
+            <a:r>
+              <a:rPr lang="en" sz="1600">
+                <a:solidFill>
+                  <a:srgbClr val="DEE2E6"/>
+                </a:solidFill>
+              </a:rPr>
+              <a:t>A component for each kind of data</a:t>
+            </a:r>
+            <a:endParaRPr/>
+          </a:p>
+          <a:p>
+            <a:pPr indent="-330200" lvl="0" marL="457200" rtl="0" algn="l">
+              <a:buClr>
+                <a:srgbClr val="DEE2E6"/>
+              </a:buClr>
+              <a:spcBef>
+                <a:spcPts val="0"/>
+              </a:spcBef>
+              <a:spcAft>
+                <a:spcPts val="0"/>
+              </a:spcAft>
+              <a:buSzPts val="1600"/>
+              <a:buChar char="●"/>
+            </a:pPr>
+            <a:r>
+              <a:rPr lang="en" sz="1600">
+                <a:solidFill>
+                  <a:srgbClr val="DEE2E6"/>
+                </a:solidFill>
+              </a:rPr>
+              <a:t>New kinds from old components: data only</a:t>
+            </a:r>
+            <a:endParaRPr/>
+          </a:p>
+          <a:p>
+            <a:pPr indent="-317500" lvl="1" marL="914400" rtl="0" algn="l">
+              <a:buClr>
+                <a:srgbClr val="6C757D"/>
+              </a:buClr>
+              <a:spcBef>
+                <a:spcPts val="0"/>
+              </a:spcBef>
+              <a:spcAft>
+                <a:spcPts val="0"/>
+              </a:spcAft>
+              <a:buSzPts val="1400"/>
+              <a:buChar char="○"/>
+            </a:pPr>
+            <a:r>
+              <a:rPr lang="en" sz="1400">
+                <a:solidFill>
+                  <a:srgbClr val="6C757D"/>
+                </a:solidFill>
+              </a:rPr>
+              <a:t>A Buckethead: a zombie type with armour</a:t>
+            </a:r>
+            <a:endParaRPr/>
+          </a:p>
+          <a:p>
+            <a:pPr indent="-330200" lvl="0" marL="457200" rtl="0" algn="l">
+              <a:buClr>
+                <a:srgbClr val="DEE2E6"/>
+              </a:buClr>
+              <a:spcBef>
+                <a:spcPts val="0"/>
+              </a:spcBef>
+              <a:spcAft>
+                <a:spcPts val="0"/>
+              </a:spcAft>
+              <a:buSzPts val="1600"/>
+              <a:buChar char="●"/>
+            </a:pPr>
+            <a:r>
+              <a:rPr lang="en" sz="1600">
+                <a:solidFill>
+                  <a:srgbClr val="DEE2E6"/>
+                </a:solidFill>
+              </a:rPr>
+              <a:t>A new ability: one component, and data</a:t>
+            </a:r>
+            <a:endParaRPr/>
+          </a:p>
+          <a:p>
+            <a:pPr indent="-317500" lvl="1" marL="914400" rtl="0" algn="l">
+              <a:buClr>
+                <a:srgbClr val="6C757D"/>
+              </a:buClr>
+              <a:spcBef>
+                <a:spcPts val="0"/>
+              </a:spcBef>
+              <a:spcAft>
+                <a:spcPts val="0"/>
+              </a:spcAft>
+              <a:buSzPts val="1400"/>
+              <a:buChar char="○"/>
+            </a:pPr>
+            <a:r>
+              <a:rPr lang="en" sz="1400">
+                <a:solidFill>
+                  <a:srgbClr val="6C757D"/>
+                </a:solidFill>
+              </a:rPr>
+              <a:t>The Cherry Bomb: Explode</a:t>
+            </a:r>
+            <a:endParaRPr/>
+          </a:p>
+        </p:txBody>
+      </p:sp>
+      <p:sp>
+        <p:nvSpPr>
+          <p:cNvPr id="141" name="Google Shape;141;p23"/>
+          <p:cNvSpPr txBox="1"/>
+          <p:nvPr>
+            <p:ph idx="2" type="body"/>
+          </p:nvPr>
+        </p:nvSpPr>
+        <p:spPr>
+          <a:xfrm>
+            <a:off x="4150000" y="1152475"/>
+            <a:ext cx="4750000" cy="3600000"/>
+          </a:xfrm>
+          <a:prstGeom prst="rect">
+            <a:avLst/>
+          </a:prstGeom>
+        </p:spPr>
+        <p:txBody>
+          <a:bodyPr anchorCtr="0" anchor="t" bIns="91425" lIns="91425" spcFirstLastPara="1" rIns="91425" wrap="square" tIns="91425">
+            <a:noAutofit/>
+          </a:bodyPr>
+          <a:lstStyle/>
+          <a:p>
+            <a:pPr indent="0" lvl="0" marL="0" rtl="0" algn="l">
+              <a:lnSpc>
+                <a:spcPct val="115000"/>
+              </a:lnSpc>
+              <a:spcBef>
+                <a:spcPts val="0"/>
+              </a:spcBef>
+              <a:spcAft>
+                <a:spcPts val="0"/>
+              </a:spcAft>
+              <a:buNone/>
+            </a:pPr>
+            <a:r>
+              <a:rPr lang="en" sz="1000">
+                <a:highlight>
+                  <a:schemeClr val="dk2"/>
+                </a:highlight>
+                <a:latin typeface="Consolas"/>
+                <a:ea typeface="Consolas"/>
+                <a:cs typeface="Consolas"/>
+                <a:sym typeface="Consolas"/>
+              </a:rPr>
+              <a:t>public Entity Create(World world)</a:t>
+            </a:r>
+            <a:endParaRPr sz="1000">
+              <a:solidFill>
+                <a:srgbClr val="CCCCCC"/>
+              </a:solidFill>
+              <a:highlight>
+                <a:schemeClr val="dk2"/>
+              </a:highlight>
+              <a:latin typeface="Consolas"/>
+              <a:ea typeface="Consolas"/>
+              <a:cs typeface="Consolas"/>
+              <a:sym typeface="Consolas"/>
+            </a:endParaRPr>
+          </a:p>
+          <a:p>
+            <a:pPr indent="0" lvl="0" marL="0" rtl="0" algn="l">
+              <a:lnSpc>
+                <a:spcPct val="115000"/>
+              </a:lnSpc>
+              <a:spcBef>
+                <a:spcPts val="0"/>
+              </a:spcBef>
+              <a:spcAft>
+                <a:spcPts val="0"/>
+              </a:spcAft>
+              <a:buNone/>
+            </a:pPr>
+            <a:r>
+              <a:rPr lang="en" sz="1000">
+                <a:highlight>
+                  <a:schemeClr val="dk2"/>
+                </a:highlight>
+                <a:latin typeface="Consolas"/>
+                <a:ea typeface="Consolas"/>
+                <a:cs typeface="Consolas"/>
+                <a:sym typeface="Consolas"/>
+              </a:rPr>
+              <a:t>{</a:t>
+            </a:r>
+            <a:endParaRPr sz="1000">
+              <a:solidFill>
+                <a:srgbClr val="CCCCCC"/>
+              </a:solidFill>
+              <a:highlight>
+                <a:schemeClr val="dk2"/>
+              </a:highlight>
+              <a:latin typeface="Consolas"/>
+              <a:ea typeface="Consolas"/>
+              <a:cs typeface="Consolas"/>
+              <a:sym typeface="Consolas"/>
+            </a:endParaRPr>
+          </a:p>
+          <a:p>
+            <a:pPr indent="0" lvl="0" marL="0" rtl="0" algn="l">
+              <a:lnSpc>
+                <a:spcPct val="115000"/>
+              </a:lnSpc>
+              <a:spcBef>
+                <a:spcPts val="0"/>
+              </a:spcBef>
+              <a:spcAft>
+                <a:spcPts val="0"/>
+              </a:spcAft>
+              <a:buNone/>
+            </a:pPr>
+            <a:r>
+              <a:rPr lang="en" sz="1000">
+                <a:highlight>
+                  <a:schemeClr val="dk2"/>
+                </a:highlight>
+                <a:latin typeface="Consolas"/>
+                <a:ea typeface="Consolas"/>
+                <a:cs typeface="Consolas"/>
+                <a:sym typeface="Consolas"/>
+              </a:rPr>
+              <a:t>    var plant = new Entity(world)</a:t>
+            </a:r>
+            <a:endParaRPr sz="1000">
+              <a:solidFill>
+                <a:srgbClr val="CCCCCC"/>
+              </a:solidFill>
+              <a:highlight>
+                <a:schemeClr val="dk2"/>
+              </a:highlight>
+              <a:latin typeface="Consolas"/>
+              <a:ea typeface="Consolas"/>
+              <a:cs typeface="Consolas"/>
+              <a:sym typeface="Consolas"/>
+            </a:endParaRPr>
+          </a:p>
+          <a:p>
+            <a:pPr indent="0" lvl="0" marL="0" rtl="0" algn="l">
+              <a:lnSpc>
+                <a:spcPct val="115000"/>
+              </a:lnSpc>
+              <a:spcBef>
+                <a:spcPts val="0"/>
+              </a:spcBef>
+              <a:spcAft>
+                <a:spcPts val="0"/>
+              </a:spcAft>
+              <a:buNone/>
+            </a:pPr>
+            <a:r>
+              <a:rPr lang="en" sz="1000">
+                <a:highlight>
+                  <a:schemeClr val="dk2"/>
+                </a:highlight>
+                <a:latin typeface="Consolas"/>
+                <a:ea typeface="Consolas"/>
+                <a:cs typeface="Consolas"/>
+                <a:sym typeface="Consolas"/>
+              </a:rPr>
+              <a:t>        .With(new SpriteRenderer(</a:t>
+            </a:r>
+            <a:endParaRPr sz="1000">
+              <a:solidFill>
+                <a:srgbClr val="CCCCCC"/>
+              </a:solidFill>
+              <a:highlight>
+                <a:schemeClr val="dk2"/>
+              </a:highlight>
+              <a:latin typeface="Consolas"/>
+              <a:ea typeface="Consolas"/>
+              <a:cs typeface="Consolas"/>
+              <a:sym typeface="Consolas"/>
+            </a:endParaRPr>
+          </a:p>
+          <a:p>
+            <a:pPr indent="0" lvl="0" marL="0" rtl="0" algn="l">
+              <a:lnSpc>
+                <a:spcPct val="115000"/>
+              </a:lnSpc>
+              <a:spcBef>
+                <a:spcPts val="0"/>
+              </a:spcBef>
+              <a:spcAft>
+                <a:spcPts val="0"/>
+              </a:spcAft>
+              <a:buNone/>
+            </a:pPr>
+            <a:r>
+              <a:rPr lang="en" sz="1000">
+                <a:highlight>
+                  <a:schemeClr val="dk2"/>
+                </a:highlight>
+                <a:latin typeface="Consolas"/>
+                <a:ea typeface="Consolas"/>
+                <a:cs typeface="Consolas"/>
+                <a:sym typeface="Consolas"/>
+              </a:rPr>
+              <a:t>            world.Atlas.GetRegion(Sprite)))</a:t>
+            </a:r>
+            <a:endParaRPr sz="1000">
+              <a:solidFill>
+                <a:srgbClr val="CCCCCC"/>
+              </a:solidFill>
+              <a:highlight>
+                <a:schemeClr val="dk2"/>
+              </a:highlight>
+              <a:latin typeface="Consolas"/>
+              <a:ea typeface="Consolas"/>
+              <a:cs typeface="Consolas"/>
+              <a:sym typeface="Consolas"/>
+            </a:endParaRPr>
+          </a:p>
+          <a:p>
+            <a:pPr indent="0" lvl="0" marL="0" rtl="0" algn="l">
+              <a:lnSpc>
+                <a:spcPct val="115000"/>
+              </a:lnSpc>
+              <a:spcBef>
+                <a:spcPts val="0"/>
+              </a:spcBef>
+              <a:spcAft>
+                <a:spcPts val="0"/>
+              </a:spcAft>
+              <a:buNone/>
+            </a:pPr>
+            <a:r>
+              <a:rPr lang="en" sz="1000">
+                <a:highlight>
+                  <a:schemeClr val="dk2"/>
+                </a:highlight>
+                <a:latin typeface="Consolas"/>
+                <a:ea typeface="Consolas"/>
+                <a:cs typeface="Consolas"/>
+                <a:sym typeface="Consolas"/>
+              </a:rPr>
+              <a:t>        .With(new Health(Health));</a:t>
+            </a:r>
+            <a:endParaRPr sz="1000">
+              <a:solidFill>
+                <a:srgbClr val="CCCCCC"/>
+              </a:solidFill>
+              <a:highlight>
+                <a:schemeClr val="dk2"/>
+              </a:highlight>
+              <a:latin typeface="Consolas"/>
+              <a:ea typeface="Consolas"/>
+              <a:cs typeface="Consolas"/>
+              <a:sym typeface="Consolas"/>
+            </a:endParaRPr>
+          </a:p>
+          <a:p>
+            <a:pPr indent="0" lvl="0" marL="0" rtl="0" algn="l">
+              <a:lnSpc>
+                <a:spcPct val="115000"/>
+              </a:lnSpc>
+              <a:spcBef>
+                <a:spcPts val="0"/>
+              </a:spcBef>
+              <a:spcAft>
+                <a:spcPts val="0"/>
+              </a:spcAft>
+              <a:buNone/>
+            </a:pPr>
+            <a:r>
+              <a:rPr lang="en" sz="1000">
+                <a:highlight>
+                  <a:schemeClr val="dk2"/>
+                </a:highlight>
+                <a:latin typeface="Consolas"/>
+                <a:ea typeface="Consolas"/>
+                <a:cs typeface="Consolas"/>
+                <a:sym typeface="Consolas"/>
+              </a:rPr>
+              <a:t/>
+            </a:r>
+            <a:endParaRPr sz="1000">
+              <a:solidFill>
+                <a:srgbClr val="CCCCCC"/>
+              </a:solidFill>
+              <a:highlight>
+                <a:schemeClr val="dk2"/>
+              </a:highlight>
+              <a:latin typeface="Consolas"/>
+              <a:ea typeface="Consolas"/>
+              <a:cs typeface="Consolas"/>
+              <a:sym typeface="Consolas"/>
+            </a:endParaRPr>
+          </a:p>
+          <a:p>
+            <a:pPr indent="0" lvl="0" marL="0" rtl="0" algn="l">
+              <a:lnSpc>
+                <a:spcPct val="115000"/>
+              </a:lnSpc>
+              <a:spcBef>
+                <a:spcPts val="0"/>
+              </a:spcBef>
+              <a:spcAft>
+                <a:spcPts val="0"/>
+              </a:spcAft>
+              <a:buNone/>
+            </a:pPr>
+            <a:r>
+              <a:rPr lang="en" sz="1000">
+                <a:highlight>
+                  <a:schemeClr val="dk2"/>
+                </a:highlight>
+                <a:latin typeface="Consolas"/>
+                <a:ea typeface="Consolas"/>
+                <a:cs typeface="Consolas"/>
+                <a:sym typeface="Consolas"/>
+              </a:rPr>
+              <a:t>    if (Shooter != null)</a:t>
+            </a:r>
+            <a:endParaRPr sz="1000">
+              <a:solidFill>
+                <a:srgbClr val="CCCCCC"/>
+              </a:solidFill>
+              <a:highlight>
+                <a:schemeClr val="dk2"/>
+              </a:highlight>
+              <a:latin typeface="Consolas"/>
+              <a:ea typeface="Consolas"/>
+              <a:cs typeface="Consolas"/>
+              <a:sym typeface="Consolas"/>
+            </a:endParaRPr>
+          </a:p>
+          <a:p>
+            <a:pPr indent="0" lvl="0" marL="0" rtl="0" algn="l">
+              <a:lnSpc>
+                <a:spcPct val="115000"/>
+              </a:lnSpc>
+              <a:spcBef>
+                <a:spcPts val="0"/>
+              </a:spcBef>
+              <a:spcAft>
+                <a:spcPts val="0"/>
+              </a:spcAft>
+              <a:buNone/>
+            </a:pPr>
+            <a:r>
+              <a:rPr lang="en" sz="1000">
+                <a:highlight>
+                  <a:schemeClr val="dk2"/>
+                </a:highlight>
+                <a:latin typeface="Consolas"/>
+                <a:ea typeface="Consolas"/>
+                <a:cs typeface="Consolas"/>
+                <a:sym typeface="Consolas"/>
+              </a:rPr>
+              <a:t>        plant.Add(new Shooter(Shooter.Interval,</a:t>
+            </a:r>
+            <a:endParaRPr sz="1000">
+              <a:solidFill>
+                <a:srgbClr val="CCCCCC"/>
+              </a:solidFill>
+              <a:highlight>
+                <a:schemeClr val="dk2"/>
+              </a:highlight>
+              <a:latin typeface="Consolas"/>
+              <a:ea typeface="Consolas"/>
+              <a:cs typeface="Consolas"/>
+              <a:sym typeface="Consolas"/>
+            </a:endParaRPr>
+          </a:p>
+          <a:p>
+            <a:pPr indent="0" lvl="0" marL="0" rtl="0" algn="l">
+              <a:lnSpc>
+                <a:spcPct val="115000"/>
+              </a:lnSpc>
+              <a:spcBef>
+                <a:spcPts val="0"/>
+              </a:spcBef>
+              <a:spcAft>
+                <a:spcPts val="0"/>
+              </a:spcAft>
+              <a:buNone/>
+            </a:pPr>
+            <a:r>
+              <a:rPr lang="en" sz="1000">
+                <a:highlight>
+                  <a:schemeClr val="dk2"/>
+                </a:highlight>
+                <a:latin typeface="Consolas"/>
+                <a:ea typeface="Consolas"/>
+                <a:cs typeface="Consolas"/>
+                <a:sym typeface="Consolas"/>
+              </a:rPr>
+              <a:t>            Shooter.Shots, Shooter.Damage));</a:t>
+            </a:r>
+            <a:endParaRPr sz="1000">
+              <a:solidFill>
+                <a:srgbClr val="CCCCCC"/>
+              </a:solidFill>
+              <a:highlight>
+                <a:schemeClr val="dk2"/>
+              </a:highlight>
+              <a:latin typeface="Consolas"/>
+              <a:ea typeface="Consolas"/>
+              <a:cs typeface="Consolas"/>
+              <a:sym typeface="Consolas"/>
+            </a:endParaRPr>
+          </a:p>
+          <a:p>
+            <a:pPr indent="0" lvl="0" marL="0" rtl="0" algn="l">
+              <a:lnSpc>
+                <a:spcPct val="115000"/>
+              </a:lnSpc>
+              <a:spcBef>
+                <a:spcPts val="0"/>
+              </a:spcBef>
+              <a:spcAft>
+                <a:spcPts val="0"/>
+              </a:spcAft>
+              <a:buNone/>
+            </a:pPr>
+            <a:r>
+              <a:rPr lang="en" sz="1000">
+                <a:highlight>
+                  <a:schemeClr val="dk2"/>
+                </a:highlight>
+                <a:latin typeface="Consolas"/>
+                <a:ea typeface="Consolas"/>
+                <a:cs typeface="Consolas"/>
+                <a:sym typeface="Consolas"/>
+              </a:rPr>
+              <a:t>    if (SunProducer != null)</a:t>
+            </a:r>
+            <a:endParaRPr sz="1000">
+              <a:solidFill>
+                <a:srgbClr val="CCCCCC"/>
+              </a:solidFill>
+              <a:highlight>
+                <a:schemeClr val="dk2"/>
+              </a:highlight>
+              <a:latin typeface="Consolas"/>
+              <a:ea typeface="Consolas"/>
+              <a:cs typeface="Consolas"/>
+              <a:sym typeface="Consolas"/>
+            </a:endParaRPr>
+          </a:p>
+          <a:p>
+            <a:pPr indent="0" lvl="0" marL="0" rtl="0" algn="l">
+              <a:lnSpc>
+                <a:spcPct val="115000"/>
+              </a:lnSpc>
+              <a:spcBef>
+                <a:spcPts val="0"/>
+              </a:spcBef>
+              <a:spcAft>
+                <a:spcPts val="0"/>
+              </a:spcAft>
+              <a:buNone/>
+            </a:pPr>
+            <a:r>
+              <a:rPr lang="en" sz="1000">
+                <a:highlight>
+                  <a:schemeClr val="dk2"/>
+                </a:highlight>
+                <a:latin typeface="Consolas"/>
+                <a:ea typeface="Consolas"/>
+                <a:cs typeface="Consolas"/>
+                <a:sym typeface="Consolas"/>
+              </a:rPr>
+              <a:t>        plant.Add(new SunProducer(</a:t>
+            </a:r>
+            <a:endParaRPr sz="1000">
+              <a:solidFill>
+                <a:srgbClr val="CCCCCC"/>
+              </a:solidFill>
+              <a:highlight>
+                <a:schemeClr val="dk2"/>
+              </a:highlight>
+              <a:latin typeface="Consolas"/>
+              <a:ea typeface="Consolas"/>
+              <a:cs typeface="Consolas"/>
+              <a:sym typeface="Consolas"/>
+            </a:endParaRPr>
+          </a:p>
+          <a:p>
+            <a:pPr indent="0" lvl="0" marL="0" rtl="0" algn="l">
+              <a:lnSpc>
+                <a:spcPct val="115000"/>
+              </a:lnSpc>
+              <a:spcBef>
+                <a:spcPts val="0"/>
+              </a:spcBef>
+              <a:spcAft>
+                <a:spcPts val="0"/>
+              </a:spcAft>
+              <a:buNone/>
+            </a:pPr>
+            <a:r>
+              <a:rPr lang="en" sz="1000">
+                <a:highlight>
+                  <a:schemeClr val="dk2"/>
+                </a:highlight>
+                <a:latin typeface="Consolas"/>
+                <a:ea typeface="Consolas"/>
+                <a:cs typeface="Consolas"/>
+                <a:sym typeface="Consolas"/>
+              </a:rPr>
+              <a:t>            SunProducer.Interval, SunProducer.Amount));</a:t>
+            </a:r>
+            <a:endParaRPr sz="1000">
+              <a:solidFill>
+                <a:srgbClr val="CCCCCC"/>
+              </a:solidFill>
+              <a:highlight>
+                <a:schemeClr val="dk2"/>
+              </a:highlight>
+              <a:latin typeface="Consolas"/>
+              <a:ea typeface="Consolas"/>
+              <a:cs typeface="Consolas"/>
+              <a:sym typeface="Consolas"/>
+            </a:endParaRPr>
+          </a:p>
+          <a:p>
+            <a:pPr indent="0" lvl="0" marL="0" rtl="0" algn="l">
+              <a:lnSpc>
+                <a:spcPct val="115000"/>
+              </a:lnSpc>
+              <a:spcBef>
+                <a:spcPts val="0"/>
+              </a:spcBef>
+              <a:spcAft>
+                <a:spcPts val="0"/>
+              </a:spcAft>
+              <a:buNone/>
+            </a:pPr>
+            <a:r>
+              <a:rPr lang="en" sz="1000">
+                <a:highlight>
+                  <a:schemeClr val="dk2"/>
+                </a:highlight>
+                <a:latin typeface="Consolas"/>
+                <a:ea typeface="Consolas"/>
+                <a:cs typeface="Consolas"/>
+                <a:sym typeface="Consolas"/>
+              </a:rPr>
+              <a:t>    return plant;</a:t>
+            </a:r>
+            <a:endParaRPr sz="1000">
+              <a:solidFill>
+                <a:srgbClr val="CCCCCC"/>
+              </a:solidFill>
+              <a:highlight>
+                <a:schemeClr val="dk2"/>
+              </a:highlight>
+              <a:latin typeface="Consolas"/>
+              <a:ea typeface="Consolas"/>
+              <a:cs typeface="Consolas"/>
+              <a:sym typeface="Consolas"/>
+            </a:endParaRPr>
+          </a:p>
+          <a:p>
+            <a:pPr indent="0" lvl="0" marL="0" rtl="0" algn="l">
+              <a:lnSpc>
+                <a:spcPct val="115000"/>
+              </a:lnSpc>
+              <a:spcBef>
+                <a:spcPts val="0"/>
+              </a:spcBef>
+              <a:spcAft>
+                <a:spcPts val="0"/>
+              </a:spcAft>
+              <a:buNone/>
+            </a:pPr>
+            <a:r>
+              <a:rPr lang="en" sz="1000">
+                <a:highlight>
+                  <a:schemeClr val="dk2"/>
+                </a:highlight>
+                <a:latin typeface="Consolas"/>
+                <a:ea typeface="Consolas"/>
+                <a:cs typeface="Consolas"/>
+                <a:sym typeface="Consolas"/>
+              </a:rPr>
+              <a:t>}</a:t>
+            </a:r>
+            <a:endParaRPr sz="1000">
+              <a:solidFill>
+                <a:srgbClr val="CCCCCC"/>
+              </a:solidFill>
+              <a:highlight>
+                <a:schemeClr val="dk2"/>
+              </a:highlight>
+              <a:latin typeface="Consolas"/>
+              <a:ea typeface="Consolas"/>
+              <a:cs typeface="Consolas"/>
+              <a:sym typeface="Consolas"/>
+            </a:endParaRPr>
+          </a:p>
+        </p:txBody>
+      </p:sp>
+    </p:spTree>
+  </p:cSld>
+  <p:clrMapOvr>
+    <a:masterClrMapping/>
+  </p:clrMapOvr>
+</p:sld>
+</file>
+
+<file path=ppt/slides/slide22.xml><?xml version="1.0" encoding="utf-8"?>
 <p:sld xmlns:a="http://schemas.openxmlformats.org/drawingml/2006/main" xmlns:p="http://schemas.openxmlformats.org/presentationml/2006/main" xmlns:r="http://schemas.openxmlformats.org/officeDocument/2006/relationships">
   <p:cSld>
     <p:spTree>
@@ -11975,6 +12655,589 @@
                   <a:schemeClr val="accent5"/>
                 </a:solidFill>
               </a:rPr>
+              <a:t>Prototype vs. Type Object</a:t>
+            </a:r>
+            <a:endParaRPr>
+              <a:solidFill>
+                <a:schemeClr val="accent5"/>
+              </a:solidFill>
+            </a:endParaRPr>
+          </a:p>
+        </p:txBody>
+      </p:sp>
+      <p:sp>
+        <p:nvSpPr>
+          <p:cNvPr id="294" name="Google Shape;294;p45"/>
+          <p:cNvSpPr txBox="1"/>
+          <p:nvPr>
+            <p:ph idx="1" type="body"/>
+          </p:nvPr>
+        </p:nvSpPr>
+        <p:spPr>
+          <a:xfrm>
+            <a:off x="311700" y="885950"/>
+            <a:ext cx="8520600" cy="521208"/>
+          </a:xfrm>
+          <a:prstGeom prst="rect">
+            <a:avLst/>
+          </a:prstGeom>
+        </p:spPr>
+        <p:txBody>
+          <a:bodyPr anchorCtr="0" anchor="t" bIns="91425" lIns="91425" spcFirstLastPara="1" rIns="91425" wrap="square" tIns="91425">
+            <a:normAutofit/>
+          </a:bodyPr>
+          <a:lstStyle/>
+          <a:p>
+            <a:pPr indent="-330200" lvl="0" marL="457200" rtl="0" algn="l">
+              <a:spcBef>
+                <a:spcPts val="0"/>
+              </a:spcBef>
+              <a:spcAft>
+                <a:spcPts val="0"/>
+              </a:spcAft>
+              <a:buSzPts val="1600"/>
+              <a:buChar char="●"/>
+            </a:pPr>
+            <a:r>
+              <a:rPr lang="en"/>
+              <a:t>Two ways to make many things of one kind.</a:t>
+            </a:r>
+            <a:endParaRPr/>
+          </a:p>
+        </p:txBody>
+      </p:sp>
+      <p:sp>
+        <p:nvSpPr>
+          <p:cNvPr id="295" name="Rounded Rectangle 294"/>
+          <p:cNvSpPr/>
+          <p:nvPr/>
+        </p:nvSpPr>
+        <p:spPr>
+          <a:xfrm>
+            <a:off x="548640" y="1417320"/>
+            <a:ext cx="3749039" cy="1463040"/>
+          </a:xfrm>
+          <a:prstGeom prst="roundRect">
+            <a:avLst>
+              <a:gd name="adj" fmla="val 12000"/>
+            </a:avLst>
+          </a:prstGeom>
+          <a:solidFill>
+            <a:srgbClr val="2E3338"/>
+          </a:solidFill>
+          <a:ln>
+            <a:noFill/>
+          </a:ln>
+          <a:effectLst/>
+        </p:spPr>
+        <p:style>
+          <a:lnRef idx="1">
+            <a:schemeClr val="accent1"/>
+          </a:lnRef>
+          <a:fillRef idx="3">
+            <a:schemeClr val="accent1"/>
+          </a:fillRef>
+          <a:effectRef idx="2">
+            <a:schemeClr val="accent1"/>
+          </a:effectRef>
+          <a:fontRef idx="minor">
+            <a:schemeClr val="lt1"/>
+          </a:fontRef>
+        </p:style>
+        <p:txBody>
+          <a:bodyPr rtlCol="0" anchor="ctr" wrap="square" lIns="73152" rIns="73152"/>
+          <a:lstStyle/>
+          <a:p>
+            <a:pPr algn="ctr"/>
+            <a:r>
+              <a:rPr sz="1500" b="1">
+                <a:solidFill>
+                  <a:srgbClr val="DEE2E6"/>
+                </a:solidFill>
+              </a:rPr>
+              <a:t>Prototype (Angry Birds)</a:t>
+            </a:r>
+          </a:p>
+          <a:p>
+            <a:pPr algn="ctr"/>
+            <a:r>
+              <a:rPr sz="1300" b="0">
+                <a:solidFill>
+                  <a:srgbClr val="9AA3AB"/>
+                </a:solidFill>
+              </a:rPr>
+              <a:t>copy a configured object;</a:t>
+            </a:r>
+          </a:p>
+          <a:p>
+            <a:pPr algn="ctr"/>
+            <a:r>
+              <a:rPr sz="1300" b="0">
+                <a:solidFill>
+                  <a:srgbClr val="9AA3AB"/>
+                </a:solidFill>
+              </a:rPr>
+              <a:t>shared data is copied into each clone</a:t>
+            </a:r>
+          </a:p>
+          <a:p>
+            <a:pPr algn="ctr"/>
+            <a:r>
+              <a:rPr sz="1300" b="0">
+                <a:solidFill>
+                  <a:srgbClr val="9AA3AB"/>
+                </a:solidFill>
+              </a:rPr>
+              <a:t>“more like this one”</a:t>
+            </a:r>
+          </a:p>
+        </p:txBody>
+      </p:sp>
+      <p:sp>
+        <p:nvSpPr>
+          <p:cNvPr id="296" name="Rounded Rectangle 295"/>
+          <p:cNvSpPr/>
+          <p:nvPr/>
+        </p:nvSpPr>
+        <p:spPr>
+          <a:xfrm>
+            <a:off x="4846320" y="1417320"/>
+            <a:ext cx="3749039" cy="1463040"/>
+          </a:xfrm>
+          <a:prstGeom prst="roundRect">
+            <a:avLst>
+              <a:gd name="adj" fmla="val 12000"/>
+            </a:avLst>
+          </a:prstGeom>
+          <a:solidFill>
+            <a:srgbClr val="2E3338"/>
+          </a:solidFill>
+          <a:ln w="25400">
+            <a:solidFill>
+              <a:srgbClr val="D45D35"/>
+            </a:solidFill>
+          </a:ln>
+          <a:effectLst/>
+        </p:spPr>
+        <p:style>
+          <a:lnRef idx="1">
+            <a:schemeClr val="accent1"/>
+          </a:lnRef>
+          <a:fillRef idx="3">
+            <a:schemeClr val="accent1"/>
+          </a:fillRef>
+          <a:effectRef idx="2">
+            <a:schemeClr val="accent1"/>
+          </a:effectRef>
+          <a:fontRef idx="minor">
+            <a:schemeClr val="lt1"/>
+          </a:fontRef>
+        </p:style>
+        <p:txBody>
+          <a:bodyPr rtlCol="0" anchor="ctr" wrap="square" lIns="73152" rIns="73152"/>
+          <a:lstStyle/>
+          <a:p>
+            <a:pPr algn="ctr"/>
+            <a:r>
+              <a:rPr sz="1500" b="1">
+                <a:solidFill>
+                  <a:srgbClr val="DEE2E6"/>
+                </a:solidFill>
+              </a:rPr>
+              <a:t>Type Object (here)</a:t>
+            </a:r>
+          </a:p>
+          <a:p>
+            <a:pPr algn="ctr"/>
+            <a:r>
+              <a:rPr sz="1300" b="0">
+                <a:solidFill>
+                  <a:srgbClr val="9AA3AB"/>
+                </a:solidFill>
+              </a:rPr>
+              <a:t>a type class creates instances;</a:t>
+            </a:r>
+          </a:p>
+          <a:p>
+            <a:pPr algn="ctr"/>
+            <a:r>
+              <a:rPr sz="1300" b="0">
+                <a:solidFill>
+                  <a:srgbClr val="9AA3AB"/>
+                </a:solidFill>
+              </a:rPr>
+              <a:t>shared data is kept once, in the type</a:t>
+            </a:r>
+          </a:p>
+          <a:p>
+            <a:pPr algn="ctr"/>
+            <a:r>
+              <a:rPr sz="1300" b="0">
+                <a:solidFill>
+                  <a:srgbClr val="9AA3AB"/>
+                </a:solidFill>
+              </a:rPr>
+              <a:t>kinds with their own data and rules</a:t>
+            </a:r>
+          </a:p>
+        </p:txBody>
+      </p:sp>
+      <p:sp>
+        <p:nvSpPr>
+          <p:cNvPr id="297" name="TextBox 296"/>
+          <p:cNvSpPr txBox="1"/>
+          <p:nvPr/>
+        </p:nvSpPr>
+        <p:spPr>
+          <a:xfrm>
+            <a:off x="457200" y="3154680"/>
+            <a:ext cx="8229600" cy="731520"/>
+          </a:xfrm>
+          <a:prstGeom prst="rect">
+            <a:avLst/>
+          </a:prstGeom>
+          <a:noFill/>
+        </p:spPr>
+        <p:txBody>
+          <a:bodyPr wrap="square">
+            <a:spAutoFit/>
+          </a:bodyPr>
+          <a:lstStyle/>
+          <a:p>
+            <a:pPr algn="ctr"/>
+            <a:r>
+              <a:rPr sz="1600" b="1" i="0">
+                <a:solidFill>
+                  <a:srgbClr val="DEE2E6"/>
+                </a:solidFill>
+              </a:rPr>
+              <a:t>A plant’s cost: in each plant, or in its type?</a:t>
+            </a:r>
+          </a:p>
+        </p:txBody>
+      </p:sp>
+    </p:spTree>
+  </p:cSld>
+  <p:clrMapOvr>
+    <a:masterClrMapping/>
+  </p:clrMapOvr>
+</p:sld>
+</file>
+
+<file path=ppt/slides/slide23.xml><?xml version="1.0" encoding="utf-8"?>
+<p:sld xmlns:a="http://schemas.openxmlformats.org/drawingml/2006/main" xmlns:p="http://schemas.openxmlformats.org/presentationml/2006/main" xmlns:r="http://schemas.openxmlformats.org/officeDocument/2006/relationships">
+  <p:cSld>
+    <p:spTree>
+      <p:nvGrpSpPr>
+        <p:cNvPr id="1" name=""/>
+        <p:cNvGrpSpPr/>
+        <p:nvPr/>
+      </p:nvGrpSpPr>
+      <p:grpSpPr/>
+      <p:sp>
+        <p:nvSpPr>
+          <p:cNvPr id="128" name="Google Shape;128;p21"/>
+          <p:cNvSpPr txBox="1"/>
+          <p:nvPr>
+            <p:ph type="title"/>
+          </p:nvPr>
+        </p:nvSpPr>
+        <p:spPr>
+          <a:xfrm>
+            <a:off x="311700" y="195615"/>
+            <a:ext cx="8520600" cy="572700"/>
+          </a:xfrm>
+          <a:prstGeom prst="rect">
+            <a:avLst/>
+          </a:prstGeom>
+        </p:spPr>
+        <p:txBody>
+          <a:bodyPr anchorCtr="0" anchor="t" bIns="91425" lIns="91425" spcFirstLastPara="1" rIns="91425" wrap="square" tIns="91425">
+            <a:normAutofit fontScale="90000"/>
+          </a:bodyPr>
+          <a:lstStyle/>
+          <a:p>
+            <a:pPr indent="0" lvl="0" marL="0" rtl="0" algn="l">
+              <a:spcBef>
+                <a:spcPts val="0"/>
+              </a:spcBef>
+              <a:spcAft>
+                <a:spcPts val="0"/>
+              </a:spcAft>
+              <a:buNone/>
+            </a:pPr>
+            <a:r>
+              <a:rPr lang="en">
+                <a:solidFill>
+                  <a:schemeClr val="accent5"/>
+                </a:solidFill>
+              </a:rPr>
+              <a:t>Type Object Implementation</a:t>
+            </a:r>
+            <a:endParaRPr>
+              <a:solidFill>
+                <a:schemeClr val="accent5"/>
+              </a:solidFill>
+            </a:endParaRPr>
+          </a:p>
+        </p:txBody>
+      </p:sp>
+      <p:sp>
+        <p:nvSpPr>
+          <p:cNvPr id="129" name="Google Shape;129;p21"/>
+          <p:cNvSpPr txBox="1"/>
+          <p:nvPr>
+            <p:ph idx="1" type="body"/>
+          </p:nvPr>
+        </p:nvSpPr>
+        <p:spPr>
+          <a:xfrm>
+            <a:off x="311700" y="885950"/>
+            <a:ext cx="8520600" cy="4023300"/>
+          </a:xfrm>
+          <a:prstGeom prst="rect">
+            <a:avLst/>
+          </a:prstGeom>
+        </p:spPr>
+        <p:txBody>
+          <a:bodyPr anchorCtr="0" anchor="ctr" bIns="91425" lIns="91425" spcFirstLastPara="1" rIns="91425" wrap="square" tIns="91425">
+            <a:normAutofit/>
+          </a:bodyPr>
+          <a:lstStyle/>
+          <a:p>
+            <a:pPr indent="0" lvl="0" marL="0" rtl="0" algn="ctr">
+              <a:spcBef>
+                <a:spcPts val="0"/>
+              </a:spcBef>
+              <a:spcAft>
+                <a:spcPts val="1200"/>
+              </a:spcAft>
+              <a:buNone/>
+            </a:pPr>
+            <a:r>
+              <a:rPr lang="en" sz="2900">
+                <a:latin typeface="VT323"/>
+                <a:ea typeface="VT323"/>
+                <a:cs typeface="VT323"/>
+                <a:sym typeface="VT323"/>
+              </a:rPr>
+              <a:t>DEMO!</a:t>
+            </a:r>
+            <a:endParaRPr/>
+          </a:p>
+          <a:p>
+            <a:pPr indent="0" lvl="0" marL="0" rtl="0" algn="ctr">
+              <a:spcBef>
+                <a:spcPts val="0"/>
+              </a:spcBef>
+              <a:spcAft>
+                <a:spcPts val="0"/>
+              </a:spcAft>
+              <a:buNone/>
+            </a:pPr>
+            <a:r>
+              <a:rPr lang="en" sz="1800"/>
+              <a:t>Pvz3: plant and zombie types from JSON</a:t>
+            </a:r>
+            <a:endParaRPr sz="1800"/>
+          </a:p>
+        </p:txBody>
+      </p:sp>
+    </p:spTree>
+  </p:cSld>
+  <p:clrMapOvr>
+    <a:masterClrMapping/>
+  </p:clrMapOvr>
+</p:sld>
+</file>
+
+<file path=ppt/slides/slide24.xml><?xml version="1.0" encoding="utf-8"?>
+<p:sld xmlns:a="http://schemas.openxmlformats.org/drawingml/2006/main" xmlns:p="http://schemas.openxmlformats.org/presentationml/2006/main" xmlns:r="http://schemas.openxmlformats.org/officeDocument/2006/relationships">
+  <p:cSld>
+    <p:spTree>
+      <p:nvGrpSpPr>
+        <p:cNvPr id="1" name=""/>
+        <p:cNvGrpSpPr/>
+        <p:nvPr/>
+      </p:nvGrpSpPr>
+      <p:grpSpPr/>
+      <p:sp>
+        <p:nvSpPr>
+          <p:cNvPr id="2" name="Title 1"/>
+          <p:cNvSpPr>
+            <a:spLocks noGrp="1"/>
+          </p:cNvSpPr>
+          <p:nvPr>
+            <p:ph type="title"/>
+          </p:nvPr>
+        </p:nvSpPr>
+        <p:spPr/>
+        <p:txBody>
+          <a:bodyPr/>
+          <a:lstStyle/>
+          <a:p>
+            <a:pPr indent="0" lvl="0" marL="0" rtl="0" algn="l">
+              <a:spcBef>
+                <a:spcPts val="0"/>
+              </a:spcBef>
+              <a:spcAft>
+                <a:spcPts val="0"/>
+              </a:spcAft>
+              <a:buNone/>
+            </a:pPr>
+            <a:r>
+              <a:rPr lang="en"/>
+              <a:t>Try It: Balance by Data</a:t>
+            </a:r>
+            <a:endParaRPr/>
+          </a:p>
+        </p:txBody>
+      </p:sp>
+      <p:sp>
+        <p:nvSpPr>
+          <p:cNvPr id="3" name="Text Placeholder 2"/>
+          <p:cNvSpPr>
+            <a:spLocks noGrp="1"/>
+          </p:cNvSpPr>
+          <p:nvPr>
+            <p:ph type="body" idx="1"/>
+          </p:nvPr>
+        </p:nvSpPr>
+        <p:spPr>
+          <a:xfrm>
+            <a:off x="311700" y="885950"/>
+            <a:ext cx="8520600" cy="1673352"/>
+          </a:xfrm>
+        </p:spPr>
+        <p:txBody>
+          <a:bodyPr/>
+          <a:lstStyle/>
+          <a:p>
+            <a:pPr indent="-330200" lvl="0" marL="457200" rtl="0" algn="l">
+              <a:spcBef>
+                <a:spcPts val="0"/>
+              </a:spcBef>
+              <a:spcAft>
+                <a:spcPts val="0"/>
+              </a:spcAft>
+              <a:buSzPts val="1600"/>
+              <a:buChar char="●"/>
+            </a:pPr>
+            <a:r>
+              <a:rPr lang="en"/>
+              <a:t>In plants.json:</a:t>
+            </a:r>
+            <a:endParaRPr/>
+          </a:p>
+          <a:p>
+            <a:pPr indent="-330200" lvl="0" marL="457200" rtl="0" algn="l">
+              <a:spcBef>
+                <a:spcPts val="0"/>
+              </a:spcBef>
+              <a:spcAft>
+                <a:spcPts val="0"/>
+              </a:spcAft>
+              <a:buSzPts val="1600"/>
+              <a:buChar char="●"/>
+            </a:pPr>
+            <a:r>
+              <a:rPr lang="en"/>
+              <a:t>A Wall-nut that costs 25 and takes twice the bites</a:t>
+            </a:r>
+            <a:endParaRPr/>
+          </a:p>
+          <a:p>
+            <a:pPr indent="-330200" lvl="0" marL="457200" rtl="0" algn="l">
+              <a:spcBef>
+                <a:spcPts val="0"/>
+              </a:spcBef>
+              <a:spcAft>
+                <a:spcPts val="0"/>
+              </a:spcAft>
+              <a:buSzPts val="1600"/>
+              <a:buChar char="●"/>
+            </a:pPr>
+            <a:r>
+              <a:rPr lang="en"/>
+              <a:t>A Sunflower that makes 50 sun</a:t>
+            </a:r>
+            <a:endParaRPr/>
+          </a:p>
+          <a:p>
+            <a:pPr indent="-330200" lvl="0" marL="457200" rtl="0" algn="l">
+              <a:spcBef>
+                <a:spcPts val="0"/>
+              </a:spcBef>
+              <a:spcAft>
+                <a:spcPts val="0"/>
+              </a:spcAft>
+              <a:buSzPts val="1600"/>
+              <a:buChar char="●"/>
+            </a:pPr>
+            <a:r>
+              <a:rPr lang="en"/>
+              <a:t>Did you compile anything?</a:t>
+            </a:r>
+            <a:endParaRPr/>
+          </a:p>
+        </p:txBody>
+      </p:sp>
+    </p:spTree>
+  </p:cSld>
+  <p:clrMapOvr>
+    <a:masterClrMapping/>
+  </p:clrMapOvr>
+</p:sld>
+</file>
+
+<file path=ppt/slides/slide25.xml><?xml version="1.0" encoding="utf-8"?>
+<p:sld xmlns:a="http://schemas.openxmlformats.org/drawingml/2006/main" xmlns:p="http://schemas.openxmlformats.org/presentationml/2006/main" xmlns:r="http://schemas.openxmlformats.org/officeDocument/2006/relationships">
+  <p:cSld>
+    <p:spTree>
+      <p:nvGrpSpPr>
+        <p:cNvPr id="1" name=""/>
+        <p:cNvGrpSpPr/>
+        <p:nvPr/>
+      </p:nvGrpSpPr>
+      <p:grpSpPr/>
+      <p:sp>
+        <p:nvSpPr>
+          <p:cNvPr id="293" name="Google Shape;293;p45"/>
+          <p:cNvSpPr txBox="1"/>
+          <p:nvPr>
+            <p:ph type="title"/>
+          </p:nvPr>
+        </p:nvSpPr>
+        <p:spPr>
+          <a:xfrm>
+            <a:off x="311700" y="195615"/>
+            <a:ext cx="8520600" cy="572700"/>
+          </a:xfrm>
+          <a:prstGeom prst="rect">
+            <a:avLst/>
+          </a:prstGeom>
+        </p:spPr>
+        <p:txBody>
+          <a:bodyPr anchorCtr="0" anchor="t" bIns="91425" lIns="91425" spcFirstLastPara="1" rIns="91425" wrap="square" tIns="91425">
+            <a:normAutofit fontScale="90000"/>
+          </a:bodyPr>
+          <a:lstStyle/>
+          <a:p>
+            <a:pPr indent="0" lvl="0" marL="0" rtl="0" algn="l">
+              <a:spcBef>
+                <a:spcPts val="0"/>
+              </a:spcBef>
+              <a:spcAft>
+                <a:spcPts val="0"/>
+              </a:spcAft>
+              <a:buNone/>
+            </a:pPr>
+            <a:r>
+              <a:rPr lang="en">
+                <a:solidFill>
+                  <a:schemeClr val="accent5"/>
+                </a:solidFill>
+              </a:rPr>
               <a:t>The Whole Game</a:t>
             </a:r>
             <a:endParaRPr>
@@ -12102,7 +13365,7 @@
 </p:sld>
 </file>
 
-<file path=ppt/slides/slide22.xml><?xml version="1.0" encoding="utf-8"?>
+<file path=ppt/slides/slide26.xml><?xml version="1.0" encoding="utf-8"?>
 <p:sld xmlns:a="http://schemas.openxmlformats.org/drawingml/2006/main" xmlns:r="http://schemas.openxmlformats.org/officeDocument/2006/relationships" xmlns:mc="http://schemas.openxmlformats.org/markup-compatibility/2006" xmlns:mv="urn:schemas-microsoft-com:mac:vml" xmlns:p="http://schemas.openxmlformats.org/presentationml/2006/main" xmlns:c="http://schemas.openxmlformats.org/drawingml/2006/chart" xmlns:dgm="http://schemas.openxmlformats.org/drawingml/2006/diagram" xmlns:o="urn:schemas-microsoft-com:office:office" xmlns:v="urn:schemas-microsoft-com:vml" xmlns:pvml="urn:schemas-microsoft-com:office:powerpoint" xmlns:com="http://schemas.openxmlformats.org/drawingml/2006/compatibility" xmlns:p14="http://schemas.microsoft.com/office/powerpoint/2010/main" xmlns:p15="http://schemas.microsoft.com/office/powerpoint/2012/main" xmlns:ahyp="http://schemas.microsoft.com/office/drawing/2018/hyperlinkcolor">
   <p:cSld>
     <p:spTree>
@@ -12236,7 +13499,7 @@
 </p:sld>
 </file>
 
-<file path=ppt/slides/slide23.xml><?xml version="1.0" encoding="utf-8"?>
+<file path=ppt/slides/slide27.xml><?xml version="1.0" encoding="utf-8"?>
 <p:sld xmlns:a="http://schemas.openxmlformats.org/drawingml/2006/main" xmlns:r="http://schemas.openxmlformats.org/officeDocument/2006/relationships" xmlns:mc="http://schemas.openxmlformats.org/markup-compatibility/2006" xmlns:mv="urn:schemas-microsoft-com:mac:vml" xmlns:p="http://schemas.openxmlformats.org/presentationml/2006/main" xmlns:c="http://schemas.openxmlformats.org/drawingml/2006/chart" xmlns:dgm="http://schemas.openxmlformats.org/drawingml/2006/diagram" xmlns:o="urn:schemas-microsoft-com:office:office" xmlns:v="urn:schemas-microsoft-com:vml" xmlns:pvml="urn:schemas-microsoft-com:office:powerpoint" xmlns:com="http://schemas.openxmlformats.org/drawingml/2006/compatibility" xmlns:p14="http://schemas.microsoft.com/office/powerpoint/2010/main" xmlns:p15="http://schemas.microsoft.com/office/powerpoint/2012/main" xmlns:ahyp="http://schemas.microsoft.com/office/drawing/2018/hyperlinkcolor">
   <p:cSld>
     <p:spTree>
@@ -13102,7 +14365,7 @@
 </p:sld>
 </file>
 
-<file path=ppt/slides/slide24.xml><?xml version="1.0" encoding="utf-8"?>
+<file path=ppt/slides/slide28.xml><?xml version="1.0" encoding="utf-8"?>
 <p:sld xmlns:a="http://schemas.openxmlformats.org/drawingml/2006/main" xmlns:r="http://schemas.openxmlformats.org/officeDocument/2006/relationships" xmlns:mc="http://schemas.openxmlformats.org/markup-compatibility/2006" xmlns:mv="urn:schemas-microsoft-com:mac:vml" xmlns:p="http://schemas.openxmlformats.org/presentationml/2006/main" xmlns:c="http://schemas.openxmlformats.org/drawingml/2006/chart" xmlns:dgm="http://schemas.openxmlformats.org/drawingml/2006/diagram" xmlns:o="urn:schemas-microsoft-com:office:office" xmlns:v="urn:schemas-microsoft-com:vml" xmlns:pvml="urn:schemas-microsoft-com:office:powerpoint" xmlns:com="http://schemas.openxmlformats.org/drawingml/2006/compatibility" xmlns:p14="http://schemas.microsoft.com/office/powerpoint/2010/main" xmlns:p15="http://schemas.microsoft.com/office/powerpoint/2012/main" xmlns:ahyp="http://schemas.microsoft.com/office/drawing/2018/hyperlinkcolor">
   <p:cSld>
     <p:spTree>
@@ -13934,7 +15197,7 @@
 </p:sld>
 </file>
 
-<file path=ppt/slides/slide25.xml><?xml version="1.0" encoding="utf-8"?>
+<file path=ppt/slides/slide29.xml><?xml version="1.0" encoding="utf-8"?>
 <p:sld xmlns:a="http://schemas.openxmlformats.org/drawingml/2006/main" xmlns:p="http://schemas.openxmlformats.org/presentationml/2006/main" xmlns:r="http://schemas.openxmlformats.org/officeDocument/2006/relationships">
   <p:cSld>
     <p:spTree>
@@ -14107,7 +15370,96 @@
 </p:sld>
 </file>
 
-<file path=ppt/slides/slide26.xml><?xml version="1.0" encoding="utf-8"?>
+<file path=ppt/slides/slide3.xml><?xml version="1.0" encoding="utf-8"?>
+<p:sld xmlns:a="http://schemas.openxmlformats.org/drawingml/2006/main" xmlns:r="http://schemas.openxmlformats.org/officeDocument/2006/relationships" xmlns:mc="http://schemas.openxmlformats.org/markup-compatibility/2006" xmlns:mv="urn:schemas-microsoft-com:mac:vml" xmlns:p="http://schemas.openxmlformats.org/presentationml/2006/main" xmlns:c="http://schemas.openxmlformats.org/drawingml/2006/chart" xmlns:dgm="http://schemas.openxmlformats.org/drawingml/2006/diagram" xmlns:o="urn:schemas-microsoft-com:office:office" xmlns:v="urn:schemas-microsoft-com:vml" xmlns:pvml="urn:schemas-microsoft-com:office:powerpoint" xmlns:com="http://schemas.openxmlformats.org/drawingml/2006/compatibility" xmlns:p14="http://schemas.microsoft.com/office/powerpoint/2010/main" xmlns:p15="http://schemas.microsoft.com/office/powerpoint/2012/main" xmlns:ahyp="http://schemas.microsoft.com/office/drawing/2018/hyperlinkcolor">
+  <p:cSld>
+    <p:spTree>
+      <p:nvGrpSpPr>
+        <p:cNvPr id="44" name="Shape 44"/>
+        <p:cNvGrpSpPr/>
+        <p:nvPr/>
+      </p:nvGrpSpPr>
+      <p:grpSpPr>
+        <a:xfrm>
+          <a:off x="0" y="0"/>
+          <a:ext cx="0" cy="0"/>
+          <a:chOff x="0" y="0"/>
+          <a:chExt cx="0" cy="0"/>
+        </a:xfrm>
+      </p:grpSpPr>
+      <p:sp>
+        <p:nvSpPr>
+          <p:cNvPr id="45" name="Google Shape;45;p10"/>
+          <p:cNvSpPr txBox="1"/>
+          <p:nvPr>
+            <p:ph type="title"/>
+          </p:nvPr>
+        </p:nvSpPr>
+        <p:spPr>
+          <a:xfrm>
+            <a:off x="311700" y="195615"/>
+            <a:ext cx="8520600" cy="572700"/>
+          </a:xfrm>
+          <a:prstGeom prst="rect">
+            <a:avLst/>
+          </a:prstGeom>
+        </p:spPr>
+        <p:txBody>
+          <a:bodyPr anchorCtr="0" anchor="t" bIns="91425" lIns="91425" spcFirstLastPara="1" rIns="91425" wrap="square" tIns="91425">
+            <a:normAutofit fontScale="90000"/>
+          </a:bodyPr>
+          <a:lstStyle/>
+          <a:p>
+            <a:pPr indent="0" lvl="0" marL="0" rtl="0" algn="l">
+              <a:spcBef>
+                <a:spcPts val="0"/>
+              </a:spcBef>
+              <a:spcAft>
+                <a:spcPts val="0"/>
+              </a:spcAft>
+              <a:buNone/>
+            </a:pPr>
+            <a:r>
+              <a:rPr lang="en"/>
+              <a:t>Today’s Goal</a:t>
+            </a:r>
+            <a:endParaRPr/>
+          </a:p>
+        </p:txBody>
+      </p:sp>
+      <p:pic>
+        <p:nvPicPr>
+          <p:cNvPr id="46" name="Picture 46" descr="pvz-play2.png"/>
+          <p:cNvPicPr>
+            <a:picLocks noChangeAspect="1"/>
+          </p:cNvPicPr>
+          <p:nvPr/>
+        </p:nvPicPr>
+        <p:blipFill>
+          <a:blip r:embed="rId4"/>
+          <a:stretch>
+            <a:fillRect/>
+          </a:stretch>
+        </p:blipFill>
+        <p:spPr>
+          <a:xfrm>
+            <a:off x="1677201" y="1531275"/>
+            <a:ext cx="5789598" cy="3256648"/>
+          </a:xfrm>
+          <a:prstGeom prst="rect">
+            <a:avLst/>
+          </a:prstGeom>
+        </p:spPr>
+      </p:pic>
+    </p:spTree>
+  </p:cSld>
+  <p:clrMapOvr>
+    <a:masterClrMapping/>
+  </p:clrMapOvr>
+</p:sld>
+</file>
+
+<file path=ppt/slides/slide30.xml><?xml version="1.0" encoding="utf-8"?>
 <p:sld xmlns:a="http://schemas.openxmlformats.org/drawingml/2006/main" xmlns:r="http://schemas.openxmlformats.org/officeDocument/2006/relationships" xmlns:mc="http://schemas.openxmlformats.org/markup-compatibility/2006" xmlns:mv="urn:schemas-microsoft-com:mac:vml" xmlns:p="http://schemas.openxmlformats.org/presentationml/2006/main" xmlns:c="http://schemas.openxmlformats.org/drawingml/2006/chart" xmlns:dgm="http://schemas.openxmlformats.org/drawingml/2006/diagram" xmlns:o="urn:schemas-microsoft-com:office:office" xmlns:v="urn:schemas-microsoft-com:vml" xmlns:pvml="urn:schemas-microsoft-com:office:powerpoint" xmlns:com="http://schemas.openxmlformats.org/drawingml/2006/compatibility" xmlns:p14="http://schemas.microsoft.com/office/powerpoint/2010/main" xmlns:p15="http://schemas.microsoft.com/office/powerpoint/2012/main" xmlns:ahyp="http://schemas.microsoft.com/office/drawing/2018/hyperlinkcolor">
   <p:cSld>
     <p:spTree>
@@ -14939,7 +16291,7 @@
 </p:sld>
 </file>
 
-<file path=ppt/slides/slide27.xml><?xml version="1.0" encoding="utf-8"?>
+<file path=ppt/slides/slide31.xml><?xml version="1.0" encoding="utf-8"?>
 <p:sld xmlns:a="http://schemas.openxmlformats.org/drawingml/2006/main" xmlns:r="http://schemas.openxmlformats.org/officeDocument/2006/relationships" xmlns:mc="http://schemas.openxmlformats.org/markup-compatibility/2006" xmlns:mv="urn:schemas-microsoft-com:mac:vml" xmlns:p="http://schemas.openxmlformats.org/presentationml/2006/main" xmlns:c="http://schemas.openxmlformats.org/drawingml/2006/chart" xmlns:dgm="http://schemas.openxmlformats.org/drawingml/2006/diagram" xmlns:o="urn:schemas-microsoft-com:office:office" xmlns:v="urn:schemas-microsoft-com:vml" xmlns:pvml="urn:schemas-microsoft-com:office:powerpoint" xmlns:com="http://schemas.openxmlformats.org/drawingml/2006/compatibility" xmlns:p14="http://schemas.microsoft.com/office/powerpoint/2010/main" xmlns:p15="http://schemas.microsoft.com/office/powerpoint/2012/main" xmlns:ahyp="http://schemas.microsoft.com/office/drawing/2018/hyperlinkcolor">
   <p:cSld>
     <p:spTree>
@@ -15105,95 +16457,6 @@
           </a:p>
         </p:txBody>
       </p:sp>
-    </p:spTree>
-  </p:cSld>
-  <p:clrMapOvr>
-    <a:masterClrMapping/>
-  </p:clrMapOvr>
-</p:sld>
-</file>
-
-<file path=ppt/slides/slide3.xml><?xml version="1.0" encoding="utf-8"?>
-<p:sld xmlns:a="http://schemas.openxmlformats.org/drawingml/2006/main" xmlns:r="http://schemas.openxmlformats.org/officeDocument/2006/relationships" xmlns:mc="http://schemas.openxmlformats.org/markup-compatibility/2006" xmlns:mv="urn:schemas-microsoft-com:mac:vml" xmlns:p="http://schemas.openxmlformats.org/presentationml/2006/main" xmlns:c="http://schemas.openxmlformats.org/drawingml/2006/chart" xmlns:dgm="http://schemas.openxmlformats.org/drawingml/2006/diagram" xmlns:o="urn:schemas-microsoft-com:office:office" xmlns:v="urn:schemas-microsoft-com:vml" xmlns:pvml="urn:schemas-microsoft-com:office:powerpoint" xmlns:com="http://schemas.openxmlformats.org/drawingml/2006/compatibility" xmlns:p14="http://schemas.microsoft.com/office/powerpoint/2010/main" xmlns:p15="http://schemas.microsoft.com/office/powerpoint/2012/main" xmlns:ahyp="http://schemas.microsoft.com/office/drawing/2018/hyperlinkcolor">
-  <p:cSld>
-    <p:spTree>
-      <p:nvGrpSpPr>
-        <p:cNvPr id="44" name="Shape 44"/>
-        <p:cNvGrpSpPr/>
-        <p:nvPr/>
-      </p:nvGrpSpPr>
-      <p:grpSpPr>
-        <a:xfrm>
-          <a:off x="0" y="0"/>
-          <a:ext cx="0" cy="0"/>
-          <a:chOff x="0" y="0"/>
-          <a:chExt cx="0" cy="0"/>
-        </a:xfrm>
-      </p:grpSpPr>
-      <p:sp>
-        <p:nvSpPr>
-          <p:cNvPr id="45" name="Google Shape;45;p10"/>
-          <p:cNvSpPr txBox="1"/>
-          <p:nvPr>
-            <p:ph type="title"/>
-          </p:nvPr>
-        </p:nvSpPr>
-        <p:spPr>
-          <a:xfrm>
-            <a:off x="311700" y="195615"/>
-            <a:ext cx="8520600" cy="572700"/>
-          </a:xfrm>
-          <a:prstGeom prst="rect">
-            <a:avLst/>
-          </a:prstGeom>
-        </p:spPr>
-        <p:txBody>
-          <a:bodyPr anchorCtr="0" anchor="t" bIns="91425" lIns="91425" spcFirstLastPara="1" rIns="91425" wrap="square" tIns="91425">
-            <a:normAutofit fontScale="90000"/>
-          </a:bodyPr>
-          <a:lstStyle/>
-          <a:p>
-            <a:pPr indent="0" lvl="0" marL="0" rtl="0" algn="l">
-              <a:spcBef>
-                <a:spcPts val="0"/>
-              </a:spcBef>
-              <a:spcAft>
-                <a:spcPts val="0"/>
-              </a:spcAft>
-              <a:buNone/>
-            </a:pPr>
-            <a:r>
-              <a:rPr lang="en"/>
-              <a:t>Today’s Goal</a:t>
-            </a:r>
-            <a:endParaRPr/>
-          </a:p>
-        </p:txBody>
-      </p:sp>
-      <p:pic>
-        <p:nvPicPr>
-          <p:cNvPr id="46" name="Picture 46" descr="pvz-play2.png"/>
-          <p:cNvPicPr>
-            <a:picLocks noChangeAspect="1"/>
-          </p:cNvPicPr>
-          <p:nvPr/>
-        </p:nvPicPr>
-        <p:blipFill>
-          <a:blip r:embed="rId4"/>
-          <a:stretch>
-            <a:fillRect/>
-          </a:stretch>
-        </p:blipFill>
-        <p:spPr>
-          <a:xfrm>
-            <a:off x="1677201" y="1531275"/>
-            <a:ext cx="5789598" cy="3256648"/>
-          </a:xfrm>
-          <a:prstGeom prst="rect">
-            <a:avLst/>
-          </a:prstGeom>
-        </p:spPr>
-      </p:pic>
     </p:spTree>
   </p:cSld>
   <p:clrMapOvr>
@@ -17306,25 +18569,17 @@
       <p:grpSpPr/>
       <p:sp>
         <p:nvSpPr>
-          <p:cNvPr id="293" name="Google Shape;293;p45"/>
-          <p:cNvSpPr txBox="1"/>
+          <p:cNvPr id="2" name="Title 1"/>
+          <p:cNvSpPr>
+            <a:spLocks noGrp="1"/>
+          </p:cNvSpPr>
           <p:nvPr>
             <p:ph type="title"/>
           </p:nvPr>
         </p:nvSpPr>
-        <p:spPr>
-          <a:xfrm>
-            <a:off x="311700" y="195615"/>
-            <a:ext cx="8520600" cy="572700"/>
-          </a:xfrm>
-          <a:prstGeom prst="rect">
-            <a:avLst/>
-          </a:prstGeom>
-        </p:spPr>
+        <p:spPr/>
         <p:txBody>
-          <a:bodyPr anchorCtr="0" anchor="t" bIns="91425" lIns="91425" spcFirstLastPara="1" rIns="91425" wrap="square" tIns="91425">
-            <a:normAutofit fontScale="90000"/>
-          </a:bodyPr>
+          <a:bodyPr/>
           <a:lstStyle/>
           <a:p>
             <a:pPr indent="0" lvl="0" marL="0" rtl="0" algn="l">
@@ -17337,42 +18592,31 @@
               <a:buNone/>
             </a:pPr>
             <a:r>
-              <a:rPr lang="en">
-                <a:solidFill>
-                  <a:schemeClr val="accent5"/>
-                </a:solidFill>
-              </a:rPr>
-              <a:t>Plants and Zombies With Inheritance</a:t>
-            </a:r>
-            <a:endParaRPr>
-              <a:solidFill>
-                <a:schemeClr val="accent5"/>
-              </a:solidFill>
-            </a:endParaRPr>
+              <a:rPr lang="en"/>
+              <a:t>Try It: Where Is the Mouse?</a:t>
+            </a:r>
+            <a:endParaRPr/>
           </a:p>
         </p:txBody>
       </p:sp>
       <p:sp>
         <p:nvSpPr>
-          <p:cNvPr id="294" name="Google Shape;294;p45"/>
-          <p:cNvSpPr txBox="1"/>
+          <p:cNvPr id="3" name="Text Placeholder 2"/>
+          <p:cNvSpPr>
+            <a:spLocks noGrp="1"/>
+          </p:cNvSpPr>
           <p:nvPr>
-            <p:ph idx="1" type="body"/>
+            <p:ph type="body" idx="1"/>
           </p:nvPr>
         </p:nvSpPr>
         <p:spPr>
           <a:xfrm>
             <a:off x="311700" y="885950"/>
-            <a:ext cx="8520600" cy="521208"/>
+            <a:ext cx="8520600" cy="1289304"/>
           </a:xfrm>
-          <a:prstGeom prst="rect">
-            <a:avLst/>
-          </a:prstGeom>
         </p:spPr>
         <p:txBody>
-          <a:bodyPr anchorCtr="0" anchor="t" bIns="91425" lIns="91425" spcFirstLastPara="1" rIns="91425" wrap="square" tIns="91425">
-            <a:normAutofit/>
-          </a:bodyPr>
+          <a:bodyPr/>
           <a:lstStyle/>
           <a:p>
             <a:pPr indent="-330200" lvl="0" marL="457200" rtl="0" algn="l">
@@ -17387,529 +18631,43 @@
             </a:pPr>
             <a:r>
               <a:rPr lang="en"/>
-              <a:t>A class per kind of thing. It works.</a:t>
+              <a:t>In Pvz0:</a:t>
             </a:r>
             <a:endParaRPr/>
           </a:p>
-        </p:txBody>
-      </p:sp>
-      <p:sp>
-        <p:nvSpPr>
-          <p:cNvPr id="295" name="Rounded Rectangle 294"/>
-          <p:cNvSpPr/>
-          <p:nvPr/>
-        </p:nvSpPr>
-        <p:spPr>
-          <a:xfrm>
-            <a:off x="1463040" y="1371600"/>
-            <a:ext cx="2011680" cy="502920"/>
-          </a:xfrm>
-          <a:prstGeom prst="roundRect">
-            <a:avLst>
-              <a:gd name="adj" fmla="val 12000"/>
-            </a:avLst>
-          </a:prstGeom>
-          <a:solidFill>
-            <a:srgbClr val="2E3338"/>
-          </a:solidFill>
-          <a:ln>
-            <a:noFill/>
-          </a:ln>
-          <a:effectLst/>
-        </p:spPr>
-        <p:style>
-          <a:lnRef idx="1">
-            <a:schemeClr val="accent1"/>
-          </a:lnRef>
-          <a:fillRef idx="3">
-            <a:schemeClr val="accent1"/>
-          </a:fillRef>
-          <a:effectRef idx="2">
-            <a:schemeClr val="accent1"/>
-          </a:effectRef>
-          <a:fontRef idx="minor">
-            <a:schemeClr val="lt1"/>
-          </a:fontRef>
-        </p:style>
-        <p:txBody>
-          <a:bodyPr rtlCol="0" anchor="ctr" wrap="square" lIns="73152" rIns="73152"/>
-          <a:lstStyle/>
-          <a:p>
-            <a:pPr algn="ctr"/>
-            <a:r>
-              <a:rPr sz="1500" b="1">
-                <a:solidFill>
-                  <a:srgbClr val="DEE2E6"/>
-                </a:solidFill>
-              </a:rPr>
-              <a:t>Plant</a:t>
-            </a:r>
-          </a:p>
-        </p:txBody>
-      </p:sp>
-      <p:sp>
-        <p:nvSpPr>
-          <p:cNvPr id="296" name="Rounded Rectangle 295"/>
-          <p:cNvSpPr/>
-          <p:nvPr/>
-        </p:nvSpPr>
-        <p:spPr>
-          <a:xfrm>
-            <a:off x="365760" y="2286000"/>
-            <a:ext cx="1325880" cy="502920"/>
-          </a:xfrm>
-          <a:prstGeom prst="roundRect">
-            <a:avLst>
-              <a:gd name="adj" fmla="val 12000"/>
-            </a:avLst>
-          </a:prstGeom>
-          <a:solidFill>
-            <a:srgbClr val="2E3338"/>
-          </a:solidFill>
-          <a:ln>
-            <a:noFill/>
-          </a:ln>
-          <a:effectLst/>
-        </p:spPr>
-        <p:style>
-          <a:lnRef idx="1">
-            <a:schemeClr val="accent1"/>
-          </a:lnRef>
-          <a:fillRef idx="3">
-            <a:schemeClr val="accent1"/>
-          </a:fillRef>
-          <a:effectRef idx="2">
-            <a:schemeClr val="accent1"/>
-          </a:effectRef>
-          <a:fontRef idx="minor">
-            <a:schemeClr val="lt1"/>
-          </a:fontRef>
-        </p:style>
-        <p:txBody>
-          <a:bodyPr rtlCol="0" anchor="ctr" wrap="square" lIns="73152" rIns="73152"/>
-          <a:lstStyle/>
-          <a:p>
-            <a:pPr algn="ctr"/>
-            <a:r>
-              <a:rPr sz="1300" b="1">
-                <a:solidFill>
-                  <a:srgbClr val="DEE2E6"/>
-                </a:solidFill>
-              </a:rPr>
-              <a:t>Sunflower</a:t>
-            </a:r>
-          </a:p>
-        </p:txBody>
-      </p:sp>
-      <p:cxnSp>
-        <p:nvCxnSpPr>
-          <p:cNvPr id="297" name="Connector 296"/>
-          <p:cNvCxnSpPr/>
-          <p:nvPr/>
-        </p:nvCxnSpPr>
-        <p:spPr>
-          <a:xfrm flipV="1">
-            <a:off x="1024128" y="1892807"/>
-            <a:ext cx="1444752" cy="374905"/>
-          </a:xfrm>
-          <a:prstGeom prst="line">
-            <a:avLst/>
-          </a:prstGeom>
-          <a:ln w="25400">
-            <a:solidFill>
-              <a:srgbClr val="9AA3AB"/>
-            </a:solidFill>
-            <a:tailEnd type="triangle"/>
-          </a:ln>
-        </p:spPr>
-        <p:style>
-          <a:lnRef idx="2">
-            <a:schemeClr val="accent1"/>
-          </a:lnRef>
-          <a:fillRef idx="0">
-            <a:schemeClr val="accent1"/>
-          </a:fillRef>
-          <a:effectRef idx="1">
-            <a:schemeClr val="accent1"/>
-          </a:effectRef>
-          <a:fontRef idx="minor">
-            <a:schemeClr val="tx1"/>
-          </a:fontRef>
-        </p:style>
-      </p:cxnSp>
-      <p:sp>
-        <p:nvSpPr>
-          <p:cNvPr id="298" name="Rounded Rectangle 297"/>
-          <p:cNvSpPr/>
-          <p:nvPr/>
-        </p:nvSpPr>
-        <p:spPr>
-          <a:xfrm>
-            <a:off x="1828800" y="2286000"/>
-            <a:ext cx="1325880" cy="502920"/>
-          </a:xfrm>
-          <a:prstGeom prst="roundRect">
-            <a:avLst>
-              <a:gd name="adj" fmla="val 12000"/>
-            </a:avLst>
-          </a:prstGeom>
-          <a:solidFill>
-            <a:srgbClr val="2E3338"/>
-          </a:solidFill>
-          <a:ln>
-            <a:noFill/>
-          </a:ln>
-          <a:effectLst/>
-        </p:spPr>
-        <p:style>
-          <a:lnRef idx="1">
-            <a:schemeClr val="accent1"/>
-          </a:lnRef>
-          <a:fillRef idx="3">
-            <a:schemeClr val="accent1"/>
-          </a:fillRef>
-          <a:effectRef idx="2">
-            <a:schemeClr val="accent1"/>
-          </a:effectRef>
-          <a:fontRef idx="minor">
-            <a:schemeClr val="lt1"/>
-          </a:fontRef>
-        </p:style>
-        <p:txBody>
-          <a:bodyPr rtlCol="0" anchor="ctr" wrap="square" lIns="73152" rIns="73152"/>
-          <a:lstStyle/>
-          <a:p>
-            <a:pPr algn="ctr"/>
-            <a:r>
-              <a:rPr sz="1300" b="1">
-                <a:solidFill>
-                  <a:srgbClr val="DEE2E6"/>
-                </a:solidFill>
-              </a:rPr>
-              <a:t>Peashooter</a:t>
-            </a:r>
-          </a:p>
-        </p:txBody>
-      </p:sp>
-      <p:cxnSp>
-        <p:nvCxnSpPr>
-          <p:cNvPr id="299" name="Connector 298"/>
-          <p:cNvCxnSpPr/>
-          <p:nvPr/>
-        </p:nvCxnSpPr>
-        <p:spPr>
-          <a:xfrm flipH="1" flipV="1">
-            <a:off x="2468880" y="1892807"/>
-            <a:ext cx="18288" cy="374905"/>
-          </a:xfrm>
-          <a:prstGeom prst="line">
-            <a:avLst/>
-          </a:prstGeom>
-          <a:ln w="25400">
-            <a:solidFill>
-              <a:srgbClr val="9AA3AB"/>
-            </a:solidFill>
-            <a:tailEnd type="triangle"/>
-          </a:ln>
-        </p:spPr>
-        <p:style>
-          <a:lnRef idx="2">
-            <a:schemeClr val="accent1"/>
-          </a:lnRef>
-          <a:fillRef idx="0">
-            <a:schemeClr val="accent1"/>
-          </a:fillRef>
-          <a:effectRef idx="1">
-            <a:schemeClr val="accent1"/>
-          </a:effectRef>
-          <a:fontRef idx="minor">
-            <a:schemeClr val="tx1"/>
-          </a:fontRef>
-        </p:style>
-      </p:cxnSp>
-      <p:sp>
-        <p:nvSpPr>
-          <p:cNvPr id="300" name="Rounded Rectangle 299"/>
-          <p:cNvSpPr/>
-          <p:nvPr/>
-        </p:nvSpPr>
-        <p:spPr>
-          <a:xfrm>
-            <a:off x="3291840" y="2286000"/>
-            <a:ext cx="1325880" cy="502920"/>
-          </a:xfrm>
-          <a:prstGeom prst="roundRect">
-            <a:avLst>
-              <a:gd name="adj" fmla="val 12000"/>
-            </a:avLst>
-          </a:prstGeom>
-          <a:solidFill>
-            <a:srgbClr val="2E3338"/>
-          </a:solidFill>
-          <a:ln>
-            <a:noFill/>
-          </a:ln>
-          <a:effectLst/>
-        </p:spPr>
-        <p:style>
-          <a:lnRef idx="1">
-            <a:schemeClr val="accent1"/>
-          </a:lnRef>
-          <a:fillRef idx="3">
-            <a:schemeClr val="accent1"/>
-          </a:fillRef>
-          <a:effectRef idx="2">
-            <a:schemeClr val="accent1"/>
-          </a:effectRef>
-          <a:fontRef idx="minor">
-            <a:schemeClr val="lt1"/>
-          </a:fontRef>
-        </p:style>
-        <p:txBody>
-          <a:bodyPr rtlCol="0" anchor="ctr" wrap="square" lIns="73152" rIns="73152"/>
-          <a:lstStyle/>
-          <a:p>
-            <a:pPr algn="ctr"/>
-            <a:r>
-              <a:rPr sz="1300" b="1">
-                <a:solidFill>
-                  <a:srgbClr val="DEE2E6"/>
-                </a:solidFill>
-              </a:rPr>
-              <a:t>WallNut</a:t>
-            </a:r>
-          </a:p>
-        </p:txBody>
-      </p:sp>
-      <p:cxnSp>
-        <p:nvCxnSpPr>
-          <p:cNvPr id="301" name="Connector 300"/>
-          <p:cNvCxnSpPr/>
-          <p:nvPr/>
-        </p:nvCxnSpPr>
-        <p:spPr>
-          <a:xfrm flipH="1" flipV="1">
-            <a:off x="2468880" y="1892807"/>
-            <a:ext cx="1481328" cy="374905"/>
-          </a:xfrm>
-          <a:prstGeom prst="line">
-            <a:avLst/>
-          </a:prstGeom>
-          <a:ln w="25400">
-            <a:solidFill>
-              <a:srgbClr val="9AA3AB"/>
-            </a:solidFill>
-            <a:tailEnd type="triangle"/>
-          </a:ln>
-        </p:spPr>
-        <p:style>
-          <a:lnRef idx="2">
-            <a:schemeClr val="accent1"/>
-          </a:lnRef>
-          <a:fillRef idx="0">
-            <a:schemeClr val="accent1"/>
-          </a:fillRef>
-          <a:effectRef idx="1">
-            <a:schemeClr val="accent1"/>
-          </a:effectRef>
-          <a:fontRef idx="minor">
-            <a:schemeClr val="tx1"/>
-          </a:fontRef>
-        </p:style>
-      </p:cxnSp>
-      <p:sp>
-        <p:nvSpPr>
-          <p:cNvPr id="302" name="Rounded Rectangle 301"/>
-          <p:cNvSpPr/>
-          <p:nvPr/>
-        </p:nvSpPr>
-        <p:spPr>
-          <a:xfrm>
-            <a:off x="4846320" y="1371600"/>
-            <a:ext cx="1371600" cy="502920"/>
-          </a:xfrm>
-          <a:prstGeom prst="roundRect">
-            <a:avLst>
-              <a:gd name="adj" fmla="val 12000"/>
-            </a:avLst>
-          </a:prstGeom>
-          <a:solidFill>
-            <a:srgbClr val="2E3338"/>
-          </a:solidFill>
-          <a:ln>
-            <a:noFill/>
-          </a:ln>
-          <a:effectLst/>
-        </p:spPr>
-        <p:style>
-          <a:lnRef idx="1">
-            <a:schemeClr val="accent1"/>
-          </a:lnRef>
-          <a:fillRef idx="3">
-            <a:schemeClr val="accent1"/>
-          </a:fillRef>
-          <a:effectRef idx="2">
-            <a:schemeClr val="accent1"/>
-          </a:effectRef>
-          <a:fontRef idx="minor">
-            <a:schemeClr val="lt1"/>
-          </a:fontRef>
-        </p:style>
-        <p:txBody>
-          <a:bodyPr rtlCol="0" anchor="ctr" wrap="square" lIns="73152" rIns="73152"/>
-          <a:lstStyle/>
-          <a:p>
-            <a:pPr algn="ctr"/>
-            <a:r>
-              <a:rPr sz="1500" b="1">
-                <a:solidFill>
-                  <a:srgbClr val="DEE2E6"/>
-                </a:solidFill>
-              </a:rPr>
-              <a:t>Zombie</a:t>
-            </a:r>
-          </a:p>
-        </p:txBody>
-      </p:sp>
-      <p:sp>
-        <p:nvSpPr>
-          <p:cNvPr id="303" name="Rounded Rectangle 302"/>
-          <p:cNvSpPr/>
-          <p:nvPr/>
-        </p:nvSpPr>
-        <p:spPr>
-          <a:xfrm>
-            <a:off x="6355080" y="1371600"/>
-            <a:ext cx="1097280" cy="502920"/>
-          </a:xfrm>
-          <a:prstGeom prst="roundRect">
-            <a:avLst>
-              <a:gd name="adj" fmla="val 12000"/>
-            </a:avLst>
-          </a:prstGeom>
-          <a:solidFill>
-            <a:srgbClr val="2E3338"/>
-          </a:solidFill>
-          <a:ln>
-            <a:noFill/>
-          </a:ln>
-          <a:effectLst/>
-        </p:spPr>
-        <p:style>
-          <a:lnRef idx="1">
-            <a:schemeClr val="accent1"/>
-          </a:lnRef>
-          <a:fillRef idx="3">
-            <a:schemeClr val="accent1"/>
-          </a:fillRef>
-          <a:effectRef idx="2">
-            <a:schemeClr val="accent1"/>
-          </a:effectRef>
-          <a:fontRef idx="minor">
-            <a:schemeClr val="lt1"/>
-          </a:fontRef>
-        </p:style>
-        <p:txBody>
-          <a:bodyPr rtlCol="0" anchor="ctr" wrap="square" lIns="73152" rIns="73152"/>
-          <a:lstStyle/>
-          <a:p>
-            <a:pPr algn="ctr"/>
-            <a:r>
-              <a:rPr sz="1500" b="1">
-                <a:solidFill>
-                  <a:srgbClr val="DEE2E6"/>
-                </a:solidFill>
-              </a:rPr>
-              <a:t>Pea</a:t>
-            </a:r>
-          </a:p>
-        </p:txBody>
-      </p:sp>
-      <p:sp>
-        <p:nvSpPr>
-          <p:cNvPr id="304" name="Rounded Rectangle 303"/>
-          <p:cNvSpPr/>
-          <p:nvPr/>
-        </p:nvSpPr>
-        <p:spPr>
-          <a:xfrm>
-            <a:off x="7589520" y="1371600"/>
-            <a:ext cx="1097280" cy="502920"/>
-          </a:xfrm>
-          <a:prstGeom prst="roundRect">
-            <a:avLst>
-              <a:gd name="adj" fmla="val 12000"/>
-            </a:avLst>
-          </a:prstGeom>
-          <a:solidFill>
-            <a:srgbClr val="2E3338"/>
-          </a:solidFill>
-          <a:ln>
-            <a:noFill/>
-          </a:ln>
-          <a:effectLst/>
-        </p:spPr>
-        <p:style>
-          <a:lnRef idx="1">
-            <a:schemeClr val="accent1"/>
-          </a:lnRef>
-          <a:fillRef idx="3">
-            <a:schemeClr val="accent1"/>
-          </a:fillRef>
-          <a:effectRef idx="2">
-            <a:schemeClr val="accent1"/>
-          </a:effectRef>
-          <a:fontRef idx="minor">
-            <a:schemeClr val="lt1"/>
-          </a:fontRef>
-        </p:style>
-        <p:txBody>
-          <a:bodyPr rtlCol="0" anchor="ctr" wrap="square" lIns="73152" rIns="73152"/>
-          <a:lstStyle/>
-          <a:p>
-            <a:pPr algn="ctr"/>
-            <a:r>
-              <a:rPr sz="1500" b="1">
-                <a:solidFill>
-                  <a:srgbClr val="DEE2E6"/>
-                </a:solidFill>
-              </a:rPr>
-              <a:t>Sun</a:t>
-            </a:r>
-          </a:p>
-        </p:txBody>
-      </p:sp>
-      <p:sp>
-        <p:nvSpPr>
-          <p:cNvPr id="305" name="TextBox 304"/>
-          <p:cNvSpPr txBox="1"/>
-          <p:nvPr/>
-        </p:nvSpPr>
-        <p:spPr>
-          <a:xfrm>
-            <a:off x="365760" y="3108960"/>
-            <a:ext cx="8412480" cy="365760"/>
-          </a:xfrm>
-          <a:prstGeom prst="rect">
-            <a:avLst/>
-          </a:prstGeom>
-          <a:noFill/>
-        </p:spPr>
-        <p:txBody>
-          <a:bodyPr wrap="square">
-            <a:spAutoFit/>
-          </a:bodyPr>
-          <a:lstStyle/>
-          <a:p>
-            <a:pPr algn="ctr"/>
-            <a:r>
-              <a:rPr sz="1400" b="0" i="0">
-                <a:solidFill>
-                  <a:srgbClr val="9AA3AB"/>
-                </a:solidFill>
-              </a:rPr>
-              <a:t>The World keeps one list per class.</a:t>
-            </a:r>
+          <a:p>
+            <a:pPr indent="-330200" lvl="0" marL="457200" rtl="0" algn="l">
+              <a:spcBef>
+                <a:spcPts val="0"/>
+              </a:spcBef>
+              <a:spcAft>
+                <a:spcPts val="0"/>
+              </a:spcAft>
+              <a:buSzPts val="1600"/>
+              <a:buChar char="●"/>
+            </a:pPr>
+            <a:r>
+              <a:rPr lang="en"/>
+              <a:t>Show the cell under the mouse in the window title</a:t>
+            </a:r>
+            <a:endParaRPr/>
+          </a:p>
+          <a:p>
+            <a:pPr indent="-330200" lvl="0" marL="457200" rtl="0" algn="l">
+              <a:spcBef>
+                <a:spcPts val="0"/>
+              </a:spcBef>
+              <a:spcAft>
+                <a:spcPts val="0"/>
+              </a:spcAft>
+              <a:buSzPts val="1600"/>
+              <a:buChar char="●"/>
+            </a:pPr>
+            <a:r>
+              <a:rPr lang="en"/>
+              <a:t>Move off the lawn: what does CellAt give you?</a:t>
+            </a:r>
+            <a:endParaRPr/>
           </a:p>
         </p:txBody>
       </p:sp>

--- a/slides/09 Plants vs. Zombies.pptx
+++ b/slides/09 Plants vs. Zombies.pptx
@@ -15429,22 +15429,22 @@
       </p:sp>
       <p:pic>
         <p:nvPicPr>
-          <p:cNvPr id="46" name="Picture 46" descr="pvz-play2.png"/>
+          <p:cNvPr id="46" name="Picture 46" descr="gif-pvz.gif"/>
           <p:cNvPicPr>
             <a:picLocks noChangeAspect="1"/>
           </p:cNvPicPr>
           <p:nvPr/>
         </p:nvPicPr>
         <p:blipFill>
-          <a:blip r:embed="rId4"/>
+          <a:blip r:embed="rId3"/>
           <a:stretch>
             <a:fillRect/>
           </a:stretch>
         </p:blipFill>
         <p:spPr>
           <a:xfrm>
-            <a:off x="1677201" y="1531275"/>
-            <a:ext cx="5789598" cy="3256648"/>
+            <a:off x="1677202" y="1531275"/>
+            <a:ext cx="5789596" cy="3256648"/>
           </a:xfrm>
           <a:prstGeom prst="rect">
             <a:avLst/>

--- a/slides/09 Plants vs. Zombies.pptx
+++ b/slides/09 Plants vs. Zombies.pptx
@@ -38,7 +38,6 @@
     <p:sldId id="293" r:id="rId52"/>
     <p:sldId id="313" r:id="rId40"/>
     <p:sldId id="294" r:id="rId53"/>
-    <p:sldId id="296" r:id="rId55"/>
   </p:sldIdLst>
   <p:sldSz cy="5143500" cx="9144000"/>
   <p:notesSz cx="6858000" cy="9144000"/>
@@ -2615,64 +2614,6 @@
           <a:p>
             <a:r>
               <a:t>Say: the site explains the ideas, the README helps you find them in the code, the slides are for today.</a:t>
-            </a:r>
-          </a:p>
-        </p:txBody>
-      </p:sp>
-    </p:spTree>
-  </p:cSld>
-  <p:clrMapOvr>
-    <a:masterClrMapping/>
-  </p:clrMapOvr>
-</p:notes>
-</file>
-
-<file path=ppt/notesSlides/notesSlide6.xml><?xml version="1.0" encoding="utf-8"?>
-<p:notes xmlns:a="http://schemas.openxmlformats.org/drawingml/2006/main" xmlns:p="http://schemas.openxmlformats.org/presentationml/2006/main" xmlns:r="http://schemas.openxmlformats.org/officeDocument/2006/relationships">
-  <p:cSld>
-    <p:spTree>
-      <p:nvGrpSpPr>
-        <p:cNvPr id="1" name=""/>
-        <p:cNvGrpSpPr/>
-        <p:nvPr/>
-      </p:nvGrpSpPr>
-      <p:grpSpPr>
-        <a:xfrm>
-          <a:off x="0" y="0"/>
-          <a:ext cx="0" cy="0"/>
-          <a:chOff x="0" y="0"/>
-          <a:chExt cx="0" cy="0"/>
-        </a:xfrm>
-      </p:grpSpPr>
-      <p:sp>
-        <p:nvSpPr>
-          <p:cNvPr id="2" name="Slide Image Placeholder 1"/>
-          <p:cNvSpPr>
-            <a:spLocks noGrp="1"/>
-          </p:cNvSpPr>
-          <p:nvPr>
-            <p:ph type="sldImg" idx="2"/>
-          </p:nvPr>
-        </p:nvSpPr>
-        <p:spPr/>
-      </p:sp>
-      <p:sp>
-        <p:nvSpPr>
-          <p:cNvPr id="3" name="Notes Placeholder 2"/>
-          <p:cNvSpPr>
-            <a:spLocks noGrp="1"/>
-          </p:cNvSpPr>
-          <p:nvPr>
-            <p:ph type="body" idx="1"/>
-          </p:nvPr>
-        </p:nvSpPr>
-        <p:spPr/>
-        <p:txBody>
-          <a:bodyPr/>
-          <a:lstStyle/>
-          <a:p>
-            <a:r>
-              <a:t>Milestone today: the self-review. Next by session 11: a release build on itch.io and a README.</a:t>
             </a:r>
           </a:p>
         </p:txBody>
@@ -16291,180 +16232,6 @@
 </p:sld>
 </file>
 
-<file path=ppt/slides/slide31.xml><?xml version="1.0" encoding="utf-8"?>
-<p:sld xmlns:a="http://schemas.openxmlformats.org/drawingml/2006/main" xmlns:r="http://schemas.openxmlformats.org/officeDocument/2006/relationships" xmlns:mc="http://schemas.openxmlformats.org/markup-compatibility/2006" xmlns:mv="urn:schemas-microsoft-com:mac:vml" xmlns:p="http://schemas.openxmlformats.org/presentationml/2006/main" xmlns:c="http://schemas.openxmlformats.org/drawingml/2006/chart" xmlns:dgm="http://schemas.openxmlformats.org/drawingml/2006/diagram" xmlns:o="urn:schemas-microsoft-com:office:office" xmlns:v="urn:schemas-microsoft-com:vml" xmlns:pvml="urn:schemas-microsoft-com:office:powerpoint" xmlns:com="http://schemas.openxmlformats.org/drawingml/2006/compatibility" xmlns:p14="http://schemas.microsoft.com/office/powerpoint/2010/main" xmlns:p15="http://schemas.microsoft.com/office/powerpoint/2012/main" xmlns:ahyp="http://schemas.microsoft.com/office/drawing/2018/hyperlinkcolor">
-  <p:cSld>
-    <p:spTree>
-      <p:nvGrpSpPr>
-        <p:cNvPr id="56" name="Shape 56"/>
-        <p:cNvGrpSpPr/>
-        <p:nvPr/>
-      </p:nvGrpSpPr>
-      <p:grpSpPr>
-        <a:xfrm>
-          <a:off x="0" y="0"/>
-          <a:ext cx="0" cy="0"/>
-          <a:chOff x="0" y="0"/>
-          <a:chExt cx="0" cy="0"/>
-        </a:xfrm>
-      </p:grpSpPr>
-      <p:sp>
-        <p:nvSpPr>
-          <p:cNvPr id="57" name="Google Shape;57;p12"/>
-          <p:cNvSpPr txBox="1"/>
-          <p:nvPr>
-            <p:ph type="title"/>
-          </p:nvPr>
-        </p:nvSpPr>
-        <p:spPr>
-          <a:xfrm>
-            <a:off x="311700" y="195615"/>
-            <a:ext cx="8520600" cy="572700"/>
-          </a:xfrm>
-          <a:prstGeom prst="rect">
-            <a:avLst/>
-          </a:prstGeom>
-        </p:spPr>
-        <p:txBody>
-          <a:bodyPr anchorCtr="0" anchor="t" bIns="91425" lIns="91425" spcFirstLastPara="1" rIns="91425" wrap="square" tIns="91425">
-            <a:normAutofit fontScale="90000"/>
-          </a:bodyPr>
-          <a:lstStyle/>
-          <a:p>
-            <a:pPr indent="0" lvl="0" marL="0" rtl="0" algn="l">
-              <a:spcBef>
-                <a:spcPts val="0"/>
-              </a:spcBef>
-              <a:spcAft>
-                <a:spcPts val="0"/>
-              </a:spcAft>
-              <a:buNone/>
-            </a:pPr>
-            <a:r>
-              <a:rPr lang="en"/>
-              <a:t>Your Course Project</a:t>
-            </a:r>
-            <a:endParaRPr/>
-          </a:p>
-        </p:txBody>
-      </p:sp>
-      <p:sp>
-        <p:nvSpPr>
-          <p:cNvPr id="58" name="Google Shape;58;p12"/>
-          <p:cNvSpPr txBox="1"/>
-          <p:nvPr>
-            <p:ph idx="1" type="body"/>
-          </p:nvPr>
-        </p:nvSpPr>
-        <p:spPr>
-          <a:xfrm>
-            <a:off x="311700" y="885950"/>
-            <a:ext cx="8520600" cy="4023300"/>
-          </a:xfrm>
-          <a:prstGeom prst="rect">
-            <a:avLst/>
-          </a:prstGeom>
-        </p:spPr>
-        <p:txBody>
-          <a:bodyPr anchorCtr="0" anchor="t" bIns="91425" lIns="91425" spcFirstLastPara="1" rIns="91425" wrap="square" tIns="91425">
-            <a:normAutofit/>
-          </a:bodyPr>
-          <a:lstStyle/>
-          <a:p>
-            <a:pPr indent="-330200" lvl="0" marL="457200" rtl="0" algn="l">
-              <a:spcBef>
-                <a:spcPts val="0"/>
-              </a:spcBef>
-              <a:spcAft>
-                <a:spcPts val="0"/>
-              </a:spcAft>
-              <a:buSzPts val="1600"/>
-              <a:buChar char="●"/>
-            </a:pPr>
-            <a:r>
-              <a:rPr lang="en"/>
-              <a:t>Milestone by today: self-review</a:t>
-            </a:r>
-            <a:endParaRPr/>
-          </a:p>
-          <a:p>
-            <a:pPr indent="-317500" lvl="1" marL="914400" rtl="0" algn="l">
-              <a:spcBef>
-                <a:spcPts val="0"/>
-              </a:spcBef>
-              <a:spcAft>
-                <a:spcPts val="0"/>
-              </a:spcAft>
-              <a:buSzPts val="1400"/>
-              <a:buChar char="○"/>
-            </a:pPr>
-            <a:r>
-              <a:rPr lang="en"/>
-              <a:t>Updated class diagram, list of patterns, event map</a:t>
-            </a:r>
-            <a:endParaRPr/>
-          </a:p>
-          <a:p>
-            <a:pPr indent="-317500" lvl="1" marL="914400" rtl="0" algn="l">
-              <a:spcBef>
-                <a:spcPts val="0"/>
-              </a:spcBef>
-              <a:spcAft>
-                <a:spcPts val="0"/>
-              </a:spcAft>
-              <a:buSzPts val="1400"/>
-              <a:buChar char="○"/>
-            </a:pPr>
-            <a:r>
-              <a:rPr lang="en"/>
-              <a:t>At least one refactoring</a:t>
-            </a:r>
-            <a:endParaRPr/>
-          </a:p>
-          <a:p>
-            <a:pPr indent="-330200" lvl="0" marL="457200" rtl="0" algn="l">
-              <a:spcBef>
-                <a:spcPts val="0"/>
-              </a:spcBef>
-              <a:spcAft>
-                <a:spcPts val="0"/>
-              </a:spcAft>
-              <a:buSzPts val="1600"/>
-              <a:buChar char="●"/>
-            </a:pPr>
-            <a:r>
-              <a:rPr lang="en"/>
-              <a:t>Next milestone, by session 11</a:t>
-            </a:r>
-            <a:endParaRPr/>
-          </a:p>
-          <a:p>
-            <a:pPr indent="-317500" lvl="1" marL="914400" rtl="0" algn="l">
-              <a:spcBef>
-                <a:spcPts val="0"/>
-              </a:spcBef>
-              <a:spcAft>
-                <a:spcPts val="0"/>
-              </a:spcAft>
-              <a:buSzPts val="1400"/>
-              <a:buChar char="○"/>
-            </a:pPr>
-            <a:r>
-              <a:rPr lang="en"/>
-              <a:t>A release build on itch.io, and a README started</a:t>
-            </a:r>
-            <a:endParaRPr/>
-          </a:p>
-        </p:txBody>
-      </p:sp>
-    </p:spTree>
-  </p:cSld>
-  <p:clrMapOvr>
-    <a:masterClrMapping/>
-  </p:clrMapOvr>
-</p:sld>
-</file>
-
 <file path=ppt/slides/slide4.xml><?xml version="1.0" encoding="utf-8"?>
 <p:sld xmlns:a="http://schemas.openxmlformats.org/drawingml/2006/main" xmlns:r="http://schemas.openxmlformats.org/officeDocument/2006/relationships" xmlns:mc="http://schemas.openxmlformats.org/markup-compatibility/2006" xmlns:mv="urn:schemas-microsoft-com:mac:vml" xmlns:p="http://schemas.openxmlformats.org/presentationml/2006/main" xmlns:c="http://schemas.openxmlformats.org/drawingml/2006/chart" xmlns:dgm="http://schemas.openxmlformats.org/drawingml/2006/diagram" xmlns:o="urn:schemas-microsoft-com:office:office" xmlns:v="urn:schemas-microsoft-com:vml" xmlns:pvml="urn:schemas-microsoft-com:office:powerpoint" xmlns:com="http://schemas.openxmlformats.org/drawingml/2006/compatibility" xmlns:p14="http://schemas.microsoft.com/office/powerpoint/2010/main" xmlns:p15="http://schemas.microsoft.com/office/powerpoint/2012/main" xmlns:ahyp="http://schemas.microsoft.com/office/drawing/2018/hyperlinkcolor">
   <p:cSld>

--- a/slides/09 Plants vs. Zombies.pptx
+++ b/slides/09 Plants vs. Zombies.pptx
@@ -25,6 +25,8 @@
     <p:sldId id="304" r:id="rId63"/>
     <p:sldId id="305" r:id="rId64"/>
     <p:sldId id="306" r:id="rId65"/>
+    <p:sldId id="320" r:id="rId34"/>
+    <p:sldId id="319" r:id="rId35"/>
     <p:sldId id="307" r:id="rId66"/>
     <p:sldId id="316" r:id="rId38"/>
     <p:sldId id="308" r:id="rId67"/>
@@ -2443,6 +2445,69 @@
 </p:notes>
 </file>
 
+<file path=ppt/notesSlides/notesSlide32.xml><?xml version="1.0" encoding="utf-8"?>
+<p:notes xmlns:a="http://schemas.openxmlformats.org/drawingml/2006/main" xmlns:p="http://schemas.openxmlformats.org/presentationml/2006/main" xmlns:r="http://schemas.openxmlformats.org/officeDocument/2006/relationships">
+  <p:cSld>
+    <p:spTree>
+      <p:nvGrpSpPr>
+        <p:cNvPr id="1" name=""/>
+        <p:cNvGrpSpPr/>
+        <p:nvPr/>
+      </p:nvGrpSpPr>
+      <p:grpSpPr>
+        <a:xfrm>
+          <a:off x="0" y="0"/>
+          <a:ext cx="0" cy="0"/>
+          <a:chOff x="0" y="0"/>
+          <a:chExt cx="0" cy="0"/>
+        </a:xfrm>
+      </p:grpSpPr>
+      <p:sp>
+        <p:nvSpPr>
+          <p:cNvPr id="2" name="Slide Image Placeholder 1"/>
+          <p:cNvSpPr>
+            <a:spLocks noGrp="1"/>
+          </p:cNvSpPr>
+          <p:nvPr>
+            <p:ph type="sldImg" idx="2"/>
+          </p:nvPr>
+        </p:nvSpPr>
+        <p:spPr/>
+      </p:sp>
+      <p:sp>
+        <p:nvSpPr>
+          <p:cNvPr id="3" name="Notes Placeholder 2"/>
+          <p:cNvSpPr>
+            <a:spLocks noGrp="1"/>
+          </p:cNvSpPr>
+          <p:nvPr>
+            <p:ph type="body" idx="1"/>
+          </p:nvPr>
+        </p:nvSpPr>
+        <p:spPr/>
+        <p:txBody>
+          <a:bodyPr/>
+          <a:lstStyle/>
+          <a:p>
+            <a:r>
+              <a:t>Show ComponentTests.cs and run dotnet test. The world is null because Health and Armour never use it.</a:t>
+            </a:r>
+          </a:p>
+          <a:p>
+            <a:r>
+              <a:t>This is the testing thread from Sokoban again: small parts with clear inputs are what make tests easy.</a:t>
+            </a:r>
+          </a:p>
+        </p:txBody>
+      </p:sp>
+    </p:spTree>
+  </p:cSld>
+  <p:clrMapOvr>
+    <a:masterClrMapping/>
+  </p:clrMapOvr>
+</p:notes>
+</file>
+
 <file path=ppt/notesSlides/notesSlide37.xml><?xml version="1.0" encoding="utf-8"?>
 <p:notes xmlns:a="http://schemas.openxmlformats.org/drawingml/2006/main" xmlns:r="http://schemas.openxmlformats.org/officeDocument/2006/relationships" xmlns:mc="http://schemas.openxmlformats.org/markup-compatibility/2006" xmlns:mv="urn:schemas-microsoft-com:mac:vml" xmlns:p="http://schemas.openxmlformats.org/presentationml/2006/main" xmlns:c="http://schemas.openxmlformats.org/drawingml/2006/chart" xmlns:dgm="http://schemas.openxmlformats.org/drawingml/2006/diagram" xmlns:o="urn:schemas-microsoft-com:office:office" xmlns:v="urn:schemas-microsoft-com:vml" xmlns:pvml="urn:schemas-microsoft-com:office:powerpoint" xmlns:com="http://schemas.openxmlformats.org/drawingml/2006/compatibility" xmlns:p14="http://schemas.microsoft.com/office/powerpoint/2010/main" xmlns:p15="http://schemas.microsoft.com/office/powerpoint/2012/main" xmlns:ahyp="http://schemas.microsoft.com/office/drawing/2018/hyperlinkcolor" showMasterPhAnim="0" showMasterSp="0">
   <p:cSld>
@@ -2614,6 +2679,69 @@
           <a:p>
             <a:r>
               <a:t>Say: the site explains the ideas, the README helps you find them in the code, the slides are for today.</a:t>
+            </a:r>
+          </a:p>
+        </p:txBody>
+      </p:sp>
+    </p:spTree>
+  </p:cSld>
+  <p:clrMapOvr>
+    <a:masterClrMapping/>
+  </p:clrMapOvr>
+</p:notes>
+</file>
+
+<file path=ppt/notesSlides/notesSlide6.xml><?xml version="1.0" encoding="utf-8"?>
+<p:notes xmlns:a="http://schemas.openxmlformats.org/drawingml/2006/main" xmlns:p="http://schemas.openxmlformats.org/presentationml/2006/main" xmlns:r="http://schemas.openxmlformats.org/officeDocument/2006/relationships">
+  <p:cSld>
+    <p:spTree>
+      <p:nvGrpSpPr>
+        <p:cNvPr id="1" name=""/>
+        <p:cNvGrpSpPr/>
+        <p:nvPr/>
+      </p:nvGrpSpPr>
+      <p:grpSpPr>
+        <a:xfrm>
+          <a:off x="0" y="0"/>
+          <a:ext cx="0" cy="0"/>
+          <a:chOff x="0" y="0"/>
+          <a:chExt cx="0" cy="0"/>
+        </a:xfrm>
+      </p:grpSpPr>
+      <p:sp>
+        <p:nvSpPr>
+          <p:cNvPr id="2" name="Slide Image Placeholder 1"/>
+          <p:cNvSpPr>
+            <a:spLocks noGrp="1"/>
+          </p:cNvSpPr>
+          <p:nvPr>
+            <p:ph type="sldImg" idx="2"/>
+          </p:nvPr>
+        </p:nvSpPr>
+        <p:spPr/>
+      </p:sp>
+      <p:sp>
+        <p:nvSpPr>
+          <p:cNvPr id="3" name="Notes Placeholder 2"/>
+          <p:cNvSpPr>
+            <a:spLocks noGrp="1"/>
+          </p:cNvSpPr>
+          <p:nvPr>
+            <p:ph type="body" idx="1"/>
+          </p:nvPr>
+        </p:nvSpPr>
+        <p:spPr/>
+        <p:txBody>
+          <a:bodyPr/>
+          <a:lstStyle/>
+          <a:p>
+            <a:r>
+              <a:t>Pairs, about 6 minutes. Copy the conehead test. Armour takes 12 (8 left), then 12 more: 8 absorbed, 4 through, so health 6: still standing.</a:t>
+            </a:r>
+          </a:p>
+          <a:p>
+            <a:r>
+              <a:t>Ask: what would this test need with a ConeheadZombie subclass? The whole class and its bases.</a:t>
             </a:r>
           </a:p>
         </p:txBody>
@@ -10627,25 +10755,17 @@
       <p:grpSpPr/>
       <p:sp>
         <p:nvSpPr>
-          <p:cNvPr id="128" name="Google Shape;128;p21"/>
-          <p:cNvSpPr txBox="1"/>
+          <p:cNvPr id="2" name="Title 1"/>
+          <p:cNvSpPr>
+            <a:spLocks noGrp="1"/>
+          </p:cNvSpPr>
           <p:nvPr>
             <p:ph type="title"/>
           </p:nvPr>
         </p:nvSpPr>
-        <p:spPr>
-          <a:xfrm>
-            <a:off x="311700" y="195615"/>
-            <a:ext cx="8520600" cy="572700"/>
-          </a:xfrm>
-          <a:prstGeom prst="rect">
-            <a:avLst/>
-          </a:prstGeom>
-        </p:spPr>
+        <p:spPr/>
         <p:txBody>
-          <a:bodyPr anchorCtr="0" anchor="t" bIns="91425" lIns="91425" spcFirstLastPara="1" rIns="91425" wrap="square" tIns="91425">
-            <a:normAutofit fontScale="90000"/>
-          </a:bodyPr>
+          <a:bodyPr/>
           <a:lstStyle/>
           <a:p>
             <a:pPr indent="0" lvl="0" marL="0" rtl="0" algn="l">
@@ -10658,79 +10778,82 @@
               <a:buNone/>
             </a:pPr>
             <a:r>
-              <a:rPr lang="en">
-                <a:solidFill>
-                  <a:schemeClr val="accent5"/>
-                </a:solidFill>
-              </a:rPr>
-              <a:t>Component Implementation</a:t>
-            </a:r>
-            <a:endParaRPr>
-              <a:solidFill>
-                <a:schemeClr val="accent5"/>
-              </a:solidFill>
-            </a:endParaRPr>
+              <a:rPr lang="en"/>
+              <a:t>Testing a Component</a:t>
+            </a:r>
+            <a:endParaRPr/>
           </a:p>
         </p:txBody>
       </p:sp>
       <p:sp>
         <p:nvSpPr>
-          <p:cNvPr id="129" name="Google Shape;129;p21"/>
-          <p:cNvSpPr txBox="1"/>
+          <p:cNvPr id="3" name="Text Placeholder 2"/>
+          <p:cNvSpPr>
+            <a:spLocks noGrp="1"/>
+          </p:cNvSpPr>
           <p:nvPr>
-            <p:ph idx="1" type="body"/>
+            <p:ph type="body" idx="1"/>
           </p:nvPr>
         </p:nvSpPr>
         <p:spPr>
           <a:xfrm>
             <a:off x="311700" y="885950"/>
-            <a:ext cx="8520600" cy="4023300"/>
+            <a:ext cx="8520600" cy="1289304"/>
           </a:xfrm>
-          <a:prstGeom prst="rect">
-            <a:avLst/>
-          </a:prstGeom>
         </p:spPr>
         <p:txBody>
-          <a:bodyPr anchorCtr="0" anchor="ctr" bIns="91425" lIns="91425" spcFirstLastPara="1" rIns="91425" wrap="square" tIns="91425">
-            <a:normAutofit/>
-          </a:bodyPr>
+          <a:bodyPr/>
           <a:lstStyle/>
           <a:p>
-            <a:pPr indent="0" lvl="0" marL="0" rtl="0" algn="ctr">
-              <a:spcBef>
-                <a:spcPts val="0"/>
-              </a:spcBef>
-              <a:spcAft>
-                <a:spcPts val="1200"/>
-              </a:spcAft>
-              <a:buNone/>
-            </a:pPr>
-            <a:r>
-              <a:rPr lang="en" sz="2900">
-                <a:latin typeface="VT323"/>
-                <a:ea typeface="VT323"/>
-                <a:cs typeface="VT323"/>
-                <a:sym typeface="VT323"/>
-              </a:rPr>
-              <a:t>DEMO!</a:t>
+            <a:pPr indent="-330200" lvl="0" marL="457200" rtl="0" algn="l">
+              <a:spcBef>
+                <a:spcPts val="0"/>
+              </a:spcBef>
+              <a:spcAft>
+                <a:spcPts val="0"/>
+              </a:spcAft>
+              <a:buSzPts val="1600"/>
+              <a:buChar char="●"/>
+            </a:pPr>
+            <a:r>
+              <a:rPr lang="en"/>
+              <a:t>A component with one job can be tested on its own</a:t>
             </a:r>
             <a:endParaRPr/>
           </a:p>
           <a:p>
-            <a:pPr indent="0" lvl="0" marL="0" rtl="0" algn="ctr">
-              <a:spcBef>
-                <a:spcPts val="0"/>
-              </a:spcBef>
-              <a:spcAft>
-                <a:spcPts val="0"/>
-              </a:spcAft>
-              <a:buNone/>
-            </a:pPr>
-            <a:r>
-              <a:rPr lang="en" sz="1800"/>
-              <a:t>Pvz1 → Pvz2: from a class hierarchy to components</a:t>
-            </a:r>
-            <a:endParaRPr sz="1800"/>
+            <a:pPr indent="-330200" lvl="0" marL="457200" rtl="0" algn="l">
+              <a:spcBef>
+                <a:spcPts val="0"/>
+              </a:spcBef>
+              <a:spcAft>
+                <a:spcPts val="0"/>
+              </a:spcAft>
+              <a:buSzPts val="1600"/>
+              <a:buChar char="●"/>
+            </a:pPr>
+            <a:r>
+              <a:rPr lang="en"/>
+              <a:t>An entity with only the parts under test: no lawn, no textures, no game running</a:t>
+            </a:r>
+            <a:endParaRPr/>
+          </a:p>
+          <a:p>
+            <a:pPr indent="-330200" lvl="0" marL="457200" rtl="0" algn="l">
+              <a:spcBef>
+                <a:spcPts val="0"/>
+              </a:spcBef>
+              <a:spcAft>
+                <a:spcPts val="0"/>
+              </a:spcAft>
+              <a:buSzPts val="1600"/>
+              <a:buChar char="●"/>
+            </a:pPr>
+            <a:r>
+              <a:rPr lang="en"/>
+              <a:t>Pvz.Tests: health, armour first, a lifetime that runs out</a:t>
+            </a:r>
+            <a:endParaRPr/>
           </a:p>
         </p:txBody>
       </p:sp>
@@ -10778,7 +10901,7 @@
             </a:pPr>
             <a:r>
               <a:rPr lang="en"/>
-              <a:t>Try It: A New Plant From Parts</a:t>
+              <a:t>Try It: A Buckethead Test</a:t>
             </a:r>
             <a:endParaRPr/>
           </a:p>
@@ -10816,7 +10939,7 @@
             </a:pPr>
             <a:r>
               <a:rPr lang="en"/>
-              <a:t>In Pvz2’s Recipes:</a:t>
+              <a:t>In Pvz.Tests:</a:t>
             </a:r>
             <a:endParaRPr/>
           </a:p>
@@ -10833,7 +10956,7 @@
             </a:pPr>
             <a:r>
               <a:rPr lang="en"/>
-              <a:t>A plant that shoots and makes sun</a:t>
+              <a:t>A buckethead: armour 20, health 10</a:t>
             </a:r>
             <a:endParaRPr/>
           </a:p>
@@ -10850,7 +10973,7 @@
             </a:pPr>
             <a:r>
               <a:rPr lang="en"/>
-              <a:t>Give it a packet in Game1 (sunflower sprite)</a:t>
+              <a:t>Still standing after two hits of 12?</a:t>
             </a:r>
             <a:endParaRPr/>
           </a:p>
@@ -10867,7 +10990,7 @@
             </a:pPr>
             <a:r>
               <a:rPr lang="en"/>
-              <a:t>How much new code?</a:t>
+              <a:t>Run dotnet test</a:t>
             </a:r>
             <a:endParaRPr/>
           </a:p>
@@ -11006,7 +11129,7 @@
       <p:grpSpPr/>
       <p:sp>
         <p:nvSpPr>
-          <p:cNvPr id="140" name="Google Shape;140;p23"/>
+          <p:cNvPr id="128" name="Google Shape;128;p21"/>
           <p:cNvSpPr txBox="1"/>
           <p:nvPr>
             <p:ph type="title"/>
@@ -11037,710 +11160,79 @@
               <a:buNone/>
             </a:pPr>
             <a:r>
-              <a:rPr lang="en"/>
-              <a:t>Type Object</a:t>
-            </a:r>
-            <a:endParaRPr/>
+              <a:rPr lang="en">
+                <a:solidFill>
+                  <a:schemeClr val="accent5"/>
+                </a:solidFill>
+              </a:rPr>
+              <a:t>Component Implementation</a:t>
+            </a:r>
+            <a:endParaRPr>
+              <a:solidFill>
+                <a:schemeClr val="accent5"/>
+              </a:solidFill>
+            </a:endParaRPr>
           </a:p>
         </p:txBody>
       </p:sp>
       <p:sp>
         <p:nvSpPr>
-          <p:cNvPr id="293" name="Google Shape;293;p45"/>
+          <p:cNvPr id="129" name="Google Shape;129;p21"/>
           <p:cNvSpPr txBox="1"/>
           <p:nvPr>
-            <p:ph type="title"/>
+            <p:ph idx="1" type="body"/>
           </p:nvPr>
         </p:nvSpPr>
         <p:spPr>
           <a:xfrm>
-            <a:off x="311700" y="1152475"/>
-            <a:ext cx="3700000" cy="3500000"/>
+            <a:off x="311700" y="885950"/>
+            <a:ext cx="8520600" cy="4023300"/>
           </a:xfrm>
           <a:prstGeom prst="rect">
             <a:avLst/>
           </a:prstGeom>
         </p:spPr>
         <p:txBody>
-          <a:bodyPr anchorCtr="0" anchor="t" bIns="91425" lIns="91425" spcFirstLastPara="1" rIns="91425" wrap="square" tIns="91425">
-            <a:normAutofit fontScale="90000"/>
+          <a:bodyPr anchorCtr="0" anchor="ctr" bIns="91425" lIns="91425" spcFirstLastPara="1" rIns="91425" wrap="square" tIns="91425">
+            <a:normAutofit/>
           </a:bodyPr>
           <a:lstStyle/>
           <a:p>
-            <a:pPr indent="-330200" lvl="0" marL="457200" rtl="0" algn="l">
-              <a:buClr>
-                <a:srgbClr val="DEE2E6"/>
-              </a:buClr>
-              <a:spcBef>
-                <a:spcPts val="0"/>
-              </a:spcBef>
-              <a:spcAft>
-                <a:spcPts val="0"/>
-              </a:spcAft>
-              <a:buSzPts val="1600"/>
-              <a:buChar char="●"/>
-            </a:pPr>
-            <a:r>
-              <a:rPr lang="en" sz="1600">
-                <a:solidFill>
-                  <a:srgbClr val="DEE2E6"/>
-                </a:solidFill>
+            <a:pPr indent="0" lvl="0" marL="0" rtl="0" algn="ctr">
+              <a:spcBef>
+                <a:spcPts val="0"/>
+              </a:spcBef>
+              <a:spcAft>
+                <a:spcPts val="1200"/>
+              </a:spcAft>
+              <a:buNone/>
+            </a:pPr>
+            <a:r>
+              <a:rPr lang="en" sz="2900">
+                <a:latin typeface="VT323"/>
+                <a:ea typeface="VT323"/>
+                <a:cs typeface="VT323"/>
+                <a:sym typeface="VT323"/>
               </a:rPr>
-              <a:t>A peashooter’s cost: not in any one peashooter</a:t>
+              <a:t>DEMO!</a:t>
             </a:r>
             <a:endParaRPr/>
           </a:p>
           <a:p>
-            <a:pPr indent="-330200" lvl="0" marL="457200" rtl="0" algn="l">
-              <a:buClr>
-                <a:srgbClr val="DEE2E6"/>
-              </a:buClr>
-              <a:spcBef>
-                <a:spcPts val="0"/>
-              </a:spcBef>
-              <a:spcAft>
-                <a:spcPts val="0"/>
-              </a:spcAft>
-              <a:buSzPts val="1600"/>
-              <a:buChar char="●"/>
-            </a:pPr>
-            <a:r>
-              <a:rPr lang="en" sz="1600">
-                <a:solidFill>
-                  <a:srgbClr val="DEE2E6"/>
-                </a:solidFill>
-              </a:rPr>
-              <a:t>One PlantType per kind of plant</a:t>
-            </a:r>
-            <a:endParaRPr/>
-          </a:p>
-          <a:p>
-            <a:pPr indent="-317500" lvl="1" marL="914400" rtl="0" algn="l">
-              <a:buClr>
-                <a:srgbClr val="6C757D"/>
-              </a:buClr>
-              <a:spcBef>
-                <a:spcPts val="0"/>
-              </a:spcBef>
-              <a:spcAft>
-                <a:spcPts val="0"/>
-              </a:spcAft>
-              <a:buSzPts val="1400"/>
-              <a:buChar char="○"/>
-            </a:pPr>
-            <a:r>
-              <a:rPr lang="en" sz="1400">
-                <a:solidFill>
-                  <a:srgbClr val="6C757D"/>
-                </a:solidFill>
-              </a:rPr>
-              <a:t>Loaded from plants.json</a:t>
-            </a:r>
-            <a:endParaRPr/>
-          </a:p>
-          <a:p>
-            <a:pPr indent="-330200" lvl="0" marL="457200" rtl="0" algn="l">
-              <a:buClr>
-                <a:srgbClr val="DEE2E6"/>
-              </a:buClr>
-              <a:spcBef>
-                <a:spcPts val="0"/>
-              </a:spcBef>
-              <a:spcAft>
-                <a:spcPts val="0"/>
-              </a:spcAft>
-              <a:buSzPts val="1600"/>
-              <a:buChar char="●"/>
-            </a:pPr>
-            <a:r>
-              <a:rPr lang="en" sz="1600">
-                <a:solidFill>
-                  <a:srgbClr val="DEE2E6"/>
-                </a:solidFill>
-              </a:rPr>
-              <a:t>Types hold what all instances share</a:t>
-            </a:r>
-            <a:endParaRPr/>
-          </a:p>
-          <a:p>
-            <a:pPr indent="-330200" lvl="0" marL="457200" rtl="0" algn="l">
-              <a:buClr>
-                <a:srgbClr val="DEE2E6"/>
-              </a:buClr>
-              <a:spcBef>
-                <a:spcPts val="0"/>
-              </a:spcBef>
-              <a:spcAft>
-                <a:spcPts val="0"/>
-              </a:spcAft>
-              <a:buSzPts val="1600"/>
-              <a:buChar char="●"/>
-            </a:pPr>
-            <a:r>
-              <a:rPr lang="en" sz="1600">
-                <a:solidFill>
-                  <a:srgbClr val="DEE2E6"/>
-                </a:solidFill>
-              </a:rPr>
-              <a:t>Instances hold their own state</a:t>
-            </a:r>
-            <a:endParaRPr/>
-          </a:p>
-        </p:txBody>
-      </p:sp>
-      <p:sp>
-        <p:nvSpPr>
-          <p:cNvPr id="141" name="Google Shape;141;p23"/>
-          <p:cNvSpPr txBox="1"/>
-          <p:nvPr>
-            <p:ph idx="2" type="body"/>
-          </p:nvPr>
-        </p:nvSpPr>
-        <p:spPr>
-          <a:xfrm>
-            <a:off x="4150000" y="1152475"/>
-            <a:ext cx="4750000" cy="3600000"/>
-          </a:xfrm>
-          <a:prstGeom prst="rect">
-            <a:avLst/>
-          </a:prstGeom>
-        </p:spPr>
-        <p:txBody>
-          <a:bodyPr anchorCtr="0" anchor="t" bIns="91425" lIns="91425" spcFirstLastPara="1" rIns="91425" wrap="square" tIns="91425">
-            <a:noAutofit/>
-          </a:bodyPr>
-          <a:lstStyle/>
-          <a:p>
-            <a:pPr indent="0" lvl="0" marL="0" rtl="0" algn="l">
-              <a:lnSpc>
-                <a:spcPct val="115000"/>
-              </a:lnSpc>
-              <a:spcBef>
-                <a:spcPts val="0"/>
-              </a:spcBef>
-              <a:spcAft>
-                <a:spcPts val="0"/>
-              </a:spcAft>
-              <a:buNone/>
-            </a:pPr>
-            <a:r>
-              <a:rPr lang="en" sz="1000">
-                <a:highlight>
-                  <a:schemeClr val="dk2"/>
-                </a:highlight>
-                <a:latin typeface="Consolas"/>
-                <a:ea typeface="Consolas"/>
-                <a:cs typeface="Consolas"/>
-                <a:sym typeface="Consolas"/>
-              </a:rPr>
-              <a:t>// plants.json</a:t>
-            </a:r>
-            <a:endParaRPr sz="1000">
-              <a:solidFill>
-                <a:srgbClr val="CCCCCC"/>
-              </a:solidFill>
-              <a:highlight>
-                <a:schemeClr val="dk2"/>
-              </a:highlight>
-              <a:latin typeface="Consolas"/>
-              <a:ea typeface="Consolas"/>
-              <a:cs typeface="Consolas"/>
-              <a:sym typeface="Consolas"/>
-            </a:endParaRPr>
-          </a:p>
-          <a:p>
-            <a:pPr indent="0" lvl="0" marL="0" rtl="0" algn="l">
-              <a:lnSpc>
-                <a:spcPct val="115000"/>
-              </a:lnSpc>
-              <a:spcBef>
-                <a:spcPts val="0"/>
-              </a:spcBef>
-              <a:spcAft>
-                <a:spcPts val="0"/>
-              </a:spcAft>
-              <a:buNone/>
-            </a:pPr>
-            <a:r>
-              <a:rPr lang="en" sz="1000">
-                <a:highlight>
-                  <a:schemeClr val="dk2"/>
-                </a:highlight>
-                <a:latin typeface="Consolas"/>
-                <a:ea typeface="Consolas"/>
-                <a:cs typeface="Consolas"/>
-                <a:sym typeface="Consolas"/>
-              </a:rPr>
-              <a:t>{ "name": "Sunflower",</a:t>
-            </a:r>
-            <a:endParaRPr sz="1000">
-              <a:solidFill>
-                <a:srgbClr val="CCCCCC"/>
-              </a:solidFill>
-              <a:highlight>
-                <a:schemeClr val="dk2"/>
-              </a:highlight>
-              <a:latin typeface="Consolas"/>
-              <a:ea typeface="Consolas"/>
-              <a:cs typeface="Consolas"/>
-              <a:sym typeface="Consolas"/>
-            </a:endParaRPr>
-          </a:p>
-          <a:p>
-            <a:pPr indent="0" lvl="0" marL="0" rtl="0" algn="l">
-              <a:lnSpc>
-                <a:spcPct val="115000"/>
-              </a:lnSpc>
-              <a:spcBef>
-                <a:spcPts val="0"/>
-              </a:spcBef>
-              <a:spcAft>
-                <a:spcPts val="0"/>
-              </a:spcAft>
-              <a:buNone/>
-            </a:pPr>
-            <a:r>
-              <a:rPr lang="en" sz="1000">
-                <a:highlight>
-                  <a:schemeClr val="dk2"/>
-                </a:highlight>
-                <a:latin typeface="Consolas"/>
-                <a:ea typeface="Consolas"/>
-                <a:cs typeface="Consolas"/>
-                <a:sym typeface="Consolas"/>
-              </a:rPr>
-              <a:t>  "sprite": "sunflower",</a:t>
-            </a:r>
-            <a:endParaRPr sz="1000">
-              <a:solidFill>
-                <a:srgbClr val="CCCCCC"/>
-              </a:solidFill>
-              <a:highlight>
-                <a:schemeClr val="dk2"/>
-              </a:highlight>
-              <a:latin typeface="Consolas"/>
-              <a:ea typeface="Consolas"/>
-              <a:cs typeface="Consolas"/>
-              <a:sym typeface="Consolas"/>
-            </a:endParaRPr>
-          </a:p>
-          <a:p>
-            <a:pPr indent="0" lvl="0" marL="0" rtl="0" algn="l">
-              <a:lnSpc>
-                <a:spcPct val="115000"/>
-              </a:lnSpc>
-              <a:spcBef>
-                <a:spcPts val="0"/>
-              </a:spcBef>
-              <a:spcAft>
-                <a:spcPts val="0"/>
-              </a:spcAft>
-              <a:buNone/>
-            </a:pPr>
-            <a:r>
-              <a:rPr lang="en" sz="1000">
-                <a:highlight>
-                  <a:schemeClr val="dk2"/>
-                </a:highlight>
-                <a:latin typeface="Consolas"/>
-                <a:ea typeface="Consolas"/>
-                <a:cs typeface="Consolas"/>
-                <a:sym typeface="Consolas"/>
-              </a:rPr>
-              <a:t>  "cost": 50, "recharge": 7.5,</a:t>
-            </a:r>
-            <a:endParaRPr sz="1000">
-              <a:solidFill>
-                <a:srgbClr val="CCCCCC"/>
-              </a:solidFill>
-              <a:highlight>
-                <a:schemeClr val="dk2"/>
-              </a:highlight>
-              <a:latin typeface="Consolas"/>
-              <a:ea typeface="Consolas"/>
-              <a:cs typeface="Consolas"/>
-              <a:sym typeface="Consolas"/>
-            </a:endParaRPr>
-          </a:p>
-          <a:p>
-            <a:pPr indent="0" lvl="0" marL="0" rtl="0" algn="l">
-              <a:lnSpc>
-                <a:spcPct val="115000"/>
-              </a:lnSpc>
-              <a:spcBef>
-                <a:spcPts val="0"/>
-              </a:spcBef>
-              <a:spcAft>
-                <a:spcPts val="0"/>
-              </a:spcAft>
-              <a:buNone/>
-            </a:pPr>
-            <a:r>
-              <a:rPr lang="en" sz="1000">
-                <a:highlight>
-                  <a:schemeClr val="dk2"/>
-                </a:highlight>
-                <a:latin typeface="Consolas"/>
-                <a:ea typeface="Consolas"/>
-                <a:cs typeface="Consolas"/>
-                <a:sym typeface="Consolas"/>
-              </a:rPr>
-              <a:t>  "health": 6,</a:t>
-            </a:r>
-            <a:endParaRPr sz="1000">
-              <a:solidFill>
-                <a:srgbClr val="CCCCCC"/>
-              </a:solidFill>
-              <a:highlight>
-                <a:schemeClr val="dk2"/>
-              </a:highlight>
-              <a:latin typeface="Consolas"/>
-              <a:ea typeface="Consolas"/>
-              <a:cs typeface="Consolas"/>
-              <a:sym typeface="Consolas"/>
-            </a:endParaRPr>
-          </a:p>
-          <a:p>
-            <a:pPr indent="0" lvl="0" marL="0" rtl="0" algn="l">
-              <a:lnSpc>
-                <a:spcPct val="115000"/>
-              </a:lnSpc>
-              <a:spcBef>
-                <a:spcPts val="0"/>
-              </a:spcBef>
-              <a:spcAft>
-                <a:spcPts val="0"/>
-              </a:spcAft>
-              <a:buNone/>
-            </a:pPr>
-            <a:r>
-              <a:rPr lang="en" sz="1000">
-                <a:highlight>
-                  <a:schemeClr val="dk2"/>
-                </a:highlight>
-                <a:latin typeface="Consolas"/>
-                <a:ea typeface="Consolas"/>
-                <a:cs typeface="Consolas"/>
-                <a:sym typeface="Consolas"/>
-              </a:rPr>
-              <a:t>  "sunProducer": {</a:t>
-            </a:r>
-            <a:endParaRPr sz="1000">
-              <a:solidFill>
-                <a:srgbClr val="CCCCCC"/>
-              </a:solidFill>
-              <a:highlight>
-                <a:schemeClr val="dk2"/>
-              </a:highlight>
-              <a:latin typeface="Consolas"/>
-              <a:ea typeface="Consolas"/>
-              <a:cs typeface="Consolas"/>
-              <a:sym typeface="Consolas"/>
-            </a:endParaRPr>
-          </a:p>
-          <a:p>
-            <a:pPr indent="0" lvl="0" marL="0" rtl="0" algn="l">
-              <a:lnSpc>
-                <a:spcPct val="115000"/>
-              </a:lnSpc>
-              <a:spcBef>
-                <a:spcPts val="0"/>
-              </a:spcBef>
-              <a:spcAft>
-                <a:spcPts val="0"/>
-              </a:spcAft>
-              <a:buNone/>
-            </a:pPr>
-            <a:r>
-              <a:rPr lang="en" sz="1000">
-                <a:highlight>
-                  <a:schemeClr val="dk2"/>
-                </a:highlight>
-                <a:latin typeface="Consolas"/>
-                <a:ea typeface="Consolas"/>
-                <a:cs typeface="Consolas"/>
-                <a:sym typeface="Consolas"/>
-              </a:rPr>
-              <a:t>    "interval": 12, "amount": 25 } },</a:t>
-            </a:r>
-            <a:endParaRPr sz="1000">
-              <a:solidFill>
-                <a:srgbClr val="CCCCCC"/>
-              </a:solidFill>
-              <a:highlight>
-                <a:schemeClr val="dk2"/>
-              </a:highlight>
-              <a:latin typeface="Consolas"/>
-              <a:ea typeface="Consolas"/>
-              <a:cs typeface="Consolas"/>
-              <a:sym typeface="Consolas"/>
-            </a:endParaRPr>
-          </a:p>
-          <a:p>
-            <a:pPr indent="0" lvl="0" marL="0" rtl="0" algn="l">
-              <a:lnSpc>
-                <a:spcPct val="115000"/>
-              </a:lnSpc>
-              <a:spcBef>
-                <a:spcPts val="0"/>
-              </a:spcBef>
-              <a:spcAft>
-                <a:spcPts val="0"/>
-              </a:spcAft>
-              <a:buNone/>
-            </a:pPr>
-            <a:r>
-              <a:rPr lang="en" sz="1000">
-                <a:highlight>
-                  <a:schemeClr val="dk2"/>
-                </a:highlight>
-                <a:latin typeface="Consolas"/>
-                <a:ea typeface="Consolas"/>
-                <a:cs typeface="Consolas"/>
-                <a:sym typeface="Consolas"/>
-              </a:rPr>
-              <a:t>{ "name": "Repeater",</a:t>
-            </a:r>
-            <a:endParaRPr sz="1000">
-              <a:solidFill>
-                <a:srgbClr val="CCCCCC"/>
-              </a:solidFill>
-              <a:highlight>
-                <a:schemeClr val="dk2"/>
-              </a:highlight>
-              <a:latin typeface="Consolas"/>
-              <a:ea typeface="Consolas"/>
-              <a:cs typeface="Consolas"/>
-              <a:sym typeface="Consolas"/>
-            </a:endParaRPr>
-          </a:p>
-          <a:p>
-            <a:pPr indent="0" lvl="0" marL="0" rtl="0" algn="l">
-              <a:lnSpc>
-                <a:spcPct val="115000"/>
-              </a:lnSpc>
-              <a:spcBef>
-                <a:spcPts val="0"/>
-              </a:spcBef>
-              <a:spcAft>
-                <a:spcPts val="0"/>
-              </a:spcAft>
-              <a:buNone/>
-            </a:pPr>
-            <a:r>
-              <a:rPr lang="en" sz="1000">
-                <a:highlight>
-                  <a:schemeClr val="dk2"/>
-                </a:highlight>
-                <a:latin typeface="Consolas"/>
-                <a:ea typeface="Consolas"/>
-                <a:cs typeface="Consolas"/>
-                <a:sym typeface="Consolas"/>
-              </a:rPr>
-              <a:t>  "sprite": "repeater",</a:t>
-            </a:r>
-            <a:endParaRPr sz="1000">
-              <a:solidFill>
-                <a:srgbClr val="CCCCCC"/>
-              </a:solidFill>
-              <a:highlight>
-                <a:schemeClr val="dk2"/>
-              </a:highlight>
-              <a:latin typeface="Consolas"/>
-              <a:ea typeface="Consolas"/>
-              <a:cs typeface="Consolas"/>
-              <a:sym typeface="Consolas"/>
-            </a:endParaRPr>
-          </a:p>
-          <a:p>
-            <a:pPr indent="0" lvl="0" marL="0" rtl="0" algn="l">
-              <a:lnSpc>
-                <a:spcPct val="115000"/>
-              </a:lnSpc>
-              <a:spcBef>
-                <a:spcPts val="0"/>
-              </a:spcBef>
-              <a:spcAft>
-                <a:spcPts val="0"/>
-              </a:spcAft>
-              <a:buNone/>
-            </a:pPr>
-            <a:r>
-              <a:rPr lang="en" sz="1000">
-                <a:highlight>
-                  <a:schemeClr val="dk2"/>
-                </a:highlight>
-                <a:latin typeface="Consolas"/>
-                <a:ea typeface="Consolas"/>
-                <a:cs typeface="Consolas"/>
-                <a:sym typeface="Consolas"/>
-              </a:rPr>
-              <a:t>  "cost": 200, "recharge": 7.5,</a:t>
-            </a:r>
-            <a:endParaRPr sz="1000">
-              <a:solidFill>
-                <a:srgbClr val="CCCCCC"/>
-              </a:solidFill>
-              <a:highlight>
-                <a:schemeClr val="dk2"/>
-              </a:highlight>
-              <a:latin typeface="Consolas"/>
-              <a:ea typeface="Consolas"/>
-              <a:cs typeface="Consolas"/>
-              <a:sym typeface="Consolas"/>
-            </a:endParaRPr>
-          </a:p>
-          <a:p>
-            <a:pPr indent="0" lvl="0" marL="0" rtl="0" algn="l">
-              <a:lnSpc>
-                <a:spcPct val="115000"/>
-              </a:lnSpc>
-              <a:spcBef>
-                <a:spcPts val="0"/>
-              </a:spcBef>
-              <a:spcAft>
-                <a:spcPts val="0"/>
-              </a:spcAft>
-              <a:buNone/>
-            </a:pPr>
-            <a:r>
-              <a:rPr lang="en" sz="1000">
-                <a:highlight>
-                  <a:schemeClr val="dk2"/>
-                </a:highlight>
-                <a:latin typeface="Consolas"/>
-                <a:ea typeface="Consolas"/>
-                <a:cs typeface="Consolas"/>
-                <a:sym typeface="Consolas"/>
-              </a:rPr>
-              <a:t>  "health": 6,</a:t>
-            </a:r>
-            <a:endParaRPr sz="1000">
-              <a:solidFill>
-                <a:srgbClr val="CCCCCC"/>
-              </a:solidFill>
-              <a:highlight>
-                <a:schemeClr val="dk2"/>
-              </a:highlight>
-              <a:latin typeface="Consolas"/>
-              <a:ea typeface="Consolas"/>
-              <a:cs typeface="Consolas"/>
-              <a:sym typeface="Consolas"/>
-            </a:endParaRPr>
-          </a:p>
-          <a:p>
-            <a:pPr indent="0" lvl="0" marL="0" rtl="0" algn="l">
-              <a:lnSpc>
-                <a:spcPct val="115000"/>
-              </a:lnSpc>
-              <a:spcBef>
-                <a:spcPts val="0"/>
-              </a:spcBef>
-              <a:spcAft>
-                <a:spcPts val="0"/>
-              </a:spcAft>
-              <a:buNone/>
-            </a:pPr>
-            <a:r>
-              <a:rPr lang="en" sz="1000">
-                <a:highlight>
-                  <a:schemeClr val="dk2"/>
-                </a:highlight>
-                <a:latin typeface="Consolas"/>
-                <a:ea typeface="Consolas"/>
-                <a:cs typeface="Consolas"/>
-                <a:sym typeface="Consolas"/>
-              </a:rPr>
-              <a:t>  "shooter": {</a:t>
-            </a:r>
-            <a:endParaRPr sz="1000">
-              <a:solidFill>
-                <a:srgbClr val="CCCCCC"/>
-              </a:solidFill>
-              <a:highlight>
-                <a:schemeClr val="dk2"/>
-              </a:highlight>
-              <a:latin typeface="Consolas"/>
-              <a:ea typeface="Consolas"/>
-              <a:cs typeface="Consolas"/>
-              <a:sym typeface="Consolas"/>
-            </a:endParaRPr>
-          </a:p>
-          <a:p>
-            <a:pPr indent="0" lvl="0" marL="0" rtl="0" algn="l">
-              <a:lnSpc>
-                <a:spcPct val="115000"/>
-              </a:lnSpc>
-              <a:spcBef>
-                <a:spcPts val="0"/>
-              </a:spcBef>
-              <a:spcAft>
-                <a:spcPts val="0"/>
-              </a:spcAft>
-              <a:buNone/>
-            </a:pPr>
-            <a:r>
-              <a:rPr lang="en" sz="1000">
-                <a:highlight>
-                  <a:schemeClr val="dk2"/>
-                </a:highlight>
-                <a:latin typeface="Consolas"/>
-                <a:ea typeface="Consolas"/>
-                <a:cs typeface="Consolas"/>
-                <a:sym typeface="Consolas"/>
-              </a:rPr>
-              <a:t>    "interval": 1.4, "shots": 2,</a:t>
-            </a:r>
-            <a:endParaRPr sz="1000">
-              <a:solidFill>
-                <a:srgbClr val="CCCCCC"/>
-              </a:solidFill>
-              <a:highlight>
-                <a:schemeClr val="dk2"/>
-              </a:highlight>
-              <a:latin typeface="Consolas"/>
-              <a:ea typeface="Consolas"/>
-              <a:cs typeface="Consolas"/>
-              <a:sym typeface="Consolas"/>
-            </a:endParaRPr>
-          </a:p>
-          <a:p>
-            <a:pPr indent="0" lvl="0" marL="0" rtl="0" algn="l">
-              <a:lnSpc>
-                <a:spcPct val="115000"/>
-              </a:lnSpc>
-              <a:spcBef>
-                <a:spcPts val="0"/>
-              </a:spcBef>
-              <a:spcAft>
-                <a:spcPts val="0"/>
-              </a:spcAft>
-              <a:buNone/>
-            </a:pPr>
-            <a:r>
-              <a:rPr lang="en" sz="1000">
-                <a:highlight>
-                  <a:schemeClr val="dk2"/>
-                </a:highlight>
-                <a:latin typeface="Consolas"/>
-                <a:ea typeface="Consolas"/>
-                <a:cs typeface="Consolas"/>
-                <a:sym typeface="Consolas"/>
-              </a:rPr>
-              <a:t>    "damage": 1 } }</a:t>
-            </a:r>
-            <a:endParaRPr sz="1000">
-              <a:solidFill>
-                <a:srgbClr val="CCCCCC"/>
-              </a:solidFill>
-              <a:highlight>
-                <a:schemeClr val="dk2"/>
-              </a:highlight>
-              <a:latin typeface="Consolas"/>
-              <a:ea typeface="Consolas"/>
-              <a:cs typeface="Consolas"/>
-              <a:sym typeface="Consolas"/>
-            </a:endParaRPr>
+            <a:pPr indent="0" lvl="0" marL="0" rtl="0" algn="ctr">
+              <a:spcBef>
+                <a:spcPts val="0"/>
+              </a:spcBef>
+              <a:spcAft>
+                <a:spcPts val="0"/>
+              </a:spcAft>
+              <a:buNone/>
+            </a:pPr>
+            <a:r>
+              <a:rPr lang="en" sz="1800"/>
+              <a:t>Pvz1 → Pvz2: from a class hierarchy to components</a:t>
+            </a:r>
+            <a:endParaRPr sz="1800"/>
           </a:p>
         </p:txBody>
       </p:sp>
@@ -11753,6 +11245,145 @@
 </file>
 
 <file path=ppt/slides/slide21.xml><?xml version="1.0" encoding="utf-8"?>
+<p:sld xmlns:a="http://schemas.openxmlformats.org/drawingml/2006/main" xmlns:p="http://schemas.openxmlformats.org/presentationml/2006/main" xmlns:r="http://schemas.openxmlformats.org/officeDocument/2006/relationships">
+  <p:cSld>
+    <p:spTree>
+      <p:nvGrpSpPr>
+        <p:cNvPr id="1" name=""/>
+        <p:cNvGrpSpPr/>
+        <p:nvPr/>
+      </p:nvGrpSpPr>
+      <p:grpSpPr/>
+      <p:sp>
+        <p:nvSpPr>
+          <p:cNvPr id="2" name="Title 1"/>
+          <p:cNvSpPr>
+            <a:spLocks noGrp="1"/>
+          </p:cNvSpPr>
+          <p:nvPr>
+            <p:ph type="title"/>
+          </p:nvPr>
+        </p:nvSpPr>
+        <p:spPr/>
+        <p:txBody>
+          <a:bodyPr/>
+          <a:lstStyle/>
+          <a:p>
+            <a:pPr indent="0" lvl="0" marL="0" rtl="0" algn="l">
+              <a:spcBef>
+                <a:spcPts val="0"/>
+              </a:spcBef>
+              <a:spcAft>
+                <a:spcPts val="0"/>
+              </a:spcAft>
+              <a:buNone/>
+            </a:pPr>
+            <a:r>
+              <a:rPr lang="en"/>
+              <a:t>Try It: A New Plant From Parts</a:t>
+            </a:r>
+            <a:endParaRPr/>
+          </a:p>
+        </p:txBody>
+      </p:sp>
+      <p:sp>
+        <p:nvSpPr>
+          <p:cNvPr id="3" name="Text Placeholder 2"/>
+          <p:cNvSpPr>
+            <a:spLocks noGrp="1"/>
+          </p:cNvSpPr>
+          <p:nvPr>
+            <p:ph type="body" idx="1"/>
+          </p:nvPr>
+        </p:nvSpPr>
+        <p:spPr>
+          <a:xfrm>
+            <a:off x="311700" y="885950"/>
+            <a:ext cx="8520600" cy="1673352"/>
+          </a:xfrm>
+        </p:spPr>
+        <p:txBody>
+          <a:bodyPr/>
+          <a:lstStyle/>
+          <a:p>
+            <a:pPr indent="-330200" lvl="0" marL="457200" rtl="0" algn="l">
+              <a:spcBef>
+                <a:spcPts val="0"/>
+              </a:spcBef>
+              <a:spcAft>
+                <a:spcPts val="0"/>
+              </a:spcAft>
+              <a:buSzPts val="1600"/>
+              <a:buChar char="●"/>
+            </a:pPr>
+            <a:r>
+              <a:rPr lang="en"/>
+              <a:t>In Pvz2’s Recipes:</a:t>
+            </a:r>
+            <a:endParaRPr/>
+          </a:p>
+          <a:p>
+            <a:pPr indent="-330200" lvl="0" marL="457200" rtl="0" algn="l">
+              <a:spcBef>
+                <a:spcPts val="0"/>
+              </a:spcBef>
+              <a:spcAft>
+                <a:spcPts val="0"/>
+              </a:spcAft>
+              <a:buSzPts val="1600"/>
+              <a:buChar char="●"/>
+            </a:pPr>
+            <a:r>
+              <a:rPr lang="en"/>
+              <a:t>A plant that shoots and makes sun</a:t>
+            </a:r>
+            <a:endParaRPr/>
+          </a:p>
+          <a:p>
+            <a:pPr indent="-330200" lvl="0" marL="457200" rtl="0" algn="l">
+              <a:spcBef>
+                <a:spcPts val="0"/>
+              </a:spcBef>
+              <a:spcAft>
+                <a:spcPts val="0"/>
+              </a:spcAft>
+              <a:buSzPts val="1600"/>
+              <a:buChar char="●"/>
+            </a:pPr>
+            <a:r>
+              <a:rPr lang="en"/>
+              <a:t>Give it a packet in Game1 (sunflower sprite)</a:t>
+            </a:r>
+            <a:endParaRPr/>
+          </a:p>
+          <a:p>
+            <a:pPr indent="-330200" lvl="0" marL="457200" rtl="0" algn="l">
+              <a:spcBef>
+                <a:spcPts val="0"/>
+              </a:spcBef>
+              <a:spcAft>
+                <a:spcPts val="0"/>
+              </a:spcAft>
+              <a:buSzPts val="1600"/>
+              <a:buChar char="●"/>
+            </a:pPr>
+            <a:r>
+              <a:rPr lang="en"/>
+              <a:t>How much new code?</a:t>
+            </a:r>
+            <a:endParaRPr/>
+          </a:p>
+        </p:txBody>
+      </p:sp>
+    </p:spTree>
+  </p:cSld>
+  <p:clrMapOvr>
+    <a:masterClrMapping/>
+  </p:clrMapOvr>
+</p:sld>
+</file>
+
+<file path=ppt/slides/slide22.xml><?xml version="1.0" encoding="utf-8"?>
 <p:sld xmlns:a="http://schemas.openxmlformats.org/drawingml/2006/main" xmlns:p="http://schemas.openxmlformats.org/presentationml/2006/main" xmlns:r="http://schemas.openxmlformats.org/officeDocument/2006/relationships">
   <p:cSld>
     <p:spTree>
@@ -11796,7 +11427,7 @@
             </a:pPr>
             <a:r>
               <a:rPr lang="en"/>
-              <a:t>The Type Creates Instances</a:t>
+              <a:t>Type Object</a:t>
             </a:r>
             <a:endParaRPr/>
           </a:p>
@@ -11844,7 +11475,7 @@
                   <a:srgbClr val="DEE2E6"/>
                 </a:solidFill>
               </a:rPr>
-              <a:t>A component for each kind of data</a:t>
+              <a:t>A peashooter’s cost: not in any one peashooter</a:t>
             </a:r>
             <a:endParaRPr/>
           </a:p>
@@ -11868,7 +11499,7 @@
                   <a:srgbClr val="DEE2E6"/>
                 </a:solidFill>
               </a:rPr>
-              <a:t>New kinds from old components: data only</a:t>
+              <a:t>One PlantType per kind of plant</a:t>
             </a:r>
             <a:endParaRPr/>
           </a:p>
@@ -11892,7 +11523,7 @@
                   <a:srgbClr val="6C757D"/>
                 </a:solidFill>
               </a:rPr>
-              <a:t>A Buckethead: a zombie type with armour</a:t>
+              <a:t>Loaded from plants.json</a:t>
             </a:r>
             <a:endParaRPr/>
           </a:p>
@@ -11916,14 +11547,14 @@
                   <a:srgbClr val="DEE2E6"/>
                 </a:solidFill>
               </a:rPr>
-              <a:t>A new ability: one component, and data</a:t>
+              <a:t>Types hold what all instances share</a:t>
             </a:r>
             <a:endParaRPr/>
           </a:p>
           <a:p>
-            <a:pPr indent="-317500" lvl="1" marL="914400" rtl="0" algn="l">
+            <a:pPr indent="-330200" lvl="0" marL="457200" rtl="0" algn="l">
               <a:buClr>
-                <a:srgbClr val="6C757D"/>
+                <a:srgbClr val="DEE2E6"/>
               </a:buClr>
               <a:spcBef>
                 <a:spcPts val="0"/>
@@ -11931,16 +11562,16 @@
               <a:spcAft>
                 <a:spcPts val="0"/>
               </a:spcAft>
-              <a:buSzPts val="1400"/>
-              <a:buChar char="○"/>
-            </a:pPr>
-            <a:r>
-              <a:rPr lang="en" sz="1400">
+              <a:buSzPts val="1600"/>
+              <a:buChar char="●"/>
+            </a:pPr>
+            <a:r>
+              <a:rPr lang="en" sz="1600">
                 <a:solidFill>
-                  <a:srgbClr val="6C757D"/>
+                  <a:srgbClr val="DEE2E6"/>
                 </a:solidFill>
               </a:rPr>
-              <a:t>The Cherry Bomb: Explode</a:t>
+              <a:t>Instances hold their own state</a:t>
             </a:r>
             <a:endParaRPr/>
           </a:p>
@@ -11991,7 +11622,7 @@
                 <a:cs typeface="Consolas"/>
                 <a:sym typeface="Consolas"/>
               </a:rPr>
-              <a:t>public Entity Create(World world)</a:t>
+              <a:t>// plants.json</a:t>
             </a:r>
             <a:endParaRPr sz="1000">
               <a:solidFill>
@@ -12029,7 +11660,7 @@
                 <a:cs typeface="Consolas"/>
                 <a:sym typeface="Consolas"/>
               </a:rPr>
-              <a:t>{</a:t>
+              <a:t>{ "name": "Sunflower",</a:t>
             </a:r>
             <a:endParaRPr sz="1000">
               <a:solidFill>
@@ -12067,7 +11698,7 @@
                 <a:cs typeface="Consolas"/>
                 <a:sym typeface="Consolas"/>
               </a:rPr>
-              <a:t>    var plant = new Entity(world)</a:t>
+              <a:t>  "sprite": "sunflower",</a:t>
             </a:r>
             <a:endParaRPr sz="1000">
               <a:solidFill>
@@ -12105,7 +11736,7 @@
                 <a:cs typeface="Consolas"/>
                 <a:sym typeface="Consolas"/>
               </a:rPr>
-              <a:t>        .With(new SpriteRenderer(</a:t>
+              <a:t>  "cost": 50, "recharge": 7.5,</a:t>
             </a:r>
             <a:endParaRPr sz="1000">
               <a:solidFill>
@@ -12143,7 +11774,7 @@
                 <a:cs typeface="Consolas"/>
                 <a:sym typeface="Consolas"/>
               </a:rPr>
-              <a:t>            world.Atlas.GetRegion(Sprite)))</a:t>
+              <a:t>  "health": 6,</a:t>
             </a:r>
             <a:endParaRPr sz="1000">
               <a:solidFill>
@@ -12181,7 +11812,7 @@
                 <a:cs typeface="Consolas"/>
                 <a:sym typeface="Consolas"/>
               </a:rPr>
-              <a:t>        .With(new Health(Health));</a:t>
+              <a:t>  "sunProducer": {</a:t>
             </a:r>
             <a:endParaRPr sz="1000">
               <a:solidFill>
@@ -12219,7 +11850,7 @@
                 <a:cs typeface="Consolas"/>
                 <a:sym typeface="Consolas"/>
               </a:rPr>
-              <a:t/>
+              <a:t>    "interval": 12, "amount": 25 } },</a:t>
             </a:r>
             <a:endParaRPr sz="1000">
               <a:solidFill>
@@ -12257,7 +11888,7 @@
                 <a:cs typeface="Consolas"/>
                 <a:sym typeface="Consolas"/>
               </a:rPr>
-              <a:t>    if (Shooter != null)</a:t>
+              <a:t>{ "name": "Repeater",</a:t>
             </a:r>
             <a:endParaRPr sz="1000">
               <a:solidFill>
@@ -12295,7 +11926,7 @@
                 <a:cs typeface="Consolas"/>
                 <a:sym typeface="Consolas"/>
               </a:rPr>
-              <a:t>        plant.Add(new Shooter(Shooter.Interval,</a:t>
+              <a:t>  "sprite": "repeater",</a:t>
             </a:r>
             <a:endParaRPr sz="1000">
               <a:solidFill>
@@ -12333,7 +11964,7 @@
                 <a:cs typeface="Consolas"/>
                 <a:sym typeface="Consolas"/>
               </a:rPr>
-              <a:t>            Shooter.Shots, Shooter.Damage));</a:t>
+              <a:t>  "cost": 200, "recharge": 7.5,</a:t>
             </a:r>
             <a:endParaRPr sz="1000">
               <a:solidFill>
@@ -12371,7 +12002,7 @@
                 <a:cs typeface="Consolas"/>
                 <a:sym typeface="Consolas"/>
               </a:rPr>
-              <a:t>    if (SunProducer != null)</a:t>
+              <a:t>  "health": 6,</a:t>
             </a:r>
             <a:endParaRPr sz="1000">
               <a:solidFill>
@@ -12409,7 +12040,7 @@
                 <a:cs typeface="Consolas"/>
                 <a:sym typeface="Consolas"/>
               </a:rPr>
-              <a:t>        plant.Add(new SunProducer(</a:t>
+              <a:t>  "shooter": {</a:t>
             </a:r>
             <a:endParaRPr sz="1000">
               <a:solidFill>
@@ -12447,7 +12078,7 @@
                 <a:cs typeface="Consolas"/>
                 <a:sym typeface="Consolas"/>
               </a:rPr>
-              <a:t>            SunProducer.Interval, SunProducer.Amount));</a:t>
+              <a:t>    "interval": 1.4, "shots": 2,</a:t>
             </a:r>
             <a:endParaRPr sz="1000">
               <a:solidFill>
@@ -12485,7 +12116,7 @@
                 <a:cs typeface="Consolas"/>
                 <a:sym typeface="Consolas"/>
               </a:rPr>
-              <a:t>    return plant;</a:t>
+              <a:t>    "damage": 1 } }</a:t>
             </a:r>
             <a:endParaRPr sz="1000">
               <a:solidFill>
@@ -12500,6 +12131,232 @@
               <a:sym typeface="Consolas"/>
             </a:endParaRPr>
           </a:p>
+        </p:txBody>
+      </p:sp>
+    </p:spTree>
+  </p:cSld>
+  <p:clrMapOvr>
+    <a:masterClrMapping/>
+  </p:clrMapOvr>
+</p:sld>
+</file>
+
+<file path=ppt/slides/slide23.xml><?xml version="1.0" encoding="utf-8"?>
+<p:sld xmlns:a="http://schemas.openxmlformats.org/drawingml/2006/main" xmlns:p="http://schemas.openxmlformats.org/presentationml/2006/main" xmlns:r="http://schemas.openxmlformats.org/officeDocument/2006/relationships">
+  <p:cSld>
+    <p:spTree>
+      <p:nvGrpSpPr>
+        <p:cNvPr id="1" name=""/>
+        <p:cNvGrpSpPr/>
+        <p:nvPr/>
+      </p:nvGrpSpPr>
+      <p:grpSpPr/>
+      <p:sp>
+        <p:nvSpPr>
+          <p:cNvPr id="140" name="Google Shape;140;p23"/>
+          <p:cNvSpPr txBox="1"/>
+          <p:nvPr>
+            <p:ph type="title"/>
+          </p:nvPr>
+        </p:nvSpPr>
+        <p:spPr>
+          <a:xfrm>
+            <a:off x="311700" y="195615"/>
+            <a:ext cx="8520600" cy="572700"/>
+          </a:xfrm>
+          <a:prstGeom prst="rect">
+            <a:avLst/>
+          </a:prstGeom>
+        </p:spPr>
+        <p:txBody>
+          <a:bodyPr anchorCtr="0" anchor="t" bIns="91425" lIns="91425" spcFirstLastPara="1" rIns="91425" wrap="square" tIns="91425">
+            <a:normAutofit fontScale="90000"/>
+          </a:bodyPr>
+          <a:lstStyle/>
+          <a:p>
+            <a:pPr indent="0" lvl="0" marL="0" rtl="0" algn="l">
+              <a:spcBef>
+                <a:spcPts val="0"/>
+              </a:spcBef>
+              <a:spcAft>
+                <a:spcPts val="0"/>
+              </a:spcAft>
+              <a:buNone/>
+            </a:pPr>
+            <a:r>
+              <a:rPr lang="en"/>
+              <a:t>The Type Creates Instances</a:t>
+            </a:r>
+            <a:endParaRPr/>
+          </a:p>
+        </p:txBody>
+      </p:sp>
+      <p:sp>
+        <p:nvSpPr>
+          <p:cNvPr id="293" name="Google Shape;293;p45"/>
+          <p:cNvSpPr txBox="1"/>
+          <p:nvPr>
+            <p:ph type="title"/>
+          </p:nvPr>
+        </p:nvSpPr>
+        <p:spPr>
+          <a:xfrm>
+            <a:off x="311700" y="1152475"/>
+            <a:ext cx="3700000" cy="3500000"/>
+          </a:xfrm>
+          <a:prstGeom prst="rect">
+            <a:avLst/>
+          </a:prstGeom>
+        </p:spPr>
+        <p:txBody>
+          <a:bodyPr anchorCtr="0" anchor="t" bIns="91425" lIns="91425" spcFirstLastPara="1" rIns="91425" wrap="square" tIns="91425">
+            <a:normAutofit fontScale="90000"/>
+          </a:bodyPr>
+          <a:lstStyle/>
+          <a:p>
+            <a:pPr indent="-330200" lvl="0" marL="457200" rtl="0" algn="l">
+              <a:buClr>
+                <a:srgbClr val="DEE2E6"/>
+              </a:buClr>
+              <a:spcBef>
+                <a:spcPts val="0"/>
+              </a:spcBef>
+              <a:spcAft>
+                <a:spcPts val="0"/>
+              </a:spcAft>
+              <a:buSzPts val="1600"/>
+              <a:buChar char="●"/>
+            </a:pPr>
+            <a:r>
+              <a:rPr lang="en" sz="1600">
+                <a:solidFill>
+                  <a:srgbClr val="DEE2E6"/>
+                </a:solidFill>
+              </a:rPr>
+              <a:t>A component for each kind of data</a:t>
+            </a:r>
+            <a:endParaRPr/>
+          </a:p>
+          <a:p>
+            <a:pPr indent="-330200" lvl="0" marL="457200" rtl="0" algn="l">
+              <a:buClr>
+                <a:srgbClr val="DEE2E6"/>
+              </a:buClr>
+              <a:spcBef>
+                <a:spcPts val="0"/>
+              </a:spcBef>
+              <a:spcAft>
+                <a:spcPts val="0"/>
+              </a:spcAft>
+              <a:buSzPts val="1600"/>
+              <a:buChar char="●"/>
+            </a:pPr>
+            <a:r>
+              <a:rPr lang="en" sz="1600">
+                <a:solidFill>
+                  <a:srgbClr val="DEE2E6"/>
+                </a:solidFill>
+              </a:rPr>
+              <a:t>New kinds from old components: data only</a:t>
+            </a:r>
+            <a:endParaRPr/>
+          </a:p>
+          <a:p>
+            <a:pPr indent="-317500" lvl="1" marL="914400" rtl="0" algn="l">
+              <a:buClr>
+                <a:srgbClr val="6C757D"/>
+              </a:buClr>
+              <a:spcBef>
+                <a:spcPts val="0"/>
+              </a:spcBef>
+              <a:spcAft>
+                <a:spcPts val="0"/>
+              </a:spcAft>
+              <a:buSzPts val="1400"/>
+              <a:buChar char="○"/>
+            </a:pPr>
+            <a:r>
+              <a:rPr lang="en" sz="1400">
+                <a:solidFill>
+                  <a:srgbClr val="6C757D"/>
+                </a:solidFill>
+              </a:rPr>
+              <a:t>A Buckethead: a zombie type with armour</a:t>
+            </a:r>
+            <a:endParaRPr/>
+          </a:p>
+          <a:p>
+            <a:pPr indent="-330200" lvl="0" marL="457200" rtl="0" algn="l">
+              <a:buClr>
+                <a:srgbClr val="DEE2E6"/>
+              </a:buClr>
+              <a:spcBef>
+                <a:spcPts val="0"/>
+              </a:spcBef>
+              <a:spcAft>
+                <a:spcPts val="0"/>
+              </a:spcAft>
+              <a:buSzPts val="1600"/>
+              <a:buChar char="●"/>
+            </a:pPr>
+            <a:r>
+              <a:rPr lang="en" sz="1600">
+                <a:solidFill>
+                  <a:srgbClr val="DEE2E6"/>
+                </a:solidFill>
+              </a:rPr>
+              <a:t>A new ability: one component, and data</a:t>
+            </a:r>
+            <a:endParaRPr/>
+          </a:p>
+          <a:p>
+            <a:pPr indent="-317500" lvl="1" marL="914400" rtl="0" algn="l">
+              <a:buClr>
+                <a:srgbClr val="6C757D"/>
+              </a:buClr>
+              <a:spcBef>
+                <a:spcPts val="0"/>
+              </a:spcBef>
+              <a:spcAft>
+                <a:spcPts val="0"/>
+              </a:spcAft>
+              <a:buSzPts val="1400"/>
+              <a:buChar char="○"/>
+            </a:pPr>
+            <a:r>
+              <a:rPr lang="en" sz="1400">
+                <a:solidFill>
+                  <a:srgbClr val="6C757D"/>
+                </a:solidFill>
+              </a:rPr>
+              <a:t>The Cherry Bomb: Explode</a:t>
+            </a:r>
+            <a:endParaRPr/>
+          </a:p>
+        </p:txBody>
+      </p:sp>
+      <p:sp>
+        <p:nvSpPr>
+          <p:cNvPr id="141" name="Google Shape;141;p23"/>
+          <p:cNvSpPr txBox="1"/>
+          <p:nvPr>
+            <p:ph idx="2" type="body"/>
+          </p:nvPr>
+        </p:nvSpPr>
+        <p:spPr>
+          <a:xfrm>
+            <a:off x="4150000" y="1152475"/>
+            <a:ext cx="4750000" cy="3600000"/>
+          </a:xfrm>
+          <a:prstGeom prst="rect">
+            <a:avLst/>
+          </a:prstGeom>
+        </p:spPr>
+        <p:txBody>
+          <a:bodyPr anchorCtr="0" anchor="t" bIns="91425" lIns="91425" spcFirstLastPara="1" rIns="91425" wrap="square" tIns="91425">
+            <a:noAutofit/>
+          </a:bodyPr>
+          <a:lstStyle/>
           <a:p>
             <a:pPr indent="0" lvl="0" marL="0" rtl="0" algn="l">
               <a:lnSpc>
@@ -12523,7 +12380,7 @@
                 <a:cs typeface="Consolas"/>
                 <a:sym typeface="Consolas"/>
               </a:rPr>
-              <a:t>}</a:t>
+              <a:t>public Entity Create(World world)</a:t>
             </a:r>
             <a:endParaRPr sz="1000">
               <a:solidFill>
@@ -12538,6 +12395,538 @@
               <a:sym typeface="Consolas"/>
             </a:endParaRPr>
           </a:p>
+          <a:p>
+            <a:pPr indent="0" lvl="0" marL="0" rtl="0" algn="l">
+              <a:lnSpc>
+                <a:spcPct val="115000"/>
+              </a:lnSpc>
+              <a:spcBef>
+                <a:spcPts val="0"/>
+              </a:spcBef>
+              <a:spcAft>
+                <a:spcPts val="0"/>
+              </a:spcAft>
+              <a:buNone/>
+            </a:pPr>
+            <a:r>
+              <a:rPr lang="en" sz="1000">
+                <a:highlight>
+                  <a:schemeClr val="dk2"/>
+                </a:highlight>
+                <a:latin typeface="Consolas"/>
+                <a:ea typeface="Consolas"/>
+                <a:cs typeface="Consolas"/>
+                <a:sym typeface="Consolas"/>
+              </a:rPr>
+              <a:t>{</a:t>
+            </a:r>
+            <a:endParaRPr sz="1000">
+              <a:solidFill>
+                <a:srgbClr val="CCCCCC"/>
+              </a:solidFill>
+              <a:highlight>
+                <a:schemeClr val="dk2"/>
+              </a:highlight>
+              <a:latin typeface="Consolas"/>
+              <a:ea typeface="Consolas"/>
+              <a:cs typeface="Consolas"/>
+              <a:sym typeface="Consolas"/>
+            </a:endParaRPr>
+          </a:p>
+          <a:p>
+            <a:pPr indent="0" lvl="0" marL="0" rtl="0" algn="l">
+              <a:lnSpc>
+                <a:spcPct val="115000"/>
+              </a:lnSpc>
+              <a:spcBef>
+                <a:spcPts val="0"/>
+              </a:spcBef>
+              <a:spcAft>
+                <a:spcPts val="0"/>
+              </a:spcAft>
+              <a:buNone/>
+            </a:pPr>
+            <a:r>
+              <a:rPr lang="en" sz="1000">
+                <a:highlight>
+                  <a:schemeClr val="dk2"/>
+                </a:highlight>
+                <a:latin typeface="Consolas"/>
+                <a:ea typeface="Consolas"/>
+                <a:cs typeface="Consolas"/>
+                <a:sym typeface="Consolas"/>
+              </a:rPr>
+              <a:t>    var plant = new Entity(world)</a:t>
+            </a:r>
+            <a:endParaRPr sz="1000">
+              <a:solidFill>
+                <a:srgbClr val="CCCCCC"/>
+              </a:solidFill>
+              <a:highlight>
+                <a:schemeClr val="dk2"/>
+              </a:highlight>
+              <a:latin typeface="Consolas"/>
+              <a:ea typeface="Consolas"/>
+              <a:cs typeface="Consolas"/>
+              <a:sym typeface="Consolas"/>
+            </a:endParaRPr>
+          </a:p>
+          <a:p>
+            <a:pPr indent="0" lvl="0" marL="0" rtl="0" algn="l">
+              <a:lnSpc>
+                <a:spcPct val="115000"/>
+              </a:lnSpc>
+              <a:spcBef>
+                <a:spcPts val="0"/>
+              </a:spcBef>
+              <a:spcAft>
+                <a:spcPts val="0"/>
+              </a:spcAft>
+              <a:buNone/>
+            </a:pPr>
+            <a:r>
+              <a:rPr lang="en" sz="1000">
+                <a:highlight>
+                  <a:schemeClr val="dk2"/>
+                </a:highlight>
+                <a:latin typeface="Consolas"/>
+                <a:ea typeface="Consolas"/>
+                <a:cs typeface="Consolas"/>
+                <a:sym typeface="Consolas"/>
+              </a:rPr>
+              <a:t>        .With(new SpriteRenderer(</a:t>
+            </a:r>
+            <a:endParaRPr sz="1000">
+              <a:solidFill>
+                <a:srgbClr val="CCCCCC"/>
+              </a:solidFill>
+              <a:highlight>
+                <a:schemeClr val="dk2"/>
+              </a:highlight>
+              <a:latin typeface="Consolas"/>
+              <a:ea typeface="Consolas"/>
+              <a:cs typeface="Consolas"/>
+              <a:sym typeface="Consolas"/>
+            </a:endParaRPr>
+          </a:p>
+          <a:p>
+            <a:pPr indent="0" lvl="0" marL="0" rtl="0" algn="l">
+              <a:lnSpc>
+                <a:spcPct val="115000"/>
+              </a:lnSpc>
+              <a:spcBef>
+                <a:spcPts val="0"/>
+              </a:spcBef>
+              <a:spcAft>
+                <a:spcPts val="0"/>
+              </a:spcAft>
+              <a:buNone/>
+            </a:pPr>
+            <a:r>
+              <a:rPr lang="en" sz="1000">
+                <a:highlight>
+                  <a:schemeClr val="dk2"/>
+                </a:highlight>
+                <a:latin typeface="Consolas"/>
+                <a:ea typeface="Consolas"/>
+                <a:cs typeface="Consolas"/>
+                <a:sym typeface="Consolas"/>
+              </a:rPr>
+              <a:t>            world.Atlas.GetRegion(Sprite)))</a:t>
+            </a:r>
+            <a:endParaRPr sz="1000">
+              <a:solidFill>
+                <a:srgbClr val="CCCCCC"/>
+              </a:solidFill>
+              <a:highlight>
+                <a:schemeClr val="dk2"/>
+              </a:highlight>
+              <a:latin typeface="Consolas"/>
+              <a:ea typeface="Consolas"/>
+              <a:cs typeface="Consolas"/>
+              <a:sym typeface="Consolas"/>
+            </a:endParaRPr>
+          </a:p>
+          <a:p>
+            <a:pPr indent="0" lvl="0" marL="0" rtl="0" algn="l">
+              <a:lnSpc>
+                <a:spcPct val="115000"/>
+              </a:lnSpc>
+              <a:spcBef>
+                <a:spcPts val="0"/>
+              </a:spcBef>
+              <a:spcAft>
+                <a:spcPts val="0"/>
+              </a:spcAft>
+              <a:buNone/>
+            </a:pPr>
+            <a:r>
+              <a:rPr lang="en" sz="1000">
+                <a:highlight>
+                  <a:schemeClr val="dk2"/>
+                </a:highlight>
+                <a:latin typeface="Consolas"/>
+                <a:ea typeface="Consolas"/>
+                <a:cs typeface="Consolas"/>
+                <a:sym typeface="Consolas"/>
+              </a:rPr>
+              <a:t>        .With(new Health(Health));</a:t>
+            </a:r>
+            <a:endParaRPr sz="1000">
+              <a:solidFill>
+                <a:srgbClr val="CCCCCC"/>
+              </a:solidFill>
+              <a:highlight>
+                <a:schemeClr val="dk2"/>
+              </a:highlight>
+              <a:latin typeface="Consolas"/>
+              <a:ea typeface="Consolas"/>
+              <a:cs typeface="Consolas"/>
+              <a:sym typeface="Consolas"/>
+            </a:endParaRPr>
+          </a:p>
+          <a:p>
+            <a:pPr indent="0" lvl="0" marL="0" rtl="0" algn="l">
+              <a:lnSpc>
+                <a:spcPct val="115000"/>
+              </a:lnSpc>
+              <a:spcBef>
+                <a:spcPts val="0"/>
+              </a:spcBef>
+              <a:spcAft>
+                <a:spcPts val="0"/>
+              </a:spcAft>
+              <a:buNone/>
+            </a:pPr>
+            <a:r>
+              <a:rPr lang="en" sz="1000">
+                <a:highlight>
+                  <a:schemeClr val="dk2"/>
+                </a:highlight>
+                <a:latin typeface="Consolas"/>
+                <a:ea typeface="Consolas"/>
+                <a:cs typeface="Consolas"/>
+                <a:sym typeface="Consolas"/>
+              </a:rPr>
+              <a:t/>
+            </a:r>
+            <a:endParaRPr sz="1000">
+              <a:solidFill>
+                <a:srgbClr val="CCCCCC"/>
+              </a:solidFill>
+              <a:highlight>
+                <a:schemeClr val="dk2"/>
+              </a:highlight>
+              <a:latin typeface="Consolas"/>
+              <a:ea typeface="Consolas"/>
+              <a:cs typeface="Consolas"/>
+              <a:sym typeface="Consolas"/>
+            </a:endParaRPr>
+          </a:p>
+          <a:p>
+            <a:pPr indent="0" lvl="0" marL="0" rtl="0" algn="l">
+              <a:lnSpc>
+                <a:spcPct val="115000"/>
+              </a:lnSpc>
+              <a:spcBef>
+                <a:spcPts val="0"/>
+              </a:spcBef>
+              <a:spcAft>
+                <a:spcPts val="0"/>
+              </a:spcAft>
+              <a:buNone/>
+            </a:pPr>
+            <a:r>
+              <a:rPr lang="en" sz="1000">
+                <a:highlight>
+                  <a:schemeClr val="dk2"/>
+                </a:highlight>
+                <a:latin typeface="Consolas"/>
+                <a:ea typeface="Consolas"/>
+                <a:cs typeface="Consolas"/>
+                <a:sym typeface="Consolas"/>
+              </a:rPr>
+              <a:t>    if (Shooter != null)</a:t>
+            </a:r>
+            <a:endParaRPr sz="1000">
+              <a:solidFill>
+                <a:srgbClr val="CCCCCC"/>
+              </a:solidFill>
+              <a:highlight>
+                <a:schemeClr val="dk2"/>
+              </a:highlight>
+              <a:latin typeface="Consolas"/>
+              <a:ea typeface="Consolas"/>
+              <a:cs typeface="Consolas"/>
+              <a:sym typeface="Consolas"/>
+            </a:endParaRPr>
+          </a:p>
+          <a:p>
+            <a:pPr indent="0" lvl="0" marL="0" rtl="0" algn="l">
+              <a:lnSpc>
+                <a:spcPct val="115000"/>
+              </a:lnSpc>
+              <a:spcBef>
+                <a:spcPts val="0"/>
+              </a:spcBef>
+              <a:spcAft>
+                <a:spcPts val="0"/>
+              </a:spcAft>
+              <a:buNone/>
+            </a:pPr>
+            <a:r>
+              <a:rPr lang="en" sz="1000">
+                <a:highlight>
+                  <a:schemeClr val="dk2"/>
+                </a:highlight>
+                <a:latin typeface="Consolas"/>
+                <a:ea typeface="Consolas"/>
+                <a:cs typeface="Consolas"/>
+                <a:sym typeface="Consolas"/>
+              </a:rPr>
+              <a:t>        plant.Add(new Shooter(Shooter.Interval,</a:t>
+            </a:r>
+            <a:endParaRPr sz="1000">
+              <a:solidFill>
+                <a:srgbClr val="CCCCCC"/>
+              </a:solidFill>
+              <a:highlight>
+                <a:schemeClr val="dk2"/>
+              </a:highlight>
+              <a:latin typeface="Consolas"/>
+              <a:ea typeface="Consolas"/>
+              <a:cs typeface="Consolas"/>
+              <a:sym typeface="Consolas"/>
+            </a:endParaRPr>
+          </a:p>
+          <a:p>
+            <a:pPr indent="0" lvl="0" marL="0" rtl="0" algn="l">
+              <a:lnSpc>
+                <a:spcPct val="115000"/>
+              </a:lnSpc>
+              <a:spcBef>
+                <a:spcPts val="0"/>
+              </a:spcBef>
+              <a:spcAft>
+                <a:spcPts val="0"/>
+              </a:spcAft>
+              <a:buNone/>
+            </a:pPr>
+            <a:r>
+              <a:rPr lang="en" sz="1000">
+                <a:highlight>
+                  <a:schemeClr val="dk2"/>
+                </a:highlight>
+                <a:latin typeface="Consolas"/>
+                <a:ea typeface="Consolas"/>
+                <a:cs typeface="Consolas"/>
+                <a:sym typeface="Consolas"/>
+              </a:rPr>
+              <a:t>            Shooter.Shots, Shooter.Damage));</a:t>
+            </a:r>
+            <a:endParaRPr sz="1000">
+              <a:solidFill>
+                <a:srgbClr val="CCCCCC"/>
+              </a:solidFill>
+              <a:highlight>
+                <a:schemeClr val="dk2"/>
+              </a:highlight>
+              <a:latin typeface="Consolas"/>
+              <a:ea typeface="Consolas"/>
+              <a:cs typeface="Consolas"/>
+              <a:sym typeface="Consolas"/>
+            </a:endParaRPr>
+          </a:p>
+          <a:p>
+            <a:pPr indent="0" lvl="0" marL="0" rtl="0" algn="l">
+              <a:lnSpc>
+                <a:spcPct val="115000"/>
+              </a:lnSpc>
+              <a:spcBef>
+                <a:spcPts val="0"/>
+              </a:spcBef>
+              <a:spcAft>
+                <a:spcPts val="0"/>
+              </a:spcAft>
+              <a:buNone/>
+            </a:pPr>
+            <a:r>
+              <a:rPr lang="en" sz="1000">
+                <a:highlight>
+                  <a:schemeClr val="dk2"/>
+                </a:highlight>
+                <a:latin typeface="Consolas"/>
+                <a:ea typeface="Consolas"/>
+                <a:cs typeface="Consolas"/>
+                <a:sym typeface="Consolas"/>
+              </a:rPr>
+              <a:t>    if (SunProducer != null)</a:t>
+            </a:r>
+            <a:endParaRPr sz="1000">
+              <a:solidFill>
+                <a:srgbClr val="CCCCCC"/>
+              </a:solidFill>
+              <a:highlight>
+                <a:schemeClr val="dk2"/>
+              </a:highlight>
+              <a:latin typeface="Consolas"/>
+              <a:ea typeface="Consolas"/>
+              <a:cs typeface="Consolas"/>
+              <a:sym typeface="Consolas"/>
+            </a:endParaRPr>
+          </a:p>
+          <a:p>
+            <a:pPr indent="0" lvl="0" marL="0" rtl="0" algn="l">
+              <a:lnSpc>
+                <a:spcPct val="115000"/>
+              </a:lnSpc>
+              <a:spcBef>
+                <a:spcPts val="0"/>
+              </a:spcBef>
+              <a:spcAft>
+                <a:spcPts val="0"/>
+              </a:spcAft>
+              <a:buNone/>
+            </a:pPr>
+            <a:r>
+              <a:rPr lang="en" sz="1000">
+                <a:highlight>
+                  <a:schemeClr val="dk2"/>
+                </a:highlight>
+                <a:latin typeface="Consolas"/>
+                <a:ea typeface="Consolas"/>
+                <a:cs typeface="Consolas"/>
+                <a:sym typeface="Consolas"/>
+              </a:rPr>
+              <a:t>        plant.Add(new SunProducer(</a:t>
+            </a:r>
+            <a:endParaRPr sz="1000">
+              <a:solidFill>
+                <a:srgbClr val="CCCCCC"/>
+              </a:solidFill>
+              <a:highlight>
+                <a:schemeClr val="dk2"/>
+              </a:highlight>
+              <a:latin typeface="Consolas"/>
+              <a:ea typeface="Consolas"/>
+              <a:cs typeface="Consolas"/>
+              <a:sym typeface="Consolas"/>
+            </a:endParaRPr>
+          </a:p>
+          <a:p>
+            <a:pPr indent="0" lvl="0" marL="0" rtl="0" algn="l">
+              <a:lnSpc>
+                <a:spcPct val="115000"/>
+              </a:lnSpc>
+              <a:spcBef>
+                <a:spcPts val="0"/>
+              </a:spcBef>
+              <a:spcAft>
+                <a:spcPts val="0"/>
+              </a:spcAft>
+              <a:buNone/>
+            </a:pPr>
+            <a:r>
+              <a:rPr lang="en" sz="1000">
+                <a:highlight>
+                  <a:schemeClr val="dk2"/>
+                </a:highlight>
+                <a:latin typeface="Consolas"/>
+                <a:ea typeface="Consolas"/>
+                <a:cs typeface="Consolas"/>
+                <a:sym typeface="Consolas"/>
+              </a:rPr>
+              <a:t>            SunProducer.Interval, SunProducer.Amount));</a:t>
+            </a:r>
+            <a:endParaRPr sz="1000">
+              <a:solidFill>
+                <a:srgbClr val="CCCCCC"/>
+              </a:solidFill>
+              <a:highlight>
+                <a:schemeClr val="dk2"/>
+              </a:highlight>
+              <a:latin typeface="Consolas"/>
+              <a:ea typeface="Consolas"/>
+              <a:cs typeface="Consolas"/>
+              <a:sym typeface="Consolas"/>
+            </a:endParaRPr>
+          </a:p>
+          <a:p>
+            <a:pPr indent="0" lvl="0" marL="0" rtl="0" algn="l">
+              <a:lnSpc>
+                <a:spcPct val="115000"/>
+              </a:lnSpc>
+              <a:spcBef>
+                <a:spcPts val="0"/>
+              </a:spcBef>
+              <a:spcAft>
+                <a:spcPts val="0"/>
+              </a:spcAft>
+              <a:buNone/>
+            </a:pPr>
+            <a:r>
+              <a:rPr lang="en" sz="1000">
+                <a:highlight>
+                  <a:schemeClr val="dk2"/>
+                </a:highlight>
+                <a:latin typeface="Consolas"/>
+                <a:ea typeface="Consolas"/>
+                <a:cs typeface="Consolas"/>
+                <a:sym typeface="Consolas"/>
+              </a:rPr>
+              <a:t>    return plant;</a:t>
+            </a:r>
+            <a:endParaRPr sz="1000">
+              <a:solidFill>
+                <a:srgbClr val="CCCCCC"/>
+              </a:solidFill>
+              <a:highlight>
+                <a:schemeClr val="dk2"/>
+              </a:highlight>
+              <a:latin typeface="Consolas"/>
+              <a:ea typeface="Consolas"/>
+              <a:cs typeface="Consolas"/>
+              <a:sym typeface="Consolas"/>
+            </a:endParaRPr>
+          </a:p>
+          <a:p>
+            <a:pPr indent="0" lvl="0" marL="0" rtl="0" algn="l">
+              <a:lnSpc>
+                <a:spcPct val="115000"/>
+              </a:lnSpc>
+              <a:spcBef>
+                <a:spcPts val="0"/>
+              </a:spcBef>
+              <a:spcAft>
+                <a:spcPts val="0"/>
+              </a:spcAft>
+              <a:buNone/>
+            </a:pPr>
+            <a:r>
+              <a:rPr lang="en" sz="1000">
+                <a:highlight>
+                  <a:schemeClr val="dk2"/>
+                </a:highlight>
+                <a:latin typeface="Consolas"/>
+                <a:ea typeface="Consolas"/>
+                <a:cs typeface="Consolas"/>
+                <a:sym typeface="Consolas"/>
+              </a:rPr>
+              <a:t>}</a:t>
+            </a:r>
+            <a:endParaRPr sz="1000">
+              <a:solidFill>
+                <a:srgbClr val="CCCCCC"/>
+              </a:solidFill>
+              <a:highlight>
+                <a:schemeClr val="dk2"/>
+              </a:highlight>
+              <a:latin typeface="Consolas"/>
+              <a:ea typeface="Consolas"/>
+              <a:cs typeface="Consolas"/>
+              <a:sym typeface="Consolas"/>
+            </a:endParaRPr>
+          </a:p>
         </p:txBody>
       </p:sp>
     </p:spTree>
@@ -12548,7 +12937,7 @@
 </p:sld>
 </file>
 
-<file path=ppt/slides/slide22.xml><?xml version="1.0" encoding="utf-8"?>
+<file path=ppt/slides/slide24.xml><?xml version="1.0" encoding="utf-8"?>
 <p:sld xmlns:a="http://schemas.openxmlformats.org/drawingml/2006/main" xmlns:p="http://schemas.openxmlformats.org/presentationml/2006/main" xmlns:r="http://schemas.openxmlformats.org/officeDocument/2006/relationships">
   <p:cSld>
     <p:spTree>
@@ -12865,7 +13254,7 @@
 </p:sld>
 </file>
 
-<file path=ppt/slides/slide23.xml><?xml version="1.0" encoding="utf-8"?>
+<file path=ppt/slides/slide25.xml><?xml version="1.0" encoding="utf-8"?>
 <p:sld xmlns:a="http://schemas.openxmlformats.org/drawingml/2006/main" xmlns:p="http://schemas.openxmlformats.org/presentationml/2006/main" xmlns:r="http://schemas.openxmlformats.org/officeDocument/2006/relationships">
   <p:cSld>
     <p:spTree>
@@ -12992,7 +13381,7 @@
 </p:sld>
 </file>
 
-<file path=ppt/slides/slide24.xml><?xml version="1.0" encoding="utf-8"?>
+<file path=ppt/slides/slide26.xml><?xml version="1.0" encoding="utf-8"?>
 <p:sld xmlns:a="http://schemas.openxmlformats.org/drawingml/2006/main" xmlns:p="http://schemas.openxmlformats.org/presentationml/2006/main" xmlns:r="http://schemas.openxmlformats.org/officeDocument/2006/relationships">
   <p:cSld>
     <p:spTree>
@@ -13131,7 +13520,7 @@
 </p:sld>
 </file>
 
-<file path=ppt/slides/slide25.xml><?xml version="1.0" encoding="utf-8"?>
+<file path=ppt/slides/slide27.xml><?xml version="1.0" encoding="utf-8"?>
 <p:sld xmlns:a="http://schemas.openxmlformats.org/drawingml/2006/main" xmlns:p="http://schemas.openxmlformats.org/presentationml/2006/main" xmlns:r="http://schemas.openxmlformats.org/officeDocument/2006/relationships">
   <p:cSld>
     <p:spTree>
@@ -13306,7 +13695,7 @@
 </p:sld>
 </file>
 
-<file path=ppt/slides/slide26.xml><?xml version="1.0" encoding="utf-8"?>
+<file path=ppt/slides/slide28.xml><?xml version="1.0" encoding="utf-8"?>
 <p:sld xmlns:a="http://schemas.openxmlformats.org/drawingml/2006/main" xmlns:r="http://schemas.openxmlformats.org/officeDocument/2006/relationships" xmlns:mc="http://schemas.openxmlformats.org/markup-compatibility/2006" xmlns:mv="urn:schemas-microsoft-com:mac:vml" xmlns:p="http://schemas.openxmlformats.org/presentationml/2006/main" xmlns:c="http://schemas.openxmlformats.org/drawingml/2006/chart" xmlns:dgm="http://schemas.openxmlformats.org/drawingml/2006/diagram" xmlns:o="urn:schemas-microsoft-com:office:office" xmlns:v="urn:schemas-microsoft-com:vml" xmlns:pvml="urn:schemas-microsoft-com:office:powerpoint" xmlns:com="http://schemas.openxmlformats.org/drawingml/2006/compatibility" xmlns:p14="http://schemas.microsoft.com/office/powerpoint/2010/main" xmlns:p15="http://schemas.microsoft.com/office/powerpoint/2012/main" xmlns:ahyp="http://schemas.microsoft.com/office/drawing/2018/hyperlinkcolor">
   <p:cSld>
     <p:spTree>
@@ -13440,7 +13829,7 @@
 </p:sld>
 </file>
 
-<file path=ppt/slides/slide27.xml><?xml version="1.0" encoding="utf-8"?>
+<file path=ppt/slides/slide29.xml><?xml version="1.0" encoding="utf-8"?>
 <p:sld xmlns:a="http://schemas.openxmlformats.org/drawingml/2006/main" xmlns:r="http://schemas.openxmlformats.org/officeDocument/2006/relationships" xmlns:mc="http://schemas.openxmlformats.org/markup-compatibility/2006" xmlns:mv="urn:schemas-microsoft-com:mac:vml" xmlns:p="http://schemas.openxmlformats.org/presentationml/2006/main" xmlns:c="http://schemas.openxmlformats.org/drawingml/2006/chart" xmlns:dgm="http://schemas.openxmlformats.org/drawingml/2006/diagram" xmlns:o="urn:schemas-microsoft-com:office:office" xmlns:v="urn:schemas-microsoft-com:vml" xmlns:pvml="urn:schemas-microsoft-com:office:powerpoint" xmlns:com="http://schemas.openxmlformats.org/drawingml/2006/compatibility" xmlns:p14="http://schemas.microsoft.com/office/powerpoint/2010/main" xmlns:p15="http://schemas.microsoft.com/office/powerpoint/2012/main" xmlns:ahyp="http://schemas.microsoft.com/office/drawing/2018/hyperlinkcolor">
   <p:cSld>
     <p:spTree>
@@ -14306,7 +14695,96 @@
 </p:sld>
 </file>
 
-<file path=ppt/slides/slide28.xml><?xml version="1.0" encoding="utf-8"?>
+<file path=ppt/slides/slide3.xml><?xml version="1.0" encoding="utf-8"?>
+<p:sld xmlns:a="http://schemas.openxmlformats.org/drawingml/2006/main" xmlns:r="http://schemas.openxmlformats.org/officeDocument/2006/relationships" xmlns:mc="http://schemas.openxmlformats.org/markup-compatibility/2006" xmlns:mv="urn:schemas-microsoft-com:mac:vml" xmlns:p="http://schemas.openxmlformats.org/presentationml/2006/main" xmlns:c="http://schemas.openxmlformats.org/drawingml/2006/chart" xmlns:dgm="http://schemas.openxmlformats.org/drawingml/2006/diagram" xmlns:o="urn:schemas-microsoft-com:office:office" xmlns:v="urn:schemas-microsoft-com:vml" xmlns:pvml="urn:schemas-microsoft-com:office:powerpoint" xmlns:com="http://schemas.openxmlformats.org/drawingml/2006/compatibility" xmlns:p14="http://schemas.microsoft.com/office/powerpoint/2010/main" xmlns:p15="http://schemas.microsoft.com/office/powerpoint/2012/main" xmlns:ahyp="http://schemas.microsoft.com/office/drawing/2018/hyperlinkcolor">
+  <p:cSld>
+    <p:spTree>
+      <p:nvGrpSpPr>
+        <p:cNvPr id="44" name="Shape 44"/>
+        <p:cNvGrpSpPr/>
+        <p:nvPr/>
+      </p:nvGrpSpPr>
+      <p:grpSpPr>
+        <a:xfrm>
+          <a:off x="0" y="0"/>
+          <a:ext cx="0" cy="0"/>
+          <a:chOff x="0" y="0"/>
+          <a:chExt cx="0" cy="0"/>
+        </a:xfrm>
+      </p:grpSpPr>
+      <p:sp>
+        <p:nvSpPr>
+          <p:cNvPr id="45" name="Google Shape;45;p10"/>
+          <p:cNvSpPr txBox="1"/>
+          <p:nvPr>
+            <p:ph type="title"/>
+          </p:nvPr>
+        </p:nvSpPr>
+        <p:spPr>
+          <a:xfrm>
+            <a:off x="311700" y="195615"/>
+            <a:ext cx="8520600" cy="572700"/>
+          </a:xfrm>
+          <a:prstGeom prst="rect">
+            <a:avLst/>
+          </a:prstGeom>
+        </p:spPr>
+        <p:txBody>
+          <a:bodyPr anchorCtr="0" anchor="t" bIns="91425" lIns="91425" spcFirstLastPara="1" rIns="91425" wrap="square" tIns="91425">
+            <a:normAutofit fontScale="90000"/>
+          </a:bodyPr>
+          <a:lstStyle/>
+          <a:p>
+            <a:pPr indent="0" lvl="0" marL="0" rtl="0" algn="l">
+              <a:spcBef>
+                <a:spcPts val="0"/>
+              </a:spcBef>
+              <a:spcAft>
+                <a:spcPts val="0"/>
+              </a:spcAft>
+              <a:buNone/>
+            </a:pPr>
+            <a:r>
+              <a:rPr lang="en"/>
+              <a:t>Today’s Goal</a:t>
+            </a:r>
+            <a:endParaRPr/>
+          </a:p>
+        </p:txBody>
+      </p:sp>
+      <p:pic>
+        <p:nvPicPr>
+          <p:cNvPr id="46" name="Picture 46" descr="gif-pvz.gif"/>
+          <p:cNvPicPr>
+            <a:picLocks noChangeAspect="1"/>
+          </p:cNvPicPr>
+          <p:nvPr/>
+        </p:nvPicPr>
+        <p:blipFill>
+          <a:blip r:embed="rId3"/>
+          <a:stretch>
+            <a:fillRect/>
+          </a:stretch>
+        </p:blipFill>
+        <p:spPr>
+          <a:xfrm>
+            <a:off x="1677202" y="1531275"/>
+            <a:ext cx="5789596" cy="3256648"/>
+          </a:xfrm>
+          <a:prstGeom prst="rect">
+            <a:avLst/>
+          </a:prstGeom>
+        </p:spPr>
+      </p:pic>
+    </p:spTree>
+  </p:cSld>
+  <p:clrMapOvr>
+    <a:masterClrMapping/>
+  </p:clrMapOvr>
+</p:sld>
+</file>
+
+<file path=ppt/slides/slide30.xml><?xml version="1.0" encoding="utf-8"?>
 <p:sld xmlns:a="http://schemas.openxmlformats.org/drawingml/2006/main" xmlns:r="http://schemas.openxmlformats.org/officeDocument/2006/relationships" xmlns:mc="http://schemas.openxmlformats.org/markup-compatibility/2006" xmlns:mv="urn:schemas-microsoft-com:mac:vml" xmlns:p="http://schemas.openxmlformats.org/presentationml/2006/main" xmlns:c="http://schemas.openxmlformats.org/drawingml/2006/chart" xmlns:dgm="http://schemas.openxmlformats.org/drawingml/2006/diagram" xmlns:o="urn:schemas-microsoft-com:office:office" xmlns:v="urn:schemas-microsoft-com:vml" xmlns:pvml="urn:schemas-microsoft-com:office:powerpoint" xmlns:com="http://schemas.openxmlformats.org/drawingml/2006/compatibility" xmlns:p14="http://schemas.microsoft.com/office/powerpoint/2010/main" xmlns:p15="http://schemas.microsoft.com/office/powerpoint/2012/main" xmlns:ahyp="http://schemas.microsoft.com/office/drawing/2018/hyperlinkcolor">
   <p:cSld>
     <p:spTree>
@@ -15138,7 +15616,7 @@
 </p:sld>
 </file>
 
-<file path=ppt/slides/slide29.xml><?xml version="1.0" encoding="utf-8"?>
+<file path=ppt/slides/slide31.xml><?xml version="1.0" encoding="utf-8"?>
 <p:sld xmlns:a="http://schemas.openxmlformats.org/drawingml/2006/main" xmlns:p="http://schemas.openxmlformats.org/presentationml/2006/main" xmlns:r="http://schemas.openxmlformats.org/officeDocument/2006/relationships">
   <p:cSld>
     <p:spTree>
@@ -15311,96 +15789,7 @@
 </p:sld>
 </file>
 
-<file path=ppt/slides/slide3.xml><?xml version="1.0" encoding="utf-8"?>
-<p:sld xmlns:a="http://schemas.openxmlformats.org/drawingml/2006/main" xmlns:r="http://schemas.openxmlformats.org/officeDocument/2006/relationships" xmlns:mc="http://schemas.openxmlformats.org/markup-compatibility/2006" xmlns:mv="urn:schemas-microsoft-com:mac:vml" xmlns:p="http://schemas.openxmlformats.org/presentationml/2006/main" xmlns:c="http://schemas.openxmlformats.org/drawingml/2006/chart" xmlns:dgm="http://schemas.openxmlformats.org/drawingml/2006/diagram" xmlns:o="urn:schemas-microsoft-com:office:office" xmlns:v="urn:schemas-microsoft-com:vml" xmlns:pvml="urn:schemas-microsoft-com:office:powerpoint" xmlns:com="http://schemas.openxmlformats.org/drawingml/2006/compatibility" xmlns:p14="http://schemas.microsoft.com/office/powerpoint/2010/main" xmlns:p15="http://schemas.microsoft.com/office/powerpoint/2012/main" xmlns:ahyp="http://schemas.microsoft.com/office/drawing/2018/hyperlinkcolor">
-  <p:cSld>
-    <p:spTree>
-      <p:nvGrpSpPr>
-        <p:cNvPr id="44" name="Shape 44"/>
-        <p:cNvGrpSpPr/>
-        <p:nvPr/>
-      </p:nvGrpSpPr>
-      <p:grpSpPr>
-        <a:xfrm>
-          <a:off x="0" y="0"/>
-          <a:ext cx="0" cy="0"/>
-          <a:chOff x="0" y="0"/>
-          <a:chExt cx="0" cy="0"/>
-        </a:xfrm>
-      </p:grpSpPr>
-      <p:sp>
-        <p:nvSpPr>
-          <p:cNvPr id="45" name="Google Shape;45;p10"/>
-          <p:cNvSpPr txBox="1"/>
-          <p:nvPr>
-            <p:ph type="title"/>
-          </p:nvPr>
-        </p:nvSpPr>
-        <p:spPr>
-          <a:xfrm>
-            <a:off x="311700" y="195615"/>
-            <a:ext cx="8520600" cy="572700"/>
-          </a:xfrm>
-          <a:prstGeom prst="rect">
-            <a:avLst/>
-          </a:prstGeom>
-        </p:spPr>
-        <p:txBody>
-          <a:bodyPr anchorCtr="0" anchor="t" bIns="91425" lIns="91425" spcFirstLastPara="1" rIns="91425" wrap="square" tIns="91425">
-            <a:normAutofit fontScale="90000"/>
-          </a:bodyPr>
-          <a:lstStyle/>
-          <a:p>
-            <a:pPr indent="0" lvl="0" marL="0" rtl="0" algn="l">
-              <a:spcBef>
-                <a:spcPts val="0"/>
-              </a:spcBef>
-              <a:spcAft>
-                <a:spcPts val="0"/>
-              </a:spcAft>
-              <a:buNone/>
-            </a:pPr>
-            <a:r>
-              <a:rPr lang="en"/>
-              <a:t>Today’s Goal</a:t>
-            </a:r>
-            <a:endParaRPr/>
-          </a:p>
-        </p:txBody>
-      </p:sp>
-      <p:pic>
-        <p:nvPicPr>
-          <p:cNvPr id="46" name="Picture 46" descr="gif-pvz.gif"/>
-          <p:cNvPicPr>
-            <a:picLocks noChangeAspect="1"/>
-          </p:cNvPicPr>
-          <p:nvPr/>
-        </p:nvPicPr>
-        <p:blipFill>
-          <a:blip r:embed="rId3"/>
-          <a:stretch>
-            <a:fillRect/>
-          </a:stretch>
-        </p:blipFill>
-        <p:spPr>
-          <a:xfrm>
-            <a:off x="1677202" y="1531275"/>
-            <a:ext cx="5789596" cy="3256648"/>
-          </a:xfrm>
-          <a:prstGeom prst="rect">
-            <a:avLst/>
-          </a:prstGeom>
-        </p:spPr>
-      </p:pic>
-    </p:spTree>
-  </p:cSld>
-  <p:clrMapOvr>
-    <a:masterClrMapping/>
-  </p:clrMapOvr>
-</p:sld>
-</file>
-
-<file path=ppt/slides/slide30.xml><?xml version="1.0" encoding="utf-8"?>
+<file path=ppt/slides/slide32.xml><?xml version="1.0" encoding="utf-8"?>
 <p:sld xmlns:a="http://schemas.openxmlformats.org/drawingml/2006/main" xmlns:r="http://schemas.openxmlformats.org/officeDocument/2006/relationships" xmlns:mc="http://schemas.openxmlformats.org/markup-compatibility/2006" xmlns:mv="urn:schemas-microsoft-com:mac:vml" xmlns:p="http://schemas.openxmlformats.org/presentationml/2006/main" xmlns:c="http://schemas.openxmlformats.org/drawingml/2006/chart" xmlns:dgm="http://schemas.openxmlformats.org/drawingml/2006/diagram" xmlns:o="urn:schemas-microsoft-com:office:office" xmlns:v="urn:schemas-microsoft-com:vml" xmlns:pvml="urn:schemas-microsoft-com:office:powerpoint" xmlns:com="http://schemas.openxmlformats.org/drawingml/2006/compatibility" xmlns:p14="http://schemas.microsoft.com/office/powerpoint/2010/main" xmlns:p15="http://schemas.microsoft.com/office/powerpoint/2012/main" xmlns:ahyp="http://schemas.microsoft.com/office/drawing/2018/hyperlinkcolor">
   <p:cSld>
     <p:spTree>
@@ -16807,7 +17196,7 @@
             </a:pPr>
             <a:r>
               <a:rPr lang="en"/>
-              <a:t>Its README: the steps (Pvz0 to Pvz4), where things are in the code, how to run it</a:t>
+              <a:t>Its README: the steps (Pvz0 to Pvz4, and Pvz.Tests), where things are in the code, how to run it</a:t>
             </a:r>
             <a:endParaRPr/>
           </a:p>

--- a/slides/09 Plants vs. Zombies.pptx
+++ b/slides/09 Plants vs. Zombies.pptx
@@ -813,7 +813,7 @@
           <a:lstStyle/>
           <a:p>
             <a:r>
-              <a:t>Welcome. Today we build Plants vs. Zombies. The main topic: the Component pattern.</a:t>
+              <a:t>Welcome. Today we build Plants vs. Zombies. The main topic: game objects built from parts.</a:t>
             </a:r>
           </a:p>
           <a:p>
@@ -2316,7 +2316,7 @@
           <a:lstStyle/>
           <a:p>
             <a:r>
-              <a:t>The main topic: the Component pattern. First picking with the mouse, then where inheritance breaks, then components, then Type Object.</a:t>
+              <a:t>The main topic: game objects built from parts, with the Component pattern. First picking with the mouse, then where inheritance breaks, then components, then Type Object.</a:t>
             </a:r>
           </a:p>
         </p:txBody>
@@ -16689,7 +16689,7 @@
         <p:spPr>
           <a:xfrm>
             <a:off x="311700" y="885950"/>
-            <a:ext cx="8520600" cy="4023300"/>
+            <a:ext cx="8520600" cy="2825496"/>
           </a:xfrm>
           <a:prstGeom prst="rect">
             <a:avLst/>
@@ -16700,6 +16700,23 @@
             <a:normAutofit/>
           </a:bodyPr>
           <a:lstStyle/>
+          <a:p>
+            <a:pPr indent="-330200" lvl="0" marL="457200" rtl="0" algn="l">
+              <a:spcBef>
+                <a:spcPts val="0"/>
+              </a:spcBef>
+              <a:spcAft>
+                <a:spcPts val="0"/>
+              </a:spcAft>
+              <a:buSzPts val="1600"/>
+              <a:buChar char="●"/>
+            </a:pPr>
+            <a:r>
+              <a:rPr lang="en" b="1"/>
+              <a:t>Main topic: Game objects built from parts</a:t>
+            </a:r>
+            <a:endParaRPr/>
+          </a:p>
           <a:p>
             <a:pPr indent="-330200" lvl="0" marL="457200" rtl="0" algn="l">
               <a:spcBef>

--- a/slides/09 Plants vs. Zombies.pptx
+++ b/slides/09 Plants vs. Zombies.pptx
@@ -813,7 +813,7 @@
           <a:lstStyle/>
           <a:p>
             <a:r>
-              <a:t>Welcome. Today we build Plants vs. Zombies. The main topic: game objects built from parts.</a:t>
+              <a:t>Welcome. Today we build Plants vs. Zombies. The main topic: components.</a:t>
             </a:r>
           </a:p>
           <a:p>
@@ -2316,7 +2316,7 @@
           <a:lstStyle/>
           <a:p>
             <a:r>
-              <a:t>The main topic: game objects built from parts, with the Component pattern. First picking with the mouse, then where inheritance breaks, then components, then Type Object.</a:t>
+              <a:t>Today’s main topic is components. We start with picking objects with the mouse, then see where inheritance breaks, then build components, then Type Object.</a:t>
             </a:r>
           </a:p>
         </p:txBody>
@@ -16713,7 +16713,7 @@
             </a:pPr>
             <a:r>
               <a:rPr lang="en" b="1"/>
-              <a:t>Main topic: Game objects built from parts</a:t>
+              <a:t>Main topic: Components</a:t>
             </a:r>
             <a:endParaRPr/>
           </a:p>

--- a/slides/09 Plants vs. Zombies.pptx
+++ b/slides/09 Plants vs. Zombies.pptx
@@ -1361,7 +1361,7 @@
           <a:lstStyle/>
           <a:p>
             <a:r>
-              <a:t>No classes for plants or zombies: each kind is a list of components. A Repeater and a Conehead are recipes, not classes. Health is written once.</a:t>
+              <a:t>No classes for plants or zombies: each kind is a list of components. A Repeater and a Conehead are recipes. Health is written once.</a:t>
             </a:r>
           </a:p>
         </p:txBody>
@@ -1424,7 +1424,7 @@
           </a:p>
           <a:p>
             <a:r>
-              <a:t>Depend on components, not on kinds of entity.</a:t>
+              <a:t>Depend only on the components you use.</a:t>
             </a:r>
           </a:p>
         </p:txBody>
@@ -1497,7 +1497,7 @@
           </a:p>
           <a:p>
             <a:r>
-              <a:t>- the World now loops over entities, not per class</a:t>
+              <a:t>- the World now has one loop over all entities</a:t>
             </a:r>
           </a:p>
         </p:txBody>
@@ -2111,7 +2111,7 @@
           </a:p>
           <a:p>
             <a:r>
-              <a:t>Today we build the parts that matter for the architecture, not the whole game.</a:t>
+              <a:t>Today we build the parts that matter for the architecture.</a:t>
             </a:r>
           </a:p>
         </p:txBody>
@@ -9778,7 +9778,7 @@
                   <a:srgbClr val="DEE2E6"/>
                 </a:solidFill>
               </a:rPr>
-              <a:t>Depend on components, not on kinds of entity</a:t>
+              <a:t>Depend only on the components you use</a:t>
             </a:r>
             <a:endParaRPr/>
           </a:p>

--- a/slides/09 Plants vs. Zombies.pptx
+++ b/slides/09 Plants vs. Zombies.pptx
@@ -18590,7 +18590,7 @@
                   <a:srgbClr val="9AA3AB"/>
                 </a:solidFill>
               </a:rPr>
-              <a:t>And show what a click will do: highlight the cell, with a faint plant.</a:t>
+              <a:t>And show what a click will do, by highlighting the cell with a faint plant.</a:t>
             </a:r>
           </a:p>
         </p:txBody>

--- a/slides/09 Plants vs. Zombies.pptx
+++ b/slides/09 Plants vs. Zombies.pptx
@@ -14754,14 +14754,14 @@
       </p:sp>
       <p:pic>
         <p:nvPicPr>
-          <p:cNvPr id="46" name="Picture 46" descr="gif-pvz.gif"/>
+          <p:cNvPr id="46" name="Picture 46" descr="plants-vs-zombies.gif"/>
           <p:cNvPicPr>
             <a:picLocks noChangeAspect="1"/>
           </p:cNvPicPr>
           <p:nvPr/>
         </p:nvPicPr>
         <p:blipFill>
-          <a:blip r:embed="rId3"/>
+          <a:blip r:embed="rId4"/>
           <a:stretch>
             <a:fillRect/>
           </a:stretch>
@@ -14769,7 +14769,7 @@
         <p:spPr>
           <a:xfrm>
             <a:off x="1677202" y="1531275"/>
-            <a:ext cx="5789596" cy="3256648"/>
+            <a:ext cx="5789596" cy="3256647"/>
           </a:xfrm>
           <a:prstGeom prst="rect">
             <a:avLst/>

--- a/slides/09 Plants vs. Zombies.pptx
+++ b/slides/09 Plants vs. Zombies.pptx
@@ -14761,15 +14761,15 @@
           <p:nvPr/>
         </p:nvPicPr>
         <p:blipFill>
-          <a:blip r:embed="rId4"/>
+          <a:blip r:embed="rId3"/>
           <a:stretch>
             <a:fillRect/>
           </a:stretch>
         </p:blipFill>
         <p:spPr>
           <a:xfrm>
-            <a:off x="1677202" y="1531275"/>
-            <a:ext cx="5789596" cy="3256647"/>
+            <a:off x="1677203" y="1531275"/>
+            <a:ext cx="5789594" cy="3256647"/>
           </a:xfrm>
           <a:prstGeom prst="rect">
             <a:avLst/>

--- a/slides/09 Plants vs. Zombies.pptx
+++ b/slides/09 Plants vs. Zombies.pptx
@@ -881,7 +881,7 @@
           </a:p>
           <a:p>
             <a:r>
-              <a:t>Ask the third question: a pea hits a zombie; whose rule is it? Geometry Wars answers with systems.</a:t>
+              <a:t>Ask the third question: an arrow hits a goblin; whose rule is it? Geometry Wars answers with systems.</a:t>
             </a:r>
           </a:p>
         </p:txBody>
@@ -944,7 +944,7 @@
           </a:p>
           <a:p>
             <a:r>
-              <a:t>Ask the question: a plant’s cost, in each plant or in its type? The type.</a:t>
+              <a:t>Ask the question: a defender’s cost, in each defender or in its type? The type.</a:t>
             </a:r>
           </a:p>
         </p:txBody>
@@ -1013,12 +1013,12 @@
           <a:p/>
           <a:p>
             <a:r>
-              <a:t>Q: Why does inheritance break down for Plants vs. Zombies?</a:t>
-            </a:r>
-          </a:p>
-          <a:p>
-            <a:r>
-              <a:t>A: The abilities (shooting, making sun, armour, walking, eating) combine freely, but a class has one base class. Combinations mean choosing one parent and copying the other ability, and abilities shared by plants and zombies (health) get copied too.</a:t>
+              <a:t>Q: Why does inheritance break down for this game?</a:t>
+            </a:r>
+          </a:p>
+          <a:p>
+            <a:r>
+              <a:t>A: The abilities (shooting, making gold, armour, walking, attacking) combine freely, but a class has one base class. Combinations mean choosing one parent and copying the other ability, and abilities shared by defenders and goblins (health) get copied too.</a:t>
             </a:r>
           </a:p>
           <a:p/>
@@ -1029,7 +1029,7 @@
           </a:p>
           <a:p>
             <a:r>
-              <a:t>A: They ask their owner for a sibling (Owner.Get&lt;Eater&gt;()), and handle it being missing. For other entities, they ask the world.</a:t>
+              <a:t>A: They ask their owner for a sibling (Owner.Get&lt;Attacker&gt;()), and handle it being missing. For other entities, they ask the world.</a:t>
             </a:r>
           </a:p>
           <a:p/>
@@ -1172,12 +1172,12 @@
           </a:p>
           <a:p>
             <a:r>
-              <a:t>- choose a packet, hover the lawn: the highlighted cell and the faint plant</a:t>
-            </a:r>
-          </a:p>
-          <a:p>
-            <a:r>
-              <a:t>- click to plant</a:t>
+              <a:t>- choose a card, hover the field: the highlighted cell and the faint defender</a:t>
+            </a:r>
+          </a:p>
+          <a:p>
+            <a:r>
+              <a:t>- click to place a defender</a:t>
             </a:r>
           </a:p>
         </p:txBody>
@@ -1240,7 +1240,7 @@
           </a:p>
           <a:p>
             <a:r>
-              <a:t>- the Plant and Zombie hierarchies</a:t>
+              <a:t>- the Defender and Goblin hierarchies</a:t>
             </a:r>
           </a:p>
           <a:p>
@@ -1361,7 +1361,7 @@
           <a:lstStyle/>
           <a:p>
             <a:r>
-              <a:t>No classes for plants or zombies: each kind is a list of components. A Repeater and a Conehead are recipes. Health is written once.</a:t>
+              <a:t>No classes for defenders or goblins: each kind is a list of components. A Wizard and a Shieldbearer are recipes. Health is written once.</a:t>
             </a:r>
           </a:p>
         </p:txBody>
@@ -1419,7 +1419,7 @@
           <a:lstStyle/>
           <a:p>
             <a:r>
-              <a:t>Through the owner (the walker checks the eater) or through the world (a shooter asks for a zombie ahead in its row).</a:t>
+              <a:t>Through the owner (the walker checks the attacker) or through the world (a shooter asks for a goblin ahead in its row).</a:t>
             </a:r>
           </a:p>
           <a:p>
@@ -1649,7 +1649,7 @@
           <a:lstStyle/>
           <a:p>
             <a:r>
-              <a:t>A peashooter’s cost isn’t in any one peashooter: it belongs to the kind. One PlantType per kind, loaded from plants.json.</a:t>
+              <a:t>An archer’s cost isn’t in any one archer: it belongs to the kind. One DefenderType per kind, loaded from defenders.json.</a:t>
             </a:r>
           </a:p>
         </p:txBody>
@@ -1770,7 +1770,7 @@
           </a:p>
           <a:p>
             <a:r>
-              <a:t>- plants.json and zombies.json</a:t>
+              <a:t>- defenders.json and goblins.json</a:t>
             </a:r>
           </a:p>
           <a:p>
@@ -1838,7 +1838,7 @@
           <a:lstStyle/>
           <a:p>
             <a:r>
-              <a:t>A level from JSON, packets that recharge, sun from the sky (a sun with one more component, Faller), winning and losing.</a:t>
+              <a:t>A level from JSON, cards that recharge, gold from the sky (a coin with one more component, Faller), winning and losing.</a:t>
             </a:r>
           </a:p>
         </p:txBody>
@@ -1985,7 +1985,7 @@
           <a:lstStyle/>
           <a:p>
             <a:r>
-              <a:t>Demo: play a minute of Pvz4: collect sun, plant a sunflower and a peashooter, watch a conehead lose its cone.</a:t>
+              <a:t>Demo: play a minute of Pvz4: collect gold, place a chest and an archer, watch a shieldbearer lose its shield.</a:t>
             </a:r>
           </a:p>
         </p:txBody>
@@ -2227,7 +2227,7 @@
           <a:lstStyle/>
           <a:p>
             <a:r>
-              <a:t>Pairs, about 7 minutes. One recipe: Plant(...).With(new Shooter(...)).With(new SunProducer(...)), and one AddPacket line. Compare with the Repeater by inheritance.</a:t>
+              <a:t>Pairs, about 7 minutes. One recipe: Defender(...).With(new Shooter(...)).With(new GoldProducer(...)), and one AddCard line. Compare with the Wizard by inheritance.</a:t>
             </a:r>
           </a:p>
         </p:txBody>
@@ -2374,7 +2374,7 @@
           <a:lstStyle/>
           <a:p>
             <a:r>
-              <a:t>Pairs, about 7 minutes. Peashooter.Update fires one pea, with its interval as a private constant. A subclass cannot change either without Peashooter opening up (a virtual method or a protected field).</a:t>
+              <a:t>Pairs, about 7 minutes. Archer.Update fires one arrow, with its interval as a private constant. A subclass cannot change either without Archer opening up (a virtual method or a protected field).</a:t>
             </a:r>
           </a:p>
         </p:txBody>
@@ -2432,7 +2432,7 @@
           <a:lstStyle/>
           <a:p>
             <a:r>
-              <a:t>Pairs, about 5 minutes. Window.Title = $"{cell}" in Update. Off the lawn, CellAt returns null: not every point is a cell.</a:t>
+              <a:t>Pairs, about 5 minutes. Window.Title = $"{cell}" in Update. Off the field, CellAt returns null: not every point is a cell.</a:t>
             </a:r>
           </a:p>
         </p:txBody>
@@ -2584,7 +2584,7 @@
           <a:lstStyle/>
           <a:p>
             <a:r>
-              <a:t>Start from Pvz4. Ask after the first: did the Tall-nut or the Flag Zombie need any code? Only data.</a:t>
+              <a:t>Start from Pvz4. Ask after the first: did the Guard or the Runner need any code? Only data.</a:t>
             </a:r>
           </a:p>
         </p:txBody>
@@ -2736,12 +2736,12 @@
           <a:lstStyle/>
           <a:p>
             <a:r>
-              <a:t>Pairs, about 6 minutes. Copy the conehead test. Armour takes 12 (8 left), then 12 more: 8 absorbed, 4 through, so health 6: still standing.</a:t>
-            </a:r>
-          </a:p>
-          <a:p>
-            <a:r>
-              <a:t>Ask: what would this test need with a ConeheadZombie subclass? The whole class and its bases.</a:t>
+              <a:t>Pairs, about 6 minutes. Copy the shieldbearer test. Armour takes 12 (8 left), then 12 more: 8 absorbed, 4 through, so health 6: still standing.</a:t>
+            </a:r>
+          </a:p>
+          <a:p>
+            <a:r>
+              <a:t>Ask: what would this test need with a ShieldbearerGoblin subclass? The whole class and its bases.</a:t>
             </a:r>
           </a:p>
         </p:txBody>
@@ -2799,12 +2799,12 @@
           <a:lstStyle/>
           <a:p>
             <a:r>
-              <a:t>A grid: one division finds the cell. Suns and packets are separate objects: check each.</a:t>
-            </a:r>
-          </a:p>
-          <a:p>
-            <a:r>
-              <a:t>When they overlap, the order decides: sun first, then packets, then the lawn. And show what a click will do before it happens.</a:t>
+              <a:t>A grid: one division finds the cell. Coins and cards are separate objects: check each.</a:t>
+            </a:r>
+          </a:p>
+          <a:p>
+            <a:r>
+              <a:t>When they overlap, the order decides: coins first, then cards, then the field. And show what a click will do before it happens.</a:t>
             </a:r>
           </a:p>
         </p:txBody>
@@ -6647,7 +6647,7 @@
                   <a:schemeClr val="accent5"/>
                 </a:solidFill>
               </a:rPr>
-              <a:t>Plants and Zombies With Inheritance</a:t>
+              <a:t>Defenders and Goblins With Inheritance</a:t>
             </a:r>
             <a:endParaRPr>
               <a:solidFill>
@@ -6747,7 +6747,7 @@
                   <a:srgbClr val="DEE2E6"/>
                 </a:solidFill>
               </a:rPr>
-              <a:t>Plant</a:t>
+              <a:t>Defender</a:t>
             </a:r>
           </a:p>
         </p:txBody>
@@ -6801,7 +6801,7 @@
                   <a:srgbClr val="DEE2E6"/>
                 </a:solidFill>
               </a:rPr>
-              <a:t>Sunflower</a:t>
+              <a:t>Chest</a:t>
             </a:r>
           </a:p>
         </p:txBody>
@@ -6891,7 +6891,7 @@
                   <a:srgbClr val="DEE2E6"/>
                 </a:solidFill>
               </a:rPr>
-              <a:t>Peashooter</a:t>
+              <a:t>Archer</a:t>
             </a:r>
           </a:p>
         </p:txBody>
@@ -6981,7 +6981,7 @@
                   <a:srgbClr val="DEE2E6"/>
                 </a:solidFill>
               </a:rPr>
-              <a:t>WallNut</a:t>
+              <a:t>Knight</a:t>
             </a:r>
           </a:p>
         </p:txBody>
@@ -7071,7 +7071,7 @@
                   <a:srgbClr val="DEE2E6"/>
                 </a:solidFill>
               </a:rPr>
-              <a:t>Zombie</a:t>
+              <a:t>Goblin</a:t>
             </a:r>
           </a:p>
         </p:txBody>
@@ -7125,7 +7125,7 @@
                   <a:srgbClr val="DEE2E6"/>
                 </a:solidFill>
               </a:rPr>
-              <a:t>Pea</a:t>
+              <a:t>Arrow</a:t>
             </a:r>
           </a:p>
         </p:txBody>
@@ -7179,7 +7179,7 @@
                   <a:srgbClr val="DEE2E6"/>
                 </a:solidFill>
               </a:rPr>
-              <a:t>Sun</a:t>
+              <a:t>Coin</a:t>
             </a:r>
           </a:p>
         </p:txBody>
@@ -7374,7 +7374,7 @@
                   <a:srgbClr val="DEE2E6"/>
                 </a:solidFill>
               </a:rPr>
-              <a:t>Repeater</a:t>
+              <a:t>Wizard</a:t>
             </a:r>
           </a:p>
           <a:p>
@@ -7385,7 +7385,7 @@
                   <a:srgbClr val="9AA3AB"/>
                 </a:solidFill>
               </a:rPr>
-              <a:t>a Peashooter subclass</a:t>
+              <a:t>an Archer subclass</a:t>
             </a:r>
           </a:p>
           <a:p>
@@ -7450,7 +7450,7 @@
                   <a:srgbClr val="DEE2E6"/>
                 </a:solidFill>
               </a:rPr>
-              <a:t>Conehead</a:t>
+              <a:t>Shieldbearer</a:t>
             </a:r>
           </a:p>
           <a:p>
@@ -7461,7 +7461,7 @@
                   <a:srgbClr val="9AA3AB"/>
                 </a:solidFill>
               </a:rPr>
-              <a:t>a Zombie subclass;</a:t>
+              <a:t>a Goblin subclass;</a:t>
             </a:r>
           </a:p>
           <a:p>
@@ -7472,7 +7472,7 @@
                   <a:srgbClr val="9AA3AB"/>
                 </a:solidFill>
               </a:rPr>
-              <a:t>armour for a plant: copy it</a:t>
+              <a:t>armour for a defender: copy it</a:t>
             </a:r>
           </a:p>
         </p:txBody>
@@ -7528,7 +7528,7 @@
                   <a:srgbClr val="DEE2E6"/>
                 </a:solidFill>
               </a:rPr>
-              <a:t>Shoots and makes sun</a:t>
+              <a:t>Shoots and makes gold</a:t>
             </a:r>
           </a:p>
           <a:p>
@@ -7626,7 +7626,7 @@
                   <a:srgbClr val="9AA3AB"/>
                 </a:solidFill>
               </a:rPr>
-              <a:t>a zombie isn’t a plant</a:t>
+              <a:t>a goblin isn’t a defender</a:t>
             </a:r>
           </a:p>
         </p:txBody>
@@ -7786,7 +7786,7 @@
             </a:pPr>
             <a:r>
               <a:rPr lang="en" sz="1800"/>
-              <a:t>Pvz1: plants and zombies as a class hierarchy</a:t>
+              <a:t>Pvz1: defenders and goblins as a class hierarchy</a:t>
             </a:r>
             <a:endParaRPr sz="1800"/>
           </a:p>
@@ -7836,7 +7836,7 @@
             </a:pPr>
             <a:r>
               <a:rPr lang="en"/>
-              <a:t>Try It: A Repeater, by Inheritance</a:t>
+              <a:t>Try It: A Wizard, by Inheritance</a:t>
             </a:r>
             <a:endParaRPr/>
           </a:p>
@@ -7891,7 +7891,7 @@
             </a:pPr>
             <a:r>
               <a:rPr lang="en"/>
-              <a:t>Make a Repeater, a Peashooter that shoots two peas</a:t>
+              <a:t>Make a Wizard, an Archer that shoots two arrows</a:t>
             </a:r>
             <a:endParaRPr/>
           </a:p>
@@ -7908,7 +7908,7 @@
             </a:pPr>
             <a:r>
               <a:rPr lang="en"/>
-              <a:t>How far do you get before Peashooter has to change?</a:t>
+              <a:t>How far do you get before Archer has to change?</a:t>
             </a:r>
             <a:endParaRPr/>
           </a:p>
@@ -8086,7 +8086,7 @@
                   <a:srgbClr val="6C757D"/>
                 </a:solidFill>
               </a:rPr>
-              <a:t>Health, Shooter, SunProducer, Walker, Eater, Armour, SpriteRenderer</a:t>
+              <a:t>Health, Shooter, GoldProducer, Walker, Attacker, Armour, SpriteRenderer</a:t>
             </a:r>
             <a:endParaRPr/>
           </a:p>
@@ -8862,7 +8862,7 @@
                   <a:srgbClr val="DEE2E6"/>
                 </a:solidFill>
               </a:rPr>
-              <a:t>No classes for plants or zombies</a:t>
+              <a:t>No classes for defenders or goblins</a:t>
             </a:r>
             <a:endParaRPr/>
           </a:p>
@@ -8910,7 +8910,7 @@
                   <a:srgbClr val="DEE2E6"/>
                 </a:solidFill>
               </a:rPr>
-              <a:t>Repeater, Conehead: no new classes</a:t>
+              <a:t>Wizard, Shieldbearer: no new classes</a:t>
             </a:r>
             <a:endParaRPr/>
           </a:p>
@@ -8934,7 +8934,7 @@
                   <a:srgbClr val="DEE2E6"/>
                 </a:solidFill>
               </a:rPr>
-              <a:t>Shoots and makes sun: two .With calls</a:t>
+              <a:t>Shoots and makes gold: two .With calls</a:t>
             </a:r>
             <a:endParaRPr/>
           </a:p>
@@ -8958,7 +8958,7 @@
                   <a:srgbClr val="DEE2E6"/>
                 </a:solidFill>
               </a:rPr>
-              <a:t>Health: written once, for plants and zombies</a:t>
+              <a:t>Health: written once, for defenders and goblins</a:t>
             </a:r>
             <a:endParaRPr/>
           </a:p>
@@ -9009,7 +9009,7 @@
                 <a:cs typeface="Consolas"/>
                 <a:sym typeface="Consolas"/>
               </a:rPr>
-              <a:t>Entity Sunflower(World world) =&gt;</a:t>
+              <a:t>Entity Chest(World world) =&gt;</a:t>
             </a:r>
             <a:endParaRPr sz="1000">
               <a:solidFill>
@@ -9047,7 +9047,7 @@
                 <a:cs typeface="Consolas"/>
                 <a:sym typeface="Consolas"/>
               </a:rPr>
-              <a:t>    Plant(world, "sunflower", 6)</a:t>
+              <a:t>    Defender(world, "chest", 6)</a:t>
             </a:r>
             <a:endParaRPr sz="1000">
               <a:solidFill>
@@ -9085,7 +9085,7 @@
                 <a:cs typeface="Consolas"/>
                 <a:sym typeface="Consolas"/>
               </a:rPr>
-              <a:t>        .With(new SunProducer(12, 25));</a:t>
+              <a:t>        .With(new GoldProducer(9, 25));</a:t>
             </a:r>
             <a:endParaRPr sz="1000">
               <a:solidFill>
@@ -9123,7 +9123,7 @@
                 <a:cs typeface="Consolas"/>
                 <a:sym typeface="Consolas"/>
               </a:rPr>
-              <a:t>Entity Repeater(World world) =&gt;</a:t>
+              <a:t>Entity Wizard(World world) =&gt;</a:t>
             </a:r>
             <a:endParaRPr sz="1000">
               <a:solidFill>
@@ -9161,7 +9161,7 @@
                 <a:cs typeface="Consolas"/>
                 <a:sym typeface="Consolas"/>
               </a:rPr>
-              <a:t>    Plant(world, "repeater", 6)</a:t>
+              <a:t>    Defender(world, "wizard", 6)</a:t>
             </a:r>
             <a:endParaRPr sz="1000">
               <a:solidFill>
@@ -9275,7 +9275,7 @@
                 <a:cs typeface="Consolas"/>
                 <a:sym typeface="Consolas"/>
               </a:rPr>
-              <a:t>Entity Zombie(World world) =&gt;</a:t>
+              <a:t>Entity Goblin(World world) =&gt;</a:t>
             </a:r>
             <a:endParaRPr sz="1000">
               <a:solidFill>
@@ -9351,7 +9351,7 @@
                 <a:cs typeface="Consolas"/>
                 <a:sym typeface="Consolas"/>
               </a:rPr>
-              <a:t>        .With(new SpriteRenderer(zombie))</a:t>
+              <a:t>        .With(new SpriteRenderer(goblin))</a:t>
             </a:r>
             <a:endParaRPr sz="1000">
               <a:solidFill>
@@ -9427,7 +9427,7 @@
                 <a:cs typeface="Consolas"/>
                 <a:sym typeface="Consolas"/>
               </a:rPr>
-              <a:t>        .With(new Walker(16))</a:t>
+              <a:t>        .With(new Walker(28))</a:t>
             </a:r>
             <a:endParaRPr sz="1000">
               <a:solidFill>
@@ -9465,7 +9465,7 @@
                 <a:cs typeface="Consolas"/>
                 <a:sym typeface="Consolas"/>
               </a:rPr>
-              <a:t>        .With(new Eater(1));</a:t>
+              <a:t>        .With(new Attacker(1));</a:t>
             </a:r>
             <a:endParaRPr sz="1000">
               <a:solidFill>
@@ -9503,7 +9503,7 @@
                 <a:cs typeface="Consolas"/>
                 <a:sym typeface="Consolas"/>
               </a:rPr>
-              <a:t>Entity Conehead(World world) =&gt;</a:t>
+              <a:t>Entity Shieldbearer(World world) =&gt;</a:t>
             </a:r>
             <a:endParaRPr sz="1000">
               <a:solidFill>
@@ -9541,7 +9541,7 @@
                 <a:cs typeface="Consolas"/>
                 <a:sym typeface="Consolas"/>
               </a:rPr>
-              <a:t>    Zombie(world).With(new Armour(18, cone));</a:t>
+              <a:t>    Goblin(world).With(new Armour(18, shield));</a:t>
             </a:r>
             <a:endParaRPr sz="1000">
               <a:solidFill>
@@ -9682,7 +9682,7 @@
                   <a:srgbClr val="6C757D"/>
                 </a:solidFill>
               </a:rPr>
-              <a:t>Walker stops while the Eater eats</a:t>
+              <a:t>Walker stops while the Attacker attacks</a:t>
             </a:r>
             <a:endParaRPr/>
           </a:p>
@@ -9754,7 +9754,7 @@
                   <a:srgbClr val="6C757D"/>
                 </a:solidFill>
               </a:rPr>
-              <a:t>Shooter: a zombie ahead in my row?</a:t>
+              <a:t>Shooter: a goblin ahead in my row?</a:t>
             </a:r>
             <a:endParaRPr/>
           </a:p>
@@ -9967,7 +9967,7 @@
                 <a:cs typeface="Consolas"/>
                 <a:sym typeface="Consolas"/>
               </a:rPr>
-              <a:t>    if (Owner.Get&lt;Eater&gt;()?.IsEating == true)</a:t>
+              <a:t>    if (Owner.Get&lt;Attacker&gt;()?.IsAttacking == true)</a:t>
             </a:r>
             <a:endParaRPr sz="1000">
               <a:solidFill>
@@ -10271,7 +10271,7 @@
                 <a:cs typeface="Consolas"/>
                 <a:sym typeface="Consolas"/>
               </a:rPr>
-              <a:t>    World.FirstZombieAhead(Owner.Row,</a:t>
+              <a:t>    World.FirstGoblinAhead(Owner.Row,</a:t>
             </a:r>
             <a:endParaRPr sz="1000">
               <a:solidFill>
@@ -10531,7 +10531,7 @@
                   <a:srgbClr val="9AA3AB"/>
                 </a:solidFill>
               </a:rPr>
-              <a:t>Get&lt;Eater&gt;() searches a list,</a:t>
+              <a:t>Get&lt;Attacker&gt;() searches a list,</a:t>
             </a:r>
           </a:p>
           <a:p>
@@ -10685,7 +10685,7 @@
                   <a:srgbClr val="9AA3AB"/>
                 </a:solidFill>
               </a:rPr>
-              <a:t>a pea hits a zombie:</a:t>
+              <a:t>an arrow hits a goblin:</a:t>
             </a:r>
           </a:p>
           <a:p>
@@ -10696,7 +10696,7 @@
                   <a:srgbClr val="9AA3AB"/>
                 </a:solidFill>
               </a:rPr>
-              <a:t>the pea’s rule, or the zombie’s?</a:t>
+              <a:t>the arrow’s rule, or the goblin’s?</a:t>
             </a:r>
           </a:p>
         </p:txBody>
@@ -10834,7 +10834,7 @@
             </a:pPr>
             <a:r>
               <a:rPr lang="en"/>
-              <a:t>An entity with only the parts under test: no lawn, no textures, no game running</a:t>
+              <a:t>An entity with only the parts under test: no field, no textures, no game running</a:t>
             </a:r>
             <a:endParaRPr/>
           </a:p>
@@ -10901,7 +10901,7 @@
             </a:pPr>
             <a:r>
               <a:rPr lang="en"/>
-              <a:t>Try It: A Buckethead Test</a:t>
+              <a:t>Try It: An Ironclad Test</a:t>
             </a:r>
             <a:endParaRPr/>
           </a:p>
@@ -10956,7 +10956,7 @@
             </a:pPr>
             <a:r>
               <a:rPr lang="en"/>
-              <a:t>A buckethead: armour 20, health 10</a:t>
+              <a:t>An Ironclad: armour 20, health 10</a:t>
             </a:r>
             <a:endParaRPr/>
           </a:p>
@@ -11280,7 +11280,7 @@
             </a:pPr>
             <a:r>
               <a:rPr lang="en"/>
-              <a:t>Try It: A New Plant From Parts</a:t>
+              <a:t>Try It: A New Defender From Parts</a:t>
             </a:r>
             <a:endParaRPr/>
           </a:p>
@@ -11335,7 +11335,7 @@
             </a:pPr>
             <a:r>
               <a:rPr lang="en"/>
-              <a:t>A plant that shoots and makes sun</a:t>
+              <a:t>A defender that shoots and makes gold</a:t>
             </a:r>
             <a:endParaRPr/>
           </a:p>
@@ -11352,7 +11352,7 @@
             </a:pPr>
             <a:r>
               <a:rPr lang="en"/>
-              <a:t>Give it a packet in Game1 (sunflower sprite)</a:t>
+              <a:t>Give it a card in Game1 (chest sprite)</a:t>
             </a:r>
             <a:endParaRPr/>
           </a:p>
@@ -11475,7 +11475,7 @@
                   <a:srgbClr val="DEE2E6"/>
                 </a:solidFill>
               </a:rPr>
-              <a:t>A peashooter’s cost: not in any one peashooter</a:t>
+              <a:t>An archer’s cost: not in any one archer</a:t>
             </a:r>
             <a:endParaRPr/>
           </a:p>
@@ -11499,7 +11499,7 @@
                   <a:srgbClr val="DEE2E6"/>
                 </a:solidFill>
               </a:rPr>
-              <a:t>One PlantType per kind of plant</a:t>
+              <a:t>One DefenderType per kind of defender</a:t>
             </a:r>
             <a:endParaRPr/>
           </a:p>
@@ -11523,7 +11523,7 @@
                   <a:srgbClr val="6C757D"/>
                 </a:solidFill>
               </a:rPr>
-              <a:t>Loaded from plants.json</a:t>
+              <a:t>Loaded from defenders.json</a:t>
             </a:r>
             <a:endParaRPr/>
           </a:p>
@@ -11622,7 +11622,7 @@
                 <a:cs typeface="Consolas"/>
                 <a:sym typeface="Consolas"/>
               </a:rPr>
-              <a:t>// plants.json</a:t>
+              <a:t>// defenders.json</a:t>
             </a:r>
             <a:endParaRPr sz="1000">
               <a:solidFill>
@@ -11660,7 +11660,7 @@
                 <a:cs typeface="Consolas"/>
                 <a:sym typeface="Consolas"/>
               </a:rPr>
-              <a:t>{ "name": "Sunflower",</a:t>
+              <a:t>{ "name": "Chest",</a:t>
             </a:r>
             <a:endParaRPr sz="1000">
               <a:solidFill>
@@ -11698,7 +11698,7 @@
                 <a:cs typeface="Consolas"/>
                 <a:sym typeface="Consolas"/>
               </a:rPr>
-              <a:t>  "sprite": "sunflower",</a:t>
+              <a:t>  "sprite": "chest",</a:t>
             </a:r>
             <a:endParaRPr sz="1000">
               <a:solidFill>
@@ -11812,7 +11812,7 @@
                 <a:cs typeface="Consolas"/>
                 <a:sym typeface="Consolas"/>
               </a:rPr>
-              <a:t>  "sunProducer": {</a:t>
+              <a:t>  "goldProducer": {</a:t>
             </a:r>
             <a:endParaRPr sz="1000">
               <a:solidFill>
@@ -11850,7 +11850,7 @@
                 <a:cs typeface="Consolas"/>
                 <a:sym typeface="Consolas"/>
               </a:rPr>
-              <a:t>    "interval": 12, "amount": 25 } },</a:t>
+              <a:t>    "interval": 9, "amount": 25 } },</a:t>
             </a:r>
             <a:endParaRPr sz="1000">
               <a:solidFill>
@@ -11888,7 +11888,7 @@
                 <a:cs typeface="Consolas"/>
                 <a:sym typeface="Consolas"/>
               </a:rPr>
-              <a:t>{ "name": "Repeater",</a:t>
+              <a:t>{ "name": "Wizard",</a:t>
             </a:r>
             <a:endParaRPr sz="1000">
               <a:solidFill>
@@ -11926,7 +11926,7 @@
                 <a:cs typeface="Consolas"/>
                 <a:sym typeface="Consolas"/>
               </a:rPr>
-              <a:t>  "sprite": "repeater",</a:t>
+              <a:t>  "sprite": "wizard",</a:t>
             </a:r>
             <a:endParaRPr sz="1000">
               <a:solidFill>
@@ -12281,7 +12281,7 @@
                   <a:srgbClr val="6C757D"/>
                 </a:solidFill>
               </a:rPr>
-              <a:t>A Buckethead: a zombie type with armour</a:t>
+              <a:t>An Ironclad: a goblin type with armour</a:t>
             </a:r>
             <a:endParaRPr/>
           </a:p>
@@ -12329,7 +12329,7 @@
                   <a:srgbClr val="6C757D"/>
                 </a:solidFill>
               </a:rPr>
-              <a:t>The Cherry Bomb: Explode</a:t>
+              <a:t>The Bomb: Explode</a:t>
             </a:r>
             <a:endParaRPr/>
           </a:p>
@@ -12456,7 +12456,7 @@
                 <a:cs typeface="Consolas"/>
                 <a:sym typeface="Consolas"/>
               </a:rPr>
-              <a:t>    var plant = new Entity(world)</a:t>
+              <a:t>    var defender = new Entity(world)</a:t>
             </a:r>
             <a:endParaRPr sz="1000">
               <a:solidFill>
@@ -12684,7 +12684,7 @@
                 <a:cs typeface="Consolas"/>
                 <a:sym typeface="Consolas"/>
               </a:rPr>
-              <a:t>        plant.Add(new Shooter(Shooter.Interval,</a:t>
+              <a:t>        defender.Add(new Shooter(Shooter.Interval,</a:t>
             </a:r>
             <a:endParaRPr sz="1000">
               <a:solidFill>
@@ -12760,7 +12760,7 @@
                 <a:cs typeface="Consolas"/>
                 <a:sym typeface="Consolas"/>
               </a:rPr>
-              <a:t>    if (SunProducer != null)</a:t>
+              <a:t>    if (GoldProducer != null)</a:t>
             </a:r>
             <a:endParaRPr sz="1000">
               <a:solidFill>
@@ -12798,7 +12798,7 @@
                 <a:cs typeface="Consolas"/>
                 <a:sym typeface="Consolas"/>
               </a:rPr>
-              <a:t>        plant.Add(new SunProducer(</a:t>
+              <a:t>        defender.Add(new GoldProducer(</a:t>
             </a:r>
             <a:endParaRPr sz="1000">
               <a:solidFill>
@@ -12836,7 +12836,7 @@
                 <a:cs typeface="Consolas"/>
                 <a:sym typeface="Consolas"/>
               </a:rPr>
-              <a:t>            SunProducer.Interval, SunProducer.Amount));</a:t>
+              <a:t>            GoldProducer.Interval, GoldProducer.Amount));</a:t>
             </a:r>
             <a:endParaRPr sz="1000">
               <a:solidFill>
@@ -12874,7 +12874,7 @@
                 <a:cs typeface="Consolas"/>
                 <a:sym typeface="Consolas"/>
               </a:rPr>
-              <a:t>    return plant;</a:t>
+              <a:t>    return defender;</a:t>
             </a:r>
             <a:endParaRPr sz="1000">
               <a:solidFill>
@@ -13241,7 +13241,7 @@
                   <a:srgbClr val="DEE2E6"/>
                 </a:solidFill>
               </a:rPr>
-              <a:t>A plant’s cost: in each plant, or in its type?</a:t>
+              <a:t>A defender’s cost: in each defender, or in its type?</a:t>
             </a:r>
           </a:p>
         </p:txBody>
@@ -13367,7 +13367,7 @@
             </a:pPr>
             <a:r>
               <a:rPr lang="en" sz="1800"/>
-              <a:t>Pvz3: plant and zombie types from JSON</a:t>
+              <a:t>Pvz3: defender and goblin types from JSON</a:t>
             </a:r>
             <a:endParaRPr sz="1800"/>
           </a:p>
@@ -13455,7 +13455,7 @@
             </a:pPr>
             <a:r>
               <a:rPr lang="en"/>
-              <a:t>In plants.json:</a:t>
+              <a:t>In defenders.json:</a:t>
             </a:r>
             <a:endParaRPr/>
           </a:p>
@@ -13472,7 +13472,7 @@
             </a:pPr>
             <a:r>
               <a:rPr lang="en"/>
-              <a:t>A Wall-nut that costs 25 and takes twice the bites</a:t>
+              <a:t>A Knight that costs 25 and takes twice the hits</a:t>
             </a:r>
             <a:endParaRPr/>
           </a:p>
@@ -13489,7 +13489,7 @@
             </a:pPr>
             <a:r>
               <a:rPr lang="en"/>
-              <a:t>A Sunflower that makes 50 sun</a:t>
+              <a:t>A Chest that makes 50 gold</a:t>
             </a:r>
             <a:endParaRPr/>
           </a:p>
@@ -13630,7 +13630,7 @@
             </a:pPr>
             <a:r>
               <a:rPr lang="en"/>
-              <a:t>Starting sun, sun from the sky, which zombie comes when</a:t>
+              <a:t>Starting gold, gold from the sky, which goblin comes when</a:t>
             </a:r>
             <a:endParaRPr/>
           </a:p>
@@ -13647,7 +13647,7 @@
             </a:pPr>
             <a:r>
               <a:rPr lang="en"/>
-              <a:t>Seed packets recharge after planting</a:t>
+              <a:t>Cards recharge after use</a:t>
             </a:r>
             <a:endParaRPr/>
           </a:p>
@@ -13681,7 +13681,7 @@
             </a:pPr>
             <a:r>
               <a:rPr lang="en"/>
-              <a:t>Falling sun: a sun with one more component, Faller</a:t>
+              <a:t>Falling gold: a coin with one more component, Faller</a:t>
             </a:r>
             <a:endParaRPr/>
           </a:p>
@@ -13946,7 +13946,7 @@
             </a:pPr>
             <a:r>
               <a:rPr lang="en"/>
-              <a:t>New types: a Tall-nut and a Flag Zombie. Any code?</a:t>
+              <a:t>New types: a Guard and a Runner. Any code?</a:t>
             </a:r>
             <a:endParaRPr/>
           </a:p>
@@ -13963,7 +13963,7 @@
             </a:pPr>
             <a:r>
               <a:rPr lang="en"/>
-              <a:t>Snow Pea: peas that slow zombies down</a:t>
+              <a:t>Frost Wizard: arrows that slow goblins down</a:t>
             </a:r>
             <a:endParaRPr/>
           </a:p>
@@ -13997,7 +13997,7 @@
             </a:pPr>
             <a:r>
               <a:rPr lang="en"/>
-              <a:t>Pumpkin: armour for plants. Can you reuse Armour?</a:t>
+              <a:t>A shield for defenders. Can you reuse Armour?</a:t>
             </a:r>
             <a:endParaRPr/>
           </a:p>
@@ -14014,7 +14014,7 @@
             </a:pPr>
             <a:r>
               <a:rPr lang="en"/>
-              <a:t>A shovel that removes the plant you click</a:t>
+              <a:t>A pitchfork that sends the defender you click back into the castle</a:t>
             </a:r>
             <a:endParaRPr/>
           </a:p>
@@ -14761,7 +14761,7 @@
           <p:nvPr/>
         </p:nvPicPr>
         <p:blipFill>
-          <a:blip r:embed="rId3"/>
+          <a:blip r:embed="rId4"/>
           <a:stretch>
             <a:fillRect/>
           </a:stretch>
@@ -14769,7 +14769,7 @@
         <p:spPr>
           <a:xfrm>
             <a:off x="1677203" y="1531275"/>
-            <a:ext cx="5789594" cy="3256647"/>
+            <a:ext cx="5789594" cy="3256646"/>
           </a:xfrm>
           <a:prstGeom prst="rect">
             <a:avLst/>
@@ -14884,7 +14884,7 @@
             </a:pPr>
             <a:r>
               <a:rPr lang="en"/>
-              <a:t>PlantType.Create has an if for every component</a:t>
+              <a:t>DefenderType.Create has an if for every component</a:t>
             </a:r>
             <a:endParaRPr/>
           </a:p>
@@ -15690,7 +15690,7 @@
             </a:pPr>
             <a:r>
               <a:rPr lang="en"/>
-              <a:t>Why does inheritance break down for Plants vs. Zombies?</a:t>
+              <a:t>Why does inheritance break down for this game?</a:t>
             </a:r>
             <a:endParaRPr/>
           </a:p>
@@ -17711,7 +17711,7 @@
                 <a:cs typeface="Consolas"/>
                 <a:sym typeface="Consolas"/>
               </a:rPr>
-              <a:t>// Lawn.cs</a:t>
+              <a:t>// Field.cs</a:t>
             </a:r>
             <a:endParaRPr sz="1000">
               <a:solidFill>
@@ -18188,7 +18188,7 @@
                   <a:srgbClr val="DEE2E6"/>
                 </a:solidFill>
               </a:rPr>
-              <a:t>The lawn: a grid</a:t>
+              <a:t>The field: a grid</a:t>
             </a:r>
           </a:p>
           <a:p>
@@ -18264,7 +18264,7 @@
                   <a:srgbClr val="DEE2E6"/>
                 </a:solidFill>
               </a:rPr>
-              <a:t>Suns, seed packets: objects</a:t>
+              <a:t>Coins, cards: objects</a:t>
             </a:r>
           </a:p>
           <a:p>
@@ -18376,7 +18376,7 @@
                   <a:srgbClr val="DEE2E6"/>
                 </a:solidFill>
               </a:rPr>
-              <a:t>Sun</a:t>
+              <a:t>Coins</a:t>
             </a:r>
           </a:p>
         </p:txBody>
@@ -18466,7 +18466,7 @@
                   <a:srgbClr val="DEE2E6"/>
                 </a:solidFill>
               </a:rPr>
-              <a:t>Seed packets</a:t>
+              <a:t>Cards</a:t>
             </a:r>
           </a:p>
         </p:txBody>
@@ -18556,7 +18556,7 @@
                   <a:srgbClr val="DEE2E6"/>
                 </a:solidFill>
               </a:rPr>
-              <a:t>The lawn</a:t>
+              <a:t>The field</a:t>
             </a:r>
           </a:p>
         </p:txBody>
@@ -18590,7 +18590,7 @@
                   <a:srgbClr val="9AA3AB"/>
                 </a:solidFill>
               </a:rPr>
-              <a:t>And show what a click will do, by highlighting the cell with a faint plant.</a:t>
+              <a:t>And show what a click will do, by highlighting the cell with a faint defender.</a:t>
             </a:r>
           </a:p>
         </p:txBody>
@@ -18716,7 +18716,7 @@
             </a:pPr>
             <a:r>
               <a:rPr lang="en" sz="1800"/>
-              <a:t>Pvz0: choose a packet, click a cell to plant</a:t>
+              <a:t>Pvz0: choose a card, click a cell to place a defender</a:t>
             </a:r>
             <a:endParaRPr sz="1800"/>
           </a:p>
@@ -18838,7 +18838,7 @@
             </a:pPr>
             <a:r>
               <a:rPr lang="en"/>
-              <a:t>Move off the lawn: what does CellAt give you?</a:t>
+              <a:t>Move off the field: what does CellAt give you?</a:t>
             </a:r>
             <a:endParaRPr/>
           </a:p>

--- a/slides/09 Plants vs. Zombies.pptx
+++ b/slides/09 Plants vs. Zombies.pptx
@@ -10901,7 +10901,7 @@
             </a:pPr>
             <a:r>
               <a:rPr lang="en"/>
-              <a:t>Try It: An Ironclad Test</a:t>
+              <a:t>Try It: An Armour Test</a:t>
             </a:r>
             <a:endParaRPr/>
           </a:p>
@@ -10956,7 +10956,7 @@
             </a:pPr>
             <a:r>
               <a:rPr lang="en"/>
-              <a:t>An Ironclad: armour 20, health 10</a:t>
+              <a:t>A goblin with armour 20 and health 10</a:t>
             </a:r>
             <a:endParaRPr/>
           </a:p>

--- a/slides/09 Plants vs. Zombies.pptx
+++ b/slides/09 Plants vs. Zombies.pptx
@@ -14,6 +14,7 @@
     <p:sldId id="258" r:id="rId8"/>
     <p:sldId id="259" r:id="rId9"/>
     <p:sldId id="297" r:id="rId56"/>
+    <p:sldId id="323" r:id="rId31"/>
     <p:sldId id="298" r:id="rId57"/>
     <p:sldId id="299" r:id="rId58"/>
     <p:sldId id="318" r:id="rId36"/>
@@ -22,6 +23,7 @@
     <p:sldId id="302" r:id="rId61"/>
     <p:sldId id="317" r:id="rId37"/>
     <p:sldId id="303" r:id="rId62"/>
+    <p:sldId id="322" r:id="rId32"/>
     <p:sldId id="304" r:id="rId63"/>
     <p:sldId id="305" r:id="rId64"/>
     <p:sldId id="306" r:id="rId65"/>
@@ -30,6 +32,7 @@
     <p:sldId id="307" r:id="rId66"/>
     <p:sldId id="316" r:id="rId38"/>
     <p:sldId id="308" r:id="rId67"/>
+    <p:sldId id="321" r:id="rId33"/>
     <p:sldId id="309" r:id="rId68"/>
     <p:sldId id="310" r:id="rId69"/>
     <p:sldId id="311" r:id="rId70"/>
@@ -2508,6 +2511,195 @@
 </p:notes>
 </file>
 
+<file path=ppt/notesSlides/notesSlide33.xml><?xml version="1.0" encoding="utf-8"?>
+<p:notes xmlns:a="http://schemas.openxmlformats.org/drawingml/2006/main" xmlns:p="http://schemas.openxmlformats.org/presentationml/2006/main" xmlns:r="http://schemas.openxmlformats.org/officeDocument/2006/relationships">
+  <p:cSld>
+    <p:spTree>
+      <p:nvGrpSpPr>
+        <p:cNvPr id="1" name=""/>
+        <p:cNvGrpSpPr/>
+        <p:nvPr/>
+      </p:nvGrpSpPr>
+      <p:grpSpPr>
+        <a:xfrm>
+          <a:off x="0" y="0"/>
+          <a:ext cx="0" cy="0"/>
+          <a:chOff x="0" y="0"/>
+          <a:chExt cx="0" cy="0"/>
+        </a:xfrm>
+      </p:grpSpPr>
+      <p:sp>
+        <p:nvSpPr>
+          <p:cNvPr id="2" name="Slide Image Placeholder 1"/>
+          <p:cNvSpPr>
+            <a:spLocks noGrp="1"/>
+          </p:cNvSpPr>
+          <p:nvPr>
+            <p:ph type="sldImg" idx="2"/>
+          </p:nvPr>
+        </p:nvSpPr>
+        <p:spPr/>
+      </p:sp>
+      <p:sp>
+        <p:nvSpPr>
+          <p:cNvPr id="3" name="Notes Placeholder 2"/>
+          <p:cNvSpPr>
+            <a:spLocks noGrp="1"/>
+          </p:cNvSpPr>
+          <p:nvPr>
+            <p:ph type="body" idx="1"/>
+          </p:nvPr>
+        </p:nvSpPr>
+        <p:spPr/>
+        <p:txBody>
+          <a:bodyPr/>
+          <a:lstStyle/>
+          <a:p>
+            <a:r>
+              <a:t>One DefenderType for all archers, from the data file. Each archer on the field holds only what is its own.</a:t>
+            </a:r>
+          </a:p>
+          <a:p>
+            <a:r>
+              <a:t>Ask: where does the cost belong? Answer: with the kind; the archer on the field has no cost.</a:t>
+            </a:r>
+          </a:p>
+        </p:txBody>
+      </p:sp>
+    </p:spTree>
+  </p:cSld>
+  <p:clrMapOvr>
+    <a:masterClrMapping/>
+  </p:clrMapOvr>
+</p:notes>
+</file>
+
+<file path=ppt/notesSlides/notesSlide34.xml><?xml version="1.0" encoding="utf-8"?>
+<p:notes xmlns:a="http://schemas.openxmlformats.org/drawingml/2006/main" xmlns:p="http://schemas.openxmlformats.org/presentationml/2006/main" xmlns:r="http://schemas.openxmlformats.org/officeDocument/2006/relationships">
+  <p:cSld>
+    <p:spTree>
+      <p:nvGrpSpPr>
+        <p:cNvPr id="1" name=""/>
+        <p:cNvGrpSpPr/>
+        <p:nvPr/>
+      </p:nvGrpSpPr>
+      <p:grpSpPr>
+        <a:xfrm>
+          <a:off x="0" y="0"/>
+          <a:ext cx="0" cy="0"/>
+          <a:chOff x="0" y="0"/>
+          <a:chExt cx="0" cy="0"/>
+        </a:xfrm>
+      </p:grpSpPr>
+      <p:sp>
+        <p:nvSpPr>
+          <p:cNvPr id="2" name="Slide Image Placeholder 1"/>
+          <p:cNvSpPr>
+            <a:spLocks noGrp="1"/>
+          </p:cNvSpPr>
+          <p:nvPr>
+            <p:ph type="sldImg" idx="2"/>
+          </p:nvPr>
+        </p:nvSpPr>
+        <p:spPr/>
+      </p:sp>
+      <p:sp>
+        <p:nvSpPr>
+          <p:cNvPr id="3" name="Notes Placeholder 2"/>
+          <p:cNvSpPr>
+            <a:spLocks noGrp="1"/>
+          </p:cNvSpPr>
+          <p:nvPr>
+            <p:ph type="body" idx="1"/>
+          </p:nvPr>
+        </p:nvSpPr>
+        <p:spPr/>
+        <p:txBody>
+          <a:bodyPr/>
+          <a:lstStyle/>
+          <a:p>
+            <a:r>
+              <a:t>Four kinds of thing, four lists. Health is written once and used by all of them.</a:t>
+            </a:r>
+          </a:p>
+          <a:p>
+            <a:r>
+              <a:t>Ask: what is a Shieldbearer? Answer: a Goblin with one more component.</a:t>
+            </a:r>
+          </a:p>
+        </p:txBody>
+      </p:sp>
+    </p:spTree>
+  </p:cSld>
+  <p:clrMapOvr>
+    <a:masterClrMapping/>
+  </p:clrMapOvr>
+</p:notes>
+</file>
+
+<file path=ppt/notesSlides/notesSlide35.xml><?xml version="1.0" encoding="utf-8"?>
+<p:notes xmlns:a="http://schemas.openxmlformats.org/drawingml/2006/main" xmlns:p="http://schemas.openxmlformats.org/presentationml/2006/main" xmlns:r="http://schemas.openxmlformats.org/officeDocument/2006/relationships">
+  <p:cSld>
+    <p:spTree>
+      <p:nvGrpSpPr>
+        <p:cNvPr id="1" name=""/>
+        <p:cNvGrpSpPr/>
+        <p:nvPr/>
+      </p:nvGrpSpPr>
+      <p:grpSpPr>
+        <a:xfrm>
+          <a:off x="0" y="0"/>
+          <a:ext cx="0" cy="0"/>
+          <a:chOff x="0" y="0"/>
+          <a:chExt cx="0" cy="0"/>
+        </a:xfrm>
+      </p:grpSpPr>
+      <p:sp>
+        <p:nvSpPr>
+          <p:cNvPr id="2" name="Slide Image Placeholder 1"/>
+          <p:cNvSpPr>
+            <a:spLocks noGrp="1"/>
+          </p:cNvSpPr>
+          <p:nvPr>
+            <p:ph type="sldImg" idx="2"/>
+          </p:nvPr>
+        </p:nvSpPr>
+        <p:spPr/>
+      </p:sp>
+      <p:sp>
+        <p:nvSpPr>
+          <p:cNvPr id="3" name="Notes Placeholder 2"/>
+          <p:cNvSpPr>
+            <a:spLocks noGrp="1"/>
+          </p:cNvSpPr>
+          <p:nvPr>
+            <p:ph type="body" idx="1"/>
+          </p:nvPr>
+        </p:nvSpPr>
+        <p:spPr/>
+        <p:txBody>
+          <a:bodyPr/>
+          <a:lstStyle/>
+          <a:p>
+            <a:r>
+              <a:t>Two steps: from window pixels to the game's virtual resolution, then from a point to a cell with a division.</a:t>
+            </a:r>
+          </a:p>
+          <a:p>
+            <a:r>
+              <a:t>Ask: what does CellAt give off the field? Answer: null.</a:t>
+            </a:r>
+          </a:p>
+        </p:txBody>
+      </p:sp>
+    </p:spTree>
+  </p:cSld>
+  <p:clrMapOvr>
+    <a:masterClrMapping/>
+  </p:clrMapOvr>
+</p:notes>
+</file>
+
 <file path=ppt/notesSlides/notesSlide37.xml><?xml version="1.0" encoding="utf-8"?>
 <p:notes xmlns:a="http://schemas.openxmlformats.org/drawingml/2006/main" xmlns:r="http://schemas.openxmlformats.org/officeDocument/2006/relationships" xmlns:mc="http://schemas.openxmlformats.org/markup-compatibility/2006" xmlns:mv="urn:schemas-microsoft-com:mac:vml" xmlns:p="http://schemas.openxmlformats.org/presentationml/2006/main" xmlns:c="http://schemas.openxmlformats.org/drawingml/2006/chart" xmlns:dgm="http://schemas.openxmlformats.org/drawingml/2006/diagram" xmlns:o="urn:schemas-microsoft-com:office:office" xmlns:v="urn:schemas-microsoft-com:vml" xmlns:pvml="urn:schemas-microsoft-com:office:powerpoint" xmlns:com="http://schemas.openxmlformats.org/drawingml/2006/compatibility" xmlns:p14="http://schemas.microsoft.com/office/powerpoint/2010/main" xmlns:p15="http://schemas.microsoft.com/office/powerpoint/2012/main" xmlns:ahyp="http://schemas.microsoft.com/office/drawing/2018/hyperlinkcolor" showMasterPhAnim="0" showMasterSp="0">
   <p:cSld>
@@ -2926,6 +3118,56 @@
           <a:p>
             <a:r>
               <a:t>Inheritance says what something is; here what matters is what it can do.</a:t>
+            </a:r>
+          </a:p>
+          <a:p>
+            <a:r>
+              <a:t>an Archer subclass</a:t>
+            </a:r>
+          </a:p>
+          <a:p>
+            <a:r>
+              <a:t>that overrides... what?</a:t>
+            </a:r>
+          </a:p>
+          <a:p>
+            <a:r>
+              <a:t>a Goblin subclass;</a:t>
+            </a:r>
+          </a:p>
+          <a:p>
+            <a:r>
+              <a:t>armour for a defender: copy it</a:t>
+            </a:r>
+          </a:p>
+          <a:p>
+            <a:r>
+              <a:t>Shoots and makes gold</a:t>
+            </a:r>
+          </a:p>
+          <a:p>
+            <a:r>
+              <a:t>which parent?</a:t>
+            </a:r>
+          </a:p>
+          <a:p>
+            <a:r>
+              <a:t>C# allows only one</a:t>
+            </a:r>
+          </a:p>
+          <a:p>
+            <a:r>
+              <a:t>already copied:</a:t>
+            </a:r>
+          </a:p>
+          <a:p>
+            <a:r>
+              <a:t>a goblin isn’t a defender</a:t>
+            </a:r>
+          </a:p>
+          <a:p>
+            <a:r>
+              <a:t>Inheritance describes what something is. In this game, what it can do matters more.</a:t>
             </a:r>
           </a:p>
         </p:txBody>
@@ -7294,8 +7536,8 @@
         </p:nvSpPr>
         <p:spPr>
           <a:xfrm>
-            <a:off x="311700" y="885950"/>
-            <a:ext cx="8520600" cy="521208"/>
+            <a:off x="311700" y="886968"/>
+            <a:ext cx="8520600" cy="457200"/>
           </a:xfrm>
           <a:prstGeom prst="rect">
             <a:avLst/>
@@ -7325,346 +7567,30 @@
           </a:p>
         </p:txBody>
       </p:sp>
-      <p:sp>
-        <p:nvSpPr>
-          <p:cNvPr id="295" name="Rounded Rectangle 294"/>
-          <p:cNvSpPr/>
+      <p:pic>
+        <p:nvPicPr>
+          <p:cNvPr id="295" name="Picture 294" descr="inheritance.png"/>
+          <p:cNvPicPr>
+            <a:picLocks noChangeAspect="1"/>
+          </p:cNvPicPr>
           <p:nvPr/>
-        </p:nvSpPr>
+        </p:nvPicPr>
+        <p:blipFill>
+          <a:blip r:embed="rId3"/>
+          <a:stretch>
+            <a:fillRect/>
+          </a:stretch>
+        </p:blipFill>
         <p:spPr>
           <a:xfrm>
-            <a:off x="411480" y="1417320"/>
-            <a:ext cx="1965960" cy="1188720"/>
-          </a:xfrm>
-          <a:prstGeom prst="roundRect">
-            <a:avLst>
-              <a:gd name="adj" fmla="val 12000"/>
-            </a:avLst>
-          </a:prstGeom>
-          <a:solidFill>
-            <a:srgbClr val="2E3338"/>
-          </a:solidFill>
-          <a:ln>
-            <a:noFill/>
-          </a:ln>
-          <a:effectLst/>
-        </p:spPr>
-        <p:style>
-          <a:lnRef idx="1">
-            <a:schemeClr val="accent1"/>
-          </a:lnRef>
-          <a:fillRef idx="3">
-            <a:schemeClr val="accent1"/>
-          </a:fillRef>
-          <a:effectRef idx="2">
-            <a:schemeClr val="accent1"/>
-          </a:effectRef>
-          <a:fontRef idx="minor">
-            <a:schemeClr val="lt1"/>
-          </a:fontRef>
-        </p:style>
-        <p:txBody>
-          <a:bodyPr rtlCol="0" anchor="ctr" wrap="square" lIns="73152" rIns="73152"/>
-          <a:lstStyle/>
-          <a:p>
-            <a:pPr algn="ctr"/>
-            <a:r>
-              <a:rPr sz="1500" b="1">
-                <a:solidFill>
-                  <a:srgbClr val="DEE2E6"/>
-                </a:solidFill>
-              </a:rPr>
-              <a:t>Wizard</a:t>
-            </a:r>
-          </a:p>
-          <a:p>
-            <a:pPr algn="ctr"/>
-            <a:r>
-              <a:rPr sz="1300" b="0">
-                <a:solidFill>
-                  <a:srgbClr val="9AA3AB"/>
-                </a:solidFill>
-              </a:rPr>
-              <a:t>an Archer subclass</a:t>
-            </a:r>
-          </a:p>
-          <a:p>
-            <a:pPr algn="ctr"/>
-            <a:r>
-              <a:rPr sz="1300" b="0">
-                <a:solidFill>
-                  <a:srgbClr val="9AA3AB"/>
-                </a:solidFill>
-              </a:rPr>
-              <a:t>that overrides... what?</a:t>
-            </a:r>
-          </a:p>
-        </p:txBody>
-      </p:sp>
-      <p:sp>
-        <p:nvSpPr>
-          <p:cNvPr id="296" name="Rounded Rectangle 295"/>
-          <p:cNvSpPr/>
-          <p:nvPr/>
-        </p:nvSpPr>
-        <p:spPr>
-          <a:xfrm>
-            <a:off x="2514600" y="1417320"/>
-            <a:ext cx="1965960" cy="1188720"/>
-          </a:xfrm>
-          <a:prstGeom prst="roundRect">
-            <a:avLst>
-              <a:gd name="adj" fmla="val 12000"/>
-            </a:avLst>
-          </a:prstGeom>
-          <a:solidFill>
-            <a:srgbClr val="2E3338"/>
-          </a:solidFill>
-          <a:ln>
-            <a:noFill/>
-          </a:ln>
-          <a:effectLst/>
-        </p:spPr>
-        <p:style>
-          <a:lnRef idx="1">
-            <a:schemeClr val="accent1"/>
-          </a:lnRef>
-          <a:fillRef idx="3">
-            <a:schemeClr val="accent1"/>
-          </a:fillRef>
-          <a:effectRef idx="2">
-            <a:schemeClr val="accent1"/>
-          </a:effectRef>
-          <a:fontRef idx="minor">
-            <a:schemeClr val="lt1"/>
-          </a:fontRef>
-        </p:style>
-        <p:txBody>
-          <a:bodyPr rtlCol="0" anchor="ctr" wrap="square" lIns="73152" rIns="73152"/>
-          <a:lstStyle/>
-          <a:p>
-            <a:pPr algn="ctr"/>
-            <a:r>
-              <a:rPr sz="1500" b="1">
-                <a:solidFill>
-                  <a:srgbClr val="DEE2E6"/>
-                </a:solidFill>
-              </a:rPr>
-              <a:t>Shieldbearer</a:t>
-            </a:r>
-          </a:p>
-          <a:p>
-            <a:pPr algn="ctr"/>
-            <a:r>
-              <a:rPr sz="1300" b="0">
-                <a:solidFill>
-                  <a:srgbClr val="9AA3AB"/>
-                </a:solidFill>
-              </a:rPr>
-              <a:t>a Goblin subclass;</a:t>
-            </a:r>
-          </a:p>
-          <a:p>
-            <a:pPr algn="ctr"/>
-            <a:r>
-              <a:rPr sz="1300" b="0">
-                <a:solidFill>
-                  <a:srgbClr val="9AA3AB"/>
-                </a:solidFill>
-              </a:rPr>
-              <a:t>armour for a defender: copy it</a:t>
-            </a:r>
-          </a:p>
-        </p:txBody>
-      </p:sp>
-      <p:sp>
-        <p:nvSpPr>
-          <p:cNvPr id="297" name="Rounded Rectangle 296"/>
-          <p:cNvSpPr/>
-          <p:nvPr/>
-        </p:nvSpPr>
-        <p:spPr>
-          <a:xfrm>
-            <a:off x="4617720" y="1417320"/>
-            <a:ext cx="1965960" cy="1188720"/>
-          </a:xfrm>
-          <a:prstGeom prst="roundRect">
-            <a:avLst>
-              <a:gd name="adj" fmla="val 12000"/>
-            </a:avLst>
-          </a:prstGeom>
-          <a:solidFill>
-            <a:srgbClr val="2E3338"/>
-          </a:solidFill>
-          <a:ln w="25400">
-            <a:solidFill>
-              <a:srgbClr val="D45D35"/>
-            </a:solidFill>
-          </a:ln>
-          <a:effectLst/>
-        </p:spPr>
-        <p:style>
-          <a:lnRef idx="1">
-            <a:schemeClr val="accent1"/>
-          </a:lnRef>
-          <a:fillRef idx="3">
-            <a:schemeClr val="accent1"/>
-          </a:fillRef>
-          <a:effectRef idx="2">
-            <a:schemeClr val="accent1"/>
-          </a:effectRef>
-          <a:fontRef idx="minor">
-            <a:schemeClr val="lt1"/>
-          </a:fontRef>
-        </p:style>
-        <p:txBody>
-          <a:bodyPr rtlCol="0" anchor="ctr" wrap="square" lIns="73152" rIns="73152"/>
-          <a:lstStyle/>
-          <a:p>
-            <a:pPr algn="ctr"/>
-            <a:r>
-              <a:rPr sz="1500" b="1">
-                <a:solidFill>
-                  <a:srgbClr val="DEE2E6"/>
-                </a:solidFill>
-              </a:rPr>
-              <a:t>Shoots and makes gold</a:t>
-            </a:r>
-          </a:p>
-          <a:p>
-            <a:pPr algn="ctr"/>
-            <a:r>
-              <a:rPr sz="1300" b="0">
-                <a:solidFill>
-                  <a:srgbClr val="9AA3AB"/>
-                </a:solidFill>
-              </a:rPr>
-              <a:t>which parent?</a:t>
-            </a:r>
-          </a:p>
-          <a:p>
-            <a:pPr algn="ctr"/>
-            <a:r>
-              <a:rPr sz="1300" b="0">
-                <a:solidFill>
-                  <a:srgbClr val="9AA3AB"/>
-                </a:solidFill>
-              </a:rPr>
-              <a:t>C# allows only one</a:t>
-            </a:r>
-          </a:p>
-        </p:txBody>
-      </p:sp>
-      <p:sp>
-        <p:nvSpPr>
-          <p:cNvPr id="298" name="Rounded Rectangle 297"/>
-          <p:cNvSpPr/>
-          <p:nvPr/>
-        </p:nvSpPr>
-        <p:spPr>
-          <a:xfrm>
-            <a:off x="6720840" y="1417320"/>
-            <a:ext cx="1965960" cy="1188720"/>
-          </a:xfrm>
-          <a:prstGeom prst="roundRect">
-            <a:avLst>
-              <a:gd name="adj" fmla="val 12000"/>
-            </a:avLst>
-          </a:prstGeom>
-          <a:solidFill>
-            <a:srgbClr val="2E3338"/>
-          </a:solidFill>
-          <a:ln>
-            <a:noFill/>
-          </a:ln>
-          <a:effectLst/>
-        </p:spPr>
-        <p:style>
-          <a:lnRef idx="1">
-            <a:schemeClr val="accent1"/>
-          </a:lnRef>
-          <a:fillRef idx="3">
-            <a:schemeClr val="accent1"/>
-          </a:fillRef>
-          <a:effectRef idx="2">
-            <a:schemeClr val="accent1"/>
-          </a:effectRef>
-          <a:fontRef idx="minor">
-            <a:schemeClr val="lt1"/>
-          </a:fontRef>
-        </p:style>
-        <p:txBody>
-          <a:bodyPr rtlCol="0" anchor="ctr" wrap="square" lIns="73152" rIns="73152"/>
-          <a:lstStyle/>
-          <a:p>
-            <a:pPr algn="ctr"/>
-            <a:r>
-              <a:rPr sz="1500" b="1">
-                <a:solidFill>
-                  <a:srgbClr val="DEE2E6"/>
-                </a:solidFill>
-              </a:rPr>
-              <a:t>Health</a:t>
-            </a:r>
-          </a:p>
-          <a:p>
-            <a:pPr algn="ctr"/>
-            <a:r>
-              <a:rPr sz="1300" b="0">
-                <a:solidFill>
-                  <a:srgbClr val="9AA3AB"/>
-                </a:solidFill>
-              </a:rPr>
-              <a:t>already copied:</a:t>
-            </a:r>
-          </a:p>
-          <a:p>
-            <a:pPr algn="ctr"/>
-            <a:r>
-              <a:rPr sz="1300" b="0">
-                <a:solidFill>
-                  <a:srgbClr val="9AA3AB"/>
-                </a:solidFill>
-              </a:rPr>
-              <a:t>a goblin isn’t a defender</a:t>
-            </a:r>
-          </a:p>
-        </p:txBody>
-      </p:sp>
-      <p:sp>
-        <p:nvSpPr>
-          <p:cNvPr id="299" name="TextBox 298"/>
-          <p:cNvSpPr txBox="1"/>
-          <p:nvPr/>
-        </p:nvSpPr>
-        <p:spPr>
-          <a:xfrm>
-            <a:off x="457200" y="2926080"/>
-            <a:ext cx="8229600" cy="731520"/>
+            <a:off x="457200" y="1371600"/>
+            <a:ext cx="8229600" cy="3657600"/>
           </a:xfrm>
           <a:prstGeom prst="rect">
             <a:avLst/>
           </a:prstGeom>
-          <a:noFill/>
         </p:spPr>
-        <p:txBody>
-          <a:bodyPr wrap="square">
-            <a:spAutoFit/>
-          </a:bodyPr>
-          <a:lstStyle/>
-          <a:p>
-            <a:pPr algn="ctr"/>
-            <a:r>
-              <a:rPr sz="1600" b="1" i="0">
-                <a:solidFill>
-                  <a:srgbClr val="DEE2E6"/>
-                </a:solidFill>
-              </a:rPr>
-              <a:t>Inheritance describes what something is. In this game, what it can do matters more.</a:t>
-            </a:r>
-          </a:p>
-        </p:txBody>
-      </p:sp>
+      </p:pic>
     </p:spTree>
   </p:cSld>
   <p:clrMapOvr>
@@ -16621,6 +16547,228 @@
 </p:sld>
 </file>
 
+<file path=ppt/slides/slide33.xml><?xml version="1.0" encoding="utf-8"?>
+<p:sld xmlns:a="http://schemas.openxmlformats.org/drawingml/2006/main" xmlns:p="http://schemas.openxmlformats.org/presentationml/2006/main" xmlns:r="http://schemas.openxmlformats.org/officeDocument/2006/relationships">
+  <p:cSld>
+    <p:spTree>
+      <p:nvGrpSpPr>
+        <p:cNvPr id="1" name=""/>
+        <p:cNvGrpSpPr/>
+        <p:nvPr/>
+      </p:nvGrpSpPr>
+      <p:grpSpPr/>
+      <p:sp>
+        <p:nvSpPr>
+          <p:cNvPr id="2" name="Title 1"/>
+          <p:cNvSpPr>
+            <a:spLocks noGrp="1"/>
+          </p:cNvSpPr>
+          <p:nvPr>
+            <p:ph type="title"/>
+          </p:nvPr>
+        </p:nvSpPr>
+        <p:spPr/>
+        <p:txBody>
+          <a:bodyPr/>
+          <a:lstStyle/>
+          <a:p>
+            <a:pPr indent="0" lvl="0" marL="0" rtl="0" algn="l">
+              <a:spcBef>
+                <a:spcPts val="0"/>
+              </a:spcBef>
+              <a:spcAft>
+                <a:spcPts val="0"/>
+              </a:spcAft>
+              <a:buNone/>
+            </a:pPr>
+            <a:r>
+              <a:rPr lang="en"/>
+              <a:t>Types and Instances</a:t>
+            </a:r>
+            <a:endParaRPr/>
+          </a:p>
+        </p:txBody>
+      </p:sp>
+      <p:pic>
+        <p:nvPicPr>
+          <p:cNvPr id="3" name="Picture 2" descr="type-object.png"/>
+          <p:cNvPicPr>
+            <a:picLocks noChangeAspect="1"/>
+          </p:cNvPicPr>
+          <p:nvPr/>
+        </p:nvPicPr>
+        <p:blipFill>
+          <a:blip r:embed="rId2"/>
+          <a:stretch>
+            <a:fillRect/>
+          </a:stretch>
+        </p:blipFill>
+        <p:spPr>
+          <a:xfrm>
+            <a:off x="360381" y="1051560"/>
+            <a:ext cx="8423237" cy="3977640"/>
+          </a:xfrm>
+          <a:prstGeom prst="rect">
+            <a:avLst/>
+          </a:prstGeom>
+        </p:spPr>
+      </p:pic>
+    </p:spTree>
+  </p:cSld>
+  <p:clrMapOvr>
+    <a:masterClrMapping/>
+  </p:clrMapOvr>
+</p:sld>
+</file>
+
+<file path=ppt/slides/slide34.xml><?xml version="1.0" encoding="utf-8"?>
+<p:sld xmlns:a="http://schemas.openxmlformats.org/drawingml/2006/main" xmlns:p="http://schemas.openxmlformats.org/presentationml/2006/main" xmlns:r="http://schemas.openxmlformats.org/officeDocument/2006/relationships">
+  <p:cSld>
+    <p:spTree>
+      <p:nvGrpSpPr>
+        <p:cNvPr id="1" name=""/>
+        <p:cNvGrpSpPr/>
+        <p:nvPr/>
+      </p:nvGrpSpPr>
+      <p:grpSpPr/>
+      <p:sp>
+        <p:nvSpPr>
+          <p:cNvPr id="2" name="Title 1"/>
+          <p:cNvSpPr>
+            <a:spLocks noGrp="1"/>
+          </p:cNvSpPr>
+          <p:nvPr>
+            <p:ph type="title"/>
+          </p:nvPr>
+        </p:nvSpPr>
+        <p:spPr/>
+        <p:txBody>
+          <a:bodyPr/>
+          <a:lstStyle/>
+          <a:p>
+            <a:pPr indent="0" lvl="0" marL="0" rtl="0" algn="l">
+              <a:spcBef>
+                <a:spcPts val="0"/>
+              </a:spcBef>
+              <a:spcAft>
+                <a:spcPts val="0"/>
+              </a:spcAft>
+              <a:buNone/>
+            </a:pPr>
+            <a:r>
+              <a:rPr lang="en"/>
+              <a:t>An Entity Is a List of Components</a:t>
+            </a:r>
+            <a:endParaRPr/>
+          </a:p>
+        </p:txBody>
+      </p:sp>
+      <p:pic>
+        <p:nvPicPr>
+          <p:cNvPr id="3" name="Picture 2" descr="components.png"/>
+          <p:cNvPicPr>
+            <a:picLocks noChangeAspect="1"/>
+          </p:cNvPicPr>
+          <p:nvPr/>
+        </p:nvPicPr>
+        <p:blipFill>
+          <a:blip r:embed="rId2"/>
+          <a:stretch>
+            <a:fillRect/>
+          </a:stretch>
+        </p:blipFill>
+        <p:spPr>
+          <a:xfrm>
+            <a:off x="594360" y="1051560"/>
+            <a:ext cx="7955279" cy="3977639"/>
+          </a:xfrm>
+          <a:prstGeom prst="rect">
+            <a:avLst/>
+          </a:prstGeom>
+        </p:spPr>
+      </p:pic>
+    </p:spTree>
+  </p:cSld>
+  <p:clrMapOvr>
+    <a:masterClrMapping/>
+  </p:clrMapOvr>
+</p:sld>
+</file>
+
+<file path=ppt/slides/slide35.xml><?xml version="1.0" encoding="utf-8"?>
+<p:sld xmlns:a="http://schemas.openxmlformats.org/drawingml/2006/main" xmlns:p="http://schemas.openxmlformats.org/presentationml/2006/main" xmlns:r="http://schemas.openxmlformats.org/officeDocument/2006/relationships">
+  <p:cSld>
+    <p:spTree>
+      <p:nvGrpSpPr>
+        <p:cNvPr id="1" name=""/>
+        <p:cNvGrpSpPr/>
+        <p:nvPr/>
+      </p:nvGrpSpPr>
+      <p:grpSpPr/>
+      <p:sp>
+        <p:nvSpPr>
+          <p:cNvPr id="2" name="Title 1"/>
+          <p:cNvSpPr>
+            <a:spLocks noGrp="1"/>
+          </p:cNvSpPr>
+          <p:nvPr>
+            <p:ph type="title"/>
+          </p:nvPr>
+        </p:nvSpPr>
+        <p:spPr/>
+        <p:txBody>
+          <a:bodyPr/>
+          <a:lstStyle/>
+          <a:p>
+            <a:pPr indent="0" lvl="0" marL="0" rtl="0" algn="l">
+              <a:spcBef>
+                <a:spcPts val="0"/>
+              </a:spcBef>
+              <a:spcAft>
+                <a:spcPts val="0"/>
+              </a:spcAft>
+              <a:buNone/>
+            </a:pPr>
+            <a:r>
+              <a:rPr lang="en"/>
+              <a:t>From a Click to a Cell</a:t>
+            </a:r>
+            <a:endParaRPr/>
+          </a:p>
+        </p:txBody>
+      </p:sp>
+      <p:pic>
+        <p:nvPicPr>
+          <p:cNvPr id="3" name="Picture 2" descr="picking.png"/>
+          <p:cNvPicPr>
+            <a:picLocks noChangeAspect="1"/>
+          </p:cNvPicPr>
+          <p:nvPr/>
+        </p:nvPicPr>
+        <p:blipFill>
+          <a:blip r:embed="rId2"/>
+          <a:stretch>
+            <a:fillRect/>
+          </a:stretch>
+        </p:blipFill>
+        <p:spPr>
+          <a:xfrm>
+            <a:off x="480713" y="1051560"/>
+            <a:ext cx="8182573" cy="3977640"/>
+          </a:xfrm>
+          <a:prstGeom prst="rect">
+            <a:avLst/>
+          </a:prstGeom>
+        </p:spPr>
+      </p:pic>
+    </p:spTree>
+  </p:cSld>
+  <p:clrMapOvr>
+    <a:masterClrMapping/>
+  </p:clrMapOvr>
+</p:sld>
+</file>
+
 <file path=ppt/slides/slide4.xml><?xml version="1.0" encoding="utf-8"?>
 <p:sld xmlns:a="http://schemas.openxmlformats.org/drawingml/2006/main" xmlns:r="http://schemas.openxmlformats.org/officeDocument/2006/relationships" xmlns:mc="http://schemas.openxmlformats.org/markup-compatibility/2006" xmlns:mv="urn:schemas-microsoft-com:mac:vml" xmlns:p="http://schemas.openxmlformats.org/presentationml/2006/main" xmlns:c="http://schemas.openxmlformats.org/drawingml/2006/chart" xmlns:dgm="http://schemas.openxmlformats.org/drawingml/2006/diagram" xmlns:o="urn:schemas-microsoft-com:office:office" xmlns:v="urn:schemas-microsoft-com:vml" xmlns:pvml="urn:schemas-microsoft-com:office:powerpoint" xmlns:com="http://schemas.openxmlformats.org/drawingml/2006/compatibility" xmlns:p14="http://schemas.microsoft.com/office/powerpoint/2010/main" xmlns:p15="http://schemas.microsoft.com/office/powerpoint/2012/main" xmlns:ahyp="http://schemas.microsoft.com/office/drawing/2018/hyperlinkcolor">
   <p:cSld>

--- a/slides/09 Plants vs. Zombies.pptx
+++ b/slides/09 Plants vs. Zombies.pptx
@@ -6853,6 +6853,128 @@
       <p:grpSpPr/>
       <p:sp>
         <p:nvSpPr>
+          <p:cNvPr id="2" name="Title 1"/>
+          <p:cNvSpPr>
+            <a:spLocks noGrp="1"/>
+          </p:cNvSpPr>
+          <p:nvPr>
+            <p:ph type="title"/>
+          </p:nvPr>
+        </p:nvSpPr>
+        <p:spPr/>
+        <p:txBody>
+          <a:bodyPr/>
+          <a:lstStyle/>
+          <a:p>
+            <a:pPr indent="0" lvl="0" marL="0" rtl="0" algn="l">
+              <a:spcBef>
+                <a:spcPts val="0"/>
+              </a:spcBef>
+              <a:spcAft>
+                <a:spcPts val="0"/>
+              </a:spcAft>
+              <a:buNone/>
+            </a:pPr>
+            <a:r>
+              <a:rPr lang="en"/>
+              <a:t>Try It: Where Is the Mouse?</a:t>
+            </a:r>
+            <a:endParaRPr/>
+          </a:p>
+        </p:txBody>
+      </p:sp>
+      <p:sp>
+        <p:nvSpPr>
+          <p:cNvPr id="3" name="Text Placeholder 2"/>
+          <p:cNvSpPr>
+            <a:spLocks noGrp="1"/>
+          </p:cNvSpPr>
+          <p:nvPr>
+            <p:ph type="body" idx="1"/>
+          </p:nvPr>
+        </p:nvSpPr>
+        <p:spPr>
+          <a:xfrm>
+            <a:off x="311700" y="885950"/>
+            <a:ext cx="8520600" cy="1289304"/>
+          </a:xfrm>
+        </p:spPr>
+        <p:txBody>
+          <a:bodyPr/>
+          <a:lstStyle/>
+          <a:p>
+            <a:pPr indent="-330200" lvl="0" marL="457200" rtl="0" algn="l">
+              <a:spcBef>
+                <a:spcPts val="0"/>
+              </a:spcBef>
+              <a:spcAft>
+                <a:spcPts val="0"/>
+              </a:spcAft>
+              <a:buSzPts val="1600"/>
+              <a:buChar char="●"/>
+            </a:pPr>
+            <a:r>
+              <a:rPr lang="en"/>
+              <a:t>In Pvz0:</a:t>
+            </a:r>
+            <a:endParaRPr/>
+          </a:p>
+          <a:p>
+            <a:pPr indent="-330200" lvl="0" marL="457200" rtl="0" algn="l">
+              <a:spcBef>
+                <a:spcPts val="0"/>
+              </a:spcBef>
+              <a:spcAft>
+                <a:spcPts val="0"/>
+              </a:spcAft>
+              <a:buSzPts val="1600"/>
+              <a:buChar char="●"/>
+            </a:pPr>
+            <a:r>
+              <a:rPr lang="en"/>
+              <a:t>Show the cell under the mouse in the window title</a:t>
+            </a:r>
+            <a:endParaRPr/>
+          </a:p>
+          <a:p>
+            <a:pPr indent="-330200" lvl="0" marL="457200" rtl="0" algn="l">
+              <a:spcBef>
+                <a:spcPts val="0"/>
+              </a:spcBef>
+              <a:spcAft>
+                <a:spcPts val="0"/>
+              </a:spcAft>
+              <a:buSzPts val="1600"/>
+              <a:buChar char="●"/>
+            </a:pPr>
+            <a:r>
+              <a:rPr lang="en"/>
+              <a:t>Move off the field: what does CellAt give you?</a:t>
+            </a:r>
+            <a:endParaRPr/>
+          </a:p>
+        </p:txBody>
+      </p:sp>
+    </p:spTree>
+  </p:cSld>
+  <p:clrMapOvr>
+    <a:masterClrMapping/>
+  </p:clrMapOvr>
+</p:sld>
+</file>
+
+<file path=ppt/slides/slide11.xml><?xml version="1.0" encoding="utf-8"?>
+<p:sld xmlns:a="http://schemas.openxmlformats.org/drawingml/2006/main" xmlns:p="http://schemas.openxmlformats.org/presentationml/2006/main" xmlns:r="http://schemas.openxmlformats.org/officeDocument/2006/relationships">
+  <p:cSld>
+    <p:spTree>
+      <p:nvGrpSpPr>
+        <p:cNvPr id="1" name=""/>
+        <p:cNvGrpSpPr/>
+        <p:nvPr/>
+      </p:nvGrpSpPr>
+      <p:grpSpPr/>
+      <p:sp>
+        <p:nvSpPr>
           <p:cNvPr id="293" name="Google Shape;293;p45"/>
           <p:cNvSpPr txBox="1"/>
           <p:nvPr>
@@ -7468,7 +7590,7 @@
 </p:sld>
 </file>
 
-<file path=ppt/slides/slide11.xml><?xml version="1.0" encoding="utf-8"?>
+<file path=ppt/slides/slide12.xml><?xml version="1.0" encoding="utf-8"?>
 <p:sld xmlns:a="http://schemas.openxmlformats.org/drawingml/2006/main" xmlns:p="http://schemas.openxmlformats.org/presentationml/2006/main" xmlns:r="http://schemas.openxmlformats.org/officeDocument/2006/relationships">
   <p:cSld>
     <p:spTree>
@@ -7599,7 +7721,7 @@
 </p:sld>
 </file>
 
-<file path=ppt/slides/slide12.xml><?xml version="1.0" encoding="utf-8"?>
+<file path=ppt/slides/slide13.xml><?xml version="1.0" encoding="utf-8"?>
 <p:sld xmlns:a="http://schemas.openxmlformats.org/drawingml/2006/main" xmlns:p="http://schemas.openxmlformats.org/presentationml/2006/main" xmlns:r="http://schemas.openxmlformats.org/officeDocument/2006/relationships">
   <p:cSld>
     <p:spTree>
@@ -7726,7 +7848,7 @@
 </p:sld>
 </file>
 
-<file path=ppt/slides/slide13.xml><?xml version="1.0" encoding="utf-8"?>
+<file path=ppt/slides/slide14.xml><?xml version="1.0" encoding="utf-8"?>
 <p:sld xmlns:a="http://schemas.openxmlformats.org/drawingml/2006/main" xmlns:p="http://schemas.openxmlformats.org/presentationml/2006/main" xmlns:r="http://schemas.openxmlformats.org/officeDocument/2006/relationships">
   <p:cSld>
     <p:spTree>
@@ -7837,854 +7959,6 @@
               <a:t>How far do you get before Archer has to change?</a:t>
             </a:r>
             <a:endParaRPr/>
-          </a:p>
-        </p:txBody>
-      </p:sp>
-    </p:spTree>
-  </p:cSld>
-  <p:clrMapOvr>
-    <a:masterClrMapping/>
-  </p:clrMapOvr>
-</p:sld>
-</file>
-
-<file path=ppt/slides/slide14.xml><?xml version="1.0" encoding="utf-8"?>
-<p:sld xmlns:a="http://schemas.openxmlformats.org/drawingml/2006/main" xmlns:p="http://schemas.openxmlformats.org/presentationml/2006/main" xmlns:r="http://schemas.openxmlformats.org/officeDocument/2006/relationships">
-  <p:cSld>
-    <p:spTree>
-      <p:nvGrpSpPr>
-        <p:cNvPr id="1" name=""/>
-        <p:cNvGrpSpPr/>
-        <p:nvPr/>
-      </p:nvGrpSpPr>
-      <p:grpSpPr/>
-      <p:sp>
-        <p:nvSpPr>
-          <p:cNvPr id="140" name="Google Shape;140;p23"/>
-          <p:cNvSpPr txBox="1"/>
-          <p:nvPr>
-            <p:ph type="title"/>
-          </p:nvPr>
-        </p:nvSpPr>
-        <p:spPr>
-          <a:xfrm>
-            <a:off x="311700" y="195615"/>
-            <a:ext cx="8520600" cy="572700"/>
-          </a:xfrm>
-          <a:prstGeom prst="rect">
-            <a:avLst/>
-          </a:prstGeom>
-        </p:spPr>
-        <p:txBody>
-          <a:bodyPr anchorCtr="0" anchor="t" bIns="91425" lIns="91425" spcFirstLastPara="1" rIns="91425" wrap="square" tIns="91425">
-            <a:normAutofit fontScale="90000"/>
-          </a:bodyPr>
-          <a:lstStyle/>
-          <a:p>
-            <a:pPr indent="0" lvl="0" marL="0" rtl="0" algn="l">
-              <a:spcBef>
-                <a:spcPts val="0"/>
-              </a:spcBef>
-              <a:spcAft>
-                <a:spcPts val="0"/>
-              </a:spcAft>
-              <a:buNone/>
-            </a:pPr>
-            <a:r>
-              <a:rPr lang="en"/>
-              <a:t>The Component Pattern</a:t>
-            </a:r>
-            <a:endParaRPr/>
-          </a:p>
-        </p:txBody>
-      </p:sp>
-      <p:sp>
-        <p:nvSpPr>
-          <p:cNvPr id="293" name="Google Shape;293;p45"/>
-          <p:cNvSpPr txBox="1"/>
-          <p:nvPr>
-            <p:ph type="title"/>
-          </p:nvPr>
-        </p:nvSpPr>
-        <p:spPr>
-          <a:xfrm>
-            <a:off x="311700" y="1152475"/>
-            <a:ext cx="3700000" cy="3500000"/>
-          </a:xfrm>
-          <a:prstGeom prst="rect">
-            <a:avLst/>
-          </a:prstGeom>
-        </p:spPr>
-        <p:txBody>
-          <a:bodyPr anchorCtr="0" anchor="t" bIns="91425" lIns="91425" spcFirstLastPara="1" rIns="91425" wrap="square" tIns="91425">
-            <a:normAutofit fontScale="90000"/>
-          </a:bodyPr>
-          <a:lstStyle/>
-          <a:p>
-            <a:pPr indent="-330200" lvl="0" marL="457200" rtl="0" algn="l">
-              <a:buClr>
-                <a:srgbClr val="DEE2E6"/>
-              </a:buClr>
-              <a:spcBef>
-                <a:spcPts val="0"/>
-              </a:spcBef>
-              <a:spcAft>
-                <a:spcPts val="0"/>
-              </a:spcAft>
-              <a:buSzPts val="1600"/>
-              <a:buChar char="●"/>
-            </a:pPr>
-            <a:r>
-              <a:rPr lang="en" sz="1600">
-                <a:solidFill>
-                  <a:srgbClr val="DEE2E6"/>
-                </a:solidFill>
-              </a:rPr>
-              <a:t>One entity, many domains (drawing, health, shooting), not coupled</a:t>
-            </a:r>
-            <a:endParaRPr/>
-          </a:p>
-          <a:p>
-            <a:pPr indent="-330200" lvl="0" marL="457200" rtl="0" algn="l">
-              <a:buClr>
-                <a:srgbClr val="DEE2E6"/>
-              </a:buClr>
-              <a:spcBef>
-                <a:spcPts val="0"/>
-              </a:spcBef>
-              <a:spcAft>
-                <a:spcPts val="0"/>
-              </a:spcAft>
-              <a:buSzPts val="1600"/>
-              <a:buChar char="●"/>
-            </a:pPr>
-            <a:r>
-              <a:rPr lang="en" sz="1600">
-                <a:solidFill>
-                  <a:srgbClr val="DEE2E6"/>
-                </a:solidFill>
-              </a:rPr>
-              <a:t>An entity: a position, a row, and a list of components</a:t>
-            </a:r>
-            <a:endParaRPr/>
-          </a:p>
-          <a:p>
-            <a:pPr indent="-330200" lvl="0" marL="457200" rtl="0" algn="l">
-              <a:buClr>
-                <a:srgbClr val="DEE2E6"/>
-              </a:buClr>
-              <a:spcBef>
-                <a:spcPts val="0"/>
-              </a:spcBef>
-              <a:spcAft>
-                <a:spcPts val="0"/>
-              </a:spcAft>
-              <a:buSzPts val="1600"/>
-              <a:buChar char="●"/>
-            </a:pPr>
-            <a:r>
-              <a:rPr lang="en" sz="1600">
-                <a:solidFill>
-                  <a:srgbClr val="DEE2E6"/>
-                </a:solidFill>
-              </a:rPr>
-              <a:t>A component: one ability</a:t>
-            </a:r>
-            <a:endParaRPr/>
-          </a:p>
-          <a:p>
-            <a:pPr indent="-317500" lvl="1" marL="914400" rtl="0" algn="l">
-              <a:buClr>
-                <a:srgbClr val="6C757D"/>
-              </a:buClr>
-              <a:spcBef>
-                <a:spcPts val="0"/>
-              </a:spcBef>
-              <a:spcAft>
-                <a:spcPts val="0"/>
-              </a:spcAft>
-              <a:buSzPts val="1400"/>
-              <a:buChar char="○"/>
-            </a:pPr>
-            <a:r>
-              <a:rPr lang="en" sz="1400">
-                <a:solidFill>
-                  <a:srgbClr val="6C757D"/>
-                </a:solidFill>
-              </a:rPr>
-              <a:t>Health, Shooter, GoldProducer, Walker, Attacker, Armour, SpriteRenderer</a:t>
-            </a:r>
-            <a:endParaRPr/>
-          </a:p>
-        </p:txBody>
-      </p:sp>
-      <p:sp>
-        <p:nvSpPr>
-          <p:cNvPr id="141" name="Google Shape;141;p23"/>
-          <p:cNvSpPr txBox="1"/>
-          <p:nvPr>
-            <p:ph idx="2" type="body"/>
-          </p:nvPr>
-        </p:nvSpPr>
-        <p:spPr>
-          <a:xfrm>
-            <a:off x="4150000" y="1152475"/>
-            <a:ext cx="4750000" cy="3600000"/>
-          </a:xfrm>
-          <a:prstGeom prst="rect">
-            <a:avLst/>
-          </a:prstGeom>
-        </p:spPr>
-        <p:txBody>
-          <a:bodyPr anchorCtr="0" anchor="t" bIns="91425" lIns="91425" spcFirstLastPara="1" rIns="91425" wrap="square" tIns="91425">
-            <a:noAutofit/>
-          </a:bodyPr>
-          <a:lstStyle/>
-          <a:p>
-            <a:pPr indent="0" lvl="0" marL="0" rtl="0" algn="l">
-              <a:lnSpc>
-                <a:spcPct val="115000"/>
-              </a:lnSpc>
-              <a:spcBef>
-                <a:spcPts val="0"/>
-              </a:spcBef>
-              <a:spcAft>
-                <a:spcPts val="0"/>
-              </a:spcAft>
-              <a:buNone/>
-            </a:pPr>
-            <a:r>
-              <a:rPr lang="en" sz="1000">
-                <a:highlight>
-                  <a:schemeClr val="dk2"/>
-                </a:highlight>
-                <a:latin typeface="Consolas"/>
-                <a:ea typeface="Consolas"/>
-                <a:cs typeface="Consolas"/>
-                <a:sym typeface="Consolas"/>
-              </a:rPr>
-              <a:t>public class Entity(World world)</a:t>
-            </a:r>
-            <a:endParaRPr sz="1000">
-              <a:solidFill>
-                <a:srgbClr val="CCCCCC"/>
-              </a:solidFill>
-              <a:highlight>
-                <a:schemeClr val="dk2"/>
-              </a:highlight>
-              <a:latin typeface="Consolas"/>
-              <a:ea typeface="Consolas"/>
-              <a:cs typeface="Consolas"/>
-              <a:sym typeface="Consolas"/>
-            </a:endParaRPr>
-          </a:p>
-          <a:p>
-            <a:pPr indent="0" lvl="0" marL="0" rtl="0" algn="l">
-              <a:lnSpc>
-                <a:spcPct val="115000"/>
-              </a:lnSpc>
-              <a:spcBef>
-                <a:spcPts val="0"/>
-              </a:spcBef>
-              <a:spcAft>
-                <a:spcPts val="0"/>
-              </a:spcAft>
-              <a:buNone/>
-            </a:pPr>
-            <a:r>
-              <a:rPr lang="en" sz="1000">
-                <a:highlight>
-                  <a:schemeClr val="dk2"/>
-                </a:highlight>
-                <a:latin typeface="Consolas"/>
-                <a:ea typeface="Consolas"/>
-                <a:cs typeface="Consolas"/>
-                <a:sym typeface="Consolas"/>
-              </a:rPr>
-              <a:t>{</a:t>
-            </a:r>
-            <a:endParaRPr sz="1000">
-              <a:solidFill>
-                <a:srgbClr val="CCCCCC"/>
-              </a:solidFill>
-              <a:highlight>
-                <a:schemeClr val="dk2"/>
-              </a:highlight>
-              <a:latin typeface="Consolas"/>
-              <a:ea typeface="Consolas"/>
-              <a:cs typeface="Consolas"/>
-              <a:sym typeface="Consolas"/>
-            </a:endParaRPr>
-          </a:p>
-          <a:p>
-            <a:pPr indent="0" lvl="0" marL="0" rtl="0" algn="l">
-              <a:lnSpc>
-                <a:spcPct val="115000"/>
-              </a:lnSpc>
-              <a:spcBef>
-                <a:spcPts val="0"/>
-              </a:spcBef>
-              <a:spcAft>
-                <a:spcPts val="0"/>
-              </a:spcAft>
-              <a:buNone/>
-            </a:pPr>
-            <a:r>
-              <a:rPr lang="en" sz="1000">
-                <a:highlight>
-                  <a:schemeClr val="dk2"/>
-                </a:highlight>
-                <a:latin typeface="Consolas"/>
-                <a:ea typeface="Consolas"/>
-                <a:cs typeface="Consolas"/>
-                <a:sym typeface="Consolas"/>
-              </a:rPr>
-              <a:t>    List&lt;Component&gt; _components = [];</a:t>
-            </a:r>
-            <a:endParaRPr sz="1000">
-              <a:solidFill>
-                <a:srgbClr val="CCCCCC"/>
-              </a:solidFill>
-              <a:highlight>
-                <a:schemeClr val="dk2"/>
-              </a:highlight>
-              <a:latin typeface="Consolas"/>
-              <a:ea typeface="Consolas"/>
-              <a:cs typeface="Consolas"/>
-              <a:sym typeface="Consolas"/>
-            </a:endParaRPr>
-          </a:p>
-          <a:p>
-            <a:pPr indent="0" lvl="0" marL="0" rtl="0" algn="l">
-              <a:lnSpc>
-                <a:spcPct val="115000"/>
-              </a:lnSpc>
-              <a:spcBef>
-                <a:spcPts val="0"/>
-              </a:spcBef>
-              <a:spcAft>
-                <a:spcPts val="0"/>
-              </a:spcAft>
-              <a:buNone/>
-            </a:pPr>
-            <a:r>
-              <a:rPr lang="en" sz="1000">
-                <a:highlight>
-                  <a:schemeClr val="dk2"/>
-                </a:highlight>
-                <a:latin typeface="Consolas"/>
-                <a:ea typeface="Consolas"/>
-                <a:cs typeface="Consolas"/>
-                <a:sym typeface="Consolas"/>
-              </a:rPr>
-              <a:t/>
-            </a:r>
-            <a:endParaRPr sz="1000">
-              <a:solidFill>
-                <a:srgbClr val="CCCCCC"/>
-              </a:solidFill>
-              <a:highlight>
-                <a:schemeClr val="dk2"/>
-              </a:highlight>
-              <a:latin typeface="Consolas"/>
-              <a:ea typeface="Consolas"/>
-              <a:cs typeface="Consolas"/>
-              <a:sym typeface="Consolas"/>
-            </a:endParaRPr>
-          </a:p>
-          <a:p>
-            <a:pPr indent="0" lvl="0" marL="0" rtl="0" algn="l">
-              <a:lnSpc>
-                <a:spcPct val="115000"/>
-              </a:lnSpc>
-              <a:spcBef>
-                <a:spcPts val="0"/>
-              </a:spcBef>
-              <a:spcAft>
-                <a:spcPts val="0"/>
-              </a:spcAft>
-              <a:buNone/>
-            </a:pPr>
-            <a:r>
-              <a:rPr lang="en" sz="1000">
-                <a:highlight>
-                  <a:schemeClr val="dk2"/>
-                </a:highlight>
-                <a:latin typeface="Consolas"/>
-                <a:ea typeface="Consolas"/>
-                <a:cs typeface="Consolas"/>
-                <a:sym typeface="Consolas"/>
-              </a:rPr>
-              <a:t>    public Vector2 Position { get; set; }</a:t>
-            </a:r>
-            <a:endParaRPr sz="1000">
-              <a:solidFill>
-                <a:srgbClr val="CCCCCC"/>
-              </a:solidFill>
-              <a:highlight>
-                <a:schemeClr val="dk2"/>
-              </a:highlight>
-              <a:latin typeface="Consolas"/>
-              <a:ea typeface="Consolas"/>
-              <a:cs typeface="Consolas"/>
-              <a:sym typeface="Consolas"/>
-            </a:endParaRPr>
-          </a:p>
-          <a:p>
-            <a:pPr indent="0" lvl="0" marL="0" rtl="0" algn="l">
-              <a:lnSpc>
-                <a:spcPct val="115000"/>
-              </a:lnSpc>
-              <a:spcBef>
-                <a:spcPts val="0"/>
-              </a:spcBef>
-              <a:spcAft>
-                <a:spcPts val="0"/>
-              </a:spcAft>
-              <a:buNone/>
-            </a:pPr>
-            <a:r>
-              <a:rPr lang="en" sz="1000">
-                <a:highlight>
-                  <a:schemeClr val="dk2"/>
-                </a:highlight>
-                <a:latin typeface="Consolas"/>
-                <a:ea typeface="Consolas"/>
-                <a:cs typeface="Consolas"/>
-                <a:sym typeface="Consolas"/>
-              </a:rPr>
-              <a:t>    public int Row { get; set; }</a:t>
-            </a:r>
-            <a:endParaRPr sz="1000">
-              <a:solidFill>
-                <a:srgbClr val="CCCCCC"/>
-              </a:solidFill>
-              <a:highlight>
-                <a:schemeClr val="dk2"/>
-              </a:highlight>
-              <a:latin typeface="Consolas"/>
-              <a:ea typeface="Consolas"/>
-              <a:cs typeface="Consolas"/>
-              <a:sym typeface="Consolas"/>
-            </a:endParaRPr>
-          </a:p>
-          <a:p>
-            <a:pPr indent="0" lvl="0" marL="0" rtl="0" algn="l">
-              <a:lnSpc>
-                <a:spcPct val="115000"/>
-              </a:lnSpc>
-              <a:spcBef>
-                <a:spcPts val="0"/>
-              </a:spcBef>
-              <a:spcAft>
-                <a:spcPts val="0"/>
-              </a:spcAft>
-              <a:buNone/>
-            </a:pPr>
-            <a:r>
-              <a:rPr lang="en" sz="1000">
-                <a:highlight>
-                  <a:schemeClr val="dk2"/>
-                </a:highlight>
-                <a:latin typeface="Consolas"/>
-                <a:ea typeface="Consolas"/>
-                <a:cs typeface="Consolas"/>
-                <a:sym typeface="Consolas"/>
-              </a:rPr>
-              <a:t/>
-            </a:r>
-            <a:endParaRPr sz="1000">
-              <a:solidFill>
-                <a:srgbClr val="CCCCCC"/>
-              </a:solidFill>
-              <a:highlight>
-                <a:schemeClr val="dk2"/>
-              </a:highlight>
-              <a:latin typeface="Consolas"/>
-              <a:ea typeface="Consolas"/>
-              <a:cs typeface="Consolas"/>
-              <a:sym typeface="Consolas"/>
-            </a:endParaRPr>
-          </a:p>
-          <a:p>
-            <a:pPr indent="0" lvl="0" marL="0" rtl="0" algn="l">
-              <a:lnSpc>
-                <a:spcPct val="115000"/>
-              </a:lnSpc>
-              <a:spcBef>
-                <a:spcPts val="0"/>
-              </a:spcBef>
-              <a:spcAft>
-                <a:spcPts val="0"/>
-              </a:spcAft>
-              <a:buNone/>
-            </a:pPr>
-            <a:r>
-              <a:rPr lang="en" sz="1000">
-                <a:highlight>
-                  <a:schemeClr val="dk2"/>
-                </a:highlight>
-                <a:latin typeface="Consolas"/>
-                <a:ea typeface="Consolas"/>
-                <a:cs typeface="Consolas"/>
-                <a:sym typeface="Consolas"/>
-              </a:rPr>
-              <a:t>    public Entity With(Component c) { ... }</a:t>
-            </a:r>
-            <a:endParaRPr sz="1000">
-              <a:solidFill>
-                <a:srgbClr val="CCCCCC"/>
-              </a:solidFill>
-              <a:highlight>
-                <a:schemeClr val="dk2"/>
-              </a:highlight>
-              <a:latin typeface="Consolas"/>
-              <a:ea typeface="Consolas"/>
-              <a:cs typeface="Consolas"/>
-              <a:sym typeface="Consolas"/>
-            </a:endParaRPr>
-          </a:p>
-          <a:p>
-            <a:pPr indent="0" lvl="0" marL="0" rtl="0" algn="l">
-              <a:lnSpc>
-                <a:spcPct val="115000"/>
-              </a:lnSpc>
-              <a:spcBef>
-                <a:spcPts val="0"/>
-              </a:spcBef>
-              <a:spcAft>
-                <a:spcPts val="0"/>
-              </a:spcAft>
-              <a:buNone/>
-            </a:pPr>
-            <a:r>
-              <a:rPr lang="en" sz="1000">
-                <a:highlight>
-                  <a:schemeClr val="dk2"/>
-                </a:highlight>
-                <a:latin typeface="Consolas"/>
-                <a:ea typeface="Consolas"/>
-                <a:cs typeface="Consolas"/>
-                <a:sym typeface="Consolas"/>
-              </a:rPr>
-              <a:t>    public T Get&lt;T&gt;() where T : Component</a:t>
-            </a:r>
-            <a:endParaRPr sz="1000">
-              <a:solidFill>
-                <a:srgbClr val="CCCCCC"/>
-              </a:solidFill>
-              <a:highlight>
-                <a:schemeClr val="dk2"/>
-              </a:highlight>
-              <a:latin typeface="Consolas"/>
-              <a:ea typeface="Consolas"/>
-              <a:cs typeface="Consolas"/>
-              <a:sym typeface="Consolas"/>
-            </a:endParaRPr>
-          </a:p>
-          <a:p>
-            <a:pPr indent="0" lvl="0" marL="0" rtl="0" algn="l">
-              <a:lnSpc>
-                <a:spcPct val="115000"/>
-              </a:lnSpc>
-              <a:spcBef>
-                <a:spcPts val="0"/>
-              </a:spcBef>
-              <a:spcAft>
-                <a:spcPts val="0"/>
-              </a:spcAft>
-              <a:buNone/>
-            </a:pPr>
-            <a:r>
-              <a:rPr lang="en" sz="1000">
-                <a:highlight>
-                  <a:schemeClr val="dk2"/>
-                </a:highlight>
-                <a:latin typeface="Consolas"/>
-                <a:ea typeface="Consolas"/>
-                <a:cs typeface="Consolas"/>
-                <a:sym typeface="Consolas"/>
-              </a:rPr>
-              <a:t>        { ... }</a:t>
-            </a:r>
-            <a:endParaRPr sz="1000">
-              <a:solidFill>
-                <a:srgbClr val="CCCCCC"/>
-              </a:solidFill>
-              <a:highlight>
-                <a:schemeClr val="dk2"/>
-              </a:highlight>
-              <a:latin typeface="Consolas"/>
-              <a:ea typeface="Consolas"/>
-              <a:cs typeface="Consolas"/>
-              <a:sym typeface="Consolas"/>
-            </a:endParaRPr>
-          </a:p>
-          <a:p>
-            <a:pPr indent="0" lvl="0" marL="0" rtl="0" algn="l">
-              <a:lnSpc>
-                <a:spcPct val="115000"/>
-              </a:lnSpc>
-              <a:spcBef>
-                <a:spcPts val="0"/>
-              </a:spcBef>
-              <a:spcAft>
-                <a:spcPts val="0"/>
-              </a:spcAft>
-              <a:buNone/>
-            </a:pPr>
-            <a:r>
-              <a:rPr lang="en" sz="1000">
-                <a:highlight>
-                  <a:schemeClr val="dk2"/>
-                </a:highlight>
-                <a:latin typeface="Consolas"/>
-                <a:ea typeface="Consolas"/>
-                <a:cs typeface="Consolas"/>
-                <a:sym typeface="Consolas"/>
-              </a:rPr>
-              <a:t/>
-            </a:r>
-            <a:endParaRPr sz="1000">
-              <a:solidFill>
-                <a:srgbClr val="CCCCCC"/>
-              </a:solidFill>
-              <a:highlight>
-                <a:schemeClr val="dk2"/>
-              </a:highlight>
-              <a:latin typeface="Consolas"/>
-              <a:ea typeface="Consolas"/>
-              <a:cs typeface="Consolas"/>
-              <a:sym typeface="Consolas"/>
-            </a:endParaRPr>
-          </a:p>
-          <a:p>
-            <a:pPr indent="0" lvl="0" marL="0" rtl="0" algn="l">
-              <a:lnSpc>
-                <a:spcPct val="115000"/>
-              </a:lnSpc>
-              <a:spcBef>
-                <a:spcPts val="0"/>
-              </a:spcBef>
-              <a:spcAft>
-                <a:spcPts val="0"/>
-              </a:spcAft>
-              <a:buNone/>
-            </a:pPr>
-            <a:r>
-              <a:rPr lang="en" sz="1000">
-                <a:highlight>
-                  <a:schemeClr val="dk2"/>
-                </a:highlight>
-                <a:latin typeface="Consolas"/>
-                <a:ea typeface="Consolas"/>
-                <a:cs typeface="Consolas"/>
-                <a:sym typeface="Consolas"/>
-              </a:rPr>
-              <a:t>    public void Update(float dt)</a:t>
-            </a:r>
-            <a:endParaRPr sz="1000">
-              <a:solidFill>
-                <a:srgbClr val="CCCCCC"/>
-              </a:solidFill>
-              <a:highlight>
-                <a:schemeClr val="dk2"/>
-              </a:highlight>
-              <a:latin typeface="Consolas"/>
-              <a:ea typeface="Consolas"/>
-              <a:cs typeface="Consolas"/>
-              <a:sym typeface="Consolas"/>
-            </a:endParaRPr>
-          </a:p>
-          <a:p>
-            <a:pPr indent="0" lvl="0" marL="0" rtl="0" algn="l">
-              <a:lnSpc>
-                <a:spcPct val="115000"/>
-              </a:lnSpc>
-              <a:spcBef>
-                <a:spcPts val="0"/>
-              </a:spcBef>
-              <a:spcAft>
-                <a:spcPts val="0"/>
-              </a:spcAft>
-              <a:buNone/>
-            </a:pPr>
-            <a:r>
-              <a:rPr lang="en" sz="1000">
-                <a:highlight>
-                  <a:schemeClr val="dk2"/>
-                </a:highlight>
-                <a:latin typeface="Consolas"/>
-                <a:ea typeface="Consolas"/>
-                <a:cs typeface="Consolas"/>
-                <a:sym typeface="Consolas"/>
-              </a:rPr>
-              <a:t>    {</a:t>
-            </a:r>
-            <a:endParaRPr sz="1000">
-              <a:solidFill>
-                <a:srgbClr val="CCCCCC"/>
-              </a:solidFill>
-              <a:highlight>
-                <a:schemeClr val="dk2"/>
-              </a:highlight>
-              <a:latin typeface="Consolas"/>
-              <a:ea typeface="Consolas"/>
-              <a:cs typeface="Consolas"/>
-              <a:sym typeface="Consolas"/>
-            </a:endParaRPr>
-          </a:p>
-          <a:p>
-            <a:pPr indent="0" lvl="0" marL="0" rtl="0" algn="l">
-              <a:lnSpc>
-                <a:spcPct val="115000"/>
-              </a:lnSpc>
-              <a:spcBef>
-                <a:spcPts val="0"/>
-              </a:spcBef>
-              <a:spcAft>
-                <a:spcPts val="0"/>
-              </a:spcAft>
-              <a:buNone/>
-            </a:pPr>
-            <a:r>
-              <a:rPr lang="en" sz="1000">
-                <a:highlight>
-                  <a:schemeClr val="dk2"/>
-                </a:highlight>
-                <a:latin typeface="Consolas"/>
-                <a:ea typeface="Consolas"/>
-                <a:cs typeface="Consolas"/>
-                <a:sym typeface="Consolas"/>
-              </a:rPr>
-              <a:t>        foreach (Component c in _components)</a:t>
-            </a:r>
-            <a:endParaRPr sz="1000">
-              <a:solidFill>
-                <a:srgbClr val="CCCCCC"/>
-              </a:solidFill>
-              <a:highlight>
-                <a:schemeClr val="dk2"/>
-              </a:highlight>
-              <a:latin typeface="Consolas"/>
-              <a:ea typeface="Consolas"/>
-              <a:cs typeface="Consolas"/>
-              <a:sym typeface="Consolas"/>
-            </a:endParaRPr>
-          </a:p>
-          <a:p>
-            <a:pPr indent="0" lvl="0" marL="0" rtl="0" algn="l">
-              <a:lnSpc>
-                <a:spcPct val="115000"/>
-              </a:lnSpc>
-              <a:spcBef>
-                <a:spcPts val="0"/>
-              </a:spcBef>
-              <a:spcAft>
-                <a:spcPts val="0"/>
-              </a:spcAft>
-              <a:buNone/>
-            </a:pPr>
-            <a:r>
-              <a:rPr lang="en" sz="1000">
-                <a:highlight>
-                  <a:schemeClr val="dk2"/>
-                </a:highlight>
-                <a:latin typeface="Consolas"/>
-                <a:ea typeface="Consolas"/>
-                <a:cs typeface="Consolas"/>
-                <a:sym typeface="Consolas"/>
-              </a:rPr>
-              <a:t>            c.Update(dt);</a:t>
-            </a:r>
-            <a:endParaRPr sz="1000">
-              <a:solidFill>
-                <a:srgbClr val="CCCCCC"/>
-              </a:solidFill>
-              <a:highlight>
-                <a:schemeClr val="dk2"/>
-              </a:highlight>
-              <a:latin typeface="Consolas"/>
-              <a:ea typeface="Consolas"/>
-              <a:cs typeface="Consolas"/>
-              <a:sym typeface="Consolas"/>
-            </a:endParaRPr>
-          </a:p>
-          <a:p>
-            <a:pPr indent="0" lvl="0" marL="0" rtl="0" algn="l">
-              <a:lnSpc>
-                <a:spcPct val="115000"/>
-              </a:lnSpc>
-              <a:spcBef>
-                <a:spcPts val="0"/>
-              </a:spcBef>
-              <a:spcAft>
-                <a:spcPts val="0"/>
-              </a:spcAft>
-              <a:buNone/>
-            </a:pPr>
-            <a:r>
-              <a:rPr lang="en" sz="1000">
-                <a:highlight>
-                  <a:schemeClr val="dk2"/>
-                </a:highlight>
-                <a:latin typeface="Consolas"/>
-                <a:ea typeface="Consolas"/>
-                <a:cs typeface="Consolas"/>
-                <a:sym typeface="Consolas"/>
-              </a:rPr>
-              <a:t>    }</a:t>
-            </a:r>
-            <a:endParaRPr sz="1000">
-              <a:solidFill>
-                <a:srgbClr val="CCCCCC"/>
-              </a:solidFill>
-              <a:highlight>
-                <a:schemeClr val="dk2"/>
-              </a:highlight>
-              <a:latin typeface="Consolas"/>
-              <a:ea typeface="Consolas"/>
-              <a:cs typeface="Consolas"/>
-              <a:sym typeface="Consolas"/>
-            </a:endParaRPr>
-          </a:p>
-          <a:p>
-            <a:pPr indent="0" lvl="0" marL="0" rtl="0" algn="l">
-              <a:lnSpc>
-                <a:spcPct val="115000"/>
-              </a:lnSpc>
-              <a:spcBef>
-                <a:spcPts val="0"/>
-              </a:spcBef>
-              <a:spcAft>
-                <a:spcPts val="0"/>
-              </a:spcAft>
-              <a:buNone/>
-            </a:pPr>
-            <a:r>
-              <a:rPr lang="en" sz="1000">
-                <a:highlight>
-                  <a:schemeClr val="dk2"/>
-                </a:highlight>
-                <a:latin typeface="Consolas"/>
-                <a:ea typeface="Consolas"/>
-                <a:cs typeface="Consolas"/>
-                <a:sym typeface="Consolas"/>
-              </a:rPr>
-              <a:t>}</a:t>
-            </a:r>
-            <a:endParaRPr sz="1000">
-              <a:solidFill>
-                <a:srgbClr val="CCCCCC"/>
-              </a:solidFill>
-              <a:highlight>
-                <a:schemeClr val="dk2"/>
-              </a:highlight>
-              <a:latin typeface="Consolas"/>
-              <a:ea typeface="Consolas"/>
-              <a:cs typeface="Consolas"/>
-              <a:sym typeface="Consolas"/>
-            </a:endParaRPr>
           </a:p>
         </p:txBody>
       </p:sp>
@@ -8740,7 +8014,7 @@
             </a:pPr>
             <a:r>
               <a:rPr lang="en"/>
-              <a:t>Recipes</a:t>
+              <a:t>The Component Pattern</a:t>
             </a:r>
             <a:endParaRPr/>
           </a:p>
@@ -8788,7 +8062,7 @@
                   <a:srgbClr val="DEE2E6"/>
                 </a:solidFill>
               </a:rPr>
-              <a:t>No classes for defenders or goblins</a:t>
+              <a:t>One entity, many domains (drawing, health, shooting), not coupled</a:t>
             </a:r>
             <a:endParaRPr/>
           </a:p>
@@ -8812,7 +8086,7 @@
                   <a:srgbClr val="DEE2E6"/>
                 </a:solidFill>
               </a:rPr>
-              <a:t>Each kind of thing is a list of components</a:t>
+              <a:t>An entity: a position, a row, and a list of components</a:t>
             </a:r>
             <a:endParaRPr/>
           </a:p>
@@ -8836,14 +8110,14 @@
                   <a:srgbClr val="DEE2E6"/>
                 </a:solidFill>
               </a:rPr>
-              <a:t>Wizard, Shieldbearer: no new classes</a:t>
+              <a:t>A component: one ability</a:t>
             </a:r>
             <a:endParaRPr/>
           </a:p>
           <a:p>
-            <a:pPr indent="-330200" lvl="0" marL="457200" rtl="0" algn="l">
+            <a:pPr indent="-317500" lvl="1" marL="914400" rtl="0" algn="l">
               <a:buClr>
-                <a:srgbClr val="DEE2E6"/>
+                <a:srgbClr val="6C757D"/>
               </a:buClr>
               <a:spcBef>
                 <a:spcPts val="0"/>
@@ -8851,40 +8125,16 @@
               <a:spcAft>
                 <a:spcPts val="0"/>
               </a:spcAft>
-              <a:buSzPts val="1600"/>
-              <a:buChar char="●"/>
-            </a:pPr>
-            <a:r>
-              <a:rPr lang="en" sz="1600">
+              <a:buSzPts val="1400"/>
+              <a:buChar char="○"/>
+            </a:pPr>
+            <a:r>
+              <a:rPr lang="en" sz="1400">
                 <a:solidFill>
-                  <a:srgbClr val="DEE2E6"/>
+                  <a:srgbClr val="6C757D"/>
                 </a:solidFill>
               </a:rPr>
-              <a:t>Shoots and makes gold: two .With calls</a:t>
-            </a:r>
-            <a:endParaRPr/>
-          </a:p>
-          <a:p>
-            <a:pPr indent="-330200" lvl="0" marL="457200" rtl="0" algn="l">
-              <a:buClr>
-                <a:srgbClr val="DEE2E6"/>
-              </a:buClr>
-              <a:spcBef>
-                <a:spcPts val="0"/>
-              </a:spcBef>
-              <a:spcAft>
-                <a:spcPts val="0"/>
-              </a:spcAft>
-              <a:buSzPts val="1600"/>
-              <a:buChar char="●"/>
-            </a:pPr>
-            <a:r>
-              <a:rPr lang="en" sz="1600">
-                <a:solidFill>
-                  <a:srgbClr val="DEE2E6"/>
-                </a:solidFill>
-              </a:rPr>
-              <a:t>Health: written once, for defenders and goblins</a:t>
+              <a:t>Health, Shooter, GoldProducer, Walker, Attacker, Armour, SpriteRenderer</a:t>
             </a:r>
             <a:endParaRPr/>
           </a:p>
@@ -8935,7 +8185,7 @@
                 <a:cs typeface="Consolas"/>
                 <a:sym typeface="Consolas"/>
               </a:rPr>
-              <a:t>Entity Chest(World world) =&gt;</a:t>
+              <a:t>public class Entity(World world)</a:t>
             </a:r>
             <a:endParaRPr sz="1000">
               <a:solidFill>
@@ -8973,7 +8223,7 @@
                 <a:cs typeface="Consolas"/>
                 <a:sym typeface="Consolas"/>
               </a:rPr>
-              <a:t>    Defender(world, "chest", 6)</a:t>
+              <a:t>{</a:t>
             </a:r>
             <a:endParaRPr sz="1000">
               <a:solidFill>
@@ -9011,7 +8261,7 @@
                 <a:cs typeface="Consolas"/>
                 <a:sym typeface="Consolas"/>
               </a:rPr>
-              <a:t>        .With(new GoldProducer(9, 25));</a:t>
+              <a:t>    List&lt;Component&gt; _components = [];</a:t>
             </a:r>
             <a:endParaRPr sz="1000">
               <a:solidFill>
@@ -9049,7 +8299,7 @@
                 <a:cs typeface="Consolas"/>
                 <a:sym typeface="Consolas"/>
               </a:rPr>
-              <a:t>Entity Wizard(World world) =&gt;</a:t>
+              <a:t/>
             </a:r>
             <a:endParaRPr sz="1000">
               <a:solidFill>
@@ -9087,7 +8337,7 @@
                 <a:cs typeface="Consolas"/>
                 <a:sym typeface="Consolas"/>
               </a:rPr>
-              <a:t>    Defender(world, "wizard", 6)</a:t>
+              <a:t>    public Vector2 Position { get; set; }</a:t>
             </a:r>
             <a:endParaRPr sz="1000">
               <a:solidFill>
@@ -9125,7 +8375,7 @@
                 <a:cs typeface="Consolas"/>
                 <a:sym typeface="Consolas"/>
               </a:rPr>
-              <a:t>        .With(new Shooter(1.4f, 2, 1));</a:t>
+              <a:t>    public int Row { get; set; }</a:t>
             </a:r>
             <a:endParaRPr sz="1000">
               <a:solidFill>
@@ -9201,7 +8451,7 @@
                 <a:cs typeface="Consolas"/>
                 <a:sym typeface="Consolas"/>
               </a:rPr>
-              <a:t>Entity Goblin(World world) =&gt;</a:t>
+              <a:t>    public Entity With(Component c) { ... }</a:t>
             </a:r>
             <a:endParaRPr sz="1000">
               <a:solidFill>
@@ -9239,7 +8489,7 @@
                 <a:cs typeface="Consolas"/>
                 <a:sym typeface="Consolas"/>
               </a:rPr>
-              <a:t>    new Entity(world)</a:t>
+              <a:t>    public T Get&lt;T&gt;() where T : Component</a:t>
             </a:r>
             <a:endParaRPr sz="1000">
               <a:solidFill>
@@ -9277,7 +8527,7 @@
                 <a:cs typeface="Consolas"/>
                 <a:sym typeface="Consolas"/>
               </a:rPr>
-              <a:t>        .With(new SpriteRenderer(goblin))</a:t>
+              <a:t>        { ... }</a:t>
             </a:r>
             <a:endParaRPr sz="1000">
               <a:solidFill>
@@ -9315,7 +8565,7 @@
                 <a:cs typeface="Consolas"/>
                 <a:sym typeface="Consolas"/>
               </a:rPr>
-              <a:t>        .With(new Health(10))</a:t>
+              <a:t/>
             </a:r>
             <a:endParaRPr sz="1000">
               <a:solidFill>
@@ -9353,7 +8603,7 @@
                 <a:cs typeface="Consolas"/>
                 <a:sym typeface="Consolas"/>
               </a:rPr>
-              <a:t>        .With(new Walker(28))</a:t>
+              <a:t>    public void Update(float dt)</a:t>
             </a:r>
             <a:endParaRPr sz="1000">
               <a:solidFill>
@@ -9391,7 +8641,7 @@
                 <a:cs typeface="Consolas"/>
                 <a:sym typeface="Consolas"/>
               </a:rPr>
-              <a:t>        .With(new Attacker(1));</a:t>
+              <a:t>    {</a:t>
             </a:r>
             <a:endParaRPr sz="1000">
               <a:solidFill>
@@ -9429,7 +8679,7 @@
                 <a:cs typeface="Consolas"/>
                 <a:sym typeface="Consolas"/>
               </a:rPr>
-              <a:t>Entity Shieldbearer(World world) =&gt;</a:t>
+              <a:t>        foreach (Component c in _components)</a:t>
             </a:r>
             <a:endParaRPr sz="1000">
               <a:solidFill>
@@ -9467,7 +8717,7 @@
                 <a:cs typeface="Consolas"/>
                 <a:sym typeface="Consolas"/>
               </a:rPr>
-              <a:t>    Goblin(world).With(new Armour(18, shield));</a:t>
+              <a:t>            c.Update(dt);</a:t>
             </a:r>
             <a:endParaRPr sz="1000">
               <a:solidFill>
@@ -9482,6 +8732,82 @@
               <a:sym typeface="Consolas"/>
             </a:endParaRPr>
           </a:p>
+          <a:p>
+            <a:pPr indent="0" lvl="0" marL="0" rtl="0" algn="l">
+              <a:lnSpc>
+                <a:spcPct val="115000"/>
+              </a:lnSpc>
+              <a:spcBef>
+                <a:spcPts val="0"/>
+              </a:spcBef>
+              <a:spcAft>
+                <a:spcPts val="0"/>
+              </a:spcAft>
+              <a:buNone/>
+            </a:pPr>
+            <a:r>
+              <a:rPr lang="en" sz="1000">
+                <a:highlight>
+                  <a:schemeClr val="dk2"/>
+                </a:highlight>
+                <a:latin typeface="Consolas"/>
+                <a:ea typeface="Consolas"/>
+                <a:cs typeface="Consolas"/>
+                <a:sym typeface="Consolas"/>
+              </a:rPr>
+              <a:t>    }</a:t>
+            </a:r>
+            <a:endParaRPr sz="1000">
+              <a:solidFill>
+                <a:srgbClr val="CCCCCC"/>
+              </a:solidFill>
+              <a:highlight>
+                <a:schemeClr val="dk2"/>
+              </a:highlight>
+              <a:latin typeface="Consolas"/>
+              <a:ea typeface="Consolas"/>
+              <a:cs typeface="Consolas"/>
+              <a:sym typeface="Consolas"/>
+            </a:endParaRPr>
+          </a:p>
+          <a:p>
+            <a:pPr indent="0" lvl="0" marL="0" rtl="0" algn="l">
+              <a:lnSpc>
+                <a:spcPct val="115000"/>
+              </a:lnSpc>
+              <a:spcBef>
+                <a:spcPts val="0"/>
+              </a:spcBef>
+              <a:spcAft>
+                <a:spcPts val="0"/>
+              </a:spcAft>
+              <a:buNone/>
+            </a:pPr>
+            <a:r>
+              <a:rPr lang="en" sz="1000">
+                <a:highlight>
+                  <a:schemeClr val="dk2"/>
+                </a:highlight>
+                <a:latin typeface="Consolas"/>
+                <a:ea typeface="Consolas"/>
+                <a:cs typeface="Consolas"/>
+                <a:sym typeface="Consolas"/>
+              </a:rPr>
+              <a:t>}</a:t>
+            </a:r>
+            <a:endParaRPr sz="1000">
+              <a:solidFill>
+                <a:srgbClr val="CCCCCC"/>
+              </a:solidFill>
+              <a:highlight>
+                <a:schemeClr val="dk2"/>
+              </a:highlight>
+              <a:latin typeface="Consolas"/>
+              <a:ea typeface="Consolas"/>
+              <a:cs typeface="Consolas"/>
+              <a:sym typeface="Consolas"/>
+            </a:endParaRPr>
+          </a:p>
         </p:txBody>
       </p:sp>
     </p:spTree>
@@ -9493,6 +8819,80 @@
 </file>
 
 <file path=ppt/slides/slide16.xml><?xml version="1.0" encoding="utf-8"?>
+<p:sld xmlns:a="http://schemas.openxmlformats.org/drawingml/2006/main" xmlns:p="http://schemas.openxmlformats.org/presentationml/2006/main" xmlns:r="http://schemas.openxmlformats.org/officeDocument/2006/relationships">
+  <p:cSld>
+    <p:spTree>
+      <p:nvGrpSpPr>
+        <p:cNvPr id="1" name=""/>
+        <p:cNvGrpSpPr/>
+        <p:nvPr/>
+      </p:nvGrpSpPr>
+      <p:grpSpPr/>
+      <p:sp>
+        <p:nvSpPr>
+          <p:cNvPr id="2" name="Title 1"/>
+          <p:cNvSpPr>
+            <a:spLocks noGrp="1"/>
+          </p:cNvSpPr>
+          <p:nvPr>
+            <p:ph type="title"/>
+          </p:nvPr>
+        </p:nvSpPr>
+        <p:spPr/>
+        <p:txBody>
+          <a:bodyPr/>
+          <a:lstStyle/>
+          <a:p>
+            <a:pPr indent="0" lvl="0" marL="0" rtl="0" algn="l">
+              <a:spcBef>
+                <a:spcPts val="0"/>
+              </a:spcBef>
+              <a:spcAft>
+                <a:spcPts val="0"/>
+              </a:spcAft>
+              <a:buNone/>
+            </a:pPr>
+            <a:r>
+              <a:rPr lang="en"/>
+              <a:t>An Entity Is a List of Components</a:t>
+            </a:r>
+            <a:endParaRPr/>
+          </a:p>
+        </p:txBody>
+      </p:sp>
+      <p:pic>
+        <p:nvPicPr>
+          <p:cNvPr id="3" name="Picture 2" descr="components.png"/>
+          <p:cNvPicPr>
+            <a:picLocks noChangeAspect="1"/>
+          </p:cNvPicPr>
+          <p:nvPr/>
+        </p:nvPicPr>
+        <p:blipFill>
+          <a:blip r:embed="rId2"/>
+          <a:stretch>
+            <a:fillRect/>
+          </a:stretch>
+        </p:blipFill>
+        <p:spPr>
+          <a:xfrm>
+            <a:off x="594360" y="1051560"/>
+            <a:ext cx="7955279" cy="3977639"/>
+          </a:xfrm>
+          <a:prstGeom prst="rect">
+            <a:avLst/>
+          </a:prstGeom>
+        </p:spPr>
+      </p:pic>
+    </p:spTree>
+  </p:cSld>
+  <p:clrMapOvr>
+    <a:masterClrMapping/>
+  </p:clrMapOvr>
+</p:sld>
+</file>
+
+<file path=ppt/slides/slide17.xml><?xml version="1.0" encoding="utf-8"?>
 <p:sld xmlns:a="http://schemas.openxmlformats.org/drawingml/2006/main" xmlns:p="http://schemas.openxmlformats.org/presentationml/2006/main" xmlns:r="http://schemas.openxmlformats.org/officeDocument/2006/relationships">
   <p:cSld>
     <p:spTree>
@@ -9536,7 +8936,7 @@
             </a:pPr>
             <a:r>
               <a:rPr lang="en"/>
-              <a:t>Components Working Together</a:t>
+              <a:t>Recipes</a:t>
             </a:r>
             <a:endParaRPr/>
           </a:p>
@@ -9584,55 +8984,7 @@
                   <a:srgbClr val="DEE2E6"/>
                 </a:solidFill>
               </a:rPr>
-              <a:t>Through the owner</a:t>
-            </a:r>
-            <a:endParaRPr/>
-          </a:p>
-          <a:p>
-            <a:pPr indent="-317500" lvl="1" marL="914400" rtl="0" algn="l">
-              <a:buClr>
-                <a:srgbClr val="6C757D"/>
-              </a:buClr>
-              <a:spcBef>
-                <a:spcPts val="0"/>
-              </a:spcBef>
-              <a:spcAft>
-                <a:spcPts val="0"/>
-              </a:spcAft>
-              <a:buSzPts val="1400"/>
-              <a:buChar char="○"/>
-            </a:pPr>
-            <a:r>
-              <a:rPr lang="en" sz="1400">
-                <a:solidFill>
-                  <a:srgbClr val="6C757D"/>
-                </a:solidFill>
-              </a:rPr>
-              <a:t>Walker stops while the Attacker attacks</a:t>
-            </a:r>
-            <a:endParaRPr/>
-          </a:p>
-          <a:p>
-            <a:pPr indent="-317500" lvl="1" marL="914400" rtl="0" algn="l">
-              <a:buClr>
-                <a:srgbClr val="6C757D"/>
-              </a:buClr>
-              <a:spcBef>
-                <a:spcPts val="0"/>
-              </a:spcBef>
-              <a:spcAft>
-                <a:spcPts val="0"/>
-              </a:spcAft>
-              <a:buSzPts val="1400"/>
-              <a:buChar char="○"/>
-            </a:pPr>
-            <a:r>
-              <a:rPr lang="en" sz="1400">
-                <a:solidFill>
-                  <a:srgbClr val="6C757D"/>
-                </a:solidFill>
-              </a:rPr>
-              <a:t>Health lets the Armour go first</a:t>
+              <a:t>No classes for defenders or goblins</a:t>
             </a:r>
             <a:endParaRPr/>
           </a:p>
@@ -9656,31 +9008,7 @@
                   <a:srgbClr val="DEE2E6"/>
                 </a:solidFill>
               </a:rPr>
-              <a:t>Through the world</a:t>
-            </a:r>
-            <a:endParaRPr/>
-          </a:p>
-          <a:p>
-            <a:pPr indent="-317500" lvl="1" marL="914400" rtl="0" algn="l">
-              <a:buClr>
-                <a:srgbClr val="6C757D"/>
-              </a:buClr>
-              <a:spcBef>
-                <a:spcPts val="0"/>
-              </a:spcBef>
-              <a:spcAft>
-                <a:spcPts val="0"/>
-              </a:spcAft>
-              <a:buSzPts val="1400"/>
-              <a:buChar char="○"/>
-            </a:pPr>
-            <a:r>
-              <a:rPr lang="en" sz="1400">
-                <a:solidFill>
-                  <a:srgbClr val="6C757D"/>
-                </a:solidFill>
-              </a:rPr>
-              <a:t>Shooter: a goblin ahead in my row?</a:t>
+              <a:t>Each kind of thing is a list of components</a:t>
             </a:r>
             <a:endParaRPr/>
           </a:p>
@@ -9704,7 +9032,7 @@
                   <a:srgbClr val="DEE2E6"/>
                 </a:solidFill>
               </a:rPr>
-              <a:t>Depend only on the components you use</a:t>
+              <a:t>Wizard, Shieldbearer: no new classes</a:t>
             </a:r>
             <a:endParaRPr/>
           </a:p>
@@ -9728,7 +9056,31 @@
                   <a:srgbClr val="DEE2E6"/>
                 </a:solidFill>
               </a:rPr>
-              <a:t>The world: one loop for everything</a:t>
+              <a:t>Shoots and makes gold: two .With calls</a:t>
+            </a:r>
+            <a:endParaRPr/>
+          </a:p>
+          <a:p>
+            <a:pPr indent="-330200" lvl="0" marL="457200" rtl="0" algn="l">
+              <a:buClr>
+                <a:srgbClr val="DEE2E6"/>
+              </a:buClr>
+              <a:spcBef>
+                <a:spcPts val="0"/>
+              </a:spcBef>
+              <a:spcAft>
+                <a:spcPts val="0"/>
+              </a:spcAft>
+              <a:buSzPts val="1600"/>
+              <a:buChar char="●"/>
+            </a:pPr>
+            <a:r>
+              <a:rPr lang="en" sz="1600">
+                <a:solidFill>
+                  <a:srgbClr val="DEE2E6"/>
+                </a:solidFill>
+              </a:rPr>
+              <a:t>Health: written once, for defenders and goblins</a:t>
             </a:r>
             <a:endParaRPr/>
           </a:p>
@@ -9779,7 +9131,7 @@
                 <a:cs typeface="Consolas"/>
                 <a:sym typeface="Consolas"/>
               </a:rPr>
-              <a:t>// Walker.cs</a:t>
+              <a:t>Entity Chest(World world) =&gt;</a:t>
             </a:r>
             <a:endParaRPr sz="1000">
               <a:solidFill>
@@ -9817,7 +9169,7 @@
                 <a:cs typeface="Consolas"/>
                 <a:sym typeface="Consolas"/>
               </a:rPr>
-              <a:t>public override void Update(float dt)</a:t>
+              <a:t>    Defender(world, "chest", 6)</a:t>
             </a:r>
             <a:endParaRPr sz="1000">
               <a:solidFill>
@@ -9855,7 +9207,7 @@
                 <a:cs typeface="Consolas"/>
                 <a:sym typeface="Consolas"/>
               </a:rPr>
-              <a:t>{</a:t>
+              <a:t>        .With(new GoldProducer(9, 25));</a:t>
             </a:r>
             <a:endParaRPr sz="1000">
               <a:solidFill>
@@ -9893,7 +9245,7 @@
                 <a:cs typeface="Consolas"/>
                 <a:sym typeface="Consolas"/>
               </a:rPr>
-              <a:t>    if (Owner.Get&lt;Attacker&gt;()?.IsAttacking == true)</a:t>
+              <a:t>Entity Wizard(World world) =&gt;</a:t>
             </a:r>
             <a:endParaRPr sz="1000">
               <a:solidFill>
@@ -9931,7 +9283,7 @@
                 <a:cs typeface="Consolas"/>
                 <a:sym typeface="Consolas"/>
               </a:rPr>
-              <a:t>        return;</a:t>
+              <a:t>    Defender(world, "wizard", 6)</a:t>
             </a:r>
             <a:endParaRPr sz="1000">
               <a:solidFill>
@@ -9969,7 +9321,7 @@
                 <a:cs typeface="Consolas"/>
                 <a:sym typeface="Consolas"/>
               </a:rPr>
-              <a:t>    Owner.Position -=</a:t>
+              <a:t>        .With(new Shooter(1.4f, 2, 1));</a:t>
             </a:r>
             <a:endParaRPr sz="1000">
               <a:solidFill>
@@ -10007,7 +9359,7 @@
                 <a:cs typeface="Consolas"/>
                 <a:sym typeface="Consolas"/>
               </a:rPr>
-              <a:t>        new Vector2(speed * dt, 0);</a:t>
+              <a:t/>
             </a:r>
             <a:endParaRPr sz="1000">
               <a:solidFill>
@@ -10045,7 +9397,7 @@
                 <a:cs typeface="Consolas"/>
                 <a:sym typeface="Consolas"/>
               </a:rPr>
-              <a:t>}</a:t>
+              <a:t>Entity Goblin(World world) =&gt;</a:t>
             </a:r>
             <a:endParaRPr sz="1000">
               <a:solidFill>
@@ -10083,7 +9435,7 @@
                 <a:cs typeface="Consolas"/>
                 <a:sym typeface="Consolas"/>
               </a:rPr>
-              <a:t/>
+              <a:t>    new Entity(world)</a:t>
             </a:r>
             <a:endParaRPr sz="1000">
               <a:solidFill>
@@ -10121,7 +9473,7 @@
                 <a:cs typeface="Consolas"/>
                 <a:sym typeface="Consolas"/>
               </a:rPr>
-              <a:t>// Shooter.cs</a:t>
+              <a:t>        .With(new SpriteRenderer(goblin))</a:t>
             </a:r>
             <a:endParaRPr sz="1000">
               <a:solidFill>
@@ -10159,7 +9511,7 @@
                 <a:cs typeface="Consolas"/>
                 <a:sym typeface="Consolas"/>
               </a:rPr>
-              <a:t>if (_cooldown &lt;= 0 &amp;&amp;</a:t>
+              <a:t>        .With(new Health(10))</a:t>
             </a:r>
             <a:endParaRPr sz="1000">
               <a:solidFill>
@@ -10197,7 +9549,7 @@
                 <a:cs typeface="Consolas"/>
                 <a:sym typeface="Consolas"/>
               </a:rPr>
-              <a:t>    World.FirstGoblinAhead(Owner.Row,</a:t>
+              <a:t>        .With(new Walker(28))</a:t>
             </a:r>
             <a:endParaRPr sz="1000">
               <a:solidFill>
@@ -10235,7 +9587,7 @@
                 <a:cs typeface="Consolas"/>
                 <a:sym typeface="Consolas"/>
               </a:rPr>
-              <a:t>        Owner.Position.X) != null)</a:t>
+              <a:t>        .With(new Attacker(1));</a:t>
             </a:r>
             <a:endParaRPr sz="1000">
               <a:solidFill>
@@ -10273,7 +9625,7 @@
                 <a:cs typeface="Consolas"/>
                 <a:sym typeface="Consolas"/>
               </a:rPr>
-              <a:t>    Fire();</a:t>
+              <a:t>Entity Shieldbearer(World world) =&gt;</a:t>
             </a:r>
             <a:endParaRPr sz="1000">
               <a:solidFill>
@@ -10288,6 +9640,44 @@
               <a:sym typeface="Consolas"/>
             </a:endParaRPr>
           </a:p>
+          <a:p>
+            <a:pPr indent="0" lvl="0" marL="0" rtl="0" algn="l">
+              <a:lnSpc>
+                <a:spcPct val="115000"/>
+              </a:lnSpc>
+              <a:spcBef>
+                <a:spcPts val="0"/>
+              </a:spcBef>
+              <a:spcAft>
+                <a:spcPts val="0"/>
+              </a:spcAft>
+              <a:buNone/>
+            </a:pPr>
+            <a:r>
+              <a:rPr lang="en" sz="1000">
+                <a:highlight>
+                  <a:schemeClr val="dk2"/>
+                </a:highlight>
+                <a:latin typeface="Consolas"/>
+                <a:ea typeface="Consolas"/>
+                <a:cs typeface="Consolas"/>
+                <a:sym typeface="Consolas"/>
+              </a:rPr>
+              <a:t>    Goblin(world).With(new Armour(18, shield));</a:t>
+            </a:r>
+            <a:endParaRPr sz="1000">
+              <a:solidFill>
+                <a:srgbClr val="CCCCCC"/>
+              </a:solidFill>
+              <a:highlight>
+                <a:schemeClr val="dk2"/>
+              </a:highlight>
+              <a:latin typeface="Consolas"/>
+              <a:ea typeface="Consolas"/>
+              <a:cs typeface="Consolas"/>
+              <a:sym typeface="Consolas"/>
+            </a:endParaRPr>
+          </a:p>
         </p:txBody>
       </p:sp>
     </p:spTree>
@@ -10298,7 +9688,813 @@
 </p:sld>
 </file>
 
-<file path=ppt/slides/slide17.xml><?xml version="1.0" encoding="utf-8"?>
+<file path=ppt/slides/slide18.xml><?xml version="1.0" encoding="utf-8"?>
+<p:sld xmlns:a="http://schemas.openxmlformats.org/drawingml/2006/main" xmlns:p="http://schemas.openxmlformats.org/presentationml/2006/main" xmlns:r="http://schemas.openxmlformats.org/officeDocument/2006/relationships">
+  <p:cSld>
+    <p:spTree>
+      <p:nvGrpSpPr>
+        <p:cNvPr id="1" name=""/>
+        <p:cNvGrpSpPr/>
+        <p:nvPr/>
+      </p:nvGrpSpPr>
+      <p:grpSpPr/>
+      <p:sp>
+        <p:nvSpPr>
+          <p:cNvPr id="140" name="Google Shape;140;p23"/>
+          <p:cNvSpPr txBox="1"/>
+          <p:nvPr>
+            <p:ph type="title"/>
+          </p:nvPr>
+        </p:nvSpPr>
+        <p:spPr>
+          <a:xfrm>
+            <a:off x="311700" y="195615"/>
+            <a:ext cx="8520600" cy="572700"/>
+          </a:xfrm>
+          <a:prstGeom prst="rect">
+            <a:avLst/>
+          </a:prstGeom>
+        </p:spPr>
+        <p:txBody>
+          <a:bodyPr anchorCtr="0" anchor="t" bIns="91425" lIns="91425" spcFirstLastPara="1" rIns="91425" wrap="square" tIns="91425">
+            <a:normAutofit fontScale="90000"/>
+          </a:bodyPr>
+          <a:lstStyle/>
+          <a:p>
+            <a:pPr indent="0" lvl="0" marL="0" rtl="0" algn="l">
+              <a:spcBef>
+                <a:spcPts val="0"/>
+              </a:spcBef>
+              <a:spcAft>
+                <a:spcPts val="0"/>
+              </a:spcAft>
+              <a:buNone/>
+            </a:pPr>
+            <a:r>
+              <a:rPr lang="en"/>
+              <a:t>Components Working Together</a:t>
+            </a:r>
+            <a:endParaRPr/>
+          </a:p>
+        </p:txBody>
+      </p:sp>
+      <p:sp>
+        <p:nvSpPr>
+          <p:cNvPr id="293" name="Google Shape;293;p45"/>
+          <p:cNvSpPr txBox="1"/>
+          <p:nvPr>
+            <p:ph type="title"/>
+          </p:nvPr>
+        </p:nvSpPr>
+        <p:spPr>
+          <a:xfrm>
+            <a:off x="311700" y="1152475"/>
+            <a:ext cx="3700000" cy="3500000"/>
+          </a:xfrm>
+          <a:prstGeom prst="rect">
+            <a:avLst/>
+          </a:prstGeom>
+        </p:spPr>
+        <p:txBody>
+          <a:bodyPr anchorCtr="0" anchor="t" bIns="91425" lIns="91425" spcFirstLastPara="1" rIns="91425" wrap="square" tIns="91425">
+            <a:normAutofit fontScale="90000"/>
+          </a:bodyPr>
+          <a:lstStyle/>
+          <a:p>
+            <a:pPr indent="-330200" lvl="0" marL="457200" rtl="0" algn="l">
+              <a:buClr>
+                <a:srgbClr val="DEE2E6"/>
+              </a:buClr>
+              <a:spcBef>
+                <a:spcPts val="0"/>
+              </a:spcBef>
+              <a:spcAft>
+                <a:spcPts val="0"/>
+              </a:spcAft>
+              <a:buSzPts val="1600"/>
+              <a:buChar char="●"/>
+            </a:pPr>
+            <a:r>
+              <a:rPr lang="en" sz="1600">
+                <a:solidFill>
+                  <a:srgbClr val="DEE2E6"/>
+                </a:solidFill>
+              </a:rPr>
+              <a:t>Through the owner</a:t>
+            </a:r>
+            <a:endParaRPr/>
+          </a:p>
+          <a:p>
+            <a:pPr indent="-317500" lvl="1" marL="914400" rtl="0" algn="l">
+              <a:buClr>
+                <a:srgbClr val="6C757D"/>
+              </a:buClr>
+              <a:spcBef>
+                <a:spcPts val="0"/>
+              </a:spcBef>
+              <a:spcAft>
+                <a:spcPts val="0"/>
+              </a:spcAft>
+              <a:buSzPts val="1400"/>
+              <a:buChar char="○"/>
+            </a:pPr>
+            <a:r>
+              <a:rPr lang="en" sz="1400">
+                <a:solidFill>
+                  <a:srgbClr val="6C757D"/>
+                </a:solidFill>
+              </a:rPr>
+              <a:t>Walker stops while the Attacker attacks</a:t>
+            </a:r>
+            <a:endParaRPr/>
+          </a:p>
+          <a:p>
+            <a:pPr indent="-317500" lvl="1" marL="914400" rtl="0" algn="l">
+              <a:buClr>
+                <a:srgbClr val="6C757D"/>
+              </a:buClr>
+              <a:spcBef>
+                <a:spcPts val="0"/>
+              </a:spcBef>
+              <a:spcAft>
+                <a:spcPts val="0"/>
+              </a:spcAft>
+              <a:buSzPts val="1400"/>
+              <a:buChar char="○"/>
+            </a:pPr>
+            <a:r>
+              <a:rPr lang="en" sz="1400">
+                <a:solidFill>
+                  <a:srgbClr val="6C757D"/>
+                </a:solidFill>
+              </a:rPr>
+              <a:t>Health lets the Armour go first</a:t>
+            </a:r>
+            <a:endParaRPr/>
+          </a:p>
+          <a:p>
+            <a:pPr indent="-330200" lvl="0" marL="457200" rtl="0" algn="l">
+              <a:buClr>
+                <a:srgbClr val="DEE2E6"/>
+              </a:buClr>
+              <a:spcBef>
+                <a:spcPts val="0"/>
+              </a:spcBef>
+              <a:spcAft>
+                <a:spcPts val="0"/>
+              </a:spcAft>
+              <a:buSzPts val="1600"/>
+              <a:buChar char="●"/>
+            </a:pPr>
+            <a:r>
+              <a:rPr lang="en" sz="1600">
+                <a:solidFill>
+                  <a:srgbClr val="DEE2E6"/>
+                </a:solidFill>
+              </a:rPr>
+              <a:t>Through the world</a:t>
+            </a:r>
+            <a:endParaRPr/>
+          </a:p>
+          <a:p>
+            <a:pPr indent="-317500" lvl="1" marL="914400" rtl="0" algn="l">
+              <a:buClr>
+                <a:srgbClr val="6C757D"/>
+              </a:buClr>
+              <a:spcBef>
+                <a:spcPts val="0"/>
+              </a:spcBef>
+              <a:spcAft>
+                <a:spcPts val="0"/>
+              </a:spcAft>
+              <a:buSzPts val="1400"/>
+              <a:buChar char="○"/>
+            </a:pPr>
+            <a:r>
+              <a:rPr lang="en" sz="1400">
+                <a:solidFill>
+                  <a:srgbClr val="6C757D"/>
+                </a:solidFill>
+              </a:rPr>
+              <a:t>Shooter: a goblin ahead in my row?</a:t>
+            </a:r>
+            <a:endParaRPr/>
+          </a:p>
+          <a:p>
+            <a:pPr indent="-330200" lvl="0" marL="457200" rtl="0" algn="l">
+              <a:buClr>
+                <a:srgbClr val="DEE2E6"/>
+              </a:buClr>
+              <a:spcBef>
+                <a:spcPts val="0"/>
+              </a:spcBef>
+              <a:spcAft>
+                <a:spcPts val="0"/>
+              </a:spcAft>
+              <a:buSzPts val="1600"/>
+              <a:buChar char="●"/>
+            </a:pPr>
+            <a:r>
+              <a:rPr lang="en" sz="1600">
+                <a:solidFill>
+                  <a:srgbClr val="DEE2E6"/>
+                </a:solidFill>
+              </a:rPr>
+              <a:t>Depend only on the components you use</a:t>
+            </a:r>
+            <a:endParaRPr/>
+          </a:p>
+          <a:p>
+            <a:pPr indent="-330200" lvl="0" marL="457200" rtl="0" algn="l">
+              <a:buClr>
+                <a:srgbClr val="DEE2E6"/>
+              </a:buClr>
+              <a:spcBef>
+                <a:spcPts val="0"/>
+              </a:spcBef>
+              <a:spcAft>
+                <a:spcPts val="0"/>
+              </a:spcAft>
+              <a:buSzPts val="1600"/>
+              <a:buChar char="●"/>
+            </a:pPr>
+            <a:r>
+              <a:rPr lang="en" sz="1600">
+                <a:solidFill>
+                  <a:srgbClr val="DEE2E6"/>
+                </a:solidFill>
+              </a:rPr>
+              <a:t>The world: one loop for everything</a:t>
+            </a:r>
+            <a:endParaRPr/>
+          </a:p>
+        </p:txBody>
+      </p:sp>
+      <p:sp>
+        <p:nvSpPr>
+          <p:cNvPr id="141" name="Google Shape;141;p23"/>
+          <p:cNvSpPr txBox="1"/>
+          <p:nvPr>
+            <p:ph idx="2" type="body"/>
+          </p:nvPr>
+        </p:nvSpPr>
+        <p:spPr>
+          <a:xfrm>
+            <a:off x="4150000" y="1152475"/>
+            <a:ext cx="4750000" cy="3600000"/>
+          </a:xfrm>
+          <a:prstGeom prst="rect">
+            <a:avLst/>
+          </a:prstGeom>
+        </p:spPr>
+        <p:txBody>
+          <a:bodyPr anchorCtr="0" anchor="t" bIns="91425" lIns="91425" spcFirstLastPara="1" rIns="91425" wrap="square" tIns="91425">
+            <a:noAutofit/>
+          </a:bodyPr>
+          <a:lstStyle/>
+          <a:p>
+            <a:pPr indent="0" lvl="0" marL="0" rtl="0" algn="l">
+              <a:lnSpc>
+                <a:spcPct val="115000"/>
+              </a:lnSpc>
+              <a:spcBef>
+                <a:spcPts val="0"/>
+              </a:spcBef>
+              <a:spcAft>
+                <a:spcPts val="0"/>
+              </a:spcAft>
+              <a:buNone/>
+            </a:pPr>
+            <a:r>
+              <a:rPr lang="en" sz="1000">
+                <a:highlight>
+                  <a:schemeClr val="dk2"/>
+                </a:highlight>
+                <a:latin typeface="Consolas"/>
+                <a:ea typeface="Consolas"/>
+                <a:cs typeface="Consolas"/>
+                <a:sym typeface="Consolas"/>
+              </a:rPr>
+              <a:t>// Walker.cs</a:t>
+            </a:r>
+            <a:endParaRPr sz="1000">
+              <a:solidFill>
+                <a:srgbClr val="CCCCCC"/>
+              </a:solidFill>
+              <a:highlight>
+                <a:schemeClr val="dk2"/>
+              </a:highlight>
+              <a:latin typeface="Consolas"/>
+              <a:ea typeface="Consolas"/>
+              <a:cs typeface="Consolas"/>
+              <a:sym typeface="Consolas"/>
+            </a:endParaRPr>
+          </a:p>
+          <a:p>
+            <a:pPr indent="0" lvl="0" marL="0" rtl="0" algn="l">
+              <a:lnSpc>
+                <a:spcPct val="115000"/>
+              </a:lnSpc>
+              <a:spcBef>
+                <a:spcPts val="0"/>
+              </a:spcBef>
+              <a:spcAft>
+                <a:spcPts val="0"/>
+              </a:spcAft>
+              <a:buNone/>
+            </a:pPr>
+            <a:r>
+              <a:rPr lang="en" sz="1000">
+                <a:highlight>
+                  <a:schemeClr val="dk2"/>
+                </a:highlight>
+                <a:latin typeface="Consolas"/>
+                <a:ea typeface="Consolas"/>
+                <a:cs typeface="Consolas"/>
+                <a:sym typeface="Consolas"/>
+              </a:rPr>
+              <a:t>public override void Update(float dt)</a:t>
+            </a:r>
+            <a:endParaRPr sz="1000">
+              <a:solidFill>
+                <a:srgbClr val="CCCCCC"/>
+              </a:solidFill>
+              <a:highlight>
+                <a:schemeClr val="dk2"/>
+              </a:highlight>
+              <a:latin typeface="Consolas"/>
+              <a:ea typeface="Consolas"/>
+              <a:cs typeface="Consolas"/>
+              <a:sym typeface="Consolas"/>
+            </a:endParaRPr>
+          </a:p>
+          <a:p>
+            <a:pPr indent="0" lvl="0" marL="0" rtl="0" algn="l">
+              <a:lnSpc>
+                <a:spcPct val="115000"/>
+              </a:lnSpc>
+              <a:spcBef>
+                <a:spcPts val="0"/>
+              </a:spcBef>
+              <a:spcAft>
+                <a:spcPts val="0"/>
+              </a:spcAft>
+              <a:buNone/>
+            </a:pPr>
+            <a:r>
+              <a:rPr lang="en" sz="1000">
+                <a:highlight>
+                  <a:schemeClr val="dk2"/>
+                </a:highlight>
+                <a:latin typeface="Consolas"/>
+                <a:ea typeface="Consolas"/>
+                <a:cs typeface="Consolas"/>
+                <a:sym typeface="Consolas"/>
+              </a:rPr>
+              <a:t>{</a:t>
+            </a:r>
+            <a:endParaRPr sz="1000">
+              <a:solidFill>
+                <a:srgbClr val="CCCCCC"/>
+              </a:solidFill>
+              <a:highlight>
+                <a:schemeClr val="dk2"/>
+              </a:highlight>
+              <a:latin typeface="Consolas"/>
+              <a:ea typeface="Consolas"/>
+              <a:cs typeface="Consolas"/>
+              <a:sym typeface="Consolas"/>
+            </a:endParaRPr>
+          </a:p>
+          <a:p>
+            <a:pPr indent="0" lvl="0" marL="0" rtl="0" algn="l">
+              <a:lnSpc>
+                <a:spcPct val="115000"/>
+              </a:lnSpc>
+              <a:spcBef>
+                <a:spcPts val="0"/>
+              </a:spcBef>
+              <a:spcAft>
+                <a:spcPts val="0"/>
+              </a:spcAft>
+              <a:buNone/>
+            </a:pPr>
+            <a:r>
+              <a:rPr lang="en" sz="1000">
+                <a:highlight>
+                  <a:schemeClr val="dk2"/>
+                </a:highlight>
+                <a:latin typeface="Consolas"/>
+                <a:ea typeface="Consolas"/>
+                <a:cs typeface="Consolas"/>
+                <a:sym typeface="Consolas"/>
+              </a:rPr>
+              <a:t>    if (Owner.Get&lt;Attacker&gt;()?.IsAttacking == true)</a:t>
+            </a:r>
+            <a:endParaRPr sz="1000">
+              <a:solidFill>
+                <a:srgbClr val="CCCCCC"/>
+              </a:solidFill>
+              <a:highlight>
+                <a:schemeClr val="dk2"/>
+              </a:highlight>
+              <a:latin typeface="Consolas"/>
+              <a:ea typeface="Consolas"/>
+              <a:cs typeface="Consolas"/>
+              <a:sym typeface="Consolas"/>
+            </a:endParaRPr>
+          </a:p>
+          <a:p>
+            <a:pPr indent="0" lvl="0" marL="0" rtl="0" algn="l">
+              <a:lnSpc>
+                <a:spcPct val="115000"/>
+              </a:lnSpc>
+              <a:spcBef>
+                <a:spcPts val="0"/>
+              </a:spcBef>
+              <a:spcAft>
+                <a:spcPts val="0"/>
+              </a:spcAft>
+              <a:buNone/>
+            </a:pPr>
+            <a:r>
+              <a:rPr lang="en" sz="1000">
+                <a:highlight>
+                  <a:schemeClr val="dk2"/>
+                </a:highlight>
+                <a:latin typeface="Consolas"/>
+                <a:ea typeface="Consolas"/>
+                <a:cs typeface="Consolas"/>
+                <a:sym typeface="Consolas"/>
+              </a:rPr>
+              <a:t>        return;</a:t>
+            </a:r>
+            <a:endParaRPr sz="1000">
+              <a:solidFill>
+                <a:srgbClr val="CCCCCC"/>
+              </a:solidFill>
+              <a:highlight>
+                <a:schemeClr val="dk2"/>
+              </a:highlight>
+              <a:latin typeface="Consolas"/>
+              <a:ea typeface="Consolas"/>
+              <a:cs typeface="Consolas"/>
+              <a:sym typeface="Consolas"/>
+            </a:endParaRPr>
+          </a:p>
+          <a:p>
+            <a:pPr indent="0" lvl="0" marL="0" rtl="0" algn="l">
+              <a:lnSpc>
+                <a:spcPct val="115000"/>
+              </a:lnSpc>
+              <a:spcBef>
+                <a:spcPts val="0"/>
+              </a:spcBef>
+              <a:spcAft>
+                <a:spcPts val="0"/>
+              </a:spcAft>
+              <a:buNone/>
+            </a:pPr>
+            <a:r>
+              <a:rPr lang="en" sz="1000">
+                <a:highlight>
+                  <a:schemeClr val="dk2"/>
+                </a:highlight>
+                <a:latin typeface="Consolas"/>
+                <a:ea typeface="Consolas"/>
+                <a:cs typeface="Consolas"/>
+                <a:sym typeface="Consolas"/>
+              </a:rPr>
+              <a:t>    Owner.Position -=</a:t>
+            </a:r>
+            <a:endParaRPr sz="1000">
+              <a:solidFill>
+                <a:srgbClr val="CCCCCC"/>
+              </a:solidFill>
+              <a:highlight>
+                <a:schemeClr val="dk2"/>
+              </a:highlight>
+              <a:latin typeface="Consolas"/>
+              <a:ea typeface="Consolas"/>
+              <a:cs typeface="Consolas"/>
+              <a:sym typeface="Consolas"/>
+            </a:endParaRPr>
+          </a:p>
+          <a:p>
+            <a:pPr indent="0" lvl="0" marL="0" rtl="0" algn="l">
+              <a:lnSpc>
+                <a:spcPct val="115000"/>
+              </a:lnSpc>
+              <a:spcBef>
+                <a:spcPts val="0"/>
+              </a:spcBef>
+              <a:spcAft>
+                <a:spcPts val="0"/>
+              </a:spcAft>
+              <a:buNone/>
+            </a:pPr>
+            <a:r>
+              <a:rPr lang="en" sz="1000">
+                <a:highlight>
+                  <a:schemeClr val="dk2"/>
+                </a:highlight>
+                <a:latin typeface="Consolas"/>
+                <a:ea typeface="Consolas"/>
+                <a:cs typeface="Consolas"/>
+                <a:sym typeface="Consolas"/>
+              </a:rPr>
+              <a:t>        new Vector2(speed * dt, 0);</a:t>
+            </a:r>
+            <a:endParaRPr sz="1000">
+              <a:solidFill>
+                <a:srgbClr val="CCCCCC"/>
+              </a:solidFill>
+              <a:highlight>
+                <a:schemeClr val="dk2"/>
+              </a:highlight>
+              <a:latin typeface="Consolas"/>
+              <a:ea typeface="Consolas"/>
+              <a:cs typeface="Consolas"/>
+              <a:sym typeface="Consolas"/>
+            </a:endParaRPr>
+          </a:p>
+          <a:p>
+            <a:pPr indent="0" lvl="0" marL="0" rtl="0" algn="l">
+              <a:lnSpc>
+                <a:spcPct val="115000"/>
+              </a:lnSpc>
+              <a:spcBef>
+                <a:spcPts val="0"/>
+              </a:spcBef>
+              <a:spcAft>
+                <a:spcPts val="0"/>
+              </a:spcAft>
+              <a:buNone/>
+            </a:pPr>
+            <a:r>
+              <a:rPr lang="en" sz="1000">
+                <a:highlight>
+                  <a:schemeClr val="dk2"/>
+                </a:highlight>
+                <a:latin typeface="Consolas"/>
+                <a:ea typeface="Consolas"/>
+                <a:cs typeface="Consolas"/>
+                <a:sym typeface="Consolas"/>
+              </a:rPr>
+              <a:t>}</a:t>
+            </a:r>
+            <a:endParaRPr sz="1000">
+              <a:solidFill>
+                <a:srgbClr val="CCCCCC"/>
+              </a:solidFill>
+              <a:highlight>
+                <a:schemeClr val="dk2"/>
+              </a:highlight>
+              <a:latin typeface="Consolas"/>
+              <a:ea typeface="Consolas"/>
+              <a:cs typeface="Consolas"/>
+              <a:sym typeface="Consolas"/>
+            </a:endParaRPr>
+          </a:p>
+          <a:p>
+            <a:pPr indent="0" lvl="0" marL="0" rtl="0" algn="l">
+              <a:lnSpc>
+                <a:spcPct val="115000"/>
+              </a:lnSpc>
+              <a:spcBef>
+                <a:spcPts val="0"/>
+              </a:spcBef>
+              <a:spcAft>
+                <a:spcPts val="0"/>
+              </a:spcAft>
+              <a:buNone/>
+            </a:pPr>
+            <a:r>
+              <a:rPr lang="en" sz="1000">
+                <a:highlight>
+                  <a:schemeClr val="dk2"/>
+                </a:highlight>
+                <a:latin typeface="Consolas"/>
+                <a:ea typeface="Consolas"/>
+                <a:cs typeface="Consolas"/>
+                <a:sym typeface="Consolas"/>
+              </a:rPr>
+              <a:t/>
+            </a:r>
+            <a:endParaRPr sz="1000">
+              <a:solidFill>
+                <a:srgbClr val="CCCCCC"/>
+              </a:solidFill>
+              <a:highlight>
+                <a:schemeClr val="dk2"/>
+              </a:highlight>
+              <a:latin typeface="Consolas"/>
+              <a:ea typeface="Consolas"/>
+              <a:cs typeface="Consolas"/>
+              <a:sym typeface="Consolas"/>
+            </a:endParaRPr>
+          </a:p>
+          <a:p>
+            <a:pPr indent="0" lvl="0" marL="0" rtl="0" algn="l">
+              <a:lnSpc>
+                <a:spcPct val="115000"/>
+              </a:lnSpc>
+              <a:spcBef>
+                <a:spcPts val="0"/>
+              </a:spcBef>
+              <a:spcAft>
+                <a:spcPts val="0"/>
+              </a:spcAft>
+              <a:buNone/>
+            </a:pPr>
+            <a:r>
+              <a:rPr lang="en" sz="1000">
+                <a:highlight>
+                  <a:schemeClr val="dk2"/>
+                </a:highlight>
+                <a:latin typeface="Consolas"/>
+                <a:ea typeface="Consolas"/>
+                <a:cs typeface="Consolas"/>
+                <a:sym typeface="Consolas"/>
+              </a:rPr>
+              <a:t>// Shooter.cs</a:t>
+            </a:r>
+            <a:endParaRPr sz="1000">
+              <a:solidFill>
+                <a:srgbClr val="CCCCCC"/>
+              </a:solidFill>
+              <a:highlight>
+                <a:schemeClr val="dk2"/>
+              </a:highlight>
+              <a:latin typeface="Consolas"/>
+              <a:ea typeface="Consolas"/>
+              <a:cs typeface="Consolas"/>
+              <a:sym typeface="Consolas"/>
+            </a:endParaRPr>
+          </a:p>
+          <a:p>
+            <a:pPr indent="0" lvl="0" marL="0" rtl="0" algn="l">
+              <a:lnSpc>
+                <a:spcPct val="115000"/>
+              </a:lnSpc>
+              <a:spcBef>
+                <a:spcPts val="0"/>
+              </a:spcBef>
+              <a:spcAft>
+                <a:spcPts val="0"/>
+              </a:spcAft>
+              <a:buNone/>
+            </a:pPr>
+            <a:r>
+              <a:rPr lang="en" sz="1000">
+                <a:highlight>
+                  <a:schemeClr val="dk2"/>
+                </a:highlight>
+                <a:latin typeface="Consolas"/>
+                <a:ea typeface="Consolas"/>
+                <a:cs typeface="Consolas"/>
+                <a:sym typeface="Consolas"/>
+              </a:rPr>
+              <a:t>if (_cooldown &lt;= 0 &amp;&amp;</a:t>
+            </a:r>
+            <a:endParaRPr sz="1000">
+              <a:solidFill>
+                <a:srgbClr val="CCCCCC"/>
+              </a:solidFill>
+              <a:highlight>
+                <a:schemeClr val="dk2"/>
+              </a:highlight>
+              <a:latin typeface="Consolas"/>
+              <a:ea typeface="Consolas"/>
+              <a:cs typeface="Consolas"/>
+              <a:sym typeface="Consolas"/>
+            </a:endParaRPr>
+          </a:p>
+          <a:p>
+            <a:pPr indent="0" lvl="0" marL="0" rtl="0" algn="l">
+              <a:lnSpc>
+                <a:spcPct val="115000"/>
+              </a:lnSpc>
+              <a:spcBef>
+                <a:spcPts val="0"/>
+              </a:spcBef>
+              <a:spcAft>
+                <a:spcPts val="0"/>
+              </a:spcAft>
+              <a:buNone/>
+            </a:pPr>
+            <a:r>
+              <a:rPr lang="en" sz="1000">
+                <a:highlight>
+                  <a:schemeClr val="dk2"/>
+                </a:highlight>
+                <a:latin typeface="Consolas"/>
+                <a:ea typeface="Consolas"/>
+                <a:cs typeface="Consolas"/>
+                <a:sym typeface="Consolas"/>
+              </a:rPr>
+              <a:t>    World.FirstGoblinAhead(Owner.Row,</a:t>
+            </a:r>
+            <a:endParaRPr sz="1000">
+              <a:solidFill>
+                <a:srgbClr val="CCCCCC"/>
+              </a:solidFill>
+              <a:highlight>
+                <a:schemeClr val="dk2"/>
+              </a:highlight>
+              <a:latin typeface="Consolas"/>
+              <a:ea typeface="Consolas"/>
+              <a:cs typeface="Consolas"/>
+              <a:sym typeface="Consolas"/>
+            </a:endParaRPr>
+          </a:p>
+          <a:p>
+            <a:pPr indent="0" lvl="0" marL="0" rtl="0" algn="l">
+              <a:lnSpc>
+                <a:spcPct val="115000"/>
+              </a:lnSpc>
+              <a:spcBef>
+                <a:spcPts val="0"/>
+              </a:spcBef>
+              <a:spcAft>
+                <a:spcPts val="0"/>
+              </a:spcAft>
+              <a:buNone/>
+            </a:pPr>
+            <a:r>
+              <a:rPr lang="en" sz="1000">
+                <a:highlight>
+                  <a:schemeClr val="dk2"/>
+                </a:highlight>
+                <a:latin typeface="Consolas"/>
+                <a:ea typeface="Consolas"/>
+                <a:cs typeface="Consolas"/>
+                <a:sym typeface="Consolas"/>
+              </a:rPr>
+              <a:t>        Owner.Position.X) != null)</a:t>
+            </a:r>
+            <a:endParaRPr sz="1000">
+              <a:solidFill>
+                <a:srgbClr val="CCCCCC"/>
+              </a:solidFill>
+              <a:highlight>
+                <a:schemeClr val="dk2"/>
+              </a:highlight>
+              <a:latin typeface="Consolas"/>
+              <a:ea typeface="Consolas"/>
+              <a:cs typeface="Consolas"/>
+              <a:sym typeface="Consolas"/>
+            </a:endParaRPr>
+          </a:p>
+          <a:p>
+            <a:pPr indent="0" lvl="0" marL="0" rtl="0" algn="l">
+              <a:lnSpc>
+                <a:spcPct val="115000"/>
+              </a:lnSpc>
+              <a:spcBef>
+                <a:spcPts val="0"/>
+              </a:spcBef>
+              <a:spcAft>
+                <a:spcPts val="0"/>
+              </a:spcAft>
+              <a:buNone/>
+            </a:pPr>
+            <a:r>
+              <a:rPr lang="en" sz="1000">
+                <a:highlight>
+                  <a:schemeClr val="dk2"/>
+                </a:highlight>
+                <a:latin typeface="Consolas"/>
+                <a:ea typeface="Consolas"/>
+                <a:cs typeface="Consolas"/>
+                <a:sym typeface="Consolas"/>
+              </a:rPr>
+              <a:t>    Fire();</a:t>
+            </a:r>
+            <a:endParaRPr sz="1000">
+              <a:solidFill>
+                <a:srgbClr val="CCCCCC"/>
+              </a:solidFill>
+              <a:highlight>
+                <a:schemeClr val="dk2"/>
+              </a:highlight>
+              <a:latin typeface="Consolas"/>
+              <a:ea typeface="Consolas"/>
+              <a:cs typeface="Consolas"/>
+              <a:sym typeface="Consolas"/>
+            </a:endParaRPr>
+          </a:p>
+        </p:txBody>
+      </p:sp>
+    </p:spTree>
+  </p:cSld>
+  <p:clrMapOvr>
+    <a:masterClrMapping/>
+  </p:clrMapOvr>
+</p:sld>
+</file>
+
+<file path=ppt/slides/slide19.xml><?xml version="1.0" encoding="utf-8"?>
 <p:sld xmlns:a="http://schemas.openxmlformats.org/drawingml/2006/main" xmlns:p="http://schemas.openxmlformats.org/presentationml/2006/main" xmlns:r="http://schemas.openxmlformats.org/officeDocument/2006/relationships">
   <p:cSld>
     <p:spTree>
@@ -10658,267 +10854,6 @@
               </a:rPr>
               <a:t>Geometry Wars moves rules like that into systems.</a:t>
             </a:r>
-          </a:p>
-        </p:txBody>
-      </p:sp>
-    </p:spTree>
-  </p:cSld>
-  <p:clrMapOvr>
-    <a:masterClrMapping/>
-  </p:clrMapOvr>
-</p:sld>
-</file>
-
-<file path=ppt/slides/slide18.xml><?xml version="1.0" encoding="utf-8"?>
-<p:sld xmlns:a="http://schemas.openxmlformats.org/drawingml/2006/main" xmlns:p="http://schemas.openxmlformats.org/presentationml/2006/main" xmlns:r="http://schemas.openxmlformats.org/officeDocument/2006/relationships">
-  <p:cSld>
-    <p:spTree>
-      <p:nvGrpSpPr>
-        <p:cNvPr id="1" name=""/>
-        <p:cNvGrpSpPr/>
-        <p:nvPr/>
-      </p:nvGrpSpPr>
-      <p:grpSpPr/>
-      <p:sp>
-        <p:nvSpPr>
-          <p:cNvPr id="2" name="Title 1"/>
-          <p:cNvSpPr>
-            <a:spLocks noGrp="1"/>
-          </p:cNvSpPr>
-          <p:nvPr>
-            <p:ph type="title"/>
-          </p:nvPr>
-        </p:nvSpPr>
-        <p:spPr/>
-        <p:txBody>
-          <a:bodyPr/>
-          <a:lstStyle/>
-          <a:p>
-            <a:pPr indent="0" lvl="0" marL="0" rtl="0" algn="l">
-              <a:spcBef>
-                <a:spcPts val="0"/>
-              </a:spcBef>
-              <a:spcAft>
-                <a:spcPts val="0"/>
-              </a:spcAft>
-              <a:buNone/>
-            </a:pPr>
-            <a:r>
-              <a:rPr lang="en"/>
-              <a:t>Testing a Component</a:t>
-            </a:r>
-            <a:endParaRPr/>
-          </a:p>
-        </p:txBody>
-      </p:sp>
-      <p:sp>
-        <p:nvSpPr>
-          <p:cNvPr id="3" name="Text Placeholder 2"/>
-          <p:cNvSpPr>
-            <a:spLocks noGrp="1"/>
-          </p:cNvSpPr>
-          <p:nvPr>
-            <p:ph type="body" idx="1"/>
-          </p:nvPr>
-        </p:nvSpPr>
-        <p:spPr>
-          <a:xfrm>
-            <a:off x="311700" y="885950"/>
-            <a:ext cx="8520600" cy="1289304"/>
-          </a:xfrm>
-        </p:spPr>
-        <p:txBody>
-          <a:bodyPr/>
-          <a:lstStyle/>
-          <a:p>
-            <a:pPr indent="-330200" lvl="0" marL="457200" rtl="0" algn="l">
-              <a:spcBef>
-                <a:spcPts val="0"/>
-              </a:spcBef>
-              <a:spcAft>
-                <a:spcPts val="0"/>
-              </a:spcAft>
-              <a:buSzPts val="1600"/>
-              <a:buChar char="●"/>
-            </a:pPr>
-            <a:r>
-              <a:rPr lang="en"/>
-              <a:t>A component with one job can be tested on its own</a:t>
-            </a:r>
-            <a:endParaRPr/>
-          </a:p>
-          <a:p>
-            <a:pPr indent="-330200" lvl="0" marL="457200" rtl="0" algn="l">
-              <a:spcBef>
-                <a:spcPts val="0"/>
-              </a:spcBef>
-              <a:spcAft>
-                <a:spcPts val="0"/>
-              </a:spcAft>
-              <a:buSzPts val="1600"/>
-              <a:buChar char="●"/>
-            </a:pPr>
-            <a:r>
-              <a:rPr lang="en"/>
-              <a:t>An entity with only the parts under test: no field, no textures, no game running</a:t>
-            </a:r>
-            <a:endParaRPr/>
-          </a:p>
-          <a:p>
-            <a:pPr indent="-330200" lvl="0" marL="457200" rtl="0" algn="l">
-              <a:spcBef>
-                <a:spcPts val="0"/>
-              </a:spcBef>
-              <a:spcAft>
-                <a:spcPts val="0"/>
-              </a:spcAft>
-              <a:buSzPts val="1600"/>
-              <a:buChar char="●"/>
-            </a:pPr>
-            <a:r>
-              <a:rPr lang="en"/>
-              <a:t>Pvz.Tests: health, armour first, a lifetime that runs out</a:t>
-            </a:r>
-            <a:endParaRPr/>
-          </a:p>
-        </p:txBody>
-      </p:sp>
-    </p:spTree>
-  </p:cSld>
-  <p:clrMapOvr>
-    <a:masterClrMapping/>
-  </p:clrMapOvr>
-</p:sld>
-</file>
-
-<file path=ppt/slides/slide19.xml><?xml version="1.0" encoding="utf-8"?>
-<p:sld xmlns:a="http://schemas.openxmlformats.org/drawingml/2006/main" xmlns:p="http://schemas.openxmlformats.org/presentationml/2006/main" xmlns:r="http://schemas.openxmlformats.org/officeDocument/2006/relationships">
-  <p:cSld>
-    <p:spTree>
-      <p:nvGrpSpPr>
-        <p:cNvPr id="1" name=""/>
-        <p:cNvGrpSpPr/>
-        <p:nvPr/>
-      </p:nvGrpSpPr>
-      <p:grpSpPr/>
-      <p:sp>
-        <p:nvSpPr>
-          <p:cNvPr id="2" name="Title 1"/>
-          <p:cNvSpPr>
-            <a:spLocks noGrp="1"/>
-          </p:cNvSpPr>
-          <p:nvPr>
-            <p:ph type="title"/>
-          </p:nvPr>
-        </p:nvSpPr>
-        <p:spPr/>
-        <p:txBody>
-          <a:bodyPr/>
-          <a:lstStyle/>
-          <a:p>
-            <a:pPr indent="0" lvl="0" marL="0" rtl="0" algn="l">
-              <a:spcBef>
-                <a:spcPts val="0"/>
-              </a:spcBef>
-              <a:spcAft>
-                <a:spcPts val="0"/>
-              </a:spcAft>
-              <a:buNone/>
-            </a:pPr>
-            <a:r>
-              <a:rPr lang="en"/>
-              <a:t>Try It: An Armour Test</a:t>
-            </a:r>
-            <a:endParaRPr/>
-          </a:p>
-        </p:txBody>
-      </p:sp>
-      <p:sp>
-        <p:nvSpPr>
-          <p:cNvPr id="3" name="Text Placeholder 2"/>
-          <p:cNvSpPr>
-            <a:spLocks noGrp="1"/>
-          </p:cNvSpPr>
-          <p:nvPr>
-            <p:ph type="body" idx="1"/>
-          </p:nvPr>
-        </p:nvSpPr>
-        <p:spPr>
-          <a:xfrm>
-            <a:off x="311700" y="885950"/>
-            <a:ext cx="8520600" cy="1673352"/>
-          </a:xfrm>
-        </p:spPr>
-        <p:txBody>
-          <a:bodyPr/>
-          <a:lstStyle/>
-          <a:p>
-            <a:pPr indent="-330200" lvl="0" marL="457200" rtl="0" algn="l">
-              <a:spcBef>
-                <a:spcPts val="0"/>
-              </a:spcBef>
-              <a:spcAft>
-                <a:spcPts val="0"/>
-              </a:spcAft>
-              <a:buSzPts val="1600"/>
-              <a:buChar char="●"/>
-            </a:pPr>
-            <a:r>
-              <a:rPr lang="en"/>
-              <a:t>In Pvz.Tests:</a:t>
-            </a:r>
-            <a:endParaRPr/>
-          </a:p>
-          <a:p>
-            <a:pPr indent="-330200" lvl="0" marL="457200" rtl="0" algn="l">
-              <a:spcBef>
-                <a:spcPts val="0"/>
-              </a:spcBef>
-              <a:spcAft>
-                <a:spcPts val="0"/>
-              </a:spcAft>
-              <a:buSzPts val="1600"/>
-              <a:buChar char="●"/>
-            </a:pPr>
-            <a:r>
-              <a:rPr lang="en"/>
-              <a:t>A goblin with armour 20 and health 10</a:t>
-            </a:r>
-            <a:endParaRPr/>
-          </a:p>
-          <a:p>
-            <a:pPr indent="-330200" lvl="0" marL="457200" rtl="0" algn="l">
-              <a:spcBef>
-                <a:spcPts val="0"/>
-              </a:spcBef>
-              <a:spcAft>
-                <a:spcPts val="0"/>
-              </a:spcAft>
-              <a:buSzPts val="1600"/>
-              <a:buChar char="●"/>
-            </a:pPr>
-            <a:r>
-              <a:rPr lang="en"/>
-              <a:t>Still standing after two hits of 12?</a:t>
-            </a:r>
-            <a:endParaRPr/>
-          </a:p>
-          <a:p>
-            <a:pPr indent="-330200" lvl="0" marL="457200" rtl="0" algn="l">
-              <a:spcBef>
-                <a:spcPts val="0"/>
-              </a:spcBef>
-              <a:spcAft>
-                <a:spcPts val="0"/>
-              </a:spcAft>
-              <a:buSzPts val="1600"/>
-              <a:buChar char="●"/>
-            </a:pPr>
-            <a:r>
-              <a:rPr lang="en"/>
-              <a:t>Run dotnet test</a:t>
-            </a:r>
-            <a:endParaRPr/>
           </a:p>
         </p:txBody>
       </p:sp>
@@ -11055,25 +10990,17 @@
       <p:grpSpPr/>
       <p:sp>
         <p:nvSpPr>
-          <p:cNvPr id="128" name="Google Shape;128;p21"/>
-          <p:cNvSpPr txBox="1"/>
+          <p:cNvPr id="2" name="Title 1"/>
+          <p:cNvSpPr>
+            <a:spLocks noGrp="1"/>
+          </p:cNvSpPr>
           <p:nvPr>
             <p:ph type="title"/>
           </p:nvPr>
         </p:nvSpPr>
-        <p:spPr>
-          <a:xfrm>
-            <a:off x="311700" y="195615"/>
-            <a:ext cx="8520600" cy="572700"/>
-          </a:xfrm>
-          <a:prstGeom prst="rect">
-            <a:avLst/>
-          </a:prstGeom>
-        </p:spPr>
+        <p:spPr/>
         <p:txBody>
-          <a:bodyPr anchorCtr="0" anchor="t" bIns="91425" lIns="91425" spcFirstLastPara="1" rIns="91425" wrap="square" tIns="91425">
-            <a:normAutofit fontScale="90000"/>
-          </a:bodyPr>
+          <a:bodyPr/>
           <a:lstStyle/>
           <a:p>
             <a:pPr indent="0" lvl="0" marL="0" rtl="0" algn="l">
@@ -11086,79 +11013,82 @@
               <a:buNone/>
             </a:pPr>
             <a:r>
-              <a:rPr lang="en">
-                <a:solidFill>
-                  <a:schemeClr val="accent5"/>
-                </a:solidFill>
-              </a:rPr>
-              <a:t>Component Implementation</a:t>
-            </a:r>
-            <a:endParaRPr>
-              <a:solidFill>
-                <a:schemeClr val="accent5"/>
-              </a:solidFill>
-            </a:endParaRPr>
+              <a:rPr lang="en"/>
+              <a:t>Testing a Component</a:t>
+            </a:r>
+            <a:endParaRPr/>
           </a:p>
         </p:txBody>
       </p:sp>
       <p:sp>
         <p:nvSpPr>
-          <p:cNvPr id="129" name="Google Shape;129;p21"/>
-          <p:cNvSpPr txBox="1"/>
+          <p:cNvPr id="3" name="Text Placeholder 2"/>
+          <p:cNvSpPr>
+            <a:spLocks noGrp="1"/>
+          </p:cNvSpPr>
           <p:nvPr>
-            <p:ph idx="1" type="body"/>
+            <p:ph type="body" idx="1"/>
           </p:nvPr>
         </p:nvSpPr>
         <p:spPr>
           <a:xfrm>
             <a:off x="311700" y="885950"/>
-            <a:ext cx="8520600" cy="4023300"/>
+            <a:ext cx="8520600" cy="1289304"/>
           </a:xfrm>
-          <a:prstGeom prst="rect">
-            <a:avLst/>
-          </a:prstGeom>
         </p:spPr>
         <p:txBody>
-          <a:bodyPr anchorCtr="0" anchor="ctr" bIns="91425" lIns="91425" spcFirstLastPara="1" rIns="91425" wrap="square" tIns="91425">
-            <a:normAutofit/>
-          </a:bodyPr>
+          <a:bodyPr/>
           <a:lstStyle/>
           <a:p>
-            <a:pPr indent="0" lvl="0" marL="0" rtl="0" algn="ctr">
-              <a:spcBef>
-                <a:spcPts val="0"/>
-              </a:spcBef>
-              <a:spcAft>
-                <a:spcPts val="1200"/>
-              </a:spcAft>
-              <a:buNone/>
-            </a:pPr>
-            <a:r>
-              <a:rPr lang="en" sz="2900">
-                <a:latin typeface="VT323"/>
-                <a:ea typeface="VT323"/>
-                <a:cs typeface="VT323"/>
-                <a:sym typeface="VT323"/>
-              </a:rPr>
-              <a:t>DEMO!</a:t>
+            <a:pPr indent="-330200" lvl="0" marL="457200" rtl="0" algn="l">
+              <a:spcBef>
+                <a:spcPts val="0"/>
+              </a:spcBef>
+              <a:spcAft>
+                <a:spcPts val="0"/>
+              </a:spcAft>
+              <a:buSzPts val="1600"/>
+              <a:buChar char="●"/>
+            </a:pPr>
+            <a:r>
+              <a:rPr lang="en"/>
+              <a:t>A component with one job can be tested on its own</a:t>
             </a:r>
             <a:endParaRPr/>
           </a:p>
           <a:p>
-            <a:pPr indent="0" lvl="0" marL="0" rtl="0" algn="ctr">
-              <a:spcBef>
-                <a:spcPts val="0"/>
-              </a:spcBef>
-              <a:spcAft>
-                <a:spcPts val="0"/>
-              </a:spcAft>
-              <a:buNone/>
-            </a:pPr>
-            <a:r>
-              <a:rPr lang="en" sz="1800"/>
-              <a:t>Pvz1 → Pvz2: from a class hierarchy to components</a:t>
-            </a:r>
-            <a:endParaRPr sz="1800"/>
+            <a:pPr indent="-330200" lvl="0" marL="457200" rtl="0" algn="l">
+              <a:spcBef>
+                <a:spcPts val="0"/>
+              </a:spcBef>
+              <a:spcAft>
+                <a:spcPts val="0"/>
+              </a:spcAft>
+              <a:buSzPts val="1600"/>
+              <a:buChar char="●"/>
+            </a:pPr>
+            <a:r>
+              <a:rPr lang="en"/>
+              <a:t>An entity with only the parts under test: no field, no textures, no game running</a:t>
+            </a:r>
+            <a:endParaRPr/>
+          </a:p>
+          <a:p>
+            <a:pPr indent="-330200" lvl="0" marL="457200" rtl="0" algn="l">
+              <a:spcBef>
+                <a:spcPts val="0"/>
+              </a:spcBef>
+              <a:spcAft>
+                <a:spcPts val="0"/>
+              </a:spcAft>
+              <a:buSzPts val="1600"/>
+              <a:buChar char="●"/>
+            </a:pPr>
+            <a:r>
+              <a:rPr lang="en"/>
+              <a:t>Pvz.Tests: health, armour first, a lifetime that runs out</a:t>
+            </a:r>
+            <a:endParaRPr/>
           </a:p>
         </p:txBody>
       </p:sp>
@@ -11206,7 +11136,7 @@
             </a:pPr>
             <a:r>
               <a:rPr lang="en"/>
-              <a:t>Try It: A New Defender From Parts</a:t>
+              <a:t>Try It: An Armour Test</a:t>
             </a:r>
             <a:endParaRPr/>
           </a:p>
@@ -11244,7 +11174,7 @@
             </a:pPr>
             <a:r>
               <a:rPr lang="en"/>
-              <a:t>In Pvz2’s Recipes:</a:t>
+              <a:t>In Pvz.Tests:</a:t>
             </a:r>
             <a:endParaRPr/>
           </a:p>
@@ -11261,7 +11191,7 @@
             </a:pPr>
             <a:r>
               <a:rPr lang="en"/>
-              <a:t>A defender that shoots and makes gold</a:t>
+              <a:t>A goblin with armour 20 and health 10</a:t>
             </a:r>
             <a:endParaRPr/>
           </a:p>
@@ -11278,7 +11208,7 @@
             </a:pPr>
             <a:r>
               <a:rPr lang="en"/>
-              <a:t>Give it a card in Game1 (chest sprite)</a:t>
+              <a:t>Still standing after two hits of 12?</a:t>
             </a:r>
             <a:endParaRPr/>
           </a:p>
@@ -11295,7 +11225,7 @@
             </a:pPr>
             <a:r>
               <a:rPr lang="en"/>
-              <a:t>How much new code?</a:t>
+              <a:t>Run dotnet test</a:t>
             </a:r>
             <a:endParaRPr/>
           </a:p>
@@ -11310,6 +11240,272 @@
 </file>
 
 <file path=ppt/slides/slide22.xml><?xml version="1.0" encoding="utf-8"?>
+<p:sld xmlns:a="http://schemas.openxmlformats.org/drawingml/2006/main" xmlns:p="http://schemas.openxmlformats.org/presentationml/2006/main" xmlns:r="http://schemas.openxmlformats.org/officeDocument/2006/relationships">
+  <p:cSld>
+    <p:spTree>
+      <p:nvGrpSpPr>
+        <p:cNvPr id="1" name=""/>
+        <p:cNvGrpSpPr/>
+        <p:nvPr/>
+      </p:nvGrpSpPr>
+      <p:grpSpPr/>
+      <p:sp>
+        <p:nvSpPr>
+          <p:cNvPr id="128" name="Google Shape;128;p21"/>
+          <p:cNvSpPr txBox="1"/>
+          <p:nvPr>
+            <p:ph type="title"/>
+          </p:nvPr>
+        </p:nvSpPr>
+        <p:spPr>
+          <a:xfrm>
+            <a:off x="311700" y="195615"/>
+            <a:ext cx="8520600" cy="572700"/>
+          </a:xfrm>
+          <a:prstGeom prst="rect">
+            <a:avLst/>
+          </a:prstGeom>
+        </p:spPr>
+        <p:txBody>
+          <a:bodyPr anchorCtr="0" anchor="t" bIns="91425" lIns="91425" spcFirstLastPara="1" rIns="91425" wrap="square" tIns="91425">
+            <a:normAutofit fontScale="90000"/>
+          </a:bodyPr>
+          <a:lstStyle/>
+          <a:p>
+            <a:pPr indent="0" lvl="0" marL="0" rtl="0" algn="l">
+              <a:spcBef>
+                <a:spcPts val="0"/>
+              </a:spcBef>
+              <a:spcAft>
+                <a:spcPts val="0"/>
+              </a:spcAft>
+              <a:buNone/>
+            </a:pPr>
+            <a:r>
+              <a:rPr lang="en">
+                <a:solidFill>
+                  <a:schemeClr val="accent5"/>
+                </a:solidFill>
+              </a:rPr>
+              <a:t>Component Implementation</a:t>
+            </a:r>
+            <a:endParaRPr>
+              <a:solidFill>
+                <a:schemeClr val="accent5"/>
+              </a:solidFill>
+            </a:endParaRPr>
+          </a:p>
+        </p:txBody>
+      </p:sp>
+      <p:sp>
+        <p:nvSpPr>
+          <p:cNvPr id="129" name="Google Shape;129;p21"/>
+          <p:cNvSpPr txBox="1"/>
+          <p:nvPr>
+            <p:ph idx="1" type="body"/>
+          </p:nvPr>
+        </p:nvSpPr>
+        <p:spPr>
+          <a:xfrm>
+            <a:off x="311700" y="885950"/>
+            <a:ext cx="8520600" cy="4023300"/>
+          </a:xfrm>
+          <a:prstGeom prst="rect">
+            <a:avLst/>
+          </a:prstGeom>
+        </p:spPr>
+        <p:txBody>
+          <a:bodyPr anchorCtr="0" anchor="ctr" bIns="91425" lIns="91425" spcFirstLastPara="1" rIns="91425" wrap="square" tIns="91425">
+            <a:normAutofit/>
+          </a:bodyPr>
+          <a:lstStyle/>
+          <a:p>
+            <a:pPr indent="0" lvl="0" marL="0" rtl="0" algn="ctr">
+              <a:spcBef>
+                <a:spcPts val="0"/>
+              </a:spcBef>
+              <a:spcAft>
+                <a:spcPts val="1200"/>
+              </a:spcAft>
+              <a:buNone/>
+            </a:pPr>
+            <a:r>
+              <a:rPr lang="en" sz="2900">
+                <a:latin typeface="VT323"/>
+                <a:ea typeface="VT323"/>
+                <a:cs typeface="VT323"/>
+                <a:sym typeface="VT323"/>
+              </a:rPr>
+              <a:t>DEMO!</a:t>
+            </a:r>
+            <a:endParaRPr/>
+          </a:p>
+          <a:p>
+            <a:pPr indent="0" lvl="0" marL="0" rtl="0" algn="ctr">
+              <a:spcBef>
+                <a:spcPts val="0"/>
+              </a:spcBef>
+              <a:spcAft>
+                <a:spcPts val="0"/>
+              </a:spcAft>
+              <a:buNone/>
+            </a:pPr>
+            <a:r>
+              <a:rPr lang="en" sz="1800"/>
+              <a:t>Pvz1 → Pvz2: from a class hierarchy to components</a:t>
+            </a:r>
+            <a:endParaRPr sz="1800"/>
+          </a:p>
+        </p:txBody>
+      </p:sp>
+    </p:spTree>
+  </p:cSld>
+  <p:clrMapOvr>
+    <a:masterClrMapping/>
+  </p:clrMapOvr>
+</p:sld>
+</file>
+
+<file path=ppt/slides/slide23.xml><?xml version="1.0" encoding="utf-8"?>
+<p:sld xmlns:a="http://schemas.openxmlformats.org/drawingml/2006/main" xmlns:p="http://schemas.openxmlformats.org/presentationml/2006/main" xmlns:r="http://schemas.openxmlformats.org/officeDocument/2006/relationships">
+  <p:cSld>
+    <p:spTree>
+      <p:nvGrpSpPr>
+        <p:cNvPr id="1" name=""/>
+        <p:cNvGrpSpPr/>
+        <p:nvPr/>
+      </p:nvGrpSpPr>
+      <p:grpSpPr/>
+      <p:sp>
+        <p:nvSpPr>
+          <p:cNvPr id="2" name="Title 1"/>
+          <p:cNvSpPr>
+            <a:spLocks noGrp="1"/>
+          </p:cNvSpPr>
+          <p:nvPr>
+            <p:ph type="title"/>
+          </p:nvPr>
+        </p:nvSpPr>
+        <p:spPr/>
+        <p:txBody>
+          <a:bodyPr/>
+          <a:lstStyle/>
+          <a:p>
+            <a:pPr indent="0" lvl="0" marL="0" rtl="0" algn="l">
+              <a:spcBef>
+                <a:spcPts val="0"/>
+              </a:spcBef>
+              <a:spcAft>
+                <a:spcPts val="0"/>
+              </a:spcAft>
+              <a:buNone/>
+            </a:pPr>
+            <a:r>
+              <a:rPr lang="en"/>
+              <a:t>Try It: A New Defender From Parts</a:t>
+            </a:r>
+            <a:endParaRPr/>
+          </a:p>
+        </p:txBody>
+      </p:sp>
+      <p:sp>
+        <p:nvSpPr>
+          <p:cNvPr id="3" name="Text Placeholder 2"/>
+          <p:cNvSpPr>
+            <a:spLocks noGrp="1"/>
+          </p:cNvSpPr>
+          <p:nvPr>
+            <p:ph type="body" idx="1"/>
+          </p:nvPr>
+        </p:nvSpPr>
+        <p:spPr>
+          <a:xfrm>
+            <a:off x="311700" y="885950"/>
+            <a:ext cx="8520600" cy="1673352"/>
+          </a:xfrm>
+        </p:spPr>
+        <p:txBody>
+          <a:bodyPr/>
+          <a:lstStyle/>
+          <a:p>
+            <a:pPr indent="-330200" lvl="0" marL="457200" rtl="0" algn="l">
+              <a:spcBef>
+                <a:spcPts val="0"/>
+              </a:spcBef>
+              <a:spcAft>
+                <a:spcPts val="0"/>
+              </a:spcAft>
+              <a:buSzPts val="1600"/>
+              <a:buChar char="●"/>
+            </a:pPr>
+            <a:r>
+              <a:rPr lang="en"/>
+              <a:t>In Pvz2’s Recipes:</a:t>
+            </a:r>
+            <a:endParaRPr/>
+          </a:p>
+          <a:p>
+            <a:pPr indent="-330200" lvl="0" marL="457200" rtl="0" algn="l">
+              <a:spcBef>
+                <a:spcPts val="0"/>
+              </a:spcBef>
+              <a:spcAft>
+                <a:spcPts val="0"/>
+              </a:spcAft>
+              <a:buSzPts val="1600"/>
+              <a:buChar char="●"/>
+            </a:pPr>
+            <a:r>
+              <a:rPr lang="en"/>
+              <a:t>A defender that shoots and makes gold</a:t>
+            </a:r>
+            <a:endParaRPr/>
+          </a:p>
+          <a:p>
+            <a:pPr indent="-330200" lvl="0" marL="457200" rtl="0" algn="l">
+              <a:spcBef>
+                <a:spcPts val="0"/>
+              </a:spcBef>
+              <a:spcAft>
+                <a:spcPts val="0"/>
+              </a:spcAft>
+              <a:buSzPts val="1600"/>
+              <a:buChar char="●"/>
+            </a:pPr>
+            <a:r>
+              <a:rPr lang="en"/>
+              <a:t>Give it a card in Game1 (chest sprite)</a:t>
+            </a:r>
+            <a:endParaRPr/>
+          </a:p>
+          <a:p>
+            <a:pPr indent="-330200" lvl="0" marL="457200" rtl="0" algn="l">
+              <a:spcBef>
+                <a:spcPts val="0"/>
+              </a:spcBef>
+              <a:spcAft>
+                <a:spcPts val="0"/>
+              </a:spcAft>
+              <a:buSzPts val="1600"/>
+              <a:buChar char="●"/>
+            </a:pPr>
+            <a:r>
+              <a:rPr lang="en"/>
+              <a:t>How much new code?</a:t>
+            </a:r>
+            <a:endParaRPr/>
+          </a:p>
+        </p:txBody>
+      </p:sp>
+    </p:spTree>
+  </p:cSld>
+  <p:clrMapOvr>
+    <a:masterClrMapping/>
+  </p:clrMapOvr>
+</p:sld>
+</file>
+
+<file path=ppt/slides/slide24.xml><?xml version="1.0" encoding="utf-8"?>
 <p:sld xmlns:a="http://schemas.openxmlformats.org/drawingml/2006/main" xmlns:p="http://schemas.openxmlformats.org/presentationml/2006/main" xmlns:r="http://schemas.openxmlformats.org/officeDocument/2006/relationships">
   <p:cSld>
     <p:spTree>
@@ -12067,7 +12263,81 @@
 </p:sld>
 </file>
 
-<file path=ppt/slides/slide23.xml><?xml version="1.0" encoding="utf-8"?>
+<file path=ppt/slides/slide25.xml><?xml version="1.0" encoding="utf-8"?>
+<p:sld xmlns:a="http://schemas.openxmlformats.org/drawingml/2006/main" xmlns:p="http://schemas.openxmlformats.org/presentationml/2006/main" xmlns:r="http://schemas.openxmlformats.org/officeDocument/2006/relationships">
+  <p:cSld>
+    <p:spTree>
+      <p:nvGrpSpPr>
+        <p:cNvPr id="1" name=""/>
+        <p:cNvGrpSpPr/>
+        <p:nvPr/>
+      </p:nvGrpSpPr>
+      <p:grpSpPr/>
+      <p:sp>
+        <p:nvSpPr>
+          <p:cNvPr id="2" name="Title 1"/>
+          <p:cNvSpPr>
+            <a:spLocks noGrp="1"/>
+          </p:cNvSpPr>
+          <p:nvPr>
+            <p:ph type="title"/>
+          </p:nvPr>
+        </p:nvSpPr>
+        <p:spPr/>
+        <p:txBody>
+          <a:bodyPr/>
+          <a:lstStyle/>
+          <a:p>
+            <a:pPr indent="0" lvl="0" marL="0" rtl="0" algn="l">
+              <a:spcBef>
+                <a:spcPts val="0"/>
+              </a:spcBef>
+              <a:spcAft>
+                <a:spcPts val="0"/>
+              </a:spcAft>
+              <a:buNone/>
+            </a:pPr>
+            <a:r>
+              <a:rPr lang="en"/>
+              <a:t>Types and Instances</a:t>
+            </a:r>
+            <a:endParaRPr/>
+          </a:p>
+        </p:txBody>
+      </p:sp>
+      <p:pic>
+        <p:nvPicPr>
+          <p:cNvPr id="3" name="Picture 2" descr="type-object.png"/>
+          <p:cNvPicPr>
+            <a:picLocks noChangeAspect="1"/>
+          </p:cNvPicPr>
+          <p:nvPr/>
+        </p:nvPicPr>
+        <p:blipFill>
+          <a:blip r:embed="rId4"/>
+          <a:stretch>
+            <a:fillRect/>
+          </a:stretch>
+        </p:blipFill>
+        <p:spPr>
+          <a:xfrm>
+            <a:off x="360381" y="1051560"/>
+            <a:ext cx="8423237" cy="3977640"/>
+          </a:xfrm>
+          <a:prstGeom prst="rect">
+            <a:avLst/>
+          </a:prstGeom>
+        </p:spPr>
+      </p:pic>
+    </p:spTree>
+  </p:cSld>
+  <p:clrMapOvr>
+    <a:masterClrMapping/>
+  </p:clrMapOvr>
+</p:sld>
+</file>
+
+<file path=ppt/slides/slide26.xml><?xml version="1.0" encoding="utf-8"?>
 <p:sld xmlns:a="http://schemas.openxmlformats.org/drawingml/2006/main" xmlns:p="http://schemas.openxmlformats.org/presentationml/2006/main" xmlns:r="http://schemas.openxmlformats.org/officeDocument/2006/relationships">
   <p:cSld>
     <p:spTree>
@@ -12863,7 +13133,7 @@
 </p:sld>
 </file>
 
-<file path=ppt/slides/slide24.xml><?xml version="1.0" encoding="utf-8"?>
+<file path=ppt/slides/slide27.xml><?xml version="1.0" encoding="utf-8"?>
 <p:sld xmlns:a="http://schemas.openxmlformats.org/drawingml/2006/main" xmlns:p="http://schemas.openxmlformats.org/presentationml/2006/main" xmlns:r="http://schemas.openxmlformats.org/officeDocument/2006/relationships">
   <p:cSld>
     <p:spTree>
@@ -13180,7 +13450,7 @@
 </p:sld>
 </file>
 
-<file path=ppt/slides/slide25.xml><?xml version="1.0" encoding="utf-8"?>
+<file path=ppt/slides/slide28.xml><?xml version="1.0" encoding="utf-8"?>
 <p:sld xmlns:a="http://schemas.openxmlformats.org/drawingml/2006/main" xmlns:p="http://schemas.openxmlformats.org/presentationml/2006/main" xmlns:r="http://schemas.openxmlformats.org/officeDocument/2006/relationships">
   <p:cSld>
     <p:spTree>
@@ -13307,7 +13577,7 @@
 </p:sld>
 </file>
 
-<file path=ppt/slides/slide26.xml><?xml version="1.0" encoding="utf-8"?>
+<file path=ppt/slides/slide29.xml><?xml version="1.0" encoding="utf-8"?>
 <p:sld xmlns:a="http://schemas.openxmlformats.org/drawingml/2006/main" xmlns:p="http://schemas.openxmlformats.org/presentationml/2006/main" xmlns:r="http://schemas.openxmlformats.org/officeDocument/2006/relationships">
   <p:cSld>
     <p:spTree>
@@ -13443,1181 +13713,6 @@
   <p:clrMapOvr>
     <a:masterClrMapping/>
   </p:clrMapOvr>
-</p:sld>
-</file>
-
-<file path=ppt/slides/slide27.xml><?xml version="1.0" encoding="utf-8"?>
-<p:sld xmlns:a="http://schemas.openxmlformats.org/drawingml/2006/main" xmlns:p="http://schemas.openxmlformats.org/presentationml/2006/main" xmlns:r="http://schemas.openxmlformats.org/officeDocument/2006/relationships">
-  <p:cSld>
-    <p:spTree>
-      <p:nvGrpSpPr>
-        <p:cNvPr id="1" name=""/>
-        <p:cNvGrpSpPr/>
-        <p:nvPr/>
-      </p:nvGrpSpPr>
-      <p:grpSpPr/>
-      <p:sp>
-        <p:nvSpPr>
-          <p:cNvPr id="293" name="Google Shape;293;p45"/>
-          <p:cNvSpPr txBox="1"/>
-          <p:nvPr>
-            <p:ph type="title"/>
-          </p:nvPr>
-        </p:nvSpPr>
-        <p:spPr>
-          <a:xfrm>
-            <a:off x="311700" y="195615"/>
-            <a:ext cx="8520600" cy="572700"/>
-          </a:xfrm>
-          <a:prstGeom prst="rect">
-            <a:avLst/>
-          </a:prstGeom>
-        </p:spPr>
-        <p:txBody>
-          <a:bodyPr anchorCtr="0" anchor="t" bIns="91425" lIns="91425" spcFirstLastPara="1" rIns="91425" wrap="square" tIns="91425">
-            <a:normAutofit fontScale="90000"/>
-          </a:bodyPr>
-          <a:lstStyle/>
-          <a:p>
-            <a:pPr indent="0" lvl="0" marL="0" rtl="0" algn="l">
-              <a:spcBef>
-                <a:spcPts val="0"/>
-              </a:spcBef>
-              <a:spcAft>
-                <a:spcPts val="0"/>
-              </a:spcAft>
-              <a:buNone/>
-            </a:pPr>
-            <a:r>
-              <a:rPr lang="en">
-                <a:solidFill>
-                  <a:schemeClr val="accent5"/>
-                </a:solidFill>
-              </a:rPr>
-              <a:t>The Whole Game</a:t>
-            </a:r>
-            <a:endParaRPr>
-              <a:solidFill>
-                <a:schemeClr val="accent5"/>
-              </a:solidFill>
-            </a:endParaRPr>
-          </a:p>
-        </p:txBody>
-      </p:sp>
-      <p:sp>
-        <p:nvSpPr>
-          <p:cNvPr id="294" name="Google Shape;294;p45"/>
-          <p:cNvSpPr txBox="1"/>
-          <p:nvPr>
-            <p:ph idx="1" type="body"/>
-          </p:nvPr>
-        </p:nvSpPr>
-        <p:spPr>
-          <a:xfrm>
-            <a:off x="311700" y="885950"/>
-            <a:ext cx="8520600" cy="4023300"/>
-          </a:xfrm>
-          <a:prstGeom prst="rect">
-            <a:avLst/>
-          </a:prstGeom>
-        </p:spPr>
-        <p:txBody>
-          <a:bodyPr anchorCtr="0" anchor="t" bIns="91425" lIns="91425" spcFirstLastPara="1" rIns="91425" wrap="square" tIns="91425">
-            <a:normAutofit/>
-          </a:bodyPr>
-          <a:lstStyle/>
-          <a:p>
-            <a:pPr indent="-330200" lvl="0" marL="457200" rtl="0" algn="l">
-              <a:spcBef>
-                <a:spcPts val="0"/>
-              </a:spcBef>
-              <a:spcAft>
-                <a:spcPts val="0"/>
-              </a:spcAft>
-              <a:buSzPts val="1600"/>
-              <a:buChar char="●"/>
-            </a:pPr>
-            <a:r>
-              <a:rPr lang="en"/>
-              <a:t>A level from level1.json</a:t>
-            </a:r>
-            <a:endParaRPr/>
-          </a:p>
-          <a:p>
-            <a:pPr indent="-317500" lvl="1" marL="914400" rtl="0" algn="l">
-              <a:spcBef>
-                <a:spcPts val="0"/>
-              </a:spcBef>
-              <a:spcAft>
-                <a:spcPts val="0"/>
-              </a:spcAft>
-              <a:buSzPts val="1400"/>
-              <a:buChar char="○"/>
-            </a:pPr>
-            <a:r>
-              <a:rPr lang="en"/>
-              <a:t>Starting gold, gold from the sky, which goblin comes when</a:t>
-            </a:r>
-            <a:endParaRPr/>
-          </a:p>
-          <a:p>
-            <a:pPr indent="-330200" lvl="0" marL="457200" rtl="0" algn="l">
-              <a:spcBef>
-                <a:spcPts val="0"/>
-              </a:spcBef>
-              <a:spcAft>
-                <a:spcPts val="0"/>
-              </a:spcAft>
-              <a:buSzPts val="1600"/>
-              <a:buChar char="●"/>
-            </a:pPr>
-            <a:r>
-              <a:rPr lang="en"/>
-              <a:t>Cards recharge after use</a:t>
-            </a:r>
-            <a:endParaRPr/>
-          </a:p>
-          <a:p>
-            <a:pPr indent="-330200" lvl="0" marL="457200" rtl="0" algn="l">
-              <a:spcBef>
-                <a:spcPts val="0"/>
-              </a:spcBef>
-              <a:spcAft>
-                <a:spcPts val="0"/>
-              </a:spcAft>
-              <a:buSzPts val="1600"/>
-              <a:buChar char="●"/>
-            </a:pPr>
-            <a:r>
-              <a:rPr lang="en"/>
-              <a:t>Game states: play, and the end (won or lost)</a:t>
-            </a:r>
-            <a:endParaRPr/>
-          </a:p>
-          <a:p>
-            <a:pPr indent="-330200" lvl="0" marL="457200" rtl="0" algn="l">
-              <a:spcBef>
-                <a:spcPts val="0"/>
-              </a:spcBef>
-              <a:spcAft>
-                <a:spcPts val="0"/>
-              </a:spcAft>
-              <a:buSzPts val="1600"/>
-              <a:buChar char="●"/>
-            </a:pPr>
-            <a:r>
-              <a:rPr lang="en"/>
-              <a:t>Falling gold: a coin with one more component, Faller</a:t>
-            </a:r>
-            <a:endParaRPr/>
-          </a:p>
-        </p:txBody>
-      </p:sp>
-    </p:spTree>
-  </p:cSld>
-  <p:clrMapOvr>
-    <a:masterClrMapping/>
-  </p:clrMapOvr>
-</p:sld>
-</file>
-
-<file path=ppt/slides/slide28.xml><?xml version="1.0" encoding="utf-8"?>
-<p:sld xmlns:a="http://schemas.openxmlformats.org/drawingml/2006/main" xmlns:r="http://schemas.openxmlformats.org/officeDocument/2006/relationships" xmlns:mc="http://schemas.openxmlformats.org/markup-compatibility/2006" xmlns:mv="urn:schemas-microsoft-com:mac:vml" xmlns:p="http://schemas.openxmlformats.org/presentationml/2006/main" xmlns:c="http://schemas.openxmlformats.org/drawingml/2006/chart" xmlns:dgm="http://schemas.openxmlformats.org/drawingml/2006/diagram" xmlns:o="urn:schemas-microsoft-com:office:office" xmlns:v="urn:schemas-microsoft-com:vml" xmlns:pvml="urn:schemas-microsoft-com:office:powerpoint" xmlns:com="http://schemas.openxmlformats.org/drawingml/2006/compatibility" xmlns:p14="http://schemas.microsoft.com/office/powerpoint/2010/main" xmlns:p15="http://schemas.microsoft.com/office/powerpoint/2012/main" xmlns:ahyp="http://schemas.microsoft.com/office/drawing/2018/hyperlinkcolor">
-  <p:cSld>
-    <p:spTree>
-      <p:nvGrpSpPr>
-        <p:cNvPr id="206" name="Shape 206"/>
-        <p:cNvGrpSpPr/>
-        <p:nvPr/>
-      </p:nvGrpSpPr>
-      <p:grpSpPr>
-        <a:xfrm>
-          <a:off x="0" y="0"/>
-          <a:ext cx="0" cy="0"/>
-          <a:chOff x="0" y="0"/>
-          <a:chExt cx="0" cy="0"/>
-        </a:xfrm>
-      </p:grpSpPr>
-      <p:sp>
-        <p:nvSpPr>
-          <p:cNvPr id="207" name="Google Shape;207;p33"/>
-          <p:cNvSpPr txBox="1"/>
-          <p:nvPr>
-            <p:ph type="title"/>
-          </p:nvPr>
-        </p:nvSpPr>
-        <p:spPr>
-          <a:xfrm>
-            <a:off x="311700" y="195615"/>
-            <a:ext cx="8520600" cy="572700"/>
-          </a:xfrm>
-          <a:prstGeom prst="rect">
-            <a:avLst/>
-          </a:prstGeom>
-        </p:spPr>
-        <p:txBody>
-          <a:bodyPr anchorCtr="0" anchor="t" bIns="91425" lIns="91425" spcFirstLastPara="1" rIns="91425" wrap="square" tIns="91425">
-            <a:normAutofit fontScale="90000"/>
-          </a:bodyPr>
-          <a:lstStyle/>
-          <a:p>
-            <a:pPr indent="0" lvl="0" marL="0" rtl="0" algn="l">
-              <a:spcBef>
-                <a:spcPts val="0"/>
-              </a:spcBef>
-              <a:spcAft>
-                <a:spcPts val="0"/>
-              </a:spcAft>
-              <a:buNone/>
-            </a:pPr>
-            <a:r>
-              <a:rPr lang="en">
-                <a:solidFill>
-                  <a:schemeClr val="accent5"/>
-                </a:solidFill>
-              </a:rPr>
-              <a:t>Plants vs. Zombies Implementation</a:t>
-            </a:r>
-            <a:endParaRPr>
-              <a:solidFill>
-                <a:schemeClr val="accent5"/>
-              </a:solidFill>
-            </a:endParaRPr>
-          </a:p>
-        </p:txBody>
-      </p:sp>
-      <p:sp>
-        <p:nvSpPr>
-          <p:cNvPr id="208" name="Google Shape;208;p33"/>
-          <p:cNvSpPr txBox="1"/>
-          <p:nvPr>
-            <p:ph idx="1" type="body"/>
-          </p:nvPr>
-        </p:nvSpPr>
-        <p:spPr>
-          <a:xfrm>
-            <a:off x="311700" y="885950"/>
-            <a:ext cx="8520600" cy="4023300"/>
-          </a:xfrm>
-          <a:prstGeom prst="rect">
-            <a:avLst/>
-          </a:prstGeom>
-        </p:spPr>
-        <p:txBody>
-          <a:bodyPr anchorCtr="0" anchor="ctr" bIns="91425" lIns="91425" spcFirstLastPara="1" rIns="91425" wrap="square" tIns="91425">
-            <a:normAutofit/>
-          </a:bodyPr>
-          <a:lstStyle/>
-          <a:p>
-            <a:pPr indent="0" lvl="0" marL="0" rtl="0" algn="ctr">
-              <a:spcBef>
-                <a:spcPts val="0"/>
-              </a:spcBef>
-              <a:spcAft>
-                <a:spcPts val="1200"/>
-              </a:spcAft>
-              <a:buNone/>
-            </a:pPr>
-            <a:r>
-              <a:rPr lang="en" sz="2900">
-                <a:latin typeface="VT323"/>
-                <a:ea typeface="VT323"/>
-                <a:cs typeface="VT323"/>
-                <a:sym typeface="VT323"/>
-              </a:rPr>
-              <a:t>DEMO!</a:t>
-            </a:r>
-            <a:endParaRPr/>
-          </a:p>
-          <a:p>
-            <a:pPr indent="0" lvl="0" marL="0" rtl="0" algn="ctr">
-              <a:spcBef>
-                <a:spcPts val="0"/>
-              </a:spcBef>
-              <a:spcAft>
-                <a:spcPts val="0"/>
-              </a:spcAft>
-              <a:buNone/>
-            </a:pPr>
-            <a:r>
-              <a:rPr lang="en" sz="1800"/>
-              <a:t>Pvz4: the whole game</a:t>
-            </a:r>
-            <a:endParaRPr sz="1800"/>
-          </a:p>
-        </p:txBody>
-      </p:sp>
-    </p:spTree>
-  </p:cSld>
-  <p:clrMapOvr>
-    <a:masterClrMapping/>
-  </p:clrMapOvr>
-</p:sld>
-</file>
-
-<file path=ppt/slides/slide29.xml><?xml version="1.0" encoding="utf-8"?>
-<p:sld xmlns:a="http://schemas.openxmlformats.org/drawingml/2006/main" xmlns:r="http://schemas.openxmlformats.org/officeDocument/2006/relationships" xmlns:mc="http://schemas.openxmlformats.org/markup-compatibility/2006" xmlns:mv="urn:schemas-microsoft-com:mac:vml" xmlns:p="http://schemas.openxmlformats.org/presentationml/2006/main" xmlns:c="http://schemas.openxmlformats.org/drawingml/2006/chart" xmlns:dgm="http://schemas.openxmlformats.org/drawingml/2006/diagram" xmlns:o="urn:schemas-microsoft-com:office:office" xmlns:v="urn:schemas-microsoft-com:vml" xmlns:pvml="urn:schemas-microsoft-com:office:powerpoint" xmlns:com="http://schemas.openxmlformats.org/drawingml/2006/compatibility" xmlns:p14="http://schemas.microsoft.com/office/powerpoint/2010/main" xmlns:p15="http://schemas.microsoft.com/office/powerpoint/2012/main" xmlns:ahyp="http://schemas.microsoft.com/office/drawing/2018/hyperlinkcolor">
-  <p:cSld>
-    <p:spTree>
-      <p:nvGrpSpPr>
-        <p:cNvPr id="292" name="Shape 292"/>
-        <p:cNvGrpSpPr/>
-        <p:nvPr/>
-      </p:nvGrpSpPr>
-      <p:grpSpPr>
-        <a:xfrm>
-          <a:off x="0" y="0"/>
-          <a:ext cx="0" cy="0"/>
-          <a:chOff x="0" y="0"/>
-          <a:chExt cx="0" cy="0"/>
-        </a:xfrm>
-      </p:grpSpPr>
-      <p:sp>
-        <p:nvSpPr>
-          <p:cNvPr id="293" name="Google Shape;293;p45"/>
-          <p:cNvSpPr txBox="1"/>
-          <p:nvPr>
-            <p:ph type="title"/>
-          </p:nvPr>
-        </p:nvSpPr>
-        <p:spPr>
-          <a:xfrm>
-            <a:off x="311700" y="195615"/>
-            <a:ext cx="8520600" cy="572700"/>
-          </a:xfrm>
-          <a:prstGeom prst="rect">
-            <a:avLst/>
-          </a:prstGeom>
-        </p:spPr>
-        <p:txBody>
-          <a:bodyPr anchorCtr="0" anchor="t" bIns="91425" lIns="91425" spcFirstLastPara="1" rIns="91425" wrap="square" tIns="91425">
-            <a:normAutofit fontScale="90000"/>
-          </a:bodyPr>
-          <a:lstStyle/>
-          <a:p>
-            <a:pPr indent="0" lvl="0" marL="0" rtl="0" algn="l">
-              <a:spcBef>
-                <a:spcPts val="0"/>
-              </a:spcBef>
-              <a:spcAft>
-                <a:spcPts val="0"/>
-              </a:spcAft>
-              <a:buNone/>
-            </a:pPr>
-            <a:r>
-              <a:rPr lang="en">
-                <a:solidFill>
-                  <a:schemeClr val="accent5"/>
-                </a:solidFill>
-              </a:rPr>
-              <a:t>Exercises</a:t>
-            </a:r>
-            <a:endParaRPr>
-              <a:solidFill>
-                <a:schemeClr val="accent5"/>
-              </a:solidFill>
-            </a:endParaRPr>
-          </a:p>
-        </p:txBody>
-      </p:sp>
-      <p:sp>
-        <p:nvSpPr>
-          <p:cNvPr id="294" name="Google Shape;294;p45"/>
-          <p:cNvSpPr txBox="1"/>
-          <p:nvPr>
-            <p:ph idx="1" type="body"/>
-          </p:nvPr>
-        </p:nvSpPr>
-        <p:spPr>
-          <a:xfrm>
-            <a:off x="311700" y="885950"/>
-            <a:ext cx="8520600" cy="4023300"/>
-          </a:xfrm>
-          <a:prstGeom prst="rect">
-            <a:avLst/>
-          </a:prstGeom>
-        </p:spPr>
-        <p:txBody>
-          <a:bodyPr anchorCtr="0" anchor="t" bIns="91425" lIns="91425" spcFirstLastPara="1" rIns="91425" wrap="square" tIns="91425">
-            <a:normAutofit/>
-          </a:bodyPr>
-          <a:lstStyle/>
-          <a:p>
-            <a:pPr indent="-330200" lvl="0" marL="457200" rtl="0" algn="l">
-              <a:spcBef>
-                <a:spcPts val="0"/>
-              </a:spcBef>
-              <a:spcAft>
-                <a:spcPts val="0"/>
-              </a:spcAft>
-              <a:buSzPts val="1600"/>
-              <a:buChar char="●"/>
-            </a:pPr>
-            <a:r>
-              <a:rPr lang="en"/>
-              <a:t>Start from Pvz4, the finished game</a:t>
-            </a:r>
-            <a:endParaRPr/>
-          </a:p>
-          <a:p>
-            <a:pPr indent="-330200" lvl="0" marL="457200" rtl="0" algn="l">
-              <a:spcBef>
-                <a:spcPts val="0"/>
-              </a:spcBef>
-              <a:spcAft>
-                <a:spcPts val="0"/>
-              </a:spcAft>
-              <a:buSzPts val="1600"/>
-              <a:buChar char="●"/>
-            </a:pPr>
-            <a:r>
-              <a:rPr lang="en"/>
-              <a:t>New types: a Guard and a Runner. Any code?</a:t>
-            </a:r>
-            <a:endParaRPr/>
-          </a:p>
-          <a:p>
-            <a:pPr indent="-330200" lvl="0" marL="457200" rtl="0" algn="l">
-              <a:spcBef>
-                <a:spcPts val="0"/>
-              </a:spcBef>
-              <a:spcAft>
-                <a:spcPts val="0"/>
-              </a:spcAft>
-              <a:buSzPts val="1600"/>
-              <a:buChar char="●"/>
-            </a:pPr>
-            <a:r>
-              <a:rPr lang="en"/>
-              <a:t>Frost Wizard: arrows that slow goblins down</a:t>
-            </a:r>
-            <a:endParaRPr/>
-          </a:p>
-          <a:p>
-            <a:pPr indent="-317500" lvl="1" marL="914400" rtl="0" algn="l">
-              <a:spcBef>
-                <a:spcPts val="0"/>
-              </a:spcBef>
-              <a:spcAft>
-                <a:spcPts val="0"/>
-              </a:spcAft>
-              <a:buSzPts val="1400"/>
-              <a:buChar char="○"/>
-            </a:pPr>
-            <a:r>
-              <a:rPr lang="en"/>
-              <a:t>Which component, where, and how does the data say so?</a:t>
-            </a:r>
-            <a:endParaRPr/>
-          </a:p>
-          <a:p>
-            <a:pPr indent="-330200" lvl="0" marL="457200" rtl="0" algn="l">
-              <a:spcBef>
-                <a:spcPts val="0"/>
-              </a:spcBef>
-              <a:spcAft>
-                <a:spcPts val="0"/>
-              </a:spcAft>
-              <a:buSzPts val="1600"/>
-              <a:buChar char="●"/>
-            </a:pPr>
-            <a:r>
-              <a:rPr lang="en"/>
-              <a:t>A shield for defenders. Can you reuse Armour?</a:t>
-            </a:r>
-            <a:endParaRPr/>
-          </a:p>
-          <a:p>
-            <a:pPr indent="-330200" lvl="0" marL="457200" rtl="0" algn="l">
-              <a:spcBef>
-                <a:spcPts val="0"/>
-              </a:spcBef>
-              <a:spcAft>
-                <a:spcPts val="0"/>
-              </a:spcAft>
-              <a:buSzPts val="1600"/>
-              <a:buChar char="●"/>
-            </a:pPr>
-            <a:r>
-              <a:rPr lang="en"/>
-              <a:t>A pitchfork that sends the defender you click back into the castle</a:t>
-            </a:r>
-            <a:endParaRPr/>
-          </a:p>
-        </p:txBody>
-      </p:sp>
-    </p:spTree>
-  </p:cSld>
-  <p:clrMapOvr>
-    <a:masterClrMapping/>
-  </p:clrMapOvr>
-  <p:timing>
-    <p:tnLst>
-      <p:par>
-        <p:cTn dur="indefinite" nodeType="tmRoot" restart="never">
-          <p:childTnLst>
-            <p:seq concurrent="1" nextAc="seek">
-              <p:cTn dur="indefinite" id="2" nodeType="mainSeq">
-                <p:childTnLst>
-                  <p:par>
-                    <p:cTn fill="hold">
-                      <p:stCondLst>
-                        <p:cond delay="indefinite"/>
-                      </p:stCondLst>
-                      <p:childTnLst>
-                        <p:par>
-                          <p:cTn fill="hold">
-                            <p:stCondLst>
-                              <p:cond delay="0"/>
-                            </p:stCondLst>
-                            <p:childTnLst>
-                              <p:par>
-                                <p:cTn fill="hold" nodeType="clickEffect" presetClass="entr" presetID="1" presetSubtype="0">
-                                  <p:stCondLst>
-                                    <p:cond delay="0"/>
-                                  </p:stCondLst>
-                                  <p:childTnLst>
-                                    <p:set>
-                                      <p:cBhvr>
-                                        <p:cTn dur="1" fill="hold">
-                                          <p:stCondLst>
-                                            <p:cond delay="0"/>
-                                          </p:stCondLst>
-                                        </p:cTn>
-                                        <p:tgtEl>
-                                          <p:spTgt spid="294">
-                                            <p:txEl>
-                                              <p:pRg end="0" st="0"/>
-                                            </p:txEl>
-                                          </p:spTgt>
-                                        </p:tgtEl>
-                                        <p:attrNameLst>
-                                          <p:attrName>style.visibility</p:attrName>
-                                        </p:attrNameLst>
-                                      </p:cBhvr>
-                                      <p:to>
-                                        <p:strVal val="visible"/>
-                                      </p:to>
-                                    </p:set>
-                                  </p:childTnLst>
-                                </p:cTn>
-                              </p:par>
-                            </p:childTnLst>
-                          </p:cTn>
-                        </p:par>
-                      </p:childTnLst>
-                    </p:cTn>
-                  </p:par>
-                  <p:par>
-                    <p:cTn fill="hold">
-                      <p:stCondLst>
-                        <p:cond delay="indefinite"/>
-                      </p:stCondLst>
-                      <p:childTnLst>
-                        <p:par>
-                          <p:cTn fill="hold">
-                            <p:stCondLst>
-                              <p:cond delay="0"/>
-                            </p:stCondLst>
-                            <p:childTnLst>
-                              <p:par>
-                                <p:cTn fill="hold" nodeType="clickEffect" presetClass="entr" presetID="1" presetSubtype="0">
-                                  <p:stCondLst>
-                                    <p:cond delay="0"/>
-                                  </p:stCondLst>
-                                  <p:childTnLst>
-                                    <p:set>
-                                      <p:cBhvr>
-                                        <p:cTn dur="1" fill="hold">
-                                          <p:stCondLst>
-                                            <p:cond delay="0"/>
-                                          </p:stCondLst>
-                                        </p:cTn>
-                                        <p:tgtEl>
-                                          <p:spTgt spid="294">
-                                            <p:txEl>
-                                              <p:pRg end="1" st="1"/>
-                                            </p:txEl>
-                                          </p:spTgt>
-                                        </p:tgtEl>
-                                        <p:attrNameLst>
-                                          <p:attrName>style.visibility</p:attrName>
-                                        </p:attrNameLst>
-                                      </p:cBhvr>
-                                      <p:to>
-                                        <p:strVal val="visible"/>
-                                      </p:to>
-                                    </p:set>
-                                  </p:childTnLst>
-                                </p:cTn>
-                              </p:par>
-                            </p:childTnLst>
-                          </p:cTn>
-                        </p:par>
-                      </p:childTnLst>
-                    </p:cTn>
-                  </p:par>
-                  <p:par>
-                    <p:cTn fill="hold">
-                      <p:stCondLst>
-                        <p:cond delay="indefinite"/>
-                      </p:stCondLst>
-                      <p:childTnLst>
-                        <p:par>
-                          <p:cTn fill="hold">
-                            <p:stCondLst>
-                              <p:cond delay="0"/>
-                            </p:stCondLst>
-                            <p:childTnLst>
-                              <p:par>
-                                <p:cTn fill="hold" nodeType="clickEffect" presetClass="entr" presetID="1" presetSubtype="0">
-                                  <p:stCondLst>
-                                    <p:cond delay="0"/>
-                                  </p:stCondLst>
-                                  <p:childTnLst>
-                                    <p:set>
-                                      <p:cBhvr>
-                                        <p:cTn dur="1" fill="hold">
-                                          <p:stCondLst>
-                                            <p:cond delay="0"/>
-                                          </p:stCondLst>
-                                        </p:cTn>
-                                        <p:tgtEl>
-                                          <p:spTgt spid="294">
-                                            <p:txEl>
-                                              <p:pRg end="2" st="2"/>
-                                            </p:txEl>
-                                          </p:spTgt>
-                                        </p:tgtEl>
-                                        <p:attrNameLst>
-                                          <p:attrName>style.visibility</p:attrName>
-                                        </p:attrNameLst>
-                                      </p:cBhvr>
-                                      <p:to>
-                                        <p:strVal val="visible"/>
-                                      </p:to>
-                                    </p:set>
-                                  </p:childTnLst>
-                                </p:cTn>
-                              </p:par>
-                            </p:childTnLst>
-                          </p:cTn>
-                        </p:par>
-                      </p:childTnLst>
-                    </p:cTn>
-                  </p:par>
-                  <p:par>
-                    <p:cTn fill="hold">
-                      <p:stCondLst>
-                        <p:cond delay="indefinite"/>
-                      </p:stCondLst>
-                      <p:childTnLst>
-                        <p:par>
-                          <p:cTn fill="hold">
-                            <p:stCondLst>
-                              <p:cond delay="0"/>
-                            </p:stCondLst>
-                            <p:childTnLst>
-                              <p:par>
-                                <p:cTn fill="hold" nodeType="clickEffect" presetClass="entr" presetID="1" presetSubtype="0">
-                                  <p:stCondLst>
-                                    <p:cond delay="0"/>
-                                  </p:stCondLst>
-                                  <p:childTnLst>
-                                    <p:set>
-                                      <p:cBhvr>
-                                        <p:cTn dur="1" fill="hold">
-                                          <p:stCondLst>
-                                            <p:cond delay="0"/>
-                                          </p:stCondLst>
-                                        </p:cTn>
-                                        <p:tgtEl>
-                                          <p:spTgt spid="294">
-                                            <p:txEl>
-                                              <p:pRg end="3" st="3"/>
-                                            </p:txEl>
-                                          </p:spTgt>
-                                        </p:tgtEl>
-                                        <p:attrNameLst>
-                                          <p:attrName>style.visibility</p:attrName>
-                                        </p:attrNameLst>
-                                      </p:cBhvr>
-                                      <p:to>
-                                        <p:strVal val="visible"/>
-                                      </p:to>
-                                    </p:set>
-                                  </p:childTnLst>
-                                </p:cTn>
-                              </p:par>
-                            </p:childTnLst>
-                          </p:cTn>
-                        </p:par>
-                      </p:childTnLst>
-                    </p:cTn>
-                  </p:par>
-                  <p:par>
-                    <p:cTn fill="hold">
-                      <p:stCondLst>
-                        <p:cond delay="indefinite"/>
-                      </p:stCondLst>
-                      <p:childTnLst>
-                        <p:par>
-                          <p:cTn fill="hold">
-                            <p:stCondLst>
-                              <p:cond delay="0"/>
-                            </p:stCondLst>
-                            <p:childTnLst>
-                              <p:par>
-                                <p:cTn fill="hold" nodeType="clickEffect" presetClass="entr" presetID="1" presetSubtype="0">
-                                  <p:stCondLst>
-                                    <p:cond delay="0"/>
-                                  </p:stCondLst>
-                                  <p:childTnLst>
-                                    <p:set>
-                                      <p:cBhvr>
-                                        <p:cTn dur="1" fill="hold">
-                                          <p:stCondLst>
-                                            <p:cond delay="0"/>
-                                          </p:stCondLst>
-                                        </p:cTn>
-                                        <p:tgtEl>
-                                          <p:spTgt spid="294">
-                                            <p:txEl>
-                                              <p:pRg end="4" st="4"/>
-                                            </p:txEl>
-                                          </p:spTgt>
-                                        </p:tgtEl>
-                                        <p:attrNameLst>
-                                          <p:attrName>style.visibility</p:attrName>
-                                        </p:attrNameLst>
-                                      </p:cBhvr>
-                                      <p:to>
-                                        <p:strVal val="visible"/>
-                                      </p:to>
-                                    </p:set>
-                                  </p:childTnLst>
-                                </p:cTn>
-                              </p:par>
-                            </p:childTnLst>
-                          </p:cTn>
-                        </p:par>
-                      </p:childTnLst>
-                    </p:cTn>
-                  </p:par>
-                  <p:par>
-                    <p:cTn fill="hold">
-                      <p:stCondLst>
-                        <p:cond delay="indefinite"/>
-                      </p:stCondLst>
-                      <p:childTnLst>
-                        <p:par>
-                          <p:cTn fill="hold">
-                            <p:stCondLst>
-                              <p:cond delay="0"/>
-                            </p:stCondLst>
-                            <p:childTnLst>
-                              <p:par>
-                                <p:cTn fill="hold" nodeType="clickEffect" presetClass="entr" presetID="1" presetSubtype="0">
-                                  <p:stCondLst>
-                                    <p:cond delay="0"/>
-                                  </p:stCondLst>
-                                  <p:childTnLst>
-                                    <p:set>
-                                      <p:cBhvr>
-                                        <p:cTn dur="1" fill="hold">
-                                          <p:stCondLst>
-                                            <p:cond delay="0"/>
-                                          </p:stCondLst>
-                                        </p:cTn>
-                                        <p:tgtEl>
-                                          <p:spTgt spid="294">
-                                            <p:txEl>
-                                              <p:pRg end="5" st="5"/>
-                                            </p:txEl>
-                                          </p:spTgt>
-                                        </p:tgtEl>
-                                        <p:attrNameLst>
-                                          <p:attrName>style.visibility</p:attrName>
-                                        </p:attrNameLst>
-                                      </p:cBhvr>
-                                      <p:to>
-                                        <p:strVal val="visible"/>
-                                      </p:to>
-                                    </p:set>
-                                  </p:childTnLst>
-                                </p:cTn>
-                              </p:par>
-                            </p:childTnLst>
-                          </p:cTn>
-                        </p:par>
-                      </p:childTnLst>
-                    </p:cTn>
-                  </p:par>
-                  <p:par>
-                    <p:cTn fill="hold">
-                      <p:stCondLst>
-                        <p:cond delay="indefinite"/>
-                      </p:stCondLst>
-                      <p:childTnLst>
-                        <p:par>
-                          <p:cTn fill="hold">
-                            <p:stCondLst>
-                              <p:cond delay="0"/>
-                            </p:stCondLst>
-                            <p:childTnLst>
-                              <p:par>
-                                <p:cTn fill="hold" nodeType="clickEffect" presetClass="entr" presetID="1" presetSubtype="0">
-                                  <p:stCondLst>
-                                    <p:cond delay="0"/>
-                                  </p:stCondLst>
-                                  <p:childTnLst>
-                                    <p:set>
-                                      <p:cBhvr>
-                                        <p:cTn dur="1" fill="hold">
-                                          <p:stCondLst>
-                                            <p:cond delay="0"/>
-                                          </p:stCondLst>
-                                        </p:cTn>
-                                        <p:tgtEl>
-                                          <p:spTgt spid="294">
-                                            <p:txEl>
-                                              <p:pRg end="6" st="6"/>
-                                            </p:txEl>
-                                          </p:spTgt>
-                                        </p:tgtEl>
-                                        <p:attrNameLst>
-                                          <p:attrName>style.visibility</p:attrName>
-                                        </p:attrNameLst>
-                                      </p:cBhvr>
-                                      <p:to>
-                                        <p:strVal val="visible"/>
-                                      </p:to>
-                                    </p:set>
-                                  </p:childTnLst>
-                                </p:cTn>
-                              </p:par>
-                            </p:childTnLst>
-                          </p:cTn>
-                        </p:par>
-                      </p:childTnLst>
-                    </p:cTn>
-                  </p:par>
-                  <p:par>
-                    <p:cTn fill="hold">
-                      <p:stCondLst>
-                        <p:cond delay="indefinite"/>
-                      </p:stCondLst>
-                      <p:childTnLst>
-                        <p:par>
-                          <p:cTn fill="hold">
-                            <p:stCondLst>
-                              <p:cond delay="0"/>
-                            </p:stCondLst>
-                            <p:childTnLst>
-                              <p:par>
-                                <p:cTn fill="hold" nodeType="clickEffect" presetClass="entr" presetID="1" presetSubtype="0">
-                                  <p:stCondLst>
-                                    <p:cond delay="0"/>
-                                  </p:stCondLst>
-                                  <p:childTnLst>
-                                    <p:set>
-                                      <p:cBhvr>
-                                        <p:cTn dur="1" fill="hold">
-                                          <p:stCondLst>
-                                            <p:cond delay="0"/>
-                                          </p:stCondLst>
-                                        </p:cTn>
-                                        <p:tgtEl>
-                                          <p:spTgt spid="294">
-                                            <p:txEl>
-                                              <p:pRg end="7" st="7"/>
-                                            </p:txEl>
-                                          </p:spTgt>
-                                        </p:tgtEl>
-                                        <p:attrNameLst>
-                                          <p:attrName>style.visibility</p:attrName>
-                                        </p:attrNameLst>
-                                      </p:cBhvr>
-                                      <p:to>
-                                        <p:strVal val="visible"/>
-                                      </p:to>
-                                    </p:set>
-                                  </p:childTnLst>
-                                </p:cTn>
-                              </p:par>
-                            </p:childTnLst>
-                          </p:cTn>
-                        </p:par>
-                      </p:childTnLst>
-                    </p:cTn>
-                  </p:par>
-                  <p:par>
-                    <p:cTn fill="hold">
-                      <p:stCondLst>
-                        <p:cond delay="indefinite"/>
-                      </p:stCondLst>
-                      <p:childTnLst>
-                        <p:par>
-                          <p:cTn fill="hold">
-                            <p:stCondLst>
-                              <p:cond delay="0"/>
-                            </p:stCondLst>
-                            <p:childTnLst>
-                              <p:par>
-                                <p:cTn fill="hold" nodeType="clickEffect" presetClass="entr" presetID="1" presetSubtype="0">
-                                  <p:stCondLst>
-                                    <p:cond delay="0"/>
-                                  </p:stCondLst>
-                                  <p:childTnLst>
-                                    <p:set>
-                                      <p:cBhvr>
-                                        <p:cTn dur="1" fill="hold">
-                                          <p:stCondLst>
-                                            <p:cond delay="0"/>
-                                          </p:stCondLst>
-                                        </p:cTn>
-                                        <p:tgtEl>
-                                          <p:spTgt spid="294">
-                                            <p:txEl>
-                                              <p:pRg end="8" st="8"/>
-                                            </p:txEl>
-                                          </p:spTgt>
-                                        </p:tgtEl>
-                                        <p:attrNameLst>
-                                          <p:attrName>style.visibility</p:attrName>
-                                        </p:attrNameLst>
-                                      </p:cBhvr>
-                                      <p:to>
-                                        <p:strVal val="visible"/>
-                                      </p:to>
-                                    </p:set>
-                                  </p:childTnLst>
-                                </p:cTn>
-                              </p:par>
-                            </p:childTnLst>
-                          </p:cTn>
-                        </p:par>
-                      </p:childTnLst>
-                    </p:cTn>
-                  </p:par>
-                  <p:par>
-                    <p:cTn fill="hold">
-                      <p:stCondLst>
-                        <p:cond delay="indefinite"/>
-                      </p:stCondLst>
-                      <p:childTnLst>
-                        <p:par>
-                          <p:cTn fill="hold">
-                            <p:stCondLst>
-                              <p:cond delay="0"/>
-                            </p:stCondLst>
-                            <p:childTnLst>
-                              <p:par>
-                                <p:cTn fill="hold" nodeType="clickEffect" presetClass="entr" presetID="1" presetSubtype="0">
-                                  <p:stCondLst>
-                                    <p:cond delay="0"/>
-                                  </p:stCondLst>
-                                  <p:childTnLst>
-                                    <p:set>
-                                      <p:cBhvr>
-                                        <p:cTn dur="1" fill="hold">
-                                          <p:stCondLst>
-                                            <p:cond delay="0"/>
-                                          </p:stCondLst>
-                                        </p:cTn>
-                                        <p:tgtEl>
-                                          <p:spTgt spid="294">
-                                            <p:txEl>
-                                              <p:pRg end="9" st="9"/>
-                                            </p:txEl>
-                                          </p:spTgt>
-                                        </p:tgtEl>
-                                        <p:attrNameLst>
-                                          <p:attrName>style.visibility</p:attrName>
-                                        </p:attrNameLst>
-                                      </p:cBhvr>
-                                      <p:to>
-                                        <p:strVal val="visible"/>
-                                      </p:to>
-                                    </p:set>
-                                  </p:childTnLst>
-                                </p:cTn>
-                              </p:par>
-                            </p:childTnLst>
-                          </p:cTn>
-                        </p:par>
-                      </p:childTnLst>
-                    </p:cTn>
-                  </p:par>
-                  <p:par>
-                    <p:cTn fill="hold">
-                      <p:stCondLst>
-                        <p:cond delay="indefinite"/>
-                      </p:stCondLst>
-                      <p:childTnLst>
-                        <p:par>
-                          <p:cTn fill="hold">
-                            <p:stCondLst>
-                              <p:cond delay="0"/>
-                            </p:stCondLst>
-                            <p:childTnLst>
-                              <p:par>
-                                <p:cTn fill="hold" nodeType="clickEffect" presetClass="entr" presetID="1" presetSubtype="0">
-                                  <p:stCondLst>
-                                    <p:cond delay="0"/>
-                                  </p:stCondLst>
-                                  <p:childTnLst>
-                                    <p:set>
-                                      <p:cBhvr>
-                                        <p:cTn dur="1" fill="hold">
-                                          <p:stCondLst>
-                                            <p:cond delay="0"/>
-                                          </p:stCondLst>
-                                        </p:cTn>
-                                        <p:tgtEl>
-                                          <p:spTgt spid="294">
-                                            <p:txEl>
-                                              <p:pRg end="10" st="10"/>
-                                            </p:txEl>
-                                          </p:spTgt>
-                                        </p:tgtEl>
-                                        <p:attrNameLst>
-                                          <p:attrName>style.visibility</p:attrName>
-                                        </p:attrNameLst>
-                                      </p:cBhvr>
-                                      <p:to>
-                                        <p:strVal val="visible"/>
-                                      </p:to>
-                                    </p:set>
-                                  </p:childTnLst>
-                                </p:cTn>
-                              </p:par>
-                            </p:childTnLst>
-                          </p:cTn>
-                        </p:par>
-                      </p:childTnLst>
-                    </p:cTn>
-                  </p:par>
-                  <p:par>
-                    <p:cTn fill="hold">
-                      <p:stCondLst>
-                        <p:cond delay="indefinite"/>
-                      </p:stCondLst>
-                      <p:childTnLst>
-                        <p:par>
-                          <p:cTn fill="hold">
-                            <p:stCondLst>
-                              <p:cond delay="0"/>
-                            </p:stCondLst>
-                            <p:childTnLst>
-                              <p:par>
-                                <p:cTn fill="hold" nodeType="clickEffect" presetClass="entr" presetID="1" presetSubtype="0">
-                                  <p:stCondLst>
-                                    <p:cond delay="0"/>
-                                  </p:stCondLst>
-                                  <p:childTnLst>
-                                    <p:set>
-                                      <p:cBhvr>
-                                        <p:cTn dur="1" fill="hold">
-                                          <p:stCondLst>
-                                            <p:cond delay="0"/>
-                                          </p:stCondLst>
-                                        </p:cTn>
-                                        <p:tgtEl>
-                                          <p:spTgt spid="294">
-                                            <p:txEl>
-                                              <p:pRg end="11" st="11"/>
-                                            </p:txEl>
-                                          </p:spTgt>
-                                        </p:tgtEl>
-                                        <p:attrNameLst>
-                                          <p:attrName>style.visibility</p:attrName>
-                                        </p:attrNameLst>
-                                      </p:cBhvr>
-                                      <p:to>
-                                        <p:strVal val="visible"/>
-                                      </p:to>
-                                    </p:set>
-                                  </p:childTnLst>
-                                </p:cTn>
-                              </p:par>
-                            </p:childTnLst>
-                          </p:cTn>
-                        </p:par>
-                      </p:childTnLst>
-                    </p:cTn>
-                  </p:par>
-                  <p:par>
-                    <p:cTn fill="hold">
-                      <p:stCondLst>
-                        <p:cond delay="indefinite"/>
-                      </p:stCondLst>
-                      <p:childTnLst>
-                        <p:par>
-                          <p:cTn fill="hold">
-                            <p:stCondLst>
-                              <p:cond delay="0"/>
-                            </p:stCondLst>
-                            <p:childTnLst>
-                              <p:par>
-                                <p:cTn fill="hold" nodeType="clickEffect" presetClass="entr" presetID="1" presetSubtype="0">
-                                  <p:stCondLst>
-                                    <p:cond delay="0"/>
-                                  </p:stCondLst>
-                                  <p:childTnLst>
-                                    <p:set>
-                                      <p:cBhvr>
-                                        <p:cTn dur="1" fill="hold">
-                                          <p:stCondLst>
-                                            <p:cond delay="0"/>
-                                          </p:stCondLst>
-                                        </p:cTn>
-                                        <p:tgtEl>
-                                          <p:spTgt spid="294">
-                                            <p:txEl>
-                                              <p:pRg end="12" st="12"/>
-                                            </p:txEl>
-                                          </p:spTgt>
-                                        </p:tgtEl>
-                                        <p:attrNameLst>
-                                          <p:attrName>style.visibility</p:attrName>
-                                        </p:attrNameLst>
-                                      </p:cBhvr>
-                                      <p:to>
-                                        <p:strVal val="visible"/>
-                                      </p:to>
-                                    </p:set>
-                                  </p:childTnLst>
-                                </p:cTn>
-                              </p:par>
-                            </p:childTnLst>
-                          </p:cTn>
-                        </p:par>
-                      </p:childTnLst>
-                    </p:cTn>
-                  </p:par>
-                </p:childTnLst>
-              </p:cTn>
-              <p:prevCondLst>
-                <p:cond evt="onPrev">
-                  <p:tgtEl>
-                    <p:sldTgt/>
-                  </p:tgtEl>
-                </p:cond>
-              </p:prevCondLst>
-              <p:nextCondLst>
-                <p:cond evt="onNext">
-                  <p:tgtEl>
-                    <p:sldTgt/>
-                  </p:tgtEl>
-                </p:cond>
-              </p:nextCondLst>
-            </p:seq>
-          </p:childTnLst>
-        </p:cTn>
-      </p:par>
-    </p:tnLst>
-  </p:timing>
 </p:sld>
 </file>
 
@@ -14711,22 +13806,15 @@
 </file>
 
 <file path=ppt/slides/slide30.xml><?xml version="1.0" encoding="utf-8"?>
-<p:sld xmlns:a="http://schemas.openxmlformats.org/drawingml/2006/main" xmlns:r="http://schemas.openxmlformats.org/officeDocument/2006/relationships" xmlns:mc="http://schemas.openxmlformats.org/markup-compatibility/2006" xmlns:mv="urn:schemas-microsoft-com:mac:vml" xmlns:p="http://schemas.openxmlformats.org/presentationml/2006/main" xmlns:c="http://schemas.openxmlformats.org/drawingml/2006/chart" xmlns:dgm="http://schemas.openxmlformats.org/drawingml/2006/diagram" xmlns:o="urn:schemas-microsoft-com:office:office" xmlns:v="urn:schemas-microsoft-com:vml" xmlns:pvml="urn:schemas-microsoft-com:office:powerpoint" xmlns:com="http://schemas.openxmlformats.org/drawingml/2006/compatibility" xmlns:p14="http://schemas.microsoft.com/office/powerpoint/2010/main" xmlns:p15="http://schemas.microsoft.com/office/powerpoint/2012/main" xmlns:ahyp="http://schemas.microsoft.com/office/drawing/2018/hyperlinkcolor">
+<p:sld xmlns:a="http://schemas.openxmlformats.org/drawingml/2006/main" xmlns:p="http://schemas.openxmlformats.org/presentationml/2006/main" xmlns:r="http://schemas.openxmlformats.org/officeDocument/2006/relationships">
   <p:cSld>
     <p:spTree>
       <p:nvGrpSpPr>
-        <p:cNvPr id="292" name="Shape 292"/>
+        <p:cNvPr id="1" name=""/>
         <p:cNvGrpSpPr/>
         <p:nvPr/>
       </p:nvGrpSpPr>
-      <p:grpSpPr>
-        <a:xfrm>
-          <a:off x="0" y="0"/>
-          <a:ext cx="0" cy="0"/>
-          <a:chOff x="0" y="0"/>
-          <a:chExt cx="0" cy="0"/>
-        </a:xfrm>
-      </p:grpSpPr>
+      <p:grpSpPr/>
       <p:sp>
         <p:nvSpPr>
           <p:cNvPr id="293" name="Google Shape;293;p45"/>
@@ -14765,7 +13853,7 @@
                   <a:schemeClr val="accent5"/>
                 </a:solidFill>
               </a:rPr>
-              <a:t>Exercise: Refactor (Stretch)</a:t>
+              <a:t>The Whole Game</a:t>
             </a:r>
             <a:endParaRPr>
               <a:solidFill>
@@ -14810,7 +13898,24 @@
             </a:pPr>
             <a:r>
               <a:rPr lang="en"/>
-              <a:t>DefenderType.Create has an if for every component</a:t>
+              <a:t>A level from level1.json</a:t>
+            </a:r>
+            <a:endParaRPr/>
+          </a:p>
+          <a:p>
+            <a:pPr indent="-317500" lvl="1" marL="914400" rtl="0" algn="l">
+              <a:spcBef>
+                <a:spcPts val="0"/>
+              </a:spcBef>
+              <a:spcAft>
+                <a:spcPts val="0"/>
+              </a:spcAft>
+              <a:buSzPts val="1400"/>
+              <a:buChar char="○"/>
+            </a:pPr>
+            <a:r>
+              <a:rPr lang="en"/>
+              <a:t>Starting gold, gold from the sky, which goblin comes when</a:t>
             </a:r>
             <a:endParaRPr/>
           </a:p>
@@ -14827,7 +13932,7 @@
             </a:pPr>
             <a:r>
               <a:rPr lang="en"/>
-              <a:t>List components by name in the JSON, with a registry</a:t>
+              <a:t>Cards recharge after use</a:t>
             </a:r>
             <a:endParaRPr/>
           </a:p>
@@ -14844,24 +13949,24 @@
             </a:pPr>
             <a:r>
               <a:rPr lang="en"/>
-              <a:t>What do you gain, and what do you lose?</a:t>
+              <a:t>Game states: play, and the end (won or lost)</a:t>
             </a:r>
             <a:endParaRPr/>
           </a:p>
           <a:p>
-            <a:pPr indent="-317500" lvl="1" marL="914400" rtl="0" algn="l">
-              <a:spcBef>
-                <a:spcPts val="0"/>
-              </a:spcBef>
-              <a:spcAft>
-                <a:spcPts val="0"/>
-              </a:spcAft>
-              <a:buSzPts val="1400"/>
-              <a:buChar char="○"/>
+            <a:pPr indent="-330200" lvl="0" marL="457200" rtl="0" algn="l">
+              <a:spcBef>
+                <a:spcPts val="0"/>
+              </a:spcBef>
+              <a:spcAft>
+                <a:spcPts val="0"/>
+              </a:spcAft>
+              <a:buSzPts val="1600"/>
+              <a:buChar char="●"/>
             </a:pPr>
             <a:r>
               <a:rPr lang="en"/>
-              <a:t>E.g. the compiler checking the data’s shape</a:t>
+              <a:t>Falling gold: a coin with one more component, Faller</a:t>
             </a:r>
             <a:endParaRPr/>
           </a:p>
@@ -14872,699 +13977,47 @@
   <p:clrMapOvr>
     <a:masterClrMapping/>
   </p:clrMapOvr>
-  <p:timing>
-    <p:tnLst>
-      <p:par>
-        <p:cTn dur="indefinite" nodeType="tmRoot" restart="never">
-          <p:childTnLst>
-            <p:seq concurrent="1" nextAc="seek">
-              <p:cTn dur="indefinite" id="2" nodeType="mainSeq">
-                <p:childTnLst>
-                  <p:par>
-                    <p:cTn fill="hold">
-                      <p:stCondLst>
-                        <p:cond delay="indefinite"/>
-                      </p:stCondLst>
-                      <p:childTnLst>
-                        <p:par>
-                          <p:cTn fill="hold">
-                            <p:stCondLst>
-                              <p:cond delay="0"/>
-                            </p:stCondLst>
-                            <p:childTnLst>
-                              <p:par>
-                                <p:cTn fill="hold" nodeType="clickEffect" presetClass="entr" presetID="1" presetSubtype="0">
-                                  <p:stCondLst>
-                                    <p:cond delay="0"/>
-                                  </p:stCondLst>
-                                  <p:childTnLst>
-                                    <p:set>
-                                      <p:cBhvr>
-                                        <p:cTn dur="1" fill="hold">
-                                          <p:stCondLst>
-                                            <p:cond delay="0"/>
-                                          </p:stCondLst>
-                                        </p:cTn>
-                                        <p:tgtEl>
-                                          <p:spTgt spid="294">
-                                            <p:txEl>
-                                              <p:pRg end="0" st="0"/>
-                                            </p:txEl>
-                                          </p:spTgt>
-                                        </p:tgtEl>
-                                        <p:attrNameLst>
-                                          <p:attrName>style.visibility</p:attrName>
-                                        </p:attrNameLst>
-                                      </p:cBhvr>
-                                      <p:to>
-                                        <p:strVal val="visible"/>
-                                      </p:to>
-                                    </p:set>
-                                  </p:childTnLst>
-                                </p:cTn>
-                              </p:par>
-                            </p:childTnLst>
-                          </p:cTn>
-                        </p:par>
-                      </p:childTnLst>
-                    </p:cTn>
-                  </p:par>
-                  <p:par>
-                    <p:cTn fill="hold">
-                      <p:stCondLst>
-                        <p:cond delay="indefinite"/>
-                      </p:stCondLst>
-                      <p:childTnLst>
-                        <p:par>
-                          <p:cTn fill="hold">
-                            <p:stCondLst>
-                              <p:cond delay="0"/>
-                            </p:stCondLst>
-                            <p:childTnLst>
-                              <p:par>
-                                <p:cTn fill="hold" nodeType="clickEffect" presetClass="entr" presetID="1" presetSubtype="0">
-                                  <p:stCondLst>
-                                    <p:cond delay="0"/>
-                                  </p:stCondLst>
-                                  <p:childTnLst>
-                                    <p:set>
-                                      <p:cBhvr>
-                                        <p:cTn dur="1" fill="hold">
-                                          <p:stCondLst>
-                                            <p:cond delay="0"/>
-                                          </p:stCondLst>
-                                        </p:cTn>
-                                        <p:tgtEl>
-                                          <p:spTgt spid="294">
-                                            <p:txEl>
-                                              <p:pRg end="1" st="1"/>
-                                            </p:txEl>
-                                          </p:spTgt>
-                                        </p:tgtEl>
-                                        <p:attrNameLst>
-                                          <p:attrName>style.visibility</p:attrName>
-                                        </p:attrNameLst>
-                                      </p:cBhvr>
-                                      <p:to>
-                                        <p:strVal val="visible"/>
-                                      </p:to>
-                                    </p:set>
-                                  </p:childTnLst>
-                                </p:cTn>
-                              </p:par>
-                            </p:childTnLst>
-                          </p:cTn>
-                        </p:par>
-                      </p:childTnLst>
-                    </p:cTn>
-                  </p:par>
-                  <p:par>
-                    <p:cTn fill="hold">
-                      <p:stCondLst>
-                        <p:cond delay="indefinite"/>
-                      </p:stCondLst>
-                      <p:childTnLst>
-                        <p:par>
-                          <p:cTn fill="hold">
-                            <p:stCondLst>
-                              <p:cond delay="0"/>
-                            </p:stCondLst>
-                            <p:childTnLst>
-                              <p:par>
-                                <p:cTn fill="hold" nodeType="clickEffect" presetClass="entr" presetID="1" presetSubtype="0">
-                                  <p:stCondLst>
-                                    <p:cond delay="0"/>
-                                  </p:stCondLst>
-                                  <p:childTnLst>
-                                    <p:set>
-                                      <p:cBhvr>
-                                        <p:cTn dur="1" fill="hold">
-                                          <p:stCondLst>
-                                            <p:cond delay="0"/>
-                                          </p:stCondLst>
-                                        </p:cTn>
-                                        <p:tgtEl>
-                                          <p:spTgt spid="294">
-                                            <p:txEl>
-                                              <p:pRg end="2" st="2"/>
-                                            </p:txEl>
-                                          </p:spTgt>
-                                        </p:tgtEl>
-                                        <p:attrNameLst>
-                                          <p:attrName>style.visibility</p:attrName>
-                                        </p:attrNameLst>
-                                      </p:cBhvr>
-                                      <p:to>
-                                        <p:strVal val="visible"/>
-                                      </p:to>
-                                    </p:set>
-                                  </p:childTnLst>
-                                </p:cTn>
-                              </p:par>
-                            </p:childTnLst>
-                          </p:cTn>
-                        </p:par>
-                      </p:childTnLst>
-                    </p:cTn>
-                  </p:par>
-                  <p:par>
-                    <p:cTn fill="hold">
-                      <p:stCondLst>
-                        <p:cond delay="indefinite"/>
-                      </p:stCondLst>
-                      <p:childTnLst>
-                        <p:par>
-                          <p:cTn fill="hold">
-                            <p:stCondLst>
-                              <p:cond delay="0"/>
-                            </p:stCondLst>
-                            <p:childTnLst>
-                              <p:par>
-                                <p:cTn fill="hold" nodeType="clickEffect" presetClass="entr" presetID="1" presetSubtype="0">
-                                  <p:stCondLst>
-                                    <p:cond delay="0"/>
-                                  </p:stCondLst>
-                                  <p:childTnLst>
-                                    <p:set>
-                                      <p:cBhvr>
-                                        <p:cTn dur="1" fill="hold">
-                                          <p:stCondLst>
-                                            <p:cond delay="0"/>
-                                          </p:stCondLst>
-                                        </p:cTn>
-                                        <p:tgtEl>
-                                          <p:spTgt spid="294">
-                                            <p:txEl>
-                                              <p:pRg end="3" st="3"/>
-                                            </p:txEl>
-                                          </p:spTgt>
-                                        </p:tgtEl>
-                                        <p:attrNameLst>
-                                          <p:attrName>style.visibility</p:attrName>
-                                        </p:attrNameLst>
-                                      </p:cBhvr>
-                                      <p:to>
-                                        <p:strVal val="visible"/>
-                                      </p:to>
-                                    </p:set>
-                                  </p:childTnLst>
-                                </p:cTn>
-                              </p:par>
-                            </p:childTnLst>
-                          </p:cTn>
-                        </p:par>
-                      </p:childTnLst>
-                    </p:cTn>
-                  </p:par>
-                  <p:par>
-                    <p:cTn fill="hold">
-                      <p:stCondLst>
-                        <p:cond delay="indefinite"/>
-                      </p:stCondLst>
-                      <p:childTnLst>
-                        <p:par>
-                          <p:cTn fill="hold">
-                            <p:stCondLst>
-                              <p:cond delay="0"/>
-                            </p:stCondLst>
-                            <p:childTnLst>
-                              <p:par>
-                                <p:cTn fill="hold" nodeType="clickEffect" presetClass="entr" presetID="1" presetSubtype="0">
-                                  <p:stCondLst>
-                                    <p:cond delay="0"/>
-                                  </p:stCondLst>
-                                  <p:childTnLst>
-                                    <p:set>
-                                      <p:cBhvr>
-                                        <p:cTn dur="1" fill="hold">
-                                          <p:stCondLst>
-                                            <p:cond delay="0"/>
-                                          </p:stCondLst>
-                                        </p:cTn>
-                                        <p:tgtEl>
-                                          <p:spTgt spid="294">
-                                            <p:txEl>
-                                              <p:pRg end="4" st="4"/>
-                                            </p:txEl>
-                                          </p:spTgt>
-                                        </p:tgtEl>
-                                        <p:attrNameLst>
-                                          <p:attrName>style.visibility</p:attrName>
-                                        </p:attrNameLst>
-                                      </p:cBhvr>
-                                      <p:to>
-                                        <p:strVal val="visible"/>
-                                      </p:to>
-                                    </p:set>
-                                  </p:childTnLst>
-                                </p:cTn>
-                              </p:par>
-                            </p:childTnLst>
-                          </p:cTn>
-                        </p:par>
-                      </p:childTnLst>
-                    </p:cTn>
-                  </p:par>
-                  <p:par>
-                    <p:cTn fill="hold">
-                      <p:stCondLst>
-                        <p:cond delay="indefinite"/>
-                      </p:stCondLst>
-                      <p:childTnLst>
-                        <p:par>
-                          <p:cTn fill="hold">
-                            <p:stCondLst>
-                              <p:cond delay="0"/>
-                            </p:stCondLst>
-                            <p:childTnLst>
-                              <p:par>
-                                <p:cTn fill="hold" nodeType="clickEffect" presetClass="entr" presetID="1" presetSubtype="0">
-                                  <p:stCondLst>
-                                    <p:cond delay="0"/>
-                                  </p:stCondLst>
-                                  <p:childTnLst>
-                                    <p:set>
-                                      <p:cBhvr>
-                                        <p:cTn dur="1" fill="hold">
-                                          <p:stCondLst>
-                                            <p:cond delay="0"/>
-                                          </p:stCondLst>
-                                        </p:cTn>
-                                        <p:tgtEl>
-                                          <p:spTgt spid="294">
-                                            <p:txEl>
-                                              <p:pRg end="5" st="5"/>
-                                            </p:txEl>
-                                          </p:spTgt>
-                                        </p:tgtEl>
-                                        <p:attrNameLst>
-                                          <p:attrName>style.visibility</p:attrName>
-                                        </p:attrNameLst>
-                                      </p:cBhvr>
-                                      <p:to>
-                                        <p:strVal val="visible"/>
-                                      </p:to>
-                                    </p:set>
-                                  </p:childTnLst>
-                                </p:cTn>
-                              </p:par>
-                            </p:childTnLst>
-                          </p:cTn>
-                        </p:par>
-                      </p:childTnLst>
-                    </p:cTn>
-                  </p:par>
-                  <p:par>
-                    <p:cTn fill="hold">
-                      <p:stCondLst>
-                        <p:cond delay="indefinite"/>
-                      </p:stCondLst>
-                      <p:childTnLst>
-                        <p:par>
-                          <p:cTn fill="hold">
-                            <p:stCondLst>
-                              <p:cond delay="0"/>
-                            </p:stCondLst>
-                            <p:childTnLst>
-                              <p:par>
-                                <p:cTn fill="hold" nodeType="clickEffect" presetClass="entr" presetID="1" presetSubtype="0">
-                                  <p:stCondLst>
-                                    <p:cond delay="0"/>
-                                  </p:stCondLst>
-                                  <p:childTnLst>
-                                    <p:set>
-                                      <p:cBhvr>
-                                        <p:cTn dur="1" fill="hold">
-                                          <p:stCondLst>
-                                            <p:cond delay="0"/>
-                                          </p:stCondLst>
-                                        </p:cTn>
-                                        <p:tgtEl>
-                                          <p:spTgt spid="294">
-                                            <p:txEl>
-                                              <p:pRg end="6" st="6"/>
-                                            </p:txEl>
-                                          </p:spTgt>
-                                        </p:tgtEl>
-                                        <p:attrNameLst>
-                                          <p:attrName>style.visibility</p:attrName>
-                                        </p:attrNameLst>
-                                      </p:cBhvr>
-                                      <p:to>
-                                        <p:strVal val="visible"/>
-                                      </p:to>
-                                    </p:set>
-                                  </p:childTnLst>
-                                </p:cTn>
-                              </p:par>
-                            </p:childTnLst>
-                          </p:cTn>
-                        </p:par>
-                      </p:childTnLst>
-                    </p:cTn>
-                  </p:par>
-                  <p:par>
-                    <p:cTn fill="hold">
-                      <p:stCondLst>
-                        <p:cond delay="indefinite"/>
-                      </p:stCondLst>
-                      <p:childTnLst>
-                        <p:par>
-                          <p:cTn fill="hold">
-                            <p:stCondLst>
-                              <p:cond delay="0"/>
-                            </p:stCondLst>
-                            <p:childTnLst>
-                              <p:par>
-                                <p:cTn fill="hold" nodeType="clickEffect" presetClass="entr" presetID="1" presetSubtype="0">
-                                  <p:stCondLst>
-                                    <p:cond delay="0"/>
-                                  </p:stCondLst>
-                                  <p:childTnLst>
-                                    <p:set>
-                                      <p:cBhvr>
-                                        <p:cTn dur="1" fill="hold">
-                                          <p:stCondLst>
-                                            <p:cond delay="0"/>
-                                          </p:stCondLst>
-                                        </p:cTn>
-                                        <p:tgtEl>
-                                          <p:spTgt spid="294">
-                                            <p:txEl>
-                                              <p:pRg end="7" st="7"/>
-                                            </p:txEl>
-                                          </p:spTgt>
-                                        </p:tgtEl>
-                                        <p:attrNameLst>
-                                          <p:attrName>style.visibility</p:attrName>
-                                        </p:attrNameLst>
-                                      </p:cBhvr>
-                                      <p:to>
-                                        <p:strVal val="visible"/>
-                                      </p:to>
-                                    </p:set>
-                                  </p:childTnLst>
-                                </p:cTn>
-                              </p:par>
-                            </p:childTnLst>
-                          </p:cTn>
-                        </p:par>
-                      </p:childTnLst>
-                    </p:cTn>
-                  </p:par>
-                  <p:par>
-                    <p:cTn fill="hold">
-                      <p:stCondLst>
-                        <p:cond delay="indefinite"/>
-                      </p:stCondLst>
-                      <p:childTnLst>
-                        <p:par>
-                          <p:cTn fill="hold">
-                            <p:stCondLst>
-                              <p:cond delay="0"/>
-                            </p:stCondLst>
-                            <p:childTnLst>
-                              <p:par>
-                                <p:cTn fill="hold" nodeType="clickEffect" presetClass="entr" presetID="1" presetSubtype="0">
-                                  <p:stCondLst>
-                                    <p:cond delay="0"/>
-                                  </p:stCondLst>
-                                  <p:childTnLst>
-                                    <p:set>
-                                      <p:cBhvr>
-                                        <p:cTn dur="1" fill="hold">
-                                          <p:stCondLst>
-                                            <p:cond delay="0"/>
-                                          </p:stCondLst>
-                                        </p:cTn>
-                                        <p:tgtEl>
-                                          <p:spTgt spid="294">
-                                            <p:txEl>
-                                              <p:pRg end="8" st="8"/>
-                                            </p:txEl>
-                                          </p:spTgt>
-                                        </p:tgtEl>
-                                        <p:attrNameLst>
-                                          <p:attrName>style.visibility</p:attrName>
-                                        </p:attrNameLst>
-                                      </p:cBhvr>
-                                      <p:to>
-                                        <p:strVal val="visible"/>
-                                      </p:to>
-                                    </p:set>
-                                  </p:childTnLst>
-                                </p:cTn>
-                              </p:par>
-                            </p:childTnLst>
-                          </p:cTn>
-                        </p:par>
-                      </p:childTnLst>
-                    </p:cTn>
-                  </p:par>
-                  <p:par>
-                    <p:cTn fill="hold">
-                      <p:stCondLst>
-                        <p:cond delay="indefinite"/>
-                      </p:stCondLst>
-                      <p:childTnLst>
-                        <p:par>
-                          <p:cTn fill="hold">
-                            <p:stCondLst>
-                              <p:cond delay="0"/>
-                            </p:stCondLst>
-                            <p:childTnLst>
-                              <p:par>
-                                <p:cTn fill="hold" nodeType="clickEffect" presetClass="entr" presetID="1" presetSubtype="0">
-                                  <p:stCondLst>
-                                    <p:cond delay="0"/>
-                                  </p:stCondLst>
-                                  <p:childTnLst>
-                                    <p:set>
-                                      <p:cBhvr>
-                                        <p:cTn dur="1" fill="hold">
-                                          <p:stCondLst>
-                                            <p:cond delay="0"/>
-                                          </p:stCondLst>
-                                        </p:cTn>
-                                        <p:tgtEl>
-                                          <p:spTgt spid="294">
-                                            <p:txEl>
-                                              <p:pRg end="9" st="9"/>
-                                            </p:txEl>
-                                          </p:spTgt>
-                                        </p:tgtEl>
-                                        <p:attrNameLst>
-                                          <p:attrName>style.visibility</p:attrName>
-                                        </p:attrNameLst>
-                                      </p:cBhvr>
-                                      <p:to>
-                                        <p:strVal val="visible"/>
-                                      </p:to>
-                                    </p:set>
-                                  </p:childTnLst>
-                                </p:cTn>
-                              </p:par>
-                            </p:childTnLst>
-                          </p:cTn>
-                        </p:par>
-                      </p:childTnLst>
-                    </p:cTn>
-                  </p:par>
-                  <p:par>
-                    <p:cTn fill="hold">
-                      <p:stCondLst>
-                        <p:cond delay="indefinite"/>
-                      </p:stCondLst>
-                      <p:childTnLst>
-                        <p:par>
-                          <p:cTn fill="hold">
-                            <p:stCondLst>
-                              <p:cond delay="0"/>
-                            </p:stCondLst>
-                            <p:childTnLst>
-                              <p:par>
-                                <p:cTn fill="hold" nodeType="clickEffect" presetClass="entr" presetID="1" presetSubtype="0">
-                                  <p:stCondLst>
-                                    <p:cond delay="0"/>
-                                  </p:stCondLst>
-                                  <p:childTnLst>
-                                    <p:set>
-                                      <p:cBhvr>
-                                        <p:cTn dur="1" fill="hold">
-                                          <p:stCondLst>
-                                            <p:cond delay="0"/>
-                                          </p:stCondLst>
-                                        </p:cTn>
-                                        <p:tgtEl>
-                                          <p:spTgt spid="294">
-                                            <p:txEl>
-                                              <p:pRg end="10" st="10"/>
-                                            </p:txEl>
-                                          </p:spTgt>
-                                        </p:tgtEl>
-                                        <p:attrNameLst>
-                                          <p:attrName>style.visibility</p:attrName>
-                                        </p:attrNameLst>
-                                      </p:cBhvr>
-                                      <p:to>
-                                        <p:strVal val="visible"/>
-                                      </p:to>
-                                    </p:set>
-                                  </p:childTnLst>
-                                </p:cTn>
-                              </p:par>
-                            </p:childTnLst>
-                          </p:cTn>
-                        </p:par>
-                      </p:childTnLst>
-                    </p:cTn>
-                  </p:par>
-                  <p:par>
-                    <p:cTn fill="hold">
-                      <p:stCondLst>
-                        <p:cond delay="indefinite"/>
-                      </p:stCondLst>
-                      <p:childTnLst>
-                        <p:par>
-                          <p:cTn fill="hold">
-                            <p:stCondLst>
-                              <p:cond delay="0"/>
-                            </p:stCondLst>
-                            <p:childTnLst>
-                              <p:par>
-                                <p:cTn fill="hold" nodeType="clickEffect" presetClass="entr" presetID="1" presetSubtype="0">
-                                  <p:stCondLst>
-                                    <p:cond delay="0"/>
-                                  </p:stCondLst>
-                                  <p:childTnLst>
-                                    <p:set>
-                                      <p:cBhvr>
-                                        <p:cTn dur="1" fill="hold">
-                                          <p:stCondLst>
-                                            <p:cond delay="0"/>
-                                          </p:stCondLst>
-                                        </p:cTn>
-                                        <p:tgtEl>
-                                          <p:spTgt spid="294">
-                                            <p:txEl>
-                                              <p:pRg end="11" st="11"/>
-                                            </p:txEl>
-                                          </p:spTgt>
-                                        </p:tgtEl>
-                                        <p:attrNameLst>
-                                          <p:attrName>style.visibility</p:attrName>
-                                        </p:attrNameLst>
-                                      </p:cBhvr>
-                                      <p:to>
-                                        <p:strVal val="visible"/>
-                                      </p:to>
-                                    </p:set>
-                                  </p:childTnLst>
-                                </p:cTn>
-                              </p:par>
-                            </p:childTnLst>
-                          </p:cTn>
-                        </p:par>
-                      </p:childTnLst>
-                    </p:cTn>
-                  </p:par>
-                  <p:par>
-                    <p:cTn fill="hold">
-                      <p:stCondLst>
-                        <p:cond delay="indefinite"/>
-                      </p:stCondLst>
-                      <p:childTnLst>
-                        <p:par>
-                          <p:cTn fill="hold">
-                            <p:stCondLst>
-                              <p:cond delay="0"/>
-                            </p:stCondLst>
-                            <p:childTnLst>
-                              <p:par>
-                                <p:cTn fill="hold" nodeType="clickEffect" presetClass="entr" presetID="1" presetSubtype="0">
-                                  <p:stCondLst>
-                                    <p:cond delay="0"/>
-                                  </p:stCondLst>
-                                  <p:childTnLst>
-                                    <p:set>
-                                      <p:cBhvr>
-                                        <p:cTn dur="1" fill="hold">
-                                          <p:stCondLst>
-                                            <p:cond delay="0"/>
-                                          </p:stCondLst>
-                                        </p:cTn>
-                                        <p:tgtEl>
-                                          <p:spTgt spid="294">
-                                            <p:txEl>
-                                              <p:pRg end="12" st="12"/>
-                                            </p:txEl>
-                                          </p:spTgt>
-                                        </p:tgtEl>
-                                        <p:attrNameLst>
-                                          <p:attrName>style.visibility</p:attrName>
-                                        </p:attrNameLst>
-                                      </p:cBhvr>
-                                      <p:to>
-                                        <p:strVal val="visible"/>
-                                      </p:to>
-                                    </p:set>
-                                  </p:childTnLst>
-                                </p:cTn>
-                              </p:par>
-                            </p:childTnLst>
-                          </p:cTn>
-                        </p:par>
-                      </p:childTnLst>
-                    </p:cTn>
-                  </p:par>
-                </p:childTnLst>
-              </p:cTn>
-              <p:prevCondLst>
-                <p:cond evt="onPrev">
-                  <p:tgtEl>
-                    <p:sldTgt/>
-                  </p:tgtEl>
-                </p:cond>
-              </p:prevCondLst>
-              <p:nextCondLst>
-                <p:cond evt="onNext">
-                  <p:tgtEl>
-                    <p:sldTgt/>
-                  </p:tgtEl>
-                </p:cond>
-              </p:nextCondLst>
-            </p:seq>
-          </p:childTnLst>
-        </p:cTn>
-      </p:par>
-    </p:tnLst>
-  </p:timing>
 </p:sld>
 </file>
 
 <file path=ppt/slides/slide31.xml><?xml version="1.0" encoding="utf-8"?>
-<p:sld xmlns:a="http://schemas.openxmlformats.org/drawingml/2006/main" xmlns:p="http://schemas.openxmlformats.org/presentationml/2006/main" xmlns:r="http://schemas.openxmlformats.org/officeDocument/2006/relationships">
+<p:sld xmlns:a="http://schemas.openxmlformats.org/drawingml/2006/main" xmlns:r="http://schemas.openxmlformats.org/officeDocument/2006/relationships" xmlns:mc="http://schemas.openxmlformats.org/markup-compatibility/2006" xmlns:mv="urn:schemas-microsoft-com:mac:vml" xmlns:p="http://schemas.openxmlformats.org/presentationml/2006/main" xmlns:c="http://schemas.openxmlformats.org/drawingml/2006/chart" xmlns:dgm="http://schemas.openxmlformats.org/drawingml/2006/diagram" xmlns:o="urn:schemas-microsoft-com:office:office" xmlns:v="urn:schemas-microsoft-com:vml" xmlns:pvml="urn:schemas-microsoft-com:office:powerpoint" xmlns:com="http://schemas.openxmlformats.org/drawingml/2006/compatibility" xmlns:p14="http://schemas.microsoft.com/office/powerpoint/2010/main" xmlns:p15="http://schemas.microsoft.com/office/powerpoint/2012/main" xmlns:ahyp="http://schemas.microsoft.com/office/drawing/2018/hyperlinkcolor">
   <p:cSld>
     <p:spTree>
       <p:nvGrpSpPr>
-        <p:cNvPr id="1" name=""/>
+        <p:cNvPr id="206" name="Shape 206"/>
         <p:cNvGrpSpPr/>
         <p:nvPr/>
       </p:nvGrpSpPr>
-      <p:grpSpPr/>
+      <p:grpSpPr>
+        <a:xfrm>
+          <a:off x="0" y="0"/>
+          <a:ext cx="0" cy="0"/>
+          <a:chOff x="0" y="0"/>
+          <a:chExt cx="0" cy="0"/>
+        </a:xfrm>
+      </p:grpSpPr>
       <p:sp>
         <p:nvSpPr>
-          <p:cNvPr id="2" name="Title 1"/>
-          <p:cNvSpPr>
-            <a:spLocks noGrp="1"/>
-          </p:cNvSpPr>
+          <p:cNvPr id="207" name="Google Shape;207;p33"/>
+          <p:cNvSpPr txBox="1"/>
           <p:nvPr>
             <p:ph type="title"/>
           </p:nvPr>
         </p:nvSpPr>
-        <p:spPr/>
+        <p:spPr>
+          <a:xfrm>
+            <a:off x="311700" y="195615"/>
+            <a:ext cx="8520600" cy="572700"/>
+          </a:xfrm>
+          <a:prstGeom prst="rect">
+            <a:avLst/>
+          </a:prstGeom>
+        </p:spPr>
         <p:txBody>
-          <a:bodyPr/>
+          <a:bodyPr anchorCtr="0" anchor="t" bIns="91425" lIns="91425" spcFirstLastPara="1" rIns="91425" wrap="square" tIns="91425">
+            <a:normAutofit fontScale="90000"/>
+          </a:bodyPr>
           <a:lstStyle/>
           <a:p>
             <a:pPr indent="0" lvl="0" marL="0" rtl="0" algn="l">
@@ -15577,133 +14030,79 @@
               <a:buNone/>
             </a:pPr>
             <a:r>
-              <a:rPr lang="en"/>
-              <a:t>Check Yourself</a:t>
-            </a:r>
-            <a:endParaRPr/>
+              <a:rPr lang="en">
+                <a:solidFill>
+                  <a:schemeClr val="accent5"/>
+                </a:solidFill>
+              </a:rPr>
+              <a:t>Plants vs. Zombies Implementation</a:t>
+            </a:r>
+            <a:endParaRPr>
+              <a:solidFill>
+                <a:schemeClr val="accent5"/>
+              </a:solidFill>
+            </a:endParaRPr>
           </a:p>
         </p:txBody>
       </p:sp>
       <p:sp>
         <p:nvSpPr>
-          <p:cNvPr id="3" name="Text Placeholder 2"/>
-          <p:cNvSpPr>
-            <a:spLocks noGrp="1"/>
-          </p:cNvSpPr>
+          <p:cNvPr id="208" name="Google Shape;208;p33"/>
+          <p:cNvSpPr txBox="1"/>
           <p:nvPr>
-            <p:ph type="body" idx="1"/>
+            <p:ph idx="1" type="body"/>
           </p:nvPr>
         </p:nvSpPr>
         <p:spPr>
           <a:xfrm>
             <a:off x="311700" y="885950"/>
-            <a:ext cx="8520600" cy="1719072"/>
-          </a:xfrm>
-        </p:spPr>
-        <p:txBody>
-          <a:bodyPr/>
-          <a:lstStyle/>
-          <a:p>
-            <a:pPr indent="-330200" lvl="0" marL="457200" rtl="0" algn="l">
-              <a:spcBef>
-                <a:spcPts val="0"/>
-              </a:spcBef>
-              <a:spcAft>
-                <a:spcPts val="0"/>
-              </a:spcAft>
-              <a:buSzPts val="1600"/>
-              <a:buChar char="●"/>
-            </a:pPr>
-            <a:r>
-              <a:rPr lang="en"/>
-              <a:t>Why does inheritance break down for this game?</a:t>
-            </a:r>
-            <a:endParaRPr/>
-          </a:p>
-          <a:p>
-            <a:pPr indent="-330200" lvl="0" marL="457200" rtl="0" algn="l">
-              <a:spcBef>
-                <a:spcPts val="0"/>
-              </a:spcBef>
-              <a:spcAft>
-                <a:spcPts val="0"/>
-              </a:spcAft>
-              <a:buSzPts val="1600"/>
-              <a:buChar char="●"/>
-            </a:pPr>
-            <a:r>
-              <a:rPr lang="en"/>
-              <a:t>How do components in one entity work together without knowing each other’s classes?</a:t>
-            </a:r>
-            <a:endParaRPr/>
-          </a:p>
-          <a:p>
-            <a:pPr indent="-330200" lvl="0" marL="457200" rtl="0" algn="l">
-              <a:spcBef>
-                <a:spcPts val="0"/>
-              </a:spcBef>
-              <a:spcAft>
-                <a:spcPts val="0"/>
-              </a:spcAft>
-              <a:buSzPts val="1600"/>
-              <a:buChar char="●"/>
-            </a:pPr>
-            <a:r>
-              <a:rPr lang="en"/>
-              <a:t>What goes in a type object, and what goes in an instance?</a:t>
-            </a:r>
-            <a:endParaRPr/>
-          </a:p>
-          <a:p>
-            <a:pPr indent="-330200" lvl="0" marL="457200" rtl="0" algn="l">
-              <a:spcBef>
-                <a:spcPts val="0"/>
-              </a:spcBef>
-              <a:spcAft>
-                <a:spcPts val="0"/>
-              </a:spcAft>
-              <a:buSzPts val="1600"/>
-              <a:buChar char="●"/>
-            </a:pPr>
-            <a:r>
-              <a:rPr lang="en"/>
-              <a:t>How is picking on a grid different from picking a list of objects?</a:t>
-            </a:r>
-            <a:endParaRPr/>
-          </a:p>
-        </p:txBody>
-      </p:sp>
-      <p:sp>
-        <p:nvSpPr>
-          <p:cNvPr id="4" name="TextBox 3"/>
-          <p:cNvSpPr txBox="1"/>
-          <p:nvPr/>
-        </p:nvSpPr>
-        <p:spPr>
-          <a:xfrm>
-            <a:off x="457200" y="3182112"/>
-            <a:ext cx="8229600" cy="457200"/>
+            <a:ext cx="8520600" cy="4023300"/>
           </a:xfrm>
           <a:prstGeom prst="rect">
             <a:avLst/>
           </a:prstGeom>
-          <a:noFill/>
         </p:spPr>
         <p:txBody>
-          <a:bodyPr wrap="square">
-            <a:spAutoFit/>
+          <a:bodyPr anchorCtr="0" anchor="ctr" bIns="91425" lIns="91425" spcFirstLastPara="1" rIns="91425" wrap="square" tIns="91425">
+            <a:normAutofit/>
           </a:bodyPr>
           <a:lstStyle/>
           <a:p>
-            <a:pPr algn="ctr"/>
-            <a:r>
-              <a:rPr sz="1400" b="0" i="0">
-                <a:solidFill>
-                  <a:srgbClr val="9AA3AB"/>
-                </a:solidFill>
+            <a:pPr indent="0" lvl="0" marL="0" rtl="0" algn="ctr">
+              <a:spcBef>
+                <a:spcPts val="0"/>
+              </a:spcBef>
+              <a:spcAft>
+                <a:spcPts val="1200"/>
+              </a:spcAft>
+              <a:buNone/>
+            </a:pPr>
+            <a:r>
+              <a:rPr lang="en" sz="2900">
+                <a:latin typeface="VT323"/>
+                <a:ea typeface="VT323"/>
+                <a:cs typeface="VT323"/>
+                <a:sym typeface="VT323"/>
               </a:rPr>
-              <a:t>The answers, and more questions, are on the course site.</a:t>
-            </a:r>
+              <a:t>DEMO!</a:t>
+            </a:r>
+            <a:endParaRPr/>
+          </a:p>
+          <a:p>
+            <a:pPr indent="0" lvl="0" marL="0" rtl="0" algn="ctr">
+              <a:spcBef>
+                <a:spcPts val="0"/>
+              </a:spcBef>
+              <a:spcAft>
+                <a:spcPts val="0"/>
+              </a:spcAft>
+              <a:buNone/>
+            </a:pPr>
+            <a:r>
+              <a:rPr lang="en" sz="1800"/>
+              <a:t>Pvz4: the whole game</a:t>
+            </a:r>
+            <a:endParaRPr sz="1800"/>
           </a:p>
         </p:txBody>
       </p:sp>
@@ -15770,7 +14169,7 @@
                   <a:schemeClr val="accent5"/>
                 </a:solidFill>
               </a:rPr>
-              <a:t>Apply It to Your Project</a:t>
+              <a:t>Exercises</a:t>
             </a:r>
             <a:endParaRPr>
               <a:solidFill>
@@ -15815,7 +14214,7 @@
             </a:pPr>
             <a:r>
               <a:rPr lang="en"/>
-              <a:t>Where do subclasses exist only to combine abilities?</a:t>
+              <a:t>Start from Pvz4, the finished game</a:t>
             </a:r>
             <a:endParaRPr/>
           </a:p>
@@ -15832,7 +14231,7 @@
             </a:pPr>
             <a:r>
               <a:rPr lang="en"/>
-              <a:t>Which abilities could become components?</a:t>
+              <a:t>New types: a Guard and a Runner. Any code?</a:t>
             </a:r>
             <a:endParaRPr/>
           </a:p>
@@ -15849,7 +14248,24 @@
             </a:pPr>
             <a:r>
               <a:rPr lang="en"/>
-              <a:t>Which data belongs to a kind of thing? Could it be a data file?</a:t>
+              <a:t>Frost Wizard: arrows that slow goblins down</a:t>
+            </a:r>
+            <a:endParaRPr/>
+          </a:p>
+          <a:p>
+            <a:pPr indent="-317500" lvl="1" marL="914400" rtl="0" algn="l">
+              <a:spcBef>
+                <a:spcPts val="0"/>
+              </a:spcBef>
+              <a:spcAft>
+                <a:spcPts val="0"/>
+              </a:spcAft>
+              <a:buSzPts val="1400"/>
+              <a:buChar char="○"/>
+            </a:pPr>
+            <a:r>
+              <a:rPr lang="en"/>
+              <a:t>Which component, where, and how does the data say so?</a:t>
             </a:r>
             <a:endParaRPr/>
           </a:p>
@@ -15866,7 +14282,24 @@
             </a:pPr>
             <a:r>
               <a:rPr lang="en"/>
-              <a:t>How does your game find out what was clicked?</a:t>
+              <a:t>A shield for defenders. Can you reuse Armour?</a:t>
+            </a:r>
+            <a:endParaRPr/>
+          </a:p>
+          <a:p>
+            <a:pPr indent="-330200" lvl="0" marL="457200" rtl="0" algn="l">
+              <a:spcBef>
+                <a:spcPts val="0"/>
+              </a:spcBef>
+              <a:spcAft>
+                <a:spcPts val="0"/>
+              </a:spcAft>
+              <a:buSzPts val="1600"/>
+              <a:buChar char="●"/>
+            </a:pPr>
+            <a:r>
+              <a:rPr lang="en"/>
+              <a:t>A pitchfork that sends the defender you click back into the castle</a:t>
             </a:r>
             <a:endParaRPr/>
           </a:p>
@@ -16548,76 +14981,834 @@
 </file>
 
 <file path=ppt/slides/slide33.xml><?xml version="1.0" encoding="utf-8"?>
-<p:sld xmlns:a="http://schemas.openxmlformats.org/drawingml/2006/main" xmlns:p="http://schemas.openxmlformats.org/presentationml/2006/main" xmlns:r="http://schemas.openxmlformats.org/officeDocument/2006/relationships">
+<p:sld xmlns:a="http://schemas.openxmlformats.org/drawingml/2006/main" xmlns:r="http://schemas.openxmlformats.org/officeDocument/2006/relationships" xmlns:mc="http://schemas.openxmlformats.org/markup-compatibility/2006" xmlns:mv="urn:schemas-microsoft-com:mac:vml" xmlns:p="http://schemas.openxmlformats.org/presentationml/2006/main" xmlns:c="http://schemas.openxmlformats.org/drawingml/2006/chart" xmlns:dgm="http://schemas.openxmlformats.org/drawingml/2006/diagram" xmlns:o="urn:schemas-microsoft-com:office:office" xmlns:v="urn:schemas-microsoft-com:vml" xmlns:pvml="urn:schemas-microsoft-com:office:powerpoint" xmlns:com="http://schemas.openxmlformats.org/drawingml/2006/compatibility" xmlns:p14="http://schemas.microsoft.com/office/powerpoint/2010/main" xmlns:p15="http://schemas.microsoft.com/office/powerpoint/2012/main" xmlns:ahyp="http://schemas.microsoft.com/office/drawing/2018/hyperlinkcolor">
   <p:cSld>
     <p:spTree>
       <p:nvGrpSpPr>
-        <p:cNvPr id="1" name=""/>
+        <p:cNvPr id="292" name="Shape 292"/>
         <p:cNvGrpSpPr/>
         <p:nvPr/>
       </p:nvGrpSpPr>
-      <p:grpSpPr/>
+      <p:grpSpPr>
+        <a:xfrm>
+          <a:off x="0" y="0"/>
+          <a:ext cx="0" cy="0"/>
+          <a:chOff x="0" y="0"/>
+          <a:chExt cx="0" cy="0"/>
+        </a:xfrm>
+      </p:grpSpPr>
       <p:sp>
         <p:nvSpPr>
-          <p:cNvPr id="2" name="Title 1"/>
-          <p:cNvSpPr>
-            <a:spLocks noGrp="1"/>
-          </p:cNvSpPr>
+          <p:cNvPr id="293" name="Google Shape;293;p45"/>
+          <p:cNvSpPr txBox="1"/>
           <p:nvPr>
             <p:ph type="title"/>
           </p:nvPr>
         </p:nvSpPr>
-        <p:spPr/>
-        <p:txBody>
-          <a:bodyPr/>
-          <a:lstStyle/>
-          <a:p>
-            <a:pPr indent="0" lvl="0" marL="0" rtl="0" algn="l">
-              <a:spcBef>
-                <a:spcPts val="0"/>
-              </a:spcBef>
-              <a:spcAft>
-                <a:spcPts val="0"/>
-              </a:spcAft>
-              <a:buNone/>
-            </a:pPr>
-            <a:r>
-              <a:rPr lang="en"/>
-              <a:t>Types and Instances</a:t>
-            </a:r>
-            <a:endParaRPr/>
-          </a:p>
-        </p:txBody>
-      </p:sp>
-      <p:pic>
-        <p:nvPicPr>
-          <p:cNvPr id="3" name="Picture 2" descr="type-object.png"/>
-          <p:cNvPicPr>
-            <a:picLocks noChangeAspect="1"/>
-          </p:cNvPicPr>
-          <p:nvPr/>
-        </p:nvPicPr>
-        <p:blipFill>
-          <a:blip r:embed="rId2"/>
-          <a:stretch>
-            <a:fillRect/>
-          </a:stretch>
-        </p:blipFill>
         <p:spPr>
           <a:xfrm>
-            <a:off x="360381" y="1051560"/>
-            <a:ext cx="8423237" cy="3977640"/>
+            <a:off x="311700" y="195615"/>
+            <a:ext cx="8520600" cy="572700"/>
           </a:xfrm>
           <a:prstGeom prst="rect">
             <a:avLst/>
           </a:prstGeom>
         </p:spPr>
-      </p:pic>
+        <p:txBody>
+          <a:bodyPr anchorCtr="0" anchor="t" bIns="91425" lIns="91425" spcFirstLastPara="1" rIns="91425" wrap="square" tIns="91425">
+            <a:normAutofit fontScale="90000"/>
+          </a:bodyPr>
+          <a:lstStyle/>
+          <a:p>
+            <a:pPr indent="0" lvl="0" marL="0" rtl="0" algn="l">
+              <a:spcBef>
+                <a:spcPts val="0"/>
+              </a:spcBef>
+              <a:spcAft>
+                <a:spcPts val="0"/>
+              </a:spcAft>
+              <a:buNone/>
+            </a:pPr>
+            <a:r>
+              <a:rPr lang="en">
+                <a:solidFill>
+                  <a:schemeClr val="accent5"/>
+                </a:solidFill>
+              </a:rPr>
+              <a:t>Exercise: Refactor (Stretch)</a:t>
+            </a:r>
+            <a:endParaRPr>
+              <a:solidFill>
+                <a:schemeClr val="accent5"/>
+              </a:solidFill>
+            </a:endParaRPr>
+          </a:p>
+        </p:txBody>
+      </p:sp>
+      <p:sp>
+        <p:nvSpPr>
+          <p:cNvPr id="294" name="Google Shape;294;p45"/>
+          <p:cNvSpPr txBox="1"/>
+          <p:nvPr>
+            <p:ph idx="1" type="body"/>
+          </p:nvPr>
+        </p:nvSpPr>
+        <p:spPr>
+          <a:xfrm>
+            <a:off x="311700" y="885950"/>
+            <a:ext cx="8520600" cy="4023300"/>
+          </a:xfrm>
+          <a:prstGeom prst="rect">
+            <a:avLst/>
+          </a:prstGeom>
+        </p:spPr>
+        <p:txBody>
+          <a:bodyPr anchorCtr="0" anchor="t" bIns="91425" lIns="91425" spcFirstLastPara="1" rIns="91425" wrap="square" tIns="91425">
+            <a:normAutofit/>
+          </a:bodyPr>
+          <a:lstStyle/>
+          <a:p>
+            <a:pPr indent="-330200" lvl="0" marL="457200" rtl="0" algn="l">
+              <a:spcBef>
+                <a:spcPts val="0"/>
+              </a:spcBef>
+              <a:spcAft>
+                <a:spcPts val="0"/>
+              </a:spcAft>
+              <a:buSzPts val="1600"/>
+              <a:buChar char="●"/>
+            </a:pPr>
+            <a:r>
+              <a:rPr lang="en"/>
+              <a:t>DefenderType.Create has an if for every component</a:t>
+            </a:r>
+            <a:endParaRPr/>
+          </a:p>
+          <a:p>
+            <a:pPr indent="-330200" lvl="0" marL="457200" rtl="0" algn="l">
+              <a:spcBef>
+                <a:spcPts val="0"/>
+              </a:spcBef>
+              <a:spcAft>
+                <a:spcPts val="0"/>
+              </a:spcAft>
+              <a:buSzPts val="1600"/>
+              <a:buChar char="●"/>
+            </a:pPr>
+            <a:r>
+              <a:rPr lang="en"/>
+              <a:t>List components by name in the JSON, with a registry</a:t>
+            </a:r>
+            <a:endParaRPr/>
+          </a:p>
+          <a:p>
+            <a:pPr indent="-330200" lvl="0" marL="457200" rtl="0" algn="l">
+              <a:spcBef>
+                <a:spcPts val="0"/>
+              </a:spcBef>
+              <a:spcAft>
+                <a:spcPts val="0"/>
+              </a:spcAft>
+              <a:buSzPts val="1600"/>
+              <a:buChar char="●"/>
+            </a:pPr>
+            <a:r>
+              <a:rPr lang="en"/>
+              <a:t>What do you gain, and what do you lose?</a:t>
+            </a:r>
+            <a:endParaRPr/>
+          </a:p>
+          <a:p>
+            <a:pPr indent="-317500" lvl="1" marL="914400" rtl="0" algn="l">
+              <a:spcBef>
+                <a:spcPts val="0"/>
+              </a:spcBef>
+              <a:spcAft>
+                <a:spcPts val="0"/>
+              </a:spcAft>
+              <a:buSzPts val="1400"/>
+              <a:buChar char="○"/>
+            </a:pPr>
+            <a:r>
+              <a:rPr lang="en"/>
+              <a:t>E.g. the compiler checking the data’s shape</a:t>
+            </a:r>
+            <a:endParaRPr/>
+          </a:p>
+        </p:txBody>
+      </p:sp>
     </p:spTree>
   </p:cSld>
   <p:clrMapOvr>
     <a:masterClrMapping/>
   </p:clrMapOvr>
+  <p:timing>
+    <p:tnLst>
+      <p:par>
+        <p:cTn dur="indefinite" nodeType="tmRoot" restart="never">
+          <p:childTnLst>
+            <p:seq concurrent="1" nextAc="seek">
+              <p:cTn dur="indefinite" id="2" nodeType="mainSeq">
+                <p:childTnLst>
+                  <p:par>
+                    <p:cTn fill="hold">
+                      <p:stCondLst>
+                        <p:cond delay="indefinite"/>
+                      </p:stCondLst>
+                      <p:childTnLst>
+                        <p:par>
+                          <p:cTn fill="hold">
+                            <p:stCondLst>
+                              <p:cond delay="0"/>
+                            </p:stCondLst>
+                            <p:childTnLst>
+                              <p:par>
+                                <p:cTn fill="hold" nodeType="clickEffect" presetClass="entr" presetID="1" presetSubtype="0">
+                                  <p:stCondLst>
+                                    <p:cond delay="0"/>
+                                  </p:stCondLst>
+                                  <p:childTnLst>
+                                    <p:set>
+                                      <p:cBhvr>
+                                        <p:cTn dur="1" fill="hold">
+                                          <p:stCondLst>
+                                            <p:cond delay="0"/>
+                                          </p:stCondLst>
+                                        </p:cTn>
+                                        <p:tgtEl>
+                                          <p:spTgt spid="294">
+                                            <p:txEl>
+                                              <p:pRg end="0" st="0"/>
+                                            </p:txEl>
+                                          </p:spTgt>
+                                        </p:tgtEl>
+                                        <p:attrNameLst>
+                                          <p:attrName>style.visibility</p:attrName>
+                                        </p:attrNameLst>
+                                      </p:cBhvr>
+                                      <p:to>
+                                        <p:strVal val="visible"/>
+                                      </p:to>
+                                    </p:set>
+                                  </p:childTnLst>
+                                </p:cTn>
+                              </p:par>
+                            </p:childTnLst>
+                          </p:cTn>
+                        </p:par>
+                      </p:childTnLst>
+                    </p:cTn>
+                  </p:par>
+                  <p:par>
+                    <p:cTn fill="hold">
+                      <p:stCondLst>
+                        <p:cond delay="indefinite"/>
+                      </p:stCondLst>
+                      <p:childTnLst>
+                        <p:par>
+                          <p:cTn fill="hold">
+                            <p:stCondLst>
+                              <p:cond delay="0"/>
+                            </p:stCondLst>
+                            <p:childTnLst>
+                              <p:par>
+                                <p:cTn fill="hold" nodeType="clickEffect" presetClass="entr" presetID="1" presetSubtype="0">
+                                  <p:stCondLst>
+                                    <p:cond delay="0"/>
+                                  </p:stCondLst>
+                                  <p:childTnLst>
+                                    <p:set>
+                                      <p:cBhvr>
+                                        <p:cTn dur="1" fill="hold">
+                                          <p:stCondLst>
+                                            <p:cond delay="0"/>
+                                          </p:stCondLst>
+                                        </p:cTn>
+                                        <p:tgtEl>
+                                          <p:spTgt spid="294">
+                                            <p:txEl>
+                                              <p:pRg end="1" st="1"/>
+                                            </p:txEl>
+                                          </p:spTgt>
+                                        </p:tgtEl>
+                                        <p:attrNameLst>
+                                          <p:attrName>style.visibility</p:attrName>
+                                        </p:attrNameLst>
+                                      </p:cBhvr>
+                                      <p:to>
+                                        <p:strVal val="visible"/>
+                                      </p:to>
+                                    </p:set>
+                                  </p:childTnLst>
+                                </p:cTn>
+                              </p:par>
+                            </p:childTnLst>
+                          </p:cTn>
+                        </p:par>
+                      </p:childTnLst>
+                    </p:cTn>
+                  </p:par>
+                  <p:par>
+                    <p:cTn fill="hold">
+                      <p:stCondLst>
+                        <p:cond delay="indefinite"/>
+                      </p:stCondLst>
+                      <p:childTnLst>
+                        <p:par>
+                          <p:cTn fill="hold">
+                            <p:stCondLst>
+                              <p:cond delay="0"/>
+                            </p:stCondLst>
+                            <p:childTnLst>
+                              <p:par>
+                                <p:cTn fill="hold" nodeType="clickEffect" presetClass="entr" presetID="1" presetSubtype="0">
+                                  <p:stCondLst>
+                                    <p:cond delay="0"/>
+                                  </p:stCondLst>
+                                  <p:childTnLst>
+                                    <p:set>
+                                      <p:cBhvr>
+                                        <p:cTn dur="1" fill="hold">
+                                          <p:stCondLst>
+                                            <p:cond delay="0"/>
+                                          </p:stCondLst>
+                                        </p:cTn>
+                                        <p:tgtEl>
+                                          <p:spTgt spid="294">
+                                            <p:txEl>
+                                              <p:pRg end="2" st="2"/>
+                                            </p:txEl>
+                                          </p:spTgt>
+                                        </p:tgtEl>
+                                        <p:attrNameLst>
+                                          <p:attrName>style.visibility</p:attrName>
+                                        </p:attrNameLst>
+                                      </p:cBhvr>
+                                      <p:to>
+                                        <p:strVal val="visible"/>
+                                      </p:to>
+                                    </p:set>
+                                  </p:childTnLst>
+                                </p:cTn>
+                              </p:par>
+                            </p:childTnLst>
+                          </p:cTn>
+                        </p:par>
+                      </p:childTnLst>
+                    </p:cTn>
+                  </p:par>
+                  <p:par>
+                    <p:cTn fill="hold">
+                      <p:stCondLst>
+                        <p:cond delay="indefinite"/>
+                      </p:stCondLst>
+                      <p:childTnLst>
+                        <p:par>
+                          <p:cTn fill="hold">
+                            <p:stCondLst>
+                              <p:cond delay="0"/>
+                            </p:stCondLst>
+                            <p:childTnLst>
+                              <p:par>
+                                <p:cTn fill="hold" nodeType="clickEffect" presetClass="entr" presetID="1" presetSubtype="0">
+                                  <p:stCondLst>
+                                    <p:cond delay="0"/>
+                                  </p:stCondLst>
+                                  <p:childTnLst>
+                                    <p:set>
+                                      <p:cBhvr>
+                                        <p:cTn dur="1" fill="hold">
+                                          <p:stCondLst>
+                                            <p:cond delay="0"/>
+                                          </p:stCondLst>
+                                        </p:cTn>
+                                        <p:tgtEl>
+                                          <p:spTgt spid="294">
+                                            <p:txEl>
+                                              <p:pRg end="3" st="3"/>
+                                            </p:txEl>
+                                          </p:spTgt>
+                                        </p:tgtEl>
+                                        <p:attrNameLst>
+                                          <p:attrName>style.visibility</p:attrName>
+                                        </p:attrNameLst>
+                                      </p:cBhvr>
+                                      <p:to>
+                                        <p:strVal val="visible"/>
+                                      </p:to>
+                                    </p:set>
+                                  </p:childTnLst>
+                                </p:cTn>
+                              </p:par>
+                            </p:childTnLst>
+                          </p:cTn>
+                        </p:par>
+                      </p:childTnLst>
+                    </p:cTn>
+                  </p:par>
+                  <p:par>
+                    <p:cTn fill="hold">
+                      <p:stCondLst>
+                        <p:cond delay="indefinite"/>
+                      </p:stCondLst>
+                      <p:childTnLst>
+                        <p:par>
+                          <p:cTn fill="hold">
+                            <p:stCondLst>
+                              <p:cond delay="0"/>
+                            </p:stCondLst>
+                            <p:childTnLst>
+                              <p:par>
+                                <p:cTn fill="hold" nodeType="clickEffect" presetClass="entr" presetID="1" presetSubtype="0">
+                                  <p:stCondLst>
+                                    <p:cond delay="0"/>
+                                  </p:stCondLst>
+                                  <p:childTnLst>
+                                    <p:set>
+                                      <p:cBhvr>
+                                        <p:cTn dur="1" fill="hold">
+                                          <p:stCondLst>
+                                            <p:cond delay="0"/>
+                                          </p:stCondLst>
+                                        </p:cTn>
+                                        <p:tgtEl>
+                                          <p:spTgt spid="294">
+                                            <p:txEl>
+                                              <p:pRg end="4" st="4"/>
+                                            </p:txEl>
+                                          </p:spTgt>
+                                        </p:tgtEl>
+                                        <p:attrNameLst>
+                                          <p:attrName>style.visibility</p:attrName>
+                                        </p:attrNameLst>
+                                      </p:cBhvr>
+                                      <p:to>
+                                        <p:strVal val="visible"/>
+                                      </p:to>
+                                    </p:set>
+                                  </p:childTnLst>
+                                </p:cTn>
+                              </p:par>
+                            </p:childTnLst>
+                          </p:cTn>
+                        </p:par>
+                      </p:childTnLst>
+                    </p:cTn>
+                  </p:par>
+                  <p:par>
+                    <p:cTn fill="hold">
+                      <p:stCondLst>
+                        <p:cond delay="indefinite"/>
+                      </p:stCondLst>
+                      <p:childTnLst>
+                        <p:par>
+                          <p:cTn fill="hold">
+                            <p:stCondLst>
+                              <p:cond delay="0"/>
+                            </p:stCondLst>
+                            <p:childTnLst>
+                              <p:par>
+                                <p:cTn fill="hold" nodeType="clickEffect" presetClass="entr" presetID="1" presetSubtype="0">
+                                  <p:stCondLst>
+                                    <p:cond delay="0"/>
+                                  </p:stCondLst>
+                                  <p:childTnLst>
+                                    <p:set>
+                                      <p:cBhvr>
+                                        <p:cTn dur="1" fill="hold">
+                                          <p:stCondLst>
+                                            <p:cond delay="0"/>
+                                          </p:stCondLst>
+                                        </p:cTn>
+                                        <p:tgtEl>
+                                          <p:spTgt spid="294">
+                                            <p:txEl>
+                                              <p:pRg end="5" st="5"/>
+                                            </p:txEl>
+                                          </p:spTgt>
+                                        </p:tgtEl>
+                                        <p:attrNameLst>
+                                          <p:attrName>style.visibility</p:attrName>
+                                        </p:attrNameLst>
+                                      </p:cBhvr>
+                                      <p:to>
+                                        <p:strVal val="visible"/>
+                                      </p:to>
+                                    </p:set>
+                                  </p:childTnLst>
+                                </p:cTn>
+                              </p:par>
+                            </p:childTnLst>
+                          </p:cTn>
+                        </p:par>
+                      </p:childTnLst>
+                    </p:cTn>
+                  </p:par>
+                  <p:par>
+                    <p:cTn fill="hold">
+                      <p:stCondLst>
+                        <p:cond delay="indefinite"/>
+                      </p:stCondLst>
+                      <p:childTnLst>
+                        <p:par>
+                          <p:cTn fill="hold">
+                            <p:stCondLst>
+                              <p:cond delay="0"/>
+                            </p:stCondLst>
+                            <p:childTnLst>
+                              <p:par>
+                                <p:cTn fill="hold" nodeType="clickEffect" presetClass="entr" presetID="1" presetSubtype="0">
+                                  <p:stCondLst>
+                                    <p:cond delay="0"/>
+                                  </p:stCondLst>
+                                  <p:childTnLst>
+                                    <p:set>
+                                      <p:cBhvr>
+                                        <p:cTn dur="1" fill="hold">
+                                          <p:stCondLst>
+                                            <p:cond delay="0"/>
+                                          </p:stCondLst>
+                                        </p:cTn>
+                                        <p:tgtEl>
+                                          <p:spTgt spid="294">
+                                            <p:txEl>
+                                              <p:pRg end="6" st="6"/>
+                                            </p:txEl>
+                                          </p:spTgt>
+                                        </p:tgtEl>
+                                        <p:attrNameLst>
+                                          <p:attrName>style.visibility</p:attrName>
+                                        </p:attrNameLst>
+                                      </p:cBhvr>
+                                      <p:to>
+                                        <p:strVal val="visible"/>
+                                      </p:to>
+                                    </p:set>
+                                  </p:childTnLst>
+                                </p:cTn>
+                              </p:par>
+                            </p:childTnLst>
+                          </p:cTn>
+                        </p:par>
+                      </p:childTnLst>
+                    </p:cTn>
+                  </p:par>
+                  <p:par>
+                    <p:cTn fill="hold">
+                      <p:stCondLst>
+                        <p:cond delay="indefinite"/>
+                      </p:stCondLst>
+                      <p:childTnLst>
+                        <p:par>
+                          <p:cTn fill="hold">
+                            <p:stCondLst>
+                              <p:cond delay="0"/>
+                            </p:stCondLst>
+                            <p:childTnLst>
+                              <p:par>
+                                <p:cTn fill="hold" nodeType="clickEffect" presetClass="entr" presetID="1" presetSubtype="0">
+                                  <p:stCondLst>
+                                    <p:cond delay="0"/>
+                                  </p:stCondLst>
+                                  <p:childTnLst>
+                                    <p:set>
+                                      <p:cBhvr>
+                                        <p:cTn dur="1" fill="hold">
+                                          <p:stCondLst>
+                                            <p:cond delay="0"/>
+                                          </p:stCondLst>
+                                        </p:cTn>
+                                        <p:tgtEl>
+                                          <p:spTgt spid="294">
+                                            <p:txEl>
+                                              <p:pRg end="7" st="7"/>
+                                            </p:txEl>
+                                          </p:spTgt>
+                                        </p:tgtEl>
+                                        <p:attrNameLst>
+                                          <p:attrName>style.visibility</p:attrName>
+                                        </p:attrNameLst>
+                                      </p:cBhvr>
+                                      <p:to>
+                                        <p:strVal val="visible"/>
+                                      </p:to>
+                                    </p:set>
+                                  </p:childTnLst>
+                                </p:cTn>
+                              </p:par>
+                            </p:childTnLst>
+                          </p:cTn>
+                        </p:par>
+                      </p:childTnLst>
+                    </p:cTn>
+                  </p:par>
+                  <p:par>
+                    <p:cTn fill="hold">
+                      <p:stCondLst>
+                        <p:cond delay="indefinite"/>
+                      </p:stCondLst>
+                      <p:childTnLst>
+                        <p:par>
+                          <p:cTn fill="hold">
+                            <p:stCondLst>
+                              <p:cond delay="0"/>
+                            </p:stCondLst>
+                            <p:childTnLst>
+                              <p:par>
+                                <p:cTn fill="hold" nodeType="clickEffect" presetClass="entr" presetID="1" presetSubtype="0">
+                                  <p:stCondLst>
+                                    <p:cond delay="0"/>
+                                  </p:stCondLst>
+                                  <p:childTnLst>
+                                    <p:set>
+                                      <p:cBhvr>
+                                        <p:cTn dur="1" fill="hold">
+                                          <p:stCondLst>
+                                            <p:cond delay="0"/>
+                                          </p:stCondLst>
+                                        </p:cTn>
+                                        <p:tgtEl>
+                                          <p:spTgt spid="294">
+                                            <p:txEl>
+                                              <p:pRg end="8" st="8"/>
+                                            </p:txEl>
+                                          </p:spTgt>
+                                        </p:tgtEl>
+                                        <p:attrNameLst>
+                                          <p:attrName>style.visibility</p:attrName>
+                                        </p:attrNameLst>
+                                      </p:cBhvr>
+                                      <p:to>
+                                        <p:strVal val="visible"/>
+                                      </p:to>
+                                    </p:set>
+                                  </p:childTnLst>
+                                </p:cTn>
+                              </p:par>
+                            </p:childTnLst>
+                          </p:cTn>
+                        </p:par>
+                      </p:childTnLst>
+                    </p:cTn>
+                  </p:par>
+                  <p:par>
+                    <p:cTn fill="hold">
+                      <p:stCondLst>
+                        <p:cond delay="indefinite"/>
+                      </p:stCondLst>
+                      <p:childTnLst>
+                        <p:par>
+                          <p:cTn fill="hold">
+                            <p:stCondLst>
+                              <p:cond delay="0"/>
+                            </p:stCondLst>
+                            <p:childTnLst>
+                              <p:par>
+                                <p:cTn fill="hold" nodeType="clickEffect" presetClass="entr" presetID="1" presetSubtype="0">
+                                  <p:stCondLst>
+                                    <p:cond delay="0"/>
+                                  </p:stCondLst>
+                                  <p:childTnLst>
+                                    <p:set>
+                                      <p:cBhvr>
+                                        <p:cTn dur="1" fill="hold">
+                                          <p:stCondLst>
+                                            <p:cond delay="0"/>
+                                          </p:stCondLst>
+                                        </p:cTn>
+                                        <p:tgtEl>
+                                          <p:spTgt spid="294">
+                                            <p:txEl>
+                                              <p:pRg end="9" st="9"/>
+                                            </p:txEl>
+                                          </p:spTgt>
+                                        </p:tgtEl>
+                                        <p:attrNameLst>
+                                          <p:attrName>style.visibility</p:attrName>
+                                        </p:attrNameLst>
+                                      </p:cBhvr>
+                                      <p:to>
+                                        <p:strVal val="visible"/>
+                                      </p:to>
+                                    </p:set>
+                                  </p:childTnLst>
+                                </p:cTn>
+                              </p:par>
+                            </p:childTnLst>
+                          </p:cTn>
+                        </p:par>
+                      </p:childTnLst>
+                    </p:cTn>
+                  </p:par>
+                  <p:par>
+                    <p:cTn fill="hold">
+                      <p:stCondLst>
+                        <p:cond delay="indefinite"/>
+                      </p:stCondLst>
+                      <p:childTnLst>
+                        <p:par>
+                          <p:cTn fill="hold">
+                            <p:stCondLst>
+                              <p:cond delay="0"/>
+                            </p:stCondLst>
+                            <p:childTnLst>
+                              <p:par>
+                                <p:cTn fill="hold" nodeType="clickEffect" presetClass="entr" presetID="1" presetSubtype="0">
+                                  <p:stCondLst>
+                                    <p:cond delay="0"/>
+                                  </p:stCondLst>
+                                  <p:childTnLst>
+                                    <p:set>
+                                      <p:cBhvr>
+                                        <p:cTn dur="1" fill="hold">
+                                          <p:stCondLst>
+                                            <p:cond delay="0"/>
+                                          </p:stCondLst>
+                                        </p:cTn>
+                                        <p:tgtEl>
+                                          <p:spTgt spid="294">
+                                            <p:txEl>
+                                              <p:pRg end="10" st="10"/>
+                                            </p:txEl>
+                                          </p:spTgt>
+                                        </p:tgtEl>
+                                        <p:attrNameLst>
+                                          <p:attrName>style.visibility</p:attrName>
+                                        </p:attrNameLst>
+                                      </p:cBhvr>
+                                      <p:to>
+                                        <p:strVal val="visible"/>
+                                      </p:to>
+                                    </p:set>
+                                  </p:childTnLst>
+                                </p:cTn>
+                              </p:par>
+                            </p:childTnLst>
+                          </p:cTn>
+                        </p:par>
+                      </p:childTnLst>
+                    </p:cTn>
+                  </p:par>
+                  <p:par>
+                    <p:cTn fill="hold">
+                      <p:stCondLst>
+                        <p:cond delay="indefinite"/>
+                      </p:stCondLst>
+                      <p:childTnLst>
+                        <p:par>
+                          <p:cTn fill="hold">
+                            <p:stCondLst>
+                              <p:cond delay="0"/>
+                            </p:stCondLst>
+                            <p:childTnLst>
+                              <p:par>
+                                <p:cTn fill="hold" nodeType="clickEffect" presetClass="entr" presetID="1" presetSubtype="0">
+                                  <p:stCondLst>
+                                    <p:cond delay="0"/>
+                                  </p:stCondLst>
+                                  <p:childTnLst>
+                                    <p:set>
+                                      <p:cBhvr>
+                                        <p:cTn dur="1" fill="hold">
+                                          <p:stCondLst>
+                                            <p:cond delay="0"/>
+                                          </p:stCondLst>
+                                        </p:cTn>
+                                        <p:tgtEl>
+                                          <p:spTgt spid="294">
+                                            <p:txEl>
+                                              <p:pRg end="11" st="11"/>
+                                            </p:txEl>
+                                          </p:spTgt>
+                                        </p:tgtEl>
+                                        <p:attrNameLst>
+                                          <p:attrName>style.visibility</p:attrName>
+                                        </p:attrNameLst>
+                                      </p:cBhvr>
+                                      <p:to>
+                                        <p:strVal val="visible"/>
+                                      </p:to>
+                                    </p:set>
+                                  </p:childTnLst>
+                                </p:cTn>
+                              </p:par>
+                            </p:childTnLst>
+                          </p:cTn>
+                        </p:par>
+                      </p:childTnLst>
+                    </p:cTn>
+                  </p:par>
+                  <p:par>
+                    <p:cTn fill="hold">
+                      <p:stCondLst>
+                        <p:cond delay="indefinite"/>
+                      </p:stCondLst>
+                      <p:childTnLst>
+                        <p:par>
+                          <p:cTn fill="hold">
+                            <p:stCondLst>
+                              <p:cond delay="0"/>
+                            </p:stCondLst>
+                            <p:childTnLst>
+                              <p:par>
+                                <p:cTn fill="hold" nodeType="clickEffect" presetClass="entr" presetID="1" presetSubtype="0">
+                                  <p:stCondLst>
+                                    <p:cond delay="0"/>
+                                  </p:stCondLst>
+                                  <p:childTnLst>
+                                    <p:set>
+                                      <p:cBhvr>
+                                        <p:cTn dur="1" fill="hold">
+                                          <p:stCondLst>
+                                            <p:cond delay="0"/>
+                                          </p:stCondLst>
+                                        </p:cTn>
+                                        <p:tgtEl>
+                                          <p:spTgt spid="294">
+                                            <p:txEl>
+                                              <p:pRg end="12" st="12"/>
+                                            </p:txEl>
+                                          </p:spTgt>
+                                        </p:tgtEl>
+                                        <p:attrNameLst>
+                                          <p:attrName>style.visibility</p:attrName>
+                                        </p:attrNameLst>
+                                      </p:cBhvr>
+                                      <p:to>
+                                        <p:strVal val="visible"/>
+                                      </p:to>
+                                    </p:set>
+                                  </p:childTnLst>
+                                </p:cTn>
+                              </p:par>
+                            </p:childTnLst>
+                          </p:cTn>
+                        </p:par>
+                      </p:childTnLst>
+                    </p:cTn>
+                  </p:par>
+                </p:childTnLst>
+              </p:cTn>
+              <p:prevCondLst>
+                <p:cond evt="onPrev">
+                  <p:tgtEl>
+                    <p:sldTgt/>
+                  </p:tgtEl>
+                </p:cond>
+              </p:prevCondLst>
+              <p:nextCondLst>
+                <p:cond evt="onNext">
+                  <p:tgtEl>
+                    <p:sldTgt/>
+                  </p:tgtEl>
+                </p:cond>
+              </p:nextCondLst>
+            </p:seq>
+          </p:childTnLst>
+        </p:cTn>
+      </p:par>
+    </p:tnLst>
+  </p:timing>
 </p:sld>
 </file>
 
@@ -16657,36 +15848,135 @@
             </a:pPr>
             <a:r>
               <a:rPr lang="en"/>
-              <a:t>An Entity Is a List of Components</a:t>
+              <a:t>Check Yourself</a:t>
             </a:r>
             <a:endParaRPr/>
           </a:p>
         </p:txBody>
       </p:sp>
-      <p:pic>
-        <p:nvPicPr>
-          <p:cNvPr id="3" name="Picture 2" descr="components.png"/>
-          <p:cNvPicPr>
-            <a:picLocks noChangeAspect="1"/>
-          </p:cNvPicPr>
-          <p:nvPr/>
-        </p:nvPicPr>
-        <p:blipFill>
-          <a:blip r:embed="rId2"/>
-          <a:stretch>
-            <a:fillRect/>
-          </a:stretch>
-        </p:blipFill>
+      <p:sp>
+        <p:nvSpPr>
+          <p:cNvPr id="3" name="Text Placeholder 2"/>
+          <p:cNvSpPr>
+            <a:spLocks noGrp="1"/>
+          </p:cNvSpPr>
+          <p:nvPr>
+            <p:ph type="body" idx="1"/>
+          </p:nvPr>
+        </p:nvSpPr>
         <p:spPr>
           <a:xfrm>
-            <a:off x="594360" y="1051560"/>
-            <a:ext cx="7955279" cy="3977639"/>
+            <a:off x="311700" y="885950"/>
+            <a:ext cx="8520600" cy="1719072"/>
+          </a:xfrm>
+        </p:spPr>
+        <p:txBody>
+          <a:bodyPr/>
+          <a:lstStyle/>
+          <a:p>
+            <a:pPr indent="-330200" lvl="0" marL="457200" rtl="0" algn="l">
+              <a:spcBef>
+                <a:spcPts val="0"/>
+              </a:spcBef>
+              <a:spcAft>
+                <a:spcPts val="0"/>
+              </a:spcAft>
+              <a:buSzPts val="1600"/>
+              <a:buChar char="●"/>
+            </a:pPr>
+            <a:r>
+              <a:rPr lang="en"/>
+              <a:t>Why does inheritance break down for this game?</a:t>
+            </a:r>
+            <a:endParaRPr/>
+          </a:p>
+          <a:p>
+            <a:pPr indent="-330200" lvl="0" marL="457200" rtl="0" algn="l">
+              <a:spcBef>
+                <a:spcPts val="0"/>
+              </a:spcBef>
+              <a:spcAft>
+                <a:spcPts val="0"/>
+              </a:spcAft>
+              <a:buSzPts val="1600"/>
+              <a:buChar char="●"/>
+            </a:pPr>
+            <a:r>
+              <a:rPr lang="en"/>
+              <a:t>How do components in one entity work together without knowing each other’s classes?</a:t>
+            </a:r>
+            <a:endParaRPr/>
+          </a:p>
+          <a:p>
+            <a:pPr indent="-330200" lvl="0" marL="457200" rtl="0" algn="l">
+              <a:spcBef>
+                <a:spcPts val="0"/>
+              </a:spcBef>
+              <a:spcAft>
+                <a:spcPts val="0"/>
+              </a:spcAft>
+              <a:buSzPts val="1600"/>
+              <a:buChar char="●"/>
+            </a:pPr>
+            <a:r>
+              <a:rPr lang="en"/>
+              <a:t>What goes in a type object, and what goes in an instance?</a:t>
+            </a:r>
+            <a:endParaRPr/>
+          </a:p>
+          <a:p>
+            <a:pPr indent="-330200" lvl="0" marL="457200" rtl="0" algn="l">
+              <a:spcBef>
+                <a:spcPts val="0"/>
+              </a:spcBef>
+              <a:spcAft>
+                <a:spcPts val="0"/>
+              </a:spcAft>
+              <a:buSzPts val="1600"/>
+              <a:buChar char="●"/>
+            </a:pPr>
+            <a:r>
+              <a:rPr lang="en"/>
+              <a:t>How is picking on a grid different from picking a list of objects?</a:t>
+            </a:r>
+            <a:endParaRPr/>
+          </a:p>
+        </p:txBody>
+      </p:sp>
+      <p:sp>
+        <p:nvSpPr>
+          <p:cNvPr id="4" name="TextBox 3"/>
+          <p:cNvSpPr txBox="1"/>
+          <p:nvPr/>
+        </p:nvSpPr>
+        <p:spPr>
+          <a:xfrm>
+            <a:off x="457200" y="3182112"/>
+            <a:ext cx="8229600" cy="457200"/>
           </a:xfrm>
           <a:prstGeom prst="rect">
             <a:avLst/>
           </a:prstGeom>
+          <a:noFill/>
         </p:spPr>
-      </p:pic>
+        <p:txBody>
+          <a:bodyPr wrap="square">
+            <a:spAutoFit/>
+          </a:bodyPr>
+          <a:lstStyle/>
+          <a:p>
+            <a:pPr algn="ctr"/>
+            <a:r>
+              <a:rPr sz="1400" b="0" i="0">
+                <a:solidFill>
+                  <a:srgbClr val="9AA3AB"/>
+                </a:solidFill>
+              </a:rPr>
+              <a:t>The answers, and more questions, are on the course site.</a:t>
+            </a:r>
+          </a:p>
+        </p:txBody>
+      </p:sp>
     </p:spTree>
   </p:cSld>
   <p:clrMapOvr>
@@ -16696,76 +15986,834 @@
 </file>
 
 <file path=ppt/slides/slide35.xml><?xml version="1.0" encoding="utf-8"?>
-<p:sld xmlns:a="http://schemas.openxmlformats.org/drawingml/2006/main" xmlns:p="http://schemas.openxmlformats.org/presentationml/2006/main" xmlns:r="http://schemas.openxmlformats.org/officeDocument/2006/relationships">
+<p:sld xmlns:a="http://schemas.openxmlformats.org/drawingml/2006/main" xmlns:r="http://schemas.openxmlformats.org/officeDocument/2006/relationships" xmlns:mc="http://schemas.openxmlformats.org/markup-compatibility/2006" xmlns:mv="urn:schemas-microsoft-com:mac:vml" xmlns:p="http://schemas.openxmlformats.org/presentationml/2006/main" xmlns:c="http://schemas.openxmlformats.org/drawingml/2006/chart" xmlns:dgm="http://schemas.openxmlformats.org/drawingml/2006/diagram" xmlns:o="urn:schemas-microsoft-com:office:office" xmlns:v="urn:schemas-microsoft-com:vml" xmlns:pvml="urn:schemas-microsoft-com:office:powerpoint" xmlns:com="http://schemas.openxmlformats.org/drawingml/2006/compatibility" xmlns:p14="http://schemas.microsoft.com/office/powerpoint/2010/main" xmlns:p15="http://schemas.microsoft.com/office/powerpoint/2012/main" xmlns:ahyp="http://schemas.microsoft.com/office/drawing/2018/hyperlinkcolor">
   <p:cSld>
     <p:spTree>
       <p:nvGrpSpPr>
-        <p:cNvPr id="1" name=""/>
+        <p:cNvPr id="292" name="Shape 292"/>
         <p:cNvGrpSpPr/>
         <p:nvPr/>
       </p:nvGrpSpPr>
-      <p:grpSpPr/>
+      <p:grpSpPr>
+        <a:xfrm>
+          <a:off x="0" y="0"/>
+          <a:ext cx="0" cy="0"/>
+          <a:chOff x="0" y="0"/>
+          <a:chExt cx="0" cy="0"/>
+        </a:xfrm>
+      </p:grpSpPr>
       <p:sp>
         <p:nvSpPr>
-          <p:cNvPr id="2" name="Title 1"/>
-          <p:cNvSpPr>
-            <a:spLocks noGrp="1"/>
-          </p:cNvSpPr>
+          <p:cNvPr id="293" name="Google Shape;293;p45"/>
+          <p:cNvSpPr txBox="1"/>
           <p:nvPr>
             <p:ph type="title"/>
           </p:nvPr>
         </p:nvSpPr>
-        <p:spPr/>
-        <p:txBody>
-          <a:bodyPr/>
-          <a:lstStyle/>
-          <a:p>
-            <a:pPr indent="0" lvl="0" marL="0" rtl="0" algn="l">
-              <a:spcBef>
-                <a:spcPts val="0"/>
-              </a:spcBef>
-              <a:spcAft>
-                <a:spcPts val="0"/>
-              </a:spcAft>
-              <a:buNone/>
-            </a:pPr>
-            <a:r>
-              <a:rPr lang="en"/>
-              <a:t>From a Click to a Cell</a:t>
-            </a:r>
-            <a:endParaRPr/>
-          </a:p>
-        </p:txBody>
-      </p:sp>
-      <p:pic>
-        <p:nvPicPr>
-          <p:cNvPr id="3" name="Picture 2" descr="picking.png"/>
-          <p:cNvPicPr>
-            <a:picLocks noChangeAspect="1"/>
-          </p:cNvPicPr>
-          <p:nvPr/>
-        </p:nvPicPr>
-        <p:blipFill>
-          <a:blip r:embed="rId2"/>
-          <a:stretch>
-            <a:fillRect/>
-          </a:stretch>
-        </p:blipFill>
         <p:spPr>
           <a:xfrm>
-            <a:off x="480713" y="1051560"/>
-            <a:ext cx="8182573" cy="3977640"/>
+            <a:off x="311700" y="195615"/>
+            <a:ext cx="8520600" cy="572700"/>
           </a:xfrm>
           <a:prstGeom prst="rect">
             <a:avLst/>
           </a:prstGeom>
         </p:spPr>
-      </p:pic>
+        <p:txBody>
+          <a:bodyPr anchorCtr="0" anchor="t" bIns="91425" lIns="91425" spcFirstLastPara="1" rIns="91425" wrap="square" tIns="91425">
+            <a:normAutofit fontScale="90000"/>
+          </a:bodyPr>
+          <a:lstStyle/>
+          <a:p>
+            <a:pPr indent="0" lvl="0" marL="0" rtl="0" algn="l">
+              <a:spcBef>
+                <a:spcPts val="0"/>
+              </a:spcBef>
+              <a:spcAft>
+                <a:spcPts val="0"/>
+              </a:spcAft>
+              <a:buNone/>
+            </a:pPr>
+            <a:r>
+              <a:rPr lang="en">
+                <a:solidFill>
+                  <a:schemeClr val="accent5"/>
+                </a:solidFill>
+              </a:rPr>
+              <a:t>Apply It to Your Project</a:t>
+            </a:r>
+            <a:endParaRPr>
+              <a:solidFill>
+                <a:schemeClr val="accent5"/>
+              </a:solidFill>
+            </a:endParaRPr>
+          </a:p>
+        </p:txBody>
+      </p:sp>
+      <p:sp>
+        <p:nvSpPr>
+          <p:cNvPr id="294" name="Google Shape;294;p45"/>
+          <p:cNvSpPr txBox="1"/>
+          <p:nvPr>
+            <p:ph idx="1" type="body"/>
+          </p:nvPr>
+        </p:nvSpPr>
+        <p:spPr>
+          <a:xfrm>
+            <a:off x="311700" y="885950"/>
+            <a:ext cx="8520600" cy="4023300"/>
+          </a:xfrm>
+          <a:prstGeom prst="rect">
+            <a:avLst/>
+          </a:prstGeom>
+        </p:spPr>
+        <p:txBody>
+          <a:bodyPr anchorCtr="0" anchor="t" bIns="91425" lIns="91425" spcFirstLastPara="1" rIns="91425" wrap="square" tIns="91425">
+            <a:normAutofit/>
+          </a:bodyPr>
+          <a:lstStyle/>
+          <a:p>
+            <a:pPr indent="-330200" lvl="0" marL="457200" rtl="0" algn="l">
+              <a:spcBef>
+                <a:spcPts val="0"/>
+              </a:spcBef>
+              <a:spcAft>
+                <a:spcPts val="0"/>
+              </a:spcAft>
+              <a:buSzPts val="1600"/>
+              <a:buChar char="●"/>
+            </a:pPr>
+            <a:r>
+              <a:rPr lang="en"/>
+              <a:t>Where do subclasses exist only to combine abilities?</a:t>
+            </a:r>
+            <a:endParaRPr/>
+          </a:p>
+          <a:p>
+            <a:pPr indent="-330200" lvl="0" marL="457200" rtl="0" algn="l">
+              <a:spcBef>
+                <a:spcPts val="0"/>
+              </a:spcBef>
+              <a:spcAft>
+                <a:spcPts val="0"/>
+              </a:spcAft>
+              <a:buSzPts val="1600"/>
+              <a:buChar char="●"/>
+            </a:pPr>
+            <a:r>
+              <a:rPr lang="en"/>
+              <a:t>Which abilities could become components?</a:t>
+            </a:r>
+            <a:endParaRPr/>
+          </a:p>
+          <a:p>
+            <a:pPr indent="-330200" lvl="0" marL="457200" rtl="0" algn="l">
+              <a:spcBef>
+                <a:spcPts val="0"/>
+              </a:spcBef>
+              <a:spcAft>
+                <a:spcPts val="0"/>
+              </a:spcAft>
+              <a:buSzPts val="1600"/>
+              <a:buChar char="●"/>
+            </a:pPr>
+            <a:r>
+              <a:rPr lang="en"/>
+              <a:t>Which data belongs to a kind of thing? Could it be a data file?</a:t>
+            </a:r>
+            <a:endParaRPr/>
+          </a:p>
+          <a:p>
+            <a:pPr indent="-330200" lvl="0" marL="457200" rtl="0" algn="l">
+              <a:spcBef>
+                <a:spcPts val="0"/>
+              </a:spcBef>
+              <a:spcAft>
+                <a:spcPts val="0"/>
+              </a:spcAft>
+              <a:buSzPts val="1600"/>
+              <a:buChar char="●"/>
+            </a:pPr>
+            <a:r>
+              <a:rPr lang="en"/>
+              <a:t>How does your game find out what was clicked?</a:t>
+            </a:r>
+            <a:endParaRPr/>
+          </a:p>
+        </p:txBody>
+      </p:sp>
     </p:spTree>
   </p:cSld>
   <p:clrMapOvr>
     <a:masterClrMapping/>
   </p:clrMapOvr>
+  <p:timing>
+    <p:tnLst>
+      <p:par>
+        <p:cTn dur="indefinite" nodeType="tmRoot" restart="never">
+          <p:childTnLst>
+            <p:seq concurrent="1" nextAc="seek">
+              <p:cTn dur="indefinite" id="2" nodeType="mainSeq">
+                <p:childTnLst>
+                  <p:par>
+                    <p:cTn fill="hold">
+                      <p:stCondLst>
+                        <p:cond delay="indefinite"/>
+                      </p:stCondLst>
+                      <p:childTnLst>
+                        <p:par>
+                          <p:cTn fill="hold">
+                            <p:stCondLst>
+                              <p:cond delay="0"/>
+                            </p:stCondLst>
+                            <p:childTnLst>
+                              <p:par>
+                                <p:cTn fill="hold" nodeType="clickEffect" presetClass="entr" presetID="1" presetSubtype="0">
+                                  <p:stCondLst>
+                                    <p:cond delay="0"/>
+                                  </p:stCondLst>
+                                  <p:childTnLst>
+                                    <p:set>
+                                      <p:cBhvr>
+                                        <p:cTn dur="1" fill="hold">
+                                          <p:stCondLst>
+                                            <p:cond delay="0"/>
+                                          </p:stCondLst>
+                                        </p:cTn>
+                                        <p:tgtEl>
+                                          <p:spTgt spid="294">
+                                            <p:txEl>
+                                              <p:pRg end="0" st="0"/>
+                                            </p:txEl>
+                                          </p:spTgt>
+                                        </p:tgtEl>
+                                        <p:attrNameLst>
+                                          <p:attrName>style.visibility</p:attrName>
+                                        </p:attrNameLst>
+                                      </p:cBhvr>
+                                      <p:to>
+                                        <p:strVal val="visible"/>
+                                      </p:to>
+                                    </p:set>
+                                  </p:childTnLst>
+                                </p:cTn>
+                              </p:par>
+                            </p:childTnLst>
+                          </p:cTn>
+                        </p:par>
+                      </p:childTnLst>
+                    </p:cTn>
+                  </p:par>
+                  <p:par>
+                    <p:cTn fill="hold">
+                      <p:stCondLst>
+                        <p:cond delay="indefinite"/>
+                      </p:stCondLst>
+                      <p:childTnLst>
+                        <p:par>
+                          <p:cTn fill="hold">
+                            <p:stCondLst>
+                              <p:cond delay="0"/>
+                            </p:stCondLst>
+                            <p:childTnLst>
+                              <p:par>
+                                <p:cTn fill="hold" nodeType="clickEffect" presetClass="entr" presetID="1" presetSubtype="0">
+                                  <p:stCondLst>
+                                    <p:cond delay="0"/>
+                                  </p:stCondLst>
+                                  <p:childTnLst>
+                                    <p:set>
+                                      <p:cBhvr>
+                                        <p:cTn dur="1" fill="hold">
+                                          <p:stCondLst>
+                                            <p:cond delay="0"/>
+                                          </p:stCondLst>
+                                        </p:cTn>
+                                        <p:tgtEl>
+                                          <p:spTgt spid="294">
+                                            <p:txEl>
+                                              <p:pRg end="1" st="1"/>
+                                            </p:txEl>
+                                          </p:spTgt>
+                                        </p:tgtEl>
+                                        <p:attrNameLst>
+                                          <p:attrName>style.visibility</p:attrName>
+                                        </p:attrNameLst>
+                                      </p:cBhvr>
+                                      <p:to>
+                                        <p:strVal val="visible"/>
+                                      </p:to>
+                                    </p:set>
+                                  </p:childTnLst>
+                                </p:cTn>
+                              </p:par>
+                            </p:childTnLst>
+                          </p:cTn>
+                        </p:par>
+                      </p:childTnLst>
+                    </p:cTn>
+                  </p:par>
+                  <p:par>
+                    <p:cTn fill="hold">
+                      <p:stCondLst>
+                        <p:cond delay="indefinite"/>
+                      </p:stCondLst>
+                      <p:childTnLst>
+                        <p:par>
+                          <p:cTn fill="hold">
+                            <p:stCondLst>
+                              <p:cond delay="0"/>
+                            </p:stCondLst>
+                            <p:childTnLst>
+                              <p:par>
+                                <p:cTn fill="hold" nodeType="clickEffect" presetClass="entr" presetID="1" presetSubtype="0">
+                                  <p:stCondLst>
+                                    <p:cond delay="0"/>
+                                  </p:stCondLst>
+                                  <p:childTnLst>
+                                    <p:set>
+                                      <p:cBhvr>
+                                        <p:cTn dur="1" fill="hold">
+                                          <p:stCondLst>
+                                            <p:cond delay="0"/>
+                                          </p:stCondLst>
+                                        </p:cTn>
+                                        <p:tgtEl>
+                                          <p:spTgt spid="294">
+                                            <p:txEl>
+                                              <p:pRg end="2" st="2"/>
+                                            </p:txEl>
+                                          </p:spTgt>
+                                        </p:tgtEl>
+                                        <p:attrNameLst>
+                                          <p:attrName>style.visibility</p:attrName>
+                                        </p:attrNameLst>
+                                      </p:cBhvr>
+                                      <p:to>
+                                        <p:strVal val="visible"/>
+                                      </p:to>
+                                    </p:set>
+                                  </p:childTnLst>
+                                </p:cTn>
+                              </p:par>
+                            </p:childTnLst>
+                          </p:cTn>
+                        </p:par>
+                      </p:childTnLst>
+                    </p:cTn>
+                  </p:par>
+                  <p:par>
+                    <p:cTn fill="hold">
+                      <p:stCondLst>
+                        <p:cond delay="indefinite"/>
+                      </p:stCondLst>
+                      <p:childTnLst>
+                        <p:par>
+                          <p:cTn fill="hold">
+                            <p:stCondLst>
+                              <p:cond delay="0"/>
+                            </p:stCondLst>
+                            <p:childTnLst>
+                              <p:par>
+                                <p:cTn fill="hold" nodeType="clickEffect" presetClass="entr" presetID="1" presetSubtype="0">
+                                  <p:stCondLst>
+                                    <p:cond delay="0"/>
+                                  </p:stCondLst>
+                                  <p:childTnLst>
+                                    <p:set>
+                                      <p:cBhvr>
+                                        <p:cTn dur="1" fill="hold">
+                                          <p:stCondLst>
+                                            <p:cond delay="0"/>
+                                          </p:stCondLst>
+                                        </p:cTn>
+                                        <p:tgtEl>
+                                          <p:spTgt spid="294">
+                                            <p:txEl>
+                                              <p:pRg end="3" st="3"/>
+                                            </p:txEl>
+                                          </p:spTgt>
+                                        </p:tgtEl>
+                                        <p:attrNameLst>
+                                          <p:attrName>style.visibility</p:attrName>
+                                        </p:attrNameLst>
+                                      </p:cBhvr>
+                                      <p:to>
+                                        <p:strVal val="visible"/>
+                                      </p:to>
+                                    </p:set>
+                                  </p:childTnLst>
+                                </p:cTn>
+                              </p:par>
+                            </p:childTnLst>
+                          </p:cTn>
+                        </p:par>
+                      </p:childTnLst>
+                    </p:cTn>
+                  </p:par>
+                  <p:par>
+                    <p:cTn fill="hold">
+                      <p:stCondLst>
+                        <p:cond delay="indefinite"/>
+                      </p:stCondLst>
+                      <p:childTnLst>
+                        <p:par>
+                          <p:cTn fill="hold">
+                            <p:stCondLst>
+                              <p:cond delay="0"/>
+                            </p:stCondLst>
+                            <p:childTnLst>
+                              <p:par>
+                                <p:cTn fill="hold" nodeType="clickEffect" presetClass="entr" presetID="1" presetSubtype="0">
+                                  <p:stCondLst>
+                                    <p:cond delay="0"/>
+                                  </p:stCondLst>
+                                  <p:childTnLst>
+                                    <p:set>
+                                      <p:cBhvr>
+                                        <p:cTn dur="1" fill="hold">
+                                          <p:stCondLst>
+                                            <p:cond delay="0"/>
+                                          </p:stCondLst>
+                                        </p:cTn>
+                                        <p:tgtEl>
+                                          <p:spTgt spid="294">
+                                            <p:txEl>
+                                              <p:pRg end="4" st="4"/>
+                                            </p:txEl>
+                                          </p:spTgt>
+                                        </p:tgtEl>
+                                        <p:attrNameLst>
+                                          <p:attrName>style.visibility</p:attrName>
+                                        </p:attrNameLst>
+                                      </p:cBhvr>
+                                      <p:to>
+                                        <p:strVal val="visible"/>
+                                      </p:to>
+                                    </p:set>
+                                  </p:childTnLst>
+                                </p:cTn>
+                              </p:par>
+                            </p:childTnLst>
+                          </p:cTn>
+                        </p:par>
+                      </p:childTnLst>
+                    </p:cTn>
+                  </p:par>
+                  <p:par>
+                    <p:cTn fill="hold">
+                      <p:stCondLst>
+                        <p:cond delay="indefinite"/>
+                      </p:stCondLst>
+                      <p:childTnLst>
+                        <p:par>
+                          <p:cTn fill="hold">
+                            <p:stCondLst>
+                              <p:cond delay="0"/>
+                            </p:stCondLst>
+                            <p:childTnLst>
+                              <p:par>
+                                <p:cTn fill="hold" nodeType="clickEffect" presetClass="entr" presetID="1" presetSubtype="0">
+                                  <p:stCondLst>
+                                    <p:cond delay="0"/>
+                                  </p:stCondLst>
+                                  <p:childTnLst>
+                                    <p:set>
+                                      <p:cBhvr>
+                                        <p:cTn dur="1" fill="hold">
+                                          <p:stCondLst>
+                                            <p:cond delay="0"/>
+                                          </p:stCondLst>
+                                        </p:cTn>
+                                        <p:tgtEl>
+                                          <p:spTgt spid="294">
+                                            <p:txEl>
+                                              <p:pRg end="5" st="5"/>
+                                            </p:txEl>
+                                          </p:spTgt>
+                                        </p:tgtEl>
+                                        <p:attrNameLst>
+                                          <p:attrName>style.visibility</p:attrName>
+                                        </p:attrNameLst>
+                                      </p:cBhvr>
+                                      <p:to>
+                                        <p:strVal val="visible"/>
+                                      </p:to>
+                                    </p:set>
+                                  </p:childTnLst>
+                                </p:cTn>
+                              </p:par>
+                            </p:childTnLst>
+                          </p:cTn>
+                        </p:par>
+                      </p:childTnLst>
+                    </p:cTn>
+                  </p:par>
+                  <p:par>
+                    <p:cTn fill="hold">
+                      <p:stCondLst>
+                        <p:cond delay="indefinite"/>
+                      </p:stCondLst>
+                      <p:childTnLst>
+                        <p:par>
+                          <p:cTn fill="hold">
+                            <p:stCondLst>
+                              <p:cond delay="0"/>
+                            </p:stCondLst>
+                            <p:childTnLst>
+                              <p:par>
+                                <p:cTn fill="hold" nodeType="clickEffect" presetClass="entr" presetID="1" presetSubtype="0">
+                                  <p:stCondLst>
+                                    <p:cond delay="0"/>
+                                  </p:stCondLst>
+                                  <p:childTnLst>
+                                    <p:set>
+                                      <p:cBhvr>
+                                        <p:cTn dur="1" fill="hold">
+                                          <p:stCondLst>
+                                            <p:cond delay="0"/>
+                                          </p:stCondLst>
+                                        </p:cTn>
+                                        <p:tgtEl>
+                                          <p:spTgt spid="294">
+                                            <p:txEl>
+                                              <p:pRg end="6" st="6"/>
+                                            </p:txEl>
+                                          </p:spTgt>
+                                        </p:tgtEl>
+                                        <p:attrNameLst>
+                                          <p:attrName>style.visibility</p:attrName>
+                                        </p:attrNameLst>
+                                      </p:cBhvr>
+                                      <p:to>
+                                        <p:strVal val="visible"/>
+                                      </p:to>
+                                    </p:set>
+                                  </p:childTnLst>
+                                </p:cTn>
+                              </p:par>
+                            </p:childTnLst>
+                          </p:cTn>
+                        </p:par>
+                      </p:childTnLst>
+                    </p:cTn>
+                  </p:par>
+                  <p:par>
+                    <p:cTn fill="hold">
+                      <p:stCondLst>
+                        <p:cond delay="indefinite"/>
+                      </p:stCondLst>
+                      <p:childTnLst>
+                        <p:par>
+                          <p:cTn fill="hold">
+                            <p:stCondLst>
+                              <p:cond delay="0"/>
+                            </p:stCondLst>
+                            <p:childTnLst>
+                              <p:par>
+                                <p:cTn fill="hold" nodeType="clickEffect" presetClass="entr" presetID="1" presetSubtype="0">
+                                  <p:stCondLst>
+                                    <p:cond delay="0"/>
+                                  </p:stCondLst>
+                                  <p:childTnLst>
+                                    <p:set>
+                                      <p:cBhvr>
+                                        <p:cTn dur="1" fill="hold">
+                                          <p:stCondLst>
+                                            <p:cond delay="0"/>
+                                          </p:stCondLst>
+                                        </p:cTn>
+                                        <p:tgtEl>
+                                          <p:spTgt spid="294">
+                                            <p:txEl>
+                                              <p:pRg end="7" st="7"/>
+                                            </p:txEl>
+                                          </p:spTgt>
+                                        </p:tgtEl>
+                                        <p:attrNameLst>
+                                          <p:attrName>style.visibility</p:attrName>
+                                        </p:attrNameLst>
+                                      </p:cBhvr>
+                                      <p:to>
+                                        <p:strVal val="visible"/>
+                                      </p:to>
+                                    </p:set>
+                                  </p:childTnLst>
+                                </p:cTn>
+                              </p:par>
+                            </p:childTnLst>
+                          </p:cTn>
+                        </p:par>
+                      </p:childTnLst>
+                    </p:cTn>
+                  </p:par>
+                  <p:par>
+                    <p:cTn fill="hold">
+                      <p:stCondLst>
+                        <p:cond delay="indefinite"/>
+                      </p:stCondLst>
+                      <p:childTnLst>
+                        <p:par>
+                          <p:cTn fill="hold">
+                            <p:stCondLst>
+                              <p:cond delay="0"/>
+                            </p:stCondLst>
+                            <p:childTnLst>
+                              <p:par>
+                                <p:cTn fill="hold" nodeType="clickEffect" presetClass="entr" presetID="1" presetSubtype="0">
+                                  <p:stCondLst>
+                                    <p:cond delay="0"/>
+                                  </p:stCondLst>
+                                  <p:childTnLst>
+                                    <p:set>
+                                      <p:cBhvr>
+                                        <p:cTn dur="1" fill="hold">
+                                          <p:stCondLst>
+                                            <p:cond delay="0"/>
+                                          </p:stCondLst>
+                                        </p:cTn>
+                                        <p:tgtEl>
+                                          <p:spTgt spid="294">
+                                            <p:txEl>
+                                              <p:pRg end="8" st="8"/>
+                                            </p:txEl>
+                                          </p:spTgt>
+                                        </p:tgtEl>
+                                        <p:attrNameLst>
+                                          <p:attrName>style.visibility</p:attrName>
+                                        </p:attrNameLst>
+                                      </p:cBhvr>
+                                      <p:to>
+                                        <p:strVal val="visible"/>
+                                      </p:to>
+                                    </p:set>
+                                  </p:childTnLst>
+                                </p:cTn>
+                              </p:par>
+                            </p:childTnLst>
+                          </p:cTn>
+                        </p:par>
+                      </p:childTnLst>
+                    </p:cTn>
+                  </p:par>
+                  <p:par>
+                    <p:cTn fill="hold">
+                      <p:stCondLst>
+                        <p:cond delay="indefinite"/>
+                      </p:stCondLst>
+                      <p:childTnLst>
+                        <p:par>
+                          <p:cTn fill="hold">
+                            <p:stCondLst>
+                              <p:cond delay="0"/>
+                            </p:stCondLst>
+                            <p:childTnLst>
+                              <p:par>
+                                <p:cTn fill="hold" nodeType="clickEffect" presetClass="entr" presetID="1" presetSubtype="0">
+                                  <p:stCondLst>
+                                    <p:cond delay="0"/>
+                                  </p:stCondLst>
+                                  <p:childTnLst>
+                                    <p:set>
+                                      <p:cBhvr>
+                                        <p:cTn dur="1" fill="hold">
+                                          <p:stCondLst>
+                                            <p:cond delay="0"/>
+                                          </p:stCondLst>
+                                        </p:cTn>
+                                        <p:tgtEl>
+                                          <p:spTgt spid="294">
+                                            <p:txEl>
+                                              <p:pRg end="9" st="9"/>
+                                            </p:txEl>
+                                          </p:spTgt>
+                                        </p:tgtEl>
+                                        <p:attrNameLst>
+                                          <p:attrName>style.visibility</p:attrName>
+                                        </p:attrNameLst>
+                                      </p:cBhvr>
+                                      <p:to>
+                                        <p:strVal val="visible"/>
+                                      </p:to>
+                                    </p:set>
+                                  </p:childTnLst>
+                                </p:cTn>
+                              </p:par>
+                            </p:childTnLst>
+                          </p:cTn>
+                        </p:par>
+                      </p:childTnLst>
+                    </p:cTn>
+                  </p:par>
+                  <p:par>
+                    <p:cTn fill="hold">
+                      <p:stCondLst>
+                        <p:cond delay="indefinite"/>
+                      </p:stCondLst>
+                      <p:childTnLst>
+                        <p:par>
+                          <p:cTn fill="hold">
+                            <p:stCondLst>
+                              <p:cond delay="0"/>
+                            </p:stCondLst>
+                            <p:childTnLst>
+                              <p:par>
+                                <p:cTn fill="hold" nodeType="clickEffect" presetClass="entr" presetID="1" presetSubtype="0">
+                                  <p:stCondLst>
+                                    <p:cond delay="0"/>
+                                  </p:stCondLst>
+                                  <p:childTnLst>
+                                    <p:set>
+                                      <p:cBhvr>
+                                        <p:cTn dur="1" fill="hold">
+                                          <p:stCondLst>
+                                            <p:cond delay="0"/>
+                                          </p:stCondLst>
+                                        </p:cTn>
+                                        <p:tgtEl>
+                                          <p:spTgt spid="294">
+                                            <p:txEl>
+                                              <p:pRg end="10" st="10"/>
+                                            </p:txEl>
+                                          </p:spTgt>
+                                        </p:tgtEl>
+                                        <p:attrNameLst>
+                                          <p:attrName>style.visibility</p:attrName>
+                                        </p:attrNameLst>
+                                      </p:cBhvr>
+                                      <p:to>
+                                        <p:strVal val="visible"/>
+                                      </p:to>
+                                    </p:set>
+                                  </p:childTnLst>
+                                </p:cTn>
+                              </p:par>
+                            </p:childTnLst>
+                          </p:cTn>
+                        </p:par>
+                      </p:childTnLst>
+                    </p:cTn>
+                  </p:par>
+                  <p:par>
+                    <p:cTn fill="hold">
+                      <p:stCondLst>
+                        <p:cond delay="indefinite"/>
+                      </p:stCondLst>
+                      <p:childTnLst>
+                        <p:par>
+                          <p:cTn fill="hold">
+                            <p:stCondLst>
+                              <p:cond delay="0"/>
+                            </p:stCondLst>
+                            <p:childTnLst>
+                              <p:par>
+                                <p:cTn fill="hold" nodeType="clickEffect" presetClass="entr" presetID="1" presetSubtype="0">
+                                  <p:stCondLst>
+                                    <p:cond delay="0"/>
+                                  </p:stCondLst>
+                                  <p:childTnLst>
+                                    <p:set>
+                                      <p:cBhvr>
+                                        <p:cTn dur="1" fill="hold">
+                                          <p:stCondLst>
+                                            <p:cond delay="0"/>
+                                          </p:stCondLst>
+                                        </p:cTn>
+                                        <p:tgtEl>
+                                          <p:spTgt spid="294">
+                                            <p:txEl>
+                                              <p:pRg end="11" st="11"/>
+                                            </p:txEl>
+                                          </p:spTgt>
+                                        </p:tgtEl>
+                                        <p:attrNameLst>
+                                          <p:attrName>style.visibility</p:attrName>
+                                        </p:attrNameLst>
+                                      </p:cBhvr>
+                                      <p:to>
+                                        <p:strVal val="visible"/>
+                                      </p:to>
+                                    </p:set>
+                                  </p:childTnLst>
+                                </p:cTn>
+                              </p:par>
+                            </p:childTnLst>
+                          </p:cTn>
+                        </p:par>
+                      </p:childTnLst>
+                    </p:cTn>
+                  </p:par>
+                  <p:par>
+                    <p:cTn fill="hold">
+                      <p:stCondLst>
+                        <p:cond delay="indefinite"/>
+                      </p:stCondLst>
+                      <p:childTnLst>
+                        <p:par>
+                          <p:cTn fill="hold">
+                            <p:stCondLst>
+                              <p:cond delay="0"/>
+                            </p:stCondLst>
+                            <p:childTnLst>
+                              <p:par>
+                                <p:cTn fill="hold" nodeType="clickEffect" presetClass="entr" presetID="1" presetSubtype="0">
+                                  <p:stCondLst>
+                                    <p:cond delay="0"/>
+                                  </p:stCondLst>
+                                  <p:childTnLst>
+                                    <p:set>
+                                      <p:cBhvr>
+                                        <p:cTn dur="1" fill="hold">
+                                          <p:stCondLst>
+                                            <p:cond delay="0"/>
+                                          </p:stCondLst>
+                                        </p:cTn>
+                                        <p:tgtEl>
+                                          <p:spTgt spid="294">
+                                            <p:txEl>
+                                              <p:pRg end="12" st="12"/>
+                                            </p:txEl>
+                                          </p:spTgt>
+                                        </p:tgtEl>
+                                        <p:attrNameLst>
+                                          <p:attrName>style.visibility</p:attrName>
+                                        </p:attrNameLst>
+                                      </p:cBhvr>
+                                      <p:to>
+                                        <p:strVal val="visible"/>
+                                      </p:to>
+                                    </p:set>
+                                  </p:childTnLst>
+                                </p:cTn>
+                              </p:par>
+                            </p:childTnLst>
+                          </p:cTn>
+                        </p:par>
+                      </p:childTnLst>
+                    </p:cTn>
+                  </p:par>
+                </p:childTnLst>
+              </p:cTn>
+              <p:prevCondLst>
+                <p:cond evt="onPrev">
+                  <p:tgtEl>
+                    <p:sldTgt/>
+                  </p:tgtEl>
+                </p:cond>
+              </p:prevCondLst>
+              <p:nextCondLst>
+                <p:cond evt="onNext">
+                  <p:tgtEl>
+                    <p:sldTgt/>
+                  </p:tgtEl>
+                </p:cond>
+              </p:nextCondLst>
+            </p:seq>
+          </p:childTnLst>
+        </p:cTn>
+      </p:par>
+    </p:tnLst>
+  </p:timing>
 </p:sld>
 </file>
 
@@ -18200,6 +18248,80 @@
       <p:grpSpPr/>
       <p:sp>
         <p:nvSpPr>
+          <p:cNvPr id="2" name="Title 1"/>
+          <p:cNvSpPr>
+            <a:spLocks noGrp="1"/>
+          </p:cNvSpPr>
+          <p:nvPr>
+            <p:ph type="title"/>
+          </p:nvPr>
+        </p:nvSpPr>
+        <p:spPr/>
+        <p:txBody>
+          <a:bodyPr/>
+          <a:lstStyle/>
+          <a:p>
+            <a:pPr indent="0" lvl="0" marL="0" rtl="0" algn="l">
+              <a:spcBef>
+                <a:spcPts val="0"/>
+              </a:spcBef>
+              <a:spcAft>
+                <a:spcPts val="0"/>
+              </a:spcAft>
+              <a:buNone/>
+            </a:pPr>
+            <a:r>
+              <a:rPr lang="en"/>
+              <a:t>From a Click to a Cell</a:t>
+            </a:r>
+            <a:endParaRPr/>
+          </a:p>
+        </p:txBody>
+      </p:sp>
+      <p:pic>
+        <p:nvPicPr>
+          <p:cNvPr id="3" name="Picture 2" descr="picking.png"/>
+          <p:cNvPicPr>
+            <a:picLocks noChangeAspect="1"/>
+          </p:cNvPicPr>
+          <p:nvPr/>
+        </p:nvPicPr>
+        <p:blipFill>
+          <a:blip r:embed="rId2"/>
+          <a:stretch>
+            <a:fillRect/>
+          </a:stretch>
+        </p:blipFill>
+        <p:spPr>
+          <a:xfrm>
+            <a:off x="480713" y="1051560"/>
+            <a:ext cx="8182573" cy="3977640"/>
+          </a:xfrm>
+          <a:prstGeom prst="rect">
+            <a:avLst/>
+          </a:prstGeom>
+        </p:spPr>
+      </p:pic>
+    </p:spTree>
+  </p:cSld>
+  <p:clrMapOvr>
+    <a:masterClrMapping/>
+  </p:clrMapOvr>
+</p:sld>
+</file>
+
+<file path=ppt/slides/slide8.xml><?xml version="1.0" encoding="utf-8"?>
+<p:sld xmlns:a="http://schemas.openxmlformats.org/drawingml/2006/main" xmlns:p="http://schemas.openxmlformats.org/presentationml/2006/main" xmlns:r="http://schemas.openxmlformats.org/officeDocument/2006/relationships">
+  <p:cSld>
+    <p:spTree>
+      <p:nvGrpSpPr>
+        <p:cNvPr id="1" name=""/>
+        <p:cNvGrpSpPr/>
+        <p:nvPr/>
+      </p:nvGrpSpPr>
+      <p:grpSpPr/>
+      <p:sp>
+        <p:nvSpPr>
           <p:cNvPr id="293" name="Google Shape;293;p45"/>
           <p:cNvSpPr txBox="1"/>
           <p:nvPr>
@@ -18751,7 +18873,7 @@
 </p:sld>
 </file>
 
-<file path=ppt/slides/slide8.xml><?xml version="1.0" encoding="utf-8"?>
+<file path=ppt/slides/slide9.xml><?xml version="1.0" encoding="utf-8"?>
 <p:sld xmlns:a="http://schemas.openxmlformats.org/drawingml/2006/main" xmlns:p="http://schemas.openxmlformats.org/presentationml/2006/main" xmlns:r="http://schemas.openxmlformats.org/officeDocument/2006/relationships">
   <p:cSld>
     <p:spTree>
@@ -18867,128 +18989,6 @@
               <a:t>Pvz0: choose a card, click a cell to place a defender</a:t>
             </a:r>
             <a:endParaRPr sz="1800"/>
-          </a:p>
-        </p:txBody>
-      </p:sp>
-    </p:spTree>
-  </p:cSld>
-  <p:clrMapOvr>
-    <a:masterClrMapping/>
-  </p:clrMapOvr>
-</p:sld>
-</file>
-
-<file path=ppt/slides/slide9.xml><?xml version="1.0" encoding="utf-8"?>
-<p:sld xmlns:a="http://schemas.openxmlformats.org/drawingml/2006/main" xmlns:p="http://schemas.openxmlformats.org/presentationml/2006/main" xmlns:r="http://schemas.openxmlformats.org/officeDocument/2006/relationships">
-  <p:cSld>
-    <p:spTree>
-      <p:nvGrpSpPr>
-        <p:cNvPr id="1" name=""/>
-        <p:cNvGrpSpPr/>
-        <p:nvPr/>
-      </p:nvGrpSpPr>
-      <p:grpSpPr/>
-      <p:sp>
-        <p:nvSpPr>
-          <p:cNvPr id="2" name="Title 1"/>
-          <p:cNvSpPr>
-            <a:spLocks noGrp="1"/>
-          </p:cNvSpPr>
-          <p:nvPr>
-            <p:ph type="title"/>
-          </p:nvPr>
-        </p:nvSpPr>
-        <p:spPr/>
-        <p:txBody>
-          <a:bodyPr/>
-          <a:lstStyle/>
-          <a:p>
-            <a:pPr indent="0" lvl="0" marL="0" rtl="0" algn="l">
-              <a:spcBef>
-                <a:spcPts val="0"/>
-              </a:spcBef>
-              <a:spcAft>
-                <a:spcPts val="0"/>
-              </a:spcAft>
-              <a:buNone/>
-            </a:pPr>
-            <a:r>
-              <a:rPr lang="en"/>
-              <a:t>Try It: Where Is the Mouse?</a:t>
-            </a:r>
-            <a:endParaRPr/>
-          </a:p>
-        </p:txBody>
-      </p:sp>
-      <p:sp>
-        <p:nvSpPr>
-          <p:cNvPr id="3" name="Text Placeholder 2"/>
-          <p:cNvSpPr>
-            <a:spLocks noGrp="1"/>
-          </p:cNvSpPr>
-          <p:nvPr>
-            <p:ph type="body" idx="1"/>
-          </p:nvPr>
-        </p:nvSpPr>
-        <p:spPr>
-          <a:xfrm>
-            <a:off x="311700" y="885950"/>
-            <a:ext cx="8520600" cy="1289304"/>
-          </a:xfrm>
-        </p:spPr>
-        <p:txBody>
-          <a:bodyPr/>
-          <a:lstStyle/>
-          <a:p>
-            <a:pPr indent="-330200" lvl="0" marL="457200" rtl="0" algn="l">
-              <a:spcBef>
-                <a:spcPts val="0"/>
-              </a:spcBef>
-              <a:spcAft>
-                <a:spcPts val="0"/>
-              </a:spcAft>
-              <a:buSzPts val="1600"/>
-              <a:buChar char="●"/>
-            </a:pPr>
-            <a:r>
-              <a:rPr lang="en"/>
-              <a:t>In Pvz0:</a:t>
-            </a:r>
-            <a:endParaRPr/>
-          </a:p>
-          <a:p>
-            <a:pPr indent="-330200" lvl="0" marL="457200" rtl="0" algn="l">
-              <a:spcBef>
-                <a:spcPts val="0"/>
-              </a:spcBef>
-              <a:spcAft>
-                <a:spcPts val="0"/>
-              </a:spcAft>
-              <a:buSzPts val="1600"/>
-              <a:buChar char="●"/>
-            </a:pPr>
-            <a:r>
-              <a:rPr lang="en"/>
-              <a:t>Show the cell under the mouse in the window title</a:t>
-            </a:r>
-            <a:endParaRPr/>
-          </a:p>
-          <a:p>
-            <a:pPr indent="-330200" lvl="0" marL="457200" rtl="0" algn="l">
-              <a:spcBef>
-                <a:spcPts val="0"/>
-              </a:spcBef>
-              <a:spcAft>
-                <a:spcPts val="0"/>
-              </a:spcAft>
-              <a:buSzPts val="1600"/>
-              <a:buChar char="●"/>
-            </a:pPr>
-            <a:r>
-              <a:rPr lang="en"/>
-              <a:t>Move off the field: what does CellAt give you?</a:t>
-            </a:r>
-            <a:endParaRPr/>
           </a:p>
         </p:txBody>
       </p:sp>

--- a/slides/09 Plants vs. Zombies.pptx
+++ b/slides/09 Plants vs. Zombies.pptx
@@ -14231,7 +14231,7 @@
             </a:pPr>
             <a:r>
               <a:rPr lang="en"/>
-              <a:t>New types: a Guard and a Runner. Any code?</a:t>
+              <a:t>New types: a Guard and a Runner. Any code? What does a type share that a prefab copies?</a:t>
             </a:r>
             <a:endParaRPr/>
           </a:p>
@@ -14265,7 +14265,7 @@
             </a:pPr>
             <a:r>
               <a:rPr lang="en"/>
-              <a:t>Which component, where, and how does the data say so?</a:t>
+              <a:t>Which component, where, and how does the data say so? Write its test first</a:t>
             </a:r>
             <a:endParaRPr/>
           </a:p>

--- a/slides/09 Plants vs. Zombies.pptx
+++ b/slides/09 Plants vs. Zombies.pptx
@@ -38,7 +38,9 @@
     <p:sldId id="311" r:id="rId70"/>
     <p:sldId id="315" r:id="rId39"/>
     <p:sldId id="312" r:id="rId71"/>
+    <p:sldId id="324" r:id="rId29"/>
     <p:sldId id="280" r:id="rId30"/>
+    <p:sldId id="325" r:id="rId28"/>
     <p:sldId id="292" r:id="rId42"/>
     <p:sldId id="293" r:id="rId52"/>
     <p:sldId id="313" r:id="rId40"/>
@@ -2700,6 +2702,69 @@
 </p:notes>
 </file>
 
+<file path=ppt/notesSlides/notesSlide36.xml><?xml version="1.0" encoding="utf-8"?>
+<p:notes xmlns:a="http://schemas.openxmlformats.org/drawingml/2006/main" xmlns:p="http://schemas.openxmlformats.org/presentationml/2006/main" xmlns:r="http://schemas.openxmlformats.org/officeDocument/2006/relationships">
+  <p:cSld>
+    <p:spTree>
+      <p:nvGrpSpPr>
+        <p:cNvPr id="1" name=""/>
+        <p:cNvGrpSpPr/>
+        <p:nvPr/>
+      </p:nvGrpSpPr>
+      <p:grpSpPr>
+        <a:xfrm>
+          <a:off x="0" y="0"/>
+          <a:ext cx="0" cy="0"/>
+          <a:chOff x="0" y="0"/>
+          <a:chExt cx="0" cy="0"/>
+        </a:xfrm>
+      </p:grpSpPr>
+      <p:sp>
+        <p:nvSpPr>
+          <p:cNvPr id="2" name="Slide Image Placeholder 1"/>
+          <p:cNvSpPr>
+            <a:spLocks noGrp="1"/>
+          </p:cNvSpPr>
+          <p:nvPr>
+            <p:ph type="sldImg" idx="2"/>
+          </p:nvPr>
+        </p:nvSpPr>
+        <p:spPr/>
+      </p:sp>
+      <p:sp>
+        <p:nvSpPr>
+          <p:cNvPr id="3" name="Notes Placeholder 2"/>
+          <p:cNvSpPr>
+            <a:spLocks noGrp="1"/>
+          </p:cNvSpPr>
+          <p:nvPr>
+            <p:ph type="body" idx="1"/>
+          </p:nvPr>
+        </p:nvSpPr>
+        <p:spPr/>
+        <p:txBody>
+          <a:bodyPr/>
+          <a:lstStyle/>
+          <a:p>
+            <a:r>
+              <a:t>Who holds what in the finished game. The world keeps entities and never asks what kind they are.</a:t>
+            </a:r>
+          </a:p>
+          <a:p>
+            <a:r>
+              <a:t>The two type classes on the right create entities. Ask: where would a new ability go, and where a new kind?</a:t>
+            </a:r>
+          </a:p>
+        </p:txBody>
+      </p:sp>
+    </p:spTree>
+  </p:cSld>
+  <p:clrMapOvr>
+    <a:masterClrMapping/>
+  </p:clrMapOvr>
+</p:notes>
+</file>
+
 <file path=ppt/notesSlides/notesSlide37.xml><?xml version="1.0" encoding="utf-8"?>
 <p:notes xmlns:a="http://schemas.openxmlformats.org/drawingml/2006/main" xmlns:r="http://schemas.openxmlformats.org/officeDocument/2006/relationships" xmlns:mc="http://schemas.openxmlformats.org/markup-compatibility/2006" xmlns:mv="urn:schemas-microsoft-com:mac:vml" xmlns:p="http://schemas.openxmlformats.org/presentationml/2006/main" xmlns:c="http://schemas.openxmlformats.org/drawingml/2006/chart" xmlns:dgm="http://schemas.openxmlformats.org/drawingml/2006/diagram" xmlns:o="urn:schemas-microsoft-com:office:office" xmlns:v="urn:schemas-microsoft-com:vml" xmlns:pvml="urn:schemas-microsoft-com:office:powerpoint" xmlns:com="http://schemas.openxmlformats.org/drawingml/2006/compatibility" xmlns:p14="http://schemas.microsoft.com/office/powerpoint/2010/main" xmlns:p15="http://schemas.microsoft.com/office/powerpoint/2012/main" xmlns:ahyp="http://schemas.microsoft.com/office/drawing/2018/hyperlinkcolor" showMasterPhAnim="0" showMasterSp="0">
   <p:cSld>
@@ -2871,6 +2936,64 @@
           <a:p>
             <a:r>
               <a:t>Say: the site explains the ideas, the README helps you find them in the code, the slides are for today.</a:t>
+            </a:r>
+          </a:p>
+        </p:txBody>
+      </p:sp>
+    </p:spTree>
+  </p:cSld>
+  <p:clrMapOvr>
+    <a:masterClrMapping/>
+  </p:clrMapOvr>
+</p:notes>
+</file>
+
+<file path=ppt/notesSlides/notesSlide5.xml><?xml version="1.0" encoding="utf-8"?>
+<p:notes xmlns:a="http://schemas.openxmlformats.org/drawingml/2006/main" xmlns:p="http://schemas.openxmlformats.org/presentationml/2006/main" xmlns:r="http://schemas.openxmlformats.org/officeDocument/2006/relationships">
+  <p:cSld>
+    <p:spTree>
+      <p:nvGrpSpPr>
+        <p:cNvPr id="1" name=""/>
+        <p:cNvGrpSpPr/>
+        <p:nvPr/>
+      </p:nvGrpSpPr>
+      <p:grpSpPr>
+        <a:xfrm>
+          <a:off x="0" y="0"/>
+          <a:ext cx="0" cy="0"/>
+          <a:chOff x="0" y="0"/>
+          <a:chExt cx="0" cy="0"/>
+        </a:xfrm>
+      </p:grpSpPr>
+      <p:sp>
+        <p:nvSpPr>
+          <p:cNvPr id="2" name="Slide Image Placeholder 1"/>
+          <p:cNvSpPr>
+            <a:spLocks noGrp="1"/>
+          </p:cNvSpPr>
+          <p:nvPr>
+            <p:ph type="sldImg" idx="2"/>
+          </p:nvPr>
+        </p:nvSpPr>
+        <p:spPr/>
+      </p:sp>
+      <p:sp>
+        <p:nvSpPr>
+          <p:cNvPr id="3" name="Notes Placeholder 2"/>
+          <p:cNvSpPr>
+            <a:spLocks noGrp="1"/>
+          </p:cNvSpPr>
+          <p:nvPr>
+            <p:ph type="body" idx="1"/>
+          </p:nvPr>
+        </p:nvSpPr>
+        <p:spPr/>
+        <p:txBody>
+          <a:bodyPr/>
+          <a:lstStyle/>
+          <a:p>
+            <a:r>
+              <a:t>The session in one slide. Read each concern aloud and let the class give the answer before pointing at it.</a:t>
             </a:r>
           </a:p>
         </p:txBody>
@@ -16817,6 +16940,1459 @@
 </p:sld>
 </file>
 
+<file path=ppt/slides/slide36.xml><?xml version="1.0" encoding="utf-8"?>
+<p:sld xmlns:a="http://schemas.openxmlformats.org/drawingml/2006/main" xmlns:p="http://schemas.openxmlformats.org/presentationml/2006/main" xmlns:r="http://schemas.openxmlformats.org/officeDocument/2006/relationships">
+  <p:cSld>
+    <p:spTree>
+      <p:nvGrpSpPr>
+        <p:cNvPr id="1" name=""/>
+        <p:cNvGrpSpPr/>
+        <p:nvPr/>
+      </p:nvGrpSpPr>
+      <p:grpSpPr/>
+      <p:sp>
+        <p:nvSpPr>
+          <p:cNvPr id="2" name="Title 1"/>
+          <p:cNvSpPr>
+            <a:spLocks noGrp="1"/>
+          </p:cNvSpPr>
+          <p:nvPr>
+            <p:ph type="title"/>
+          </p:nvPr>
+        </p:nvSpPr>
+        <p:spPr/>
+        <p:txBody>
+          <a:bodyPr/>
+          <a:lstStyle/>
+          <a:p>
+            <a:pPr indent="0" lvl="0" marL="0" rtl="0" algn="l">
+              <a:spcBef>
+                <a:spcPts val="0"/>
+              </a:spcBef>
+              <a:spcAft>
+                <a:spcPts val="0"/>
+              </a:spcAft>
+              <a:buNone/>
+            </a:pPr>
+            <a:r>
+              <a:rPr lang="en"/>
+              <a:t>The Whole Game: Who Holds What</a:t>
+            </a:r>
+            <a:endParaRPr/>
+          </a:p>
+        </p:txBody>
+      </p:sp>
+      <p:sp>
+        <p:nvSpPr>
+          <p:cNvPr id="3" name="Text Placeholder 2"/>
+          <p:cNvSpPr>
+            <a:spLocks noGrp="1"/>
+          </p:cNvSpPr>
+          <p:nvPr>
+            <p:ph type="body" idx="1"/>
+          </p:nvPr>
+        </p:nvSpPr>
+        <p:spPr>
+          <a:xfrm>
+            <a:off x="311700" y="885950"/>
+            <a:ext cx="8520600" cy="521208"/>
+          </a:xfrm>
+        </p:spPr>
+        <p:txBody>
+          <a:bodyPr/>
+          <a:lstStyle/>
+          <a:p>
+            <a:pPr indent="-330200" lvl="0" marL="457200" rtl="0" algn="l">
+              <a:spcBef>
+                <a:spcPts val="0"/>
+              </a:spcBef>
+              <a:spcAft>
+                <a:spcPts val="0"/>
+              </a:spcAft>
+              <a:buSzPts val="1600"/>
+              <a:buChar char="●"/>
+            </a:pPr>
+            <a:r>
+              <a:rPr lang="en" b="1"/>
+              <a:t>No class is an archer or a goblin. The types create entities.</a:t>
+            </a:r>
+            <a:endParaRPr/>
+          </a:p>
+        </p:txBody>
+      </p:sp>
+      <p:sp>
+        <p:nvSpPr>
+          <p:cNvPr id="4" name="Rounded Rectangle 3"/>
+          <p:cNvSpPr/>
+          <p:nvPr/>
+        </p:nvSpPr>
+        <p:spPr>
+          <a:xfrm>
+            <a:off x="3429000" y="1481328"/>
+            <a:ext cx="2286000" cy="566928"/>
+          </a:xfrm>
+          <a:prstGeom prst="roundRect">
+            <a:avLst>
+              <a:gd name="adj" fmla="val 12000"/>
+            </a:avLst>
+          </a:prstGeom>
+          <a:solidFill>
+            <a:srgbClr val="2E3338"/>
+          </a:solidFill>
+          <a:ln w="25400">
+            <a:solidFill>
+              <a:srgbClr val="D45D35"/>
+            </a:solidFill>
+          </a:ln>
+          <a:effectLst/>
+        </p:spPr>
+        <p:style>
+          <a:lnRef idx="1">
+            <a:schemeClr val="accent1"/>
+          </a:lnRef>
+          <a:fillRef idx="3">
+            <a:schemeClr val="accent1"/>
+          </a:fillRef>
+          <a:effectRef idx="2">
+            <a:schemeClr val="accent1"/>
+          </a:effectRef>
+          <a:fontRef idx="minor">
+            <a:schemeClr val="lt1"/>
+          </a:fontRef>
+        </p:style>
+        <p:txBody>
+          <a:bodyPr rtlCol="0" anchor="ctr" wrap="square" lIns="73152" rIns="73152"/>
+          <a:lstStyle/>
+          <a:p>
+            <a:pPr algn="ctr"/>
+            <a:r>
+              <a:rPr sz="1300" b="1">
+                <a:solidFill>
+                  <a:srgbClr val="DEE2E6"/>
+                </a:solidFill>
+              </a:rPr>
+              <a:t>Game1 : Core</a:t>
+            </a:r>
+          </a:p>
+        </p:txBody>
+      </p:sp>
+      <p:sp>
+        <p:nvSpPr>
+          <p:cNvPr id="5" name="Rounded Rectangle 4"/>
+          <p:cNvSpPr/>
+          <p:nvPr/>
+        </p:nvSpPr>
+        <p:spPr>
+          <a:xfrm>
+            <a:off x="374904" y="2246376"/>
+            <a:ext cx="2016252" cy="566928"/>
+          </a:xfrm>
+          <a:prstGeom prst="roundRect">
+            <a:avLst>
+              <a:gd name="adj" fmla="val 12000"/>
+            </a:avLst>
+          </a:prstGeom>
+          <a:solidFill>
+            <a:srgbClr val="2E3338"/>
+          </a:solidFill>
+          <a:ln>
+            <a:noFill/>
+          </a:ln>
+          <a:effectLst/>
+        </p:spPr>
+        <p:style>
+          <a:lnRef idx="1">
+            <a:schemeClr val="accent1"/>
+          </a:lnRef>
+          <a:fillRef idx="3">
+            <a:schemeClr val="accent1"/>
+          </a:fillRef>
+          <a:effectRef idx="2">
+            <a:schemeClr val="accent1"/>
+          </a:effectRef>
+          <a:fontRef idx="minor">
+            <a:schemeClr val="lt1"/>
+          </a:fontRef>
+        </p:style>
+        <p:txBody>
+          <a:bodyPr rtlCol="0" anchor="ctr" wrap="square" lIns="73152" rIns="73152"/>
+          <a:lstStyle/>
+          <a:p>
+            <a:pPr algn="ctr"/>
+            <a:r>
+              <a:rPr sz="1300" b="1">
+                <a:solidFill>
+                  <a:srgbClr val="DEE2E6"/>
+                </a:solidFill>
+              </a:rPr>
+              <a:t>Game states</a:t>
+            </a:r>
+          </a:p>
+          <a:p>
+            <a:pPr algn="ctr"/>
+            <a:r>
+              <a:rPr sz="1100" b="0">
+                <a:solidFill>
+                  <a:srgbClr val="9AA3AB"/>
+                </a:solidFill>
+              </a:rPr>
+              <a:t>title, play, end</a:t>
+            </a:r>
+          </a:p>
+        </p:txBody>
+      </p:sp>
+      <p:cxnSp>
+        <p:nvCxnSpPr>
+          <p:cNvPr id="6" name="Connector 5"/>
+          <p:cNvCxnSpPr/>
+          <p:nvPr/>
+        </p:nvCxnSpPr>
+        <p:spPr>
+          <a:xfrm flipH="1">
+            <a:off x="1383030" y="2066544"/>
+            <a:ext cx="3188970" cy="161544"/>
+          </a:xfrm>
+          <a:prstGeom prst="line">
+            <a:avLst/>
+          </a:prstGeom>
+          <a:ln w="25400">
+            <a:solidFill>
+              <a:srgbClr val="9AA3AB"/>
+            </a:solidFill>
+            <a:tailEnd type="triangle"/>
+          </a:ln>
+        </p:spPr>
+        <p:style>
+          <a:lnRef idx="2">
+            <a:schemeClr val="accent1"/>
+          </a:lnRef>
+          <a:fillRef idx="0">
+            <a:schemeClr val="accent1"/>
+          </a:fillRef>
+          <a:effectRef idx="1">
+            <a:schemeClr val="accent1"/>
+          </a:effectRef>
+          <a:fontRef idx="minor">
+            <a:schemeClr val="tx1"/>
+          </a:fontRef>
+        </p:style>
+      </p:cxnSp>
+      <p:sp>
+        <p:nvSpPr>
+          <p:cNvPr id="7" name="Rounded Rectangle 6"/>
+          <p:cNvSpPr/>
+          <p:nvPr/>
+        </p:nvSpPr>
+        <p:spPr>
+          <a:xfrm>
+            <a:off x="2500884" y="2246376"/>
+            <a:ext cx="2016252" cy="566928"/>
+          </a:xfrm>
+          <a:prstGeom prst="roundRect">
+            <a:avLst>
+              <a:gd name="adj" fmla="val 12000"/>
+            </a:avLst>
+          </a:prstGeom>
+          <a:solidFill>
+            <a:srgbClr val="2E3338"/>
+          </a:solidFill>
+          <a:ln>
+            <a:noFill/>
+          </a:ln>
+          <a:effectLst/>
+        </p:spPr>
+        <p:style>
+          <a:lnRef idx="1">
+            <a:schemeClr val="accent1"/>
+          </a:lnRef>
+          <a:fillRef idx="3">
+            <a:schemeClr val="accent1"/>
+          </a:fillRef>
+          <a:effectRef idx="2">
+            <a:schemeClr val="accent1"/>
+          </a:effectRef>
+          <a:fontRef idx="minor">
+            <a:schemeClr val="lt1"/>
+          </a:fontRef>
+        </p:style>
+        <p:txBody>
+          <a:bodyPr rtlCol="0" anchor="ctr" wrap="square" lIns="73152" rIns="73152"/>
+          <a:lstStyle/>
+          <a:p>
+            <a:pPr algn="ctr"/>
+            <a:r>
+              <a:rPr sz="1300" b="1">
+                <a:solidFill>
+                  <a:srgbClr val="DEE2E6"/>
+                </a:solidFill>
+              </a:rPr>
+              <a:t>World</a:t>
+            </a:r>
+          </a:p>
+          <a:p>
+            <a:pPr algn="ctr"/>
+            <a:r>
+              <a:rPr sz="1100" b="0">
+                <a:solidFill>
+                  <a:srgbClr val="9AA3AB"/>
+                </a:solidFill>
+              </a:rPr>
+              <a:t>only sees entities</a:t>
+            </a:r>
+          </a:p>
+        </p:txBody>
+      </p:sp>
+      <p:sp>
+        <p:nvSpPr>
+          <p:cNvPr id="8" name="Rounded Rectangle 7"/>
+          <p:cNvSpPr/>
+          <p:nvPr/>
+        </p:nvSpPr>
+        <p:spPr>
+          <a:xfrm>
+            <a:off x="2500884" y="3011424"/>
+            <a:ext cx="2016252" cy="566928"/>
+          </a:xfrm>
+          <a:prstGeom prst="roundRect">
+            <a:avLst>
+              <a:gd name="adj" fmla="val 12000"/>
+            </a:avLst>
+          </a:prstGeom>
+          <a:solidFill>
+            <a:srgbClr val="2E3338"/>
+          </a:solidFill>
+          <a:ln>
+            <a:noFill/>
+          </a:ln>
+          <a:effectLst/>
+        </p:spPr>
+        <p:style>
+          <a:lnRef idx="1">
+            <a:schemeClr val="accent1"/>
+          </a:lnRef>
+          <a:fillRef idx="3">
+            <a:schemeClr val="accent1"/>
+          </a:fillRef>
+          <a:effectRef idx="2">
+            <a:schemeClr val="accent1"/>
+          </a:effectRef>
+          <a:fontRef idx="minor">
+            <a:schemeClr val="lt1"/>
+          </a:fontRef>
+        </p:style>
+        <p:txBody>
+          <a:bodyPr rtlCol="0" anchor="ctr" wrap="square" lIns="73152" rIns="73152"/>
+          <a:lstStyle/>
+          <a:p>
+            <a:pPr algn="ctr"/>
+            <a:r>
+              <a:rPr sz="1300" b="1">
+                <a:solidFill>
+                  <a:srgbClr val="DEE2E6"/>
+                </a:solidFill>
+              </a:rPr>
+              <a:t>Entity</a:t>
+            </a:r>
+          </a:p>
+          <a:p>
+            <a:pPr algn="ctr"/>
+            <a:r>
+              <a:rPr sz="1100" b="0">
+                <a:solidFill>
+                  <a:srgbClr val="9AA3AB"/>
+                </a:solidFill>
+              </a:rPr>
+              <a:t>many</a:t>
+            </a:r>
+          </a:p>
+        </p:txBody>
+      </p:sp>
+      <p:sp>
+        <p:nvSpPr>
+          <p:cNvPr id="9" name="Rounded Rectangle 8"/>
+          <p:cNvSpPr/>
+          <p:nvPr/>
+        </p:nvSpPr>
+        <p:spPr>
+          <a:xfrm>
+            <a:off x="2500884" y="3776472"/>
+            <a:ext cx="2016252" cy="566928"/>
+          </a:xfrm>
+          <a:prstGeom prst="roundRect">
+            <a:avLst>
+              <a:gd name="adj" fmla="val 12000"/>
+            </a:avLst>
+          </a:prstGeom>
+          <a:solidFill>
+            <a:srgbClr val="2E3338"/>
+          </a:solidFill>
+          <a:ln>
+            <a:noFill/>
+          </a:ln>
+          <a:effectLst/>
+        </p:spPr>
+        <p:style>
+          <a:lnRef idx="1">
+            <a:schemeClr val="accent1"/>
+          </a:lnRef>
+          <a:fillRef idx="3">
+            <a:schemeClr val="accent1"/>
+          </a:fillRef>
+          <a:effectRef idx="2">
+            <a:schemeClr val="accent1"/>
+          </a:effectRef>
+          <a:fontRef idx="minor">
+            <a:schemeClr val="lt1"/>
+          </a:fontRef>
+        </p:style>
+        <p:txBody>
+          <a:bodyPr rtlCol="0" anchor="ctr" wrap="square" lIns="73152" rIns="73152"/>
+          <a:lstStyle/>
+          <a:p>
+            <a:pPr algn="ctr"/>
+            <a:r>
+              <a:rPr sz="1300" b="1">
+                <a:solidFill>
+                  <a:srgbClr val="DEE2E6"/>
+                </a:solidFill>
+              </a:rPr>
+              <a:t>Component</a:t>
+            </a:r>
+          </a:p>
+          <a:p>
+            <a:pPr algn="ctr"/>
+            <a:r>
+              <a:rPr sz="1100" b="0">
+                <a:solidFill>
+                  <a:srgbClr val="9AA3AB"/>
+                </a:solidFill>
+              </a:rPr>
+              <a:t>one ability each</a:t>
+            </a:r>
+          </a:p>
+        </p:txBody>
+      </p:sp>
+      <p:cxnSp>
+        <p:nvCxnSpPr>
+          <p:cNvPr id="10" name="Connector 9"/>
+          <p:cNvCxnSpPr/>
+          <p:nvPr/>
+        </p:nvCxnSpPr>
+        <p:spPr>
+          <a:xfrm>
+            <a:off x="3509010" y="3596640"/>
+            <a:ext cx="0" cy="161544"/>
+          </a:xfrm>
+          <a:prstGeom prst="line">
+            <a:avLst/>
+          </a:prstGeom>
+          <a:ln w="25400">
+            <a:solidFill>
+              <a:srgbClr val="9AA3AB"/>
+            </a:solidFill>
+            <a:tailEnd type="triangle"/>
+          </a:ln>
+        </p:spPr>
+        <p:style>
+          <a:lnRef idx="2">
+            <a:schemeClr val="accent1"/>
+          </a:lnRef>
+          <a:fillRef idx="0">
+            <a:schemeClr val="accent1"/>
+          </a:fillRef>
+          <a:effectRef idx="1">
+            <a:schemeClr val="accent1"/>
+          </a:effectRef>
+          <a:fontRef idx="minor">
+            <a:schemeClr val="tx1"/>
+          </a:fontRef>
+        </p:style>
+      </p:cxnSp>
+      <p:cxnSp>
+        <p:nvCxnSpPr>
+          <p:cNvPr id="11" name="Connector 10"/>
+          <p:cNvCxnSpPr/>
+          <p:nvPr/>
+        </p:nvCxnSpPr>
+        <p:spPr>
+          <a:xfrm>
+            <a:off x="3509010" y="2831592"/>
+            <a:ext cx="0" cy="161544"/>
+          </a:xfrm>
+          <a:prstGeom prst="line">
+            <a:avLst/>
+          </a:prstGeom>
+          <a:ln w="25400">
+            <a:solidFill>
+              <a:srgbClr val="9AA3AB"/>
+            </a:solidFill>
+            <a:tailEnd type="triangle"/>
+          </a:ln>
+        </p:spPr>
+        <p:style>
+          <a:lnRef idx="2">
+            <a:schemeClr val="accent1"/>
+          </a:lnRef>
+          <a:fillRef idx="0">
+            <a:schemeClr val="accent1"/>
+          </a:fillRef>
+          <a:effectRef idx="1">
+            <a:schemeClr val="accent1"/>
+          </a:effectRef>
+          <a:fontRef idx="minor">
+            <a:schemeClr val="tx1"/>
+          </a:fontRef>
+        </p:style>
+      </p:cxnSp>
+      <p:cxnSp>
+        <p:nvCxnSpPr>
+          <p:cNvPr id="12" name="Connector 11"/>
+          <p:cNvCxnSpPr/>
+          <p:nvPr/>
+        </p:nvCxnSpPr>
+        <p:spPr>
+          <a:xfrm flipH="1">
+            <a:off x="3509010" y="2066544"/>
+            <a:ext cx="1062990" cy="161544"/>
+          </a:xfrm>
+          <a:prstGeom prst="line">
+            <a:avLst/>
+          </a:prstGeom>
+          <a:ln w="25400">
+            <a:solidFill>
+              <a:srgbClr val="9AA3AB"/>
+            </a:solidFill>
+            <a:tailEnd type="triangle"/>
+          </a:ln>
+        </p:spPr>
+        <p:style>
+          <a:lnRef idx="2">
+            <a:schemeClr val="accent1"/>
+          </a:lnRef>
+          <a:fillRef idx="0">
+            <a:schemeClr val="accent1"/>
+          </a:fillRef>
+          <a:effectRef idx="1">
+            <a:schemeClr val="accent1"/>
+          </a:effectRef>
+          <a:fontRef idx="minor">
+            <a:schemeClr val="tx1"/>
+          </a:fontRef>
+        </p:style>
+      </p:cxnSp>
+      <p:sp>
+        <p:nvSpPr>
+          <p:cNvPr id="13" name="Rounded Rectangle 12"/>
+          <p:cNvSpPr/>
+          <p:nvPr/>
+        </p:nvSpPr>
+        <p:spPr>
+          <a:xfrm>
+            <a:off x="4626864" y="2246376"/>
+            <a:ext cx="2016252" cy="566928"/>
+          </a:xfrm>
+          <a:prstGeom prst="roundRect">
+            <a:avLst>
+              <a:gd name="adj" fmla="val 12000"/>
+            </a:avLst>
+          </a:prstGeom>
+          <a:solidFill>
+            <a:srgbClr val="2E3338"/>
+          </a:solidFill>
+          <a:ln>
+            <a:noFill/>
+          </a:ln>
+          <a:effectLst/>
+        </p:spPr>
+        <p:style>
+          <a:lnRef idx="1">
+            <a:schemeClr val="accent1"/>
+          </a:lnRef>
+          <a:fillRef idx="3">
+            <a:schemeClr val="accent1"/>
+          </a:fillRef>
+          <a:effectRef idx="2">
+            <a:schemeClr val="accent1"/>
+          </a:effectRef>
+          <a:fontRef idx="minor">
+            <a:schemeClr val="lt1"/>
+          </a:fontRef>
+        </p:style>
+        <p:txBody>
+          <a:bodyPr rtlCol="0" anchor="ctr" wrap="square" lIns="73152" rIns="73152"/>
+          <a:lstStyle/>
+          <a:p>
+            <a:pPr algn="ctr"/>
+            <a:r>
+              <a:rPr sz="1300" b="1">
+                <a:solidFill>
+                  <a:srgbClr val="DEE2E6"/>
+                </a:solidFill>
+              </a:rPr>
+              <a:t>CardBar</a:t>
+            </a:r>
+          </a:p>
+        </p:txBody>
+      </p:sp>
+      <p:sp>
+        <p:nvSpPr>
+          <p:cNvPr id="14" name="Rounded Rectangle 13"/>
+          <p:cNvSpPr/>
+          <p:nvPr/>
+        </p:nvSpPr>
+        <p:spPr>
+          <a:xfrm>
+            <a:off x="4626864" y="3011424"/>
+            <a:ext cx="2016252" cy="566928"/>
+          </a:xfrm>
+          <a:prstGeom prst="roundRect">
+            <a:avLst>
+              <a:gd name="adj" fmla="val 12000"/>
+            </a:avLst>
+          </a:prstGeom>
+          <a:solidFill>
+            <a:srgbClr val="2E3338"/>
+          </a:solidFill>
+          <a:ln>
+            <a:noFill/>
+          </a:ln>
+          <a:effectLst/>
+        </p:spPr>
+        <p:style>
+          <a:lnRef idx="1">
+            <a:schemeClr val="accent1"/>
+          </a:lnRef>
+          <a:fillRef idx="3">
+            <a:schemeClr val="accent1"/>
+          </a:fillRef>
+          <a:effectRef idx="2">
+            <a:schemeClr val="accent1"/>
+          </a:effectRef>
+          <a:fontRef idx="minor">
+            <a:schemeClr val="lt1"/>
+          </a:fontRef>
+        </p:style>
+        <p:txBody>
+          <a:bodyPr rtlCol="0" anchor="ctr" wrap="square" lIns="73152" rIns="73152"/>
+          <a:lstStyle/>
+          <a:p>
+            <a:pPr algn="ctr"/>
+            <a:r>
+              <a:rPr sz="1300" b="1">
+                <a:solidFill>
+                  <a:srgbClr val="DEE2E6"/>
+                </a:solidFill>
+              </a:rPr>
+              <a:t>DefenderType</a:t>
+            </a:r>
+          </a:p>
+          <a:p>
+            <a:pPr algn="ctr"/>
+            <a:r>
+              <a:rPr sz="1100" b="0">
+                <a:solidFill>
+                  <a:srgbClr val="9AA3AB"/>
+                </a:solidFill>
+              </a:rPr>
+              <a:t>a card for each</a:t>
+            </a:r>
+          </a:p>
+        </p:txBody>
+      </p:sp>
+      <p:cxnSp>
+        <p:nvCxnSpPr>
+          <p:cNvPr id="15" name="Connector 14"/>
+          <p:cNvCxnSpPr/>
+          <p:nvPr/>
+        </p:nvCxnSpPr>
+        <p:spPr>
+          <a:xfrm>
+            <a:off x="5634990" y="2831592"/>
+            <a:ext cx="0" cy="161544"/>
+          </a:xfrm>
+          <a:prstGeom prst="line">
+            <a:avLst/>
+          </a:prstGeom>
+          <a:ln w="25400">
+            <a:solidFill>
+              <a:srgbClr val="9AA3AB"/>
+            </a:solidFill>
+            <a:tailEnd type="triangle"/>
+          </a:ln>
+        </p:spPr>
+        <p:style>
+          <a:lnRef idx="2">
+            <a:schemeClr val="accent1"/>
+          </a:lnRef>
+          <a:fillRef idx="0">
+            <a:schemeClr val="accent1"/>
+          </a:fillRef>
+          <a:effectRef idx="1">
+            <a:schemeClr val="accent1"/>
+          </a:effectRef>
+          <a:fontRef idx="minor">
+            <a:schemeClr val="tx1"/>
+          </a:fontRef>
+        </p:style>
+      </p:cxnSp>
+      <p:cxnSp>
+        <p:nvCxnSpPr>
+          <p:cNvPr id="16" name="Connector 15"/>
+          <p:cNvCxnSpPr/>
+          <p:nvPr/>
+        </p:nvCxnSpPr>
+        <p:spPr>
+          <a:xfrm>
+            <a:off x="4572000" y="2066544"/>
+            <a:ext cx="1062990" cy="161544"/>
+          </a:xfrm>
+          <a:prstGeom prst="line">
+            <a:avLst/>
+          </a:prstGeom>
+          <a:ln w="25400">
+            <a:solidFill>
+              <a:srgbClr val="9AA3AB"/>
+            </a:solidFill>
+            <a:tailEnd type="triangle"/>
+          </a:ln>
+        </p:spPr>
+        <p:style>
+          <a:lnRef idx="2">
+            <a:schemeClr val="accent1"/>
+          </a:lnRef>
+          <a:fillRef idx="0">
+            <a:schemeClr val="accent1"/>
+          </a:fillRef>
+          <a:effectRef idx="1">
+            <a:schemeClr val="accent1"/>
+          </a:effectRef>
+          <a:fontRef idx="minor">
+            <a:schemeClr val="tx1"/>
+          </a:fontRef>
+        </p:style>
+      </p:cxnSp>
+      <p:sp>
+        <p:nvSpPr>
+          <p:cNvPr id="17" name="Rounded Rectangle 16"/>
+          <p:cNvSpPr/>
+          <p:nvPr/>
+        </p:nvSpPr>
+        <p:spPr>
+          <a:xfrm>
+            <a:off x="6752844" y="2246376"/>
+            <a:ext cx="2016252" cy="566928"/>
+          </a:xfrm>
+          <a:prstGeom prst="roundRect">
+            <a:avLst>
+              <a:gd name="adj" fmla="val 12000"/>
+            </a:avLst>
+          </a:prstGeom>
+          <a:solidFill>
+            <a:srgbClr val="2E3338"/>
+          </a:solidFill>
+          <a:ln>
+            <a:noFill/>
+          </a:ln>
+          <a:effectLst/>
+        </p:spPr>
+        <p:style>
+          <a:lnRef idx="1">
+            <a:schemeClr val="accent1"/>
+          </a:lnRef>
+          <a:fillRef idx="3">
+            <a:schemeClr val="accent1"/>
+          </a:fillRef>
+          <a:effectRef idx="2">
+            <a:schemeClr val="accent1"/>
+          </a:effectRef>
+          <a:fontRef idx="minor">
+            <a:schemeClr val="lt1"/>
+          </a:fontRef>
+        </p:style>
+        <p:txBody>
+          <a:bodyPr rtlCol="0" anchor="ctr" wrap="square" lIns="73152" rIns="73152"/>
+          <a:lstStyle/>
+          <a:p>
+            <a:pPr algn="ctr"/>
+            <a:r>
+              <a:rPr sz="1300" b="1">
+                <a:solidFill>
+                  <a:srgbClr val="DEE2E6"/>
+                </a:solidFill>
+              </a:rPr>
+              <a:t>Level</a:t>
+            </a:r>
+          </a:p>
+          <a:p>
+            <a:pPr algn="ctr"/>
+            <a:r>
+              <a:rPr sz="1100" b="0">
+                <a:solidFill>
+                  <a:srgbClr val="9AA3AB"/>
+                </a:solidFill>
+              </a:rPr>
+              <a:t>level1.json</a:t>
+            </a:r>
+          </a:p>
+        </p:txBody>
+      </p:sp>
+      <p:sp>
+        <p:nvSpPr>
+          <p:cNvPr id="18" name="Rounded Rectangle 17"/>
+          <p:cNvSpPr/>
+          <p:nvPr/>
+        </p:nvSpPr>
+        <p:spPr>
+          <a:xfrm>
+            <a:off x="6752844" y="3011424"/>
+            <a:ext cx="2016252" cy="566928"/>
+          </a:xfrm>
+          <a:prstGeom prst="roundRect">
+            <a:avLst>
+              <a:gd name="adj" fmla="val 12000"/>
+            </a:avLst>
+          </a:prstGeom>
+          <a:solidFill>
+            <a:srgbClr val="2E3338"/>
+          </a:solidFill>
+          <a:ln>
+            <a:noFill/>
+          </a:ln>
+          <a:effectLst/>
+        </p:spPr>
+        <p:style>
+          <a:lnRef idx="1">
+            <a:schemeClr val="accent1"/>
+          </a:lnRef>
+          <a:fillRef idx="3">
+            <a:schemeClr val="accent1"/>
+          </a:fillRef>
+          <a:effectRef idx="2">
+            <a:schemeClr val="accent1"/>
+          </a:effectRef>
+          <a:fontRef idx="minor">
+            <a:schemeClr val="lt1"/>
+          </a:fontRef>
+        </p:style>
+        <p:txBody>
+          <a:bodyPr rtlCol="0" anchor="ctr" wrap="square" lIns="73152" rIns="73152"/>
+          <a:lstStyle/>
+          <a:p>
+            <a:pPr algn="ctr"/>
+            <a:r>
+              <a:rPr sz="1300" b="1">
+                <a:solidFill>
+                  <a:srgbClr val="DEE2E6"/>
+                </a:solidFill>
+              </a:rPr>
+              <a:t>GoblinType</a:t>
+            </a:r>
+          </a:p>
+          <a:p>
+            <a:pPr algn="ctr"/>
+            <a:r>
+              <a:rPr sz="1100" b="0">
+                <a:solidFill>
+                  <a:srgbClr val="9AA3AB"/>
+                </a:solidFill>
+              </a:rPr>
+              <a:t>named by the spawns</a:t>
+            </a:r>
+          </a:p>
+        </p:txBody>
+      </p:sp>
+      <p:cxnSp>
+        <p:nvCxnSpPr>
+          <p:cNvPr id="19" name="Connector 18"/>
+          <p:cNvCxnSpPr/>
+          <p:nvPr/>
+        </p:nvCxnSpPr>
+        <p:spPr>
+          <a:xfrm>
+            <a:off x="7760970" y="2831592"/>
+            <a:ext cx="0" cy="161544"/>
+          </a:xfrm>
+          <a:prstGeom prst="line">
+            <a:avLst/>
+          </a:prstGeom>
+          <a:ln w="25400">
+            <a:solidFill>
+              <a:srgbClr val="9AA3AB"/>
+            </a:solidFill>
+            <a:tailEnd type="triangle"/>
+          </a:ln>
+        </p:spPr>
+        <p:style>
+          <a:lnRef idx="2">
+            <a:schemeClr val="accent1"/>
+          </a:lnRef>
+          <a:fillRef idx="0">
+            <a:schemeClr val="accent1"/>
+          </a:fillRef>
+          <a:effectRef idx="1">
+            <a:schemeClr val="accent1"/>
+          </a:effectRef>
+          <a:fontRef idx="minor">
+            <a:schemeClr val="tx1"/>
+          </a:fontRef>
+        </p:style>
+      </p:cxnSp>
+      <p:cxnSp>
+        <p:nvCxnSpPr>
+          <p:cNvPr id="20" name="Connector 19"/>
+          <p:cNvCxnSpPr/>
+          <p:nvPr/>
+        </p:nvCxnSpPr>
+        <p:spPr>
+          <a:xfrm>
+            <a:off x="4572000" y="2066544"/>
+            <a:ext cx="3188970" cy="161544"/>
+          </a:xfrm>
+          <a:prstGeom prst="line">
+            <a:avLst/>
+          </a:prstGeom>
+          <a:ln w="25400">
+            <a:solidFill>
+              <a:srgbClr val="9AA3AB"/>
+            </a:solidFill>
+            <a:tailEnd type="triangle"/>
+          </a:ln>
+        </p:spPr>
+        <p:style>
+          <a:lnRef idx="2">
+            <a:schemeClr val="accent1"/>
+          </a:lnRef>
+          <a:fillRef idx="0">
+            <a:schemeClr val="accent1"/>
+          </a:fillRef>
+          <a:effectRef idx="1">
+            <a:schemeClr val="accent1"/>
+          </a:effectRef>
+          <a:fontRef idx="minor">
+            <a:schemeClr val="tx1"/>
+          </a:fontRef>
+        </p:style>
+      </p:cxnSp>
+      <p:sp>
+        <p:nvSpPr>
+          <p:cNvPr id="21" name="TextBox 20"/>
+          <p:cNvSpPr txBox="1"/>
+          <p:nvPr/>
+        </p:nvSpPr>
+        <p:spPr>
+          <a:xfrm>
+            <a:off x="457200" y="4462272"/>
+            <a:ext cx="8229600" cy="365760"/>
+          </a:xfrm>
+          <a:prstGeom prst="rect">
+            <a:avLst/>
+          </a:prstGeom>
+          <a:noFill/>
+        </p:spPr>
+        <p:txBody>
+          <a:bodyPr wrap="square">
+            <a:spAutoFit/>
+          </a:bodyPr>
+          <a:lstStyle/>
+          <a:p>
+            <a:pPr algn="ctr"/>
+            <a:r>
+              <a:rPr sz="1300" b="0" i="0">
+                <a:solidFill>
+                  <a:srgbClr val="9AA3AB"/>
+                </a:solidFill>
+              </a:rPr>
+              <a:t>DefenderType and GoblinType create the entities the world holds.</a:t>
+            </a:r>
+          </a:p>
+        </p:txBody>
+      </p:sp>
+    </p:spTree>
+  </p:cSld>
+  <p:clrMapOvr>
+    <a:masterClrMapping/>
+  </p:clrMapOvr>
+</p:sld>
+</file>
+
+<file path=ppt/slides/slide37.xml><?xml version="1.0" encoding="utf-8"?>
+<p:sld xmlns:a="http://schemas.openxmlformats.org/drawingml/2006/main" xmlns:p="http://schemas.openxmlformats.org/presentationml/2006/main" xmlns:r="http://schemas.openxmlformats.org/officeDocument/2006/relationships">
+  <p:cSld>
+    <p:spTree>
+      <p:nvGrpSpPr>
+        <p:cNvPr id="1" name=""/>
+        <p:cNvGrpSpPr/>
+        <p:nvPr/>
+      </p:nvGrpSpPr>
+      <p:grpSpPr/>
+      <p:sp>
+        <p:nvSpPr>
+          <p:cNvPr id="2" name="Title 1"/>
+          <p:cNvSpPr>
+            <a:spLocks noGrp="1"/>
+          </p:cNvSpPr>
+          <p:nvPr>
+            <p:ph type="title"/>
+          </p:nvPr>
+        </p:nvSpPr>
+        <p:spPr/>
+        <p:txBody>
+          <a:bodyPr/>
+          <a:lstStyle/>
+          <a:p>
+            <a:pPr indent="0" lvl="0" marL="0" rtl="0" algn="l">
+              <a:spcBef>
+                <a:spcPts val="0"/>
+              </a:spcBef>
+              <a:spcAft>
+                <a:spcPts val="0"/>
+              </a:spcAft>
+              <a:buNone/>
+            </a:pPr>
+            <a:r>
+              <a:rPr lang="en"/>
+              <a:t>Summary</a:t>
+            </a:r>
+            <a:endParaRPr/>
+          </a:p>
+        </p:txBody>
+      </p:sp>
+      <p:sp>
+        <p:nvSpPr>
+          <p:cNvPr id="3" name="Text Placeholder 2"/>
+          <p:cNvSpPr>
+            <a:spLocks noGrp="1"/>
+          </p:cNvSpPr>
+          <p:nvPr>
+            <p:ph type="body" idx="1"/>
+          </p:nvPr>
+        </p:nvSpPr>
+        <p:spPr>
+          <a:xfrm>
+            <a:off x="311700" y="885950"/>
+            <a:ext cx="8520600" cy="521208"/>
+          </a:xfrm>
+        </p:spPr>
+        <p:txBody>
+          <a:bodyPr/>
+          <a:lstStyle/>
+          <a:p>
+            <a:pPr indent="-330200" lvl="0" marL="457200" rtl="0" algn="l">
+              <a:spcBef>
+                <a:spcPts val="0"/>
+              </a:spcBef>
+              <a:spcAft>
+                <a:spcPts val="0"/>
+              </a:spcAft>
+              <a:buSzPts val="1600"/>
+              <a:buChar char="●"/>
+            </a:pPr>
+            <a:r>
+              <a:rPr lang="en" b="1"/>
+              <a:t>Six concerns, and this session’s answer to each.</a:t>
+            </a:r>
+            <a:endParaRPr/>
+          </a:p>
+        </p:txBody>
+      </p:sp>
+      <p:sp>
+        <p:nvSpPr>
+          <p:cNvPr id="4" name="Rounded Rectangle 3"/>
+          <p:cNvSpPr/>
+          <p:nvPr/>
+        </p:nvSpPr>
+        <p:spPr>
+          <a:xfrm>
+            <a:off x="548640" y="1417320"/>
+            <a:ext cx="2560320" cy="914400"/>
+          </a:xfrm>
+          <a:prstGeom prst="roundRect">
+            <a:avLst>
+              <a:gd name="adj" fmla="val 12000"/>
+            </a:avLst>
+          </a:prstGeom>
+          <a:solidFill>
+            <a:srgbClr val="2E3338"/>
+          </a:solidFill>
+          <a:ln>
+            <a:noFill/>
+          </a:ln>
+          <a:effectLst/>
+        </p:spPr>
+        <p:style>
+          <a:lnRef idx="1">
+            <a:schemeClr val="accent1"/>
+          </a:lnRef>
+          <a:fillRef idx="3">
+            <a:schemeClr val="accent1"/>
+          </a:fillRef>
+          <a:effectRef idx="2">
+            <a:schemeClr val="accent1"/>
+          </a:effectRef>
+          <a:fontRef idx="minor">
+            <a:schemeClr val="lt1"/>
+          </a:fontRef>
+        </p:style>
+        <p:txBody>
+          <a:bodyPr rtlCol="0" anchor="ctr" wrap="square" lIns="73152" rIns="73152"/>
+          <a:lstStyle/>
+          <a:p>
+            <a:pPr algn="ctr"/>
+            <a:r>
+              <a:rPr sz="1500" b="1">
+                <a:solidFill>
+                  <a:srgbClr val="DEE2E6"/>
+                </a:solidFill>
+              </a:rPr>
+              <a:t>What the player clicked</a:t>
+            </a:r>
+          </a:p>
+          <a:p>
+            <a:pPr algn="ctr"/>
+            <a:r>
+              <a:rPr sz="1300" b="0">
+                <a:solidFill>
+                  <a:srgbClr val="9AA3AB"/>
+                </a:solidFill>
+              </a:rPr>
+              <a:t>Picking: window, game, cell</a:t>
+            </a:r>
+          </a:p>
+        </p:txBody>
+      </p:sp>
+      <p:sp>
+        <p:nvSpPr>
+          <p:cNvPr id="5" name="Rounded Rectangle 4"/>
+          <p:cNvSpPr/>
+          <p:nvPr/>
+        </p:nvSpPr>
+        <p:spPr>
+          <a:xfrm>
+            <a:off x="3291840" y="1417320"/>
+            <a:ext cx="2560320" cy="914400"/>
+          </a:xfrm>
+          <a:prstGeom prst="roundRect">
+            <a:avLst>
+              <a:gd name="adj" fmla="val 12000"/>
+            </a:avLst>
+          </a:prstGeom>
+          <a:solidFill>
+            <a:srgbClr val="2E3338"/>
+          </a:solidFill>
+          <a:ln>
+            <a:noFill/>
+          </a:ln>
+          <a:effectLst/>
+        </p:spPr>
+        <p:style>
+          <a:lnRef idx="1">
+            <a:schemeClr val="accent1"/>
+          </a:lnRef>
+          <a:fillRef idx="3">
+            <a:schemeClr val="accent1"/>
+          </a:fillRef>
+          <a:effectRef idx="2">
+            <a:schemeClr val="accent1"/>
+          </a:effectRef>
+          <a:fontRef idx="minor">
+            <a:schemeClr val="lt1"/>
+          </a:fontRef>
+        </p:style>
+        <p:txBody>
+          <a:bodyPr rtlCol="0" anchor="ctr" wrap="square" lIns="73152" rIns="73152"/>
+          <a:lstStyle/>
+          <a:p>
+            <a:pPr algn="ctr"/>
+            <a:r>
+              <a:rPr sz="1500" b="1">
+                <a:solidFill>
+                  <a:srgbClr val="DEE2E6"/>
+                </a:solidFill>
+              </a:rPr>
+              <a:t>What a thing can do</a:t>
+            </a:r>
+          </a:p>
+          <a:p>
+            <a:pPr algn="ctr"/>
+            <a:r>
+              <a:rPr sz="1300" b="0">
+                <a:solidFill>
+                  <a:srgbClr val="9AA3AB"/>
+                </a:solidFill>
+              </a:rPr>
+              <a:t>Components</a:t>
+            </a:r>
+          </a:p>
+        </p:txBody>
+      </p:sp>
+      <p:sp>
+        <p:nvSpPr>
+          <p:cNvPr id="6" name="Rounded Rectangle 5"/>
+          <p:cNvSpPr/>
+          <p:nvPr/>
+        </p:nvSpPr>
+        <p:spPr>
+          <a:xfrm>
+            <a:off x="6035040" y="1417320"/>
+            <a:ext cx="2560320" cy="914400"/>
+          </a:xfrm>
+          <a:prstGeom prst="roundRect">
+            <a:avLst>
+              <a:gd name="adj" fmla="val 12000"/>
+            </a:avLst>
+          </a:prstGeom>
+          <a:solidFill>
+            <a:srgbClr val="2E3338"/>
+          </a:solidFill>
+          <a:ln>
+            <a:noFill/>
+          </a:ln>
+          <a:effectLst/>
+        </p:spPr>
+        <p:style>
+          <a:lnRef idx="1">
+            <a:schemeClr val="accent1"/>
+          </a:lnRef>
+          <a:fillRef idx="3">
+            <a:schemeClr val="accent1"/>
+          </a:fillRef>
+          <a:effectRef idx="2">
+            <a:schemeClr val="accent1"/>
+          </a:effectRef>
+          <a:fontRef idx="minor">
+            <a:schemeClr val="lt1"/>
+          </a:fontRef>
+        </p:style>
+        <p:txBody>
+          <a:bodyPr rtlCol="0" anchor="ctr" wrap="square" lIns="73152" rIns="73152"/>
+          <a:lstStyle/>
+          <a:p>
+            <a:pPr algn="ctr"/>
+            <a:r>
+              <a:rPr sz="1500" b="1">
+                <a:solidFill>
+                  <a:srgbClr val="DEE2E6"/>
+                </a:solidFill>
+              </a:rPr>
+              <a:t>How parts work together</a:t>
+            </a:r>
+          </a:p>
+          <a:p>
+            <a:pPr algn="ctr"/>
+            <a:r>
+              <a:rPr sz="1300" b="0">
+                <a:solidFill>
+                  <a:srgbClr val="9AA3AB"/>
+                </a:solidFill>
+              </a:rPr>
+              <a:t>Through the owner, and the world</a:t>
+            </a:r>
+          </a:p>
+        </p:txBody>
+      </p:sp>
+      <p:sp>
+        <p:nvSpPr>
+          <p:cNvPr id="7" name="Rounded Rectangle 6"/>
+          <p:cNvSpPr/>
+          <p:nvPr/>
+        </p:nvSpPr>
+        <p:spPr>
+          <a:xfrm>
+            <a:off x="548640" y="2468880"/>
+            <a:ext cx="2560320" cy="914400"/>
+          </a:xfrm>
+          <a:prstGeom prst="roundRect">
+            <a:avLst>
+              <a:gd name="adj" fmla="val 12000"/>
+            </a:avLst>
+          </a:prstGeom>
+          <a:solidFill>
+            <a:srgbClr val="2E3338"/>
+          </a:solidFill>
+          <a:ln>
+            <a:noFill/>
+          </a:ln>
+          <a:effectLst/>
+        </p:spPr>
+        <p:style>
+          <a:lnRef idx="1">
+            <a:schemeClr val="accent1"/>
+          </a:lnRef>
+          <a:fillRef idx="3">
+            <a:schemeClr val="accent1"/>
+          </a:fillRef>
+          <a:effectRef idx="2">
+            <a:schemeClr val="accent1"/>
+          </a:effectRef>
+          <a:fontRef idx="minor">
+            <a:schemeClr val="lt1"/>
+          </a:fontRef>
+        </p:style>
+        <p:txBody>
+          <a:bodyPr rtlCol="0" anchor="ctr" wrap="square" lIns="73152" rIns="73152"/>
+          <a:lstStyle/>
+          <a:p>
+            <a:pPr algn="ctr"/>
+            <a:r>
+              <a:rPr sz="1500" b="1">
+                <a:solidFill>
+                  <a:srgbClr val="DEE2E6"/>
+                </a:solidFill>
+              </a:rPr>
+              <a:t>What a kind of thing shares</a:t>
+            </a:r>
+          </a:p>
+          <a:p>
+            <a:pPr algn="ctr"/>
+            <a:r>
+              <a:rPr sz="1300" b="0">
+                <a:solidFill>
+                  <a:srgbClr val="9AA3AB"/>
+                </a:solidFill>
+              </a:rPr>
+              <a:t>Type Object, from JSON</a:t>
+            </a:r>
+          </a:p>
+        </p:txBody>
+      </p:sp>
+      <p:sp>
+        <p:nvSpPr>
+          <p:cNvPr id="8" name="Rounded Rectangle 7"/>
+          <p:cNvSpPr/>
+          <p:nvPr/>
+        </p:nvSpPr>
+        <p:spPr>
+          <a:xfrm>
+            <a:off x="3291840" y="2468880"/>
+            <a:ext cx="2560320" cy="914400"/>
+          </a:xfrm>
+          <a:prstGeom prst="roundRect">
+            <a:avLst>
+              <a:gd name="adj" fmla="val 12000"/>
+            </a:avLst>
+          </a:prstGeom>
+          <a:solidFill>
+            <a:srgbClr val="2E3338"/>
+          </a:solidFill>
+          <a:ln>
+            <a:noFill/>
+          </a:ln>
+          <a:effectLst/>
+        </p:spPr>
+        <p:style>
+          <a:lnRef idx="1">
+            <a:schemeClr val="accent1"/>
+          </a:lnRef>
+          <a:fillRef idx="3">
+            <a:schemeClr val="accent1"/>
+          </a:fillRef>
+          <a:effectRef idx="2">
+            <a:schemeClr val="accent1"/>
+          </a:effectRef>
+          <a:fontRef idx="minor">
+            <a:schemeClr val="lt1"/>
+          </a:fontRef>
+        </p:style>
+        <p:txBody>
+          <a:bodyPr rtlCol="0" anchor="ctr" wrap="square" lIns="73152" rIns="73152"/>
+          <a:lstStyle/>
+          <a:p>
+            <a:pPr algn="ctr"/>
+            <a:r>
+              <a:rPr sz="1500" b="1">
+                <a:solidFill>
+                  <a:srgbClr val="DEE2E6"/>
+                </a:solidFill>
+              </a:rPr>
+              <a:t>A new kind of thing</a:t>
+            </a:r>
+          </a:p>
+          <a:p>
+            <a:pPr algn="ctr"/>
+            <a:r>
+              <a:rPr sz="1300" b="0">
+                <a:solidFill>
+                  <a:srgbClr val="9AA3AB"/>
+                </a:solidFill>
+              </a:rPr>
+              <a:t>Data, plus a component if needed</a:t>
+            </a:r>
+          </a:p>
+        </p:txBody>
+      </p:sp>
+      <p:sp>
+        <p:nvSpPr>
+          <p:cNvPr id="9" name="Rounded Rectangle 8"/>
+          <p:cNvSpPr/>
+          <p:nvPr/>
+        </p:nvSpPr>
+        <p:spPr>
+          <a:xfrm>
+            <a:off x="6035040" y="2468880"/>
+            <a:ext cx="2560320" cy="914400"/>
+          </a:xfrm>
+          <a:prstGeom prst="roundRect">
+            <a:avLst>
+              <a:gd name="adj" fmla="val 12000"/>
+            </a:avLst>
+          </a:prstGeom>
+          <a:solidFill>
+            <a:srgbClr val="2E3338"/>
+          </a:solidFill>
+          <a:ln>
+            <a:noFill/>
+          </a:ln>
+          <a:effectLst/>
+        </p:spPr>
+        <p:style>
+          <a:lnRef idx="1">
+            <a:schemeClr val="accent1"/>
+          </a:lnRef>
+          <a:fillRef idx="3">
+            <a:schemeClr val="accent1"/>
+          </a:fillRef>
+          <a:effectRef idx="2">
+            <a:schemeClr val="accent1"/>
+          </a:effectRef>
+          <a:fontRef idx="minor">
+            <a:schemeClr val="lt1"/>
+          </a:fontRef>
+        </p:style>
+        <p:txBody>
+          <a:bodyPr rtlCol="0" anchor="ctr" wrap="square" lIns="73152" rIns="73152"/>
+          <a:lstStyle/>
+          <a:p>
+            <a:pPr algn="ctr"/>
+            <a:r>
+              <a:rPr sz="1500" b="1">
+                <a:solidFill>
+                  <a:srgbClr val="DEE2E6"/>
+                </a:solidFill>
+              </a:rPr>
+              <a:t>Checking one ability</a:t>
+            </a:r>
+          </a:p>
+          <a:p>
+            <a:pPr algn="ctr"/>
+            <a:r>
+              <a:rPr sz="1300" b="0">
+                <a:solidFill>
+                  <a:srgbClr val="9AA3AB"/>
+                </a:solidFill>
+              </a:rPr>
+              <a:t>A test with only its parts</a:t>
+            </a:r>
+          </a:p>
+        </p:txBody>
+      </p:sp>
+    </p:spTree>
+  </p:cSld>
+  <p:clrMapOvr>
+    <a:masterClrMapping/>
+  </p:clrMapOvr>
+</p:sld>
+</file>
+
 <file path=ppt/slides/slide4.xml><?xml version="1.0" encoding="utf-8"?>
 <p:sld xmlns:a="http://schemas.openxmlformats.org/drawingml/2006/main" xmlns:r="http://schemas.openxmlformats.org/officeDocument/2006/relationships" xmlns:mc="http://schemas.openxmlformats.org/markup-compatibility/2006" xmlns:mv="urn:schemas-microsoft-com:mac:vml" xmlns:p="http://schemas.openxmlformats.org/presentationml/2006/main" xmlns:c="http://schemas.openxmlformats.org/drawingml/2006/chart" xmlns:dgm="http://schemas.openxmlformats.org/drawingml/2006/diagram" xmlns:o="urn:schemas-microsoft-com:office:office" xmlns:v="urn:schemas-microsoft-com:vml" xmlns:pvml="urn:schemas-microsoft-com:office:powerpoint" xmlns:com="http://schemas.openxmlformats.org/drawingml/2006/compatibility" xmlns:p14="http://schemas.microsoft.com/office/powerpoint/2010/main" xmlns:p15="http://schemas.microsoft.com/office/powerpoint/2012/main" xmlns:ahyp="http://schemas.microsoft.com/office/drawing/2018/hyperlinkcolor">
   <p:cSld>

--- a/slides/09 Plants vs. Zombies.pptx
+++ b/slides/09 Plants vs. Zombies.pptx
@@ -8185,7 +8185,7 @@
                   <a:srgbClr val="DEE2E6"/>
                 </a:solidFill>
               </a:rPr>
-              <a:t>One entity, many domains (drawing, health, shooting), not coupled</a:t>
+              <a:t>One entity, many domains (drawing, health, shooting), kept apart</a:t>
             </a:r>
             <a:endParaRPr/>
           </a:p>
@@ -14104,6 +14104,981 @@
 </file>
 
 <file path=ppt/slides/slide31.xml><?xml version="1.0" encoding="utf-8"?>
+<p:sld xmlns:a="http://schemas.openxmlformats.org/drawingml/2006/main" xmlns:p="http://schemas.openxmlformats.org/presentationml/2006/main" xmlns:r="http://schemas.openxmlformats.org/officeDocument/2006/relationships">
+  <p:cSld>
+    <p:spTree>
+      <p:nvGrpSpPr>
+        <p:cNvPr id="1" name=""/>
+        <p:cNvGrpSpPr/>
+        <p:nvPr/>
+      </p:nvGrpSpPr>
+      <p:grpSpPr/>
+      <p:sp>
+        <p:nvSpPr>
+          <p:cNvPr id="2" name="Title 1"/>
+          <p:cNvSpPr>
+            <a:spLocks noGrp="1"/>
+          </p:cNvSpPr>
+          <p:nvPr>
+            <p:ph type="title"/>
+          </p:nvPr>
+        </p:nvSpPr>
+        <p:spPr/>
+        <p:txBody>
+          <a:bodyPr/>
+          <a:lstStyle/>
+          <a:p>
+            <a:pPr indent="0" lvl="0" marL="0" rtl="0" algn="l">
+              <a:spcBef>
+                <a:spcPts val="0"/>
+              </a:spcBef>
+              <a:spcAft>
+                <a:spcPts val="0"/>
+              </a:spcAft>
+              <a:buNone/>
+            </a:pPr>
+            <a:r>
+              <a:rPr lang="en"/>
+              <a:t>The Whole Game: Who Holds What</a:t>
+            </a:r>
+            <a:endParaRPr/>
+          </a:p>
+        </p:txBody>
+      </p:sp>
+      <p:sp>
+        <p:nvSpPr>
+          <p:cNvPr id="3" name="Text Placeholder 2"/>
+          <p:cNvSpPr>
+            <a:spLocks noGrp="1"/>
+          </p:cNvSpPr>
+          <p:nvPr>
+            <p:ph type="body" idx="1"/>
+          </p:nvPr>
+        </p:nvSpPr>
+        <p:spPr>
+          <a:xfrm>
+            <a:off x="311700" y="885950"/>
+            <a:ext cx="8520600" cy="521208"/>
+          </a:xfrm>
+        </p:spPr>
+        <p:txBody>
+          <a:bodyPr/>
+          <a:lstStyle/>
+          <a:p>
+            <a:pPr indent="-330200" lvl="0" marL="457200" rtl="0" algn="l">
+              <a:spcBef>
+                <a:spcPts val="0"/>
+              </a:spcBef>
+              <a:spcAft>
+                <a:spcPts val="0"/>
+              </a:spcAft>
+              <a:buSzPts val="1600"/>
+              <a:buChar char="●"/>
+            </a:pPr>
+            <a:r>
+              <a:rPr lang="en" b="1"/>
+              <a:t>No class is an archer or a goblin. The types create entities.</a:t>
+            </a:r>
+            <a:endParaRPr/>
+          </a:p>
+        </p:txBody>
+      </p:sp>
+      <p:sp>
+        <p:nvSpPr>
+          <p:cNvPr id="4" name="Rounded Rectangle 3"/>
+          <p:cNvSpPr/>
+          <p:nvPr/>
+        </p:nvSpPr>
+        <p:spPr>
+          <a:xfrm>
+            <a:off x="3429000" y="1481328"/>
+            <a:ext cx="2286000" cy="566928"/>
+          </a:xfrm>
+          <a:prstGeom prst="roundRect">
+            <a:avLst>
+              <a:gd name="adj" fmla="val 12000"/>
+            </a:avLst>
+          </a:prstGeom>
+          <a:solidFill>
+            <a:srgbClr val="2E3338"/>
+          </a:solidFill>
+          <a:ln w="25400">
+            <a:solidFill>
+              <a:srgbClr val="D45D35"/>
+            </a:solidFill>
+          </a:ln>
+          <a:effectLst/>
+        </p:spPr>
+        <p:style>
+          <a:lnRef idx="1">
+            <a:schemeClr val="accent1"/>
+          </a:lnRef>
+          <a:fillRef idx="3">
+            <a:schemeClr val="accent1"/>
+          </a:fillRef>
+          <a:effectRef idx="2">
+            <a:schemeClr val="accent1"/>
+          </a:effectRef>
+          <a:fontRef idx="minor">
+            <a:schemeClr val="lt1"/>
+          </a:fontRef>
+        </p:style>
+        <p:txBody>
+          <a:bodyPr rtlCol="0" anchor="ctr" wrap="square" lIns="73152" rIns="73152"/>
+          <a:lstStyle/>
+          <a:p>
+            <a:pPr algn="ctr"/>
+            <a:r>
+              <a:rPr sz="1300" b="1">
+                <a:solidFill>
+                  <a:srgbClr val="DEE2E6"/>
+                </a:solidFill>
+              </a:rPr>
+              <a:t>Game1 : Core</a:t>
+            </a:r>
+          </a:p>
+        </p:txBody>
+      </p:sp>
+      <p:sp>
+        <p:nvSpPr>
+          <p:cNvPr id="5" name="Rounded Rectangle 4"/>
+          <p:cNvSpPr/>
+          <p:nvPr/>
+        </p:nvSpPr>
+        <p:spPr>
+          <a:xfrm>
+            <a:off x="374904" y="2246376"/>
+            <a:ext cx="2016252" cy="566928"/>
+          </a:xfrm>
+          <a:prstGeom prst="roundRect">
+            <a:avLst>
+              <a:gd name="adj" fmla="val 12000"/>
+            </a:avLst>
+          </a:prstGeom>
+          <a:solidFill>
+            <a:srgbClr val="2E3338"/>
+          </a:solidFill>
+          <a:ln>
+            <a:noFill/>
+          </a:ln>
+          <a:effectLst/>
+        </p:spPr>
+        <p:style>
+          <a:lnRef idx="1">
+            <a:schemeClr val="accent1"/>
+          </a:lnRef>
+          <a:fillRef idx="3">
+            <a:schemeClr val="accent1"/>
+          </a:fillRef>
+          <a:effectRef idx="2">
+            <a:schemeClr val="accent1"/>
+          </a:effectRef>
+          <a:fontRef idx="minor">
+            <a:schemeClr val="lt1"/>
+          </a:fontRef>
+        </p:style>
+        <p:txBody>
+          <a:bodyPr rtlCol="0" anchor="ctr" wrap="square" lIns="73152" rIns="73152"/>
+          <a:lstStyle/>
+          <a:p>
+            <a:pPr algn="ctr"/>
+            <a:r>
+              <a:rPr sz="1300" b="1">
+                <a:solidFill>
+                  <a:srgbClr val="DEE2E6"/>
+                </a:solidFill>
+              </a:rPr>
+              <a:t>Game states</a:t>
+            </a:r>
+          </a:p>
+          <a:p>
+            <a:pPr algn="ctr"/>
+            <a:r>
+              <a:rPr sz="1100" b="0">
+                <a:solidFill>
+                  <a:srgbClr val="9AA3AB"/>
+                </a:solidFill>
+              </a:rPr>
+              <a:t>title, play, end</a:t>
+            </a:r>
+          </a:p>
+        </p:txBody>
+      </p:sp>
+      <p:cxnSp>
+        <p:nvCxnSpPr>
+          <p:cNvPr id="6" name="Connector 5"/>
+          <p:cNvCxnSpPr/>
+          <p:nvPr/>
+        </p:nvCxnSpPr>
+        <p:spPr>
+          <a:xfrm flipH="1">
+            <a:off x="1383030" y="2066544"/>
+            <a:ext cx="3188970" cy="161544"/>
+          </a:xfrm>
+          <a:prstGeom prst="line">
+            <a:avLst/>
+          </a:prstGeom>
+          <a:ln w="25400">
+            <a:solidFill>
+              <a:srgbClr val="9AA3AB"/>
+            </a:solidFill>
+            <a:tailEnd type="triangle"/>
+          </a:ln>
+        </p:spPr>
+        <p:style>
+          <a:lnRef idx="2">
+            <a:schemeClr val="accent1"/>
+          </a:lnRef>
+          <a:fillRef idx="0">
+            <a:schemeClr val="accent1"/>
+          </a:fillRef>
+          <a:effectRef idx="1">
+            <a:schemeClr val="accent1"/>
+          </a:effectRef>
+          <a:fontRef idx="minor">
+            <a:schemeClr val="tx1"/>
+          </a:fontRef>
+        </p:style>
+      </p:cxnSp>
+      <p:sp>
+        <p:nvSpPr>
+          <p:cNvPr id="7" name="Rounded Rectangle 6"/>
+          <p:cNvSpPr/>
+          <p:nvPr/>
+        </p:nvSpPr>
+        <p:spPr>
+          <a:xfrm>
+            <a:off x="2500884" y="2246376"/>
+            <a:ext cx="2016252" cy="566928"/>
+          </a:xfrm>
+          <a:prstGeom prst="roundRect">
+            <a:avLst>
+              <a:gd name="adj" fmla="val 12000"/>
+            </a:avLst>
+          </a:prstGeom>
+          <a:solidFill>
+            <a:srgbClr val="2E3338"/>
+          </a:solidFill>
+          <a:ln>
+            <a:noFill/>
+          </a:ln>
+          <a:effectLst/>
+        </p:spPr>
+        <p:style>
+          <a:lnRef idx="1">
+            <a:schemeClr val="accent1"/>
+          </a:lnRef>
+          <a:fillRef idx="3">
+            <a:schemeClr val="accent1"/>
+          </a:fillRef>
+          <a:effectRef idx="2">
+            <a:schemeClr val="accent1"/>
+          </a:effectRef>
+          <a:fontRef idx="minor">
+            <a:schemeClr val="lt1"/>
+          </a:fontRef>
+        </p:style>
+        <p:txBody>
+          <a:bodyPr rtlCol="0" anchor="ctr" wrap="square" lIns="73152" rIns="73152"/>
+          <a:lstStyle/>
+          <a:p>
+            <a:pPr algn="ctr"/>
+            <a:r>
+              <a:rPr sz="1300" b="1">
+                <a:solidFill>
+                  <a:srgbClr val="DEE2E6"/>
+                </a:solidFill>
+              </a:rPr>
+              <a:t>World</a:t>
+            </a:r>
+          </a:p>
+          <a:p>
+            <a:pPr algn="ctr"/>
+            <a:r>
+              <a:rPr sz="1100" b="0">
+                <a:solidFill>
+                  <a:srgbClr val="9AA3AB"/>
+                </a:solidFill>
+              </a:rPr>
+              <a:t>only sees entities</a:t>
+            </a:r>
+          </a:p>
+        </p:txBody>
+      </p:sp>
+      <p:sp>
+        <p:nvSpPr>
+          <p:cNvPr id="8" name="Rounded Rectangle 7"/>
+          <p:cNvSpPr/>
+          <p:nvPr/>
+        </p:nvSpPr>
+        <p:spPr>
+          <a:xfrm>
+            <a:off x="2500884" y="3011424"/>
+            <a:ext cx="2016252" cy="566928"/>
+          </a:xfrm>
+          <a:prstGeom prst="roundRect">
+            <a:avLst>
+              <a:gd name="adj" fmla="val 12000"/>
+            </a:avLst>
+          </a:prstGeom>
+          <a:solidFill>
+            <a:srgbClr val="2E3338"/>
+          </a:solidFill>
+          <a:ln>
+            <a:noFill/>
+          </a:ln>
+          <a:effectLst/>
+        </p:spPr>
+        <p:style>
+          <a:lnRef idx="1">
+            <a:schemeClr val="accent1"/>
+          </a:lnRef>
+          <a:fillRef idx="3">
+            <a:schemeClr val="accent1"/>
+          </a:fillRef>
+          <a:effectRef idx="2">
+            <a:schemeClr val="accent1"/>
+          </a:effectRef>
+          <a:fontRef idx="minor">
+            <a:schemeClr val="lt1"/>
+          </a:fontRef>
+        </p:style>
+        <p:txBody>
+          <a:bodyPr rtlCol="0" anchor="ctr" wrap="square" lIns="73152" rIns="73152"/>
+          <a:lstStyle/>
+          <a:p>
+            <a:pPr algn="ctr"/>
+            <a:r>
+              <a:rPr sz="1300" b="1">
+                <a:solidFill>
+                  <a:srgbClr val="DEE2E6"/>
+                </a:solidFill>
+              </a:rPr>
+              <a:t>Entity</a:t>
+            </a:r>
+          </a:p>
+          <a:p>
+            <a:pPr algn="ctr"/>
+            <a:r>
+              <a:rPr sz="1100" b="0">
+                <a:solidFill>
+                  <a:srgbClr val="9AA3AB"/>
+                </a:solidFill>
+              </a:rPr>
+              <a:t>many</a:t>
+            </a:r>
+          </a:p>
+        </p:txBody>
+      </p:sp>
+      <p:sp>
+        <p:nvSpPr>
+          <p:cNvPr id="9" name="Rounded Rectangle 8"/>
+          <p:cNvSpPr/>
+          <p:nvPr/>
+        </p:nvSpPr>
+        <p:spPr>
+          <a:xfrm>
+            <a:off x="2500884" y="3776472"/>
+            <a:ext cx="2016252" cy="566928"/>
+          </a:xfrm>
+          <a:prstGeom prst="roundRect">
+            <a:avLst>
+              <a:gd name="adj" fmla="val 12000"/>
+            </a:avLst>
+          </a:prstGeom>
+          <a:solidFill>
+            <a:srgbClr val="2E3338"/>
+          </a:solidFill>
+          <a:ln>
+            <a:noFill/>
+          </a:ln>
+          <a:effectLst/>
+        </p:spPr>
+        <p:style>
+          <a:lnRef idx="1">
+            <a:schemeClr val="accent1"/>
+          </a:lnRef>
+          <a:fillRef idx="3">
+            <a:schemeClr val="accent1"/>
+          </a:fillRef>
+          <a:effectRef idx="2">
+            <a:schemeClr val="accent1"/>
+          </a:effectRef>
+          <a:fontRef idx="minor">
+            <a:schemeClr val="lt1"/>
+          </a:fontRef>
+        </p:style>
+        <p:txBody>
+          <a:bodyPr rtlCol="0" anchor="ctr" wrap="square" lIns="73152" rIns="73152"/>
+          <a:lstStyle/>
+          <a:p>
+            <a:pPr algn="ctr"/>
+            <a:r>
+              <a:rPr sz="1300" b="1">
+                <a:solidFill>
+                  <a:srgbClr val="DEE2E6"/>
+                </a:solidFill>
+              </a:rPr>
+              <a:t>Component</a:t>
+            </a:r>
+          </a:p>
+          <a:p>
+            <a:pPr algn="ctr"/>
+            <a:r>
+              <a:rPr sz="1100" b="0">
+                <a:solidFill>
+                  <a:srgbClr val="9AA3AB"/>
+                </a:solidFill>
+              </a:rPr>
+              <a:t>one ability each</a:t>
+            </a:r>
+          </a:p>
+        </p:txBody>
+      </p:sp>
+      <p:cxnSp>
+        <p:nvCxnSpPr>
+          <p:cNvPr id="10" name="Connector 9"/>
+          <p:cNvCxnSpPr/>
+          <p:nvPr/>
+        </p:nvCxnSpPr>
+        <p:spPr>
+          <a:xfrm>
+            <a:off x="3509010" y="3596640"/>
+            <a:ext cx="0" cy="161544"/>
+          </a:xfrm>
+          <a:prstGeom prst="line">
+            <a:avLst/>
+          </a:prstGeom>
+          <a:ln w="25400">
+            <a:solidFill>
+              <a:srgbClr val="9AA3AB"/>
+            </a:solidFill>
+            <a:tailEnd type="triangle"/>
+          </a:ln>
+        </p:spPr>
+        <p:style>
+          <a:lnRef idx="2">
+            <a:schemeClr val="accent1"/>
+          </a:lnRef>
+          <a:fillRef idx="0">
+            <a:schemeClr val="accent1"/>
+          </a:fillRef>
+          <a:effectRef idx="1">
+            <a:schemeClr val="accent1"/>
+          </a:effectRef>
+          <a:fontRef idx="minor">
+            <a:schemeClr val="tx1"/>
+          </a:fontRef>
+        </p:style>
+      </p:cxnSp>
+      <p:cxnSp>
+        <p:nvCxnSpPr>
+          <p:cNvPr id="11" name="Connector 10"/>
+          <p:cNvCxnSpPr/>
+          <p:nvPr/>
+        </p:nvCxnSpPr>
+        <p:spPr>
+          <a:xfrm>
+            <a:off x="3509010" y="2831592"/>
+            <a:ext cx="0" cy="161544"/>
+          </a:xfrm>
+          <a:prstGeom prst="line">
+            <a:avLst/>
+          </a:prstGeom>
+          <a:ln w="25400">
+            <a:solidFill>
+              <a:srgbClr val="9AA3AB"/>
+            </a:solidFill>
+            <a:tailEnd type="triangle"/>
+          </a:ln>
+        </p:spPr>
+        <p:style>
+          <a:lnRef idx="2">
+            <a:schemeClr val="accent1"/>
+          </a:lnRef>
+          <a:fillRef idx="0">
+            <a:schemeClr val="accent1"/>
+          </a:fillRef>
+          <a:effectRef idx="1">
+            <a:schemeClr val="accent1"/>
+          </a:effectRef>
+          <a:fontRef idx="minor">
+            <a:schemeClr val="tx1"/>
+          </a:fontRef>
+        </p:style>
+      </p:cxnSp>
+      <p:cxnSp>
+        <p:nvCxnSpPr>
+          <p:cNvPr id="12" name="Connector 11"/>
+          <p:cNvCxnSpPr/>
+          <p:nvPr/>
+        </p:nvCxnSpPr>
+        <p:spPr>
+          <a:xfrm flipH="1">
+            <a:off x="3509010" y="2066544"/>
+            <a:ext cx="1062990" cy="161544"/>
+          </a:xfrm>
+          <a:prstGeom prst="line">
+            <a:avLst/>
+          </a:prstGeom>
+          <a:ln w="25400">
+            <a:solidFill>
+              <a:srgbClr val="9AA3AB"/>
+            </a:solidFill>
+            <a:tailEnd type="triangle"/>
+          </a:ln>
+        </p:spPr>
+        <p:style>
+          <a:lnRef idx="2">
+            <a:schemeClr val="accent1"/>
+          </a:lnRef>
+          <a:fillRef idx="0">
+            <a:schemeClr val="accent1"/>
+          </a:fillRef>
+          <a:effectRef idx="1">
+            <a:schemeClr val="accent1"/>
+          </a:effectRef>
+          <a:fontRef idx="minor">
+            <a:schemeClr val="tx1"/>
+          </a:fontRef>
+        </p:style>
+      </p:cxnSp>
+      <p:sp>
+        <p:nvSpPr>
+          <p:cNvPr id="13" name="Rounded Rectangle 12"/>
+          <p:cNvSpPr/>
+          <p:nvPr/>
+        </p:nvSpPr>
+        <p:spPr>
+          <a:xfrm>
+            <a:off x="4626864" y="2246376"/>
+            <a:ext cx="2016252" cy="566928"/>
+          </a:xfrm>
+          <a:prstGeom prst="roundRect">
+            <a:avLst>
+              <a:gd name="adj" fmla="val 12000"/>
+            </a:avLst>
+          </a:prstGeom>
+          <a:solidFill>
+            <a:srgbClr val="2E3338"/>
+          </a:solidFill>
+          <a:ln>
+            <a:noFill/>
+          </a:ln>
+          <a:effectLst/>
+        </p:spPr>
+        <p:style>
+          <a:lnRef idx="1">
+            <a:schemeClr val="accent1"/>
+          </a:lnRef>
+          <a:fillRef idx="3">
+            <a:schemeClr val="accent1"/>
+          </a:fillRef>
+          <a:effectRef idx="2">
+            <a:schemeClr val="accent1"/>
+          </a:effectRef>
+          <a:fontRef idx="minor">
+            <a:schemeClr val="lt1"/>
+          </a:fontRef>
+        </p:style>
+        <p:txBody>
+          <a:bodyPr rtlCol="0" anchor="ctr" wrap="square" lIns="73152" rIns="73152"/>
+          <a:lstStyle/>
+          <a:p>
+            <a:pPr algn="ctr"/>
+            <a:r>
+              <a:rPr sz="1300" b="1">
+                <a:solidFill>
+                  <a:srgbClr val="DEE2E6"/>
+                </a:solidFill>
+              </a:rPr>
+              <a:t>CardBar</a:t>
+            </a:r>
+          </a:p>
+        </p:txBody>
+      </p:sp>
+      <p:sp>
+        <p:nvSpPr>
+          <p:cNvPr id="14" name="Rounded Rectangle 13"/>
+          <p:cNvSpPr/>
+          <p:nvPr/>
+        </p:nvSpPr>
+        <p:spPr>
+          <a:xfrm>
+            <a:off x="4626864" y="3011424"/>
+            <a:ext cx="2016252" cy="566928"/>
+          </a:xfrm>
+          <a:prstGeom prst="roundRect">
+            <a:avLst>
+              <a:gd name="adj" fmla="val 12000"/>
+            </a:avLst>
+          </a:prstGeom>
+          <a:solidFill>
+            <a:srgbClr val="2E3338"/>
+          </a:solidFill>
+          <a:ln>
+            <a:noFill/>
+          </a:ln>
+          <a:effectLst/>
+        </p:spPr>
+        <p:style>
+          <a:lnRef idx="1">
+            <a:schemeClr val="accent1"/>
+          </a:lnRef>
+          <a:fillRef idx="3">
+            <a:schemeClr val="accent1"/>
+          </a:fillRef>
+          <a:effectRef idx="2">
+            <a:schemeClr val="accent1"/>
+          </a:effectRef>
+          <a:fontRef idx="minor">
+            <a:schemeClr val="lt1"/>
+          </a:fontRef>
+        </p:style>
+        <p:txBody>
+          <a:bodyPr rtlCol="0" anchor="ctr" wrap="square" lIns="73152" rIns="73152"/>
+          <a:lstStyle/>
+          <a:p>
+            <a:pPr algn="ctr"/>
+            <a:r>
+              <a:rPr sz="1300" b="1">
+                <a:solidFill>
+                  <a:srgbClr val="DEE2E6"/>
+                </a:solidFill>
+              </a:rPr>
+              <a:t>DefenderType</a:t>
+            </a:r>
+          </a:p>
+          <a:p>
+            <a:pPr algn="ctr"/>
+            <a:r>
+              <a:rPr sz="1100" b="0">
+                <a:solidFill>
+                  <a:srgbClr val="9AA3AB"/>
+                </a:solidFill>
+              </a:rPr>
+              <a:t>a card for each</a:t>
+            </a:r>
+          </a:p>
+        </p:txBody>
+      </p:sp>
+      <p:cxnSp>
+        <p:nvCxnSpPr>
+          <p:cNvPr id="15" name="Connector 14"/>
+          <p:cNvCxnSpPr/>
+          <p:nvPr/>
+        </p:nvCxnSpPr>
+        <p:spPr>
+          <a:xfrm>
+            <a:off x="5634990" y="2831592"/>
+            <a:ext cx="0" cy="161544"/>
+          </a:xfrm>
+          <a:prstGeom prst="line">
+            <a:avLst/>
+          </a:prstGeom>
+          <a:ln w="25400">
+            <a:solidFill>
+              <a:srgbClr val="9AA3AB"/>
+            </a:solidFill>
+            <a:tailEnd type="triangle"/>
+          </a:ln>
+        </p:spPr>
+        <p:style>
+          <a:lnRef idx="2">
+            <a:schemeClr val="accent1"/>
+          </a:lnRef>
+          <a:fillRef idx="0">
+            <a:schemeClr val="accent1"/>
+          </a:fillRef>
+          <a:effectRef idx="1">
+            <a:schemeClr val="accent1"/>
+          </a:effectRef>
+          <a:fontRef idx="minor">
+            <a:schemeClr val="tx1"/>
+          </a:fontRef>
+        </p:style>
+      </p:cxnSp>
+      <p:cxnSp>
+        <p:nvCxnSpPr>
+          <p:cNvPr id="16" name="Connector 15"/>
+          <p:cNvCxnSpPr/>
+          <p:nvPr/>
+        </p:nvCxnSpPr>
+        <p:spPr>
+          <a:xfrm>
+            <a:off x="4572000" y="2066544"/>
+            <a:ext cx="1062990" cy="161544"/>
+          </a:xfrm>
+          <a:prstGeom prst="line">
+            <a:avLst/>
+          </a:prstGeom>
+          <a:ln w="25400">
+            <a:solidFill>
+              <a:srgbClr val="9AA3AB"/>
+            </a:solidFill>
+            <a:tailEnd type="triangle"/>
+          </a:ln>
+        </p:spPr>
+        <p:style>
+          <a:lnRef idx="2">
+            <a:schemeClr val="accent1"/>
+          </a:lnRef>
+          <a:fillRef idx="0">
+            <a:schemeClr val="accent1"/>
+          </a:fillRef>
+          <a:effectRef idx="1">
+            <a:schemeClr val="accent1"/>
+          </a:effectRef>
+          <a:fontRef idx="minor">
+            <a:schemeClr val="tx1"/>
+          </a:fontRef>
+        </p:style>
+      </p:cxnSp>
+      <p:sp>
+        <p:nvSpPr>
+          <p:cNvPr id="17" name="Rounded Rectangle 16"/>
+          <p:cNvSpPr/>
+          <p:nvPr/>
+        </p:nvSpPr>
+        <p:spPr>
+          <a:xfrm>
+            <a:off x="6752844" y="2246376"/>
+            <a:ext cx="2016252" cy="566928"/>
+          </a:xfrm>
+          <a:prstGeom prst="roundRect">
+            <a:avLst>
+              <a:gd name="adj" fmla="val 12000"/>
+            </a:avLst>
+          </a:prstGeom>
+          <a:solidFill>
+            <a:srgbClr val="2E3338"/>
+          </a:solidFill>
+          <a:ln>
+            <a:noFill/>
+          </a:ln>
+          <a:effectLst/>
+        </p:spPr>
+        <p:style>
+          <a:lnRef idx="1">
+            <a:schemeClr val="accent1"/>
+          </a:lnRef>
+          <a:fillRef idx="3">
+            <a:schemeClr val="accent1"/>
+          </a:fillRef>
+          <a:effectRef idx="2">
+            <a:schemeClr val="accent1"/>
+          </a:effectRef>
+          <a:fontRef idx="minor">
+            <a:schemeClr val="lt1"/>
+          </a:fontRef>
+        </p:style>
+        <p:txBody>
+          <a:bodyPr rtlCol="0" anchor="ctr" wrap="square" lIns="73152" rIns="73152"/>
+          <a:lstStyle/>
+          <a:p>
+            <a:pPr algn="ctr"/>
+            <a:r>
+              <a:rPr sz="1300" b="1">
+                <a:solidFill>
+                  <a:srgbClr val="DEE2E6"/>
+                </a:solidFill>
+              </a:rPr>
+              <a:t>Level</a:t>
+            </a:r>
+          </a:p>
+          <a:p>
+            <a:pPr algn="ctr"/>
+            <a:r>
+              <a:rPr sz="1100" b="0">
+                <a:solidFill>
+                  <a:srgbClr val="9AA3AB"/>
+                </a:solidFill>
+              </a:rPr>
+              <a:t>level1.json</a:t>
+            </a:r>
+          </a:p>
+        </p:txBody>
+      </p:sp>
+      <p:sp>
+        <p:nvSpPr>
+          <p:cNvPr id="18" name="Rounded Rectangle 17"/>
+          <p:cNvSpPr/>
+          <p:nvPr/>
+        </p:nvSpPr>
+        <p:spPr>
+          <a:xfrm>
+            <a:off x="6752844" y="3011424"/>
+            <a:ext cx="2016252" cy="566928"/>
+          </a:xfrm>
+          <a:prstGeom prst="roundRect">
+            <a:avLst>
+              <a:gd name="adj" fmla="val 12000"/>
+            </a:avLst>
+          </a:prstGeom>
+          <a:solidFill>
+            <a:srgbClr val="2E3338"/>
+          </a:solidFill>
+          <a:ln>
+            <a:noFill/>
+          </a:ln>
+          <a:effectLst/>
+        </p:spPr>
+        <p:style>
+          <a:lnRef idx="1">
+            <a:schemeClr val="accent1"/>
+          </a:lnRef>
+          <a:fillRef idx="3">
+            <a:schemeClr val="accent1"/>
+          </a:fillRef>
+          <a:effectRef idx="2">
+            <a:schemeClr val="accent1"/>
+          </a:effectRef>
+          <a:fontRef idx="minor">
+            <a:schemeClr val="lt1"/>
+          </a:fontRef>
+        </p:style>
+        <p:txBody>
+          <a:bodyPr rtlCol="0" anchor="ctr" wrap="square" lIns="73152" rIns="73152"/>
+          <a:lstStyle/>
+          <a:p>
+            <a:pPr algn="ctr"/>
+            <a:r>
+              <a:rPr sz="1300" b="1">
+                <a:solidFill>
+                  <a:srgbClr val="DEE2E6"/>
+                </a:solidFill>
+              </a:rPr>
+              <a:t>GoblinType</a:t>
+            </a:r>
+          </a:p>
+          <a:p>
+            <a:pPr algn="ctr"/>
+            <a:r>
+              <a:rPr sz="1100" b="0">
+                <a:solidFill>
+                  <a:srgbClr val="9AA3AB"/>
+                </a:solidFill>
+              </a:rPr>
+              <a:t>named by the spawns</a:t>
+            </a:r>
+          </a:p>
+        </p:txBody>
+      </p:sp>
+      <p:cxnSp>
+        <p:nvCxnSpPr>
+          <p:cNvPr id="19" name="Connector 18"/>
+          <p:cNvCxnSpPr/>
+          <p:nvPr/>
+        </p:nvCxnSpPr>
+        <p:spPr>
+          <a:xfrm>
+            <a:off x="7760970" y="2831592"/>
+            <a:ext cx="0" cy="161544"/>
+          </a:xfrm>
+          <a:prstGeom prst="line">
+            <a:avLst/>
+          </a:prstGeom>
+          <a:ln w="25400">
+            <a:solidFill>
+              <a:srgbClr val="9AA3AB"/>
+            </a:solidFill>
+            <a:tailEnd type="triangle"/>
+          </a:ln>
+        </p:spPr>
+        <p:style>
+          <a:lnRef idx="2">
+            <a:schemeClr val="accent1"/>
+          </a:lnRef>
+          <a:fillRef idx="0">
+            <a:schemeClr val="accent1"/>
+          </a:fillRef>
+          <a:effectRef idx="1">
+            <a:schemeClr val="accent1"/>
+          </a:effectRef>
+          <a:fontRef idx="minor">
+            <a:schemeClr val="tx1"/>
+          </a:fontRef>
+        </p:style>
+      </p:cxnSp>
+      <p:cxnSp>
+        <p:nvCxnSpPr>
+          <p:cNvPr id="20" name="Connector 19"/>
+          <p:cNvCxnSpPr/>
+          <p:nvPr/>
+        </p:nvCxnSpPr>
+        <p:spPr>
+          <a:xfrm>
+            <a:off x="4572000" y="2066544"/>
+            <a:ext cx="3188970" cy="161544"/>
+          </a:xfrm>
+          <a:prstGeom prst="line">
+            <a:avLst/>
+          </a:prstGeom>
+          <a:ln w="25400">
+            <a:solidFill>
+              <a:srgbClr val="9AA3AB"/>
+            </a:solidFill>
+            <a:tailEnd type="triangle"/>
+          </a:ln>
+        </p:spPr>
+        <p:style>
+          <a:lnRef idx="2">
+            <a:schemeClr val="accent1"/>
+          </a:lnRef>
+          <a:fillRef idx="0">
+            <a:schemeClr val="accent1"/>
+          </a:fillRef>
+          <a:effectRef idx="1">
+            <a:schemeClr val="accent1"/>
+          </a:effectRef>
+          <a:fontRef idx="minor">
+            <a:schemeClr val="tx1"/>
+          </a:fontRef>
+        </p:style>
+      </p:cxnSp>
+      <p:sp>
+        <p:nvSpPr>
+          <p:cNvPr id="21" name="TextBox 20"/>
+          <p:cNvSpPr txBox="1"/>
+          <p:nvPr/>
+        </p:nvSpPr>
+        <p:spPr>
+          <a:xfrm>
+            <a:off x="457200" y="4462272"/>
+            <a:ext cx="8229600" cy="365760"/>
+          </a:xfrm>
+          <a:prstGeom prst="rect">
+            <a:avLst/>
+          </a:prstGeom>
+          <a:noFill/>
+        </p:spPr>
+        <p:txBody>
+          <a:bodyPr wrap="square">
+            <a:spAutoFit/>
+          </a:bodyPr>
+          <a:lstStyle/>
+          <a:p>
+            <a:pPr algn="ctr"/>
+            <a:r>
+              <a:rPr sz="1300" b="0" i="0">
+                <a:solidFill>
+                  <a:srgbClr val="9AA3AB"/>
+                </a:solidFill>
+              </a:rPr>
+              <a:t>DefenderType and GoblinType create the entities the world holds.</a:t>
+            </a:r>
+          </a:p>
+        </p:txBody>
+      </p:sp>
+    </p:spTree>
+  </p:cSld>
+  <p:clrMapOvr>
+    <a:masterClrMapping/>
+  </p:clrMapOvr>
+</p:sld>
+</file>
+
+<file path=ppt/slides/slide32.xml><?xml version="1.0" encoding="utf-8"?>
 <p:sld xmlns:a="http://schemas.openxmlformats.org/drawingml/2006/main" xmlns:r="http://schemas.openxmlformats.org/officeDocument/2006/relationships" xmlns:mc="http://schemas.openxmlformats.org/markup-compatibility/2006" xmlns:mv="urn:schemas-microsoft-com:mac:vml" xmlns:p="http://schemas.openxmlformats.org/presentationml/2006/main" xmlns:c="http://schemas.openxmlformats.org/drawingml/2006/chart" xmlns:dgm="http://schemas.openxmlformats.org/drawingml/2006/diagram" xmlns:o="urn:schemas-microsoft-com:office:office" xmlns:v="urn:schemas-microsoft-com:vml" xmlns:pvml="urn:schemas-microsoft-com:office:powerpoint" xmlns:com="http://schemas.openxmlformats.org/drawingml/2006/compatibility" xmlns:p14="http://schemas.microsoft.com/office/powerpoint/2010/main" xmlns:p15="http://schemas.microsoft.com/office/powerpoint/2012/main" xmlns:ahyp="http://schemas.microsoft.com/office/drawing/2018/hyperlinkcolor">
   <p:cSld>
     <p:spTree>
@@ -14237,7 +15212,485 @@
 </p:sld>
 </file>
 
-<file path=ppt/slides/slide32.xml><?xml version="1.0" encoding="utf-8"?>
+<file path=ppt/slides/slide33.xml><?xml version="1.0" encoding="utf-8"?>
+<p:sld xmlns:a="http://schemas.openxmlformats.org/drawingml/2006/main" xmlns:p="http://schemas.openxmlformats.org/presentationml/2006/main" xmlns:r="http://schemas.openxmlformats.org/officeDocument/2006/relationships">
+  <p:cSld>
+    <p:spTree>
+      <p:nvGrpSpPr>
+        <p:cNvPr id="1" name=""/>
+        <p:cNvGrpSpPr/>
+        <p:nvPr/>
+      </p:nvGrpSpPr>
+      <p:grpSpPr/>
+      <p:sp>
+        <p:nvSpPr>
+          <p:cNvPr id="2" name="Title 1"/>
+          <p:cNvSpPr>
+            <a:spLocks noGrp="1"/>
+          </p:cNvSpPr>
+          <p:nvPr>
+            <p:ph type="title"/>
+          </p:nvPr>
+        </p:nvSpPr>
+        <p:spPr/>
+        <p:txBody>
+          <a:bodyPr/>
+          <a:lstStyle/>
+          <a:p>
+            <a:pPr indent="0" lvl="0" marL="0" rtl="0" algn="l">
+              <a:spcBef>
+                <a:spcPts val="0"/>
+              </a:spcBef>
+              <a:spcAft>
+                <a:spcPts val="0"/>
+              </a:spcAft>
+              <a:buNone/>
+            </a:pPr>
+            <a:r>
+              <a:rPr lang="en"/>
+              <a:t>Summary</a:t>
+            </a:r>
+            <a:endParaRPr/>
+          </a:p>
+        </p:txBody>
+      </p:sp>
+      <p:sp>
+        <p:nvSpPr>
+          <p:cNvPr id="3" name="Text Placeholder 2"/>
+          <p:cNvSpPr>
+            <a:spLocks noGrp="1"/>
+          </p:cNvSpPr>
+          <p:nvPr>
+            <p:ph type="body" idx="1"/>
+          </p:nvPr>
+        </p:nvSpPr>
+        <p:spPr>
+          <a:xfrm>
+            <a:off x="311700" y="885950"/>
+            <a:ext cx="8520600" cy="521208"/>
+          </a:xfrm>
+        </p:spPr>
+        <p:txBody>
+          <a:bodyPr/>
+          <a:lstStyle/>
+          <a:p>
+            <a:pPr indent="-330200" lvl="0" marL="457200" rtl="0" algn="l">
+              <a:spcBef>
+                <a:spcPts val="0"/>
+              </a:spcBef>
+              <a:spcAft>
+                <a:spcPts val="0"/>
+              </a:spcAft>
+              <a:buSzPts val="1600"/>
+              <a:buChar char="●"/>
+            </a:pPr>
+            <a:r>
+              <a:rPr lang="en" b="1"/>
+              <a:t>Six concerns, and this session’s answer to each.</a:t>
+            </a:r>
+            <a:endParaRPr/>
+          </a:p>
+        </p:txBody>
+      </p:sp>
+      <p:sp>
+        <p:nvSpPr>
+          <p:cNvPr id="4" name="Rounded Rectangle 3"/>
+          <p:cNvSpPr/>
+          <p:nvPr/>
+        </p:nvSpPr>
+        <p:spPr>
+          <a:xfrm>
+            <a:off x="548640" y="1417320"/>
+            <a:ext cx="2560320" cy="914400"/>
+          </a:xfrm>
+          <a:prstGeom prst="roundRect">
+            <a:avLst>
+              <a:gd name="adj" fmla="val 12000"/>
+            </a:avLst>
+          </a:prstGeom>
+          <a:solidFill>
+            <a:srgbClr val="2E3338"/>
+          </a:solidFill>
+          <a:ln>
+            <a:noFill/>
+          </a:ln>
+          <a:effectLst/>
+        </p:spPr>
+        <p:style>
+          <a:lnRef idx="1">
+            <a:schemeClr val="accent1"/>
+          </a:lnRef>
+          <a:fillRef idx="3">
+            <a:schemeClr val="accent1"/>
+          </a:fillRef>
+          <a:effectRef idx="2">
+            <a:schemeClr val="accent1"/>
+          </a:effectRef>
+          <a:fontRef idx="minor">
+            <a:schemeClr val="lt1"/>
+          </a:fontRef>
+        </p:style>
+        <p:txBody>
+          <a:bodyPr rtlCol="0" anchor="ctr" wrap="square" lIns="73152" rIns="73152"/>
+          <a:lstStyle/>
+          <a:p>
+            <a:pPr algn="ctr"/>
+            <a:r>
+              <a:rPr sz="1500" b="1">
+                <a:solidFill>
+                  <a:srgbClr val="DEE2E6"/>
+                </a:solidFill>
+              </a:rPr>
+              <a:t>What the player clicked</a:t>
+            </a:r>
+          </a:p>
+          <a:p>
+            <a:pPr algn="ctr"/>
+            <a:r>
+              <a:rPr sz="1300" b="0">
+                <a:solidFill>
+                  <a:srgbClr val="9AA3AB"/>
+                </a:solidFill>
+              </a:rPr>
+              <a:t>Picking: window, game, cell</a:t>
+            </a:r>
+          </a:p>
+        </p:txBody>
+      </p:sp>
+      <p:sp>
+        <p:nvSpPr>
+          <p:cNvPr id="5" name="Rounded Rectangle 4"/>
+          <p:cNvSpPr/>
+          <p:nvPr/>
+        </p:nvSpPr>
+        <p:spPr>
+          <a:xfrm>
+            <a:off x="3291840" y="1417320"/>
+            <a:ext cx="2560320" cy="914400"/>
+          </a:xfrm>
+          <a:prstGeom prst="roundRect">
+            <a:avLst>
+              <a:gd name="adj" fmla="val 12000"/>
+            </a:avLst>
+          </a:prstGeom>
+          <a:solidFill>
+            <a:srgbClr val="2E3338"/>
+          </a:solidFill>
+          <a:ln>
+            <a:noFill/>
+          </a:ln>
+          <a:effectLst/>
+        </p:spPr>
+        <p:style>
+          <a:lnRef idx="1">
+            <a:schemeClr val="accent1"/>
+          </a:lnRef>
+          <a:fillRef idx="3">
+            <a:schemeClr val="accent1"/>
+          </a:fillRef>
+          <a:effectRef idx="2">
+            <a:schemeClr val="accent1"/>
+          </a:effectRef>
+          <a:fontRef idx="minor">
+            <a:schemeClr val="lt1"/>
+          </a:fontRef>
+        </p:style>
+        <p:txBody>
+          <a:bodyPr rtlCol="0" anchor="ctr" wrap="square" lIns="73152" rIns="73152"/>
+          <a:lstStyle/>
+          <a:p>
+            <a:pPr algn="ctr"/>
+            <a:r>
+              <a:rPr sz="1500" b="1">
+                <a:solidFill>
+                  <a:srgbClr val="DEE2E6"/>
+                </a:solidFill>
+              </a:rPr>
+              <a:t>What a thing can do</a:t>
+            </a:r>
+          </a:p>
+          <a:p>
+            <a:pPr algn="ctr"/>
+            <a:r>
+              <a:rPr sz="1300" b="0">
+                <a:solidFill>
+                  <a:srgbClr val="9AA3AB"/>
+                </a:solidFill>
+              </a:rPr>
+              <a:t>Components</a:t>
+            </a:r>
+          </a:p>
+        </p:txBody>
+      </p:sp>
+      <p:sp>
+        <p:nvSpPr>
+          <p:cNvPr id="6" name="Rounded Rectangle 5"/>
+          <p:cNvSpPr/>
+          <p:nvPr/>
+        </p:nvSpPr>
+        <p:spPr>
+          <a:xfrm>
+            <a:off x="6035040" y="1417320"/>
+            <a:ext cx="2560320" cy="914400"/>
+          </a:xfrm>
+          <a:prstGeom prst="roundRect">
+            <a:avLst>
+              <a:gd name="adj" fmla="val 12000"/>
+            </a:avLst>
+          </a:prstGeom>
+          <a:solidFill>
+            <a:srgbClr val="2E3338"/>
+          </a:solidFill>
+          <a:ln>
+            <a:noFill/>
+          </a:ln>
+          <a:effectLst/>
+        </p:spPr>
+        <p:style>
+          <a:lnRef idx="1">
+            <a:schemeClr val="accent1"/>
+          </a:lnRef>
+          <a:fillRef idx="3">
+            <a:schemeClr val="accent1"/>
+          </a:fillRef>
+          <a:effectRef idx="2">
+            <a:schemeClr val="accent1"/>
+          </a:effectRef>
+          <a:fontRef idx="minor">
+            <a:schemeClr val="lt1"/>
+          </a:fontRef>
+        </p:style>
+        <p:txBody>
+          <a:bodyPr rtlCol="0" anchor="ctr" wrap="square" lIns="73152" rIns="73152"/>
+          <a:lstStyle/>
+          <a:p>
+            <a:pPr algn="ctr"/>
+            <a:r>
+              <a:rPr sz="1500" b="1">
+                <a:solidFill>
+                  <a:srgbClr val="DEE2E6"/>
+                </a:solidFill>
+              </a:rPr>
+              <a:t>How parts work together</a:t>
+            </a:r>
+          </a:p>
+          <a:p>
+            <a:pPr algn="ctr"/>
+            <a:r>
+              <a:rPr sz="1300" b="0">
+                <a:solidFill>
+                  <a:srgbClr val="9AA3AB"/>
+                </a:solidFill>
+              </a:rPr>
+              <a:t>Through the owner, and the world</a:t>
+            </a:r>
+          </a:p>
+        </p:txBody>
+      </p:sp>
+      <p:sp>
+        <p:nvSpPr>
+          <p:cNvPr id="7" name="Rounded Rectangle 6"/>
+          <p:cNvSpPr/>
+          <p:nvPr/>
+        </p:nvSpPr>
+        <p:spPr>
+          <a:xfrm>
+            <a:off x="548640" y="2468880"/>
+            <a:ext cx="2560320" cy="914400"/>
+          </a:xfrm>
+          <a:prstGeom prst="roundRect">
+            <a:avLst>
+              <a:gd name="adj" fmla="val 12000"/>
+            </a:avLst>
+          </a:prstGeom>
+          <a:solidFill>
+            <a:srgbClr val="2E3338"/>
+          </a:solidFill>
+          <a:ln>
+            <a:noFill/>
+          </a:ln>
+          <a:effectLst/>
+        </p:spPr>
+        <p:style>
+          <a:lnRef idx="1">
+            <a:schemeClr val="accent1"/>
+          </a:lnRef>
+          <a:fillRef idx="3">
+            <a:schemeClr val="accent1"/>
+          </a:fillRef>
+          <a:effectRef idx="2">
+            <a:schemeClr val="accent1"/>
+          </a:effectRef>
+          <a:fontRef idx="minor">
+            <a:schemeClr val="lt1"/>
+          </a:fontRef>
+        </p:style>
+        <p:txBody>
+          <a:bodyPr rtlCol="0" anchor="ctr" wrap="square" lIns="73152" rIns="73152"/>
+          <a:lstStyle/>
+          <a:p>
+            <a:pPr algn="ctr"/>
+            <a:r>
+              <a:rPr sz="1500" b="1">
+                <a:solidFill>
+                  <a:srgbClr val="DEE2E6"/>
+                </a:solidFill>
+              </a:rPr>
+              <a:t>What a kind of thing shares</a:t>
+            </a:r>
+          </a:p>
+          <a:p>
+            <a:pPr algn="ctr"/>
+            <a:r>
+              <a:rPr sz="1300" b="0">
+                <a:solidFill>
+                  <a:srgbClr val="9AA3AB"/>
+                </a:solidFill>
+              </a:rPr>
+              <a:t>Type Object, from JSON</a:t>
+            </a:r>
+          </a:p>
+        </p:txBody>
+      </p:sp>
+      <p:sp>
+        <p:nvSpPr>
+          <p:cNvPr id="8" name="Rounded Rectangle 7"/>
+          <p:cNvSpPr/>
+          <p:nvPr/>
+        </p:nvSpPr>
+        <p:spPr>
+          <a:xfrm>
+            <a:off x="3291840" y="2468880"/>
+            <a:ext cx="2560320" cy="914400"/>
+          </a:xfrm>
+          <a:prstGeom prst="roundRect">
+            <a:avLst>
+              <a:gd name="adj" fmla="val 12000"/>
+            </a:avLst>
+          </a:prstGeom>
+          <a:solidFill>
+            <a:srgbClr val="2E3338"/>
+          </a:solidFill>
+          <a:ln>
+            <a:noFill/>
+          </a:ln>
+          <a:effectLst/>
+        </p:spPr>
+        <p:style>
+          <a:lnRef idx="1">
+            <a:schemeClr val="accent1"/>
+          </a:lnRef>
+          <a:fillRef idx="3">
+            <a:schemeClr val="accent1"/>
+          </a:fillRef>
+          <a:effectRef idx="2">
+            <a:schemeClr val="accent1"/>
+          </a:effectRef>
+          <a:fontRef idx="minor">
+            <a:schemeClr val="lt1"/>
+          </a:fontRef>
+        </p:style>
+        <p:txBody>
+          <a:bodyPr rtlCol="0" anchor="ctr" wrap="square" lIns="73152" rIns="73152"/>
+          <a:lstStyle/>
+          <a:p>
+            <a:pPr algn="ctr"/>
+            <a:r>
+              <a:rPr sz="1500" b="1">
+                <a:solidFill>
+                  <a:srgbClr val="DEE2E6"/>
+                </a:solidFill>
+              </a:rPr>
+              <a:t>A new kind of thing</a:t>
+            </a:r>
+          </a:p>
+          <a:p>
+            <a:pPr algn="ctr"/>
+            <a:r>
+              <a:rPr sz="1300" b="0">
+                <a:solidFill>
+                  <a:srgbClr val="9AA3AB"/>
+                </a:solidFill>
+              </a:rPr>
+              <a:t>Data, plus a component if needed</a:t>
+            </a:r>
+          </a:p>
+        </p:txBody>
+      </p:sp>
+      <p:sp>
+        <p:nvSpPr>
+          <p:cNvPr id="9" name="Rounded Rectangle 8"/>
+          <p:cNvSpPr/>
+          <p:nvPr/>
+        </p:nvSpPr>
+        <p:spPr>
+          <a:xfrm>
+            <a:off x="6035040" y="2468880"/>
+            <a:ext cx="2560320" cy="914400"/>
+          </a:xfrm>
+          <a:prstGeom prst="roundRect">
+            <a:avLst>
+              <a:gd name="adj" fmla="val 12000"/>
+            </a:avLst>
+          </a:prstGeom>
+          <a:solidFill>
+            <a:srgbClr val="2E3338"/>
+          </a:solidFill>
+          <a:ln>
+            <a:noFill/>
+          </a:ln>
+          <a:effectLst/>
+        </p:spPr>
+        <p:style>
+          <a:lnRef idx="1">
+            <a:schemeClr val="accent1"/>
+          </a:lnRef>
+          <a:fillRef idx="3">
+            <a:schemeClr val="accent1"/>
+          </a:fillRef>
+          <a:effectRef idx="2">
+            <a:schemeClr val="accent1"/>
+          </a:effectRef>
+          <a:fontRef idx="minor">
+            <a:schemeClr val="lt1"/>
+          </a:fontRef>
+        </p:style>
+        <p:txBody>
+          <a:bodyPr rtlCol="0" anchor="ctr" wrap="square" lIns="73152" rIns="73152"/>
+          <a:lstStyle/>
+          <a:p>
+            <a:pPr algn="ctr"/>
+            <a:r>
+              <a:rPr sz="1500" b="1">
+                <a:solidFill>
+                  <a:srgbClr val="DEE2E6"/>
+                </a:solidFill>
+              </a:rPr>
+              <a:t>Checking one ability</a:t>
+            </a:r>
+          </a:p>
+          <a:p>
+            <a:pPr algn="ctr"/>
+            <a:r>
+              <a:rPr sz="1300" b="0">
+                <a:solidFill>
+                  <a:srgbClr val="9AA3AB"/>
+                </a:solidFill>
+              </a:rPr>
+              <a:t>A test with only its parts</a:t>
+            </a:r>
+          </a:p>
+        </p:txBody>
+      </p:sp>
+    </p:spTree>
+  </p:cSld>
+  <p:clrMapOvr>
+    <a:masterClrMapping/>
+  </p:clrMapOvr>
+</p:sld>
+</file>
+
+<file path=ppt/slides/slide34.xml><?xml version="1.0" encoding="utf-8"?>
 <p:sld xmlns:a="http://schemas.openxmlformats.org/drawingml/2006/main" xmlns:r="http://schemas.openxmlformats.org/officeDocument/2006/relationships" xmlns:mc="http://schemas.openxmlformats.org/markup-compatibility/2006" xmlns:mv="urn:schemas-microsoft-com:mac:vml" xmlns:p="http://schemas.openxmlformats.org/presentationml/2006/main" xmlns:c="http://schemas.openxmlformats.org/drawingml/2006/chart" xmlns:dgm="http://schemas.openxmlformats.org/drawingml/2006/diagram" xmlns:o="urn:schemas-microsoft-com:office:office" xmlns:v="urn:schemas-microsoft-com:vml" xmlns:pvml="urn:schemas-microsoft-com:office:powerpoint" xmlns:com="http://schemas.openxmlformats.org/drawingml/2006/compatibility" xmlns:p14="http://schemas.microsoft.com/office/powerpoint/2010/main" xmlns:p15="http://schemas.microsoft.com/office/powerpoint/2012/main" xmlns:ahyp="http://schemas.microsoft.com/office/drawing/2018/hyperlinkcolor">
   <p:cSld>
     <p:spTree>
@@ -15103,1011 +16556,6 @@
 </p:sld>
 </file>
 
-<file path=ppt/slides/slide33.xml><?xml version="1.0" encoding="utf-8"?>
-<p:sld xmlns:a="http://schemas.openxmlformats.org/drawingml/2006/main" xmlns:r="http://schemas.openxmlformats.org/officeDocument/2006/relationships" xmlns:mc="http://schemas.openxmlformats.org/markup-compatibility/2006" xmlns:mv="urn:schemas-microsoft-com:mac:vml" xmlns:p="http://schemas.openxmlformats.org/presentationml/2006/main" xmlns:c="http://schemas.openxmlformats.org/drawingml/2006/chart" xmlns:dgm="http://schemas.openxmlformats.org/drawingml/2006/diagram" xmlns:o="urn:schemas-microsoft-com:office:office" xmlns:v="urn:schemas-microsoft-com:vml" xmlns:pvml="urn:schemas-microsoft-com:office:powerpoint" xmlns:com="http://schemas.openxmlformats.org/drawingml/2006/compatibility" xmlns:p14="http://schemas.microsoft.com/office/powerpoint/2010/main" xmlns:p15="http://schemas.microsoft.com/office/powerpoint/2012/main" xmlns:ahyp="http://schemas.microsoft.com/office/drawing/2018/hyperlinkcolor">
-  <p:cSld>
-    <p:spTree>
-      <p:nvGrpSpPr>
-        <p:cNvPr id="292" name="Shape 292"/>
-        <p:cNvGrpSpPr/>
-        <p:nvPr/>
-      </p:nvGrpSpPr>
-      <p:grpSpPr>
-        <a:xfrm>
-          <a:off x="0" y="0"/>
-          <a:ext cx="0" cy="0"/>
-          <a:chOff x="0" y="0"/>
-          <a:chExt cx="0" cy="0"/>
-        </a:xfrm>
-      </p:grpSpPr>
-      <p:sp>
-        <p:nvSpPr>
-          <p:cNvPr id="293" name="Google Shape;293;p45"/>
-          <p:cNvSpPr txBox="1"/>
-          <p:nvPr>
-            <p:ph type="title"/>
-          </p:nvPr>
-        </p:nvSpPr>
-        <p:spPr>
-          <a:xfrm>
-            <a:off x="311700" y="195615"/>
-            <a:ext cx="8520600" cy="572700"/>
-          </a:xfrm>
-          <a:prstGeom prst="rect">
-            <a:avLst/>
-          </a:prstGeom>
-        </p:spPr>
-        <p:txBody>
-          <a:bodyPr anchorCtr="0" anchor="t" bIns="91425" lIns="91425" spcFirstLastPara="1" rIns="91425" wrap="square" tIns="91425">
-            <a:normAutofit fontScale="90000"/>
-          </a:bodyPr>
-          <a:lstStyle/>
-          <a:p>
-            <a:pPr indent="0" lvl="0" marL="0" rtl="0" algn="l">
-              <a:spcBef>
-                <a:spcPts val="0"/>
-              </a:spcBef>
-              <a:spcAft>
-                <a:spcPts val="0"/>
-              </a:spcAft>
-              <a:buNone/>
-            </a:pPr>
-            <a:r>
-              <a:rPr lang="en">
-                <a:solidFill>
-                  <a:schemeClr val="accent5"/>
-                </a:solidFill>
-              </a:rPr>
-              <a:t>Exercise: Refactor (Stretch)</a:t>
-            </a:r>
-            <a:endParaRPr>
-              <a:solidFill>
-                <a:schemeClr val="accent5"/>
-              </a:solidFill>
-            </a:endParaRPr>
-          </a:p>
-        </p:txBody>
-      </p:sp>
-      <p:sp>
-        <p:nvSpPr>
-          <p:cNvPr id="294" name="Google Shape;294;p45"/>
-          <p:cNvSpPr txBox="1"/>
-          <p:nvPr>
-            <p:ph idx="1" type="body"/>
-          </p:nvPr>
-        </p:nvSpPr>
-        <p:spPr>
-          <a:xfrm>
-            <a:off x="311700" y="885950"/>
-            <a:ext cx="8520600" cy="4023300"/>
-          </a:xfrm>
-          <a:prstGeom prst="rect">
-            <a:avLst/>
-          </a:prstGeom>
-        </p:spPr>
-        <p:txBody>
-          <a:bodyPr anchorCtr="0" anchor="t" bIns="91425" lIns="91425" spcFirstLastPara="1" rIns="91425" wrap="square" tIns="91425">
-            <a:normAutofit/>
-          </a:bodyPr>
-          <a:lstStyle/>
-          <a:p>
-            <a:pPr indent="-330200" lvl="0" marL="457200" rtl="0" algn="l">
-              <a:spcBef>
-                <a:spcPts val="0"/>
-              </a:spcBef>
-              <a:spcAft>
-                <a:spcPts val="0"/>
-              </a:spcAft>
-              <a:buSzPts val="1600"/>
-              <a:buChar char="●"/>
-            </a:pPr>
-            <a:r>
-              <a:rPr lang="en"/>
-              <a:t>DefenderType.Create has an if for every component</a:t>
-            </a:r>
-            <a:endParaRPr/>
-          </a:p>
-          <a:p>
-            <a:pPr indent="-330200" lvl="0" marL="457200" rtl="0" algn="l">
-              <a:spcBef>
-                <a:spcPts val="0"/>
-              </a:spcBef>
-              <a:spcAft>
-                <a:spcPts val="0"/>
-              </a:spcAft>
-              <a:buSzPts val="1600"/>
-              <a:buChar char="●"/>
-            </a:pPr>
-            <a:r>
-              <a:rPr lang="en"/>
-              <a:t>List components by name in the JSON, with a registry</a:t>
-            </a:r>
-            <a:endParaRPr/>
-          </a:p>
-          <a:p>
-            <a:pPr indent="-330200" lvl="0" marL="457200" rtl="0" algn="l">
-              <a:spcBef>
-                <a:spcPts val="0"/>
-              </a:spcBef>
-              <a:spcAft>
-                <a:spcPts val="0"/>
-              </a:spcAft>
-              <a:buSzPts val="1600"/>
-              <a:buChar char="●"/>
-            </a:pPr>
-            <a:r>
-              <a:rPr lang="en"/>
-              <a:t>What do you gain, and what do you lose?</a:t>
-            </a:r>
-            <a:endParaRPr/>
-          </a:p>
-          <a:p>
-            <a:pPr indent="-317500" lvl="1" marL="914400" rtl="0" algn="l">
-              <a:spcBef>
-                <a:spcPts val="0"/>
-              </a:spcBef>
-              <a:spcAft>
-                <a:spcPts val="0"/>
-              </a:spcAft>
-              <a:buSzPts val="1400"/>
-              <a:buChar char="○"/>
-            </a:pPr>
-            <a:r>
-              <a:rPr lang="en"/>
-              <a:t>E.g. the compiler checking the data’s shape</a:t>
-            </a:r>
-            <a:endParaRPr/>
-          </a:p>
-        </p:txBody>
-      </p:sp>
-    </p:spTree>
-  </p:cSld>
-  <p:clrMapOvr>
-    <a:masterClrMapping/>
-  </p:clrMapOvr>
-  <p:timing>
-    <p:tnLst>
-      <p:par>
-        <p:cTn dur="indefinite" nodeType="tmRoot" restart="never">
-          <p:childTnLst>
-            <p:seq concurrent="1" nextAc="seek">
-              <p:cTn dur="indefinite" id="2" nodeType="mainSeq">
-                <p:childTnLst>
-                  <p:par>
-                    <p:cTn fill="hold">
-                      <p:stCondLst>
-                        <p:cond delay="indefinite"/>
-                      </p:stCondLst>
-                      <p:childTnLst>
-                        <p:par>
-                          <p:cTn fill="hold">
-                            <p:stCondLst>
-                              <p:cond delay="0"/>
-                            </p:stCondLst>
-                            <p:childTnLst>
-                              <p:par>
-                                <p:cTn fill="hold" nodeType="clickEffect" presetClass="entr" presetID="1" presetSubtype="0">
-                                  <p:stCondLst>
-                                    <p:cond delay="0"/>
-                                  </p:stCondLst>
-                                  <p:childTnLst>
-                                    <p:set>
-                                      <p:cBhvr>
-                                        <p:cTn dur="1" fill="hold">
-                                          <p:stCondLst>
-                                            <p:cond delay="0"/>
-                                          </p:stCondLst>
-                                        </p:cTn>
-                                        <p:tgtEl>
-                                          <p:spTgt spid="294">
-                                            <p:txEl>
-                                              <p:pRg end="0" st="0"/>
-                                            </p:txEl>
-                                          </p:spTgt>
-                                        </p:tgtEl>
-                                        <p:attrNameLst>
-                                          <p:attrName>style.visibility</p:attrName>
-                                        </p:attrNameLst>
-                                      </p:cBhvr>
-                                      <p:to>
-                                        <p:strVal val="visible"/>
-                                      </p:to>
-                                    </p:set>
-                                  </p:childTnLst>
-                                </p:cTn>
-                              </p:par>
-                            </p:childTnLst>
-                          </p:cTn>
-                        </p:par>
-                      </p:childTnLst>
-                    </p:cTn>
-                  </p:par>
-                  <p:par>
-                    <p:cTn fill="hold">
-                      <p:stCondLst>
-                        <p:cond delay="indefinite"/>
-                      </p:stCondLst>
-                      <p:childTnLst>
-                        <p:par>
-                          <p:cTn fill="hold">
-                            <p:stCondLst>
-                              <p:cond delay="0"/>
-                            </p:stCondLst>
-                            <p:childTnLst>
-                              <p:par>
-                                <p:cTn fill="hold" nodeType="clickEffect" presetClass="entr" presetID="1" presetSubtype="0">
-                                  <p:stCondLst>
-                                    <p:cond delay="0"/>
-                                  </p:stCondLst>
-                                  <p:childTnLst>
-                                    <p:set>
-                                      <p:cBhvr>
-                                        <p:cTn dur="1" fill="hold">
-                                          <p:stCondLst>
-                                            <p:cond delay="0"/>
-                                          </p:stCondLst>
-                                        </p:cTn>
-                                        <p:tgtEl>
-                                          <p:spTgt spid="294">
-                                            <p:txEl>
-                                              <p:pRg end="1" st="1"/>
-                                            </p:txEl>
-                                          </p:spTgt>
-                                        </p:tgtEl>
-                                        <p:attrNameLst>
-                                          <p:attrName>style.visibility</p:attrName>
-                                        </p:attrNameLst>
-                                      </p:cBhvr>
-                                      <p:to>
-                                        <p:strVal val="visible"/>
-                                      </p:to>
-                                    </p:set>
-                                  </p:childTnLst>
-                                </p:cTn>
-                              </p:par>
-                            </p:childTnLst>
-                          </p:cTn>
-                        </p:par>
-                      </p:childTnLst>
-                    </p:cTn>
-                  </p:par>
-                  <p:par>
-                    <p:cTn fill="hold">
-                      <p:stCondLst>
-                        <p:cond delay="indefinite"/>
-                      </p:stCondLst>
-                      <p:childTnLst>
-                        <p:par>
-                          <p:cTn fill="hold">
-                            <p:stCondLst>
-                              <p:cond delay="0"/>
-                            </p:stCondLst>
-                            <p:childTnLst>
-                              <p:par>
-                                <p:cTn fill="hold" nodeType="clickEffect" presetClass="entr" presetID="1" presetSubtype="0">
-                                  <p:stCondLst>
-                                    <p:cond delay="0"/>
-                                  </p:stCondLst>
-                                  <p:childTnLst>
-                                    <p:set>
-                                      <p:cBhvr>
-                                        <p:cTn dur="1" fill="hold">
-                                          <p:stCondLst>
-                                            <p:cond delay="0"/>
-                                          </p:stCondLst>
-                                        </p:cTn>
-                                        <p:tgtEl>
-                                          <p:spTgt spid="294">
-                                            <p:txEl>
-                                              <p:pRg end="2" st="2"/>
-                                            </p:txEl>
-                                          </p:spTgt>
-                                        </p:tgtEl>
-                                        <p:attrNameLst>
-                                          <p:attrName>style.visibility</p:attrName>
-                                        </p:attrNameLst>
-                                      </p:cBhvr>
-                                      <p:to>
-                                        <p:strVal val="visible"/>
-                                      </p:to>
-                                    </p:set>
-                                  </p:childTnLst>
-                                </p:cTn>
-                              </p:par>
-                            </p:childTnLst>
-                          </p:cTn>
-                        </p:par>
-                      </p:childTnLst>
-                    </p:cTn>
-                  </p:par>
-                  <p:par>
-                    <p:cTn fill="hold">
-                      <p:stCondLst>
-                        <p:cond delay="indefinite"/>
-                      </p:stCondLst>
-                      <p:childTnLst>
-                        <p:par>
-                          <p:cTn fill="hold">
-                            <p:stCondLst>
-                              <p:cond delay="0"/>
-                            </p:stCondLst>
-                            <p:childTnLst>
-                              <p:par>
-                                <p:cTn fill="hold" nodeType="clickEffect" presetClass="entr" presetID="1" presetSubtype="0">
-                                  <p:stCondLst>
-                                    <p:cond delay="0"/>
-                                  </p:stCondLst>
-                                  <p:childTnLst>
-                                    <p:set>
-                                      <p:cBhvr>
-                                        <p:cTn dur="1" fill="hold">
-                                          <p:stCondLst>
-                                            <p:cond delay="0"/>
-                                          </p:stCondLst>
-                                        </p:cTn>
-                                        <p:tgtEl>
-                                          <p:spTgt spid="294">
-                                            <p:txEl>
-                                              <p:pRg end="3" st="3"/>
-                                            </p:txEl>
-                                          </p:spTgt>
-                                        </p:tgtEl>
-                                        <p:attrNameLst>
-                                          <p:attrName>style.visibility</p:attrName>
-                                        </p:attrNameLst>
-                                      </p:cBhvr>
-                                      <p:to>
-                                        <p:strVal val="visible"/>
-                                      </p:to>
-                                    </p:set>
-                                  </p:childTnLst>
-                                </p:cTn>
-                              </p:par>
-                            </p:childTnLst>
-                          </p:cTn>
-                        </p:par>
-                      </p:childTnLst>
-                    </p:cTn>
-                  </p:par>
-                  <p:par>
-                    <p:cTn fill="hold">
-                      <p:stCondLst>
-                        <p:cond delay="indefinite"/>
-                      </p:stCondLst>
-                      <p:childTnLst>
-                        <p:par>
-                          <p:cTn fill="hold">
-                            <p:stCondLst>
-                              <p:cond delay="0"/>
-                            </p:stCondLst>
-                            <p:childTnLst>
-                              <p:par>
-                                <p:cTn fill="hold" nodeType="clickEffect" presetClass="entr" presetID="1" presetSubtype="0">
-                                  <p:stCondLst>
-                                    <p:cond delay="0"/>
-                                  </p:stCondLst>
-                                  <p:childTnLst>
-                                    <p:set>
-                                      <p:cBhvr>
-                                        <p:cTn dur="1" fill="hold">
-                                          <p:stCondLst>
-                                            <p:cond delay="0"/>
-                                          </p:stCondLst>
-                                        </p:cTn>
-                                        <p:tgtEl>
-                                          <p:spTgt spid="294">
-                                            <p:txEl>
-                                              <p:pRg end="4" st="4"/>
-                                            </p:txEl>
-                                          </p:spTgt>
-                                        </p:tgtEl>
-                                        <p:attrNameLst>
-                                          <p:attrName>style.visibility</p:attrName>
-                                        </p:attrNameLst>
-                                      </p:cBhvr>
-                                      <p:to>
-                                        <p:strVal val="visible"/>
-                                      </p:to>
-                                    </p:set>
-                                  </p:childTnLst>
-                                </p:cTn>
-                              </p:par>
-                            </p:childTnLst>
-                          </p:cTn>
-                        </p:par>
-                      </p:childTnLst>
-                    </p:cTn>
-                  </p:par>
-                  <p:par>
-                    <p:cTn fill="hold">
-                      <p:stCondLst>
-                        <p:cond delay="indefinite"/>
-                      </p:stCondLst>
-                      <p:childTnLst>
-                        <p:par>
-                          <p:cTn fill="hold">
-                            <p:stCondLst>
-                              <p:cond delay="0"/>
-                            </p:stCondLst>
-                            <p:childTnLst>
-                              <p:par>
-                                <p:cTn fill="hold" nodeType="clickEffect" presetClass="entr" presetID="1" presetSubtype="0">
-                                  <p:stCondLst>
-                                    <p:cond delay="0"/>
-                                  </p:stCondLst>
-                                  <p:childTnLst>
-                                    <p:set>
-                                      <p:cBhvr>
-                                        <p:cTn dur="1" fill="hold">
-                                          <p:stCondLst>
-                                            <p:cond delay="0"/>
-                                          </p:stCondLst>
-                                        </p:cTn>
-                                        <p:tgtEl>
-                                          <p:spTgt spid="294">
-                                            <p:txEl>
-                                              <p:pRg end="5" st="5"/>
-                                            </p:txEl>
-                                          </p:spTgt>
-                                        </p:tgtEl>
-                                        <p:attrNameLst>
-                                          <p:attrName>style.visibility</p:attrName>
-                                        </p:attrNameLst>
-                                      </p:cBhvr>
-                                      <p:to>
-                                        <p:strVal val="visible"/>
-                                      </p:to>
-                                    </p:set>
-                                  </p:childTnLst>
-                                </p:cTn>
-                              </p:par>
-                            </p:childTnLst>
-                          </p:cTn>
-                        </p:par>
-                      </p:childTnLst>
-                    </p:cTn>
-                  </p:par>
-                  <p:par>
-                    <p:cTn fill="hold">
-                      <p:stCondLst>
-                        <p:cond delay="indefinite"/>
-                      </p:stCondLst>
-                      <p:childTnLst>
-                        <p:par>
-                          <p:cTn fill="hold">
-                            <p:stCondLst>
-                              <p:cond delay="0"/>
-                            </p:stCondLst>
-                            <p:childTnLst>
-                              <p:par>
-                                <p:cTn fill="hold" nodeType="clickEffect" presetClass="entr" presetID="1" presetSubtype="0">
-                                  <p:stCondLst>
-                                    <p:cond delay="0"/>
-                                  </p:stCondLst>
-                                  <p:childTnLst>
-                                    <p:set>
-                                      <p:cBhvr>
-                                        <p:cTn dur="1" fill="hold">
-                                          <p:stCondLst>
-                                            <p:cond delay="0"/>
-                                          </p:stCondLst>
-                                        </p:cTn>
-                                        <p:tgtEl>
-                                          <p:spTgt spid="294">
-                                            <p:txEl>
-                                              <p:pRg end="6" st="6"/>
-                                            </p:txEl>
-                                          </p:spTgt>
-                                        </p:tgtEl>
-                                        <p:attrNameLst>
-                                          <p:attrName>style.visibility</p:attrName>
-                                        </p:attrNameLst>
-                                      </p:cBhvr>
-                                      <p:to>
-                                        <p:strVal val="visible"/>
-                                      </p:to>
-                                    </p:set>
-                                  </p:childTnLst>
-                                </p:cTn>
-                              </p:par>
-                            </p:childTnLst>
-                          </p:cTn>
-                        </p:par>
-                      </p:childTnLst>
-                    </p:cTn>
-                  </p:par>
-                  <p:par>
-                    <p:cTn fill="hold">
-                      <p:stCondLst>
-                        <p:cond delay="indefinite"/>
-                      </p:stCondLst>
-                      <p:childTnLst>
-                        <p:par>
-                          <p:cTn fill="hold">
-                            <p:stCondLst>
-                              <p:cond delay="0"/>
-                            </p:stCondLst>
-                            <p:childTnLst>
-                              <p:par>
-                                <p:cTn fill="hold" nodeType="clickEffect" presetClass="entr" presetID="1" presetSubtype="0">
-                                  <p:stCondLst>
-                                    <p:cond delay="0"/>
-                                  </p:stCondLst>
-                                  <p:childTnLst>
-                                    <p:set>
-                                      <p:cBhvr>
-                                        <p:cTn dur="1" fill="hold">
-                                          <p:stCondLst>
-                                            <p:cond delay="0"/>
-                                          </p:stCondLst>
-                                        </p:cTn>
-                                        <p:tgtEl>
-                                          <p:spTgt spid="294">
-                                            <p:txEl>
-                                              <p:pRg end="7" st="7"/>
-                                            </p:txEl>
-                                          </p:spTgt>
-                                        </p:tgtEl>
-                                        <p:attrNameLst>
-                                          <p:attrName>style.visibility</p:attrName>
-                                        </p:attrNameLst>
-                                      </p:cBhvr>
-                                      <p:to>
-                                        <p:strVal val="visible"/>
-                                      </p:to>
-                                    </p:set>
-                                  </p:childTnLst>
-                                </p:cTn>
-                              </p:par>
-                            </p:childTnLst>
-                          </p:cTn>
-                        </p:par>
-                      </p:childTnLst>
-                    </p:cTn>
-                  </p:par>
-                  <p:par>
-                    <p:cTn fill="hold">
-                      <p:stCondLst>
-                        <p:cond delay="indefinite"/>
-                      </p:stCondLst>
-                      <p:childTnLst>
-                        <p:par>
-                          <p:cTn fill="hold">
-                            <p:stCondLst>
-                              <p:cond delay="0"/>
-                            </p:stCondLst>
-                            <p:childTnLst>
-                              <p:par>
-                                <p:cTn fill="hold" nodeType="clickEffect" presetClass="entr" presetID="1" presetSubtype="0">
-                                  <p:stCondLst>
-                                    <p:cond delay="0"/>
-                                  </p:stCondLst>
-                                  <p:childTnLst>
-                                    <p:set>
-                                      <p:cBhvr>
-                                        <p:cTn dur="1" fill="hold">
-                                          <p:stCondLst>
-                                            <p:cond delay="0"/>
-                                          </p:stCondLst>
-                                        </p:cTn>
-                                        <p:tgtEl>
-                                          <p:spTgt spid="294">
-                                            <p:txEl>
-                                              <p:pRg end="8" st="8"/>
-                                            </p:txEl>
-                                          </p:spTgt>
-                                        </p:tgtEl>
-                                        <p:attrNameLst>
-                                          <p:attrName>style.visibility</p:attrName>
-                                        </p:attrNameLst>
-                                      </p:cBhvr>
-                                      <p:to>
-                                        <p:strVal val="visible"/>
-                                      </p:to>
-                                    </p:set>
-                                  </p:childTnLst>
-                                </p:cTn>
-                              </p:par>
-                            </p:childTnLst>
-                          </p:cTn>
-                        </p:par>
-                      </p:childTnLst>
-                    </p:cTn>
-                  </p:par>
-                  <p:par>
-                    <p:cTn fill="hold">
-                      <p:stCondLst>
-                        <p:cond delay="indefinite"/>
-                      </p:stCondLst>
-                      <p:childTnLst>
-                        <p:par>
-                          <p:cTn fill="hold">
-                            <p:stCondLst>
-                              <p:cond delay="0"/>
-                            </p:stCondLst>
-                            <p:childTnLst>
-                              <p:par>
-                                <p:cTn fill="hold" nodeType="clickEffect" presetClass="entr" presetID="1" presetSubtype="0">
-                                  <p:stCondLst>
-                                    <p:cond delay="0"/>
-                                  </p:stCondLst>
-                                  <p:childTnLst>
-                                    <p:set>
-                                      <p:cBhvr>
-                                        <p:cTn dur="1" fill="hold">
-                                          <p:stCondLst>
-                                            <p:cond delay="0"/>
-                                          </p:stCondLst>
-                                        </p:cTn>
-                                        <p:tgtEl>
-                                          <p:spTgt spid="294">
-                                            <p:txEl>
-                                              <p:pRg end="9" st="9"/>
-                                            </p:txEl>
-                                          </p:spTgt>
-                                        </p:tgtEl>
-                                        <p:attrNameLst>
-                                          <p:attrName>style.visibility</p:attrName>
-                                        </p:attrNameLst>
-                                      </p:cBhvr>
-                                      <p:to>
-                                        <p:strVal val="visible"/>
-                                      </p:to>
-                                    </p:set>
-                                  </p:childTnLst>
-                                </p:cTn>
-                              </p:par>
-                            </p:childTnLst>
-                          </p:cTn>
-                        </p:par>
-                      </p:childTnLst>
-                    </p:cTn>
-                  </p:par>
-                  <p:par>
-                    <p:cTn fill="hold">
-                      <p:stCondLst>
-                        <p:cond delay="indefinite"/>
-                      </p:stCondLst>
-                      <p:childTnLst>
-                        <p:par>
-                          <p:cTn fill="hold">
-                            <p:stCondLst>
-                              <p:cond delay="0"/>
-                            </p:stCondLst>
-                            <p:childTnLst>
-                              <p:par>
-                                <p:cTn fill="hold" nodeType="clickEffect" presetClass="entr" presetID="1" presetSubtype="0">
-                                  <p:stCondLst>
-                                    <p:cond delay="0"/>
-                                  </p:stCondLst>
-                                  <p:childTnLst>
-                                    <p:set>
-                                      <p:cBhvr>
-                                        <p:cTn dur="1" fill="hold">
-                                          <p:stCondLst>
-                                            <p:cond delay="0"/>
-                                          </p:stCondLst>
-                                        </p:cTn>
-                                        <p:tgtEl>
-                                          <p:spTgt spid="294">
-                                            <p:txEl>
-                                              <p:pRg end="10" st="10"/>
-                                            </p:txEl>
-                                          </p:spTgt>
-                                        </p:tgtEl>
-                                        <p:attrNameLst>
-                                          <p:attrName>style.visibility</p:attrName>
-                                        </p:attrNameLst>
-                                      </p:cBhvr>
-                                      <p:to>
-                                        <p:strVal val="visible"/>
-                                      </p:to>
-                                    </p:set>
-                                  </p:childTnLst>
-                                </p:cTn>
-                              </p:par>
-                            </p:childTnLst>
-                          </p:cTn>
-                        </p:par>
-                      </p:childTnLst>
-                    </p:cTn>
-                  </p:par>
-                  <p:par>
-                    <p:cTn fill="hold">
-                      <p:stCondLst>
-                        <p:cond delay="indefinite"/>
-                      </p:stCondLst>
-                      <p:childTnLst>
-                        <p:par>
-                          <p:cTn fill="hold">
-                            <p:stCondLst>
-                              <p:cond delay="0"/>
-                            </p:stCondLst>
-                            <p:childTnLst>
-                              <p:par>
-                                <p:cTn fill="hold" nodeType="clickEffect" presetClass="entr" presetID="1" presetSubtype="0">
-                                  <p:stCondLst>
-                                    <p:cond delay="0"/>
-                                  </p:stCondLst>
-                                  <p:childTnLst>
-                                    <p:set>
-                                      <p:cBhvr>
-                                        <p:cTn dur="1" fill="hold">
-                                          <p:stCondLst>
-                                            <p:cond delay="0"/>
-                                          </p:stCondLst>
-                                        </p:cTn>
-                                        <p:tgtEl>
-                                          <p:spTgt spid="294">
-                                            <p:txEl>
-                                              <p:pRg end="11" st="11"/>
-                                            </p:txEl>
-                                          </p:spTgt>
-                                        </p:tgtEl>
-                                        <p:attrNameLst>
-                                          <p:attrName>style.visibility</p:attrName>
-                                        </p:attrNameLst>
-                                      </p:cBhvr>
-                                      <p:to>
-                                        <p:strVal val="visible"/>
-                                      </p:to>
-                                    </p:set>
-                                  </p:childTnLst>
-                                </p:cTn>
-                              </p:par>
-                            </p:childTnLst>
-                          </p:cTn>
-                        </p:par>
-                      </p:childTnLst>
-                    </p:cTn>
-                  </p:par>
-                  <p:par>
-                    <p:cTn fill="hold">
-                      <p:stCondLst>
-                        <p:cond delay="indefinite"/>
-                      </p:stCondLst>
-                      <p:childTnLst>
-                        <p:par>
-                          <p:cTn fill="hold">
-                            <p:stCondLst>
-                              <p:cond delay="0"/>
-                            </p:stCondLst>
-                            <p:childTnLst>
-                              <p:par>
-                                <p:cTn fill="hold" nodeType="clickEffect" presetClass="entr" presetID="1" presetSubtype="0">
-                                  <p:stCondLst>
-                                    <p:cond delay="0"/>
-                                  </p:stCondLst>
-                                  <p:childTnLst>
-                                    <p:set>
-                                      <p:cBhvr>
-                                        <p:cTn dur="1" fill="hold">
-                                          <p:stCondLst>
-                                            <p:cond delay="0"/>
-                                          </p:stCondLst>
-                                        </p:cTn>
-                                        <p:tgtEl>
-                                          <p:spTgt spid="294">
-                                            <p:txEl>
-                                              <p:pRg end="12" st="12"/>
-                                            </p:txEl>
-                                          </p:spTgt>
-                                        </p:tgtEl>
-                                        <p:attrNameLst>
-                                          <p:attrName>style.visibility</p:attrName>
-                                        </p:attrNameLst>
-                                      </p:cBhvr>
-                                      <p:to>
-                                        <p:strVal val="visible"/>
-                                      </p:to>
-                                    </p:set>
-                                  </p:childTnLst>
-                                </p:cTn>
-                              </p:par>
-                            </p:childTnLst>
-                          </p:cTn>
-                        </p:par>
-                      </p:childTnLst>
-                    </p:cTn>
-                  </p:par>
-                </p:childTnLst>
-              </p:cTn>
-              <p:prevCondLst>
-                <p:cond evt="onPrev">
-                  <p:tgtEl>
-                    <p:sldTgt/>
-                  </p:tgtEl>
-                </p:cond>
-              </p:prevCondLst>
-              <p:nextCondLst>
-                <p:cond evt="onNext">
-                  <p:tgtEl>
-                    <p:sldTgt/>
-                  </p:tgtEl>
-                </p:cond>
-              </p:nextCondLst>
-            </p:seq>
-          </p:childTnLst>
-        </p:cTn>
-      </p:par>
-    </p:tnLst>
-  </p:timing>
-</p:sld>
-</file>
-
-<file path=ppt/slides/slide34.xml><?xml version="1.0" encoding="utf-8"?>
-<p:sld xmlns:a="http://schemas.openxmlformats.org/drawingml/2006/main" xmlns:p="http://schemas.openxmlformats.org/presentationml/2006/main" xmlns:r="http://schemas.openxmlformats.org/officeDocument/2006/relationships">
-  <p:cSld>
-    <p:spTree>
-      <p:nvGrpSpPr>
-        <p:cNvPr id="1" name=""/>
-        <p:cNvGrpSpPr/>
-        <p:nvPr/>
-      </p:nvGrpSpPr>
-      <p:grpSpPr/>
-      <p:sp>
-        <p:nvSpPr>
-          <p:cNvPr id="2" name="Title 1"/>
-          <p:cNvSpPr>
-            <a:spLocks noGrp="1"/>
-          </p:cNvSpPr>
-          <p:nvPr>
-            <p:ph type="title"/>
-          </p:nvPr>
-        </p:nvSpPr>
-        <p:spPr/>
-        <p:txBody>
-          <a:bodyPr/>
-          <a:lstStyle/>
-          <a:p>
-            <a:pPr indent="0" lvl="0" marL="0" rtl="0" algn="l">
-              <a:spcBef>
-                <a:spcPts val="0"/>
-              </a:spcBef>
-              <a:spcAft>
-                <a:spcPts val="0"/>
-              </a:spcAft>
-              <a:buNone/>
-            </a:pPr>
-            <a:r>
-              <a:rPr lang="en"/>
-              <a:t>Check Yourself</a:t>
-            </a:r>
-            <a:endParaRPr/>
-          </a:p>
-        </p:txBody>
-      </p:sp>
-      <p:sp>
-        <p:nvSpPr>
-          <p:cNvPr id="3" name="Text Placeholder 2"/>
-          <p:cNvSpPr>
-            <a:spLocks noGrp="1"/>
-          </p:cNvSpPr>
-          <p:nvPr>
-            <p:ph type="body" idx="1"/>
-          </p:nvPr>
-        </p:nvSpPr>
-        <p:spPr>
-          <a:xfrm>
-            <a:off x="311700" y="885950"/>
-            <a:ext cx="8520600" cy="1719072"/>
-          </a:xfrm>
-        </p:spPr>
-        <p:txBody>
-          <a:bodyPr/>
-          <a:lstStyle/>
-          <a:p>
-            <a:pPr indent="-330200" lvl="0" marL="457200" rtl="0" algn="l">
-              <a:spcBef>
-                <a:spcPts val="0"/>
-              </a:spcBef>
-              <a:spcAft>
-                <a:spcPts val="0"/>
-              </a:spcAft>
-              <a:buSzPts val="1600"/>
-              <a:buChar char="●"/>
-            </a:pPr>
-            <a:r>
-              <a:rPr lang="en"/>
-              <a:t>Why does inheritance break down for this game?</a:t>
-            </a:r>
-            <a:endParaRPr/>
-          </a:p>
-          <a:p>
-            <a:pPr indent="-330200" lvl="0" marL="457200" rtl="0" algn="l">
-              <a:spcBef>
-                <a:spcPts val="0"/>
-              </a:spcBef>
-              <a:spcAft>
-                <a:spcPts val="0"/>
-              </a:spcAft>
-              <a:buSzPts val="1600"/>
-              <a:buChar char="●"/>
-            </a:pPr>
-            <a:r>
-              <a:rPr lang="en"/>
-              <a:t>How do components in one entity work together without knowing each other’s classes?</a:t>
-            </a:r>
-            <a:endParaRPr/>
-          </a:p>
-          <a:p>
-            <a:pPr indent="-330200" lvl="0" marL="457200" rtl="0" algn="l">
-              <a:spcBef>
-                <a:spcPts val="0"/>
-              </a:spcBef>
-              <a:spcAft>
-                <a:spcPts val="0"/>
-              </a:spcAft>
-              <a:buSzPts val="1600"/>
-              <a:buChar char="●"/>
-            </a:pPr>
-            <a:r>
-              <a:rPr lang="en"/>
-              <a:t>What goes in a type object, and what goes in an instance?</a:t>
-            </a:r>
-            <a:endParaRPr/>
-          </a:p>
-          <a:p>
-            <a:pPr indent="-330200" lvl="0" marL="457200" rtl="0" algn="l">
-              <a:spcBef>
-                <a:spcPts val="0"/>
-              </a:spcBef>
-              <a:spcAft>
-                <a:spcPts val="0"/>
-              </a:spcAft>
-              <a:buSzPts val="1600"/>
-              <a:buChar char="●"/>
-            </a:pPr>
-            <a:r>
-              <a:rPr lang="en"/>
-              <a:t>How is picking on a grid different from picking a list of objects?</a:t>
-            </a:r>
-            <a:endParaRPr/>
-          </a:p>
-        </p:txBody>
-      </p:sp>
-      <p:sp>
-        <p:nvSpPr>
-          <p:cNvPr id="4" name="TextBox 3"/>
-          <p:cNvSpPr txBox="1"/>
-          <p:nvPr/>
-        </p:nvSpPr>
-        <p:spPr>
-          <a:xfrm>
-            <a:off x="457200" y="3182112"/>
-            <a:ext cx="8229600" cy="457200"/>
-          </a:xfrm>
-          <a:prstGeom prst="rect">
-            <a:avLst/>
-          </a:prstGeom>
-          <a:noFill/>
-        </p:spPr>
-        <p:txBody>
-          <a:bodyPr wrap="square">
-            <a:spAutoFit/>
-          </a:bodyPr>
-          <a:lstStyle/>
-          <a:p>
-            <a:pPr algn="ctr"/>
-            <a:r>
-              <a:rPr sz="1400" b="0" i="0">
-                <a:solidFill>
-                  <a:srgbClr val="9AA3AB"/>
-                </a:solidFill>
-              </a:rPr>
-              <a:t>The answers, and more questions, are on the course site.</a:t>
-            </a:r>
-          </a:p>
-        </p:txBody>
-      </p:sp>
-    </p:spTree>
-  </p:cSld>
-  <p:clrMapOvr>
-    <a:masterClrMapping/>
-  </p:clrMapOvr>
-</p:sld>
-</file>
-
 <file path=ppt/slides/slide35.xml><?xml version="1.0" encoding="utf-8"?>
 <p:sld xmlns:a="http://schemas.openxmlformats.org/drawingml/2006/main" xmlns:r="http://schemas.openxmlformats.org/officeDocument/2006/relationships" xmlns:mc="http://schemas.openxmlformats.org/markup-compatibility/2006" xmlns:mv="urn:schemas-microsoft-com:mac:vml" xmlns:p="http://schemas.openxmlformats.org/presentationml/2006/main" xmlns:c="http://schemas.openxmlformats.org/drawingml/2006/chart" xmlns:dgm="http://schemas.openxmlformats.org/drawingml/2006/diagram" xmlns:o="urn:schemas-microsoft-com:office:office" xmlns:v="urn:schemas-microsoft-com:vml" xmlns:pvml="urn:schemas-microsoft-com:office:powerpoint" xmlns:com="http://schemas.openxmlformats.org/drawingml/2006/compatibility" xmlns:p14="http://schemas.microsoft.com/office/powerpoint/2010/main" xmlns:p15="http://schemas.microsoft.com/office/powerpoint/2012/main" xmlns:ahyp="http://schemas.microsoft.com/office/drawing/2018/hyperlinkcolor">
   <p:cSld>
@@ -16163,7 +16611,7 @@
                   <a:schemeClr val="accent5"/>
                 </a:solidFill>
               </a:rPr>
-              <a:t>Apply It to Your Project</a:t>
+              <a:t>Exercise: Refactor (Stretch)</a:t>
             </a:r>
             <a:endParaRPr>
               <a:solidFill>
@@ -16208,7 +16656,7 @@
             </a:pPr>
             <a:r>
               <a:rPr lang="en"/>
-              <a:t>Where do subclasses exist only to combine abilities?</a:t>
+              <a:t>DefenderType.Create has an if for every component</a:t>
             </a:r>
             <a:endParaRPr/>
           </a:p>
@@ -16225,7 +16673,7 @@
             </a:pPr>
             <a:r>
               <a:rPr lang="en"/>
-              <a:t>Which abilities could become components?</a:t>
+              <a:t>List components by name in the JSON, with a registry</a:t>
             </a:r>
             <a:endParaRPr/>
           </a:p>
@@ -16242,24 +16690,24 @@
             </a:pPr>
             <a:r>
               <a:rPr lang="en"/>
-              <a:t>Which data belongs to a kind of thing? Could it be a data file?</a:t>
+              <a:t>What do you gain, and what do you lose?</a:t>
             </a:r>
             <a:endParaRPr/>
           </a:p>
           <a:p>
-            <a:pPr indent="-330200" lvl="0" marL="457200" rtl="0" algn="l">
-              <a:spcBef>
-                <a:spcPts val="0"/>
-              </a:spcBef>
-              <a:spcAft>
-                <a:spcPts val="0"/>
-              </a:spcAft>
-              <a:buSzPts val="1600"/>
-              <a:buChar char="●"/>
+            <a:pPr indent="-317500" lvl="1" marL="914400" rtl="0" algn="l">
+              <a:spcBef>
+                <a:spcPts val="0"/>
+              </a:spcBef>
+              <a:spcAft>
+                <a:spcPts val="0"/>
+              </a:spcAft>
+              <a:buSzPts val="1400"/>
+              <a:buChar char="○"/>
             </a:pPr>
             <a:r>
               <a:rPr lang="en"/>
-              <a:t>How does your game find out what was clicked?</a:t>
+              <a:t>E.g. the compiler checking the data’s shape</a:t>
             </a:r>
             <a:endParaRPr/>
           </a:p>
@@ -16976,7 +17424,7 @@
             </a:pPr>
             <a:r>
               <a:rPr lang="en"/>
-              <a:t>The Whole Game: Who Holds What</a:t>
+              <a:t>Check Yourself</a:t>
             </a:r>
             <a:endParaRPr/>
           </a:p>
@@ -16995,7 +17443,7 @@
         <p:spPr>
           <a:xfrm>
             <a:off x="311700" y="885950"/>
-            <a:ext cx="8520600" cy="521208"/>
+            <a:ext cx="8520600" cy="1719072"/>
           </a:xfrm>
         </p:spPr>
         <p:txBody>
@@ -17013,876 +17461,74 @@
               <a:buChar char="●"/>
             </a:pPr>
             <a:r>
-              <a:rPr lang="en" b="1"/>
-              <a:t>No class is an archer or a goblin. The types create entities.</a:t>
+              <a:rPr lang="en"/>
+              <a:t>Why does inheritance break down for this game?</a:t>
             </a:r>
             <a:endParaRPr/>
           </a:p>
+          <a:p>
+            <a:pPr indent="-330200" lvl="0" marL="457200" rtl="0" algn="l">
+              <a:spcBef>
+                <a:spcPts val="0"/>
+              </a:spcBef>
+              <a:spcAft>
+                <a:spcPts val="0"/>
+              </a:spcAft>
+              <a:buSzPts val="1600"/>
+              <a:buChar char="●"/>
+            </a:pPr>
+            <a:r>
+              <a:rPr lang="en"/>
+              <a:t>How do components in one entity work together without knowing each other’s classes?</a:t>
+            </a:r>
+            <a:endParaRPr/>
+          </a:p>
+          <a:p>
+            <a:pPr indent="-330200" lvl="0" marL="457200" rtl="0" algn="l">
+              <a:spcBef>
+                <a:spcPts val="0"/>
+              </a:spcBef>
+              <a:spcAft>
+                <a:spcPts val="0"/>
+              </a:spcAft>
+              <a:buSzPts val="1600"/>
+              <a:buChar char="●"/>
+            </a:pPr>
+            <a:r>
+              <a:rPr lang="en"/>
+              <a:t>What goes in a type object, and what goes in an instance?</a:t>
+            </a:r>
+            <a:endParaRPr/>
+          </a:p>
+          <a:p>
+            <a:pPr indent="-330200" lvl="0" marL="457200" rtl="0" algn="l">
+              <a:spcBef>
+                <a:spcPts val="0"/>
+              </a:spcBef>
+              <a:spcAft>
+                <a:spcPts val="0"/>
+              </a:spcAft>
+              <a:buSzPts val="1600"/>
+              <a:buChar char="●"/>
+            </a:pPr>
+            <a:r>
+              <a:rPr lang="en"/>
+              <a:t>How is picking on a grid different from picking a list of objects?</a:t>
+            </a:r>
+            <a:endParaRPr/>
+          </a:p>
         </p:txBody>
       </p:sp>
       <p:sp>
         <p:nvSpPr>
-          <p:cNvPr id="4" name="Rounded Rectangle 3"/>
-          <p:cNvSpPr/>
+          <p:cNvPr id="4" name="TextBox 3"/>
+          <p:cNvSpPr txBox="1"/>
           <p:nvPr/>
         </p:nvSpPr>
         <p:spPr>
           <a:xfrm>
-            <a:off x="3429000" y="1481328"/>
-            <a:ext cx="2286000" cy="566928"/>
-          </a:xfrm>
-          <a:prstGeom prst="roundRect">
-            <a:avLst>
-              <a:gd name="adj" fmla="val 12000"/>
-            </a:avLst>
-          </a:prstGeom>
-          <a:solidFill>
-            <a:srgbClr val="2E3338"/>
-          </a:solidFill>
-          <a:ln w="25400">
-            <a:solidFill>
-              <a:srgbClr val="D45D35"/>
-            </a:solidFill>
-          </a:ln>
-          <a:effectLst/>
-        </p:spPr>
-        <p:style>
-          <a:lnRef idx="1">
-            <a:schemeClr val="accent1"/>
-          </a:lnRef>
-          <a:fillRef idx="3">
-            <a:schemeClr val="accent1"/>
-          </a:fillRef>
-          <a:effectRef idx="2">
-            <a:schemeClr val="accent1"/>
-          </a:effectRef>
-          <a:fontRef idx="minor">
-            <a:schemeClr val="lt1"/>
-          </a:fontRef>
-        </p:style>
-        <p:txBody>
-          <a:bodyPr rtlCol="0" anchor="ctr" wrap="square" lIns="73152" rIns="73152"/>
-          <a:lstStyle/>
-          <a:p>
-            <a:pPr algn="ctr"/>
-            <a:r>
-              <a:rPr sz="1300" b="1">
-                <a:solidFill>
-                  <a:srgbClr val="DEE2E6"/>
-                </a:solidFill>
-              </a:rPr>
-              <a:t>Game1 : Core</a:t>
-            </a:r>
-          </a:p>
-        </p:txBody>
-      </p:sp>
-      <p:sp>
-        <p:nvSpPr>
-          <p:cNvPr id="5" name="Rounded Rectangle 4"/>
-          <p:cNvSpPr/>
-          <p:nvPr/>
-        </p:nvSpPr>
-        <p:spPr>
-          <a:xfrm>
-            <a:off x="374904" y="2246376"/>
-            <a:ext cx="2016252" cy="566928"/>
-          </a:xfrm>
-          <a:prstGeom prst="roundRect">
-            <a:avLst>
-              <a:gd name="adj" fmla="val 12000"/>
-            </a:avLst>
-          </a:prstGeom>
-          <a:solidFill>
-            <a:srgbClr val="2E3338"/>
-          </a:solidFill>
-          <a:ln>
-            <a:noFill/>
-          </a:ln>
-          <a:effectLst/>
-        </p:spPr>
-        <p:style>
-          <a:lnRef idx="1">
-            <a:schemeClr val="accent1"/>
-          </a:lnRef>
-          <a:fillRef idx="3">
-            <a:schemeClr val="accent1"/>
-          </a:fillRef>
-          <a:effectRef idx="2">
-            <a:schemeClr val="accent1"/>
-          </a:effectRef>
-          <a:fontRef idx="minor">
-            <a:schemeClr val="lt1"/>
-          </a:fontRef>
-        </p:style>
-        <p:txBody>
-          <a:bodyPr rtlCol="0" anchor="ctr" wrap="square" lIns="73152" rIns="73152"/>
-          <a:lstStyle/>
-          <a:p>
-            <a:pPr algn="ctr"/>
-            <a:r>
-              <a:rPr sz="1300" b="1">
-                <a:solidFill>
-                  <a:srgbClr val="DEE2E6"/>
-                </a:solidFill>
-              </a:rPr>
-              <a:t>Game states</a:t>
-            </a:r>
-          </a:p>
-          <a:p>
-            <a:pPr algn="ctr"/>
-            <a:r>
-              <a:rPr sz="1100" b="0">
-                <a:solidFill>
-                  <a:srgbClr val="9AA3AB"/>
-                </a:solidFill>
-              </a:rPr>
-              <a:t>title, play, end</a:t>
-            </a:r>
-          </a:p>
-        </p:txBody>
-      </p:sp>
-      <p:cxnSp>
-        <p:nvCxnSpPr>
-          <p:cNvPr id="6" name="Connector 5"/>
-          <p:cNvCxnSpPr/>
-          <p:nvPr/>
-        </p:nvCxnSpPr>
-        <p:spPr>
-          <a:xfrm flipH="1">
-            <a:off x="1383030" y="2066544"/>
-            <a:ext cx="3188970" cy="161544"/>
-          </a:xfrm>
-          <a:prstGeom prst="line">
-            <a:avLst/>
-          </a:prstGeom>
-          <a:ln w="25400">
-            <a:solidFill>
-              <a:srgbClr val="9AA3AB"/>
-            </a:solidFill>
-            <a:tailEnd type="triangle"/>
-          </a:ln>
-        </p:spPr>
-        <p:style>
-          <a:lnRef idx="2">
-            <a:schemeClr val="accent1"/>
-          </a:lnRef>
-          <a:fillRef idx="0">
-            <a:schemeClr val="accent1"/>
-          </a:fillRef>
-          <a:effectRef idx="1">
-            <a:schemeClr val="accent1"/>
-          </a:effectRef>
-          <a:fontRef idx="minor">
-            <a:schemeClr val="tx1"/>
-          </a:fontRef>
-        </p:style>
-      </p:cxnSp>
-      <p:sp>
-        <p:nvSpPr>
-          <p:cNvPr id="7" name="Rounded Rectangle 6"/>
-          <p:cNvSpPr/>
-          <p:nvPr/>
-        </p:nvSpPr>
-        <p:spPr>
-          <a:xfrm>
-            <a:off x="2500884" y="2246376"/>
-            <a:ext cx="2016252" cy="566928"/>
-          </a:xfrm>
-          <a:prstGeom prst="roundRect">
-            <a:avLst>
-              <a:gd name="adj" fmla="val 12000"/>
-            </a:avLst>
-          </a:prstGeom>
-          <a:solidFill>
-            <a:srgbClr val="2E3338"/>
-          </a:solidFill>
-          <a:ln>
-            <a:noFill/>
-          </a:ln>
-          <a:effectLst/>
-        </p:spPr>
-        <p:style>
-          <a:lnRef idx="1">
-            <a:schemeClr val="accent1"/>
-          </a:lnRef>
-          <a:fillRef idx="3">
-            <a:schemeClr val="accent1"/>
-          </a:fillRef>
-          <a:effectRef idx="2">
-            <a:schemeClr val="accent1"/>
-          </a:effectRef>
-          <a:fontRef idx="minor">
-            <a:schemeClr val="lt1"/>
-          </a:fontRef>
-        </p:style>
-        <p:txBody>
-          <a:bodyPr rtlCol="0" anchor="ctr" wrap="square" lIns="73152" rIns="73152"/>
-          <a:lstStyle/>
-          <a:p>
-            <a:pPr algn="ctr"/>
-            <a:r>
-              <a:rPr sz="1300" b="1">
-                <a:solidFill>
-                  <a:srgbClr val="DEE2E6"/>
-                </a:solidFill>
-              </a:rPr>
-              <a:t>World</a:t>
-            </a:r>
-          </a:p>
-          <a:p>
-            <a:pPr algn="ctr"/>
-            <a:r>
-              <a:rPr sz="1100" b="0">
-                <a:solidFill>
-                  <a:srgbClr val="9AA3AB"/>
-                </a:solidFill>
-              </a:rPr>
-              <a:t>only sees entities</a:t>
-            </a:r>
-          </a:p>
-        </p:txBody>
-      </p:sp>
-      <p:sp>
-        <p:nvSpPr>
-          <p:cNvPr id="8" name="Rounded Rectangle 7"/>
-          <p:cNvSpPr/>
-          <p:nvPr/>
-        </p:nvSpPr>
-        <p:spPr>
-          <a:xfrm>
-            <a:off x="2500884" y="3011424"/>
-            <a:ext cx="2016252" cy="566928"/>
-          </a:xfrm>
-          <a:prstGeom prst="roundRect">
-            <a:avLst>
-              <a:gd name="adj" fmla="val 12000"/>
-            </a:avLst>
-          </a:prstGeom>
-          <a:solidFill>
-            <a:srgbClr val="2E3338"/>
-          </a:solidFill>
-          <a:ln>
-            <a:noFill/>
-          </a:ln>
-          <a:effectLst/>
-        </p:spPr>
-        <p:style>
-          <a:lnRef idx="1">
-            <a:schemeClr val="accent1"/>
-          </a:lnRef>
-          <a:fillRef idx="3">
-            <a:schemeClr val="accent1"/>
-          </a:fillRef>
-          <a:effectRef idx="2">
-            <a:schemeClr val="accent1"/>
-          </a:effectRef>
-          <a:fontRef idx="minor">
-            <a:schemeClr val="lt1"/>
-          </a:fontRef>
-        </p:style>
-        <p:txBody>
-          <a:bodyPr rtlCol="0" anchor="ctr" wrap="square" lIns="73152" rIns="73152"/>
-          <a:lstStyle/>
-          <a:p>
-            <a:pPr algn="ctr"/>
-            <a:r>
-              <a:rPr sz="1300" b="1">
-                <a:solidFill>
-                  <a:srgbClr val="DEE2E6"/>
-                </a:solidFill>
-              </a:rPr>
-              <a:t>Entity</a:t>
-            </a:r>
-          </a:p>
-          <a:p>
-            <a:pPr algn="ctr"/>
-            <a:r>
-              <a:rPr sz="1100" b="0">
-                <a:solidFill>
-                  <a:srgbClr val="9AA3AB"/>
-                </a:solidFill>
-              </a:rPr>
-              <a:t>many</a:t>
-            </a:r>
-          </a:p>
-        </p:txBody>
-      </p:sp>
-      <p:sp>
-        <p:nvSpPr>
-          <p:cNvPr id="9" name="Rounded Rectangle 8"/>
-          <p:cNvSpPr/>
-          <p:nvPr/>
-        </p:nvSpPr>
-        <p:spPr>
-          <a:xfrm>
-            <a:off x="2500884" y="3776472"/>
-            <a:ext cx="2016252" cy="566928"/>
-          </a:xfrm>
-          <a:prstGeom prst="roundRect">
-            <a:avLst>
-              <a:gd name="adj" fmla="val 12000"/>
-            </a:avLst>
-          </a:prstGeom>
-          <a:solidFill>
-            <a:srgbClr val="2E3338"/>
-          </a:solidFill>
-          <a:ln>
-            <a:noFill/>
-          </a:ln>
-          <a:effectLst/>
-        </p:spPr>
-        <p:style>
-          <a:lnRef idx="1">
-            <a:schemeClr val="accent1"/>
-          </a:lnRef>
-          <a:fillRef idx="3">
-            <a:schemeClr val="accent1"/>
-          </a:fillRef>
-          <a:effectRef idx="2">
-            <a:schemeClr val="accent1"/>
-          </a:effectRef>
-          <a:fontRef idx="minor">
-            <a:schemeClr val="lt1"/>
-          </a:fontRef>
-        </p:style>
-        <p:txBody>
-          <a:bodyPr rtlCol="0" anchor="ctr" wrap="square" lIns="73152" rIns="73152"/>
-          <a:lstStyle/>
-          <a:p>
-            <a:pPr algn="ctr"/>
-            <a:r>
-              <a:rPr sz="1300" b="1">
-                <a:solidFill>
-                  <a:srgbClr val="DEE2E6"/>
-                </a:solidFill>
-              </a:rPr>
-              <a:t>Component</a:t>
-            </a:r>
-          </a:p>
-          <a:p>
-            <a:pPr algn="ctr"/>
-            <a:r>
-              <a:rPr sz="1100" b="0">
-                <a:solidFill>
-                  <a:srgbClr val="9AA3AB"/>
-                </a:solidFill>
-              </a:rPr>
-              <a:t>one ability each</a:t>
-            </a:r>
-          </a:p>
-        </p:txBody>
-      </p:sp>
-      <p:cxnSp>
-        <p:nvCxnSpPr>
-          <p:cNvPr id="10" name="Connector 9"/>
-          <p:cNvCxnSpPr/>
-          <p:nvPr/>
-        </p:nvCxnSpPr>
-        <p:spPr>
-          <a:xfrm>
-            <a:off x="3509010" y="3596640"/>
-            <a:ext cx="0" cy="161544"/>
-          </a:xfrm>
-          <a:prstGeom prst="line">
-            <a:avLst/>
-          </a:prstGeom>
-          <a:ln w="25400">
-            <a:solidFill>
-              <a:srgbClr val="9AA3AB"/>
-            </a:solidFill>
-            <a:tailEnd type="triangle"/>
-          </a:ln>
-        </p:spPr>
-        <p:style>
-          <a:lnRef idx="2">
-            <a:schemeClr val="accent1"/>
-          </a:lnRef>
-          <a:fillRef idx="0">
-            <a:schemeClr val="accent1"/>
-          </a:fillRef>
-          <a:effectRef idx="1">
-            <a:schemeClr val="accent1"/>
-          </a:effectRef>
-          <a:fontRef idx="minor">
-            <a:schemeClr val="tx1"/>
-          </a:fontRef>
-        </p:style>
-      </p:cxnSp>
-      <p:cxnSp>
-        <p:nvCxnSpPr>
-          <p:cNvPr id="11" name="Connector 10"/>
-          <p:cNvCxnSpPr/>
-          <p:nvPr/>
-        </p:nvCxnSpPr>
-        <p:spPr>
-          <a:xfrm>
-            <a:off x="3509010" y="2831592"/>
-            <a:ext cx="0" cy="161544"/>
-          </a:xfrm>
-          <a:prstGeom prst="line">
-            <a:avLst/>
-          </a:prstGeom>
-          <a:ln w="25400">
-            <a:solidFill>
-              <a:srgbClr val="9AA3AB"/>
-            </a:solidFill>
-            <a:tailEnd type="triangle"/>
-          </a:ln>
-        </p:spPr>
-        <p:style>
-          <a:lnRef idx="2">
-            <a:schemeClr val="accent1"/>
-          </a:lnRef>
-          <a:fillRef idx="0">
-            <a:schemeClr val="accent1"/>
-          </a:fillRef>
-          <a:effectRef idx="1">
-            <a:schemeClr val="accent1"/>
-          </a:effectRef>
-          <a:fontRef idx="minor">
-            <a:schemeClr val="tx1"/>
-          </a:fontRef>
-        </p:style>
-      </p:cxnSp>
-      <p:cxnSp>
-        <p:nvCxnSpPr>
-          <p:cNvPr id="12" name="Connector 11"/>
-          <p:cNvCxnSpPr/>
-          <p:nvPr/>
-        </p:nvCxnSpPr>
-        <p:spPr>
-          <a:xfrm flipH="1">
-            <a:off x="3509010" y="2066544"/>
-            <a:ext cx="1062990" cy="161544"/>
-          </a:xfrm>
-          <a:prstGeom prst="line">
-            <a:avLst/>
-          </a:prstGeom>
-          <a:ln w="25400">
-            <a:solidFill>
-              <a:srgbClr val="9AA3AB"/>
-            </a:solidFill>
-            <a:tailEnd type="triangle"/>
-          </a:ln>
-        </p:spPr>
-        <p:style>
-          <a:lnRef idx="2">
-            <a:schemeClr val="accent1"/>
-          </a:lnRef>
-          <a:fillRef idx="0">
-            <a:schemeClr val="accent1"/>
-          </a:fillRef>
-          <a:effectRef idx="1">
-            <a:schemeClr val="accent1"/>
-          </a:effectRef>
-          <a:fontRef idx="minor">
-            <a:schemeClr val="tx1"/>
-          </a:fontRef>
-        </p:style>
-      </p:cxnSp>
-      <p:sp>
-        <p:nvSpPr>
-          <p:cNvPr id="13" name="Rounded Rectangle 12"/>
-          <p:cNvSpPr/>
-          <p:nvPr/>
-        </p:nvSpPr>
-        <p:spPr>
-          <a:xfrm>
-            <a:off x="4626864" y="2246376"/>
-            <a:ext cx="2016252" cy="566928"/>
-          </a:xfrm>
-          <a:prstGeom prst="roundRect">
-            <a:avLst>
-              <a:gd name="adj" fmla="val 12000"/>
-            </a:avLst>
-          </a:prstGeom>
-          <a:solidFill>
-            <a:srgbClr val="2E3338"/>
-          </a:solidFill>
-          <a:ln>
-            <a:noFill/>
-          </a:ln>
-          <a:effectLst/>
-        </p:spPr>
-        <p:style>
-          <a:lnRef idx="1">
-            <a:schemeClr val="accent1"/>
-          </a:lnRef>
-          <a:fillRef idx="3">
-            <a:schemeClr val="accent1"/>
-          </a:fillRef>
-          <a:effectRef idx="2">
-            <a:schemeClr val="accent1"/>
-          </a:effectRef>
-          <a:fontRef idx="minor">
-            <a:schemeClr val="lt1"/>
-          </a:fontRef>
-        </p:style>
-        <p:txBody>
-          <a:bodyPr rtlCol="0" anchor="ctr" wrap="square" lIns="73152" rIns="73152"/>
-          <a:lstStyle/>
-          <a:p>
-            <a:pPr algn="ctr"/>
-            <a:r>
-              <a:rPr sz="1300" b="1">
-                <a:solidFill>
-                  <a:srgbClr val="DEE2E6"/>
-                </a:solidFill>
-              </a:rPr>
-              <a:t>CardBar</a:t>
-            </a:r>
-          </a:p>
-        </p:txBody>
-      </p:sp>
-      <p:sp>
-        <p:nvSpPr>
-          <p:cNvPr id="14" name="Rounded Rectangle 13"/>
-          <p:cNvSpPr/>
-          <p:nvPr/>
-        </p:nvSpPr>
-        <p:spPr>
-          <a:xfrm>
-            <a:off x="4626864" y="3011424"/>
-            <a:ext cx="2016252" cy="566928"/>
-          </a:xfrm>
-          <a:prstGeom prst="roundRect">
-            <a:avLst>
-              <a:gd name="adj" fmla="val 12000"/>
-            </a:avLst>
-          </a:prstGeom>
-          <a:solidFill>
-            <a:srgbClr val="2E3338"/>
-          </a:solidFill>
-          <a:ln>
-            <a:noFill/>
-          </a:ln>
-          <a:effectLst/>
-        </p:spPr>
-        <p:style>
-          <a:lnRef idx="1">
-            <a:schemeClr val="accent1"/>
-          </a:lnRef>
-          <a:fillRef idx="3">
-            <a:schemeClr val="accent1"/>
-          </a:fillRef>
-          <a:effectRef idx="2">
-            <a:schemeClr val="accent1"/>
-          </a:effectRef>
-          <a:fontRef idx="minor">
-            <a:schemeClr val="lt1"/>
-          </a:fontRef>
-        </p:style>
-        <p:txBody>
-          <a:bodyPr rtlCol="0" anchor="ctr" wrap="square" lIns="73152" rIns="73152"/>
-          <a:lstStyle/>
-          <a:p>
-            <a:pPr algn="ctr"/>
-            <a:r>
-              <a:rPr sz="1300" b="1">
-                <a:solidFill>
-                  <a:srgbClr val="DEE2E6"/>
-                </a:solidFill>
-              </a:rPr>
-              <a:t>DefenderType</a:t>
-            </a:r>
-          </a:p>
-          <a:p>
-            <a:pPr algn="ctr"/>
-            <a:r>
-              <a:rPr sz="1100" b="0">
-                <a:solidFill>
-                  <a:srgbClr val="9AA3AB"/>
-                </a:solidFill>
-              </a:rPr>
-              <a:t>a card for each</a:t>
-            </a:r>
-          </a:p>
-        </p:txBody>
-      </p:sp>
-      <p:cxnSp>
-        <p:nvCxnSpPr>
-          <p:cNvPr id="15" name="Connector 14"/>
-          <p:cNvCxnSpPr/>
-          <p:nvPr/>
-        </p:nvCxnSpPr>
-        <p:spPr>
-          <a:xfrm>
-            <a:off x="5634990" y="2831592"/>
-            <a:ext cx="0" cy="161544"/>
-          </a:xfrm>
-          <a:prstGeom prst="line">
-            <a:avLst/>
-          </a:prstGeom>
-          <a:ln w="25400">
-            <a:solidFill>
-              <a:srgbClr val="9AA3AB"/>
-            </a:solidFill>
-            <a:tailEnd type="triangle"/>
-          </a:ln>
-        </p:spPr>
-        <p:style>
-          <a:lnRef idx="2">
-            <a:schemeClr val="accent1"/>
-          </a:lnRef>
-          <a:fillRef idx="0">
-            <a:schemeClr val="accent1"/>
-          </a:fillRef>
-          <a:effectRef idx="1">
-            <a:schemeClr val="accent1"/>
-          </a:effectRef>
-          <a:fontRef idx="minor">
-            <a:schemeClr val="tx1"/>
-          </a:fontRef>
-        </p:style>
-      </p:cxnSp>
-      <p:cxnSp>
-        <p:nvCxnSpPr>
-          <p:cNvPr id="16" name="Connector 15"/>
-          <p:cNvCxnSpPr/>
-          <p:nvPr/>
-        </p:nvCxnSpPr>
-        <p:spPr>
-          <a:xfrm>
-            <a:off x="4572000" y="2066544"/>
-            <a:ext cx="1062990" cy="161544"/>
-          </a:xfrm>
-          <a:prstGeom prst="line">
-            <a:avLst/>
-          </a:prstGeom>
-          <a:ln w="25400">
-            <a:solidFill>
-              <a:srgbClr val="9AA3AB"/>
-            </a:solidFill>
-            <a:tailEnd type="triangle"/>
-          </a:ln>
-        </p:spPr>
-        <p:style>
-          <a:lnRef idx="2">
-            <a:schemeClr val="accent1"/>
-          </a:lnRef>
-          <a:fillRef idx="0">
-            <a:schemeClr val="accent1"/>
-          </a:fillRef>
-          <a:effectRef idx="1">
-            <a:schemeClr val="accent1"/>
-          </a:effectRef>
-          <a:fontRef idx="minor">
-            <a:schemeClr val="tx1"/>
-          </a:fontRef>
-        </p:style>
-      </p:cxnSp>
-      <p:sp>
-        <p:nvSpPr>
-          <p:cNvPr id="17" name="Rounded Rectangle 16"/>
-          <p:cNvSpPr/>
-          <p:nvPr/>
-        </p:nvSpPr>
-        <p:spPr>
-          <a:xfrm>
-            <a:off x="6752844" y="2246376"/>
-            <a:ext cx="2016252" cy="566928"/>
-          </a:xfrm>
-          <a:prstGeom prst="roundRect">
-            <a:avLst>
-              <a:gd name="adj" fmla="val 12000"/>
-            </a:avLst>
-          </a:prstGeom>
-          <a:solidFill>
-            <a:srgbClr val="2E3338"/>
-          </a:solidFill>
-          <a:ln>
-            <a:noFill/>
-          </a:ln>
-          <a:effectLst/>
-        </p:spPr>
-        <p:style>
-          <a:lnRef idx="1">
-            <a:schemeClr val="accent1"/>
-          </a:lnRef>
-          <a:fillRef idx="3">
-            <a:schemeClr val="accent1"/>
-          </a:fillRef>
-          <a:effectRef idx="2">
-            <a:schemeClr val="accent1"/>
-          </a:effectRef>
-          <a:fontRef idx="minor">
-            <a:schemeClr val="lt1"/>
-          </a:fontRef>
-        </p:style>
-        <p:txBody>
-          <a:bodyPr rtlCol="0" anchor="ctr" wrap="square" lIns="73152" rIns="73152"/>
-          <a:lstStyle/>
-          <a:p>
-            <a:pPr algn="ctr"/>
-            <a:r>
-              <a:rPr sz="1300" b="1">
-                <a:solidFill>
-                  <a:srgbClr val="DEE2E6"/>
-                </a:solidFill>
-              </a:rPr>
-              <a:t>Level</a:t>
-            </a:r>
-          </a:p>
-          <a:p>
-            <a:pPr algn="ctr"/>
-            <a:r>
-              <a:rPr sz="1100" b="0">
-                <a:solidFill>
-                  <a:srgbClr val="9AA3AB"/>
-                </a:solidFill>
-              </a:rPr>
-              <a:t>level1.json</a:t>
-            </a:r>
-          </a:p>
-        </p:txBody>
-      </p:sp>
-      <p:sp>
-        <p:nvSpPr>
-          <p:cNvPr id="18" name="Rounded Rectangle 17"/>
-          <p:cNvSpPr/>
-          <p:nvPr/>
-        </p:nvSpPr>
-        <p:spPr>
-          <a:xfrm>
-            <a:off x="6752844" y="3011424"/>
-            <a:ext cx="2016252" cy="566928"/>
-          </a:xfrm>
-          <a:prstGeom prst="roundRect">
-            <a:avLst>
-              <a:gd name="adj" fmla="val 12000"/>
-            </a:avLst>
-          </a:prstGeom>
-          <a:solidFill>
-            <a:srgbClr val="2E3338"/>
-          </a:solidFill>
-          <a:ln>
-            <a:noFill/>
-          </a:ln>
-          <a:effectLst/>
-        </p:spPr>
-        <p:style>
-          <a:lnRef idx="1">
-            <a:schemeClr val="accent1"/>
-          </a:lnRef>
-          <a:fillRef idx="3">
-            <a:schemeClr val="accent1"/>
-          </a:fillRef>
-          <a:effectRef idx="2">
-            <a:schemeClr val="accent1"/>
-          </a:effectRef>
-          <a:fontRef idx="minor">
-            <a:schemeClr val="lt1"/>
-          </a:fontRef>
-        </p:style>
-        <p:txBody>
-          <a:bodyPr rtlCol="0" anchor="ctr" wrap="square" lIns="73152" rIns="73152"/>
-          <a:lstStyle/>
-          <a:p>
-            <a:pPr algn="ctr"/>
-            <a:r>
-              <a:rPr sz="1300" b="1">
-                <a:solidFill>
-                  <a:srgbClr val="DEE2E6"/>
-                </a:solidFill>
-              </a:rPr>
-              <a:t>GoblinType</a:t>
-            </a:r>
-          </a:p>
-          <a:p>
-            <a:pPr algn="ctr"/>
-            <a:r>
-              <a:rPr sz="1100" b="0">
-                <a:solidFill>
-                  <a:srgbClr val="9AA3AB"/>
-                </a:solidFill>
-              </a:rPr>
-              <a:t>named by the spawns</a:t>
-            </a:r>
-          </a:p>
-        </p:txBody>
-      </p:sp>
-      <p:cxnSp>
-        <p:nvCxnSpPr>
-          <p:cNvPr id="19" name="Connector 18"/>
-          <p:cNvCxnSpPr/>
-          <p:nvPr/>
-        </p:nvCxnSpPr>
-        <p:spPr>
-          <a:xfrm>
-            <a:off x="7760970" y="2831592"/>
-            <a:ext cx="0" cy="161544"/>
-          </a:xfrm>
-          <a:prstGeom prst="line">
-            <a:avLst/>
-          </a:prstGeom>
-          <a:ln w="25400">
-            <a:solidFill>
-              <a:srgbClr val="9AA3AB"/>
-            </a:solidFill>
-            <a:tailEnd type="triangle"/>
-          </a:ln>
-        </p:spPr>
-        <p:style>
-          <a:lnRef idx="2">
-            <a:schemeClr val="accent1"/>
-          </a:lnRef>
-          <a:fillRef idx="0">
-            <a:schemeClr val="accent1"/>
-          </a:fillRef>
-          <a:effectRef idx="1">
-            <a:schemeClr val="accent1"/>
-          </a:effectRef>
-          <a:fontRef idx="minor">
-            <a:schemeClr val="tx1"/>
-          </a:fontRef>
-        </p:style>
-      </p:cxnSp>
-      <p:cxnSp>
-        <p:nvCxnSpPr>
-          <p:cNvPr id="20" name="Connector 19"/>
-          <p:cNvCxnSpPr/>
-          <p:nvPr/>
-        </p:nvCxnSpPr>
-        <p:spPr>
-          <a:xfrm>
-            <a:off x="4572000" y="2066544"/>
-            <a:ext cx="3188970" cy="161544"/>
-          </a:xfrm>
-          <a:prstGeom prst="line">
-            <a:avLst/>
-          </a:prstGeom>
-          <a:ln w="25400">
-            <a:solidFill>
-              <a:srgbClr val="9AA3AB"/>
-            </a:solidFill>
-            <a:tailEnd type="triangle"/>
-          </a:ln>
-        </p:spPr>
-        <p:style>
-          <a:lnRef idx="2">
-            <a:schemeClr val="accent1"/>
-          </a:lnRef>
-          <a:fillRef idx="0">
-            <a:schemeClr val="accent1"/>
-          </a:fillRef>
-          <a:effectRef idx="1">
-            <a:schemeClr val="accent1"/>
-          </a:effectRef>
-          <a:fontRef idx="minor">
-            <a:schemeClr val="tx1"/>
-          </a:fontRef>
-        </p:style>
-      </p:cxnSp>
-      <p:sp>
-        <p:nvSpPr>
-          <p:cNvPr id="21" name="TextBox 20"/>
-          <p:cNvSpPr txBox="1"/>
-          <p:nvPr/>
-        </p:nvSpPr>
-        <p:spPr>
-          <a:xfrm>
-            <a:off x="457200" y="4462272"/>
-            <a:ext cx="8229600" cy="365760"/>
+            <a:off x="457200" y="3182112"/>
+            <a:ext cx="8229600" cy="457200"/>
           </a:xfrm>
           <a:prstGeom prst="rect">
             <a:avLst/>
@@ -17897,12 +17543,12 @@
           <a:p>
             <a:pPr algn="ctr"/>
             <a:r>
-              <a:rPr sz="1300" b="0" i="0">
+              <a:rPr sz="1400" b="0" i="0">
                 <a:solidFill>
                   <a:srgbClr val="9AA3AB"/>
                 </a:solidFill>
               </a:rPr>
-              <a:t>DefenderType and GoblinType create the entities the world holds.</a:t>
+              <a:t>The answers, and more questions, are on the course site.</a:t>
             </a:r>
           </a:p>
         </p:txBody>
@@ -17916,28 +17562,43 @@
 </file>
 
 <file path=ppt/slides/slide37.xml><?xml version="1.0" encoding="utf-8"?>
-<p:sld xmlns:a="http://schemas.openxmlformats.org/drawingml/2006/main" xmlns:p="http://schemas.openxmlformats.org/presentationml/2006/main" xmlns:r="http://schemas.openxmlformats.org/officeDocument/2006/relationships">
+<p:sld xmlns:a="http://schemas.openxmlformats.org/drawingml/2006/main" xmlns:r="http://schemas.openxmlformats.org/officeDocument/2006/relationships" xmlns:mc="http://schemas.openxmlformats.org/markup-compatibility/2006" xmlns:mv="urn:schemas-microsoft-com:mac:vml" xmlns:p="http://schemas.openxmlformats.org/presentationml/2006/main" xmlns:c="http://schemas.openxmlformats.org/drawingml/2006/chart" xmlns:dgm="http://schemas.openxmlformats.org/drawingml/2006/diagram" xmlns:o="urn:schemas-microsoft-com:office:office" xmlns:v="urn:schemas-microsoft-com:vml" xmlns:pvml="urn:schemas-microsoft-com:office:powerpoint" xmlns:com="http://schemas.openxmlformats.org/drawingml/2006/compatibility" xmlns:p14="http://schemas.microsoft.com/office/powerpoint/2010/main" xmlns:p15="http://schemas.microsoft.com/office/powerpoint/2012/main" xmlns:ahyp="http://schemas.microsoft.com/office/drawing/2018/hyperlinkcolor">
   <p:cSld>
     <p:spTree>
       <p:nvGrpSpPr>
-        <p:cNvPr id="1" name=""/>
+        <p:cNvPr id="292" name="Shape 292"/>
         <p:cNvGrpSpPr/>
         <p:nvPr/>
       </p:nvGrpSpPr>
-      <p:grpSpPr/>
-      <p:sp>
-        <p:nvSpPr>
-          <p:cNvPr id="2" name="Title 1"/>
-          <p:cNvSpPr>
-            <a:spLocks noGrp="1"/>
-          </p:cNvSpPr>
+      <p:grpSpPr>
+        <a:xfrm>
+          <a:off x="0" y="0"/>
+          <a:ext cx="0" cy="0"/>
+          <a:chOff x="0" y="0"/>
+          <a:chExt cx="0" cy="0"/>
+        </a:xfrm>
+      </p:grpSpPr>
+      <p:sp>
+        <p:nvSpPr>
+          <p:cNvPr id="293" name="Google Shape;293;p45"/>
+          <p:cNvSpPr txBox="1"/>
           <p:nvPr>
             <p:ph type="title"/>
           </p:nvPr>
         </p:nvSpPr>
-        <p:spPr/>
+        <p:spPr>
+          <a:xfrm>
+            <a:off x="311700" y="195615"/>
+            <a:ext cx="8520600" cy="572700"/>
+          </a:xfrm>
+          <a:prstGeom prst="rect">
+            <a:avLst/>
+          </a:prstGeom>
+        </p:spPr>
         <p:txBody>
-          <a:bodyPr/>
+          <a:bodyPr anchorCtr="0" anchor="t" bIns="91425" lIns="91425" spcFirstLastPara="1" rIns="91425" wrap="square" tIns="91425">
+            <a:normAutofit fontScale="90000"/>
+          </a:bodyPr>
           <a:lstStyle/>
           <a:p>
             <a:pPr indent="0" lvl="0" marL="0" rtl="0" algn="l">
@@ -17950,31 +17611,42 @@
               <a:buNone/>
             </a:pPr>
             <a:r>
-              <a:rPr lang="en"/>
-              <a:t>Summary</a:t>
-            </a:r>
-            <a:endParaRPr/>
+              <a:rPr lang="en">
+                <a:solidFill>
+                  <a:schemeClr val="accent5"/>
+                </a:solidFill>
+              </a:rPr>
+              <a:t>Apply It to Your Project</a:t>
+            </a:r>
+            <a:endParaRPr>
+              <a:solidFill>
+                <a:schemeClr val="accent5"/>
+              </a:solidFill>
+            </a:endParaRPr>
           </a:p>
         </p:txBody>
       </p:sp>
       <p:sp>
         <p:nvSpPr>
-          <p:cNvPr id="3" name="Text Placeholder 2"/>
-          <p:cNvSpPr>
-            <a:spLocks noGrp="1"/>
-          </p:cNvSpPr>
+          <p:cNvPr id="294" name="Google Shape;294;p45"/>
+          <p:cNvSpPr txBox="1"/>
           <p:nvPr>
-            <p:ph type="body" idx="1"/>
+            <p:ph idx="1" type="body"/>
           </p:nvPr>
         </p:nvSpPr>
         <p:spPr>
           <a:xfrm>
             <a:off x="311700" y="885950"/>
-            <a:ext cx="8520600" cy="521208"/>
+            <a:ext cx="8520600" cy="4023300"/>
           </a:xfrm>
+          <a:prstGeom prst="rect">
+            <a:avLst/>
+          </a:prstGeom>
         </p:spPr>
         <p:txBody>
-          <a:bodyPr/>
+          <a:bodyPr anchorCtr="0" anchor="t" bIns="91425" lIns="91425" spcFirstLastPara="1" rIns="91425" wrap="square" tIns="91425">
+            <a:normAutofit/>
+          </a:bodyPr>
           <a:lstStyle/>
           <a:p>
             <a:pPr indent="-330200" lvl="0" marL="457200" rtl="0" algn="l">
@@ -17988,400 +17660,61 @@
               <a:buChar char="●"/>
             </a:pPr>
             <a:r>
-              <a:rPr lang="en" b="1"/>
-              <a:t>Six concerns, and this session’s answer to each.</a:t>
+              <a:rPr lang="en"/>
+              <a:t>Where do subclasses exist only to combine abilities?</a:t>
             </a:r>
             <a:endParaRPr/>
           </a:p>
-        </p:txBody>
-      </p:sp>
-      <p:sp>
-        <p:nvSpPr>
-          <p:cNvPr id="4" name="Rounded Rectangle 3"/>
-          <p:cNvSpPr/>
-          <p:nvPr/>
-        </p:nvSpPr>
-        <p:spPr>
-          <a:xfrm>
-            <a:off x="548640" y="1417320"/>
-            <a:ext cx="2560320" cy="914400"/>
-          </a:xfrm>
-          <a:prstGeom prst="roundRect">
-            <a:avLst>
-              <a:gd name="adj" fmla="val 12000"/>
-            </a:avLst>
-          </a:prstGeom>
-          <a:solidFill>
-            <a:srgbClr val="2E3338"/>
-          </a:solidFill>
-          <a:ln>
-            <a:noFill/>
-          </a:ln>
-          <a:effectLst/>
-        </p:spPr>
-        <p:style>
-          <a:lnRef idx="1">
-            <a:schemeClr val="accent1"/>
-          </a:lnRef>
-          <a:fillRef idx="3">
-            <a:schemeClr val="accent1"/>
-          </a:fillRef>
-          <a:effectRef idx="2">
-            <a:schemeClr val="accent1"/>
-          </a:effectRef>
-          <a:fontRef idx="minor">
-            <a:schemeClr val="lt1"/>
-          </a:fontRef>
-        </p:style>
-        <p:txBody>
-          <a:bodyPr rtlCol="0" anchor="ctr" wrap="square" lIns="73152" rIns="73152"/>
-          <a:lstStyle/>
-          <a:p>
-            <a:pPr algn="ctr"/>
-            <a:r>
-              <a:rPr sz="1500" b="1">
-                <a:solidFill>
-                  <a:srgbClr val="DEE2E6"/>
-                </a:solidFill>
-              </a:rPr>
-              <a:t>What the player clicked</a:t>
-            </a:r>
-          </a:p>
-          <a:p>
-            <a:pPr algn="ctr"/>
-            <a:r>
-              <a:rPr sz="1300" b="0">
-                <a:solidFill>
-                  <a:srgbClr val="9AA3AB"/>
-                </a:solidFill>
-              </a:rPr>
-              <a:t>Picking: window, game, cell</a:t>
-            </a:r>
-          </a:p>
-        </p:txBody>
-      </p:sp>
-      <p:sp>
-        <p:nvSpPr>
-          <p:cNvPr id="5" name="Rounded Rectangle 4"/>
-          <p:cNvSpPr/>
-          <p:nvPr/>
-        </p:nvSpPr>
-        <p:spPr>
-          <a:xfrm>
-            <a:off x="3291840" y="1417320"/>
-            <a:ext cx="2560320" cy="914400"/>
-          </a:xfrm>
-          <a:prstGeom prst="roundRect">
-            <a:avLst>
-              <a:gd name="adj" fmla="val 12000"/>
-            </a:avLst>
-          </a:prstGeom>
-          <a:solidFill>
-            <a:srgbClr val="2E3338"/>
-          </a:solidFill>
-          <a:ln>
-            <a:noFill/>
-          </a:ln>
-          <a:effectLst/>
-        </p:spPr>
-        <p:style>
-          <a:lnRef idx="1">
-            <a:schemeClr val="accent1"/>
-          </a:lnRef>
-          <a:fillRef idx="3">
-            <a:schemeClr val="accent1"/>
-          </a:fillRef>
-          <a:effectRef idx="2">
-            <a:schemeClr val="accent1"/>
-          </a:effectRef>
-          <a:fontRef idx="minor">
-            <a:schemeClr val="lt1"/>
-          </a:fontRef>
-        </p:style>
-        <p:txBody>
-          <a:bodyPr rtlCol="0" anchor="ctr" wrap="square" lIns="73152" rIns="73152"/>
-          <a:lstStyle/>
-          <a:p>
-            <a:pPr algn="ctr"/>
-            <a:r>
-              <a:rPr sz="1500" b="1">
-                <a:solidFill>
-                  <a:srgbClr val="DEE2E6"/>
-                </a:solidFill>
-              </a:rPr>
-              <a:t>What a thing can do</a:t>
-            </a:r>
-          </a:p>
-          <a:p>
-            <a:pPr algn="ctr"/>
-            <a:r>
-              <a:rPr sz="1300" b="0">
-                <a:solidFill>
-                  <a:srgbClr val="9AA3AB"/>
-                </a:solidFill>
-              </a:rPr>
-              <a:t>Components</a:t>
-            </a:r>
-          </a:p>
-        </p:txBody>
-      </p:sp>
-      <p:sp>
-        <p:nvSpPr>
-          <p:cNvPr id="6" name="Rounded Rectangle 5"/>
-          <p:cNvSpPr/>
-          <p:nvPr/>
-        </p:nvSpPr>
-        <p:spPr>
-          <a:xfrm>
-            <a:off x="6035040" y="1417320"/>
-            <a:ext cx="2560320" cy="914400"/>
-          </a:xfrm>
-          <a:prstGeom prst="roundRect">
-            <a:avLst>
-              <a:gd name="adj" fmla="val 12000"/>
-            </a:avLst>
-          </a:prstGeom>
-          <a:solidFill>
-            <a:srgbClr val="2E3338"/>
-          </a:solidFill>
-          <a:ln>
-            <a:noFill/>
-          </a:ln>
-          <a:effectLst/>
-        </p:spPr>
-        <p:style>
-          <a:lnRef idx="1">
-            <a:schemeClr val="accent1"/>
-          </a:lnRef>
-          <a:fillRef idx="3">
-            <a:schemeClr val="accent1"/>
-          </a:fillRef>
-          <a:effectRef idx="2">
-            <a:schemeClr val="accent1"/>
-          </a:effectRef>
-          <a:fontRef idx="minor">
-            <a:schemeClr val="lt1"/>
-          </a:fontRef>
-        </p:style>
-        <p:txBody>
-          <a:bodyPr rtlCol="0" anchor="ctr" wrap="square" lIns="73152" rIns="73152"/>
-          <a:lstStyle/>
-          <a:p>
-            <a:pPr algn="ctr"/>
-            <a:r>
-              <a:rPr sz="1500" b="1">
-                <a:solidFill>
-                  <a:srgbClr val="DEE2E6"/>
-                </a:solidFill>
-              </a:rPr>
-              <a:t>How parts work together</a:t>
-            </a:r>
-          </a:p>
-          <a:p>
-            <a:pPr algn="ctr"/>
-            <a:r>
-              <a:rPr sz="1300" b="0">
-                <a:solidFill>
-                  <a:srgbClr val="9AA3AB"/>
-                </a:solidFill>
-              </a:rPr>
-              <a:t>Through the owner, and the world</a:t>
-            </a:r>
-          </a:p>
-        </p:txBody>
-      </p:sp>
-      <p:sp>
-        <p:nvSpPr>
-          <p:cNvPr id="7" name="Rounded Rectangle 6"/>
-          <p:cNvSpPr/>
-          <p:nvPr/>
-        </p:nvSpPr>
-        <p:spPr>
-          <a:xfrm>
-            <a:off x="548640" y="2468880"/>
-            <a:ext cx="2560320" cy="914400"/>
-          </a:xfrm>
-          <a:prstGeom prst="roundRect">
-            <a:avLst>
-              <a:gd name="adj" fmla="val 12000"/>
-            </a:avLst>
-          </a:prstGeom>
-          <a:solidFill>
-            <a:srgbClr val="2E3338"/>
-          </a:solidFill>
-          <a:ln>
-            <a:noFill/>
-          </a:ln>
-          <a:effectLst/>
-        </p:spPr>
-        <p:style>
-          <a:lnRef idx="1">
-            <a:schemeClr val="accent1"/>
-          </a:lnRef>
-          <a:fillRef idx="3">
-            <a:schemeClr val="accent1"/>
-          </a:fillRef>
-          <a:effectRef idx="2">
-            <a:schemeClr val="accent1"/>
-          </a:effectRef>
-          <a:fontRef idx="minor">
-            <a:schemeClr val="lt1"/>
-          </a:fontRef>
-        </p:style>
-        <p:txBody>
-          <a:bodyPr rtlCol="0" anchor="ctr" wrap="square" lIns="73152" rIns="73152"/>
-          <a:lstStyle/>
-          <a:p>
-            <a:pPr algn="ctr"/>
-            <a:r>
-              <a:rPr sz="1500" b="1">
-                <a:solidFill>
-                  <a:srgbClr val="DEE2E6"/>
-                </a:solidFill>
-              </a:rPr>
-              <a:t>What a kind of thing shares</a:t>
-            </a:r>
-          </a:p>
-          <a:p>
-            <a:pPr algn="ctr"/>
-            <a:r>
-              <a:rPr sz="1300" b="0">
-                <a:solidFill>
-                  <a:srgbClr val="9AA3AB"/>
-                </a:solidFill>
-              </a:rPr>
-              <a:t>Type Object, from JSON</a:t>
-            </a:r>
-          </a:p>
-        </p:txBody>
-      </p:sp>
-      <p:sp>
-        <p:nvSpPr>
-          <p:cNvPr id="8" name="Rounded Rectangle 7"/>
-          <p:cNvSpPr/>
-          <p:nvPr/>
-        </p:nvSpPr>
-        <p:spPr>
-          <a:xfrm>
-            <a:off x="3291840" y="2468880"/>
-            <a:ext cx="2560320" cy="914400"/>
-          </a:xfrm>
-          <a:prstGeom prst="roundRect">
-            <a:avLst>
-              <a:gd name="adj" fmla="val 12000"/>
-            </a:avLst>
-          </a:prstGeom>
-          <a:solidFill>
-            <a:srgbClr val="2E3338"/>
-          </a:solidFill>
-          <a:ln>
-            <a:noFill/>
-          </a:ln>
-          <a:effectLst/>
-        </p:spPr>
-        <p:style>
-          <a:lnRef idx="1">
-            <a:schemeClr val="accent1"/>
-          </a:lnRef>
-          <a:fillRef idx="3">
-            <a:schemeClr val="accent1"/>
-          </a:fillRef>
-          <a:effectRef idx="2">
-            <a:schemeClr val="accent1"/>
-          </a:effectRef>
-          <a:fontRef idx="minor">
-            <a:schemeClr val="lt1"/>
-          </a:fontRef>
-        </p:style>
-        <p:txBody>
-          <a:bodyPr rtlCol="0" anchor="ctr" wrap="square" lIns="73152" rIns="73152"/>
-          <a:lstStyle/>
-          <a:p>
-            <a:pPr algn="ctr"/>
-            <a:r>
-              <a:rPr sz="1500" b="1">
-                <a:solidFill>
-                  <a:srgbClr val="DEE2E6"/>
-                </a:solidFill>
-              </a:rPr>
-              <a:t>A new kind of thing</a:t>
-            </a:r>
-          </a:p>
-          <a:p>
-            <a:pPr algn="ctr"/>
-            <a:r>
-              <a:rPr sz="1300" b="0">
-                <a:solidFill>
-                  <a:srgbClr val="9AA3AB"/>
-                </a:solidFill>
-              </a:rPr>
-              <a:t>Data, plus a component if needed</a:t>
-            </a:r>
-          </a:p>
-        </p:txBody>
-      </p:sp>
-      <p:sp>
-        <p:nvSpPr>
-          <p:cNvPr id="9" name="Rounded Rectangle 8"/>
-          <p:cNvSpPr/>
-          <p:nvPr/>
-        </p:nvSpPr>
-        <p:spPr>
-          <a:xfrm>
-            <a:off x="6035040" y="2468880"/>
-            <a:ext cx="2560320" cy="914400"/>
-          </a:xfrm>
-          <a:prstGeom prst="roundRect">
-            <a:avLst>
-              <a:gd name="adj" fmla="val 12000"/>
-            </a:avLst>
-          </a:prstGeom>
-          <a:solidFill>
-            <a:srgbClr val="2E3338"/>
-          </a:solidFill>
-          <a:ln>
-            <a:noFill/>
-          </a:ln>
-          <a:effectLst/>
-        </p:spPr>
-        <p:style>
-          <a:lnRef idx="1">
-            <a:schemeClr val="accent1"/>
-          </a:lnRef>
-          <a:fillRef idx="3">
-            <a:schemeClr val="accent1"/>
-          </a:fillRef>
-          <a:effectRef idx="2">
-            <a:schemeClr val="accent1"/>
-          </a:effectRef>
-          <a:fontRef idx="minor">
-            <a:schemeClr val="lt1"/>
-          </a:fontRef>
-        </p:style>
-        <p:txBody>
-          <a:bodyPr rtlCol="0" anchor="ctr" wrap="square" lIns="73152" rIns="73152"/>
-          <a:lstStyle/>
-          <a:p>
-            <a:pPr algn="ctr"/>
-            <a:r>
-              <a:rPr sz="1500" b="1">
-                <a:solidFill>
-                  <a:srgbClr val="DEE2E6"/>
-                </a:solidFill>
-              </a:rPr>
-              <a:t>Checking one ability</a:t>
-            </a:r>
-          </a:p>
-          <a:p>
-            <a:pPr algn="ctr"/>
-            <a:r>
-              <a:rPr sz="1300" b="0">
-                <a:solidFill>
-                  <a:srgbClr val="9AA3AB"/>
-                </a:solidFill>
-              </a:rPr>
-              <a:t>A test with only its parts</a:t>
-            </a:r>
+          <a:p>
+            <a:pPr indent="-330200" lvl="0" marL="457200" rtl="0" algn="l">
+              <a:spcBef>
+                <a:spcPts val="0"/>
+              </a:spcBef>
+              <a:spcAft>
+                <a:spcPts val="0"/>
+              </a:spcAft>
+              <a:buSzPts val="1600"/>
+              <a:buChar char="●"/>
+            </a:pPr>
+            <a:r>
+              <a:rPr lang="en"/>
+              <a:t>Which abilities could become components?</a:t>
+            </a:r>
+            <a:endParaRPr/>
+          </a:p>
+          <a:p>
+            <a:pPr indent="-330200" lvl="0" marL="457200" rtl="0" algn="l">
+              <a:spcBef>
+                <a:spcPts val="0"/>
+              </a:spcBef>
+              <a:spcAft>
+                <a:spcPts val="0"/>
+              </a:spcAft>
+              <a:buSzPts val="1600"/>
+              <a:buChar char="●"/>
+            </a:pPr>
+            <a:r>
+              <a:rPr lang="en"/>
+              <a:t>Which data belongs to a kind of thing? Could it be a data file?</a:t>
+            </a:r>
+            <a:endParaRPr/>
+          </a:p>
+          <a:p>
+            <a:pPr indent="-330200" lvl="0" marL="457200" rtl="0" algn="l">
+              <a:spcBef>
+                <a:spcPts val="0"/>
+              </a:spcBef>
+              <a:spcAft>
+                <a:spcPts val="0"/>
+              </a:spcAft>
+              <a:buSzPts val="1600"/>
+              <a:buChar char="●"/>
+            </a:pPr>
+            <a:r>
+              <a:rPr lang="en"/>
+              <a:t>How does your game find out what was clicked?</a:t>
+            </a:r>
+            <a:endParaRPr/>
           </a:p>
         </p:txBody>
       </p:sp>
@@ -18390,6 +17723,673 @@
   <p:clrMapOvr>
     <a:masterClrMapping/>
   </p:clrMapOvr>
+  <p:timing>
+    <p:tnLst>
+      <p:par>
+        <p:cTn dur="indefinite" nodeType="tmRoot" restart="never">
+          <p:childTnLst>
+            <p:seq concurrent="1" nextAc="seek">
+              <p:cTn dur="indefinite" id="2" nodeType="mainSeq">
+                <p:childTnLst>
+                  <p:par>
+                    <p:cTn fill="hold">
+                      <p:stCondLst>
+                        <p:cond delay="indefinite"/>
+                      </p:stCondLst>
+                      <p:childTnLst>
+                        <p:par>
+                          <p:cTn fill="hold">
+                            <p:stCondLst>
+                              <p:cond delay="0"/>
+                            </p:stCondLst>
+                            <p:childTnLst>
+                              <p:par>
+                                <p:cTn fill="hold" nodeType="clickEffect" presetClass="entr" presetID="1" presetSubtype="0">
+                                  <p:stCondLst>
+                                    <p:cond delay="0"/>
+                                  </p:stCondLst>
+                                  <p:childTnLst>
+                                    <p:set>
+                                      <p:cBhvr>
+                                        <p:cTn dur="1" fill="hold">
+                                          <p:stCondLst>
+                                            <p:cond delay="0"/>
+                                          </p:stCondLst>
+                                        </p:cTn>
+                                        <p:tgtEl>
+                                          <p:spTgt spid="294">
+                                            <p:txEl>
+                                              <p:pRg end="0" st="0"/>
+                                            </p:txEl>
+                                          </p:spTgt>
+                                        </p:tgtEl>
+                                        <p:attrNameLst>
+                                          <p:attrName>style.visibility</p:attrName>
+                                        </p:attrNameLst>
+                                      </p:cBhvr>
+                                      <p:to>
+                                        <p:strVal val="visible"/>
+                                      </p:to>
+                                    </p:set>
+                                  </p:childTnLst>
+                                </p:cTn>
+                              </p:par>
+                            </p:childTnLst>
+                          </p:cTn>
+                        </p:par>
+                      </p:childTnLst>
+                    </p:cTn>
+                  </p:par>
+                  <p:par>
+                    <p:cTn fill="hold">
+                      <p:stCondLst>
+                        <p:cond delay="indefinite"/>
+                      </p:stCondLst>
+                      <p:childTnLst>
+                        <p:par>
+                          <p:cTn fill="hold">
+                            <p:stCondLst>
+                              <p:cond delay="0"/>
+                            </p:stCondLst>
+                            <p:childTnLst>
+                              <p:par>
+                                <p:cTn fill="hold" nodeType="clickEffect" presetClass="entr" presetID="1" presetSubtype="0">
+                                  <p:stCondLst>
+                                    <p:cond delay="0"/>
+                                  </p:stCondLst>
+                                  <p:childTnLst>
+                                    <p:set>
+                                      <p:cBhvr>
+                                        <p:cTn dur="1" fill="hold">
+                                          <p:stCondLst>
+                                            <p:cond delay="0"/>
+                                          </p:stCondLst>
+                                        </p:cTn>
+                                        <p:tgtEl>
+                                          <p:spTgt spid="294">
+                                            <p:txEl>
+                                              <p:pRg end="1" st="1"/>
+                                            </p:txEl>
+                                          </p:spTgt>
+                                        </p:tgtEl>
+                                        <p:attrNameLst>
+                                          <p:attrName>style.visibility</p:attrName>
+                                        </p:attrNameLst>
+                                      </p:cBhvr>
+                                      <p:to>
+                                        <p:strVal val="visible"/>
+                                      </p:to>
+                                    </p:set>
+                                  </p:childTnLst>
+                                </p:cTn>
+                              </p:par>
+                            </p:childTnLst>
+                          </p:cTn>
+                        </p:par>
+                      </p:childTnLst>
+                    </p:cTn>
+                  </p:par>
+                  <p:par>
+                    <p:cTn fill="hold">
+                      <p:stCondLst>
+                        <p:cond delay="indefinite"/>
+                      </p:stCondLst>
+                      <p:childTnLst>
+                        <p:par>
+                          <p:cTn fill="hold">
+                            <p:stCondLst>
+                              <p:cond delay="0"/>
+                            </p:stCondLst>
+                            <p:childTnLst>
+                              <p:par>
+                                <p:cTn fill="hold" nodeType="clickEffect" presetClass="entr" presetID="1" presetSubtype="0">
+                                  <p:stCondLst>
+                                    <p:cond delay="0"/>
+                                  </p:stCondLst>
+                                  <p:childTnLst>
+                                    <p:set>
+                                      <p:cBhvr>
+                                        <p:cTn dur="1" fill="hold">
+                                          <p:stCondLst>
+                                            <p:cond delay="0"/>
+                                          </p:stCondLst>
+                                        </p:cTn>
+                                        <p:tgtEl>
+                                          <p:spTgt spid="294">
+                                            <p:txEl>
+                                              <p:pRg end="2" st="2"/>
+                                            </p:txEl>
+                                          </p:spTgt>
+                                        </p:tgtEl>
+                                        <p:attrNameLst>
+                                          <p:attrName>style.visibility</p:attrName>
+                                        </p:attrNameLst>
+                                      </p:cBhvr>
+                                      <p:to>
+                                        <p:strVal val="visible"/>
+                                      </p:to>
+                                    </p:set>
+                                  </p:childTnLst>
+                                </p:cTn>
+                              </p:par>
+                            </p:childTnLst>
+                          </p:cTn>
+                        </p:par>
+                      </p:childTnLst>
+                    </p:cTn>
+                  </p:par>
+                  <p:par>
+                    <p:cTn fill="hold">
+                      <p:stCondLst>
+                        <p:cond delay="indefinite"/>
+                      </p:stCondLst>
+                      <p:childTnLst>
+                        <p:par>
+                          <p:cTn fill="hold">
+                            <p:stCondLst>
+                              <p:cond delay="0"/>
+                            </p:stCondLst>
+                            <p:childTnLst>
+                              <p:par>
+                                <p:cTn fill="hold" nodeType="clickEffect" presetClass="entr" presetID="1" presetSubtype="0">
+                                  <p:stCondLst>
+                                    <p:cond delay="0"/>
+                                  </p:stCondLst>
+                                  <p:childTnLst>
+                                    <p:set>
+                                      <p:cBhvr>
+                                        <p:cTn dur="1" fill="hold">
+                                          <p:stCondLst>
+                                            <p:cond delay="0"/>
+                                          </p:stCondLst>
+                                        </p:cTn>
+                                        <p:tgtEl>
+                                          <p:spTgt spid="294">
+                                            <p:txEl>
+                                              <p:pRg end="3" st="3"/>
+                                            </p:txEl>
+                                          </p:spTgt>
+                                        </p:tgtEl>
+                                        <p:attrNameLst>
+                                          <p:attrName>style.visibility</p:attrName>
+                                        </p:attrNameLst>
+                                      </p:cBhvr>
+                                      <p:to>
+                                        <p:strVal val="visible"/>
+                                      </p:to>
+                                    </p:set>
+                                  </p:childTnLst>
+                                </p:cTn>
+                              </p:par>
+                            </p:childTnLst>
+                          </p:cTn>
+                        </p:par>
+                      </p:childTnLst>
+                    </p:cTn>
+                  </p:par>
+                  <p:par>
+                    <p:cTn fill="hold">
+                      <p:stCondLst>
+                        <p:cond delay="indefinite"/>
+                      </p:stCondLst>
+                      <p:childTnLst>
+                        <p:par>
+                          <p:cTn fill="hold">
+                            <p:stCondLst>
+                              <p:cond delay="0"/>
+                            </p:stCondLst>
+                            <p:childTnLst>
+                              <p:par>
+                                <p:cTn fill="hold" nodeType="clickEffect" presetClass="entr" presetID="1" presetSubtype="0">
+                                  <p:stCondLst>
+                                    <p:cond delay="0"/>
+                                  </p:stCondLst>
+                                  <p:childTnLst>
+                                    <p:set>
+                                      <p:cBhvr>
+                                        <p:cTn dur="1" fill="hold">
+                                          <p:stCondLst>
+                                            <p:cond delay="0"/>
+                                          </p:stCondLst>
+                                        </p:cTn>
+                                        <p:tgtEl>
+                                          <p:spTgt spid="294">
+                                            <p:txEl>
+                                              <p:pRg end="4" st="4"/>
+                                            </p:txEl>
+                                          </p:spTgt>
+                                        </p:tgtEl>
+                                        <p:attrNameLst>
+                                          <p:attrName>style.visibility</p:attrName>
+                                        </p:attrNameLst>
+                                      </p:cBhvr>
+                                      <p:to>
+                                        <p:strVal val="visible"/>
+                                      </p:to>
+                                    </p:set>
+                                  </p:childTnLst>
+                                </p:cTn>
+                              </p:par>
+                            </p:childTnLst>
+                          </p:cTn>
+                        </p:par>
+                      </p:childTnLst>
+                    </p:cTn>
+                  </p:par>
+                  <p:par>
+                    <p:cTn fill="hold">
+                      <p:stCondLst>
+                        <p:cond delay="indefinite"/>
+                      </p:stCondLst>
+                      <p:childTnLst>
+                        <p:par>
+                          <p:cTn fill="hold">
+                            <p:stCondLst>
+                              <p:cond delay="0"/>
+                            </p:stCondLst>
+                            <p:childTnLst>
+                              <p:par>
+                                <p:cTn fill="hold" nodeType="clickEffect" presetClass="entr" presetID="1" presetSubtype="0">
+                                  <p:stCondLst>
+                                    <p:cond delay="0"/>
+                                  </p:stCondLst>
+                                  <p:childTnLst>
+                                    <p:set>
+                                      <p:cBhvr>
+                                        <p:cTn dur="1" fill="hold">
+                                          <p:stCondLst>
+                                            <p:cond delay="0"/>
+                                          </p:stCondLst>
+                                        </p:cTn>
+                                        <p:tgtEl>
+                                          <p:spTgt spid="294">
+                                            <p:txEl>
+                                              <p:pRg end="5" st="5"/>
+                                            </p:txEl>
+                                          </p:spTgt>
+                                        </p:tgtEl>
+                                        <p:attrNameLst>
+                                          <p:attrName>style.visibility</p:attrName>
+                                        </p:attrNameLst>
+                                      </p:cBhvr>
+                                      <p:to>
+                                        <p:strVal val="visible"/>
+                                      </p:to>
+                                    </p:set>
+                                  </p:childTnLst>
+                                </p:cTn>
+                              </p:par>
+                            </p:childTnLst>
+                          </p:cTn>
+                        </p:par>
+                      </p:childTnLst>
+                    </p:cTn>
+                  </p:par>
+                  <p:par>
+                    <p:cTn fill="hold">
+                      <p:stCondLst>
+                        <p:cond delay="indefinite"/>
+                      </p:stCondLst>
+                      <p:childTnLst>
+                        <p:par>
+                          <p:cTn fill="hold">
+                            <p:stCondLst>
+                              <p:cond delay="0"/>
+                            </p:stCondLst>
+                            <p:childTnLst>
+                              <p:par>
+                                <p:cTn fill="hold" nodeType="clickEffect" presetClass="entr" presetID="1" presetSubtype="0">
+                                  <p:stCondLst>
+                                    <p:cond delay="0"/>
+                                  </p:stCondLst>
+                                  <p:childTnLst>
+                                    <p:set>
+                                      <p:cBhvr>
+                                        <p:cTn dur="1" fill="hold">
+                                          <p:stCondLst>
+                                            <p:cond delay="0"/>
+                                          </p:stCondLst>
+                                        </p:cTn>
+                                        <p:tgtEl>
+                                          <p:spTgt spid="294">
+                                            <p:txEl>
+                                              <p:pRg end="6" st="6"/>
+                                            </p:txEl>
+                                          </p:spTgt>
+                                        </p:tgtEl>
+                                        <p:attrNameLst>
+                                          <p:attrName>style.visibility</p:attrName>
+                                        </p:attrNameLst>
+                                      </p:cBhvr>
+                                      <p:to>
+                                        <p:strVal val="visible"/>
+                                      </p:to>
+                                    </p:set>
+                                  </p:childTnLst>
+                                </p:cTn>
+                              </p:par>
+                            </p:childTnLst>
+                          </p:cTn>
+                        </p:par>
+                      </p:childTnLst>
+                    </p:cTn>
+                  </p:par>
+                  <p:par>
+                    <p:cTn fill="hold">
+                      <p:stCondLst>
+                        <p:cond delay="indefinite"/>
+                      </p:stCondLst>
+                      <p:childTnLst>
+                        <p:par>
+                          <p:cTn fill="hold">
+                            <p:stCondLst>
+                              <p:cond delay="0"/>
+                            </p:stCondLst>
+                            <p:childTnLst>
+                              <p:par>
+                                <p:cTn fill="hold" nodeType="clickEffect" presetClass="entr" presetID="1" presetSubtype="0">
+                                  <p:stCondLst>
+                                    <p:cond delay="0"/>
+                                  </p:stCondLst>
+                                  <p:childTnLst>
+                                    <p:set>
+                                      <p:cBhvr>
+                                        <p:cTn dur="1" fill="hold">
+                                          <p:stCondLst>
+                                            <p:cond delay="0"/>
+                                          </p:stCondLst>
+                                        </p:cTn>
+                                        <p:tgtEl>
+                                          <p:spTgt spid="294">
+                                            <p:txEl>
+                                              <p:pRg end="7" st="7"/>
+                                            </p:txEl>
+                                          </p:spTgt>
+                                        </p:tgtEl>
+                                        <p:attrNameLst>
+                                          <p:attrName>style.visibility</p:attrName>
+                                        </p:attrNameLst>
+                                      </p:cBhvr>
+                                      <p:to>
+                                        <p:strVal val="visible"/>
+                                      </p:to>
+                                    </p:set>
+                                  </p:childTnLst>
+                                </p:cTn>
+                              </p:par>
+                            </p:childTnLst>
+                          </p:cTn>
+                        </p:par>
+                      </p:childTnLst>
+                    </p:cTn>
+                  </p:par>
+                  <p:par>
+                    <p:cTn fill="hold">
+                      <p:stCondLst>
+                        <p:cond delay="indefinite"/>
+                      </p:stCondLst>
+                      <p:childTnLst>
+                        <p:par>
+                          <p:cTn fill="hold">
+                            <p:stCondLst>
+                              <p:cond delay="0"/>
+                            </p:stCondLst>
+                            <p:childTnLst>
+                              <p:par>
+                                <p:cTn fill="hold" nodeType="clickEffect" presetClass="entr" presetID="1" presetSubtype="0">
+                                  <p:stCondLst>
+                                    <p:cond delay="0"/>
+                                  </p:stCondLst>
+                                  <p:childTnLst>
+                                    <p:set>
+                                      <p:cBhvr>
+                                        <p:cTn dur="1" fill="hold">
+                                          <p:stCondLst>
+                                            <p:cond delay="0"/>
+                                          </p:stCondLst>
+                                        </p:cTn>
+                                        <p:tgtEl>
+                                          <p:spTgt spid="294">
+                                            <p:txEl>
+                                              <p:pRg end="8" st="8"/>
+                                            </p:txEl>
+                                          </p:spTgt>
+                                        </p:tgtEl>
+                                        <p:attrNameLst>
+                                          <p:attrName>style.visibility</p:attrName>
+                                        </p:attrNameLst>
+                                      </p:cBhvr>
+                                      <p:to>
+                                        <p:strVal val="visible"/>
+                                      </p:to>
+                                    </p:set>
+                                  </p:childTnLst>
+                                </p:cTn>
+                              </p:par>
+                            </p:childTnLst>
+                          </p:cTn>
+                        </p:par>
+                      </p:childTnLst>
+                    </p:cTn>
+                  </p:par>
+                  <p:par>
+                    <p:cTn fill="hold">
+                      <p:stCondLst>
+                        <p:cond delay="indefinite"/>
+                      </p:stCondLst>
+                      <p:childTnLst>
+                        <p:par>
+                          <p:cTn fill="hold">
+                            <p:stCondLst>
+                              <p:cond delay="0"/>
+                            </p:stCondLst>
+                            <p:childTnLst>
+                              <p:par>
+                                <p:cTn fill="hold" nodeType="clickEffect" presetClass="entr" presetID="1" presetSubtype="0">
+                                  <p:stCondLst>
+                                    <p:cond delay="0"/>
+                                  </p:stCondLst>
+                                  <p:childTnLst>
+                                    <p:set>
+                                      <p:cBhvr>
+                                        <p:cTn dur="1" fill="hold">
+                                          <p:stCondLst>
+                                            <p:cond delay="0"/>
+                                          </p:stCondLst>
+                                        </p:cTn>
+                                        <p:tgtEl>
+                                          <p:spTgt spid="294">
+                                            <p:txEl>
+                                              <p:pRg end="9" st="9"/>
+                                            </p:txEl>
+                                          </p:spTgt>
+                                        </p:tgtEl>
+                                        <p:attrNameLst>
+                                          <p:attrName>style.visibility</p:attrName>
+                                        </p:attrNameLst>
+                                      </p:cBhvr>
+                                      <p:to>
+                                        <p:strVal val="visible"/>
+                                      </p:to>
+                                    </p:set>
+                                  </p:childTnLst>
+                                </p:cTn>
+                              </p:par>
+                            </p:childTnLst>
+                          </p:cTn>
+                        </p:par>
+                      </p:childTnLst>
+                    </p:cTn>
+                  </p:par>
+                  <p:par>
+                    <p:cTn fill="hold">
+                      <p:stCondLst>
+                        <p:cond delay="indefinite"/>
+                      </p:stCondLst>
+                      <p:childTnLst>
+                        <p:par>
+                          <p:cTn fill="hold">
+                            <p:stCondLst>
+                              <p:cond delay="0"/>
+                            </p:stCondLst>
+                            <p:childTnLst>
+                              <p:par>
+                                <p:cTn fill="hold" nodeType="clickEffect" presetClass="entr" presetID="1" presetSubtype="0">
+                                  <p:stCondLst>
+                                    <p:cond delay="0"/>
+                                  </p:stCondLst>
+                                  <p:childTnLst>
+                                    <p:set>
+                                      <p:cBhvr>
+                                        <p:cTn dur="1" fill="hold">
+                                          <p:stCondLst>
+                                            <p:cond delay="0"/>
+                                          </p:stCondLst>
+                                        </p:cTn>
+                                        <p:tgtEl>
+                                          <p:spTgt spid="294">
+                                            <p:txEl>
+                                              <p:pRg end="10" st="10"/>
+                                            </p:txEl>
+                                          </p:spTgt>
+                                        </p:tgtEl>
+                                        <p:attrNameLst>
+                                          <p:attrName>style.visibility</p:attrName>
+                                        </p:attrNameLst>
+                                      </p:cBhvr>
+                                      <p:to>
+                                        <p:strVal val="visible"/>
+                                      </p:to>
+                                    </p:set>
+                                  </p:childTnLst>
+                                </p:cTn>
+                              </p:par>
+                            </p:childTnLst>
+                          </p:cTn>
+                        </p:par>
+                      </p:childTnLst>
+                    </p:cTn>
+                  </p:par>
+                  <p:par>
+                    <p:cTn fill="hold">
+                      <p:stCondLst>
+                        <p:cond delay="indefinite"/>
+                      </p:stCondLst>
+                      <p:childTnLst>
+                        <p:par>
+                          <p:cTn fill="hold">
+                            <p:stCondLst>
+                              <p:cond delay="0"/>
+                            </p:stCondLst>
+                            <p:childTnLst>
+                              <p:par>
+                                <p:cTn fill="hold" nodeType="clickEffect" presetClass="entr" presetID="1" presetSubtype="0">
+                                  <p:stCondLst>
+                                    <p:cond delay="0"/>
+                                  </p:stCondLst>
+                                  <p:childTnLst>
+                                    <p:set>
+                                      <p:cBhvr>
+                                        <p:cTn dur="1" fill="hold">
+                                          <p:stCondLst>
+                                            <p:cond delay="0"/>
+                                          </p:stCondLst>
+                                        </p:cTn>
+                                        <p:tgtEl>
+                                          <p:spTgt spid="294">
+                                            <p:txEl>
+                                              <p:pRg end="11" st="11"/>
+                                            </p:txEl>
+                                          </p:spTgt>
+                                        </p:tgtEl>
+                                        <p:attrNameLst>
+                                          <p:attrName>style.visibility</p:attrName>
+                                        </p:attrNameLst>
+                                      </p:cBhvr>
+                                      <p:to>
+                                        <p:strVal val="visible"/>
+                                      </p:to>
+                                    </p:set>
+                                  </p:childTnLst>
+                                </p:cTn>
+                              </p:par>
+                            </p:childTnLst>
+                          </p:cTn>
+                        </p:par>
+                      </p:childTnLst>
+                    </p:cTn>
+                  </p:par>
+                  <p:par>
+                    <p:cTn fill="hold">
+                      <p:stCondLst>
+                        <p:cond delay="indefinite"/>
+                      </p:stCondLst>
+                      <p:childTnLst>
+                        <p:par>
+                          <p:cTn fill="hold">
+                            <p:stCondLst>
+                              <p:cond delay="0"/>
+                            </p:stCondLst>
+                            <p:childTnLst>
+                              <p:par>
+                                <p:cTn fill="hold" nodeType="clickEffect" presetClass="entr" presetID="1" presetSubtype="0">
+                                  <p:stCondLst>
+                                    <p:cond delay="0"/>
+                                  </p:stCondLst>
+                                  <p:childTnLst>
+                                    <p:set>
+                                      <p:cBhvr>
+                                        <p:cTn dur="1" fill="hold">
+                                          <p:stCondLst>
+                                            <p:cond delay="0"/>
+                                          </p:stCondLst>
+                                        </p:cTn>
+                                        <p:tgtEl>
+                                          <p:spTgt spid="294">
+                                            <p:txEl>
+                                              <p:pRg end="12" st="12"/>
+                                            </p:txEl>
+                                          </p:spTgt>
+                                        </p:tgtEl>
+                                        <p:attrNameLst>
+                                          <p:attrName>style.visibility</p:attrName>
+                                        </p:attrNameLst>
+                                      </p:cBhvr>
+                                      <p:to>
+                                        <p:strVal val="visible"/>
+                                      </p:to>
+                                    </p:set>
+                                  </p:childTnLst>
+                                </p:cTn>
+                              </p:par>
+                            </p:childTnLst>
+                          </p:cTn>
+                        </p:par>
+                      </p:childTnLst>
+                    </p:cTn>
+                  </p:par>
+                </p:childTnLst>
+              </p:cTn>
+              <p:prevCondLst>
+                <p:cond evt="onPrev">
+                  <p:tgtEl>
+                    <p:sldTgt/>
+                  </p:tgtEl>
+                </p:cond>
+              </p:prevCondLst>
+              <p:nextCondLst>
+                <p:cond evt="onNext">
+                  <p:tgtEl>
+                    <p:sldTgt/>
+                  </p:tgtEl>
+                </p:cond>
+              </p:nextCondLst>
+            </p:seq>
+          </p:childTnLst>
+        </p:cTn>
+      </p:par>
+    </p:tnLst>
+  </p:timing>
 </p:sld>
 </file>
 
